--- a/Präsentation-Kolloqium.pptx
+++ b/Präsentation-Kolloqium.pptx
@@ -6,7 +6,7 @@
   </p:sldMasterIdLst>
   <p:sldIdLst>
     <p:sldId id="259" r:id="rId2"/>
-    <p:sldId id="257" r:id="rId3"/>
+    <p:sldId id="261" r:id="rId3"/>
   </p:sldIdLst>
   <p:sldSz cx="12192000" cy="6858000"/>
   <p:notesSz cx="6858000" cy="9144000"/>
@@ -3648,44 +3648,677 @@
             <p:ph type="title"/>
           </p:nvPr>
         </p:nvSpPr>
-        <p:spPr/>
-        <p:txBody>
-          <a:bodyPr/>
+        <p:spPr>
+          <a:xfrm>
+            <a:off x="1219200" y="812800"/>
+            <a:ext cx="10058400" cy="1016000"/>
+          </a:xfrm>
+        </p:spPr>
+        <p:txBody>
+          <a:bodyPr wrap="square" lIns="0" tIns="0" rIns="0" bIns="0" anchor="t">
+            <a:normAutofit/>
+          </a:bodyPr>
+          <a:lstStyle/>
+          <a:p>
+            <a:pPr algn="l">
+              <a:lnSpc>
+                <a:spcPct val="100000"/>
+              </a:lnSpc>
+            </a:pPr>
+            <a:r>
+              <a:rPr lang="de-DE" sz="2600" b="1" dirty="0">
+                <a:solidFill>
+                  <a:srgbClr val="262626"/>
+                </a:solidFill>
+              </a:rPr>
+              <a:t>Ein wissenschaftlicher Workflow verbindet mehrere Rechenschritte zu einem gemeinsamen Ablauf.</a:t>
+            </a:r>
+          </a:p>
+        </p:txBody>
+      </p:sp>
+      <p:sp>
+        <p:nvSpPr>
+          <p:cNvPr id="20" name="Shape 20"/>
+          <p:cNvSpPr/>
+          <p:nvPr/>
+        </p:nvSpPr>
+        <p:spPr>
+          <a:xfrm>
+            <a:off x="914400" y="812800"/>
+            <a:ext cx="50800" cy="787400"/>
+          </a:xfrm>
+          <a:prstGeom prst="rect">
+            <a:avLst/>
+          </a:prstGeom>
+          <a:solidFill>
+            <a:srgbClr val="C1002A"/>
+          </a:solidFill>
+          <a:ln>
+            <a:noFill/>
+          </a:ln>
+        </p:spPr>
+        <p:txBody>
+          <a:bodyPr wrap="square" lIns="0" tIns="0" rIns="0" bIns="0" anchor="ctr"/>
           <a:lstStyle/>
           <a:p>
             <a:endParaRPr lang="de-DE"/>
           </a:p>
         </p:txBody>
       </p:sp>
-      <p:sp>
-        <p:nvSpPr>
-          <p:cNvPr id="3" name="Inhaltsplatzhalter 2">
-            <a:extLst>
-              <a:ext uri="{FF2B5EF4-FFF2-40B4-BE49-F238E27FC236}">
-                <a16:creationId xmlns:a16="http://schemas.microsoft.com/office/drawing/2014/main" id="{77D64C22-7FA4-1D35-00BB-25FE2E60383A}"/>
-              </a:ext>
-            </a:extLst>
-          </p:cNvPr>
-          <p:cNvSpPr>
-            <a:spLocks noGrp="1"/>
-          </p:cNvSpPr>
-          <p:nvPr>
-            <p:ph idx="1"/>
-          </p:nvPr>
-        </p:nvSpPr>
-        <p:spPr/>
-        <p:txBody>
-          <a:bodyPr/>
+      <p:cxnSp>
+        <p:nvCxnSpPr>
+          <p:cNvPr id="21" name="Arrow 21"/>
+          <p:cNvCxnSpPr/>
+          <p:nvPr/>
+        </p:nvCxnSpPr>
+        <p:spPr>
+          <a:xfrm>
+            <a:off x="1219200" y="4089400"/>
+            <a:ext cx="812800" cy="0"/>
+          </a:xfrm>
+          <a:prstGeom prst="straightConnector1">
+            <a:avLst/>
+          </a:prstGeom>
+          <a:ln w="15875">
+            <a:solidFill>
+              <a:srgbClr val="262626"/>
+            </a:solidFill>
+            <a:tailEnd type="triangle" w="med" len="med"/>
+          </a:ln>
+        </p:spPr>
+      </p:cxnSp>
+      <p:sp>
+        <p:nvSpPr>
+          <p:cNvPr id="22" name="Label 22"/>
+          <p:cNvSpPr txBox="1"/>
+          <p:nvPr/>
+        </p:nvSpPr>
+        <p:spPr>
+          <a:xfrm>
+            <a:off x="1143000" y="3479800"/>
+            <a:ext cx="965200" cy="254000"/>
+          </a:xfrm>
+          <a:prstGeom prst="rect">
+            <a:avLst/>
+          </a:prstGeom>
+          <a:noFill/>
+        </p:spPr>
+        <p:txBody>
+          <a:bodyPr wrap="square" lIns="0" tIns="0" rIns="0" bIns="0" anchor="ctr"/>
+          <a:lstStyle/>
+          <a:p>
+            <a:pPr algn="ctr"/>
+            <a:r>
+              <a:rPr lang="de-DE" sz="1400" dirty="0">
+                <a:solidFill>
+                  <a:srgbClr val="595959"/>
+                </a:solidFill>
+              </a:rPr>
+              <a:t>Eingabe</a:t>
+            </a:r>
+          </a:p>
+        </p:txBody>
+      </p:sp>
+      <p:sp>
+        <p:nvSpPr>
+          <p:cNvPr id="23" name="Shape 23"/>
+          <p:cNvSpPr/>
+          <p:nvPr/>
+        </p:nvSpPr>
+        <p:spPr>
+          <a:xfrm>
+            <a:off x="2032000" y="3810000"/>
+            <a:ext cx="1524000" cy="558800"/>
+          </a:xfrm>
+          <a:prstGeom prst="rect">
+            <a:avLst/>
+          </a:prstGeom>
+          <a:solidFill>
+            <a:srgbClr val="FFFFFF"/>
+          </a:solidFill>
+          <a:ln w="19050">
+            <a:solidFill>
+              <a:srgbClr val="262626"/>
+            </a:solidFill>
+          </a:ln>
+        </p:spPr>
+        <p:txBody>
+          <a:bodyPr wrap="square" lIns="0" tIns="0" rIns="0" bIns="0" anchor="ctr"/>
+          <a:lstStyle/>
+          <a:p>
+            <a:pPr algn="ctr"/>
+            <a:r>
+              <a:rPr lang="de-DE" sz="1400" dirty="0">
+                <a:solidFill>
+                  <a:srgbClr val="262626"/>
+                </a:solidFill>
+              </a:rPr>
+              <a:t>Rechenschritt</a:t>
+            </a:r>
+          </a:p>
+        </p:txBody>
+      </p:sp>
+      <p:cxnSp>
+        <p:nvCxnSpPr>
+          <p:cNvPr id="24" name="Arrow 24"/>
+          <p:cNvCxnSpPr/>
+          <p:nvPr/>
+        </p:nvCxnSpPr>
+        <p:spPr>
+          <a:xfrm>
+            <a:off x="3556000" y="4089400"/>
+            <a:ext cx="812800" cy="0"/>
+          </a:xfrm>
+          <a:prstGeom prst="straightConnector1">
+            <a:avLst/>
+          </a:prstGeom>
+          <a:ln w="15875">
+            <a:solidFill>
+              <a:srgbClr val="262626"/>
+            </a:solidFill>
+            <a:tailEnd type="triangle" w="med" len="med"/>
+          </a:ln>
+        </p:spPr>
+      </p:cxnSp>
+      <p:sp>
+        <p:nvSpPr>
+          <p:cNvPr id="25" name="Label 25"/>
+          <p:cNvSpPr txBox="1"/>
+          <p:nvPr/>
+        </p:nvSpPr>
+        <p:spPr>
+          <a:xfrm>
+            <a:off x="3479800" y="3479800"/>
+            <a:ext cx="965200" cy="254000"/>
+          </a:xfrm>
+          <a:prstGeom prst="rect">
+            <a:avLst/>
+          </a:prstGeom>
+          <a:noFill/>
+        </p:spPr>
+        <p:txBody>
+          <a:bodyPr wrap="square" lIns="0" tIns="0" rIns="0" bIns="0" anchor="ctr"/>
+          <a:lstStyle/>
+          <a:p>
+            <a:pPr algn="ctr"/>
+            <a:r>
+              <a:rPr lang="de-DE" sz="1400" dirty="0">
+                <a:solidFill>
+                  <a:srgbClr val="595959"/>
+                </a:solidFill>
+              </a:rPr>
+              <a:t>Ausgabe</a:t>
+            </a:r>
+          </a:p>
+        </p:txBody>
+      </p:sp>
+      <p:sp>
+        <p:nvSpPr>
+          <p:cNvPr id="26" name="Label 26"/>
+          <p:cNvSpPr txBox="1"/>
+          <p:nvPr/>
+        </p:nvSpPr>
+        <p:spPr>
+          <a:xfrm>
+            <a:off x="1219200" y="4826000"/>
+            <a:ext cx="3302000" cy="254000"/>
+          </a:xfrm>
+          <a:prstGeom prst="rect">
+            <a:avLst/>
+          </a:prstGeom>
+          <a:noFill/>
+        </p:spPr>
+        <p:txBody>
+          <a:bodyPr wrap="square" lIns="0" tIns="0" rIns="0" bIns="0" anchor="ctr"/>
+          <a:lstStyle/>
+          <a:p>
+            <a:r>
+              <a:rPr lang="de-DE" sz="1400" dirty="0">
+                <a:solidFill>
+                  <a:srgbClr val="595959"/>
+                </a:solidFill>
+              </a:rPr>
+              <a:t>Baustein: ein einzelner Rechenschritt</a:t>
+            </a:r>
+          </a:p>
+        </p:txBody>
+      </p:sp>
+      <p:sp>
+        <p:nvSpPr>
+          <p:cNvPr id="27" name="Shape 27"/>
+          <p:cNvSpPr/>
+          <p:nvPr/>
+        </p:nvSpPr>
+        <p:spPr>
+          <a:xfrm>
+            <a:off x="5943600" y="3810000"/>
+            <a:ext cx="762000" cy="558800"/>
+          </a:xfrm>
+          <a:prstGeom prst="rect">
+            <a:avLst/>
+          </a:prstGeom>
+          <a:solidFill>
+            <a:srgbClr val="FFFFFF"/>
+          </a:solidFill>
+          <a:ln w="19050">
+            <a:solidFill>
+              <a:srgbClr val="262626"/>
+            </a:solidFill>
+          </a:ln>
+        </p:spPr>
+        <p:txBody>
+          <a:bodyPr wrap="square" lIns="0" tIns="0" rIns="0" bIns="0" anchor="ctr"/>
+          <a:lstStyle/>
+          <a:p>
+            <a:pPr algn="ctr"/>
+            <a:r>
+              <a:rPr lang="de-DE" sz="1600" b="1" dirty="0">
+                <a:solidFill>
+                  <a:srgbClr val="262626"/>
+                </a:solidFill>
+              </a:rPr>
+              <a:t>A</a:t>
+            </a:r>
+          </a:p>
+        </p:txBody>
+      </p:sp>
+      <p:sp>
+        <p:nvSpPr>
+          <p:cNvPr id="28" name="Shape 28"/>
+          <p:cNvSpPr/>
+          <p:nvPr/>
+        </p:nvSpPr>
+        <p:spPr>
+          <a:xfrm>
+            <a:off x="7467600" y="2819400"/>
+            <a:ext cx="762000" cy="558800"/>
+          </a:xfrm>
+          <a:prstGeom prst="rect">
+            <a:avLst/>
+          </a:prstGeom>
+          <a:solidFill>
+            <a:srgbClr val="FFFFFF"/>
+          </a:solidFill>
+          <a:ln w="19050">
+            <a:solidFill>
+              <a:srgbClr val="262626"/>
+            </a:solidFill>
+          </a:ln>
+        </p:spPr>
+        <p:txBody>
+          <a:bodyPr wrap="square" lIns="0" tIns="0" rIns="0" bIns="0" anchor="ctr"/>
+          <a:lstStyle/>
+          <a:p>
+            <a:pPr algn="ctr"/>
+            <a:r>
+              <a:rPr lang="de-DE" sz="1600" b="1" dirty="0">
+                <a:solidFill>
+                  <a:srgbClr val="262626"/>
+                </a:solidFill>
+              </a:rPr>
+              <a:t>B</a:t>
+            </a:r>
+          </a:p>
+        </p:txBody>
+      </p:sp>
+      <p:sp>
+        <p:nvSpPr>
+          <p:cNvPr id="29" name="Shape 29"/>
+          <p:cNvSpPr/>
+          <p:nvPr/>
+        </p:nvSpPr>
+        <p:spPr>
+          <a:xfrm>
+            <a:off x="8991600" y="3810000"/>
+            <a:ext cx="762000" cy="558800"/>
+          </a:xfrm>
+          <a:prstGeom prst="rect">
+            <a:avLst/>
+          </a:prstGeom>
+          <a:solidFill>
+            <a:srgbClr val="FFFFFF"/>
+          </a:solidFill>
+          <a:ln w="19050">
+            <a:solidFill>
+              <a:srgbClr val="262626"/>
+            </a:solidFill>
+          </a:ln>
+        </p:spPr>
+        <p:txBody>
+          <a:bodyPr wrap="square" lIns="0" tIns="0" rIns="0" bIns="0" anchor="ctr"/>
+          <a:lstStyle/>
+          <a:p>
+            <a:pPr algn="ctr"/>
+            <a:r>
+              <a:rPr lang="de-DE" sz="1600" b="1" dirty="0">
+                <a:solidFill>
+                  <a:srgbClr val="262626"/>
+                </a:solidFill>
+              </a:rPr>
+              <a:t>C</a:t>
+            </a:r>
+          </a:p>
+        </p:txBody>
+      </p:sp>
+      <p:sp>
+        <p:nvSpPr>
+          <p:cNvPr id="30" name="Shape 30"/>
+          <p:cNvSpPr/>
+          <p:nvPr/>
+        </p:nvSpPr>
+        <p:spPr>
+          <a:xfrm>
+            <a:off x="10515600" y="3810000"/>
+            <a:ext cx="762000" cy="558800"/>
+          </a:xfrm>
+          <a:prstGeom prst="rect">
+            <a:avLst/>
+          </a:prstGeom>
+          <a:solidFill>
+            <a:srgbClr val="FFFFFF"/>
+          </a:solidFill>
+          <a:ln w="19050">
+            <a:solidFill>
+              <a:srgbClr val="262626"/>
+            </a:solidFill>
+          </a:ln>
+        </p:spPr>
+        <p:txBody>
+          <a:bodyPr wrap="square" lIns="0" tIns="0" rIns="0" bIns="0" anchor="ctr"/>
+          <a:lstStyle/>
+          <a:p>
+            <a:pPr algn="ctr"/>
+            <a:r>
+              <a:rPr lang="de-DE" sz="1600" b="1" dirty="0">
+                <a:solidFill>
+                  <a:srgbClr val="262626"/>
+                </a:solidFill>
+              </a:rPr>
+              <a:t>D</a:t>
+            </a:r>
+          </a:p>
+        </p:txBody>
+      </p:sp>
+      <p:cxnSp>
+        <p:nvCxnSpPr>
+          <p:cNvPr id="31" name="Arrow 31"/>
+          <p:cNvCxnSpPr/>
+          <p:nvPr/>
+        </p:nvCxnSpPr>
+        <p:spPr>
+          <a:xfrm flipV="1">
+            <a:off x="6705600" y="3098800"/>
+            <a:ext cx="762000" cy="990600"/>
+          </a:xfrm>
+          <a:prstGeom prst="straightConnector1">
+            <a:avLst/>
+          </a:prstGeom>
+          <a:ln w="15875">
+            <a:solidFill>
+              <a:srgbClr val="262626"/>
+            </a:solidFill>
+            <a:tailEnd type="triangle" w="med" len="med"/>
+          </a:ln>
+        </p:spPr>
+      </p:cxnSp>
+      <p:cxnSp>
+        <p:nvCxnSpPr>
+          <p:cNvPr id="32" name="Arrow 32"/>
+          <p:cNvCxnSpPr/>
+          <p:nvPr/>
+        </p:nvCxnSpPr>
+        <p:spPr>
+          <a:xfrm>
+            <a:off x="8229600" y="3098800"/>
+            <a:ext cx="762000" cy="990600"/>
+          </a:xfrm>
+          <a:prstGeom prst="straightConnector1">
+            <a:avLst/>
+          </a:prstGeom>
+          <a:ln w="15875">
+            <a:solidFill>
+              <a:srgbClr val="262626"/>
+            </a:solidFill>
+            <a:tailEnd type="triangle" w="med" len="med"/>
+          </a:ln>
+        </p:spPr>
+      </p:cxnSp>
+      <p:cxnSp>
+        <p:nvCxnSpPr>
+          <p:cNvPr id="33" name="Arrow 33"/>
+          <p:cNvCxnSpPr/>
+          <p:nvPr/>
+        </p:nvCxnSpPr>
+        <p:spPr>
+          <a:xfrm>
+            <a:off x="6705600" y="4089400"/>
+            <a:ext cx="2286000" cy="0"/>
+          </a:xfrm>
+          <a:prstGeom prst="straightConnector1">
+            <a:avLst/>
+          </a:prstGeom>
+          <a:ln w="15875">
+            <a:solidFill>
+              <a:srgbClr val="262626"/>
+            </a:solidFill>
+            <a:tailEnd type="triangle" w="med" len="med"/>
+          </a:ln>
+        </p:spPr>
+      </p:cxnSp>
+      <p:cxnSp>
+        <p:nvCxnSpPr>
+          <p:cNvPr id="34" name="Arrow 34"/>
+          <p:cNvCxnSpPr/>
+          <p:nvPr/>
+        </p:nvCxnSpPr>
+        <p:spPr>
+          <a:xfrm>
+            <a:off x="9753600" y="4089400"/>
+            <a:ext cx="762000" cy="0"/>
+          </a:xfrm>
+          <a:prstGeom prst="straightConnector1">
+            <a:avLst/>
+          </a:prstGeom>
+          <a:ln w="15875">
+            <a:solidFill>
+              <a:srgbClr val="262626"/>
+            </a:solidFill>
+            <a:tailEnd type="triangle" w="med" len="med"/>
+          </a:ln>
+        </p:spPr>
+      </p:cxnSp>
+      <p:sp>
+        <p:nvSpPr>
+          <p:cNvPr id="35" name="Shape 35"/>
+          <p:cNvSpPr/>
+          <p:nvPr/>
+        </p:nvSpPr>
+        <p:spPr>
+          <a:xfrm>
+            <a:off x="6985000" y="3467100"/>
+            <a:ext cx="203200" cy="254000"/>
+          </a:xfrm>
+          <a:prstGeom prst="foldedCorner">
+            <a:avLst/>
+          </a:prstGeom>
+          <a:solidFill>
+            <a:srgbClr val="FFFFFF"/>
+          </a:solidFill>
+          <a:ln w="19050">
+            <a:solidFill>
+              <a:srgbClr val="C1002A"/>
+            </a:solidFill>
+          </a:ln>
+        </p:spPr>
+        <p:txBody>
+          <a:bodyPr wrap="square" lIns="0" tIns="0" rIns="0" bIns="0" anchor="ctr"/>
           <a:lstStyle/>
           <a:p>
             <a:endParaRPr lang="de-DE"/>
+          </a:p>
+        </p:txBody>
+      </p:sp>
+      <p:sp>
+        <p:nvSpPr>
+          <p:cNvPr id="36" name="Shape 36"/>
+          <p:cNvSpPr/>
+          <p:nvPr/>
+        </p:nvSpPr>
+        <p:spPr>
+          <a:xfrm>
+            <a:off x="8509000" y="3467100"/>
+            <a:ext cx="203200" cy="254000"/>
+          </a:xfrm>
+          <a:prstGeom prst="foldedCorner">
+            <a:avLst/>
+          </a:prstGeom>
+          <a:solidFill>
+            <a:srgbClr val="FFFFFF"/>
+          </a:solidFill>
+          <a:ln w="19050">
+            <a:solidFill>
+              <a:srgbClr val="C1002A"/>
+            </a:solidFill>
+          </a:ln>
+        </p:spPr>
+        <p:txBody>
+          <a:bodyPr wrap="square" lIns="0" tIns="0" rIns="0" bIns="0" anchor="ctr"/>
+          <a:lstStyle/>
+          <a:p>
+            <a:endParaRPr lang="de-DE"/>
+          </a:p>
+        </p:txBody>
+      </p:sp>
+      <p:sp>
+        <p:nvSpPr>
+          <p:cNvPr id="37" name="Shape 37"/>
+          <p:cNvSpPr/>
+          <p:nvPr/>
+        </p:nvSpPr>
+        <p:spPr>
+          <a:xfrm>
+            <a:off x="7747000" y="3962400"/>
+            <a:ext cx="203200" cy="254000"/>
+          </a:xfrm>
+          <a:prstGeom prst="foldedCorner">
+            <a:avLst/>
+          </a:prstGeom>
+          <a:solidFill>
+            <a:srgbClr val="FFFFFF"/>
+          </a:solidFill>
+          <a:ln w="19050">
+            <a:solidFill>
+              <a:srgbClr val="C1002A"/>
+            </a:solidFill>
+          </a:ln>
+        </p:spPr>
+        <p:txBody>
+          <a:bodyPr wrap="square" lIns="0" tIns="0" rIns="0" bIns="0" anchor="ctr"/>
+          <a:lstStyle/>
+          <a:p>
+            <a:endParaRPr lang="de-DE"/>
+          </a:p>
+        </p:txBody>
+      </p:sp>
+      <p:sp>
+        <p:nvSpPr>
+          <p:cNvPr id="38" name="Shape 38"/>
+          <p:cNvSpPr/>
+          <p:nvPr/>
+        </p:nvSpPr>
+        <p:spPr>
+          <a:xfrm>
+            <a:off x="10033000" y="3962400"/>
+            <a:ext cx="203200" cy="254000"/>
+          </a:xfrm>
+          <a:prstGeom prst="foldedCorner">
+            <a:avLst/>
+          </a:prstGeom>
+          <a:solidFill>
+            <a:srgbClr val="FFFFFF"/>
+          </a:solidFill>
+          <a:ln w="19050">
+            <a:solidFill>
+              <a:srgbClr val="C1002A"/>
+            </a:solidFill>
+          </a:ln>
+        </p:spPr>
+        <p:txBody>
+          <a:bodyPr wrap="square" lIns="0" tIns="0" rIns="0" bIns="0" anchor="ctr"/>
+          <a:lstStyle/>
+          <a:p>
+            <a:endParaRPr lang="de-DE"/>
+          </a:p>
+        </p:txBody>
+      </p:sp>
+      <p:sp>
+        <p:nvSpPr>
+          <p:cNvPr id="39" name="Label 39"/>
+          <p:cNvSpPr txBox="1"/>
+          <p:nvPr/>
+        </p:nvSpPr>
+        <p:spPr>
+          <a:xfrm>
+            <a:off x="5943600" y="4826000"/>
+            <a:ext cx="5334000" cy="254000"/>
+          </a:xfrm>
+          <a:prstGeom prst="rect">
+            <a:avLst/>
+          </a:prstGeom>
+          <a:noFill/>
+        </p:spPr>
+        <p:txBody>
+          <a:bodyPr wrap="square" lIns="0" tIns="0" rIns="0" bIns="0" anchor="ctr"/>
+          <a:lstStyle/>
+          <a:p>
+            <a:pPr algn="l"/>
+            <a:r>
+              <a:rPr lang="de-DE" sz="1400" dirty="0">
+                <a:solidFill>
+                  <a:srgbClr val="595959"/>
+                </a:solidFill>
+              </a:rPr>
+              <a:t>Mehrere verbundene Rechenschritte bilden einen Workflow</a:t>
+            </a:r>
+          </a:p>
+        </p:txBody>
+      </p:sp>
+      <p:sp>
+        <p:nvSpPr>
+          <p:cNvPr id="40" name="Foliennummer"/>
+          <p:cNvSpPr txBox="1"/>
+          <p:nvPr/>
+        </p:nvSpPr>
+        <p:spPr>
+          <a:xfrm>
+            <a:off x="10769600" y="6197600"/>
+            <a:ext cx="508000" cy="254000"/>
+          </a:xfrm>
+          <a:prstGeom prst="rect">
+            <a:avLst/>
+          </a:prstGeom>
+          <a:noFill/>
+        </p:spPr>
+        <p:txBody>
+          <a:bodyPr wrap="square" lIns="0" tIns="0" rIns="0" bIns="0" anchor="ctr"/>
+          <a:lstStyle/>
+          <a:p>
+            <a:pPr algn="r"/>
+            <a:r>
+              <a:rPr lang="de-DE" sz="1200" dirty="0">
+                <a:solidFill>
+                  <a:srgbClr val="8C8C8C"/>
+                </a:solidFill>
+              </a:rPr>
+              <a:t>2</a:t>
+            </a:r>
           </a:p>
         </p:txBody>
       </p:sp>
     </p:spTree>
     <p:extLst>
       <p:ext uri="{BB962C8B-B14F-4D97-AF65-F5344CB8AC3E}">
-        <p14:creationId xmlns:p14="http://schemas.microsoft.com/office/powerpoint/2010/main" val="1149030269"/>
+        <p14:creationId xmlns:p14="http://schemas.microsoft.com/office/powerpoint/2010/main" val="3601582570"/>
       </p:ext>
     </p:extLst>
   </p:cSld>

--- a/Präsentation-Kolloqium.pptx
+++ b/Präsentation-Kolloqium.pptx
@@ -6,7 +6,13 @@
   </p:sldMasterIdLst>
   <p:sldIdLst>
     <p:sldId id="259" r:id="rId2"/>
-    <p:sldId id="261" r:id="rId3"/>
+    <p:sldId id="263" r:id="rId3"/>
+    <p:sldId id="267" r:id="rId4"/>
+    <p:sldId id="272" r:id="rId5"/>
+    <p:sldId id="274" r:id="rId6"/>
+    <p:sldId id="276" r:id="rId7"/>
+    <p:sldId id="280" r:id="rId8"/>
+    <p:sldId id="281" r:id="rId9"/>
   </p:sldIdLst>
   <p:sldSz cx="12192000" cy="6858000"/>
   <p:notesSz cx="6858000" cy="9144000"/>
@@ -3637,6 +3643,286 @@
           <p:cNvPr id="2" name="Titel 1">
             <a:extLst>
               <a:ext uri="{FF2B5EF4-FFF2-40B4-BE49-F238E27FC236}">
+                <a16:creationId xmlns:a16="http://schemas.microsoft.com/office/drawing/2014/main" id="{26040461-A3F5-6DBD-101D-778F129C59BD}"/>
+              </a:ext>
+            </a:extLst>
+          </p:cNvPr>
+          <p:cNvSpPr>
+            <a:spLocks noGrp="1"/>
+          </p:cNvSpPr>
+          <p:nvPr>
+            <p:ph type="title"/>
+          </p:nvPr>
+        </p:nvSpPr>
+        <p:spPr>
+          <a:xfrm>
+            <a:off x="1219200" y="812800"/>
+            <a:ext cx="10058400" cy="787400"/>
+          </a:xfrm>
+        </p:spPr>
+        <p:txBody>
+          <a:bodyPr wrap="square" lIns="0" tIns="0" rIns="0" bIns="0" anchor="t">
+            <a:normAutofit/>
+          </a:bodyPr>
+          <a:lstStyle/>
+          <a:p>
+            <a:pPr algn="l"/>
+            <a:r>
+              <a:rPr lang="de-DE" sz="2600" b="1" dirty="0">
+                <a:solidFill>
+                  <a:srgbClr val="262626"/>
+                </a:solidFill>
+              </a:rPr>
+              <a:t>Überblick</a:t>
+            </a:r>
+          </a:p>
+        </p:txBody>
+      </p:sp>
+      <p:sp>
+        <p:nvSpPr>
+          <p:cNvPr id="3" name="Inhaltsplatzhalter 2">
+            <a:extLst>
+              <a:ext uri="{FF2B5EF4-FFF2-40B4-BE49-F238E27FC236}">
+                <a16:creationId xmlns:a16="http://schemas.microsoft.com/office/drawing/2014/main" id="{F98F2FD3-36AE-D29F-70A5-FC217FC82EB7}"/>
+              </a:ext>
+            </a:extLst>
+          </p:cNvPr>
+          <p:cNvSpPr>
+            <a:spLocks noGrp="1"/>
+          </p:cNvSpPr>
+          <p:nvPr>
+            <p:ph idx="1"/>
+          </p:nvPr>
+        </p:nvSpPr>
+        <p:spPr>
+          <a:xfrm>
+            <a:off x="1219200" y="2159000"/>
+            <a:ext cx="8890000" cy="3683000"/>
+          </a:xfrm>
+        </p:spPr>
+        <p:txBody>
+          <a:bodyPr wrap="square" lIns="0" tIns="0" rIns="0" bIns="0" anchor="t">
+            <a:normAutofit/>
+          </a:bodyPr>
+          <a:lstStyle/>
+          <a:p>
+            <a:pPr marL="711200" indent="-711200" algn="l">
+              <a:spcAft>
+                <a:spcPts val="2400"/>
+              </a:spcAft>
+              <a:buNone/>
+            </a:pPr>
+            <a:r>
+              <a:rPr lang="de-DE" sz="2000" b="1" dirty="0">
+                <a:solidFill>
+                  <a:srgbClr val="C1002A"/>
+                </a:solidFill>
+              </a:rPr>
+              <a:t>01</a:t>
+            </a:r>
+            <a:r>
+              <a:rPr lang="de-DE" sz="2000" dirty="0">
+                <a:solidFill>
+                  <a:srgbClr val="262626"/>
+                </a:solidFill>
+              </a:rPr>
+              <a:t>	Motivation und Fragestellung</a:t>
+            </a:r>
+          </a:p>
+          <a:p>
+            <a:pPr marL="711200" indent="-711200" algn="l">
+              <a:spcAft>
+                <a:spcPts val="2400"/>
+              </a:spcAft>
+              <a:buNone/>
+            </a:pPr>
+            <a:r>
+              <a:rPr lang="de-DE" sz="2000" b="1" dirty="0">
+                <a:solidFill>
+                  <a:srgbClr val="C1002A"/>
+                </a:solidFill>
+              </a:rPr>
+              <a:t>02</a:t>
+            </a:r>
+            <a:r>
+              <a:rPr lang="de-DE" sz="2000" dirty="0">
+                <a:solidFill>
+                  <a:srgbClr val="262626"/>
+                </a:solidFill>
+              </a:rPr>
+              <a:t>	Methodik</a:t>
+            </a:r>
+          </a:p>
+          <a:p>
+            <a:pPr marL="711200" indent="-711200" algn="l">
+              <a:spcAft>
+                <a:spcPts val="2400"/>
+              </a:spcAft>
+              <a:buNone/>
+            </a:pPr>
+            <a:r>
+              <a:rPr lang="de-DE" sz="2000" b="1" dirty="0">
+                <a:solidFill>
+                  <a:srgbClr val="C1002A"/>
+                </a:solidFill>
+              </a:rPr>
+              <a:t>03</a:t>
+            </a:r>
+            <a:r>
+              <a:rPr lang="de-DE" sz="2000" dirty="0">
+                <a:solidFill>
+                  <a:srgbClr val="262626"/>
+                </a:solidFill>
+              </a:rPr>
+              <a:t>	Modellierung und Ausführung der WMS</a:t>
+            </a:r>
+          </a:p>
+          <a:p>
+            <a:pPr marL="711200" indent="-711200" algn="l">
+              <a:spcAft>
+                <a:spcPts val="2400"/>
+              </a:spcAft>
+              <a:buNone/>
+            </a:pPr>
+            <a:r>
+              <a:rPr lang="de-DE" sz="2000" b="1" dirty="0">
+                <a:solidFill>
+                  <a:srgbClr val="C1002A"/>
+                </a:solidFill>
+              </a:rPr>
+              <a:t>04</a:t>
+            </a:r>
+            <a:r>
+              <a:rPr lang="de-DE" sz="2000" dirty="0">
+                <a:solidFill>
+                  <a:srgbClr val="262626"/>
+                </a:solidFill>
+              </a:rPr>
+              <a:t>	Praktische Untersuchung und Ergebnisse</a:t>
+            </a:r>
+          </a:p>
+          <a:p>
+            <a:pPr marL="711200" indent="-711200" algn="l">
+              <a:spcAft>
+                <a:spcPts val="2400"/>
+              </a:spcAft>
+              <a:buNone/>
+            </a:pPr>
+            <a:r>
+              <a:rPr lang="de-DE" sz="2000" b="1" dirty="0">
+                <a:solidFill>
+                  <a:srgbClr val="C1002A"/>
+                </a:solidFill>
+              </a:rPr>
+              <a:t>05</a:t>
+            </a:r>
+            <a:r>
+              <a:rPr lang="de-DE" sz="2000" dirty="0">
+                <a:solidFill>
+                  <a:srgbClr val="262626"/>
+                </a:solidFill>
+              </a:rPr>
+              <a:t>	Forschungsfragen und Fazit</a:t>
+            </a:r>
+          </a:p>
+        </p:txBody>
+      </p:sp>
+      <p:sp>
+        <p:nvSpPr>
+          <p:cNvPr id="20" name="Akzentlinie"/>
+          <p:cNvSpPr/>
+          <p:nvPr/>
+        </p:nvSpPr>
+        <p:spPr>
+          <a:xfrm>
+            <a:off x="914400" y="812800"/>
+            <a:ext cx="50800" cy="431800"/>
+          </a:xfrm>
+          <a:prstGeom prst="rect">
+            <a:avLst/>
+          </a:prstGeom>
+          <a:solidFill>
+            <a:srgbClr val="C1002A"/>
+          </a:solidFill>
+          <a:ln>
+            <a:noFill/>
+          </a:ln>
+        </p:spPr>
+        <p:txBody>
+          <a:bodyPr/>
+          <a:lstStyle/>
+          <a:p>
+            <a:endParaRPr lang="de-DE"/>
+          </a:p>
+        </p:txBody>
+      </p:sp>
+      <p:sp>
+        <p:nvSpPr>
+          <p:cNvPr id="21" name="Foliennummer"/>
+          <p:cNvSpPr txBox="1"/>
+          <p:nvPr/>
+        </p:nvSpPr>
+        <p:spPr>
+          <a:xfrm>
+            <a:off x="10769600" y="6197600"/>
+            <a:ext cx="508000" cy="254000"/>
+          </a:xfrm>
+          <a:prstGeom prst="rect">
+            <a:avLst/>
+          </a:prstGeom>
+          <a:noFill/>
+        </p:spPr>
+        <p:txBody>
+          <a:bodyPr wrap="square" lIns="0" tIns="0" rIns="0" bIns="0" anchor="ctr"/>
+          <a:lstStyle/>
+          <a:p>
+            <a:pPr algn="r"/>
+            <a:r>
+              <a:rPr lang="de-DE" sz="1200" dirty="0">
+                <a:solidFill>
+                  <a:srgbClr val="8C8C8C"/>
+                </a:solidFill>
+              </a:rPr>
+              <a:t>2</a:t>
+            </a:r>
+          </a:p>
+        </p:txBody>
+      </p:sp>
+    </p:spTree>
+    <p:extLst>
+      <p:ext uri="{BB962C8B-B14F-4D97-AF65-F5344CB8AC3E}">
+        <p14:creationId xmlns:p14="http://schemas.microsoft.com/office/powerpoint/2010/main" val="2273996855"/>
+      </p:ext>
+    </p:extLst>
+  </p:cSld>
+  <p:clrMapOvr>
+    <a:masterClrMapping/>
+  </p:clrMapOvr>
+</p:sld>
+</file>
+
+<file path=ppt/slides/slide3.xml><?xml version="1.0" encoding="utf-8"?>
+<p:sld xmlns:a="http://schemas.openxmlformats.org/drawingml/2006/main" xmlns:r="http://schemas.openxmlformats.org/officeDocument/2006/relationships" xmlns:p="http://schemas.openxmlformats.org/presentationml/2006/main">
+  <p:cSld>
+    <p:spTree>
+      <p:nvGrpSpPr>
+        <p:cNvPr id="1" name=""/>
+        <p:cNvGrpSpPr/>
+        <p:nvPr/>
+      </p:nvGrpSpPr>
+      <p:grpSpPr>
+        <a:xfrm>
+          <a:off x="0" y="0"/>
+          <a:ext cx="0" cy="0"/>
+          <a:chOff x="0" y="0"/>
+          <a:chExt cx="0" cy="0"/>
+        </a:xfrm>
+      </p:grpSpPr>
+      <p:sp>
+        <p:nvSpPr>
+          <p:cNvPr id="2" name="Titel 1">
+            <a:extLst>
+              <a:ext uri="{FF2B5EF4-FFF2-40B4-BE49-F238E27FC236}">
                 <a16:creationId xmlns:a16="http://schemas.microsoft.com/office/drawing/2014/main" id="{25D9A5A4-C2C6-495D-3A92-E3411F52F8F8}"/>
               </a:ext>
             </a:extLst>
@@ -3713,7 +3999,7 @@
         </p:nvCxnSpPr>
         <p:spPr>
           <a:xfrm>
-            <a:off x="1219200" y="4089400"/>
+            <a:off x="1219200" y="3581400"/>
             <a:ext cx="812800" cy="0"/>
           </a:xfrm>
           <a:prstGeom prst="straightConnector1">
@@ -3735,7 +4021,7 @@
         </p:nvSpPr>
         <p:spPr>
           <a:xfrm>
-            <a:off x="1143000" y="3479800"/>
+            <a:off x="1143000" y="2971800"/>
             <a:ext cx="965200" cy="254000"/>
           </a:xfrm>
           <a:prstGeom prst="rect">
@@ -3767,7 +4053,7 @@
         </p:nvSpPr>
         <p:spPr>
           <a:xfrm>
-            <a:off x="2032000" y="3810000"/>
+            <a:off x="2032000" y="3302000"/>
             <a:ext cx="1524000" cy="558800"/>
           </a:xfrm>
           <a:prstGeom prst="rect">
@@ -3806,7 +4092,7 @@
         </p:nvCxnSpPr>
         <p:spPr>
           <a:xfrm>
-            <a:off x="3556000" y="4089400"/>
+            <a:off x="3556000" y="3581400"/>
             <a:ext cx="812800" cy="0"/>
           </a:xfrm>
           <a:prstGeom prst="straightConnector1">
@@ -3828,7 +4114,7 @@
         </p:nvSpPr>
         <p:spPr>
           <a:xfrm>
-            <a:off x="3479800" y="3479800"/>
+            <a:off x="3479800" y="2971800"/>
             <a:ext cx="965200" cy="254000"/>
           </a:xfrm>
           <a:prstGeom prst="rect">
@@ -3860,7 +4146,7 @@
         </p:nvSpPr>
         <p:spPr>
           <a:xfrm>
-            <a:off x="1219200" y="4826000"/>
+            <a:off x="1219200" y="4318000"/>
             <a:ext cx="3302000" cy="254000"/>
           </a:xfrm>
           <a:prstGeom prst="rect">
@@ -3891,7 +4177,7 @@
         </p:nvSpPr>
         <p:spPr>
           <a:xfrm>
-            <a:off x="5943600" y="3810000"/>
+            <a:off x="5943600" y="3302000"/>
             <a:ext cx="762000" cy="558800"/>
           </a:xfrm>
           <a:prstGeom prst="rect">
@@ -3930,7 +4216,7 @@
         </p:nvSpPr>
         <p:spPr>
           <a:xfrm>
-            <a:off x="7467600" y="2819400"/>
+            <a:off x="7467600" y="2311400"/>
             <a:ext cx="762000" cy="558800"/>
           </a:xfrm>
           <a:prstGeom prst="rect">
@@ -3969,7 +4255,7 @@
         </p:nvSpPr>
         <p:spPr>
           <a:xfrm>
-            <a:off x="8991600" y="3810000"/>
+            <a:off x="8991600" y="3302000"/>
             <a:ext cx="762000" cy="558800"/>
           </a:xfrm>
           <a:prstGeom prst="rect">
@@ -4008,7 +4294,7 @@
         </p:nvSpPr>
         <p:spPr>
           <a:xfrm>
-            <a:off x="10515600" y="3810000"/>
+            <a:off x="10515600" y="3302000"/>
             <a:ext cx="762000" cy="558800"/>
           </a:xfrm>
           <a:prstGeom prst="rect">
@@ -4047,7 +4333,7 @@
         </p:nvCxnSpPr>
         <p:spPr>
           <a:xfrm flipV="1">
-            <a:off x="6705600" y="3098800"/>
+            <a:off x="6705600" y="2590800"/>
             <a:ext cx="762000" cy="990600"/>
           </a:xfrm>
           <a:prstGeom prst="straightConnector1">
@@ -4069,7 +4355,7 @@
         </p:nvCxnSpPr>
         <p:spPr>
           <a:xfrm>
-            <a:off x="8229600" y="3098800"/>
+            <a:off x="8229600" y="2590800"/>
             <a:ext cx="762000" cy="990600"/>
           </a:xfrm>
           <a:prstGeom prst="straightConnector1">
@@ -4091,7 +4377,7 @@
         </p:nvCxnSpPr>
         <p:spPr>
           <a:xfrm>
-            <a:off x="6705600" y="4089400"/>
+            <a:off x="6705600" y="3581400"/>
             <a:ext cx="2286000" cy="0"/>
           </a:xfrm>
           <a:prstGeom prst="straightConnector1">
@@ -4113,7 +4399,7 @@
         </p:nvCxnSpPr>
         <p:spPr>
           <a:xfrm>
-            <a:off x="9753600" y="4089400"/>
+            <a:off x="9753600" y="3581400"/>
             <a:ext cx="762000" cy="0"/>
           </a:xfrm>
           <a:prstGeom prst="straightConnector1">
@@ -4135,7 +4421,7 @@
         </p:nvSpPr>
         <p:spPr>
           <a:xfrm>
-            <a:off x="6985000" y="3467100"/>
+            <a:off x="6985000" y="2959100"/>
             <a:ext cx="203200" cy="254000"/>
           </a:xfrm>
           <a:prstGeom prst="foldedCorner">
@@ -4166,7 +4452,7 @@
         </p:nvSpPr>
         <p:spPr>
           <a:xfrm>
-            <a:off x="8509000" y="3467100"/>
+            <a:off x="8509000" y="2959100"/>
             <a:ext cx="203200" cy="254000"/>
           </a:xfrm>
           <a:prstGeom prst="foldedCorner">
@@ -4197,7 +4483,7 @@
         </p:nvSpPr>
         <p:spPr>
           <a:xfrm>
-            <a:off x="7747000" y="3962400"/>
+            <a:off x="7747000" y="3454400"/>
             <a:ext cx="203200" cy="254000"/>
           </a:xfrm>
           <a:prstGeom prst="foldedCorner">
@@ -4228,7 +4514,7 @@
         </p:nvSpPr>
         <p:spPr>
           <a:xfrm>
-            <a:off x="10033000" y="3962400"/>
+            <a:off x="10033000" y="3454400"/>
             <a:ext cx="203200" cy="254000"/>
           </a:xfrm>
           <a:prstGeom prst="foldedCorner">
@@ -4259,7 +4545,7 @@
         </p:nvSpPr>
         <p:spPr>
           <a:xfrm>
-            <a:off x="5943600" y="4826000"/>
+            <a:off x="5943600" y="4318000"/>
             <a:ext cx="5334000" cy="254000"/>
           </a:xfrm>
           <a:prstGeom prst="rect">
@@ -4310,7 +4596,394 @@
                   <a:srgbClr val="8C8C8C"/>
                 </a:solidFill>
               </a:rPr>
-              <a:t>2</a:t>
+              <a:t>3</a:t>
+            </a:r>
+          </a:p>
+        </p:txBody>
+      </p:sp>
+      <p:cxnSp>
+        <p:nvCxnSpPr>
+          <p:cNvPr id="50" name="Fortschritt Linie"/>
+          <p:cNvCxnSpPr/>
+          <p:nvPr/>
+        </p:nvCxnSpPr>
+        <p:spPr>
+          <a:xfrm>
+            <a:off x="1219200" y="6172200"/>
+            <a:ext cx="5080000" cy="0"/>
+          </a:xfrm>
+          <a:prstGeom prst="line">
+            <a:avLst/>
+          </a:prstGeom>
+          <a:ln w="6350">
+            <a:solidFill>
+              <a:srgbClr val="D9D9D9"/>
+            </a:solidFill>
+          </a:ln>
+        </p:spPr>
+      </p:cxnSp>
+      <p:sp>
+        <p:nvSpPr>
+          <p:cNvPr id="51" name="Marker Motivation"/>
+          <p:cNvSpPr/>
+          <p:nvPr/>
+        </p:nvSpPr>
+        <p:spPr>
+          <a:xfrm>
+            <a:off x="1174750" y="6127750"/>
+            <a:ext cx="88900" cy="88900"/>
+          </a:xfrm>
+          <a:prstGeom prst="ellipse">
+            <a:avLst/>
+          </a:prstGeom>
+          <a:solidFill>
+            <a:srgbClr val="C1002A"/>
+          </a:solidFill>
+          <a:ln>
+            <a:noFill/>
+          </a:ln>
+        </p:spPr>
+        <p:txBody>
+          <a:bodyPr/>
+          <a:lstStyle/>
+          <a:p>
+            <a:endParaRPr lang="de-DE"/>
+          </a:p>
+        </p:txBody>
+      </p:sp>
+      <p:sp>
+        <p:nvSpPr>
+          <p:cNvPr id="52" name="Label Motivation"/>
+          <p:cNvSpPr txBox="1"/>
+          <p:nvPr/>
+        </p:nvSpPr>
+        <p:spPr>
+          <a:xfrm>
+            <a:off x="1219200" y="6273800"/>
+            <a:ext cx="1270000" cy="203200"/>
+          </a:xfrm>
+          <a:prstGeom prst="rect">
+            <a:avLst/>
+          </a:prstGeom>
+          <a:noFill/>
+        </p:spPr>
+        <p:txBody>
+          <a:bodyPr wrap="none" lIns="0" tIns="0" rIns="0" bIns="0" anchor="t"/>
+          <a:lstStyle/>
+          <a:p>
+            <a:pPr algn="l"/>
+            <a:r>
+              <a:rPr lang="de-DE" sz="1000" b="1" dirty="0">
+                <a:solidFill>
+                  <a:srgbClr val="C1002A"/>
+                </a:solidFill>
+              </a:rPr>
+              <a:t>Motivation</a:t>
+            </a:r>
+          </a:p>
+        </p:txBody>
+      </p:sp>
+      <p:sp>
+        <p:nvSpPr>
+          <p:cNvPr id="53" name="Marker Methodik"/>
+          <p:cNvSpPr/>
+          <p:nvPr/>
+        </p:nvSpPr>
+        <p:spPr>
+          <a:xfrm>
+            <a:off x="2457450" y="6140450"/>
+            <a:ext cx="63500" cy="63500"/>
+          </a:xfrm>
+          <a:prstGeom prst="ellipse">
+            <a:avLst/>
+          </a:prstGeom>
+          <a:solidFill>
+            <a:srgbClr val="BFBFBF"/>
+          </a:solidFill>
+          <a:ln>
+            <a:noFill/>
+          </a:ln>
+        </p:spPr>
+        <p:txBody>
+          <a:bodyPr/>
+          <a:lstStyle/>
+          <a:p>
+            <a:endParaRPr lang="de-DE"/>
+          </a:p>
+        </p:txBody>
+      </p:sp>
+      <p:sp>
+        <p:nvSpPr>
+          <p:cNvPr id="54" name="Label Methodik"/>
+          <p:cNvSpPr txBox="1"/>
+          <p:nvPr/>
+        </p:nvSpPr>
+        <p:spPr>
+          <a:xfrm>
+            <a:off x="1854200" y="6273800"/>
+            <a:ext cx="1270000" cy="203200"/>
+          </a:xfrm>
+          <a:prstGeom prst="rect">
+            <a:avLst/>
+          </a:prstGeom>
+          <a:noFill/>
+        </p:spPr>
+        <p:txBody>
+          <a:bodyPr wrap="none" lIns="0" tIns="0" rIns="0" bIns="0" anchor="t"/>
+          <a:lstStyle/>
+          <a:p>
+            <a:pPr algn="ctr"/>
+            <a:r>
+              <a:rPr lang="de-DE" sz="1000" dirty="0">
+                <a:solidFill>
+                  <a:srgbClr val="A6A6A6"/>
+                </a:solidFill>
+              </a:rPr>
+              <a:t>Methodik</a:t>
+            </a:r>
+          </a:p>
+        </p:txBody>
+      </p:sp>
+      <p:sp>
+        <p:nvSpPr>
+          <p:cNvPr id="55" name="Marker Systeme"/>
+          <p:cNvSpPr/>
+          <p:nvPr/>
+        </p:nvSpPr>
+        <p:spPr>
+          <a:xfrm>
+            <a:off x="3727450" y="6140450"/>
+            <a:ext cx="63500" cy="63500"/>
+          </a:xfrm>
+          <a:prstGeom prst="ellipse">
+            <a:avLst/>
+          </a:prstGeom>
+          <a:solidFill>
+            <a:srgbClr val="BFBFBF"/>
+          </a:solidFill>
+          <a:ln>
+            <a:noFill/>
+          </a:ln>
+        </p:spPr>
+        <p:txBody>
+          <a:bodyPr/>
+          <a:lstStyle/>
+          <a:p>
+            <a:endParaRPr lang="de-DE"/>
+          </a:p>
+        </p:txBody>
+      </p:sp>
+      <p:sp>
+        <p:nvSpPr>
+          <p:cNvPr id="56" name="Label Systeme"/>
+          <p:cNvSpPr txBox="1"/>
+          <p:nvPr/>
+        </p:nvSpPr>
+        <p:spPr>
+          <a:xfrm>
+            <a:off x="3124200" y="6273800"/>
+            <a:ext cx="1270000" cy="203200"/>
+          </a:xfrm>
+          <a:prstGeom prst="rect">
+            <a:avLst/>
+          </a:prstGeom>
+          <a:noFill/>
+        </p:spPr>
+        <p:txBody>
+          <a:bodyPr wrap="none" lIns="0" tIns="0" rIns="0" bIns="0" anchor="t"/>
+          <a:lstStyle/>
+          <a:p>
+            <a:pPr algn="ctr"/>
+            <a:r>
+              <a:rPr lang="de-DE" sz="1000" dirty="0">
+                <a:solidFill>
+                  <a:srgbClr val="A6A6A6"/>
+                </a:solidFill>
+              </a:rPr>
+              <a:t>Systeme</a:t>
+            </a:r>
+          </a:p>
+        </p:txBody>
+      </p:sp>
+      <p:sp>
+        <p:nvSpPr>
+          <p:cNvPr id="57" name="Marker Untersuchung"/>
+          <p:cNvSpPr/>
+          <p:nvPr/>
+        </p:nvSpPr>
+        <p:spPr>
+          <a:xfrm>
+            <a:off x="4997450" y="6140450"/>
+            <a:ext cx="63500" cy="63500"/>
+          </a:xfrm>
+          <a:prstGeom prst="ellipse">
+            <a:avLst/>
+          </a:prstGeom>
+          <a:solidFill>
+            <a:srgbClr val="BFBFBF"/>
+          </a:solidFill>
+          <a:ln>
+            <a:noFill/>
+          </a:ln>
+        </p:spPr>
+        <p:txBody>
+          <a:bodyPr/>
+          <a:lstStyle/>
+          <a:p>
+            <a:endParaRPr lang="de-DE"/>
+          </a:p>
+        </p:txBody>
+      </p:sp>
+      <p:sp>
+        <p:nvSpPr>
+          <p:cNvPr id="58" name="Label Untersuchung"/>
+          <p:cNvSpPr txBox="1"/>
+          <p:nvPr/>
+        </p:nvSpPr>
+        <p:spPr>
+          <a:xfrm>
+            <a:off x="4394200" y="6273800"/>
+            <a:ext cx="1270000" cy="203200"/>
+          </a:xfrm>
+          <a:prstGeom prst="rect">
+            <a:avLst/>
+          </a:prstGeom>
+          <a:noFill/>
+        </p:spPr>
+        <p:txBody>
+          <a:bodyPr wrap="none" lIns="0" tIns="0" rIns="0" bIns="0" anchor="t"/>
+          <a:lstStyle/>
+          <a:p>
+            <a:pPr algn="ctr"/>
+            <a:r>
+              <a:rPr lang="de-DE" sz="1000" dirty="0">
+                <a:solidFill>
+                  <a:srgbClr val="A6A6A6"/>
+                </a:solidFill>
+              </a:rPr>
+              <a:t>Untersuchung</a:t>
+            </a:r>
+          </a:p>
+        </p:txBody>
+      </p:sp>
+      <p:sp>
+        <p:nvSpPr>
+          <p:cNvPr id="59" name="Marker Fazit"/>
+          <p:cNvSpPr/>
+          <p:nvPr/>
+        </p:nvSpPr>
+        <p:spPr>
+          <a:xfrm>
+            <a:off x="6267450" y="6140450"/>
+            <a:ext cx="63500" cy="63500"/>
+          </a:xfrm>
+          <a:prstGeom prst="ellipse">
+            <a:avLst/>
+          </a:prstGeom>
+          <a:solidFill>
+            <a:srgbClr val="BFBFBF"/>
+          </a:solidFill>
+          <a:ln>
+            <a:noFill/>
+          </a:ln>
+        </p:spPr>
+        <p:txBody>
+          <a:bodyPr/>
+          <a:lstStyle/>
+          <a:p>
+            <a:endParaRPr lang="de-DE"/>
+          </a:p>
+        </p:txBody>
+      </p:sp>
+      <p:sp>
+        <p:nvSpPr>
+          <p:cNvPr id="60" name="Label Fazit"/>
+          <p:cNvSpPr txBox="1"/>
+          <p:nvPr/>
+        </p:nvSpPr>
+        <p:spPr>
+          <a:xfrm>
+            <a:off x="5029200" y="6273800"/>
+            <a:ext cx="1270000" cy="203200"/>
+          </a:xfrm>
+          <a:prstGeom prst="rect">
+            <a:avLst/>
+          </a:prstGeom>
+          <a:noFill/>
+        </p:spPr>
+        <p:txBody>
+          <a:bodyPr wrap="none" lIns="0" tIns="0" rIns="0" bIns="0" anchor="t"/>
+          <a:lstStyle/>
+          <a:p>
+            <a:pPr algn="r"/>
+            <a:r>
+              <a:rPr lang="de-DE" sz="1000" dirty="0">
+                <a:solidFill>
+                  <a:srgbClr val="A6A6A6"/>
+                </a:solidFill>
+              </a:rPr>
+              <a:t>Fazit</a:t>
+            </a:r>
+          </a:p>
+        </p:txBody>
+      </p:sp>
+      <p:sp>
+        <p:nvSpPr>
+          <p:cNvPr id="70" name="Stichpunkte"/>
+          <p:cNvSpPr txBox="1"/>
+          <p:nvPr/>
+        </p:nvSpPr>
+        <p:spPr>
+          <a:xfrm>
+            <a:off x="1219200" y="4927600"/>
+            <a:ext cx="9854692" cy="762000"/>
+          </a:xfrm>
+          <a:prstGeom prst="rect">
+            <a:avLst/>
+          </a:prstGeom>
+          <a:noFill/>
+        </p:spPr>
+        <p:txBody>
+          <a:bodyPr wrap="square" lIns="0" tIns="0" rIns="0" bIns="0" anchor="t"/>
+          <a:lstStyle/>
+          <a:p>
+            <a:pPr marL="203200" indent="-203200" algn="l">
+              <a:spcAft>
+                <a:spcPts val="800"/>
+              </a:spcAft>
+              <a:buClr>
+                <a:srgbClr val="C1002A"/>
+              </a:buClr>
+              <a:buFont typeface="Arial"/>
+              <a:buChar char="•"/>
+            </a:pPr>
+            <a:r>
+              <a:rPr lang="de-DE" sz="1600" dirty="0">
+                <a:solidFill>
+                  <a:srgbClr val="262626"/>
+                </a:solidFill>
+              </a:rPr>
+              <a:t>Wissenschaftlicher Workflow: verbundene Rechenschritte mit gemeinsamem Forschungsziel</a:t>
+            </a:r>
+          </a:p>
+          <a:p>
+            <a:pPr marL="203200" indent="-203200" algn="l">
+              <a:spcAft>
+                <a:spcPts val="800"/>
+              </a:spcAft>
+              <a:buClr>
+                <a:srgbClr val="C1002A"/>
+              </a:buClr>
+              <a:buFont typeface="Arial"/>
+              <a:buChar char="•"/>
+            </a:pPr>
+            <a:r>
+              <a:rPr lang="de-DE" sz="1600" dirty="0">
+                <a:solidFill>
+                  <a:srgbClr val="262626"/>
+                </a:solidFill>
+              </a:rPr>
+              <a:t>Mehr Schritte und Abhängigkeiten → höherer Koordinationsaufwand → Workflow-Management-Systeme</a:t>
             </a:r>
           </a:p>
         </p:txBody>
@@ -4318,7 +4991,3195 @@
     </p:spTree>
     <p:extLst>
       <p:ext uri="{BB962C8B-B14F-4D97-AF65-F5344CB8AC3E}">
-        <p14:creationId xmlns:p14="http://schemas.microsoft.com/office/powerpoint/2010/main" val="3601582570"/>
+        <p14:creationId xmlns:p14="http://schemas.microsoft.com/office/powerpoint/2010/main" val="2996142354"/>
+      </p:ext>
+    </p:extLst>
+  </p:cSld>
+  <p:clrMapOvr>
+    <a:masterClrMapping/>
+  </p:clrMapOvr>
+</p:sld>
+</file>
+
+<file path=ppt/slides/slide4.xml><?xml version="1.0" encoding="utf-8"?>
+<p:sld xmlns:a="http://schemas.openxmlformats.org/drawingml/2006/main" xmlns:r="http://schemas.openxmlformats.org/officeDocument/2006/relationships" xmlns:p="http://schemas.openxmlformats.org/presentationml/2006/main">
+  <p:cSld>
+    <p:spTree>
+      <p:nvGrpSpPr>
+        <p:cNvPr id="1" name=""/>
+        <p:cNvGrpSpPr/>
+        <p:nvPr/>
+      </p:nvGrpSpPr>
+      <p:grpSpPr>
+        <a:xfrm>
+          <a:off x="0" y="0"/>
+          <a:ext cx="0" cy="0"/>
+          <a:chOff x="0" y="0"/>
+          <a:chExt cx="0" cy="0"/>
+        </a:xfrm>
+      </p:grpSpPr>
+      <p:sp>
+        <p:nvSpPr>
+          <p:cNvPr id="2" name="Titel 1">
+            <a:extLst>
+              <a:ext uri="{FF2B5EF4-FFF2-40B4-BE49-F238E27FC236}">
+                <a16:creationId xmlns:a16="http://schemas.microsoft.com/office/drawing/2014/main" id="{350F9664-B06B-1E69-0E37-E3D6CFDB7F08}"/>
+              </a:ext>
+            </a:extLst>
+          </p:cNvPr>
+          <p:cNvSpPr>
+            <a:spLocks noGrp="1"/>
+          </p:cNvSpPr>
+          <p:nvPr>
+            <p:ph type="title"/>
+          </p:nvPr>
+        </p:nvSpPr>
+        <p:spPr>
+          <a:xfrm>
+            <a:off x="1219200" y="812800"/>
+            <a:ext cx="10058400" cy="787400"/>
+          </a:xfrm>
+        </p:spPr>
+        <p:txBody>
+          <a:bodyPr wrap="square" lIns="0" tIns="0" rIns="0" bIns="0" anchor="t">
+            <a:normAutofit/>
+          </a:bodyPr>
+          <a:lstStyle/>
+          <a:p>
+            <a:pPr algn="l"/>
+            <a:r>
+              <a:rPr lang="de-DE" sz="2600" b="1" dirty="0">
+                <a:solidFill>
+                  <a:srgbClr val="262626"/>
+                </a:solidFill>
+              </a:rPr>
+              <a:t>Warum Workflow-Management-Systeme im HPC?</a:t>
+            </a:r>
+          </a:p>
+        </p:txBody>
+      </p:sp>
+      <p:sp>
+        <p:nvSpPr>
+          <p:cNvPr id="3" name="Inhaltsplatzhalter 2">
+            <a:extLst>
+              <a:ext uri="{FF2B5EF4-FFF2-40B4-BE49-F238E27FC236}">
+                <a16:creationId xmlns:a16="http://schemas.microsoft.com/office/drawing/2014/main" id="{7D155994-4CBC-162B-520F-83B3A198DE3B}"/>
+              </a:ext>
+            </a:extLst>
+          </p:cNvPr>
+          <p:cNvSpPr>
+            <a:spLocks noGrp="1"/>
+          </p:cNvSpPr>
+          <p:nvPr>
+            <p:ph idx="1"/>
+          </p:nvPr>
+        </p:nvSpPr>
+        <p:spPr>
+          <a:xfrm>
+            <a:off x="1219200" y="1905000"/>
+            <a:ext cx="4318000" cy="2794000"/>
+          </a:xfrm>
+        </p:spPr>
+        <p:txBody>
+          <a:bodyPr wrap="square" lIns="0" tIns="0" rIns="0" bIns="0" anchor="t"/>
+          <a:lstStyle/>
+          <a:p>
+            <a:pPr marL="0" indent="0" algn="l">
+              <a:spcAft>
+                <a:spcPts val="600"/>
+              </a:spcAft>
+              <a:buNone/>
+            </a:pPr>
+            <a:r>
+              <a:rPr lang="de-DE" sz="2000" b="1" dirty="0">
+                <a:solidFill>
+                  <a:srgbClr val="262626"/>
+                </a:solidFill>
+              </a:rPr>
+              <a:t>Workflow-Management-System</a:t>
+            </a:r>
+          </a:p>
+          <a:p>
+            <a:pPr marL="0" indent="0" algn="l">
+              <a:spcAft>
+                <a:spcPts val="1800"/>
+              </a:spcAft>
+              <a:buNone/>
+            </a:pPr>
+            <a:r>
+              <a:rPr lang="de-DE" sz="1600" dirty="0">
+                <a:solidFill>
+                  <a:srgbClr val="595959"/>
+                </a:solidFill>
+              </a:rPr>
+              <a:t>Orchestriert die Ausführung des Workflows</a:t>
+            </a:r>
+          </a:p>
+          <a:p>
+            <a:pPr marL="203200" indent="-203200" algn="l">
+              <a:spcAft>
+                <a:spcPts val="600"/>
+              </a:spcAft>
+              <a:buClr>
+                <a:srgbClr val="C1002A"/>
+              </a:buClr>
+              <a:buFont typeface="Arial"/>
+              <a:buChar char="•"/>
+            </a:pPr>
+            <a:r>
+              <a:rPr lang="de-DE" sz="1600" dirty="0">
+                <a:solidFill>
+                  <a:srgbClr val="262626"/>
+                </a:solidFill>
+              </a:rPr>
+              <a:t>Planung</a:t>
+            </a:r>
+          </a:p>
+          <a:p>
+            <a:pPr marL="203200" indent="-203200" algn="l">
+              <a:spcAft>
+                <a:spcPts val="600"/>
+              </a:spcAft>
+              <a:buClr>
+                <a:srgbClr val="C1002A"/>
+              </a:buClr>
+              <a:buFont typeface="Arial"/>
+              <a:buChar char="•"/>
+            </a:pPr>
+            <a:r>
+              <a:rPr lang="de-DE" sz="1600" dirty="0">
+                <a:solidFill>
+                  <a:srgbClr val="262626"/>
+                </a:solidFill>
+              </a:rPr>
+              <a:t>Koordination</a:t>
+            </a:r>
+          </a:p>
+          <a:p>
+            <a:pPr marL="203200" indent="-203200" algn="l">
+              <a:spcAft>
+                <a:spcPts val="600"/>
+              </a:spcAft>
+              <a:buClr>
+                <a:srgbClr val="C1002A"/>
+              </a:buClr>
+              <a:buFont typeface="Arial"/>
+              <a:buChar char="•"/>
+            </a:pPr>
+            <a:r>
+              <a:rPr lang="de-DE" sz="1600" dirty="0">
+                <a:solidFill>
+                  <a:srgbClr val="262626"/>
+                </a:solidFill>
+              </a:rPr>
+              <a:t>Datenübertragung</a:t>
+            </a:r>
+          </a:p>
+          <a:p>
+            <a:pPr marL="203200" indent="-203200" algn="l">
+              <a:spcAft>
+                <a:spcPts val="600"/>
+              </a:spcAft>
+              <a:buClr>
+                <a:srgbClr val="C1002A"/>
+              </a:buClr>
+              <a:buFont typeface="Arial"/>
+              <a:buChar char="•"/>
+            </a:pPr>
+            <a:r>
+              <a:rPr lang="de-DE" sz="1600" dirty="0">
+                <a:solidFill>
+                  <a:srgbClr val="262626"/>
+                </a:solidFill>
+              </a:rPr>
+              <a:t>Überwachung</a:t>
+            </a:r>
+          </a:p>
+        </p:txBody>
+      </p:sp>
+      <p:sp>
+        <p:nvSpPr>
+          <p:cNvPr id="20" name="Akzentlinie"/>
+          <p:cNvSpPr/>
+          <p:nvPr/>
+        </p:nvSpPr>
+        <p:spPr>
+          <a:xfrm>
+            <a:off x="914400" y="812800"/>
+            <a:ext cx="50800" cy="431800"/>
+          </a:xfrm>
+          <a:prstGeom prst="rect">
+            <a:avLst/>
+          </a:prstGeom>
+          <a:solidFill>
+            <a:srgbClr val="C1002A"/>
+          </a:solidFill>
+          <a:ln>
+            <a:noFill/>
+          </a:ln>
+        </p:spPr>
+        <p:txBody>
+          <a:bodyPr/>
+          <a:lstStyle/>
+          <a:p>
+            <a:endParaRPr lang="de-DE"/>
+          </a:p>
+        </p:txBody>
+      </p:sp>
+      <p:sp>
+        <p:nvSpPr>
+          <p:cNvPr id="21" name="Rechts"/>
+          <p:cNvSpPr txBox="1"/>
+          <p:nvPr/>
+        </p:nvSpPr>
+        <p:spPr>
+          <a:xfrm>
+            <a:off x="6959600" y="1905000"/>
+            <a:ext cx="4318000" cy="3175000"/>
+          </a:xfrm>
+          <a:prstGeom prst="rect">
+            <a:avLst/>
+          </a:prstGeom>
+          <a:noFill/>
+        </p:spPr>
+        <p:txBody>
+          <a:bodyPr wrap="square" lIns="0" tIns="0" rIns="0" bIns="0" anchor="t"/>
+          <a:lstStyle/>
+          <a:p>
+            <a:pPr algn="l">
+              <a:spcAft>
+                <a:spcPts val="600"/>
+              </a:spcAft>
+            </a:pPr>
+            <a:r>
+              <a:rPr lang="de-DE" sz="2000" b="1" dirty="0">
+                <a:solidFill>
+                  <a:srgbClr val="262626"/>
+                </a:solidFill>
+              </a:rPr>
+              <a:t>HPC-Umgebung</a:t>
+            </a:r>
+          </a:p>
+          <a:p>
+            <a:pPr algn="l">
+              <a:spcAft>
+                <a:spcPts val="800"/>
+              </a:spcAft>
+            </a:pPr>
+            <a:r>
+              <a:rPr lang="de-DE" sz="1600" dirty="0">
+                <a:solidFill>
+                  <a:srgbClr val="595959"/>
+                </a:solidFill>
+              </a:rPr>
+              <a:t>Rechen- und datenintensive wissenschaftliche Workflows können von HPC-Ressourcen profitieren.</a:t>
+            </a:r>
+          </a:p>
+          <a:p>
+            <a:pPr algn="l">
+              <a:spcAft>
+                <a:spcPts val="1600"/>
+              </a:spcAft>
+            </a:pPr>
+            <a:r>
+              <a:rPr lang="de-DE" sz="1400" dirty="0">
+                <a:solidFill>
+                  <a:srgbClr val="595959"/>
+                </a:solidFill>
+              </a:rPr>
+              <a:t>Beispiele: </a:t>
+            </a:r>
+            <a:r>
+              <a:rPr lang="de-DE" sz="1400" dirty="0">
+                <a:solidFill>
+                  <a:srgbClr val="262626"/>
+                </a:solidFill>
+              </a:rPr>
+              <a:t>Simulationen · </a:t>
+            </a:r>
+            <a:r>
+              <a:rPr lang="de-DE" sz="1400" dirty="0" err="1">
+                <a:solidFill>
+                  <a:srgbClr val="262626"/>
+                </a:solidFill>
+              </a:rPr>
+              <a:t>Machine</a:t>
+            </a:r>
+            <a:r>
+              <a:rPr lang="de-DE" sz="1400" dirty="0">
+                <a:solidFill>
+                  <a:srgbClr val="262626"/>
+                </a:solidFill>
+              </a:rPr>
+              <a:t> Learning · Bioinformatik</a:t>
+            </a:r>
+          </a:p>
+          <a:p>
+            <a:pPr marL="203200" indent="-203200" algn="l">
+              <a:spcAft>
+                <a:spcPts val="200"/>
+              </a:spcAft>
+              <a:buClr>
+                <a:srgbClr val="C1002A"/>
+              </a:buClr>
+              <a:buFont typeface="Arial"/>
+              <a:buChar char="•"/>
+            </a:pPr>
+            <a:r>
+              <a:rPr lang="de-DE" sz="1600" dirty="0">
+                <a:solidFill>
+                  <a:srgbClr val="262626"/>
+                </a:solidFill>
+              </a:rPr>
+              <a:t>Ressourcenverwaltung</a:t>
+            </a:r>
+          </a:p>
+          <a:p>
+            <a:pPr marL="203200" algn="l">
+              <a:spcAft>
+                <a:spcPts val="1600"/>
+              </a:spcAft>
+            </a:pPr>
+            <a:r>
+              <a:rPr lang="de-DE" sz="1400" dirty="0">
+                <a:solidFill>
+                  <a:srgbClr val="595959"/>
+                </a:solidFill>
+              </a:rPr>
+              <a:t>z. B. durch Slurm</a:t>
+            </a:r>
+          </a:p>
+          <a:p>
+            <a:pPr algn="l"/>
+            <a:r>
+              <a:rPr lang="de-DE" sz="1600" b="1" dirty="0">
+                <a:solidFill>
+                  <a:srgbClr val="262626"/>
+                </a:solidFill>
+              </a:rPr>
+              <a:t>WMS müssen in diese Ausführungsumgebung integriert werden.</a:t>
+            </a:r>
+          </a:p>
+        </p:txBody>
+      </p:sp>
+      <p:cxnSp>
+        <p:nvCxnSpPr>
+          <p:cNvPr id="22" name="Verbindung"/>
+          <p:cNvCxnSpPr/>
+          <p:nvPr/>
+        </p:nvCxnSpPr>
+        <p:spPr>
+          <a:xfrm>
+            <a:off x="5867400" y="3073400"/>
+            <a:ext cx="762000" cy="0"/>
+          </a:xfrm>
+          <a:prstGeom prst="straightConnector1">
+            <a:avLst/>
+          </a:prstGeom>
+          <a:ln w="12700">
+            <a:solidFill>
+              <a:srgbClr val="A6A6A6"/>
+            </a:solidFill>
+            <a:tailEnd type="triangle" w="med" len="med"/>
+          </a:ln>
+        </p:spPr>
+      </p:cxnSp>
+      <p:sp>
+        <p:nvSpPr>
+          <p:cNvPr id="23" name="Überleitung"/>
+          <p:cNvSpPr txBox="1"/>
+          <p:nvPr/>
+        </p:nvSpPr>
+        <p:spPr>
+          <a:xfrm>
+            <a:off x="1219200" y="5461000"/>
+            <a:ext cx="10058400" cy="330200"/>
+          </a:xfrm>
+          <a:prstGeom prst="rect">
+            <a:avLst/>
+          </a:prstGeom>
+          <a:noFill/>
+        </p:spPr>
+        <p:txBody>
+          <a:bodyPr wrap="square" lIns="0" tIns="0" rIns="0" bIns="0" anchor="t"/>
+          <a:lstStyle/>
+          <a:p>
+            <a:pPr algn="l"/>
+            <a:r>
+              <a:rPr lang="de-DE" sz="1600" b="1" dirty="0">
+                <a:solidFill>
+                  <a:srgbClr val="C1002A"/>
+                </a:solidFill>
+              </a:rPr>
+              <a:t>Wie unterscheiden sich WMS in Modellierung, Laufzeitverhalten und HPC-Einsatz?</a:t>
+            </a:r>
+          </a:p>
+        </p:txBody>
+      </p:sp>
+      <p:sp>
+        <p:nvSpPr>
+          <p:cNvPr id="40" name="Foliennummer"/>
+          <p:cNvSpPr txBox="1"/>
+          <p:nvPr/>
+        </p:nvSpPr>
+        <p:spPr>
+          <a:xfrm>
+            <a:off x="10769600" y="6197600"/>
+            <a:ext cx="508000" cy="254000"/>
+          </a:xfrm>
+          <a:prstGeom prst="rect">
+            <a:avLst/>
+          </a:prstGeom>
+          <a:noFill/>
+        </p:spPr>
+        <p:txBody>
+          <a:bodyPr wrap="square" lIns="0" tIns="0" rIns="0" bIns="0" anchor="ctr"/>
+          <a:lstStyle/>
+          <a:p>
+            <a:pPr algn="r"/>
+            <a:r>
+              <a:rPr lang="de-DE" sz="1200" dirty="0">
+                <a:solidFill>
+                  <a:srgbClr val="8C8C8C"/>
+                </a:solidFill>
+              </a:rPr>
+              <a:t>4</a:t>
+            </a:r>
+          </a:p>
+        </p:txBody>
+      </p:sp>
+      <p:cxnSp>
+        <p:nvCxnSpPr>
+          <p:cNvPr id="50" name="Fortschritt Linie"/>
+          <p:cNvCxnSpPr/>
+          <p:nvPr/>
+        </p:nvCxnSpPr>
+        <p:spPr>
+          <a:xfrm>
+            <a:off x="1219200" y="6172200"/>
+            <a:ext cx="5080000" cy="0"/>
+          </a:xfrm>
+          <a:prstGeom prst="line">
+            <a:avLst/>
+          </a:prstGeom>
+          <a:ln w="6350">
+            <a:solidFill>
+              <a:srgbClr val="D9D9D9"/>
+            </a:solidFill>
+          </a:ln>
+        </p:spPr>
+      </p:cxnSp>
+      <p:sp>
+        <p:nvSpPr>
+          <p:cNvPr id="51" name="Marker Motivation"/>
+          <p:cNvSpPr/>
+          <p:nvPr/>
+        </p:nvSpPr>
+        <p:spPr>
+          <a:xfrm>
+            <a:off x="1174750" y="6127750"/>
+            <a:ext cx="88900" cy="88900"/>
+          </a:xfrm>
+          <a:prstGeom prst="ellipse">
+            <a:avLst/>
+          </a:prstGeom>
+          <a:solidFill>
+            <a:srgbClr val="C1002A"/>
+          </a:solidFill>
+          <a:ln>
+            <a:noFill/>
+          </a:ln>
+        </p:spPr>
+        <p:txBody>
+          <a:bodyPr/>
+          <a:lstStyle/>
+          <a:p>
+            <a:endParaRPr lang="de-DE"/>
+          </a:p>
+        </p:txBody>
+      </p:sp>
+      <p:sp>
+        <p:nvSpPr>
+          <p:cNvPr id="52" name="Label Motivation"/>
+          <p:cNvSpPr txBox="1"/>
+          <p:nvPr/>
+        </p:nvSpPr>
+        <p:spPr>
+          <a:xfrm>
+            <a:off x="1219200" y="6273800"/>
+            <a:ext cx="1270000" cy="203200"/>
+          </a:xfrm>
+          <a:prstGeom prst="rect">
+            <a:avLst/>
+          </a:prstGeom>
+          <a:noFill/>
+        </p:spPr>
+        <p:txBody>
+          <a:bodyPr wrap="none" lIns="0" tIns="0" rIns="0" bIns="0" anchor="t"/>
+          <a:lstStyle/>
+          <a:p>
+            <a:pPr algn="l"/>
+            <a:r>
+              <a:rPr lang="de-DE" sz="1000" b="1" dirty="0">
+                <a:solidFill>
+                  <a:srgbClr val="C1002A"/>
+                </a:solidFill>
+              </a:rPr>
+              <a:t>Motivation</a:t>
+            </a:r>
+          </a:p>
+        </p:txBody>
+      </p:sp>
+      <p:sp>
+        <p:nvSpPr>
+          <p:cNvPr id="53" name="Marker Methodik"/>
+          <p:cNvSpPr/>
+          <p:nvPr/>
+        </p:nvSpPr>
+        <p:spPr>
+          <a:xfrm>
+            <a:off x="2457450" y="6140450"/>
+            <a:ext cx="63500" cy="63500"/>
+          </a:xfrm>
+          <a:prstGeom prst="ellipse">
+            <a:avLst/>
+          </a:prstGeom>
+          <a:solidFill>
+            <a:srgbClr val="BFBFBF"/>
+          </a:solidFill>
+          <a:ln>
+            <a:noFill/>
+          </a:ln>
+        </p:spPr>
+        <p:txBody>
+          <a:bodyPr/>
+          <a:lstStyle/>
+          <a:p>
+            <a:endParaRPr lang="de-DE"/>
+          </a:p>
+        </p:txBody>
+      </p:sp>
+      <p:sp>
+        <p:nvSpPr>
+          <p:cNvPr id="54" name="Label Methodik"/>
+          <p:cNvSpPr txBox="1"/>
+          <p:nvPr/>
+        </p:nvSpPr>
+        <p:spPr>
+          <a:xfrm>
+            <a:off x="1854200" y="6273800"/>
+            <a:ext cx="1270000" cy="203200"/>
+          </a:xfrm>
+          <a:prstGeom prst="rect">
+            <a:avLst/>
+          </a:prstGeom>
+          <a:noFill/>
+        </p:spPr>
+        <p:txBody>
+          <a:bodyPr wrap="none" lIns="0" tIns="0" rIns="0" bIns="0" anchor="t"/>
+          <a:lstStyle/>
+          <a:p>
+            <a:pPr algn="ctr"/>
+            <a:r>
+              <a:rPr lang="de-DE" sz="1000" dirty="0">
+                <a:solidFill>
+                  <a:srgbClr val="A6A6A6"/>
+                </a:solidFill>
+              </a:rPr>
+              <a:t>Methodik</a:t>
+            </a:r>
+          </a:p>
+        </p:txBody>
+      </p:sp>
+      <p:sp>
+        <p:nvSpPr>
+          <p:cNvPr id="55" name="Marker Systeme"/>
+          <p:cNvSpPr/>
+          <p:nvPr/>
+        </p:nvSpPr>
+        <p:spPr>
+          <a:xfrm>
+            <a:off x="3727450" y="6140450"/>
+            <a:ext cx="63500" cy="63500"/>
+          </a:xfrm>
+          <a:prstGeom prst="ellipse">
+            <a:avLst/>
+          </a:prstGeom>
+          <a:solidFill>
+            <a:srgbClr val="BFBFBF"/>
+          </a:solidFill>
+          <a:ln>
+            <a:noFill/>
+          </a:ln>
+        </p:spPr>
+        <p:txBody>
+          <a:bodyPr/>
+          <a:lstStyle/>
+          <a:p>
+            <a:endParaRPr lang="de-DE"/>
+          </a:p>
+        </p:txBody>
+      </p:sp>
+      <p:sp>
+        <p:nvSpPr>
+          <p:cNvPr id="56" name="Label Systeme"/>
+          <p:cNvSpPr txBox="1"/>
+          <p:nvPr/>
+        </p:nvSpPr>
+        <p:spPr>
+          <a:xfrm>
+            <a:off x="3124200" y="6273800"/>
+            <a:ext cx="1270000" cy="203200"/>
+          </a:xfrm>
+          <a:prstGeom prst="rect">
+            <a:avLst/>
+          </a:prstGeom>
+          <a:noFill/>
+        </p:spPr>
+        <p:txBody>
+          <a:bodyPr wrap="none" lIns="0" tIns="0" rIns="0" bIns="0" anchor="t"/>
+          <a:lstStyle/>
+          <a:p>
+            <a:pPr algn="ctr"/>
+            <a:r>
+              <a:rPr lang="de-DE" sz="1000" dirty="0">
+                <a:solidFill>
+                  <a:srgbClr val="A6A6A6"/>
+                </a:solidFill>
+              </a:rPr>
+              <a:t>Systeme</a:t>
+            </a:r>
+          </a:p>
+        </p:txBody>
+      </p:sp>
+      <p:sp>
+        <p:nvSpPr>
+          <p:cNvPr id="57" name="Marker Untersuchung"/>
+          <p:cNvSpPr/>
+          <p:nvPr/>
+        </p:nvSpPr>
+        <p:spPr>
+          <a:xfrm>
+            <a:off x="4997450" y="6140450"/>
+            <a:ext cx="63500" cy="63500"/>
+          </a:xfrm>
+          <a:prstGeom prst="ellipse">
+            <a:avLst/>
+          </a:prstGeom>
+          <a:solidFill>
+            <a:srgbClr val="BFBFBF"/>
+          </a:solidFill>
+          <a:ln>
+            <a:noFill/>
+          </a:ln>
+        </p:spPr>
+        <p:txBody>
+          <a:bodyPr/>
+          <a:lstStyle/>
+          <a:p>
+            <a:endParaRPr lang="de-DE"/>
+          </a:p>
+        </p:txBody>
+      </p:sp>
+      <p:sp>
+        <p:nvSpPr>
+          <p:cNvPr id="58" name="Label Untersuchung"/>
+          <p:cNvSpPr txBox="1"/>
+          <p:nvPr/>
+        </p:nvSpPr>
+        <p:spPr>
+          <a:xfrm>
+            <a:off x="4394200" y="6273800"/>
+            <a:ext cx="1270000" cy="203200"/>
+          </a:xfrm>
+          <a:prstGeom prst="rect">
+            <a:avLst/>
+          </a:prstGeom>
+          <a:noFill/>
+        </p:spPr>
+        <p:txBody>
+          <a:bodyPr wrap="none" lIns="0" tIns="0" rIns="0" bIns="0" anchor="t"/>
+          <a:lstStyle/>
+          <a:p>
+            <a:pPr algn="ctr"/>
+            <a:r>
+              <a:rPr lang="de-DE" sz="1000" dirty="0">
+                <a:solidFill>
+                  <a:srgbClr val="A6A6A6"/>
+                </a:solidFill>
+              </a:rPr>
+              <a:t>Untersuchung</a:t>
+            </a:r>
+          </a:p>
+        </p:txBody>
+      </p:sp>
+      <p:sp>
+        <p:nvSpPr>
+          <p:cNvPr id="59" name="Marker Fazit"/>
+          <p:cNvSpPr/>
+          <p:nvPr/>
+        </p:nvSpPr>
+        <p:spPr>
+          <a:xfrm>
+            <a:off x="6267450" y="6140450"/>
+            <a:ext cx="63500" cy="63500"/>
+          </a:xfrm>
+          <a:prstGeom prst="ellipse">
+            <a:avLst/>
+          </a:prstGeom>
+          <a:solidFill>
+            <a:srgbClr val="BFBFBF"/>
+          </a:solidFill>
+          <a:ln>
+            <a:noFill/>
+          </a:ln>
+        </p:spPr>
+        <p:txBody>
+          <a:bodyPr/>
+          <a:lstStyle/>
+          <a:p>
+            <a:endParaRPr lang="de-DE"/>
+          </a:p>
+        </p:txBody>
+      </p:sp>
+      <p:sp>
+        <p:nvSpPr>
+          <p:cNvPr id="60" name="Label Fazit"/>
+          <p:cNvSpPr txBox="1"/>
+          <p:nvPr/>
+        </p:nvSpPr>
+        <p:spPr>
+          <a:xfrm>
+            <a:off x="5029200" y="6273800"/>
+            <a:ext cx="1270000" cy="203200"/>
+          </a:xfrm>
+          <a:prstGeom prst="rect">
+            <a:avLst/>
+          </a:prstGeom>
+          <a:noFill/>
+        </p:spPr>
+        <p:txBody>
+          <a:bodyPr wrap="none" lIns="0" tIns="0" rIns="0" bIns="0" anchor="t"/>
+          <a:lstStyle/>
+          <a:p>
+            <a:pPr algn="r"/>
+            <a:r>
+              <a:rPr lang="de-DE" sz="1000" dirty="0">
+                <a:solidFill>
+                  <a:srgbClr val="A6A6A6"/>
+                </a:solidFill>
+              </a:rPr>
+              <a:t>Fazit</a:t>
+            </a:r>
+          </a:p>
+        </p:txBody>
+      </p:sp>
+    </p:spTree>
+    <p:extLst>
+      <p:ext uri="{BB962C8B-B14F-4D97-AF65-F5344CB8AC3E}">
+        <p14:creationId xmlns:p14="http://schemas.microsoft.com/office/powerpoint/2010/main" val="767066191"/>
+      </p:ext>
+    </p:extLst>
+  </p:cSld>
+  <p:clrMapOvr>
+    <a:masterClrMapping/>
+  </p:clrMapOvr>
+</p:sld>
+</file>
+
+<file path=ppt/slides/slide5.xml><?xml version="1.0" encoding="utf-8"?>
+<p:sld xmlns:a="http://schemas.openxmlformats.org/drawingml/2006/main" xmlns:r="http://schemas.openxmlformats.org/officeDocument/2006/relationships" xmlns:p="http://schemas.openxmlformats.org/presentationml/2006/main">
+  <p:cSld>
+    <p:spTree>
+      <p:nvGrpSpPr>
+        <p:cNvPr id="1" name=""/>
+        <p:cNvGrpSpPr/>
+        <p:nvPr/>
+      </p:nvGrpSpPr>
+      <p:grpSpPr>
+        <a:xfrm>
+          <a:off x="0" y="0"/>
+          <a:ext cx="0" cy="0"/>
+          <a:chOff x="0" y="0"/>
+          <a:chExt cx="0" cy="0"/>
+        </a:xfrm>
+      </p:grpSpPr>
+      <p:sp>
+        <p:nvSpPr>
+          <p:cNvPr id="2" name="Titel 1">
+            <a:extLst>
+              <a:ext uri="{FF2B5EF4-FFF2-40B4-BE49-F238E27FC236}">
+                <a16:creationId xmlns:a16="http://schemas.microsoft.com/office/drawing/2014/main" id="{639EFA8F-6F04-1A12-DE30-7DEE733FC41B}"/>
+              </a:ext>
+            </a:extLst>
+          </p:cNvPr>
+          <p:cNvSpPr>
+            <a:spLocks noGrp="1"/>
+          </p:cNvSpPr>
+          <p:nvPr>
+            <p:ph type="title"/>
+          </p:nvPr>
+        </p:nvSpPr>
+        <p:spPr>
+          <a:xfrm>
+            <a:off x="1219200" y="812800"/>
+            <a:ext cx="10058400" cy="787400"/>
+          </a:xfrm>
+        </p:spPr>
+        <p:txBody>
+          <a:bodyPr wrap="square" lIns="0" tIns="0" rIns="0" bIns="0" anchor="t">
+            <a:normAutofit/>
+          </a:bodyPr>
+          <a:lstStyle/>
+          <a:p>
+            <a:pPr algn="l"/>
+            <a:r>
+              <a:rPr lang="de-DE" sz="2600" b="1" dirty="0">
+                <a:solidFill>
+                  <a:srgbClr val="262626"/>
+                </a:solidFill>
+              </a:rPr>
+              <a:t>Ziel und Forschungsfragen</a:t>
+            </a:r>
+          </a:p>
+        </p:txBody>
+      </p:sp>
+      <p:sp>
+        <p:nvSpPr>
+          <p:cNvPr id="3" name="Inhaltsplatzhalter 2">
+            <a:extLst>
+              <a:ext uri="{FF2B5EF4-FFF2-40B4-BE49-F238E27FC236}">
+                <a16:creationId xmlns:a16="http://schemas.microsoft.com/office/drawing/2014/main" id="{BC66CCFD-4293-3292-23B9-7587705DF3B9}"/>
+              </a:ext>
+            </a:extLst>
+          </p:cNvPr>
+          <p:cNvSpPr>
+            <a:spLocks noGrp="1"/>
+          </p:cNvSpPr>
+          <p:nvPr>
+            <p:ph idx="1"/>
+          </p:nvPr>
+        </p:nvSpPr>
+        <p:spPr>
+          <a:xfrm>
+            <a:off x="1219200" y="1778000"/>
+            <a:ext cx="10058400" cy="762000"/>
+          </a:xfrm>
+        </p:spPr>
+        <p:txBody>
+          <a:bodyPr wrap="square" lIns="0" tIns="0" rIns="0" bIns="0" anchor="t">
+            <a:normAutofit lnSpcReduction="10000"/>
+          </a:bodyPr>
+          <a:lstStyle/>
+          <a:p>
+            <a:pPr marL="0" indent="0" algn="l">
+              <a:spcAft>
+                <a:spcPts val="400"/>
+              </a:spcAft>
+              <a:buNone/>
+            </a:pPr>
+            <a:r>
+              <a:rPr lang="de-DE" sz="1200" b="1" spc="150" dirty="0">
+                <a:solidFill>
+                  <a:srgbClr val="C1002A"/>
+                </a:solidFill>
+              </a:rPr>
+              <a:t>ZIEL DER ARBEIT</a:t>
+            </a:r>
+          </a:p>
+          <a:p>
+            <a:pPr marL="0" indent="0" algn="l">
+              <a:buNone/>
+            </a:pPr>
+            <a:r>
+              <a:rPr lang="de-DE" sz="1600" dirty="0">
+                <a:solidFill>
+                  <a:srgbClr val="262626"/>
+                </a:solidFill>
+              </a:rPr>
+              <a:t>Systematischer Vergleich ausgewählter Workflow-Management-Systeme hinsichtlich Modellierung, Laufzeitverhalten und Einsatz in einer HPC-Umgebung</a:t>
+            </a:r>
+          </a:p>
+        </p:txBody>
+      </p:sp>
+      <p:sp>
+        <p:nvSpPr>
+          <p:cNvPr id="20" name="Akzentlinie"/>
+          <p:cNvSpPr/>
+          <p:nvPr/>
+        </p:nvSpPr>
+        <p:spPr>
+          <a:xfrm>
+            <a:off x="914400" y="812800"/>
+            <a:ext cx="50800" cy="431800"/>
+          </a:xfrm>
+          <a:prstGeom prst="rect">
+            <a:avLst/>
+          </a:prstGeom>
+          <a:solidFill>
+            <a:srgbClr val="C1002A"/>
+          </a:solidFill>
+          <a:ln>
+            <a:noFill/>
+          </a:ln>
+        </p:spPr>
+        <p:txBody>
+          <a:bodyPr/>
+          <a:lstStyle/>
+          <a:p>
+            <a:endParaRPr lang="de-DE"/>
+          </a:p>
+        </p:txBody>
+      </p:sp>
+      <p:cxnSp>
+        <p:nvCxnSpPr>
+          <p:cNvPr id="24" name="Trenner"/>
+          <p:cNvCxnSpPr/>
+          <p:nvPr/>
+        </p:nvCxnSpPr>
+        <p:spPr>
+          <a:xfrm>
+            <a:off x="1219200" y="2717800"/>
+            <a:ext cx="10058400" cy="0"/>
+          </a:xfrm>
+          <a:prstGeom prst="line">
+            <a:avLst/>
+          </a:prstGeom>
+          <a:ln w="6350">
+            <a:solidFill>
+              <a:srgbClr val="D9D9D9"/>
+            </a:solidFill>
+          </a:ln>
+        </p:spPr>
+      </p:cxnSp>
+      <p:sp>
+        <p:nvSpPr>
+          <p:cNvPr id="30" name="Frage F1"/>
+          <p:cNvSpPr txBox="1"/>
+          <p:nvPr/>
+        </p:nvSpPr>
+        <p:spPr>
+          <a:xfrm>
+            <a:off x="1219200" y="2946400"/>
+            <a:ext cx="4724400" cy="1219200"/>
+          </a:xfrm>
+          <a:prstGeom prst="rect">
+            <a:avLst/>
+          </a:prstGeom>
+          <a:noFill/>
+        </p:spPr>
+        <p:txBody>
+          <a:bodyPr wrap="square" lIns="0" tIns="0" rIns="0" bIns="0" anchor="t"/>
+          <a:lstStyle/>
+          <a:p>
+            <a:pPr algn="l">
+              <a:spcAft>
+                <a:spcPts val="400"/>
+              </a:spcAft>
+            </a:pPr>
+            <a:r>
+              <a:rPr lang="de-DE" sz="1300" b="1" spc="100" dirty="0">
+                <a:solidFill>
+                  <a:srgbClr val="C1002A"/>
+                </a:solidFill>
+              </a:rPr>
+              <a:t>F1 · MODELLIERUNG</a:t>
+            </a:r>
+          </a:p>
+          <a:p>
+            <a:pPr algn="l">
+              <a:spcAft>
+                <a:spcPts val="300"/>
+              </a:spcAft>
+            </a:pPr>
+            <a:r>
+              <a:rPr lang="de-DE" sz="1400" dirty="0">
+                <a:solidFill>
+                  <a:srgbClr val="262626"/>
+                </a:solidFill>
+              </a:rPr>
+              <a:t>Wie unterscheiden sich die Systeme bei der Umsetzung eines Pipeline und </a:t>
+            </a:r>
+            <a:r>
+              <a:rPr lang="de-DE" sz="1400" dirty="0" err="1">
+                <a:solidFill>
+                  <a:srgbClr val="262626"/>
+                </a:solidFill>
+              </a:rPr>
+              <a:t>Scatter</a:t>
+            </a:r>
+            <a:r>
+              <a:rPr lang="de-DE" sz="1400" dirty="0">
+                <a:solidFill>
+                  <a:srgbClr val="262626"/>
+                </a:solidFill>
+              </a:rPr>
+              <a:t>-Gather Musters?</a:t>
+            </a:r>
+          </a:p>
+        </p:txBody>
+      </p:sp>
+      <p:sp>
+        <p:nvSpPr>
+          <p:cNvPr id="31" name="Frage F2"/>
+          <p:cNvSpPr txBox="1"/>
+          <p:nvPr/>
+        </p:nvSpPr>
+        <p:spPr>
+          <a:xfrm>
+            <a:off x="6451600" y="2946400"/>
+            <a:ext cx="4724400" cy="1219200"/>
+          </a:xfrm>
+          <a:prstGeom prst="rect">
+            <a:avLst/>
+          </a:prstGeom>
+          <a:noFill/>
+        </p:spPr>
+        <p:txBody>
+          <a:bodyPr wrap="square" lIns="0" tIns="0" rIns="0" bIns="0" anchor="t"/>
+          <a:lstStyle/>
+          <a:p>
+            <a:pPr algn="l">
+              <a:spcAft>
+                <a:spcPts val="400"/>
+              </a:spcAft>
+            </a:pPr>
+            <a:r>
+              <a:rPr lang="de-DE" sz="1300" b="1" spc="100" dirty="0">
+                <a:solidFill>
+                  <a:srgbClr val="C1002A"/>
+                </a:solidFill>
+              </a:rPr>
+              <a:t>F2 · LAUFZEITVERHALTEN</a:t>
+            </a:r>
+          </a:p>
+          <a:p>
+            <a:pPr algn="l">
+              <a:spcAft>
+                <a:spcPts val="300"/>
+              </a:spcAft>
+            </a:pPr>
+            <a:r>
+              <a:rPr lang="de-DE" sz="1400" dirty="0">
+                <a:solidFill>
+                  <a:srgbClr val="262626"/>
+                </a:solidFill>
+              </a:rPr>
+              <a:t>Welches Laufzeitverhalten zeigen die Systeme bei der Ausführung dieser Workflows?</a:t>
+            </a:r>
+          </a:p>
+          <a:p>
+            <a:pPr algn="l"/>
+            <a:r>
+              <a:rPr lang="de-DE" sz="1200" dirty="0">
+                <a:solidFill>
+                  <a:srgbClr val="595959"/>
+                </a:solidFill>
+              </a:rPr>
+              <a:t>Makespan · Overhead · Übergangslatenz · Startspreizung</a:t>
+            </a:r>
+          </a:p>
+        </p:txBody>
+      </p:sp>
+      <p:sp>
+        <p:nvSpPr>
+          <p:cNvPr id="32" name="Frage F3"/>
+          <p:cNvSpPr txBox="1"/>
+          <p:nvPr/>
+        </p:nvSpPr>
+        <p:spPr>
+          <a:xfrm>
+            <a:off x="1219200" y="4292600"/>
+            <a:ext cx="4724400" cy="1219200"/>
+          </a:xfrm>
+          <a:prstGeom prst="rect">
+            <a:avLst/>
+          </a:prstGeom>
+          <a:noFill/>
+        </p:spPr>
+        <p:txBody>
+          <a:bodyPr wrap="square" lIns="0" tIns="0" rIns="0" bIns="0" anchor="t"/>
+          <a:lstStyle/>
+          <a:p>
+            <a:pPr algn="l">
+              <a:spcAft>
+                <a:spcPts val="400"/>
+              </a:spcAft>
+            </a:pPr>
+            <a:r>
+              <a:rPr lang="de-DE" sz="1300" b="1" spc="100" dirty="0">
+                <a:solidFill>
+                  <a:srgbClr val="C1002A"/>
+                </a:solidFill>
+              </a:rPr>
+              <a:t>F3 · HPC-EINSATZ</a:t>
+            </a:r>
+          </a:p>
+          <a:p>
+            <a:pPr algn="l">
+              <a:spcAft>
+                <a:spcPts val="300"/>
+              </a:spcAft>
+            </a:pPr>
+            <a:r>
+              <a:rPr lang="de-DE" sz="1400" dirty="0">
+                <a:solidFill>
+                  <a:srgbClr val="262626"/>
+                </a:solidFill>
+              </a:rPr>
+              <a:t>Wie lassen sich die Systeme auf einem Slurm-basierten HPC-System betreiben und wie setzen sich dort die Laufzeiten zusammen?</a:t>
+            </a:r>
+          </a:p>
+        </p:txBody>
+      </p:sp>
+      <p:sp>
+        <p:nvSpPr>
+          <p:cNvPr id="33" name="Frage F4"/>
+          <p:cNvSpPr txBox="1"/>
+          <p:nvPr/>
+        </p:nvSpPr>
+        <p:spPr>
+          <a:xfrm>
+            <a:off x="6451600" y="4292600"/>
+            <a:ext cx="4724400" cy="1219200"/>
+          </a:xfrm>
+          <a:prstGeom prst="rect">
+            <a:avLst/>
+          </a:prstGeom>
+          <a:noFill/>
+        </p:spPr>
+        <p:txBody>
+          <a:bodyPr wrap="square" lIns="0" tIns="0" rIns="0" bIns="0" anchor="t"/>
+          <a:lstStyle/>
+          <a:p>
+            <a:pPr algn="l">
+              <a:spcAft>
+                <a:spcPts val="400"/>
+              </a:spcAft>
+            </a:pPr>
+            <a:r>
+              <a:rPr lang="de-DE" sz="1300" b="1" spc="100" dirty="0">
+                <a:solidFill>
+                  <a:srgbClr val="C1002A"/>
+                </a:solidFill>
+              </a:rPr>
+              <a:t>F4 · EINORDNUNG</a:t>
+            </a:r>
+          </a:p>
+          <a:p>
+            <a:pPr algn="l">
+              <a:spcAft>
+                <a:spcPts val="300"/>
+              </a:spcAft>
+            </a:pPr>
+            <a:r>
+              <a:rPr lang="de-DE" sz="1400" dirty="0">
+                <a:solidFill>
+                  <a:srgbClr val="262626"/>
+                </a:solidFill>
+              </a:rPr>
+              <a:t>Für welche Arten von Workflows und Anwendungsfällen erscheinen die einzelnen Systeme besonders geeignet?</a:t>
+            </a:r>
+          </a:p>
+        </p:txBody>
+      </p:sp>
+      <p:sp>
+        <p:nvSpPr>
+          <p:cNvPr id="40" name="Foliennummer"/>
+          <p:cNvSpPr txBox="1"/>
+          <p:nvPr/>
+        </p:nvSpPr>
+        <p:spPr>
+          <a:xfrm>
+            <a:off x="10769600" y="6197600"/>
+            <a:ext cx="508000" cy="254000"/>
+          </a:xfrm>
+          <a:prstGeom prst="rect">
+            <a:avLst/>
+          </a:prstGeom>
+          <a:noFill/>
+        </p:spPr>
+        <p:txBody>
+          <a:bodyPr wrap="square" lIns="0" tIns="0" rIns="0" bIns="0" anchor="ctr"/>
+          <a:lstStyle/>
+          <a:p>
+            <a:pPr algn="r"/>
+            <a:r>
+              <a:rPr lang="de-DE" sz="1200" dirty="0">
+                <a:solidFill>
+                  <a:srgbClr val="8C8C8C"/>
+                </a:solidFill>
+              </a:rPr>
+              <a:t>5</a:t>
+            </a:r>
+          </a:p>
+        </p:txBody>
+      </p:sp>
+      <p:cxnSp>
+        <p:nvCxnSpPr>
+          <p:cNvPr id="50" name="Fortschritt Linie"/>
+          <p:cNvCxnSpPr/>
+          <p:nvPr/>
+        </p:nvCxnSpPr>
+        <p:spPr>
+          <a:xfrm>
+            <a:off x="1219200" y="6172200"/>
+            <a:ext cx="5080000" cy="0"/>
+          </a:xfrm>
+          <a:prstGeom prst="line">
+            <a:avLst/>
+          </a:prstGeom>
+          <a:ln w="6350">
+            <a:solidFill>
+              <a:srgbClr val="D9D9D9"/>
+            </a:solidFill>
+          </a:ln>
+        </p:spPr>
+      </p:cxnSp>
+      <p:sp>
+        <p:nvSpPr>
+          <p:cNvPr id="51" name="Marker Motivation"/>
+          <p:cNvSpPr/>
+          <p:nvPr/>
+        </p:nvSpPr>
+        <p:spPr>
+          <a:xfrm>
+            <a:off x="1174750" y="6127750"/>
+            <a:ext cx="88900" cy="88900"/>
+          </a:xfrm>
+          <a:prstGeom prst="ellipse">
+            <a:avLst/>
+          </a:prstGeom>
+          <a:solidFill>
+            <a:srgbClr val="C1002A"/>
+          </a:solidFill>
+          <a:ln>
+            <a:noFill/>
+          </a:ln>
+        </p:spPr>
+        <p:txBody>
+          <a:bodyPr/>
+          <a:lstStyle/>
+          <a:p>
+            <a:endParaRPr lang="de-DE"/>
+          </a:p>
+        </p:txBody>
+      </p:sp>
+      <p:sp>
+        <p:nvSpPr>
+          <p:cNvPr id="52" name="Label Motivation"/>
+          <p:cNvSpPr txBox="1"/>
+          <p:nvPr/>
+        </p:nvSpPr>
+        <p:spPr>
+          <a:xfrm>
+            <a:off x="1219200" y="6273800"/>
+            <a:ext cx="1270000" cy="203200"/>
+          </a:xfrm>
+          <a:prstGeom prst="rect">
+            <a:avLst/>
+          </a:prstGeom>
+          <a:noFill/>
+        </p:spPr>
+        <p:txBody>
+          <a:bodyPr wrap="none" lIns="0" tIns="0" rIns="0" bIns="0" anchor="t"/>
+          <a:lstStyle/>
+          <a:p>
+            <a:pPr algn="l"/>
+            <a:r>
+              <a:rPr lang="de-DE" sz="1000" b="1" dirty="0">
+                <a:solidFill>
+                  <a:srgbClr val="C1002A"/>
+                </a:solidFill>
+              </a:rPr>
+              <a:t>Motivation</a:t>
+            </a:r>
+          </a:p>
+        </p:txBody>
+      </p:sp>
+      <p:sp>
+        <p:nvSpPr>
+          <p:cNvPr id="53" name="Marker Methodik"/>
+          <p:cNvSpPr/>
+          <p:nvPr/>
+        </p:nvSpPr>
+        <p:spPr>
+          <a:xfrm>
+            <a:off x="2457450" y="6140450"/>
+            <a:ext cx="63500" cy="63500"/>
+          </a:xfrm>
+          <a:prstGeom prst="ellipse">
+            <a:avLst/>
+          </a:prstGeom>
+          <a:solidFill>
+            <a:srgbClr val="BFBFBF"/>
+          </a:solidFill>
+          <a:ln>
+            <a:noFill/>
+          </a:ln>
+        </p:spPr>
+        <p:txBody>
+          <a:bodyPr/>
+          <a:lstStyle/>
+          <a:p>
+            <a:endParaRPr lang="de-DE"/>
+          </a:p>
+        </p:txBody>
+      </p:sp>
+      <p:sp>
+        <p:nvSpPr>
+          <p:cNvPr id="54" name="Label Methodik"/>
+          <p:cNvSpPr txBox="1"/>
+          <p:nvPr/>
+        </p:nvSpPr>
+        <p:spPr>
+          <a:xfrm>
+            <a:off x="1854200" y="6273800"/>
+            <a:ext cx="1270000" cy="203200"/>
+          </a:xfrm>
+          <a:prstGeom prst="rect">
+            <a:avLst/>
+          </a:prstGeom>
+          <a:noFill/>
+        </p:spPr>
+        <p:txBody>
+          <a:bodyPr wrap="none" lIns="0" tIns="0" rIns="0" bIns="0" anchor="t"/>
+          <a:lstStyle/>
+          <a:p>
+            <a:pPr algn="ctr"/>
+            <a:r>
+              <a:rPr lang="de-DE" sz="1000" dirty="0">
+                <a:solidFill>
+                  <a:srgbClr val="A6A6A6"/>
+                </a:solidFill>
+              </a:rPr>
+              <a:t>Methodik</a:t>
+            </a:r>
+          </a:p>
+        </p:txBody>
+      </p:sp>
+      <p:sp>
+        <p:nvSpPr>
+          <p:cNvPr id="55" name="Marker Systeme"/>
+          <p:cNvSpPr/>
+          <p:nvPr/>
+        </p:nvSpPr>
+        <p:spPr>
+          <a:xfrm>
+            <a:off x="3727450" y="6140450"/>
+            <a:ext cx="63500" cy="63500"/>
+          </a:xfrm>
+          <a:prstGeom prst="ellipse">
+            <a:avLst/>
+          </a:prstGeom>
+          <a:solidFill>
+            <a:srgbClr val="BFBFBF"/>
+          </a:solidFill>
+          <a:ln>
+            <a:noFill/>
+          </a:ln>
+        </p:spPr>
+        <p:txBody>
+          <a:bodyPr/>
+          <a:lstStyle/>
+          <a:p>
+            <a:endParaRPr lang="de-DE"/>
+          </a:p>
+        </p:txBody>
+      </p:sp>
+      <p:sp>
+        <p:nvSpPr>
+          <p:cNvPr id="56" name="Label Systeme"/>
+          <p:cNvSpPr txBox="1"/>
+          <p:nvPr/>
+        </p:nvSpPr>
+        <p:spPr>
+          <a:xfrm>
+            <a:off x="3124200" y="6273800"/>
+            <a:ext cx="1270000" cy="203200"/>
+          </a:xfrm>
+          <a:prstGeom prst="rect">
+            <a:avLst/>
+          </a:prstGeom>
+          <a:noFill/>
+        </p:spPr>
+        <p:txBody>
+          <a:bodyPr wrap="none" lIns="0" tIns="0" rIns="0" bIns="0" anchor="t"/>
+          <a:lstStyle/>
+          <a:p>
+            <a:pPr algn="ctr"/>
+            <a:r>
+              <a:rPr lang="de-DE" sz="1000" dirty="0">
+                <a:solidFill>
+                  <a:srgbClr val="A6A6A6"/>
+                </a:solidFill>
+              </a:rPr>
+              <a:t>Systeme</a:t>
+            </a:r>
+          </a:p>
+        </p:txBody>
+      </p:sp>
+      <p:sp>
+        <p:nvSpPr>
+          <p:cNvPr id="57" name="Marker Untersuchung"/>
+          <p:cNvSpPr/>
+          <p:nvPr/>
+        </p:nvSpPr>
+        <p:spPr>
+          <a:xfrm>
+            <a:off x="4997450" y="6140450"/>
+            <a:ext cx="63500" cy="63500"/>
+          </a:xfrm>
+          <a:prstGeom prst="ellipse">
+            <a:avLst/>
+          </a:prstGeom>
+          <a:solidFill>
+            <a:srgbClr val="BFBFBF"/>
+          </a:solidFill>
+          <a:ln>
+            <a:noFill/>
+          </a:ln>
+        </p:spPr>
+        <p:txBody>
+          <a:bodyPr/>
+          <a:lstStyle/>
+          <a:p>
+            <a:endParaRPr lang="de-DE"/>
+          </a:p>
+        </p:txBody>
+      </p:sp>
+      <p:sp>
+        <p:nvSpPr>
+          <p:cNvPr id="58" name="Label Untersuchung"/>
+          <p:cNvSpPr txBox="1"/>
+          <p:nvPr/>
+        </p:nvSpPr>
+        <p:spPr>
+          <a:xfrm>
+            <a:off x="4394200" y="6273800"/>
+            <a:ext cx="1270000" cy="203200"/>
+          </a:xfrm>
+          <a:prstGeom prst="rect">
+            <a:avLst/>
+          </a:prstGeom>
+          <a:noFill/>
+        </p:spPr>
+        <p:txBody>
+          <a:bodyPr wrap="none" lIns="0" tIns="0" rIns="0" bIns="0" anchor="t"/>
+          <a:lstStyle/>
+          <a:p>
+            <a:pPr algn="ctr"/>
+            <a:r>
+              <a:rPr lang="de-DE" sz="1000" dirty="0">
+                <a:solidFill>
+                  <a:srgbClr val="A6A6A6"/>
+                </a:solidFill>
+              </a:rPr>
+              <a:t>Untersuchung</a:t>
+            </a:r>
+          </a:p>
+        </p:txBody>
+      </p:sp>
+      <p:sp>
+        <p:nvSpPr>
+          <p:cNvPr id="59" name="Marker Fazit"/>
+          <p:cNvSpPr/>
+          <p:nvPr/>
+        </p:nvSpPr>
+        <p:spPr>
+          <a:xfrm>
+            <a:off x="6267450" y="6140450"/>
+            <a:ext cx="63500" cy="63500"/>
+          </a:xfrm>
+          <a:prstGeom prst="ellipse">
+            <a:avLst/>
+          </a:prstGeom>
+          <a:solidFill>
+            <a:srgbClr val="BFBFBF"/>
+          </a:solidFill>
+          <a:ln>
+            <a:noFill/>
+          </a:ln>
+        </p:spPr>
+        <p:txBody>
+          <a:bodyPr/>
+          <a:lstStyle/>
+          <a:p>
+            <a:endParaRPr lang="de-DE"/>
+          </a:p>
+        </p:txBody>
+      </p:sp>
+      <p:sp>
+        <p:nvSpPr>
+          <p:cNvPr id="60" name="Label Fazit"/>
+          <p:cNvSpPr txBox="1"/>
+          <p:nvPr/>
+        </p:nvSpPr>
+        <p:spPr>
+          <a:xfrm>
+            <a:off x="5029200" y="6273800"/>
+            <a:ext cx="1270000" cy="203200"/>
+          </a:xfrm>
+          <a:prstGeom prst="rect">
+            <a:avLst/>
+          </a:prstGeom>
+          <a:noFill/>
+        </p:spPr>
+        <p:txBody>
+          <a:bodyPr wrap="none" lIns="0" tIns="0" rIns="0" bIns="0" anchor="t"/>
+          <a:lstStyle/>
+          <a:p>
+            <a:pPr algn="r"/>
+            <a:r>
+              <a:rPr lang="de-DE" sz="1000" dirty="0">
+                <a:solidFill>
+                  <a:srgbClr val="A6A6A6"/>
+                </a:solidFill>
+              </a:rPr>
+              <a:t>Fazit</a:t>
+            </a:r>
+          </a:p>
+        </p:txBody>
+      </p:sp>
+    </p:spTree>
+    <p:extLst>
+      <p:ext uri="{BB962C8B-B14F-4D97-AF65-F5344CB8AC3E}">
+        <p14:creationId xmlns:p14="http://schemas.microsoft.com/office/powerpoint/2010/main" val="1496952171"/>
+      </p:ext>
+    </p:extLst>
+  </p:cSld>
+  <p:clrMapOvr>
+    <a:masterClrMapping/>
+  </p:clrMapOvr>
+</p:sld>
+</file>
+
+<file path=ppt/slides/slide6.xml><?xml version="1.0" encoding="utf-8"?>
+<p:sld xmlns:a="http://schemas.openxmlformats.org/drawingml/2006/main" xmlns:r="http://schemas.openxmlformats.org/officeDocument/2006/relationships" xmlns:p="http://schemas.openxmlformats.org/presentationml/2006/main">
+  <p:cSld>
+    <p:spTree>
+      <p:nvGrpSpPr>
+        <p:cNvPr id="1" name=""/>
+        <p:cNvGrpSpPr/>
+        <p:nvPr/>
+      </p:nvGrpSpPr>
+      <p:grpSpPr>
+        <a:xfrm>
+          <a:off x="0" y="0"/>
+          <a:ext cx="0" cy="0"/>
+          <a:chOff x="0" y="0"/>
+          <a:chExt cx="0" cy="0"/>
+        </a:xfrm>
+      </p:grpSpPr>
+      <p:sp>
+        <p:nvSpPr>
+          <p:cNvPr id="2" name="Titel 1">
+            <a:extLst>
+              <a:ext uri="{FF2B5EF4-FFF2-40B4-BE49-F238E27FC236}">
+                <a16:creationId xmlns:a16="http://schemas.microsoft.com/office/drawing/2014/main" id="{84E26FD6-D96A-4610-4054-2346AC3DA424}"/>
+              </a:ext>
+            </a:extLst>
+          </p:cNvPr>
+          <p:cNvSpPr>
+            <a:spLocks noGrp="1"/>
+          </p:cNvSpPr>
+          <p:nvPr>
+            <p:ph type="title"/>
+          </p:nvPr>
+        </p:nvSpPr>
+        <p:spPr>
+          <a:xfrm>
+            <a:off x="1219200" y="812800"/>
+            <a:ext cx="10058400" cy="787400"/>
+          </a:xfrm>
+        </p:spPr>
+        <p:txBody>
+          <a:bodyPr wrap="square" lIns="0" tIns="0" rIns="0" bIns="0" anchor="t">
+            <a:normAutofit/>
+          </a:bodyPr>
+          <a:lstStyle/>
+          <a:p>
+            <a:pPr algn="l"/>
+            <a:r>
+              <a:rPr lang="de-DE" sz="2600" b="1" dirty="0">
+                <a:solidFill>
+                  <a:srgbClr val="262626"/>
+                </a:solidFill>
+              </a:rPr>
+              <a:t>Betrachtete Workflow-Management-Systeme</a:t>
+            </a:r>
+          </a:p>
+        </p:txBody>
+      </p:sp>
+      <p:sp>
+        <p:nvSpPr>
+          <p:cNvPr id="3" name="Inhaltsplatzhalter 2">
+            <a:extLst>
+              <a:ext uri="{FF2B5EF4-FFF2-40B4-BE49-F238E27FC236}">
+                <a16:creationId xmlns:a16="http://schemas.microsoft.com/office/drawing/2014/main" id="{F3186123-53BF-979A-60CA-7202DD242C37}"/>
+              </a:ext>
+            </a:extLst>
+          </p:cNvPr>
+          <p:cNvSpPr>
+            <a:spLocks noGrp="1"/>
+          </p:cNvSpPr>
+          <p:nvPr>
+            <p:ph idx="1"/>
+          </p:nvPr>
+        </p:nvSpPr>
+        <p:spPr>
+          <a:xfrm>
+            <a:off x="1219200" y="4648200"/>
+            <a:ext cx="10058400" cy="381000"/>
+          </a:xfrm>
+        </p:spPr>
+        <p:txBody>
+          <a:bodyPr wrap="square" lIns="0" tIns="0" rIns="0" bIns="0" anchor="t">
+            <a:normAutofit/>
+          </a:bodyPr>
+          <a:lstStyle/>
+          <a:p>
+            <a:pPr marL="0" indent="0" algn="ctr">
+              <a:buNone/>
+            </a:pPr>
+            <a:r>
+              <a:rPr lang="de-DE" sz="1600" dirty="0">
+                <a:solidFill>
+                  <a:srgbClr val="595959"/>
+                </a:solidFill>
+              </a:rPr>
+              <a:t>Unterschiedliche Ansätze in Anwendungsgebiet, Workflow-Beschreibung und Systemarchitektur</a:t>
+            </a:r>
+          </a:p>
+        </p:txBody>
+      </p:sp>
+      <p:sp>
+        <p:nvSpPr>
+          <p:cNvPr id="20" name="Akzentlinie"/>
+          <p:cNvSpPr/>
+          <p:nvPr/>
+        </p:nvSpPr>
+        <p:spPr>
+          <a:xfrm>
+            <a:off x="914400" y="812800"/>
+            <a:ext cx="50800" cy="431800"/>
+          </a:xfrm>
+          <a:prstGeom prst="rect">
+            <a:avLst/>
+          </a:prstGeom>
+          <a:solidFill>
+            <a:srgbClr val="C1002A"/>
+          </a:solidFill>
+          <a:ln>
+            <a:noFill/>
+          </a:ln>
+        </p:spPr>
+        <p:txBody>
+          <a:bodyPr/>
+          <a:lstStyle/>
+          <a:p>
+            <a:endParaRPr lang="de-DE"/>
+          </a:p>
+        </p:txBody>
+      </p:sp>
+      <p:sp>
+        <p:nvSpPr>
+          <p:cNvPr id="21" name="Marke Nextflow"/>
+          <p:cNvSpPr/>
+          <p:nvPr/>
+        </p:nvSpPr>
+        <p:spPr>
+          <a:xfrm>
+            <a:off x="2047240" y="2997200"/>
+            <a:ext cx="355600" cy="38100"/>
+          </a:xfrm>
+          <a:prstGeom prst="rect">
+            <a:avLst/>
+          </a:prstGeom>
+          <a:solidFill>
+            <a:srgbClr val="C1002A"/>
+          </a:solidFill>
+          <a:ln>
+            <a:noFill/>
+          </a:ln>
+        </p:spPr>
+        <p:txBody>
+          <a:bodyPr/>
+          <a:lstStyle/>
+          <a:p>
+            <a:endParaRPr lang="de-DE"/>
+          </a:p>
+        </p:txBody>
+      </p:sp>
+      <p:sp>
+        <p:nvSpPr>
+          <p:cNvPr id="30" name="System Nextflow"/>
+          <p:cNvSpPr txBox="1"/>
+          <p:nvPr/>
+        </p:nvSpPr>
+        <p:spPr>
+          <a:xfrm>
+            <a:off x="1219200" y="3200400"/>
+            <a:ext cx="2011680" cy="431800"/>
+          </a:xfrm>
+          <a:prstGeom prst="rect">
+            <a:avLst/>
+          </a:prstGeom>
+          <a:noFill/>
+        </p:spPr>
+        <p:txBody>
+          <a:bodyPr wrap="square" lIns="0" tIns="0" rIns="0" bIns="0" anchor="t"/>
+          <a:lstStyle/>
+          <a:p>
+            <a:pPr algn="ctr"/>
+            <a:r>
+              <a:rPr lang="de-DE" sz="2200" b="1" dirty="0">
+                <a:solidFill>
+                  <a:srgbClr val="262626"/>
+                </a:solidFill>
+              </a:rPr>
+              <a:t>Nextflow</a:t>
+            </a:r>
+          </a:p>
+        </p:txBody>
+      </p:sp>
+      <p:sp>
+        <p:nvSpPr>
+          <p:cNvPr id="22" name="Marke StreamFlow"/>
+          <p:cNvSpPr/>
+          <p:nvPr/>
+        </p:nvSpPr>
+        <p:spPr>
+          <a:xfrm>
+            <a:off x="4058920" y="2997200"/>
+            <a:ext cx="355600" cy="38100"/>
+          </a:xfrm>
+          <a:prstGeom prst="rect">
+            <a:avLst/>
+          </a:prstGeom>
+          <a:solidFill>
+            <a:srgbClr val="C1002A"/>
+          </a:solidFill>
+          <a:ln>
+            <a:noFill/>
+          </a:ln>
+        </p:spPr>
+        <p:txBody>
+          <a:bodyPr/>
+          <a:lstStyle/>
+          <a:p>
+            <a:endParaRPr lang="de-DE"/>
+          </a:p>
+        </p:txBody>
+      </p:sp>
+      <p:sp>
+        <p:nvSpPr>
+          <p:cNvPr id="31" name="System StreamFlow"/>
+          <p:cNvSpPr txBox="1"/>
+          <p:nvPr/>
+        </p:nvSpPr>
+        <p:spPr>
+          <a:xfrm>
+            <a:off x="3230880" y="3200400"/>
+            <a:ext cx="2011680" cy="431800"/>
+          </a:xfrm>
+          <a:prstGeom prst="rect">
+            <a:avLst/>
+          </a:prstGeom>
+          <a:noFill/>
+        </p:spPr>
+        <p:txBody>
+          <a:bodyPr wrap="square" lIns="0" tIns="0" rIns="0" bIns="0" anchor="t"/>
+          <a:lstStyle/>
+          <a:p>
+            <a:pPr algn="ctr"/>
+            <a:r>
+              <a:rPr lang="de-DE" sz="2200" b="1" dirty="0">
+                <a:solidFill>
+                  <a:srgbClr val="262626"/>
+                </a:solidFill>
+              </a:rPr>
+              <a:t>StreamFlow</a:t>
+            </a:r>
+          </a:p>
+        </p:txBody>
+      </p:sp>
+      <p:sp>
+        <p:nvSpPr>
+          <p:cNvPr id="23" name="Marke Pegasus"/>
+          <p:cNvSpPr/>
+          <p:nvPr/>
+        </p:nvSpPr>
+        <p:spPr>
+          <a:xfrm>
+            <a:off x="6070600" y="2997200"/>
+            <a:ext cx="355600" cy="38100"/>
+          </a:xfrm>
+          <a:prstGeom prst="rect">
+            <a:avLst/>
+          </a:prstGeom>
+          <a:solidFill>
+            <a:srgbClr val="C1002A"/>
+          </a:solidFill>
+          <a:ln>
+            <a:noFill/>
+          </a:ln>
+        </p:spPr>
+        <p:txBody>
+          <a:bodyPr/>
+          <a:lstStyle/>
+          <a:p>
+            <a:endParaRPr lang="de-DE"/>
+          </a:p>
+        </p:txBody>
+      </p:sp>
+      <p:sp>
+        <p:nvSpPr>
+          <p:cNvPr id="32" name="System Pegasus"/>
+          <p:cNvSpPr txBox="1"/>
+          <p:nvPr/>
+        </p:nvSpPr>
+        <p:spPr>
+          <a:xfrm>
+            <a:off x="5242560" y="3200400"/>
+            <a:ext cx="2011680" cy="431800"/>
+          </a:xfrm>
+          <a:prstGeom prst="rect">
+            <a:avLst/>
+          </a:prstGeom>
+          <a:noFill/>
+        </p:spPr>
+        <p:txBody>
+          <a:bodyPr wrap="square" lIns="0" tIns="0" rIns="0" bIns="0" anchor="t"/>
+          <a:lstStyle/>
+          <a:p>
+            <a:pPr algn="ctr"/>
+            <a:r>
+              <a:rPr lang="de-DE" sz="2200" b="1" dirty="0">
+                <a:solidFill>
+                  <a:srgbClr val="262626"/>
+                </a:solidFill>
+              </a:rPr>
+              <a:t>Pegasus</a:t>
+            </a:r>
+          </a:p>
+        </p:txBody>
+      </p:sp>
+      <p:sp>
+        <p:nvSpPr>
+          <p:cNvPr id="24" name="Marke Merlin"/>
+          <p:cNvSpPr/>
+          <p:nvPr/>
+        </p:nvSpPr>
+        <p:spPr>
+          <a:xfrm>
+            <a:off x="8082280" y="2997200"/>
+            <a:ext cx="355600" cy="38100"/>
+          </a:xfrm>
+          <a:prstGeom prst="rect">
+            <a:avLst/>
+          </a:prstGeom>
+          <a:solidFill>
+            <a:srgbClr val="C1002A"/>
+          </a:solidFill>
+          <a:ln>
+            <a:noFill/>
+          </a:ln>
+        </p:spPr>
+        <p:txBody>
+          <a:bodyPr/>
+          <a:lstStyle/>
+          <a:p>
+            <a:endParaRPr lang="de-DE"/>
+          </a:p>
+        </p:txBody>
+      </p:sp>
+      <p:sp>
+        <p:nvSpPr>
+          <p:cNvPr id="33" name="System Merlin"/>
+          <p:cNvSpPr txBox="1"/>
+          <p:nvPr/>
+        </p:nvSpPr>
+        <p:spPr>
+          <a:xfrm>
+            <a:off x="7254240" y="3200400"/>
+            <a:ext cx="2011680" cy="431800"/>
+          </a:xfrm>
+          <a:prstGeom prst="rect">
+            <a:avLst/>
+          </a:prstGeom>
+          <a:noFill/>
+        </p:spPr>
+        <p:txBody>
+          <a:bodyPr wrap="square" lIns="0" tIns="0" rIns="0" bIns="0" anchor="t"/>
+          <a:lstStyle/>
+          <a:p>
+            <a:pPr algn="ctr"/>
+            <a:r>
+              <a:rPr lang="de-DE" sz="2200" b="1" dirty="0">
+                <a:solidFill>
+                  <a:srgbClr val="262626"/>
+                </a:solidFill>
+              </a:rPr>
+              <a:t>Merlin</a:t>
+            </a:r>
+          </a:p>
+        </p:txBody>
+      </p:sp>
+      <p:sp>
+        <p:nvSpPr>
+          <p:cNvPr id="25" name="Marke AiiDA"/>
+          <p:cNvSpPr/>
+          <p:nvPr/>
+        </p:nvSpPr>
+        <p:spPr>
+          <a:xfrm>
+            <a:off x="10093960" y="2997200"/>
+            <a:ext cx="355600" cy="38100"/>
+          </a:xfrm>
+          <a:prstGeom prst="rect">
+            <a:avLst/>
+          </a:prstGeom>
+          <a:solidFill>
+            <a:srgbClr val="C1002A"/>
+          </a:solidFill>
+          <a:ln>
+            <a:noFill/>
+          </a:ln>
+        </p:spPr>
+        <p:txBody>
+          <a:bodyPr/>
+          <a:lstStyle/>
+          <a:p>
+            <a:endParaRPr lang="de-DE"/>
+          </a:p>
+        </p:txBody>
+      </p:sp>
+      <p:sp>
+        <p:nvSpPr>
+          <p:cNvPr id="34" name="System AiiDA"/>
+          <p:cNvSpPr txBox="1"/>
+          <p:nvPr/>
+        </p:nvSpPr>
+        <p:spPr>
+          <a:xfrm>
+            <a:off x="9265920" y="3200400"/>
+            <a:ext cx="2011680" cy="431800"/>
+          </a:xfrm>
+          <a:prstGeom prst="rect">
+            <a:avLst/>
+          </a:prstGeom>
+          <a:noFill/>
+        </p:spPr>
+        <p:txBody>
+          <a:bodyPr wrap="square" lIns="0" tIns="0" rIns="0" bIns="0" anchor="t"/>
+          <a:lstStyle/>
+          <a:p>
+            <a:pPr algn="ctr"/>
+            <a:r>
+              <a:rPr lang="de-DE" sz="2200" b="1" dirty="0">
+                <a:solidFill>
+                  <a:srgbClr val="262626"/>
+                </a:solidFill>
+              </a:rPr>
+              <a:t>AiiDA</a:t>
+            </a:r>
+          </a:p>
+        </p:txBody>
+      </p:sp>
+      <p:cxnSp>
+        <p:nvCxnSpPr>
+          <p:cNvPr id="36" name="Trenner"/>
+          <p:cNvCxnSpPr/>
+          <p:nvPr/>
+        </p:nvCxnSpPr>
+        <p:spPr>
+          <a:xfrm>
+            <a:off x="1219200" y="4241800"/>
+            <a:ext cx="10058400" cy="0"/>
+          </a:xfrm>
+          <a:prstGeom prst="line">
+            <a:avLst/>
+          </a:prstGeom>
+          <a:ln w="6350">
+            <a:solidFill>
+              <a:srgbClr val="D9D9D9"/>
+            </a:solidFill>
+          </a:ln>
+        </p:spPr>
+      </p:cxnSp>
+      <p:sp>
+        <p:nvSpPr>
+          <p:cNvPr id="40" name="Foliennummer"/>
+          <p:cNvSpPr txBox="1"/>
+          <p:nvPr/>
+        </p:nvSpPr>
+        <p:spPr>
+          <a:xfrm>
+            <a:off x="10769600" y="6197600"/>
+            <a:ext cx="508000" cy="254000"/>
+          </a:xfrm>
+          <a:prstGeom prst="rect">
+            <a:avLst/>
+          </a:prstGeom>
+          <a:noFill/>
+        </p:spPr>
+        <p:txBody>
+          <a:bodyPr wrap="square" lIns="0" tIns="0" rIns="0" bIns="0" anchor="ctr"/>
+          <a:lstStyle/>
+          <a:p>
+            <a:pPr algn="r"/>
+            <a:r>
+              <a:rPr lang="de-DE" sz="1200" dirty="0">
+                <a:solidFill>
+                  <a:srgbClr val="8C8C8C"/>
+                </a:solidFill>
+              </a:rPr>
+              <a:t>6</a:t>
+            </a:r>
+          </a:p>
+        </p:txBody>
+      </p:sp>
+      <p:cxnSp>
+        <p:nvCxnSpPr>
+          <p:cNvPr id="50" name="Fortschritt Linie"/>
+          <p:cNvCxnSpPr/>
+          <p:nvPr/>
+        </p:nvCxnSpPr>
+        <p:spPr>
+          <a:xfrm>
+            <a:off x="1219200" y="6172200"/>
+            <a:ext cx="5080000" cy="0"/>
+          </a:xfrm>
+          <a:prstGeom prst="line">
+            <a:avLst/>
+          </a:prstGeom>
+          <a:ln w="6350">
+            <a:solidFill>
+              <a:srgbClr val="D9D9D9"/>
+            </a:solidFill>
+          </a:ln>
+        </p:spPr>
+      </p:cxnSp>
+      <p:sp>
+        <p:nvSpPr>
+          <p:cNvPr id="51" name="Marker Motivation"/>
+          <p:cNvSpPr/>
+          <p:nvPr/>
+        </p:nvSpPr>
+        <p:spPr>
+          <a:xfrm>
+            <a:off x="1187450" y="6140450"/>
+            <a:ext cx="63500" cy="63500"/>
+          </a:xfrm>
+          <a:prstGeom prst="ellipse">
+            <a:avLst/>
+          </a:prstGeom>
+          <a:solidFill>
+            <a:srgbClr val="BFBFBF"/>
+          </a:solidFill>
+          <a:ln>
+            <a:noFill/>
+          </a:ln>
+        </p:spPr>
+        <p:txBody>
+          <a:bodyPr/>
+          <a:lstStyle/>
+          <a:p>
+            <a:endParaRPr lang="de-DE"/>
+          </a:p>
+        </p:txBody>
+      </p:sp>
+      <p:sp>
+        <p:nvSpPr>
+          <p:cNvPr id="52" name="Label Motivation"/>
+          <p:cNvSpPr txBox="1"/>
+          <p:nvPr/>
+        </p:nvSpPr>
+        <p:spPr>
+          <a:xfrm>
+            <a:off x="1219200" y="6273800"/>
+            <a:ext cx="1270000" cy="203200"/>
+          </a:xfrm>
+          <a:prstGeom prst="rect">
+            <a:avLst/>
+          </a:prstGeom>
+          <a:noFill/>
+        </p:spPr>
+        <p:txBody>
+          <a:bodyPr wrap="none" lIns="0" tIns="0" rIns="0" bIns="0" anchor="t"/>
+          <a:lstStyle/>
+          <a:p>
+            <a:pPr algn="l"/>
+            <a:r>
+              <a:rPr lang="de-DE" sz="1000" dirty="0">
+                <a:solidFill>
+                  <a:srgbClr val="A6A6A6"/>
+                </a:solidFill>
+              </a:rPr>
+              <a:t>Motivation</a:t>
+            </a:r>
+          </a:p>
+        </p:txBody>
+      </p:sp>
+      <p:sp>
+        <p:nvSpPr>
+          <p:cNvPr id="53" name="Marker Methodik"/>
+          <p:cNvSpPr/>
+          <p:nvPr/>
+        </p:nvSpPr>
+        <p:spPr>
+          <a:xfrm>
+            <a:off x="2444750" y="6127750"/>
+            <a:ext cx="88900" cy="88900"/>
+          </a:xfrm>
+          <a:prstGeom prst="ellipse">
+            <a:avLst/>
+          </a:prstGeom>
+          <a:solidFill>
+            <a:srgbClr val="C1002A"/>
+          </a:solidFill>
+          <a:ln>
+            <a:noFill/>
+          </a:ln>
+        </p:spPr>
+        <p:txBody>
+          <a:bodyPr/>
+          <a:lstStyle/>
+          <a:p>
+            <a:endParaRPr lang="de-DE"/>
+          </a:p>
+        </p:txBody>
+      </p:sp>
+      <p:sp>
+        <p:nvSpPr>
+          <p:cNvPr id="54" name="Label Methodik"/>
+          <p:cNvSpPr txBox="1"/>
+          <p:nvPr/>
+        </p:nvSpPr>
+        <p:spPr>
+          <a:xfrm>
+            <a:off x="1854200" y="6273800"/>
+            <a:ext cx="1270000" cy="203200"/>
+          </a:xfrm>
+          <a:prstGeom prst="rect">
+            <a:avLst/>
+          </a:prstGeom>
+          <a:noFill/>
+        </p:spPr>
+        <p:txBody>
+          <a:bodyPr wrap="none" lIns="0" tIns="0" rIns="0" bIns="0" anchor="t"/>
+          <a:lstStyle/>
+          <a:p>
+            <a:pPr algn="ctr"/>
+            <a:r>
+              <a:rPr lang="de-DE" sz="1000" b="1" dirty="0">
+                <a:solidFill>
+                  <a:srgbClr val="C1002A"/>
+                </a:solidFill>
+              </a:rPr>
+              <a:t>Methodik</a:t>
+            </a:r>
+          </a:p>
+        </p:txBody>
+      </p:sp>
+      <p:sp>
+        <p:nvSpPr>
+          <p:cNvPr id="55" name="Marker Systeme"/>
+          <p:cNvSpPr/>
+          <p:nvPr/>
+        </p:nvSpPr>
+        <p:spPr>
+          <a:xfrm>
+            <a:off x="3727450" y="6140450"/>
+            <a:ext cx="63500" cy="63500"/>
+          </a:xfrm>
+          <a:prstGeom prst="ellipse">
+            <a:avLst/>
+          </a:prstGeom>
+          <a:solidFill>
+            <a:srgbClr val="BFBFBF"/>
+          </a:solidFill>
+          <a:ln>
+            <a:noFill/>
+          </a:ln>
+        </p:spPr>
+        <p:txBody>
+          <a:bodyPr/>
+          <a:lstStyle/>
+          <a:p>
+            <a:endParaRPr lang="de-DE"/>
+          </a:p>
+        </p:txBody>
+      </p:sp>
+      <p:sp>
+        <p:nvSpPr>
+          <p:cNvPr id="56" name="Label Systeme"/>
+          <p:cNvSpPr txBox="1"/>
+          <p:nvPr/>
+        </p:nvSpPr>
+        <p:spPr>
+          <a:xfrm>
+            <a:off x="3124200" y="6273800"/>
+            <a:ext cx="1270000" cy="203200"/>
+          </a:xfrm>
+          <a:prstGeom prst="rect">
+            <a:avLst/>
+          </a:prstGeom>
+          <a:noFill/>
+        </p:spPr>
+        <p:txBody>
+          <a:bodyPr wrap="none" lIns="0" tIns="0" rIns="0" bIns="0" anchor="t"/>
+          <a:lstStyle/>
+          <a:p>
+            <a:pPr algn="ctr"/>
+            <a:r>
+              <a:rPr lang="de-DE" sz="1000" dirty="0">
+                <a:solidFill>
+                  <a:srgbClr val="A6A6A6"/>
+                </a:solidFill>
+              </a:rPr>
+              <a:t>Systeme</a:t>
+            </a:r>
+          </a:p>
+        </p:txBody>
+      </p:sp>
+      <p:sp>
+        <p:nvSpPr>
+          <p:cNvPr id="57" name="Marker Untersuchung"/>
+          <p:cNvSpPr/>
+          <p:nvPr/>
+        </p:nvSpPr>
+        <p:spPr>
+          <a:xfrm>
+            <a:off x="4997450" y="6140450"/>
+            <a:ext cx="63500" cy="63500"/>
+          </a:xfrm>
+          <a:prstGeom prst="ellipse">
+            <a:avLst/>
+          </a:prstGeom>
+          <a:solidFill>
+            <a:srgbClr val="BFBFBF"/>
+          </a:solidFill>
+          <a:ln>
+            <a:noFill/>
+          </a:ln>
+        </p:spPr>
+        <p:txBody>
+          <a:bodyPr/>
+          <a:lstStyle/>
+          <a:p>
+            <a:endParaRPr lang="de-DE"/>
+          </a:p>
+        </p:txBody>
+      </p:sp>
+      <p:sp>
+        <p:nvSpPr>
+          <p:cNvPr id="58" name="Label Untersuchung"/>
+          <p:cNvSpPr txBox="1"/>
+          <p:nvPr/>
+        </p:nvSpPr>
+        <p:spPr>
+          <a:xfrm>
+            <a:off x="4394200" y="6273800"/>
+            <a:ext cx="1270000" cy="203200"/>
+          </a:xfrm>
+          <a:prstGeom prst="rect">
+            <a:avLst/>
+          </a:prstGeom>
+          <a:noFill/>
+        </p:spPr>
+        <p:txBody>
+          <a:bodyPr wrap="none" lIns="0" tIns="0" rIns="0" bIns="0" anchor="t"/>
+          <a:lstStyle/>
+          <a:p>
+            <a:pPr algn="ctr"/>
+            <a:r>
+              <a:rPr lang="de-DE" sz="1000" dirty="0">
+                <a:solidFill>
+                  <a:srgbClr val="A6A6A6"/>
+                </a:solidFill>
+              </a:rPr>
+              <a:t>Untersuchung</a:t>
+            </a:r>
+          </a:p>
+        </p:txBody>
+      </p:sp>
+      <p:sp>
+        <p:nvSpPr>
+          <p:cNvPr id="59" name="Marker Fazit"/>
+          <p:cNvSpPr/>
+          <p:nvPr/>
+        </p:nvSpPr>
+        <p:spPr>
+          <a:xfrm>
+            <a:off x="6267450" y="6140450"/>
+            <a:ext cx="63500" cy="63500"/>
+          </a:xfrm>
+          <a:prstGeom prst="ellipse">
+            <a:avLst/>
+          </a:prstGeom>
+          <a:solidFill>
+            <a:srgbClr val="BFBFBF"/>
+          </a:solidFill>
+          <a:ln>
+            <a:noFill/>
+          </a:ln>
+        </p:spPr>
+        <p:txBody>
+          <a:bodyPr/>
+          <a:lstStyle/>
+          <a:p>
+            <a:endParaRPr lang="de-DE"/>
+          </a:p>
+        </p:txBody>
+      </p:sp>
+      <p:sp>
+        <p:nvSpPr>
+          <p:cNvPr id="60" name="Label Fazit"/>
+          <p:cNvSpPr txBox="1"/>
+          <p:nvPr/>
+        </p:nvSpPr>
+        <p:spPr>
+          <a:xfrm>
+            <a:off x="5029200" y="6273800"/>
+            <a:ext cx="1270000" cy="203200"/>
+          </a:xfrm>
+          <a:prstGeom prst="rect">
+            <a:avLst/>
+          </a:prstGeom>
+          <a:noFill/>
+        </p:spPr>
+        <p:txBody>
+          <a:bodyPr wrap="none" lIns="0" tIns="0" rIns="0" bIns="0" anchor="t"/>
+          <a:lstStyle/>
+          <a:p>
+            <a:pPr algn="r"/>
+            <a:r>
+              <a:rPr lang="de-DE" sz="1000" dirty="0">
+                <a:solidFill>
+                  <a:srgbClr val="A6A6A6"/>
+                </a:solidFill>
+              </a:rPr>
+              <a:t>Fazit</a:t>
+            </a:r>
+          </a:p>
+        </p:txBody>
+      </p:sp>
+    </p:spTree>
+    <p:extLst>
+      <p:ext uri="{BB962C8B-B14F-4D97-AF65-F5344CB8AC3E}">
+        <p14:creationId xmlns:p14="http://schemas.microsoft.com/office/powerpoint/2010/main" val="881142529"/>
+      </p:ext>
+    </p:extLst>
+  </p:cSld>
+  <p:clrMapOvr>
+    <a:masterClrMapping/>
+  </p:clrMapOvr>
+</p:sld>
+</file>
+
+<file path=ppt/slides/slide7.xml><?xml version="1.0" encoding="utf-8"?>
+<p:sld xmlns:a="http://schemas.openxmlformats.org/drawingml/2006/main" xmlns:r="http://schemas.openxmlformats.org/officeDocument/2006/relationships" xmlns:p="http://schemas.openxmlformats.org/presentationml/2006/main">
+  <p:cSld>
+    <p:spTree>
+      <p:nvGrpSpPr>
+        <p:cNvPr id="1" name=""/>
+        <p:cNvGrpSpPr/>
+        <p:nvPr/>
+      </p:nvGrpSpPr>
+      <p:grpSpPr>
+        <a:xfrm>
+          <a:off x="0" y="0"/>
+          <a:ext cx="0" cy="0"/>
+          <a:chOff x="0" y="0"/>
+          <a:chExt cx="0" cy="0"/>
+        </a:xfrm>
+      </p:grpSpPr>
+      <p:sp>
+        <p:nvSpPr>
+          <p:cNvPr id="2" name="Titel 1">
+            <a:extLst>
+              <a:ext uri="{FF2B5EF4-FFF2-40B4-BE49-F238E27FC236}">
+                <a16:creationId xmlns:a16="http://schemas.microsoft.com/office/drawing/2014/main" id="{05B421FD-2FF5-4BBE-DCB7-955136455CB4}"/>
+              </a:ext>
+            </a:extLst>
+          </p:cNvPr>
+          <p:cNvSpPr>
+            <a:spLocks noGrp="1"/>
+          </p:cNvSpPr>
+          <p:nvPr>
+            <p:ph type="title"/>
+          </p:nvPr>
+        </p:nvSpPr>
+        <p:spPr>
+          <a:xfrm>
+            <a:off x="1219200" y="812800"/>
+            <a:ext cx="10058400" cy="787400"/>
+          </a:xfrm>
+        </p:spPr>
+        <p:txBody>
+          <a:bodyPr wrap="square" lIns="0" tIns="0" rIns="0" bIns="0" anchor="t">
+            <a:normAutofit/>
+          </a:bodyPr>
+          <a:lstStyle/>
+          <a:p>
+            <a:pPr algn="l"/>
+            <a:r>
+              <a:rPr lang="de-DE" sz="2600" b="1" dirty="0">
+                <a:solidFill>
+                  <a:srgbClr val="262626"/>
+                </a:solidFill>
+              </a:rPr>
+              <a:t>Zweistufiges Untersuchungsdesign</a:t>
+            </a:r>
+          </a:p>
+        </p:txBody>
+      </p:sp>
+      <p:sp>
+        <p:nvSpPr>
+          <p:cNvPr id="3" name="Inhaltsplatzhalter 2">
+            <a:extLst>
+              <a:ext uri="{FF2B5EF4-FFF2-40B4-BE49-F238E27FC236}">
+                <a16:creationId xmlns:a16="http://schemas.microsoft.com/office/drawing/2014/main" id="{CE1E8772-EFF4-5F07-0094-2D6A9C28BE5B}"/>
+              </a:ext>
+            </a:extLst>
+          </p:cNvPr>
+          <p:cNvSpPr>
+            <a:spLocks noGrp="1"/>
+          </p:cNvSpPr>
+          <p:nvPr>
+            <p:ph idx="1"/>
+          </p:nvPr>
+        </p:nvSpPr>
+        <p:spPr>
+          <a:xfrm>
+            <a:off x="1219200" y="2032000"/>
+            <a:ext cx="4318000" cy="3175000"/>
+          </a:xfrm>
+        </p:spPr>
+        <p:txBody>
+          <a:bodyPr wrap="square" lIns="0" tIns="0" rIns="0" bIns="0" anchor="t"/>
+          <a:lstStyle/>
+          <a:p>
+            <a:pPr marL="0" indent="0" algn="l">
+              <a:lnSpc>
+                <a:spcPct val="100000"/>
+              </a:lnSpc>
+              <a:spcBef>
+                <a:spcPts val="0"/>
+              </a:spcBef>
+              <a:spcAft>
+                <a:spcPts val="600"/>
+              </a:spcAft>
+              <a:buNone/>
+            </a:pPr>
+            <a:r>
+              <a:rPr lang="de-DE" sz="1300" b="1" spc="150" dirty="0">
+                <a:solidFill>
+                  <a:srgbClr val="C1002A"/>
+                </a:solidFill>
+              </a:rPr>
+              <a:t>LOKALE UNTERSUCHUNG</a:t>
+            </a:r>
+          </a:p>
+          <a:p>
+            <a:pPr marL="0" indent="0" algn="l">
+              <a:lnSpc>
+                <a:spcPct val="100000"/>
+              </a:lnSpc>
+              <a:spcBef>
+                <a:spcPts val="0"/>
+              </a:spcBef>
+              <a:spcAft>
+                <a:spcPts val="2000"/>
+              </a:spcAft>
+              <a:buNone/>
+            </a:pPr>
+            <a:r>
+              <a:rPr lang="de-DE" sz="2000" b="1" dirty="0">
+                <a:solidFill>
+                  <a:srgbClr val="262626"/>
+                </a:solidFill>
+              </a:rPr>
+              <a:t>Alle fünf Systeme</a:t>
+            </a:r>
+          </a:p>
+          <a:p>
+            <a:pPr marL="203200" indent="-203200" algn="l">
+              <a:lnSpc>
+                <a:spcPct val="100000"/>
+              </a:lnSpc>
+              <a:spcBef>
+                <a:spcPts val="0"/>
+              </a:spcBef>
+              <a:spcAft>
+                <a:spcPts val="800"/>
+              </a:spcAft>
+              <a:buClr>
+                <a:srgbClr val="C1002A"/>
+              </a:buClr>
+              <a:buFont typeface="Arial"/>
+              <a:buChar char="•"/>
+            </a:pPr>
+            <a:r>
+              <a:rPr lang="de-DE" sz="1600" dirty="0">
+                <a:solidFill>
+                  <a:srgbClr val="262626"/>
+                </a:solidFill>
+              </a:rPr>
+              <a:t>Qualitativer Vergleich</a:t>
+            </a:r>
+          </a:p>
+          <a:p>
+            <a:pPr marL="203200" indent="-203200" algn="l">
+              <a:lnSpc>
+                <a:spcPct val="100000"/>
+              </a:lnSpc>
+              <a:spcBef>
+                <a:spcPts val="0"/>
+              </a:spcBef>
+              <a:spcAft>
+                <a:spcPts val="800"/>
+              </a:spcAft>
+              <a:buClr>
+                <a:srgbClr val="C1002A"/>
+              </a:buClr>
+              <a:buFont typeface="Arial"/>
+              <a:buChar char="•"/>
+            </a:pPr>
+            <a:r>
+              <a:rPr lang="de-DE" sz="1600" dirty="0">
+                <a:solidFill>
+                  <a:srgbClr val="262626"/>
+                </a:solidFill>
+              </a:rPr>
+              <a:t>Quantitative Messungen</a:t>
+            </a:r>
+          </a:p>
+        </p:txBody>
+      </p:sp>
+      <p:sp>
+        <p:nvSpPr>
+          <p:cNvPr id="20" name="Akzentlinie"/>
+          <p:cNvSpPr/>
+          <p:nvPr/>
+        </p:nvSpPr>
+        <p:spPr>
+          <a:xfrm>
+            <a:off x="914400" y="812800"/>
+            <a:ext cx="50800" cy="431800"/>
+          </a:xfrm>
+          <a:prstGeom prst="rect">
+            <a:avLst/>
+          </a:prstGeom>
+          <a:solidFill>
+            <a:srgbClr val="C1002A"/>
+          </a:solidFill>
+          <a:ln>
+            <a:noFill/>
+          </a:ln>
+        </p:spPr>
+        <p:txBody>
+          <a:bodyPr/>
+          <a:lstStyle/>
+          <a:p>
+            <a:endParaRPr lang="de-DE"/>
+          </a:p>
+        </p:txBody>
+      </p:sp>
+      <p:sp>
+        <p:nvSpPr>
+          <p:cNvPr id="21" name="Rechts"/>
+          <p:cNvSpPr txBox="1"/>
+          <p:nvPr/>
+        </p:nvSpPr>
+        <p:spPr>
+          <a:xfrm>
+            <a:off x="6959600" y="2032000"/>
+            <a:ext cx="4318000" cy="3175000"/>
+          </a:xfrm>
+          <a:prstGeom prst="rect">
+            <a:avLst/>
+          </a:prstGeom>
+          <a:noFill/>
+        </p:spPr>
+        <p:txBody>
+          <a:bodyPr wrap="square" lIns="0" tIns="0" rIns="0" bIns="0" anchor="t"/>
+          <a:lstStyle/>
+          <a:p>
+            <a:pPr marL="0" indent="0" algn="l">
+              <a:spcAft>
+                <a:spcPts val="600"/>
+              </a:spcAft>
+              <a:buNone/>
+            </a:pPr>
+            <a:r>
+              <a:rPr lang="de-DE" sz="1300" b="1" spc="150" dirty="0">
+                <a:solidFill>
+                  <a:srgbClr val="C1002A"/>
+                </a:solidFill>
+              </a:rPr>
+              <a:t>MOGON / HPC</a:t>
+            </a:r>
+          </a:p>
+          <a:p>
+            <a:pPr marL="0" indent="0" algn="l">
+              <a:spcAft>
+                <a:spcPts val="300"/>
+              </a:spcAft>
+              <a:buNone/>
+            </a:pPr>
+            <a:r>
+              <a:rPr lang="de-DE" sz="2000" b="1" dirty="0">
+                <a:solidFill>
+                  <a:srgbClr val="262626"/>
+                </a:solidFill>
+              </a:rPr>
+              <a:t>Vier Systeme</a:t>
+            </a:r>
+          </a:p>
+          <a:p>
+            <a:pPr marL="0" indent="0" algn="l">
+              <a:spcAft>
+                <a:spcPts val="1600"/>
+              </a:spcAft>
+              <a:buNone/>
+            </a:pPr>
+            <a:r>
+              <a:rPr lang="de-DE" sz="1400" dirty="0">
+                <a:solidFill>
+                  <a:srgbClr val="595959"/>
+                </a:solidFill>
+              </a:rPr>
+              <a:t>Nextflow · StreamFlow · Merlin · AiiDA</a:t>
+            </a:r>
+          </a:p>
+          <a:p>
+            <a:pPr marL="203200" indent="-203200" algn="l">
+              <a:spcAft>
+                <a:spcPts val="800"/>
+              </a:spcAft>
+              <a:buClr>
+                <a:srgbClr val="C1002A"/>
+              </a:buClr>
+              <a:buFont typeface="Arial"/>
+              <a:buChar char="•"/>
+            </a:pPr>
+            <a:r>
+              <a:rPr lang="de-DE" sz="1600" dirty="0">
+                <a:solidFill>
+                  <a:srgbClr val="262626"/>
+                </a:solidFill>
+              </a:rPr>
+              <a:t>Bereitstellung und Betrieb unter Slurm</a:t>
+            </a:r>
+          </a:p>
+          <a:p>
+            <a:pPr marL="203200" indent="-203200" algn="l">
+              <a:spcAft>
+                <a:spcPts val="800"/>
+              </a:spcAft>
+              <a:buClr>
+                <a:srgbClr val="C1002A"/>
+              </a:buClr>
+              <a:buFont typeface="Arial"/>
+              <a:buChar char="•"/>
+            </a:pPr>
+            <a:r>
+              <a:rPr lang="de-DE" sz="1600" dirty="0">
+                <a:solidFill>
+                  <a:srgbClr val="262626"/>
+                </a:solidFill>
+              </a:rPr>
+              <a:t>Untersuchung des regulären Slurm-Betriebs</a:t>
+            </a:r>
+          </a:p>
+          <a:p>
+            <a:pPr marL="203200" indent="-203200" algn="l">
+              <a:spcAft>
+                <a:spcPts val="800"/>
+              </a:spcAft>
+              <a:buClr>
+                <a:srgbClr val="C1002A"/>
+              </a:buClr>
+              <a:buFont typeface="Arial"/>
+              <a:buChar char="•"/>
+            </a:pPr>
+            <a:r>
+              <a:rPr lang="de-DE" sz="1600" dirty="0">
+                <a:solidFill>
+                  <a:srgbClr val="262626"/>
+                </a:solidFill>
+              </a:rPr>
+              <a:t>Quantitative Messungen auf dedizierter Ressource</a:t>
+            </a:r>
+          </a:p>
+        </p:txBody>
+      </p:sp>
+      <p:cxnSp>
+        <p:nvCxnSpPr>
+          <p:cNvPr id="22" name="Trenner"/>
+          <p:cNvCxnSpPr/>
+          <p:nvPr/>
+        </p:nvCxnSpPr>
+        <p:spPr>
+          <a:xfrm>
+            <a:off x="6248400" y="2032000"/>
+            <a:ext cx="0" cy="3175000"/>
+          </a:xfrm>
+          <a:prstGeom prst="line">
+            <a:avLst/>
+          </a:prstGeom>
+          <a:ln w="6350">
+            <a:solidFill>
+              <a:srgbClr val="D9D9D9"/>
+            </a:solidFill>
+          </a:ln>
+        </p:spPr>
+      </p:cxnSp>
+      <p:sp>
+        <p:nvSpPr>
+          <p:cNvPr id="40" name="Foliennummer"/>
+          <p:cNvSpPr txBox="1"/>
+          <p:nvPr/>
+        </p:nvSpPr>
+        <p:spPr>
+          <a:xfrm>
+            <a:off x="10769600" y="6197600"/>
+            <a:ext cx="508000" cy="254000"/>
+          </a:xfrm>
+          <a:prstGeom prst="rect">
+            <a:avLst/>
+          </a:prstGeom>
+          <a:noFill/>
+        </p:spPr>
+        <p:txBody>
+          <a:bodyPr wrap="square" lIns="0" tIns="0" rIns="0" bIns="0" anchor="ctr"/>
+          <a:lstStyle/>
+          <a:p>
+            <a:pPr algn="r"/>
+            <a:r>
+              <a:rPr lang="de-DE" sz="1200" dirty="0">
+                <a:solidFill>
+                  <a:srgbClr val="8C8C8C"/>
+                </a:solidFill>
+              </a:rPr>
+              <a:t>7</a:t>
+            </a:r>
+          </a:p>
+        </p:txBody>
+      </p:sp>
+      <p:cxnSp>
+        <p:nvCxnSpPr>
+          <p:cNvPr id="50" name="Fortschritt Linie"/>
+          <p:cNvCxnSpPr/>
+          <p:nvPr/>
+        </p:nvCxnSpPr>
+        <p:spPr>
+          <a:xfrm>
+            <a:off x="1219200" y="6172200"/>
+            <a:ext cx="5080000" cy="0"/>
+          </a:xfrm>
+          <a:prstGeom prst="line">
+            <a:avLst/>
+          </a:prstGeom>
+          <a:ln w="6350">
+            <a:solidFill>
+              <a:srgbClr val="D9D9D9"/>
+            </a:solidFill>
+          </a:ln>
+        </p:spPr>
+      </p:cxnSp>
+      <p:sp>
+        <p:nvSpPr>
+          <p:cNvPr id="51" name="Marker Motivation"/>
+          <p:cNvSpPr/>
+          <p:nvPr/>
+        </p:nvSpPr>
+        <p:spPr>
+          <a:xfrm>
+            <a:off x="1187450" y="6140450"/>
+            <a:ext cx="63500" cy="63500"/>
+          </a:xfrm>
+          <a:prstGeom prst="ellipse">
+            <a:avLst/>
+          </a:prstGeom>
+          <a:solidFill>
+            <a:srgbClr val="BFBFBF"/>
+          </a:solidFill>
+          <a:ln>
+            <a:noFill/>
+          </a:ln>
+        </p:spPr>
+        <p:txBody>
+          <a:bodyPr/>
+          <a:lstStyle/>
+          <a:p>
+            <a:endParaRPr lang="de-DE"/>
+          </a:p>
+        </p:txBody>
+      </p:sp>
+      <p:sp>
+        <p:nvSpPr>
+          <p:cNvPr id="52" name="Label Motivation"/>
+          <p:cNvSpPr txBox="1"/>
+          <p:nvPr/>
+        </p:nvSpPr>
+        <p:spPr>
+          <a:xfrm>
+            <a:off x="1219200" y="6273800"/>
+            <a:ext cx="1270000" cy="203200"/>
+          </a:xfrm>
+          <a:prstGeom prst="rect">
+            <a:avLst/>
+          </a:prstGeom>
+          <a:noFill/>
+        </p:spPr>
+        <p:txBody>
+          <a:bodyPr wrap="none" lIns="0" tIns="0" rIns="0" bIns="0" anchor="t"/>
+          <a:lstStyle/>
+          <a:p>
+            <a:pPr algn="l"/>
+            <a:r>
+              <a:rPr lang="de-DE" sz="1000" dirty="0">
+                <a:solidFill>
+                  <a:srgbClr val="A6A6A6"/>
+                </a:solidFill>
+              </a:rPr>
+              <a:t>Motivation</a:t>
+            </a:r>
+          </a:p>
+        </p:txBody>
+      </p:sp>
+      <p:sp>
+        <p:nvSpPr>
+          <p:cNvPr id="53" name="Marker Methodik"/>
+          <p:cNvSpPr/>
+          <p:nvPr/>
+        </p:nvSpPr>
+        <p:spPr>
+          <a:xfrm>
+            <a:off x="2444750" y="6127750"/>
+            <a:ext cx="88900" cy="88900"/>
+          </a:xfrm>
+          <a:prstGeom prst="ellipse">
+            <a:avLst/>
+          </a:prstGeom>
+          <a:solidFill>
+            <a:srgbClr val="C1002A"/>
+          </a:solidFill>
+          <a:ln>
+            <a:noFill/>
+          </a:ln>
+        </p:spPr>
+        <p:txBody>
+          <a:bodyPr/>
+          <a:lstStyle/>
+          <a:p>
+            <a:endParaRPr lang="de-DE"/>
+          </a:p>
+        </p:txBody>
+      </p:sp>
+      <p:sp>
+        <p:nvSpPr>
+          <p:cNvPr id="54" name="Label Methodik"/>
+          <p:cNvSpPr txBox="1"/>
+          <p:nvPr/>
+        </p:nvSpPr>
+        <p:spPr>
+          <a:xfrm>
+            <a:off x="1854200" y="6273800"/>
+            <a:ext cx="1270000" cy="203200"/>
+          </a:xfrm>
+          <a:prstGeom prst="rect">
+            <a:avLst/>
+          </a:prstGeom>
+          <a:noFill/>
+        </p:spPr>
+        <p:txBody>
+          <a:bodyPr wrap="none" lIns="0" tIns="0" rIns="0" bIns="0" anchor="t"/>
+          <a:lstStyle/>
+          <a:p>
+            <a:pPr algn="ctr"/>
+            <a:r>
+              <a:rPr lang="de-DE" sz="1000" b="1" dirty="0">
+                <a:solidFill>
+                  <a:srgbClr val="C1002A"/>
+                </a:solidFill>
+              </a:rPr>
+              <a:t>Methodik</a:t>
+            </a:r>
+          </a:p>
+        </p:txBody>
+      </p:sp>
+      <p:sp>
+        <p:nvSpPr>
+          <p:cNvPr id="55" name="Marker Systeme"/>
+          <p:cNvSpPr/>
+          <p:nvPr/>
+        </p:nvSpPr>
+        <p:spPr>
+          <a:xfrm>
+            <a:off x="3727450" y="6140450"/>
+            <a:ext cx="63500" cy="63500"/>
+          </a:xfrm>
+          <a:prstGeom prst="ellipse">
+            <a:avLst/>
+          </a:prstGeom>
+          <a:solidFill>
+            <a:srgbClr val="BFBFBF"/>
+          </a:solidFill>
+          <a:ln>
+            <a:noFill/>
+          </a:ln>
+        </p:spPr>
+        <p:txBody>
+          <a:bodyPr/>
+          <a:lstStyle/>
+          <a:p>
+            <a:endParaRPr lang="de-DE"/>
+          </a:p>
+        </p:txBody>
+      </p:sp>
+      <p:sp>
+        <p:nvSpPr>
+          <p:cNvPr id="56" name="Label Systeme"/>
+          <p:cNvSpPr txBox="1"/>
+          <p:nvPr/>
+        </p:nvSpPr>
+        <p:spPr>
+          <a:xfrm>
+            <a:off x="3124200" y="6273800"/>
+            <a:ext cx="1270000" cy="203200"/>
+          </a:xfrm>
+          <a:prstGeom prst="rect">
+            <a:avLst/>
+          </a:prstGeom>
+          <a:noFill/>
+        </p:spPr>
+        <p:txBody>
+          <a:bodyPr wrap="none" lIns="0" tIns="0" rIns="0" bIns="0" anchor="t"/>
+          <a:lstStyle/>
+          <a:p>
+            <a:pPr algn="ctr"/>
+            <a:r>
+              <a:rPr lang="de-DE" sz="1000" dirty="0">
+                <a:solidFill>
+                  <a:srgbClr val="A6A6A6"/>
+                </a:solidFill>
+              </a:rPr>
+              <a:t>Systeme</a:t>
+            </a:r>
+          </a:p>
+        </p:txBody>
+      </p:sp>
+      <p:sp>
+        <p:nvSpPr>
+          <p:cNvPr id="57" name="Marker Untersuchung"/>
+          <p:cNvSpPr/>
+          <p:nvPr/>
+        </p:nvSpPr>
+        <p:spPr>
+          <a:xfrm>
+            <a:off x="4997450" y="6140450"/>
+            <a:ext cx="63500" cy="63500"/>
+          </a:xfrm>
+          <a:prstGeom prst="ellipse">
+            <a:avLst/>
+          </a:prstGeom>
+          <a:solidFill>
+            <a:srgbClr val="BFBFBF"/>
+          </a:solidFill>
+          <a:ln>
+            <a:noFill/>
+          </a:ln>
+        </p:spPr>
+        <p:txBody>
+          <a:bodyPr/>
+          <a:lstStyle/>
+          <a:p>
+            <a:endParaRPr lang="de-DE"/>
+          </a:p>
+        </p:txBody>
+      </p:sp>
+      <p:sp>
+        <p:nvSpPr>
+          <p:cNvPr id="58" name="Label Untersuchung"/>
+          <p:cNvSpPr txBox="1"/>
+          <p:nvPr/>
+        </p:nvSpPr>
+        <p:spPr>
+          <a:xfrm>
+            <a:off x="4394200" y="6273800"/>
+            <a:ext cx="1270000" cy="203200"/>
+          </a:xfrm>
+          <a:prstGeom prst="rect">
+            <a:avLst/>
+          </a:prstGeom>
+          <a:noFill/>
+        </p:spPr>
+        <p:txBody>
+          <a:bodyPr wrap="none" lIns="0" tIns="0" rIns="0" bIns="0" anchor="t"/>
+          <a:lstStyle/>
+          <a:p>
+            <a:pPr algn="ctr"/>
+            <a:r>
+              <a:rPr lang="de-DE" sz="1000" dirty="0">
+                <a:solidFill>
+                  <a:srgbClr val="A6A6A6"/>
+                </a:solidFill>
+              </a:rPr>
+              <a:t>Untersuchung</a:t>
+            </a:r>
+          </a:p>
+        </p:txBody>
+      </p:sp>
+      <p:sp>
+        <p:nvSpPr>
+          <p:cNvPr id="59" name="Marker Fazit"/>
+          <p:cNvSpPr/>
+          <p:nvPr/>
+        </p:nvSpPr>
+        <p:spPr>
+          <a:xfrm>
+            <a:off x="6267450" y="6140450"/>
+            <a:ext cx="63500" cy="63500"/>
+          </a:xfrm>
+          <a:prstGeom prst="ellipse">
+            <a:avLst/>
+          </a:prstGeom>
+          <a:solidFill>
+            <a:srgbClr val="BFBFBF"/>
+          </a:solidFill>
+          <a:ln>
+            <a:noFill/>
+          </a:ln>
+        </p:spPr>
+        <p:txBody>
+          <a:bodyPr/>
+          <a:lstStyle/>
+          <a:p>
+            <a:endParaRPr lang="de-DE"/>
+          </a:p>
+        </p:txBody>
+      </p:sp>
+      <p:sp>
+        <p:nvSpPr>
+          <p:cNvPr id="60" name="Label Fazit"/>
+          <p:cNvSpPr txBox="1"/>
+          <p:nvPr/>
+        </p:nvSpPr>
+        <p:spPr>
+          <a:xfrm>
+            <a:off x="5029200" y="6273800"/>
+            <a:ext cx="1270000" cy="203200"/>
+          </a:xfrm>
+          <a:prstGeom prst="rect">
+            <a:avLst/>
+          </a:prstGeom>
+          <a:noFill/>
+        </p:spPr>
+        <p:txBody>
+          <a:bodyPr wrap="none" lIns="0" tIns="0" rIns="0" bIns="0" anchor="t"/>
+          <a:lstStyle/>
+          <a:p>
+            <a:pPr algn="r"/>
+            <a:r>
+              <a:rPr lang="de-DE" sz="1000" dirty="0">
+                <a:solidFill>
+                  <a:srgbClr val="A6A6A6"/>
+                </a:solidFill>
+              </a:rPr>
+              <a:t>Fazit</a:t>
+            </a:r>
+          </a:p>
+        </p:txBody>
+      </p:sp>
+    </p:spTree>
+    <p:extLst>
+      <p:ext uri="{BB962C8B-B14F-4D97-AF65-F5344CB8AC3E}">
+        <p14:creationId xmlns:p14="http://schemas.microsoft.com/office/powerpoint/2010/main" val="2085791009"/>
+      </p:ext>
+    </p:extLst>
+  </p:cSld>
+  <p:clrMapOvr>
+    <a:masterClrMapping/>
+  </p:clrMapOvr>
+</p:sld>
+</file>
+
+<file path=ppt/slides/slide8.xml><?xml version="1.0" encoding="utf-8"?>
+<p:sld xmlns:a="http://schemas.openxmlformats.org/drawingml/2006/main" xmlns:r="http://schemas.openxmlformats.org/officeDocument/2006/relationships" xmlns:p="http://schemas.openxmlformats.org/presentationml/2006/main">
+  <p:cSld>
+    <p:spTree>
+      <p:nvGrpSpPr>
+        <p:cNvPr id="1" name=""/>
+        <p:cNvGrpSpPr/>
+        <p:nvPr/>
+      </p:nvGrpSpPr>
+      <p:grpSpPr>
+        <a:xfrm>
+          <a:off x="0" y="0"/>
+          <a:ext cx="0" cy="0"/>
+          <a:chOff x="0" y="0"/>
+          <a:chExt cx="0" cy="0"/>
+        </a:xfrm>
+      </p:grpSpPr>
+      <p:sp>
+        <p:nvSpPr>
+          <p:cNvPr id="2" name="Titel 1">
+            <a:extLst>
+              <a:ext uri="{FF2B5EF4-FFF2-40B4-BE49-F238E27FC236}">
+                <a16:creationId xmlns:a16="http://schemas.microsoft.com/office/drawing/2014/main" id="{C0C76724-1455-81ED-7162-313B1F72232C}"/>
+              </a:ext>
+            </a:extLst>
+          </p:cNvPr>
+          <p:cNvSpPr>
+            <a:spLocks noGrp="1"/>
+          </p:cNvSpPr>
+          <p:nvPr>
+            <p:ph type="title"/>
+          </p:nvPr>
+        </p:nvSpPr>
+        <p:spPr/>
+        <p:txBody>
+          <a:bodyPr/>
+          <a:lstStyle/>
+          <a:p>
+            <a:endParaRPr lang="de-DE"/>
+          </a:p>
+        </p:txBody>
+      </p:sp>
+      <p:sp>
+        <p:nvSpPr>
+          <p:cNvPr id="3" name="Inhaltsplatzhalter 2">
+            <a:extLst>
+              <a:ext uri="{FF2B5EF4-FFF2-40B4-BE49-F238E27FC236}">
+                <a16:creationId xmlns:a16="http://schemas.microsoft.com/office/drawing/2014/main" id="{66064824-A3CB-89A9-5D41-A13FD12F8743}"/>
+              </a:ext>
+            </a:extLst>
+          </p:cNvPr>
+          <p:cNvSpPr>
+            <a:spLocks noGrp="1"/>
+          </p:cNvSpPr>
+          <p:nvPr>
+            <p:ph idx="1"/>
+          </p:nvPr>
+        </p:nvSpPr>
+        <p:spPr/>
+        <p:txBody>
+          <a:bodyPr/>
+          <a:lstStyle/>
+          <a:p>
+            <a:endParaRPr lang="de-DE"/>
+          </a:p>
+        </p:txBody>
+      </p:sp>
+    </p:spTree>
+    <p:extLst>
+      <p:ext uri="{BB962C8B-B14F-4D97-AF65-F5344CB8AC3E}">
+        <p14:creationId xmlns:p14="http://schemas.microsoft.com/office/powerpoint/2010/main" val="1563278280"/>
       </p:ext>
     </p:extLst>
   </p:cSld>

--- a/Präsentation-Kolloqium.pptx
+++ b/Präsentation-Kolloqium.pptx
@@ -4,6 +4,9 @@
   <p:sldMasterIdLst>
     <p:sldMasterId id="2147483648" r:id="rId1"/>
   </p:sldMasterIdLst>
+  <p:notesMasterIdLst>
+    <p:notesMasterId r:id="rId10"/>
+  </p:notesMasterIdLst>
   <p:sldIdLst>
     <p:sldId id="259" r:id="rId2"/>
     <p:sldId id="263" r:id="rId3"/>
@@ -12,7 +15,7 @@
     <p:sldId id="274" r:id="rId6"/>
     <p:sldId id="276" r:id="rId7"/>
     <p:sldId id="280" r:id="rId8"/>
-    <p:sldId id="281" r:id="rId9"/>
+    <p:sldId id="285" r:id="rId9"/>
   </p:sldIdLst>
   <p:sldSz cx="12192000" cy="6858000"/>
   <p:notesSz cx="6858000" cy="9144000"/>
@@ -112,6 +115,439 @@
     </a:lvl9pPr>
   </p:defaultTextStyle>
 </p:presentation>
+</file>
+
+<file path=ppt/notesMasters/notesMaster1.xml><?xml version="1.0" encoding="utf-8"?>
+<p:notesMaster xmlns:a="http://schemas.openxmlformats.org/drawingml/2006/main" xmlns:r="http://schemas.openxmlformats.org/officeDocument/2006/relationships" xmlns:p="http://schemas.openxmlformats.org/presentationml/2006/main">
+  <p:cSld>
+    <p:bg>
+      <p:bgRef idx="1001">
+        <a:schemeClr val="bg1"/>
+      </p:bgRef>
+    </p:bg>
+    <p:spTree>
+      <p:nvGrpSpPr>
+        <p:cNvPr id="1" name=""/>
+        <p:cNvGrpSpPr/>
+        <p:nvPr/>
+      </p:nvGrpSpPr>
+      <p:grpSpPr>
+        <a:xfrm>
+          <a:off x="0" y="0"/>
+          <a:ext cx="0" cy="0"/>
+          <a:chOff x="0" y="0"/>
+          <a:chExt cx="0" cy="0"/>
+        </a:xfrm>
+      </p:grpSpPr>
+      <p:sp>
+        <p:nvSpPr>
+          <p:cNvPr id="2" name="Kopfzeilenplatzhalter 1"/>
+          <p:cNvSpPr>
+            <a:spLocks noGrp="1"/>
+          </p:cNvSpPr>
+          <p:nvPr>
+            <p:ph type="hdr" sz="quarter"/>
+          </p:nvPr>
+        </p:nvSpPr>
+        <p:spPr>
+          <a:xfrm>
+            <a:off x="0" y="0"/>
+            <a:ext cx="2971800" cy="458788"/>
+          </a:xfrm>
+          <a:prstGeom prst="rect">
+            <a:avLst/>
+          </a:prstGeom>
+        </p:spPr>
+        <p:txBody>
+          <a:bodyPr vert="horz" lIns="91440" tIns="45720" rIns="91440" bIns="45720" rtlCol="0"/>
+          <a:lstStyle>
+            <a:lvl1pPr algn="l">
+              <a:defRPr sz="1200"/>
+            </a:lvl1pPr>
+          </a:lstStyle>
+          <a:p>
+            <a:endParaRPr lang="de-DE"/>
+          </a:p>
+        </p:txBody>
+      </p:sp>
+      <p:sp>
+        <p:nvSpPr>
+          <p:cNvPr id="3" name="Datumsplatzhalter 2"/>
+          <p:cNvSpPr>
+            <a:spLocks noGrp="1"/>
+          </p:cNvSpPr>
+          <p:nvPr>
+            <p:ph type="dt" idx="1"/>
+          </p:nvPr>
+        </p:nvSpPr>
+        <p:spPr>
+          <a:xfrm>
+            <a:off x="3884613" y="0"/>
+            <a:ext cx="2971800" cy="458788"/>
+          </a:xfrm>
+          <a:prstGeom prst="rect">
+            <a:avLst/>
+          </a:prstGeom>
+        </p:spPr>
+        <p:txBody>
+          <a:bodyPr vert="horz" lIns="91440" tIns="45720" rIns="91440" bIns="45720" rtlCol="0"/>
+          <a:lstStyle>
+            <a:lvl1pPr algn="r">
+              <a:defRPr sz="1200"/>
+            </a:lvl1pPr>
+          </a:lstStyle>
+          <a:p>
+            <a:fld id="{05992D6B-DA9F-DA49-93CB-1A27F22C3466}" type="datetimeFigureOut">
+              <a:rPr lang="de-DE" smtClean="0"/>
+              <a:t>02.09.26</a:t>
+            </a:fld>
+            <a:endParaRPr lang="de-DE"/>
+          </a:p>
+        </p:txBody>
+      </p:sp>
+      <p:sp>
+        <p:nvSpPr>
+          <p:cNvPr id="4" name="Folienbildplatzhalter 3"/>
+          <p:cNvSpPr>
+            <a:spLocks noGrp="1" noRot="1" noChangeAspect="1"/>
+          </p:cNvSpPr>
+          <p:nvPr>
+            <p:ph type="sldImg" idx="2"/>
+          </p:nvPr>
+        </p:nvSpPr>
+        <p:spPr>
+          <a:xfrm>
+            <a:off x="685800" y="1143000"/>
+            <a:ext cx="5486400" cy="3086100"/>
+          </a:xfrm>
+          <a:prstGeom prst="rect">
+            <a:avLst/>
+          </a:prstGeom>
+          <a:noFill/>
+          <a:ln w="12700">
+            <a:solidFill>
+              <a:prstClr val="black"/>
+            </a:solidFill>
+          </a:ln>
+        </p:spPr>
+        <p:txBody>
+          <a:bodyPr vert="horz" lIns="91440" tIns="45720" rIns="91440" bIns="45720" rtlCol="0" anchor="ctr"/>
+          <a:lstStyle/>
+          <a:p>
+            <a:endParaRPr lang="de-DE"/>
+          </a:p>
+        </p:txBody>
+      </p:sp>
+      <p:sp>
+        <p:nvSpPr>
+          <p:cNvPr id="5" name="Notizenplatzhalter 4"/>
+          <p:cNvSpPr>
+            <a:spLocks noGrp="1"/>
+          </p:cNvSpPr>
+          <p:nvPr>
+            <p:ph type="body" sz="quarter" idx="3"/>
+          </p:nvPr>
+        </p:nvSpPr>
+        <p:spPr>
+          <a:xfrm>
+            <a:off x="685800" y="4400550"/>
+            <a:ext cx="5486400" cy="3600450"/>
+          </a:xfrm>
+          <a:prstGeom prst="rect">
+            <a:avLst/>
+          </a:prstGeom>
+        </p:spPr>
+        <p:txBody>
+          <a:bodyPr vert="horz" lIns="91440" tIns="45720" rIns="91440" bIns="45720" rtlCol="0"/>
+          <a:lstStyle/>
+          <a:p>
+            <a:pPr lvl="0"/>
+            <a:r>
+              <a:rPr lang="de-DE"/>
+              <a:t>Mastertextformat bearbeiten</a:t>
+            </a:r>
+          </a:p>
+          <a:p>
+            <a:pPr lvl="1"/>
+            <a:r>
+              <a:rPr lang="de-DE"/>
+              <a:t>Zweite Ebene</a:t>
+            </a:r>
+          </a:p>
+          <a:p>
+            <a:pPr lvl="2"/>
+            <a:r>
+              <a:rPr lang="de-DE"/>
+              <a:t>Dritte Ebene</a:t>
+            </a:r>
+          </a:p>
+          <a:p>
+            <a:pPr lvl="3"/>
+            <a:r>
+              <a:rPr lang="de-DE"/>
+              <a:t>Vierte Ebene</a:t>
+            </a:r>
+          </a:p>
+          <a:p>
+            <a:pPr lvl="4"/>
+            <a:r>
+              <a:rPr lang="de-DE"/>
+              <a:t>Fünfte Ebene</a:t>
+            </a:r>
+          </a:p>
+        </p:txBody>
+      </p:sp>
+      <p:sp>
+        <p:nvSpPr>
+          <p:cNvPr id="6" name="Fußzeilenplatzhalter 5"/>
+          <p:cNvSpPr>
+            <a:spLocks noGrp="1"/>
+          </p:cNvSpPr>
+          <p:nvPr>
+            <p:ph type="ftr" sz="quarter" idx="4"/>
+          </p:nvPr>
+        </p:nvSpPr>
+        <p:spPr>
+          <a:xfrm>
+            <a:off x="0" y="8685213"/>
+            <a:ext cx="2971800" cy="458787"/>
+          </a:xfrm>
+          <a:prstGeom prst="rect">
+            <a:avLst/>
+          </a:prstGeom>
+        </p:spPr>
+        <p:txBody>
+          <a:bodyPr vert="horz" lIns="91440" tIns="45720" rIns="91440" bIns="45720" rtlCol="0" anchor="b"/>
+          <a:lstStyle>
+            <a:lvl1pPr algn="l">
+              <a:defRPr sz="1200"/>
+            </a:lvl1pPr>
+          </a:lstStyle>
+          <a:p>
+            <a:endParaRPr lang="de-DE"/>
+          </a:p>
+        </p:txBody>
+      </p:sp>
+      <p:sp>
+        <p:nvSpPr>
+          <p:cNvPr id="7" name="Foliennummernplatzhalter 6"/>
+          <p:cNvSpPr>
+            <a:spLocks noGrp="1"/>
+          </p:cNvSpPr>
+          <p:nvPr>
+            <p:ph type="sldNum" sz="quarter" idx="5"/>
+          </p:nvPr>
+        </p:nvSpPr>
+        <p:spPr>
+          <a:xfrm>
+            <a:off x="3884613" y="8685213"/>
+            <a:ext cx="2971800" cy="458787"/>
+          </a:xfrm>
+          <a:prstGeom prst="rect">
+            <a:avLst/>
+          </a:prstGeom>
+        </p:spPr>
+        <p:txBody>
+          <a:bodyPr vert="horz" lIns="91440" tIns="45720" rIns="91440" bIns="45720" rtlCol="0" anchor="b"/>
+          <a:lstStyle>
+            <a:lvl1pPr algn="r">
+              <a:defRPr sz="1200"/>
+            </a:lvl1pPr>
+          </a:lstStyle>
+          <a:p>
+            <a:fld id="{2654616F-5B70-3840-955D-6DB355250DC4}" type="slidenum">
+              <a:rPr lang="de-DE" smtClean="0"/>
+              <a:t>‹Nr.›</a:t>
+            </a:fld>
+            <a:endParaRPr lang="de-DE"/>
+          </a:p>
+        </p:txBody>
+      </p:sp>
+    </p:spTree>
+    <p:extLst>
+      <p:ext uri="{BB962C8B-B14F-4D97-AF65-F5344CB8AC3E}">
+        <p14:creationId xmlns:p14="http://schemas.microsoft.com/office/powerpoint/2010/main" val="3350511148"/>
+      </p:ext>
+    </p:extLst>
+  </p:cSld>
+  <p:clrMap bg1="lt1" tx1="dk1" bg2="lt2" tx2="dk2" accent1="accent1" accent2="accent2" accent3="accent3" accent4="accent4" accent5="accent5" accent6="accent6" hlink="hlink" folHlink="folHlink"/>
+  <p:notesStyle>
+    <a:lvl1pPr marL="0" algn="l" defTabSz="914400" rtl="0" eaLnBrk="1" latinLnBrk="0" hangingPunct="1">
+      <a:defRPr sz="1200" kern="1200">
+        <a:solidFill>
+          <a:schemeClr val="tx1"/>
+        </a:solidFill>
+        <a:latin typeface="+mn-lt"/>
+        <a:ea typeface="+mn-ea"/>
+        <a:cs typeface="+mn-cs"/>
+      </a:defRPr>
+    </a:lvl1pPr>
+    <a:lvl2pPr marL="457200" algn="l" defTabSz="914400" rtl="0" eaLnBrk="1" latinLnBrk="0" hangingPunct="1">
+      <a:defRPr sz="1200" kern="1200">
+        <a:solidFill>
+          <a:schemeClr val="tx1"/>
+        </a:solidFill>
+        <a:latin typeface="+mn-lt"/>
+        <a:ea typeface="+mn-ea"/>
+        <a:cs typeface="+mn-cs"/>
+      </a:defRPr>
+    </a:lvl2pPr>
+    <a:lvl3pPr marL="914400" algn="l" defTabSz="914400" rtl="0" eaLnBrk="1" latinLnBrk="0" hangingPunct="1">
+      <a:defRPr sz="1200" kern="1200">
+        <a:solidFill>
+          <a:schemeClr val="tx1"/>
+        </a:solidFill>
+        <a:latin typeface="+mn-lt"/>
+        <a:ea typeface="+mn-ea"/>
+        <a:cs typeface="+mn-cs"/>
+      </a:defRPr>
+    </a:lvl3pPr>
+    <a:lvl4pPr marL="1371600" algn="l" defTabSz="914400" rtl="0" eaLnBrk="1" latinLnBrk="0" hangingPunct="1">
+      <a:defRPr sz="1200" kern="1200">
+        <a:solidFill>
+          <a:schemeClr val="tx1"/>
+        </a:solidFill>
+        <a:latin typeface="+mn-lt"/>
+        <a:ea typeface="+mn-ea"/>
+        <a:cs typeface="+mn-cs"/>
+      </a:defRPr>
+    </a:lvl4pPr>
+    <a:lvl5pPr marL="1828800" algn="l" defTabSz="914400" rtl="0" eaLnBrk="1" latinLnBrk="0" hangingPunct="1">
+      <a:defRPr sz="1200" kern="1200">
+        <a:solidFill>
+          <a:schemeClr val="tx1"/>
+        </a:solidFill>
+        <a:latin typeface="+mn-lt"/>
+        <a:ea typeface="+mn-ea"/>
+        <a:cs typeface="+mn-cs"/>
+      </a:defRPr>
+    </a:lvl5pPr>
+    <a:lvl6pPr marL="2286000" algn="l" defTabSz="914400" rtl="0" eaLnBrk="1" latinLnBrk="0" hangingPunct="1">
+      <a:defRPr sz="1200" kern="1200">
+        <a:solidFill>
+          <a:schemeClr val="tx1"/>
+        </a:solidFill>
+        <a:latin typeface="+mn-lt"/>
+        <a:ea typeface="+mn-ea"/>
+        <a:cs typeface="+mn-cs"/>
+      </a:defRPr>
+    </a:lvl6pPr>
+    <a:lvl7pPr marL="2743200" algn="l" defTabSz="914400" rtl="0" eaLnBrk="1" latinLnBrk="0" hangingPunct="1">
+      <a:defRPr sz="1200" kern="1200">
+        <a:solidFill>
+          <a:schemeClr val="tx1"/>
+        </a:solidFill>
+        <a:latin typeface="+mn-lt"/>
+        <a:ea typeface="+mn-ea"/>
+        <a:cs typeface="+mn-cs"/>
+      </a:defRPr>
+    </a:lvl7pPr>
+    <a:lvl8pPr marL="3200400" algn="l" defTabSz="914400" rtl="0" eaLnBrk="1" latinLnBrk="0" hangingPunct="1">
+      <a:defRPr sz="1200" kern="1200">
+        <a:solidFill>
+          <a:schemeClr val="tx1"/>
+        </a:solidFill>
+        <a:latin typeface="+mn-lt"/>
+        <a:ea typeface="+mn-ea"/>
+        <a:cs typeface="+mn-cs"/>
+      </a:defRPr>
+    </a:lvl8pPr>
+    <a:lvl9pPr marL="3657600" algn="l" defTabSz="914400" rtl="0" eaLnBrk="1" latinLnBrk="0" hangingPunct="1">
+      <a:defRPr sz="1200" kern="1200">
+        <a:solidFill>
+          <a:schemeClr val="tx1"/>
+        </a:solidFill>
+        <a:latin typeface="+mn-lt"/>
+        <a:ea typeface="+mn-ea"/>
+        <a:cs typeface="+mn-cs"/>
+      </a:defRPr>
+    </a:lvl9pPr>
+  </p:notesStyle>
+</p:notesMaster>
+</file>
+
+<file path=ppt/notesSlides/notesSlide1.xml><?xml version="1.0" encoding="utf-8"?>
+<p:notes xmlns:a="http://schemas.openxmlformats.org/drawingml/2006/main" xmlns:r="http://schemas.openxmlformats.org/officeDocument/2006/relationships" xmlns:p="http://schemas.openxmlformats.org/presentationml/2006/main">
+  <p:cSld>
+    <p:spTree>
+      <p:nvGrpSpPr>
+        <p:cNvPr id="1" name=""/>
+        <p:cNvGrpSpPr/>
+        <p:nvPr/>
+      </p:nvGrpSpPr>
+      <p:grpSpPr>
+        <a:xfrm>
+          <a:off x="0" y="0"/>
+          <a:ext cx="0" cy="0"/>
+          <a:chOff x="0" y="0"/>
+          <a:chExt cx="0" cy="0"/>
+        </a:xfrm>
+      </p:grpSpPr>
+      <p:sp>
+        <p:nvSpPr>
+          <p:cNvPr id="2" name="Folienbildplatzhalter 1"/>
+          <p:cNvSpPr>
+            <a:spLocks noGrp="1" noRot="1" noChangeAspect="1"/>
+          </p:cNvSpPr>
+          <p:nvPr>
+            <p:ph type="sldImg"/>
+          </p:nvPr>
+        </p:nvSpPr>
+        <p:spPr/>
+      </p:sp>
+      <p:sp>
+        <p:nvSpPr>
+          <p:cNvPr id="3" name="Notizenplatzhalter 2"/>
+          <p:cNvSpPr>
+            <a:spLocks noGrp="1"/>
+          </p:cNvSpPr>
+          <p:nvPr>
+            <p:ph type="body" idx="1"/>
+          </p:nvPr>
+        </p:nvSpPr>
+        <p:spPr/>
+        <p:txBody>
+          <a:bodyPr/>
+          <a:lstStyle/>
+          <a:p>
+            <a:endParaRPr lang="de-DE" dirty="0"/>
+          </a:p>
+        </p:txBody>
+      </p:sp>
+      <p:sp>
+        <p:nvSpPr>
+          <p:cNvPr id="4" name="Foliennummernplatzhalter 3"/>
+          <p:cNvSpPr>
+            <a:spLocks noGrp="1"/>
+          </p:cNvSpPr>
+          <p:nvPr>
+            <p:ph type="sldNum" sz="quarter" idx="5"/>
+          </p:nvPr>
+        </p:nvSpPr>
+        <p:spPr/>
+        <p:txBody>
+          <a:bodyPr/>
+          <a:lstStyle/>
+          <a:p>
+            <a:fld id="{2654616F-5B70-3840-955D-6DB355250DC4}" type="slidenum">
+              <a:rPr lang="de-DE" smtClean="0"/>
+              <a:t>8</a:t>
+            </a:fld>
+            <a:endParaRPr lang="de-DE"/>
+          </a:p>
+        </p:txBody>
+      </p:sp>
+    </p:spTree>
+    <p:extLst>
+      <p:ext uri="{BB962C8B-B14F-4D97-AF65-F5344CB8AC3E}">
+        <p14:creationId xmlns:p14="http://schemas.microsoft.com/office/powerpoint/2010/main" val="2622941822"/>
+      </p:ext>
+    </p:extLst>
+  </p:cSld>
+  <p:clrMapOvr>
+    <a:masterClrMapping/>
+  </p:clrMapOvr>
+</p:notes>
 </file>
 
 <file path=ppt/slideLayouts/slideLayout1.xml><?xml version="1.0" encoding="utf-8"?>
@@ -6648,7 +7084,7 @@
                   <a:srgbClr val="595959"/>
                 </a:solidFill>
               </a:rPr>
-              <a:t>Unterschiedliche Ansätze in Anwendungsgebiet, Workflow-Beschreibung und Systemarchitektur</a:t>
+              <a:t>Unterschiedliche Ansätze in Anwendungskontext, Workflow-Beschreibung und Systemarchitektur</a:t>
             </a:r>
           </a:p>
         </p:txBody>
@@ -8142,12 +8578,27 @@
             <p:ph type="title"/>
           </p:nvPr>
         </p:nvSpPr>
-        <p:spPr/>
-        <p:txBody>
-          <a:bodyPr/>
-          <a:lstStyle/>
-          <a:p>
-            <a:endParaRPr lang="de-DE"/>
+        <p:spPr>
+          <a:xfrm>
+            <a:off x="1219200" y="812800"/>
+            <a:ext cx="10058400" cy="787400"/>
+          </a:xfrm>
+        </p:spPr>
+        <p:txBody>
+          <a:bodyPr wrap="square" lIns="0" tIns="0" rIns="0" bIns="0" anchor="t">
+            <a:normAutofit/>
+          </a:bodyPr>
+          <a:lstStyle/>
+          <a:p>
+            <a:pPr algn="l"/>
+            <a:r>
+              <a:rPr lang="de-DE" sz="2600" b="1" dirty="0">
+                <a:solidFill>
+                  <a:srgbClr val="262626"/>
+                </a:solidFill>
+              </a:rPr>
+              <a:t>Gemeinsame Benchmark-Workflows</a:t>
+            </a:r>
           </a:p>
         </p:txBody>
       </p:sp>
@@ -8167,19 +8618,1485 @@
             <p:ph idx="1"/>
           </p:nvPr>
         </p:nvSpPr>
-        <p:spPr/>
+        <p:spPr>
+          <a:xfrm>
+            <a:off x="1219200" y="1701800"/>
+            <a:ext cx="4318000" cy="228600"/>
+          </a:xfrm>
+        </p:spPr>
+        <p:txBody>
+          <a:bodyPr wrap="square" lIns="0" tIns="0" rIns="0" bIns="0" anchor="t"/>
+          <a:lstStyle/>
+          <a:p>
+            <a:pPr marL="0" indent="0" algn="l">
+              <a:buNone/>
+            </a:pPr>
+            <a:r>
+              <a:rPr lang="de-DE" sz="1300" b="1" spc="150" dirty="0">
+                <a:solidFill>
+                  <a:srgbClr val="C1002A"/>
+                </a:solidFill>
+              </a:rPr>
+              <a:t>PIPELINE</a:t>
+            </a:r>
+          </a:p>
+        </p:txBody>
+      </p:sp>
+      <p:sp>
+        <p:nvSpPr>
+          <p:cNvPr id="20" name="Akzentlinie"/>
+          <p:cNvSpPr/>
+          <p:nvPr/>
+        </p:nvSpPr>
+        <p:spPr>
+          <a:xfrm>
+            <a:off x="914400" y="812800"/>
+            <a:ext cx="50800" cy="431800"/>
+          </a:xfrm>
+          <a:prstGeom prst="rect">
+            <a:avLst/>
+          </a:prstGeom>
+          <a:solidFill>
+            <a:srgbClr val="C1002A"/>
+          </a:solidFill>
+          <a:ln>
+            <a:noFill/>
+          </a:ln>
+        </p:spPr>
         <p:txBody>
           <a:bodyPr/>
           <a:lstStyle/>
           <a:p>
             <a:endParaRPr lang="de-DE"/>
+          </a:p>
+        </p:txBody>
+      </p:sp>
+      <p:sp>
+        <p:nvSpPr>
+          <p:cNvPr id="21" name="Label rechts"/>
+          <p:cNvSpPr txBox="1"/>
+          <p:nvPr/>
+        </p:nvSpPr>
+        <p:spPr>
+          <a:xfrm>
+            <a:off x="6959600" y="1701800"/>
+            <a:ext cx="4318000" cy="228600"/>
+          </a:xfrm>
+          <a:prstGeom prst="rect">
+            <a:avLst/>
+          </a:prstGeom>
+          <a:noFill/>
+        </p:spPr>
+        <p:txBody>
+          <a:bodyPr wrap="square" lIns="0" tIns="0" rIns="0" bIns="0" anchor="t"/>
+          <a:lstStyle/>
+          <a:p>
+            <a:pPr algn="l"/>
+            <a:r>
+              <a:rPr lang="de-DE" sz="1300" b="1" spc="150" dirty="0">
+                <a:solidFill>
+                  <a:srgbClr val="C1002A"/>
+                </a:solidFill>
+              </a:rPr>
+              <a:t>SCATTER-GATHER</a:t>
+            </a:r>
+          </a:p>
+        </p:txBody>
+      </p:sp>
+      <p:sp>
+        <p:nvSpPr>
+          <p:cNvPr id="22" name="Node generate_input"/>
+          <p:cNvSpPr/>
+          <p:nvPr/>
+        </p:nvSpPr>
+        <p:spPr>
+          <a:xfrm>
+            <a:off x="2616200" y="2082800"/>
+            <a:ext cx="1524000" cy="279400"/>
+          </a:xfrm>
+          <a:prstGeom prst="roundRect">
+            <a:avLst>
+              <a:gd name="adj" fmla="val 18000"/>
+            </a:avLst>
+          </a:prstGeom>
+          <a:noFill/>
+          <a:ln w="9525">
+            <a:solidFill>
+              <a:srgbClr val="BFBFBF"/>
+            </a:solidFill>
+          </a:ln>
+        </p:spPr>
+        <p:txBody>
+          <a:bodyPr wrap="none" lIns="0" tIns="0" rIns="0" bIns="0" anchor="ctr">
+            <a:noAutofit/>
+          </a:bodyPr>
+          <a:lstStyle/>
+          <a:p>
+            <a:pPr algn="ctr"/>
+            <a:r>
+              <a:rPr lang="de-DE" sz="1300" dirty="0">
+                <a:solidFill>
+                  <a:srgbClr val="262626"/>
+                </a:solidFill>
+              </a:rPr>
+              <a:t>generate_input</a:t>
+            </a:r>
+          </a:p>
+        </p:txBody>
+      </p:sp>
+      <p:sp>
+        <p:nvSpPr>
+          <p:cNvPr id="23" name="Node preprocess"/>
+          <p:cNvSpPr/>
+          <p:nvPr/>
+        </p:nvSpPr>
+        <p:spPr>
+          <a:xfrm>
+            <a:off x="2616200" y="2514600"/>
+            <a:ext cx="1524000" cy="279400"/>
+          </a:xfrm>
+          <a:prstGeom prst="roundRect">
+            <a:avLst>
+              <a:gd name="adj" fmla="val 18000"/>
+            </a:avLst>
+          </a:prstGeom>
+          <a:noFill/>
+          <a:ln w="9525">
+            <a:solidFill>
+              <a:srgbClr val="BFBFBF"/>
+            </a:solidFill>
+          </a:ln>
+        </p:spPr>
+        <p:txBody>
+          <a:bodyPr wrap="none" lIns="0" tIns="0" rIns="0" bIns="0" anchor="ctr">
+            <a:noAutofit/>
+          </a:bodyPr>
+          <a:lstStyle/>
+          <a:p>
+            <a:pPr algn="ctr"/>
+            <a:r>
+              <a:rPr lang="de-DE" sz="1300" dirty="0">
+                <a:solidFill>
+                  <a:srgbClr val="262626"/>
+                </a:solidFill>
+              </a:rPr>
+              <a:t>preprocess</a:t>
+            </a:r>
+          </a:p>
+        </p:txBody>
+      </p:sp>
+      <p:cxnSp>
+        <p:nvCxnSpPr>
+          <p:cNvPr id="24" name="Pfeil"/>
+          <p:cNvCxnSpPr/>
+          <p:nvPr/>
+        </p:nvCxnSpPr>
+        <p:spPr>
+          <a:xfrm>
+            <a:off x="3378200" y="2362200"/>
+            <a:ext cx="0" cy="152400"/>
+          </a:xfrm>
+          <a:prstGeom prst="straightConnector1">
+            <a:avLst/>
+          </a:prstGeom>
+          <a:ln w="9525">
+            <a:solidFill>
+              <a:srgbClr val="8C8C8C"/>
+            </a:solidFill>
+            <a:tailEnd type="triangle" w="sm" len="sm"/>
+          </a:ln>
+        </p:spPr>
+      </p:cxnSp>
+      <p:sp>
+        <p:nvSpPr>
+          <p:cNvPr id="25" name="Node compute"/>
+          <p:cNvSpPr/>
+          <p:nvPr/>
+        </p:nvSpPr>
+        <p:spPr>
+          <a:xfrm>
+            <a:off x="2616200" y="2946400"/>
+            <a:ext cx="1524000" cy="279400"/>
+          </a:xfrm>
+          <a:prstGeom prst="roundRect">
+            <a:avLst>
+              <a:gd name="adj" fmla="val 18000"/>
+            </a:avLst>
+          </a:prstGeom>
+          <a:noFill/>
+          <a:ln w="9525">
+            <a:solidFill>
+              <a:srgbClr val="C1002A"/>
+            </a:solidFill>
+          </a:ln>
+        </p:spPr>
+        <p:txBody>
+          <a:bodyPr wrap="none" lIns="0" tIns="0" rIns="0" bIns="0" anchor="ctr">
+            <a:noAutofit/>
+          </a:bodyPr>
+          <a:lstStyle/>
+          <a:p>
+            <a:pPr algn="ctr"/>
+            <a:r>
+              <a:rPr lang="de-DE" sz="1300" dirty="0">
+                <a:solidFill>
+                  <a:srgbClr val="C1002A"/>
+                </a:solidFill>
+              </a:rPr>
+              <a:t>compute</a:t>
+            </a:r>
+          </a:p>
+        </p:txBody>
+      </p:sp>
+      <p:cxnSp>
+        <p:nvCxnSpPr>
+          <p:cNvPr id="26" name="Pfeil"/>
+          <p:cNvCxnSpPr/>
+          <p:nvPr/>
+        </p:nvCxnSpPr>
+        <p:spPr>
+          <a:xfrm>
+            <a:off x="3378200" y="2794000"/>
+            <a:ext cx="0" cy="152400"/>
+          </a:xfrm>
+          <a:prstGeom prst="straightConnector1">
+            <a:avLst/>
+          </a:prstGeom>
+          <a:ln w="9525">
+            <a:solidFill>
+              <a:srgbClr val="8C8C8C"/>
+            </a:solidFill>
+            <a:tailEnd type="triangle" w="sm" len="sm"/>
+          </a:ln>
+        </p:spPr>
+      </p:cxnSp>
+      <p:sp>
+        <p:nvSpPr>
+          <p:cNvPr id="27" name="Node postprocess"/>
+          <p:cNvSpPr/>
+          <p:nvPr/>
+        </p:nvSpPr>
+        <p:spPr>
+          <a:xfrm>
+            <a:off x="2616200" y="3378200"/>
+            <a:ext cx="1524000" cy="279400"/>
+          </a:xfrm>
+          <a:prstGeom prst="roundRect">
+            <a:avLst>
+              <a:gd name="adj" fmla="val 18000"/>
+            </a:avLst>
+          </a:prstGeom>
+          <a:noFill/>
+          <a:ln w="9525">
+            <a:solidFill>
+              <a:srgbClr val="BFBFBF"/>
+            </a:solidFill>
+          </a:ln>
+        </p:spPr>
+        <p:txBody>
+          <a:bodyPr wrap="none" lIns="0" tIns="0" rIns="0" bIns="0" anchor="ctr">
+            <a:noAutofit/>
+          </a:bodyPr>
+          <a:lstStyle/>
+          <a:p>
+            <a:pPr algn="ctr"/>
+            <a:r>
+              <a:rPr lang="de-DE" sz="1300" dirty="0">
+                <a:solidFill>
+                  <a:srgbClr val="262626"/>
+                </a:solidFill>
+              </a:rPr>
+              <a:t>postprocess</a:t>
+            </a:r>
+          </a:p>
+        </p:txBody>
+      </p:sp>
+      <p:cxnSp>
+        <p:nvCxnSpPr>
+          <p:cNvPr id="28" name="Pfeil"/>
+          <p:cNvCxnSpPr/>
+          <p:nvPr/>
+        </p:nvCxnSpPr>
+        <p:spPr>
+          <a:xfrm>
+            <a:off x="3378200" y="3225800"/>
+            <a:ext cx="0" cy="152400"/>
+          </a:xfrm>
+          <a:prstGeom prst="straightConnector1">
+            <a:avLst/>
+          </a:prstGeom>
+          <a:ln w="9525">
+            <a:solidFill>
+              <a:srgbClr val="8C8C8C"/>
+            </a:solidFill>
+            <a:tailEnd type="triangle" w="sm" len="sm"/>
+          </a:ln>
+        </p:spPr>
+      </p:cxnSp>
+      <p:sp>
+        <p:nvSpPr>
+          <p:cNvPr id="29" name="Node generate_input"/>
+          <p:cNvSpPr/>
+          <p:nvPr/>
+        </p:nvSpPr>
+        <p:spPr>
+          <a:xfrm>
+            <a:off x="8356600" y="2082800"/>
+            <a:ext cx="1524000" cy="279400"/>
+          </a:xfrm>
+          <a:prstGeom prst="roundRect">
+            <a:avLst>
+              <a:gd name="adj" fmla="val 18000"/>
+            </a:avLst>
+          </a:prstGeom>
+          <a:noFill/>
+          <a:ln w="9525">
+            <a:solidFill>
+              <a:srgbClr val="BFBFBF"/>
+            </a:solidFill>
+          </a:ln>
+        </p:spPr>
+        <p:txBody>
+          <a:bodyPr wrap="none" lIns="0" tIns="0" rIns="0" bIns="0" anchor="ctr">
+            <a:noAutofit/>
+          </a:bodyPr>
+          <a:lstStyle/>
+          <a:p>
+            <a:pPr algn="ctr"/>
+            <a:r>
+              <a:rPr lang="de-DE" sz="1300" dirty="0">
+                <a:solidFill>
+                  <a:srgbClr val="262626"/>
+                </a:solidFill>
+              </a:rPr>
+              <a:t>generate_input</a:t>
+            </a:r>
+          </a:p>
+        </p:txBody>
+      </p:sp>
+      <p:cxnSp>
+        <p:nvCxnSpPr>
+          <p:cNvPr id="30" name="Pfeil"/>
+          <p:cNvCxnSpPr/>
+          <p:nvPr/>
+        </p:nvCxnSpPr>
+        <p:spPr>
+          <a:xfrm>
+            <a:off x="9118600" y="2362200"/>
+            <a:ext cx="0" cy="152400"/>
+          </a:xfrm>
+          <a:prstGeom prst="straightConnector1">
+            <a:avLst/>
+          </a:prstGeom>
+          <a:ln w="9525">
+            <a:solidFill>
+              <a:srgbClr val="8C8C8C"/>
+            </a:solidFill>
+            <a:tailEnd type="triangle" w="sm" len="sm"/>
+          </a:ln>
+        </p:spPr>
+      </p:cxnSp>
+      <p:sp>
+        <p:nvSpPr>
+          <p:cNvPr id="31" name="Node preprocess"/>
+          <p:cNvSpPr/>
+          <p:nvPr/>
+        </p:nvSpPr>
+        <p:spPr>
+          <a:xfrm>
+            <a:off x="8356600" y="2514600"/>
+            <a:ext cx="1524000" cy="279400"/>
+          </a:xfrm>
+          <a:prstGeom prst="roundRect">
+            <a:avLst>
+              <a:gd name="adj" fmla="val 18000"/>
+            </a:avLst>
+          </a:prstGeom>
+          <a:noFill/>
+          <a:ln w="9525">
+            <a:solidFill>
+              <a:srgbClr val="BFBFBF"/>
+            </a:solidFill>
+          </a:ln>
+        </p:spPr>
+        <p:txBody>
+          <a:bodyPr wrap="none" lIns="0" tIns="0" rIns="0" bIns="0" anchor="ctr">
+            <a:noAutofit/>
+          </a:bodyPr>
+          <a:lstStyle/>
+          <a:p>
+            <a:pPr algn="ctr"/>
+            <a:r>
+              <a:rPr lang="de-DE" sz="1300" dirty="0">
+                <a:solidFill>
+                  <a:srgbClr val="262626"/>
+                </a:solidFill>
+              </a:rPr>
+              <a:t>preprocess</a:t>
+            </a:r>
+          </a:p>
+        </p:txBody>
+      </p:sp>
+      <p:cxnSp>
+        <p:nvCxnSpPr>
+          <p:cNvPr id="32" name="Pfeil"/>
+          <p:cNvCxnSpPr/>
+          <p:nvPr/>
+        </p:nvCxnSpPr>
+        <p:spPr>
+          <a:xfrm>
+            <a:off x="9118600" y="2794000"/>
+            <a:ext cx="0" cy="152400"/>
+          </a:xfrm>
+          <a:prstGeom prst="straightConnector1">
+            <a:avLst/>
+          </a:prstGeom>
+          <a:ln w="9525">
+            <a:solidFill>
+              <a:srgbClr val="8C8C8C"/>
+            </a:solidFill>
+            <a:tailEnd type="triangle" w="sm" len="sm"/>
+          </a:ln>
+        </p:spPr>
+      </p:cxnSp>
+      <p:sp>
+        <p:nvSpPr>
+          <p:cNvPr id="33" name="Node split"/>
+          <p:cNvSpPr/>
+          <p:nvPr/>
+        </p:nvSpPr>
+        <p:spPr>
+          <a:xfrm>
+            <a:off x="8356600" y="2946400"/>
+            <a:ext cx="1524000" cy="279400"/>
+          </a:xfrm>
+          <a:prstGeom prst="roundRect">
+            <a:avLst>
+              <a:gd name="adj" fmla="val 18000"/>
+            </a:avLst>
+          </a:prstGeom>
+          <a:noFill/>
+          <a:ln w="9525">
+            <a:solidFill>
+              <a:srgbClr val="BFBFBF"/>
+            </a:solidFill>
+          </a:ln>
+        </p:spPr>
+        <p:txBody>
+          <a:bodyPr wrap="none" lIns="0" tIns="0" rIns="0" bIns="0" anchor="ctr">
+            <a:noAutofit/>
+          </a:bodyPr>
+          <a:lstStyle/>
+          <a:p>
+            <a:pPr algn="ctr"/>
+            <a:r>
+              <a:rPr lang="de-DE" sz="1300" dirty="0">
+                <a:solidFill>
+                  <a:srgbClr val="262626"/>
+                </a:solidFill>
+              </a:rPr>
+              <a:t>split</a:t>
+            </a:r>
+          </a:p>
+        </p:txBody>
+      </p:sp>
+      <p:sp>
+        <p:nvSpPr>
+          <p:cNvPr id="34" name="Node compute"/>
+          <p:cNvSpPr/>
+          <p:nvPr/>
+        </p:nvSpPr>
+        <p:spPr>
+          <a:xfrm>
+            <a:off x="7086600" y="3378200"/>
+            <a:ext cx="1066800" cy="279400"/>
+          </a:xfrm>
+          <a:prstGeom prst="roundRect">
+            <a:avLst>
+              <a:gd name="adj" fmla="val 18000"/>
+            </a:avLst>
+          </a:prstGeom>
+          <a:noFill/>
+          <a:ln w="9525">
+            <a:solidFill>
+              <a:srgbClr val="C1002A"/>
+            </a:solidFill>
+          </a:ln>
+        </p:spPr>
+        <p:txBody>
+          <a:bodyPr wrap="none" lIns="0" tIns="0" rIns="0" bIns="0" anchor="ctr">
+            <a:noAutofit/>
+          </a:bodyPr>
+          <a:lstStyle/>
+          <a:p>
+            <a:pPr algn="ctr"/>
+            <a:r>
+              <a:rPr lang="de-DE" sz="1300" dirty="0">
+                <a:solidFill>
+                  <a:srgbClr val="C1002A"/>
+                </a:solidFill>
+              </a:rPr>
+              <a:t>compute</a:t>
+            </a:r>
+            <a:r>
+              <a:rPr lang="de-DE" sz="1300" baseline="-25000" dirty="0">
+                <a:solidFill>
+                  <a:srgbClr val="C1002A"/>
+                </a:solidFill>
+              </a:rPr>
+              <a:t>1</a:t>
+            </a:r>
+          </a:p>
+        </p:txBody>
+      </p:sp>
+      <p:cxnSp>
+        <p:nvCxnSpPr>
+          <p:cNvPr id="35" name="Pfeil"/>
+          <p:cNvCxnSpPr/>
+          <p:nvPr/>
+        </p:nvCxnSpPr>
+        <p:spPr>
+          <a:xfrm flipH="1">
+            <a:off x="7620000" y="3225800"/>
+            <a:ext cx="1498600" cy="152400"/>
+          </a:xfrm>
+          <a:prstGeom prst="straightConnector1">
+            <a:avLst/>
+          </a:prstGeom>
+          <a:ln w="9525">
+            <a:solidFill>
+              <a:srgbClr val="8C8C8C"/>
+            </a:solidFill>
+            <a:tailEnd type="triangle" w="sm" len="sm"/>
+          </a:ln>
+        </p:spPr>
+      </p:cxnSp>
+      <p:cxnSp>
+        <p:nvCxnSpPr>
+          <p:cNvPr id="36" name="Pfeil"/>
+          <p:cNvCxnSpPr/>
+          <p:nvPr/>
+        </p:nvCxnSpPr>
+        <p:spPr>
+          <a:xfrm>
+            <a:off x="7620000" y="3657600"/>
+            <a:ext cx="1498600" cy="152400"/>
+          </a:xfrm>
+          <a:prstGeom prst="straightConnector1">
+            <a:avLst/>
+          </a:prstGeom>
+          <a:ln w="9525">
+            <a:solidFill>
+              <a:srgbClr val="8C8C8C"/>
+            </a:solidFill>
+            <a:tailEnd type="triangle" w="sm" len="sm"/>
+          </a:ln>
+        </p:spPr>
+      </p:cxnSp>
+      <p:sp>
+        <p:nvSpPr>
+          <p:cNvPr id="37" name="Node compute"/>
+          <p:cNvSpPr/>
+          <p:nvPr/>
+        </p:nvSpPr>
+        <p:spPr>
+          <a:xfrm>
+            <a:off x="8585200" y="3378200"/>
+            <a:ext cx="1066800" cy="279400"/>
+          </a:xfrm>
+          <a:prstGeom prst="roundRect">
+            <a:avLst>
+              <a:gd name="adj" fmla="val 18000"/>
+            </a:avLst>
+          </a:prstGeom>
+          <a:noFill/>
+          <a:ln w="9525">
+            <a:solidFill>
+              <a:srgbClr val="C1002A"/>
+            </a:solidFill>
+          </a:ln>
+        </p:spPr>
+        <p:txBody>
+          <a:bodyPr wrap="none" lIns="0" tIns="0" rIns="0" bIns="0" anchor="ctr">
+            <a:noAutofit/>
+          </a:bodyPr>
+          <a:lstStyle/>
+          <a:p>
+            <a:pPr algn="ctr"/>
+            <a:r>
+              <a:rPr lang="de-DE" sz="1300" dirty="0">
+                <a:solidFill>
+                  <a:srgbClr val="C1002A"/>
+                </a:solidFill>
+              </a:rPr>
+              <a:t>compute</a:t>
+            </a:r>
+            <a:r>
+              <a:rPr lang="de-DE" sz="1300" baseline="-25000" dirty="0">
+                <a:solidFill>
+                  <a:srgbClr val="C1002A"/>
+                </a:solidFill>
+              </a:rPr>
+              <a:t>2</a:t>
+            </a:r>
+          </a:p>
+        </p:txBody>
+      </p:sp>
+      <p:cxnSp>
+        <p:nvCxnSpPr>
+          <p:cNvPr id="38" name="Pfeil"/>
+          <p:cNvCxnSpPr/>
+          <p:nvPr/>
+        </p:nvCxnSpPr>
+        <p:spPr>
+          <a:xfrm>
+            <a:off x="9118600" y="3225800"/>
+            <a:ext cx="0" cy="152400"/>
+          </a:xfrm>
+          <a:prstGeom prst="straightConnector1">
+            <a:avLst/>
+          </a:prstGeom>
+          <a:ln w="9525">
+            <a:solidFill>
+              <a:srgbClr val="8C8C8C"/>
+            </a:solidFill>
+            <a:tailEnd type="triangle" w="sm" len="sm"/>
+          </a:ln>
+        </p:spPr>
+      </p:cxnSp>
+      <p:cxnSp>
+        <p:nvCxnSpPr>
+          <p:cNvPr id="39" name="Pfeil"/>
+          <p:cNvCxnSpPr/>
+          <p:nvPr/>
+        </p:nvCxnSpPr>
+        <p:spPr>
+          <a:xfrm>
+            <a:off x="9118600" y="3657600"/>
+            <a:ext cx="0" cy="152400"/>
+          </a:xfrm>
+          <a:prstGeom prst="straightConnector1">
+            <a:avLst/>
+          </a:prstGeom>
+          <a:ln w="9525">
+            <a:solidFill>
+              <a:srgbClr val="8C8C8C"/>
+            </a:solidFill>
+            <a:tailEnd type="triangle" w="sm" len="sm"/>
+          </a:ln>
+        </p:spPr>
+      </p:cxnSp>
+      <p:sp>
+        <p:nvSpPr>
+          <p:cNvPr id="40" name="Node compute"/>
+          <p:cNvSpPr/>
+          <p:nvPr/>
+        </p:nvSpPr>
+        <p:spPr>
+          <a:xfrm>
+            <a:off x="10083800" y="3378200"/>
+            <a:ext cx="1066800" cy="279400"/>
+          </a:xfrm>
+          <a:prstGeom prst="roundRect">
+            <a:avLst>
+              <a:gd name="adj" fmla="val 18000"/>
+            </a:avLst>
+          </a:prstGeom>
+          <a:noFill/>
+          <a:ln w="9525">
+            <a:solidFill>
+              <a:srgbClr val="C1002A"/>
+            </a:solidFill>
+          </a:ln>
+        </p:spPr>
+        <p:txBody>
+          <a:bodyPr wrap="none" lIns="0" tIns="0" rIns="0" bIns="0" anchor="ctr">
+            <a:noAutofit/>
+          </a:bodyPr>
+          <a:lstStyle/>
+          <a:p>
+            <a:pPr algn="ctr"/>
+            <a:r>
+              <a:rPr lang="de-DE" sz="1300" dirty="0">
+                <a:solidFill>
+                  <a:srgbClr val="C1002A"/>
+                </a:solidFill>
+              </a:rPr>
+              <a:t>compute</a:t>
+            </a:r>
+            <a:r>
+              <a:rPr lang="de-DE" sz="1300" baseline="-25000" dirty="0">
+                <a:solidFill>
+                  <a:srgbClr val="C1002A"/>
+                </a:solidFill>
+              </a:rPr>
+              <a:t>n</a:t>
+            </a:r>
+          </a:p>
+        </p:txBody>
+      </p:sp>
+      <p:cxnSp>
+        <p:nvCxnSpPr>
+          <p:cNvPr id="41" name="Pfeil"/>
+          <p:cNvCxnSpPr/>
+          <p:nvPr/>
+        </p:nvCxnSpPr>
+        <p:spPr>
+          <a:xfrm>
+            <a:off x="9118600" y="3225800"/>
+            <a:ext cx="1498600" cy="152400"/>
+          </a:xfrm>
+          <a:prstGeom prst="straightConnector1">
+            <a:avLst/>
+          </a:prstGeom>
+          <a:ln w="9525">
+            <a:solidFill>
+              <a:srgbClr val="8C8C8C"/>
+            </a:solidFill>
+            <a:tailEnd type="triangle" w="sm" len="sm"/>
+          </a:ln>
+        </p:spPr>
+      </p:cxnSp>
+      <p:cxnSp>
+        <p:nvCxnSpPr>
+          <p:cNvPr id="42" name="Pfeil"/>
+          <p:cNvCxnSpPr/>
+          <p:nvPr/>
+        </p:nvCxnSpPr>
+        <p:spPr>
+          <a:xfrm flipH="1">
+            <a:off x="9118600" y="3657600"/>
+            <a:ext cx="1498600" cy="152400"/>
+          </a:xfrm>
+          <a:prstGeom prst="straightConnector1">
+            <a:avLst/>
+          </a:prstGeom>
+          <a:ln w="9525">
+            <a:solidFill>
+              <a:srgbClr val="8C8C8C"/>
+            </a:solidFill>
+            <a:tailEnd type="triangle" w="sm" len="sm"/>
+          </a:ln>
+        </p:spPr>
+      </p:cxnSp>
+      <p:sp>
+        <p:nvSpPr>
+          <p:cNvPr id="43" name="Ellipsis"/>
+          <p:cNvSpPr txBox="1"/>
+          <p:nvPr/>
+        </p:nvSpPr>
+        <p:spPr>
+          <a:xfrm>
+            <a:off x="9867900" y="3378200"/>
+            <a:ext cx="215900" cy="279400"/>
+          </a:xfrm>
+          <a:prstGeom prst="rect">
+            <a:avLst/>
+          </a:prstGeom>
+          <a:noFill/>
+        </p:spPr>
+        <p:txBody>
+          <a:bodyPr wrap="none" lIns="0" tIns="0" rIns="0" bIns="0" anchor="ctr"/>
+          <a:lstStyle/>
+          <a:p>
+            <a:pPr algn="ctr"/>
+            <a:r>
+              <a:rPr lang="de-DE" sz="1300" dirty="0">
+                <a:solidFill>
+                  <a:srgbClr val="A6A6A6"/>
+                </a:solidFill>
+              </a:rPr>
+              <a:t>···</a:t>
+            </a:r>
+          </a:p>
+        </p:txBody>
+      </p:sp>
+      <p:sp>
+        <p:nvSpPr>
+          <p:cNvPr id="44" name="Node aggregate"/>
+          <p:cNvSpPr/>
+          <p:nvPr/>
+        </p:nvSpPr>
+        <p:spPr>
+          <a:xfrm>
+            <a:off x="8356600" y="3810000"/>
+            <a:ext cx="1524000" cy="279400"/>
+          </a:xfrm>
+          <a:prstGeom prst="roundRect">
+            <a:avLst>
+              <a:gd name="adj" fmla="val 18000"/>
+            </a:avLst>
+          </a:prstGeom>
+          <a:noFill/>
+          <a:ln w="9525">
+            <a:solidFill>
+              <a:srgbClr val="BFBFBF"/>
+            </a:solidFill>
+          </a:ln>
+        </p:spPr>
+        <p:txBody>
+          <a:bodyPr wrap="none" lIns="0" tIns="0" rIns="0" bIns="0" anchor="ctr">
+            <a:noAutofit/>
+          </a:bodyPr>
+          <a:lstStyle/>
+          <a:p>
+            <a:pPr algn="ctr"/>
+            <a:r>
+              <a:rPr lang="de-DE" sz="1300" dirty="0">
+                <a:solidFill>
+                  <a:srgbClr val="262626"/>
+                </a:solidFill>
+              </a:rPr>
+              <a:t>aggregate</a:t>
+            </a:r>
+          </a:p>
+        </p:txBody>
+      </p:sp>
+      <p:cxnSp>
+        <p:nvCxnSpPr>
+          <p:cNvPr id="45" name="Pfeil"/>
+          <p:cNvCxnSpPr/>
+          <p:nvPr/>
+        </p:nvCxnSpPr>
+        <p:spPr>
+          <a:xfrm>
+            <a:off x="9118600" y="4089400"/>
+            <a:ext cx="0" cy="152400"/>
+          </a:xfrm>
+          <a:prstGeom prst="straightConnector1">
+            <a:avLst/>
+          </a:prstGeom>
+          <a:ln w="9525">
+            <a:solidFill>
+              <a:srgbClr val="8C8C8C"/>
+            </a:solidFill>
+            <a:tailEnd type="triangle" w="sm" len="sm"/>
+          </a:ln>
+        </p:spPr>
+      </p:cxnSp>
+      <p:sp>
+        <p:nvSpPr>
+          <p:cNvPr id="46" name="Node postprocess"/>
+          <p:cNvSpPr/>
+          <p:nvPr/>
+        </p:nvSpPr>
+        <p:spPr>
+          <a:xfrm>
+            <a:off x="8356600" y="4241800"/>
+            <a:ext cx="1524000" cy="279400"/>
+          </a:xfrm>
+          <a:prstGeom prst="roundRect">
+            <a:avLst>
+              <a:gd name="adj" fmla="val 18000"/>
+            </a:avLst>
+          </a:prstGeom>
+          <a:noFill/>
+          <a:ln w="9525">
+            <a:solidFill>
+              <a:srgbClr val="BFBFBF"/>
+            </a:solidFill>
+          </a:ln>
+        </p:spPr>
+        <p:txBody>
+          <a:bodyPr wrap="none" lIns="0" tIns="0" rIns="0" bIns="0" anchor="ctr">
+            <a:noAutofit/>
+          </a:bodyPr>
+          <a:lstStyle/>
+          <a:p>
+            <a:pPr algn="ctr"/>
+            <a:r>
+              <a:rPr lang="de-DE" sz="1300" dirty="0">
+                <a:solidFill>
+                  <a:srgbClr val="262626"/>
+                </a:solidFill>
+              </a:rPr>
+              <a:t>postprocess</a:t>
+            </a:r>
+          </a:p>
+        </p:txBody>
+      </p:sp>
+      <p:sp>
+        <p:nvSpPr>
+          <p:cNvPr id="47" name="Caption links"/>
+          <p:cNvSpPr txBox="1"/>
+          <p:nvPr/>
+        </p:nvSpPr>
+        <p:spPr>
+          <a:xfrm>
+            <a:off x="1219200" y="4597400"/>
+            <a:ext cx="4318000" cy="228600"/>
+          </a:xfrm>
+          <a:prstGeom prst="rect">
+            <a:avLst/>
+          </a:prstGeom>
+          <a:noFill/>
+        </p:spPr>
+        <p:txBody>
+          <a:bodyPr wrap="square" lIns="0" tIns="0" rIns="0" bIns="0" anchor="t"/>
+          <a:lstStyle/>
+          <a:p>
+            <a:pPr algn="ctr"/>
+            <a:r>
+              <a:rPr lang="de-DE" sz="1200" i="1" dirty="0">
+                <a:solidFill>
+                  <a:srgbClr val="595959"/>
+                </a:solidFill>
+              </a:rPr>
+              <a:t>Sequenzielle Verarbeitung</a:t>
+            </a:r>
+          </a:p>
+        </p:txBody>
+      </p:sp>
+      <p:sp>
+        <p:nvSpPr>
+          <p:cNvPr id="48" name="Caption rechts"/>
+          <p:cNvSpPr txBox="1"/>
+          <p:nvPr/>
+        </p:nvSpPr>
+        <p:spPr>
+          <a:xfrm>
+            <a:off x="6959600" y="4597400"/>
+            <a:ext cx="4318000" cy="228600"/>
+          </a:xfrm>
+          <a:prstGeom prst="rect">
+            <a:avLst/>
+          </a:prstGeom>
+          <a:noFill/>
+        </p:spPr>
+        <p:txBody>
+          <a:bodyPr wrap="square" lIns="0" tIns="0" rIns="0" bIns="0" anchor="t"/>
+          <a:lstStyle/>
+          <a:p>
+            <a:pPr algn="ctr"/>
+            <a:r>
+              <a:rPr lang="de-DE" sz="1200" i="1" dirty="0">
+                <a:solidFill>
+                  <a:srgbClr val="595959"/>
+                </a:solidFill>
+              </a:rPr>
+              <a:t>Parallele Verarbeitung mit anschließender Zusammenführung</a:t>
+            </a:r>
+          </a:p>
+        </p:txBody>
+      </p:sp>
+      <p:sp>
+        <p:nvSpPr>
+          <p:cNvPr id="4" name="Foliennummer"/>
+          <p:cNvSpPr txBox="1"/>
+          <p:nvPr/>
+        </p:nvSpPr>
+        <p:spPr>
+          <a:xfrm>
+            <a:off x="10769600" y="6197600"/>
+            <a:ext cx="508000" cy="254000"/>
+          </a:xfrm>
+          <a:prstGeom prst="rect">
+            <a:avLst/>
+          </a:prstGeom>
+          <a:noFill/>
+        </p:spPr>
+        <p:txBody>
+          <a:bodyPr wrap="square" lIns="0" tIns="0" rIns="0" bIns="0" anchor="ctr"/>
+          <a:lstStyle/>
+          <a:p>
+            <a:pPr algn="r"/>
+            <a:r>
+              <a:rPr lang="de-DE" sz="1200" dirty="0">
+                <a:solidFill>
+                  <a:srgbClr val="8C8C8C"/>
+                </a:solidFill>
+              </a:rPr>
+              <a:t>8</a:t>
+            </a:r>
+          </a:p>
+        </p:txBody>
+      </p:sp>
+      <p:cxnSp>
+        <p:nvCxnSpPr>
+          <p:cNvPr id="5" name="Fortschritt Linie"/>
+          <p:cNvCxnSpPr/>
+          <p:nvPr/>
+        </p:nvCxnSpPr>
+        <p:spPr>
+          <a:xfrm>
+            <a:off x="1219200" y="6172200"/>
+            <a:ext cx="5080000" cy="0"/>
+          </a:xfrm>
+          <a:prstGeom prst="line">
+            <a:avLst/>
+          </a:prstGeom>
+          <a:ln w="6350">
+            <a:solidFill>
+              <a:srgbClr val="D9D9D9"/>
+            </a:solidFill>
+          </a:ln>
+        </p:spPr>
+      </p:cxnSp>
+      <p:sp>
+        <p:nvSpPr>
+          <p:cNvPr id="6" name="Marker Motivation"/>
+          <p:cNvSpPr/>
+          <p:nvPr/>
+        </p:nvSpPr>
+        <p:spPr>
+          <a:xfrm>
+            <a:off x="1187450" y="6140450"/>
+            <a:ext cx="63500" cy="63500"/>
+          </a:xfrm>
+          <a:prstGeom prst="ellipse">
+            <a:avLst/>
+          </a:prstGeom>
+          <a:solidFill>
+            <a:srgbClr val="BFBFBF"/>
+          </a:solidFill>
+          <a:ln>
+            <a:noFill/>
+          </a:ln>
+        </p:spPr>
+        <p:txBody>
+          <a:bodyPr/>
+          <a:lstStyle/>
+          <a:p>
+            <a:endParaRPr lang="de-DE"/>
+          </a:p>
+        </p:txBody>
+      </p:sp>
+      <p:sp>
+        <p:nvSpPr>
+          <p:cNvPr id="52" name="Label Motivation"/>
+          <p:cNvSpPr txBox="1"/>
+          <p:nvPr/>
+        </p:nvSpPr>
+        <p:spPr>
+          <a:xfrm>
+            <a:off x="1219200" y="6273800"/>
+            <a:ext cx="1270000" cy="203200"/>
+          </a:xfrm>
+          <a:prstGeom prst="rect">
+            <a:avLst/>
+          </a:prstGeom>
+          <a:noFill/>
+        </p:spPr>
+        <p:txBody>
+          <a:bodyPr wrap="none" lIns="0" tIns="0" rIns="0" bIns="0" anchor="t"/>
+          <a:lstStyle/>
+          <a:p>
+            <a:pPr algn="l"/>
+            <a:r>
+              <a:rPr lang="de-DE" sz="1000" dirty="0">
+                <a:solidFill>
+                  <a:srgbClr val="A6A6A6"/>
+                </a:solidFill>
+              </a:rPr>
+              <a:t>Motivation</a:t>
+            </a:r>
+          </a:p>
+        </p:txBody>
+      </p:sp>
+      <p:sp>
+        <p:nvSpPr>
+          <p:cNvPr id="53" name="Marker Methodik"/>
+          <p:cNvSpPr/>
+          <p:nvPr/>
+        </p:nvSpPr>
+        <p:spPr>
+          <a:xfrm>
+            <a:off x="2444750" y="6127750"/>
+            <a:ext cx="88900" cy="88900"/>
+          </a:xfrm>
+          <a:prstGeom prst="ellipse">
+            <a:avLst/>
+          </a:prstGeom>
+          <a:solidFill>
+            <a:srgbClr val="C1002A"/>
+          </a:solidFill>
+          <a:ln>
+            <a:noFill/>
+          </a:ln>
+        </p:spPr>
+        <p:txBody>
+          <a:bodyPr/>
+          <a:lstStyle/>
+          <a:p>
+            <a:endParaRPr lang="de-DE"/>
+          </a:p>
+        </p:txBody>
+      </p:sp>
+      <p:sp>
+        <p:nvSpPr>
+          <p:cNvPr id="54" name="Label Methodik"/>
+          <p:cNvSpPr txBox="1"/>
+          <p:nvPr/>
+        </p:nvSpPr>
+        <p:spPr>
+          <a:xfrm>
+            <a:off x="1854200" y="6273800"/>
+            <a:ext cx="1270000" cy="203200"/>
+          </a:xfrm>
+          <a:prstGeom prst="rect">
+            <a:avLst/>
+          </a:prstGeom>
+          <a:noFill/>
+        </p:spPr>
+        <p:txBody>
+          <a:bodyPr wrap="none" lIns="0" tIns="0" rIns="0" bIns="0" anchor="t"/>
+          <a:lstStyle/>
+          <a:p>
+            <a:pPr algn="ctr"/>
+            <a:r>
+              <a:rPr lang="de-DE" sz="1000" b="1" dirty="0">
+                <a:solidFill>
+                  <a:srgbClr val="C1002A"/>
+                </a:solidFill>
+              </a:rPr>
+              <a:t>Methodik</a:t>
+            </a:r>
+          </a:p>
+        </p:txBody>
+      </p:sp>
+      <p:sp>
+        <p:nvSpPr>
+          <p:cNvPr id="55" name="Marker Systeme"/>
+          <p:cNvSpPr/>
+          <p:nvPr/>
+        </p:nvSpPr>
+        <p:spPr>
+          <a:xfrm>
+            <a:off x="3727450" y="6140450"/>
+            <a:ext cx="63500" cy="63500"/>
+          </a:xfrm>
+          <a:prstGeom prst="ellipse">
+            <a:avLst/>
+          </a:prstGeom>
+          <a:solidFill>
+            <a:srgbClr val="BFBFBF"/>
+          </a:solidFill>
+          <a:ln>
+            <a:noFill/>
+          </a:ln>
+        </p:spPr>
+        <p:txBody>
+          <a:bodyPr/>
+          <a:lstStyle/>
+          <a:p>
+            <a:endParaRPr lang="de-DE"/>
+          </a:p>
+        </p:txBody>
+      </p:sp>
+      <p:sp>
+        <p:nvSpPr>
+          <p:cNvPr id="56" name="Label Systeme"/>
+          <p:cNvSpPr txBox="1"/>
+          <p:nvPr/>
+        </p:nvSpPr>
+        <p:spPr>
+          <a:xfrm>
+            <a:off x="3124200" y="6273800"/>
+            <a:ext cx="1270000" cy="203200"/>
+          </a:xfrm>
+          <a:prstGeom prst="rect">
+            <a:avLst/>
+          </a:prstGeom>
+          <a:noFill/>
+        </p:spPr>
+        <p:txBody>
+          <a:bodyPr wrap="none" lIns="0" tIns="0" rIns="0" bIns="0" anchor="t"/>
+          <a:lstStyle/>
+          <a:p>
+            <a:pPr algn="ctr"/>
+            <a:r>
+              <a:rPr lang="de-DE" sz="1000" dirty="0">
+                <a:solidFill>
+                  <a:srgbClr val="A6A6A6"/>
+                </a:solidFill>
+              </a:rPr>
+              <a:t>Systeme</a:t>
+            </a:r>
+          </a:p>
+        </p:txBody>
+      </p:sp>
+      <p:sp>
+        <p:nvSpPr>
+          <p:cNvPr id="57" name="Marker Untersuchung"/>
+          <p:cNvSpPr/>
+          <p:nvPr/>
+        </p:nvSpPr>
+        <p:spPr>
+          <a:xfrm>
+            <a:off x="4997450" y="6140450"/>
+            <a:ext cx="63500" cy="63500"/>
+          </a:xfrm>
+          <a:prstGeom prst="ellipse">
+            <a:avLst/>
+          </a:prstGeom>
+          <a:solidFill>
+            <a:srgbClr val="BFBFBF"/>
+          </a:solidFill>
+          <a:ln>
+            <a:noFill/>
+          </a:ln>
+        </p:spPr>
+        <p:txBody>
+          <a:bodyPr/>
+          <a:lstStyle/>
+          <a:p>
+            <a:endParaRPr lang="de-DE"/>
+          </a:p>
+        </p:txBody>
+      </p:sp>
+      <p:sp>
+        <p:nvSpPr>
+          <p:cNvPr id="58" name="Label Untersuchung"/>
+          <p:cNvSpPr txBox="1"/>
+          <p:nvPr/>
+        </p:nvSpPr>
+        <p:spPr>
+          <a:xfrm>
+            <a:off x="4394200" y="6273800"/>
+            <a:ext cx="1270000" cy="203200"/>
+          </a:xfrm>
+          <a:prstGeom prst="rect">
+            <a:avLst/>
+          </a:prstGeom>
+          <a:noFill/>
+        </p:spPr>
+        <p:txBody>
+          <a:bodyPr wrap="none" lIns="0" tIns="0" rIns="0" bIns="0" anchor="t"/>
+          <a:lstStyle/>
+          <a:p>
+            <a:pPr algn="ctr"/>
+            <a:r>
+              <a:rPr lang="de-DE" sz="1000" dirty="0">
+                <a:solidFill>
+                  <a:srgbClr val="A6A6A6"/>
+                </a:solidFill>
+              </a:rPr>
+              <a:t>Untersuchung</a:t>
+            </a:r>
+          </a:p>
+        </p:txBody>
+      </p:sp>
+      <p:sp>
+        <p:nvSpPr>
+          <p:cNvPr id="59" name="Marker Fazit"/>
+          <p:cNvSpPr/>
+          <p:nvPr/>
+        </p:nvSpPr>
+        <p:spPr>
+          <a:xfrm>
+            <a:off x="6267450" y="6140450"/>
+            <a:ext cx="63500" cy="63500"/>
+          </a:xfrm>
+          <a:prstGeom prst="ellipse">
+            <a:avLst/>
+          </a:prstGeom>
+          <a:solidFill>
+            <a:srgbClr val="BFBFBF"/>
+          </a:solidFill>
+          <a:ln>
+            <a:noFill/>
+          </a:ln>
+        </p:spPr>
+        <p:txBody>
+          <a:bodyPr/>
+          <a:lstStyle/>
+          <a:p>
+            <a:endParaRPr lang="de-DE"/>
+          </a:p>
+        </p:txBody>
+      </p:sp>
+      <p:sp>
+        <p:nvSpPr>
+          <p:cNvPr id="60" name="Label Fazit"/>
+          <p:cNvSpPr txBox="1"/>
+          <p:nvPr/>
+        </p:nvSpPr>
+        <p:spPr>
+          <a:xfrm>
+            <a:off x="5029200" y="6273800"/>
+            <a:ext cx="1270000" cy="203200"/>
+          </a:xfrm>
+          <a:prstGeom prst="rect">
+            <a:avLst/>
+          </a:prstGeom>
+          <a:noFill/>
+        </p:spPr>
+        <p:txBody>
+          <a:bodyPr wrap="none" lIns="0" tIns="0" rIns="0" bIns="0" anchor="t"/>
+          <a:lstStyle/>
+          <a:p>
+            <a:pPr algn="r"/>
+            <a:r>
+              <a:rPr lang="de-DE" sz="1000" dirty="0">
+                <a:solidFill>
+                  <a:srgbClr val="A6A6A6"/>
+                </a:solidFill>
+              </a:rPr>
+              <a:t>Fazit</a:t>
+            </a:r>
+          </a:p>
+        </p:txBody>
+      </p:sp>
+      <p:sp>
+        <p:nvSpPr>
+          <p:cNvPr id="70" name="Parameter links"/>
+          <p:cNvSpPr txBox="1"/>
+          <p:nvPr/>
+        </p:nvSpPr>
+        <p:spPr>
+          <a:xfrm>
+            <a:off x="1219200" y="4838700"/>
+            <a:ext cx="4318000" cy="228600"/>
+          </a:xfrm>
+          <a:prstGeom prst="rect">
+            <a:avLst/>
+          </a:prstGeom>
+          <a:noFill/>
+        </p:spPr>
+        <p:txBody>
+          <a:bodyPr wrap="square" lIns="0" tIns="0" rIns="0" bIns="0" anchor="t"/>
+          <a:lstStyle/>
+          <a:p>
+            <a:pPr algn="ctr"/>
+            <a:r>
+              <a:rPr lang="de-DE" sz="1200" dirty="0">
+                <a:solidFill>
+                  <a:srgbClr val="595959"/>
+                </a:solidFill>
+              </a:rPr>
+              <a:t>Rechenlast: </a:t>
+            </a:r>
+            <a:r>
+              <a:rPr lang="de-DE" sz="1200" b="1" dirty="0">
+                <a:solidFill>
+                  <a:srgbClr val="262626"/>
+                </a:solidFill>
+              </a:rPr>
+              <a:t>short · medium · long</a:t>
+            </a:r>
+          </a:p>
+        </p:txBody>
+      </p:sp>
+      <p:sp>
+        <p:nvSpPr>
+          <p:cNvPr id="71" name="Parameter rechts"/>
+          <p:cNvSpPr txBox="1"/>
+          <p:nvPr/>
+        </p:nvSpPr>
+        <p:spPr>
+          <a:xfrm>
+            <a:off x="6959600" y="4838700"/>
+            <a:ext cx="4318000" cy="431800"/>
+          </a:xfrm>
+          <a:prstGeom prst="rect">
+            <a:avLst/>
+          </a:prstGeom>
+          <a:noFill/>
+        </p:spPr>
+        <p:txBody>
+          <a:bodyPr wrap="square" lIns="0" tIns="0" rIns="0" bIns="0" anchor="t"/>
+          <a:lstStyle/>
+          <a:p>
+            <a:pPr algn="ctr">
+              <a:spcAft>
+                <a:spcPts val="200"/>
+              </a:spcAft>
+            </a:pPr>
+            <a:r>
+              <a:rPr lang="de-DE" sz="1200" dirty="0">
+                <a:solidFill>
+                  <a:srgbClr val="595959"/>
+                </a:solidFill>
+              </a:rPr>
+              <a:t>Rechenlast: </a:t>
+            </a:r>
+            <a:r>
+              <a:rPr lang="de-DE" sz="1200" b="1" dirty="0">
+                <a:solidFill>
+                  <a:srgbClr val="262626"/>
+                </a:solidFill>
+              </a:rPr>
+              <a:t>short · medium · long</a:t>
+            </a:r>
+          </a:p>
+          <a:p>
+            <a:pPr algn="ctr"/>
+            <a:r>
+              <a:rPr lang="de-DE" sz="1200" dirty="0">
+                <a:solidFill>
+                  <a:srgbClr val="595959"/>
+                </a:solidFill>
+              </a:rPr>
+              <a:t>Teilstücke: </a:t>
+            </a:r>
+            <a:r>
+              <a:rPr lang="de-DE" sz="1200" b="1" dirty="0">
+                <a:solidFill>
+                  <a:srgbClr val="262626"/>
+                </a:solidFill>
+              </a:rPr>
+              <a:t>1 · 2 · 4</a:t>
+            </a:r>
+          </a:p>
+        </p:txBody>
+      </p:sp>
+      <p:cxnSp>
+        <p:nvCxnSpPr>
+          <p:cNvPr id="72" name="Trennlinie"/>
+          <p:cNvCxnSpPr/>
+          <p:nvPr/>
+        </p:nvCxnSpPr>
+        <p:spPr>
+          <a:xfrm>
+            <a:off x="1219200" y="5359400"/>
+            <a:ext cx="10058400" cy="0"/>
+          </a:xfrm>
+          <a:prstGeom prst="line">
+            <a:avLst/>
+          </a:prstGeom>
+          <a:ln w="6350">
+            <a:solidFill>
+              <a:srgbClr val="D9D9D9"/>
+            </a:solidFill>
+          </a:ln>
+        </p:spPr>
+      </p:cxnSp>
+      <p:sp>
+        <p:nvSpPr>
+          <p:cNvPr id="73" name="Kernaussage"/>
+          <p:cNvSpPr txBox="1"/>
+          <p:nvPr/>
+        </p:nvSpPr>
+        <p:spPr>
+          <a:xfrm>
+            <a:off x="1219200" y="5511800"/>
+            <a:ext cx="10058400" cy="254000"/>
+          </a:xfrm>
+          <a:prstGeom prst="rect">
+            <a:avLst/>
+          </a:prstGeom>
+          <a:noFill/>
+        </p:spPr>
+        <p:txBody>
+          <a:bodyPr wrap="square" lIns="0" tIns="0" rIns="0" bIns="0" anchor="t"/>
+          <a:lstStyle/>
+          <a:p>
+            <a:pPr algn="ctr"/>
+            <a:r>
+              <a:rPr lang="de-DE" sz="1400" b="1" dirty="0">
+                <a:solidFill>
+                  <a:srgbClr val="262626"/>
+                </a:solidFill>
+              </a:rPr>
+              <a:t>Gleiche Rechenlogik in allen fünf Systemen</a:t>
+            </a:r>
           </a:p>
         </p:txBody>
       </p:sp>
     </p:spTree>
     <p:extLst>
       <p:ext uri="{BB962C8B-B14F-4D97-AF65-F5344CB8AC3E}">
-        <p14:creationId xmlns:p14="http://schemas.microsoft.com/office/powerpoint/2010/main" val="1563278280"/>
+        <p14:creationId xmlns:p14="http://schemas.microsoft.com/office/powerpoint/2010/main" val="2600877360"/>
       </p:ext>
     </p:extLst>
   </p:cSld>
@@ -8190,6 +10107,321 @@
 </file>
 
 <file path=ppt/theme/theme1.xml><?xml version="1.0" encoding="utf-8"?>
+<a:theme xmlns:a="http://schemas.openxmlformats.org/drawingml/2006/main" name="Office">
+  <a:themeElements>
+    <a:clrScheme name="Office">
+      <a:dk1>
+        <a:sysClr val="windowText" lastClr="000000"/>
+      </a:dk1>
+      <a:lt1>
+        <a:sysClr val="window" lastClr="FFFFFF"/>
+      </a:lt1>
+      <a:dk2>
+        <a:srgbClr val="0E2841"/>
+      </a:dk2>
+      <a:lt2>
+        <a:srgbClr val="E8E8E8"/>
+      </a:lt2>
+      <a:accent1>
+        <a:srgbClr val="156082"/>
+      </a:accent1>
+      <a:accent2>
+        <a:srgbClr val="E97132"/>
+      </a:accent2>
+      <a:accent3>
+        <a:srgbClr val="196B24"/>
+      </a:accent3>
+      <a:accent4>
+        <a:srgbClr val="0F9ED5"/>
+      </a:accent4>
+      <a:accent5>
+        <a:srgbClr val="A02B93"/>
+      </a:accent5>
+      <a:accent6>
+        <a:srgbClr val="4EA72E"/>
+      </a:accent6>
+      <a:hlink>
+        <a:srgbClr val="467886"/>
+      </a:hlink>
+      <a:folHlink>
+        <a:srgbClr val="96607D"/>
+      </a:folHlink>
+    </a:clrScheme>
+    <a:fontScheme name="Office">
+      <a:majorFont>
+        <a:latin typeface="Aptos Display" panose="02110004020202020204"/>
+        <a:ea typeface=""/>
+        <a:cs typeface=""/>
+        <a:font script="Jpan" typeface="游ゴシック Light"/>
+        <a:font script="Hang" typeface="맑은 고딕"/>
+        <a:font script="Hans" typeface="等线 Light"/>
+        <a:font script="Hant" typeface="新細明體"/>
+        <a:font script="Arab" typeface="Times New Roman"/>
+        <a:font script="Hebr" typeface="Times New Roman"/>
+        <a:font script="Thai" typeface="Angsana New"/>
+        <a:font script="Ethi" typeface="Nyala"/>
+        <a:font script="Beng" typeface="Vrinda"/>
+        <a:font script="Gujr" typeface="Shruti"/>
+        <a:font script="Khmr" typeface="MoolBoran"/>
+        <a:font script="Knda" typeface="Tunga"/>
+        <a:font script="Guru" typeface="Raavi"/>
+        <a:font script="Cans" typeface="Euphemia"/>
+        <a:font script="Cher" typeface="Plantagenet Cherokee"/>
+        <a:font script="Yiii" typeface="Microsoft Yi Baiti"/>
+        <a:font script="Tibt" typeface="Microsoft Himalaya"/>
+        <a:font script="Thaa" typeface="MV Boli"/>
+        <a:font script="Deva" typeface="Mangal"/>
+        <a:font script="Telu" typeface="Gautami"/>
+        <a:font script="Taml" typeface="Latha"/>
+        <a:font script="Syrc" typeface="Estrangelo Edessa"/>
+        <a:font script="Orya" typeface="Kalinga"/>
+        <a:font script="Mlym" typeface="Kartika"/>
+        <a:font script="Laoo" typeface="DokChampa"/>
+        <a:font script="Sinh" typeface="Iskoola Pota"/>
+        <a:font script="Mong" typeface="Mongolian Baiti"/>
+        <a:font script="Viet" typeface="Times New Roman"/>
+        <a:font script="Uigh" typeface="Microsoft Uighur"/>
+        <a:font script="Geor" typeface="Sylfaen"/>
+        <a:font script="Armn" typeface="Arial"/>
+        <a:font script="Bugi" typeface="Leelawadee UI"/>
+        <a:font script="Bopo" typeface="Microsoft JhengHei"/>
+        <a:font script="Java" typeface="Javanese Text"/>
+        <a:font script="Lisu" typeface="Segoe UI"/>
+        <a:font script="Mymr" typeface="Myanmar Text"/>
+        <a:font script="Nkoo" typeface="Ebrima"/>
+        <a:font script="Olck" typeface="Nirmala UI"/>
+        <a:font script="Osma" typeface="Ebrima"/>
+        <a:font script="Phag" typeface="Phagspa"/>
+        <a:font script="Syrn" typeface="Estrangelo Edessa"/>
+        <a:font script="Syrj" typeface="Estrangelo Edessa"/>
+        <a:font script="Syre" typeface="Estrangelo Edessa"/>
+        <a:font script="Sora" typeface="Nirmala UI"/>
+        <a:font script="Tale" typeface="Microsoft Tai Le"/>
+        <a:font script="Talu" typeface="Microsoft New Tai Lue"/>
+        <a:font script="Tfng" typeface="Ebrima"/>
+      </a:majorFont>
+      <a:minorFont>
+        <a:latin typeface="Aptos" panose="02110004020202020204"/>
+        <a:ea typeface=""/>
+        <a:cs typeface=""/>
+        <a:font script="Jpan" typeface="游ゴシック"/>
+        <a:font script="Hang" typeface="맑은 고딕"/>
+        <a:font script="Hans" typeface="等线"/>
+        <a:font script="Hant" typeface="新細明體"/>
+        <a:font script="Arab" typeface="Arial"/>
+        <a:font script="Hebr" typeface="Arial"/>
+        <a:font script="Thai" typeface="Cordia New"/>
+        <a:font script="Ethi" typeface="Nyala"/>
+        <a:font script="Beng" typeface="Vrinda"/>
+        <a:font script="Gujr" typeface="Shruti"/>
+        <a:font script="Khmr" typeface="DaunPenh"/>
+        <a:font script="Knda" typeface="Tunga"/>
+        <a:font script="Guru" typeface="Raavi"/>
+        <a:font script="Cans" typeface="Euphemia"/>
+        <a:font script="Cher" typeface="Plantagenet Cherokee"/>
+        <a:font script="Yiii" typeface="Microsoft Yi Baiti"/>
+        <a:font script="Tibt" typeface="Microsoft Himalaya"/>
+        <a:font script="Thaa" typeface="MV Boli"/>
+        <a:font script="Deva" typeface="Mangal"/>
+        <a:font script="Telu" typeface="Gautami"/>
+        <a:font script="Taml" typeface="Latha"/>
+        <a:font script="Syrc" typeface="Estrangelo Edessa"/>
+        <a:font script="Orya" typeface="Kalinga"/>
+        <a:font script="Mlym" typeface="Kartika"/>
+        <a:font script="Laoo" typeface="DokChampa"/>
+        <a:font script="Sinh" typeface="Iskoola Pota"/>
+        <a:font script="Mong" typeface="Mongolian Baiti"/>
+        <a:font script="Viet" typeface="Arial"/>
+        <a:font script="Uigh" typeface="Microsoft Uighur"/>
+        <a:font script="Geor" typeface="Sylfaen"/>
+        <a:font script="Armn" typeface="Arial"/>
+        <a:font script="Bugi" typeface="Leelawadee UI"/>
+        <a:font script="Bopo" typeface="Microsoft JhengHei"/>
+        <a:font script="Java" typeface="Javanese Text"/>
+        <a:font script="Lisu" typeface="Segoe UI"/>
+        <a:font script="Mymr" typeface="Myanmar Text"/>
+        <a:font script="Nkoo" typeface="Ebrima"/>
+        <a:font script="Olck" typeface="Nirmala UI"/>
+        <a:font script="Osma" typeface="Ebrima"/>
+        <a:font script="Phag" typeface="Phagspa"/>
+        <a:font script="Syrn" typeface="Estrangelo Edessa"/>
+        <a:font script="Syrj" typeface="Estrangelo Edessa"/>
+        <a:font script="Syre" typeface="Estrangelo Edessa"/>
+        <a:font script="Sora" typeface="Nirmala UI"/>
+        <a:font script="Tale" typeface="Microsoft Tai Le"/>
+        <a:font script="Talu" typeface="Microsoft New Tai Lue"/>
+        <a:font script="Tfng" typeface="Ebrima"/>
+      </a:minorFont>
+    </a:fontScheme>
+    <a:fmtScheme name="Office">
+      <a:fillStyleLst>
+        <a:solidFill>
+          <a:schemeClr val="phClr"/>
+        </a:solidFill>
+        <a:gradFill rotWithShape="1">
+          <a:gsLst>
+            <a:gs pos="0">
+              <a:schemeClr val="phClr">
+                <a:lumMod val="110000"/>
+                <a:satMod val="105000"/>
+                <a:tint val="67000"/>
+              </a:schemeClr>
+            </a:gs>
+            <a:gs pos="50000">
+              <a:schemeClr val="phClr">
+                <a:lumMod val="105000"/>
+                <a:satMod val="103000"/>
+                <a:tint val="73000"/>
+              </a:schemeClr>
+            </a:gs>
+            <a:gs pos="100000">
+              <a:schemeClr val="phClr">
+                <a:lumMod val="105000"/>
+                <a:satMod val="109000"/>
+                <a:tint val="81000"/>
+              </a:schemeClr>
+            </a:gs>
+          </a:gsLst>
+          <a:lin ang="5400000" scaled="0"/>
+        </a:gradFill>
+        <a:gradFill rotWithShape="1">
+          <a:gsLst>
+            <a:gs pos="0">
+              <a:schemeClr val="phClr">
+                <a:satMod val="103000"/>
+                <a:lumMod val="102000"/>
+                <a:tint val="94000"/>
+              </a:schemeClr>
+            </a:gs>
+            <a:gs pos="50000">
+              <a:schemeClr val="phClr">
+                <a:satMod val="110000"/>
+                <a:lumMod val="100000"/>
+                <a:shade val="100000"/>
+              </a:schemeClr>
+            </a:gs>
+            <a:gs pos="100000">
+              <a:schemeClr val="phClr">
+                <a:lumMod val="99000"/>
+                <a:satMod val="120000"/>
+                <a:shade val="78000"/>
+              </a:schemeClr>
+            </a:gs>
+          </a:gsLst>
+          <a:lin ang="5400000" scaled="0"/>
+        </a:gradFill>
+      </a:fillStyleLst>
+      <a:lnStyleLst>
+        <a:ln w="12700" cap="flat" cmpd="sng" algn="ctr">
+          <a:solidFill>
+            <a:schemeClr val="phClr"/>
+          </a:solidFill>
+          <a:prstDash val="solid"/>
+          <a:miter lim="800000"/>
+        </a:ln>
+        <a:ln w="19050" cap="flat" cmpd="sng" algn="ctr">
+          <a:solidFill>
+            <a:schemeClr val="phClr"/>
+          </a:solidFill>
+          <a:prstDash val="solid"/>
+          <a:miter lim="800000"/>
+        </a:ln>
+        <a:ln w="25400" cap="flat" cmpd="sng" algn="ctr">
+          <a:solidFill>
+            <a:schemeClr val="phClr"/>
+          </a:solidFill>
+          <a:prstDash val="solid"/>
+          <a:miter lim="800000"/>
+        </a:ln>
+      </a:lnStyleLst>
+      <a:effectStyleLst>
+        <a:effectStyle>
+          <a:effectLst/>
+        </a:effectStyle>
+        <a:effectStyle>
+          <a:effectLst/>
+        </a:effectStyle>
+        <a:effectStyle>
+          <a:effectLst>
+            <a:outerShdw blurRad="57150" dist="19050" dir="5400000" algn="ctr" rotWithShape="0">
+              <a:srgbClr val="000000">
+                <a:alpha val="63000"/>
+              </a:srgbClr>
+            </a:outerShdw>
+          </a:effectLst>
+        </a:effectStyle>
+      </a:effectStyleLst>
+      <a:bgFillStyleLst>
+        <a:solidFill>
+          <a:schemeClr val="phClr"/>
+        </a:solidFill>
+        <a:solidFill>
+          <a:schemeClr val="phClr">
+            <a:tint val="95000"/>
+            <a:satMod val="170000"/>
+          </a:schemeClr>
+        </a:solidFill>
+        <a:gradFill rotWithShape="1">
+          <a:gsLst>
+            <a:gs pos="0">
+              <a:schemeClr val="phClr">
+                <a:tint val="93000"/>
+                <a:satMod val="150000"/>
+                <a:shade val="98000"/>
+                <a:lumMod val="102000"/>
+              </a:schemeClr>
+            </a:gs>
+            <a:gs pos="50000">
+              <a:schemeClr val="phClr">
+                <a:tint val="98000"/>
+                <a:satMod val="130000"/>
+                <a:shade val="90000"/>
+                <a:lumMod val="103000"/>
+              </a:schemeClr>
+            </a:gs>
+            <a:gs pos="100000">
+              <a:schemeClr val="phClr">
+                <a:shade val="63000"/>
+                <a:satMod val="120000"/>
+              </a:schemeClr>
+            </a:gs>
+          </a:gsLst>
+          <a:lin ang="5400000" scaled="0"/>
+        </a:gradFill>
+      </a:bgFillStyleLst>
+    </a:fmtScheme>
+  </a:themeElements>
+  <a:objectDefaults>
+    <a:lnDef>
+      <a:spPr/>
+      <a:bodyPr/>
+      <a:lstStyle/>
+      <a:style>
+        <a:lnRef idx="2">
+          <a:schemeClr val="accent1"/>
+        </a:lnRef>
+        <a:fillRef idx="0">
+          <a:schemeClr val="accent1"/>
+        </a:fillRef>
+        <a:effectRef idx="1">
+          <a:schemeClr val="accent1"/>
+        </a:effectRef>
+        <a:fontRef idx="minor">
+          <a:schemeClr val="tx1"/>
+        </a:fontRef>
+      </a:style>
+    </a:lnDef>
+  </a:objectDefaults>
+  <a:extraClrSchemeLst/>
+  <a:extLst>
+    <a:ext uri="{05A4C25C-085E-4340-85A3-A5531E510DB2}">
+      <thm15:themeFamily xmlns:thm15="http://schemas.microsoft.com/office/thememl/2012/main" name="Office Theme" id="{2E142A2C-CD16-42D6-873A-C26D2A0506FA}" vid="{1BDDFF52-6CD6-40A5-AB3C-68EB2F1E4D0A}"/>
+    </a:ext>
+  </a:extLst>
+</a:theme>
+</file>
+
+<file path=ppt/theme/theme2.xml><?xml version="1.0" encoding="utf-8"?>
 <a:theme xmlns:a="http://schemas.openxmlformats.org/drawingml/2006/main" name="Office">
   <a:themeElements>
     <a:clrScheme name="Office">

--- a/Präsentation-Kolloqium.pptx
+++ b/Präsentation-Kolloqium.pptx
@@ -9972,7 +9972,7 @@
                   <a:srgbClr val="262626"/>
                 </a:solidFill>
               </a:rPr>
-              <a:t>short · medium · long</a:t>
+              <a:t>kurz · mittel · lang</a:t>
             </a:r>
           </a:p>
         </p:txBody>
@@ -10016,7 +10016,7 @@
                   <a:srgbClr val="262626"/>
                 </a:solidFill>
               </a:rPr>
-              <a:t>short · medium · long</a:t>
+              <a:t>kurz· mittel · lang</a:t>
             </a:r>
           </a:p>
           <a:p>

--- a/Präsentation-Kolloqium.pptx
+++ b/Präsentation-Kolloqium.pptx
@@ -5,7 +5,7 @@
     <p:sldMasterId id="2147483648" r:id="rId1"/>
   </p:sldMasterIdLst>
   <p:notesMasterIdLst>
-    <p:notesMasterId r:id="rId10"/>
+    <p:notesMasterId r:id="rId11"/>
   </p:notesMasterIdLst>
   <p:sldIdLst>
     <p:sldId id="259" r:id="rId2"/>
@@ -16,6 +16,7 @@
     <p:sldId id="276" r:id="rId7"/>
     <p:sldId id="280" r:id="rId8"/>
     <p:sldId id="285" r:id="rId9"/>
+    <p:sldId id="290" r:id="rId10"/>
   </p:sldIdLst>
   <p:sldSz cx="12192000" cy="6858000"/>
   <p:notesSz cx="6858000" cy="9144000"/>
@@ -10097,6 +10098,1753 @@
     <p:extLst>
       <p:ext uri="{BB962C8B-B14F-4D97-AF65-F5344CB8AC3E}">
         <p14:creationId xmlns:p14="http://schemas.microsoft.com/office/powerpoint/2010/main" val="2600877360"/>
+      </p:ext>
+    </p:extLst>
+  </p:cSld>
+  <p:clrMapOvr>
+    <a:masterClrMapping/>
+  </p:clrMapOvr>
+</p:sld>
+</file>
+
+<file path=ppt/slides/slide9.xml><?xml version="1.0" encoding="utf-8"?>
+<p:sld xmlns:a="http://schemas.openxmlformats.org/drawingml/2006/main" xmlns:r="http://schemas.openxmlformats.org/officeDocument/2006/relationships" xmlns:p="http://schemas.openxmlformats.org/presentationml/2006/main">
+  <p:cSld>
+    <p:spTree>
+      <p:nvGrpSpPr>
+        <p:cNvPr id="1" name=""/>
+        <p:cNvGrpSpPr/>
+        <p:nvPr/>
+      </p:nvGrpSpPr>
+      <p:grpSpPr>
+        <a:xfrm>
+          <a:off x="0" y="0"/>
+          <a:ext cx="0" cy="0"/>
+          <a:chOff x="0" y="0"/>
+          <a:chExt cx="0" cy="0"/>
+        </a:xfrm>
+      </p:grpSpPr>
+      <p:sp>
+        <p:nvSpPr>
+          <p:cNvPr id="2" name="Titel 1">
+            <a:extLst>
+              <a:ext uri="{FF2B5EF4-FFF2-40B4-BE49-F238E27FC236}">
+                <a16:creationId xmlns:a16="http://schemas.microsoft.com/office/drawing/2014/main" id="{A67855EF-998F-9ED7-38F1-4399375D9AD3}"/>
+              </a:ext>
+            </a:extLst>
+          </p:cNvPr>
+          <p:cNvSpPr>
+            <a:spLocks noGrp="1"/>
+          </p:cNvSpPr>
+          <p:nvPr>
+            <p:ph type="title"/>
+          </p:nvPr>
+        </p:nvSpPr>
+        <p:spPr>
+          <a:xfrm>
+            <a:off x="1219200" y="812800"/>
+            <a:ext cx="10058400" cy="787400"/>
+          </a:xfrm>
+        </p:spPr>
+        <p:txBody>
+          <a:bodyPr wrap="square" lIns="0" tIns="0" rIns="0" bIns="0" anchor="t">
+            <a:normAutofit/>
+          </a:bodyPr>
+          <a:lstStyle/>
+          <a:p>
+            <a:pPr algn="l"/>
+            <a:r>
+              <a:rPr lang="de-DE" sz="2600" b="1" dirty="0">
+                <a:solidFill>
+                  <a:srgbClr val="262626"/>
+                </a:solidFill>
+              </a:rPr>
+              <a:t>Messmethodik</a:t>
+            </a:r>
+          </a:p>
+        </p:txBody>
+      </p:sp>
+      <p:sp>
+        <p:nvSpPr>
+          <p:cNvPr id="20" name="Akzentlinie"/>
+          <p:cNvSpPr/>
+          <p:nvPr/>
+        </p:nvSpPr>
+        <p:spPr>
+          <a:xfrm>
+            <a:off x="914400" y="812800"/>
+            <a:ext cx="50800" cy="431800"/>
+          </a:xfrm>
+          <a:prstGeom prst="rect">
+            <a:avLst/>
+          </a:prstGeom>
+          <a:solidFill>
+            <a:srgbClr val="C1002A"/>
+          </a:solidFill>
+          <a:ln>
+            <a:noFill/>
+          </a:ln>
+        </p:spPr>
+        <p:txBody>
+          <a:bodyPr/>
+          <a:lstStyle/>
+          <a:p>
+            <a:endParaRPr lang="de-DE"/>
+          </a:p>
+        </p:txBody>
+      </p:sp>
+      <p:cxnSp>
+        <p:nvCxnSpPr>
+          <p:cNvPr id="21" name="Trenner vertikal"/>
+          <p:cNvCxnSpPr/>
+          <p:nvPr/>
+        </p:nvCxnSpPr>
+        <p:spPr>
+          <a:xfrm>
+            <a:off x="6248400" y="1778000"/>
+            <a:ext cx="0" cy="4089400"/>
+          </a:xfrm>
+          <a:prstGeom prst="straightConnector1">
+            <a:avLst/>
+          </a:prstGeom>
+          <a:ln w="6350">
+            <a:solidFill>
+              <a:srgbClr val="D9D9D9"/>
+            </a:solidFill>
+          </a:ln>
+        </p:spPr>
+      </p:cxnSp>
+      <p:cxnSp>
+        <p:nvCxnSpPr>
+          <p:cNvPr id="22" name="Trenner horizontal"/>
+          <p:cNvCxnSpPr/>
+          <p:nvPr/>
+        </p:nvCxnSpPr>
+        <p:spPr>
+          <a:xfrm>
+            <a:off x="1219200" y="3835400"/>
+            <a:ext cx="10058400" cy="0"/>
+          </a:xfrm>
+          <a:prstGeom prst="straightConnector1">
+            <a:avLst/>
+          </a:prstGeom>
+          <a:ln w="6350">
+            <a:solidFill>
+              <a:srgbClr val="D9D9D9"/>
+            </a:solidFill>
+          </a:ln>
+        </p:spPr>
+      </p:cxnSp>
+      <p:sp>
+        <p:nvSpPr>
+          <p:cNvPr id="23" name="Überschrift WORKFLOW-MAKESPAN"/>
+          <p:cNvSpPr txBox="1"/>
+          <p:nvPr/>
+        </p:nvSpPr>
+        <p:spPr>
+          <a:xfrm>
+            <a:off x="1219200" y="1752600"/>
+            <a:ext cx="4622800" cy="203200"/>
+          </a:xfrm>
+          <a:prstGeom prst="rect">
+            <a:avLst/>
+          </a:prstGeom>
+          <a:noFill/>
+        </p:spPr>
+        <p:txBody>
+          <a:bodyPr wrap="square" lIns="0" tIns="0" rIns="0" bIns="0" anchor="t"/>
+          <a:lstStyle/>
+          <a:p>
+            <a:pPr algn="l"/>
+            <a:r>
+              <a:rPr lang="de-DE" sz="1200" b="1" spc="150" dirty="0">
+                <a:solidFill>
+                  <a:srgbClr val="C1002A"/>
+                </a:solidFill>
+              </a:rPr>
+              <a:t>WORKFLOW-MAKESPAN</a:t>
+            </a:r>
+          </a:p>
+        </p:txBody>
+      </p:sp>
+      <p:cxnSp>
+        <p:nvCxnSpPr>
+          <p:cNvPr id="24" name="Zeitachse"/>
+          <p:cNvCxnSpPr/>
+          <p:nvPr/>
+        </p:nvCxnSpPr>
+        <p:spPr>
+          <a:xfrm>
+            <a:off x="1270000" y="2794000"/>
+            <a:ext cx="4470400" cy="0"/>
+          </a:xfrm>
+          <a:prstGeom prst="straightConnector1">
+            <a:avLst/>
+          </a:prstGeom>
+          <a:ln w="9525">
+            <a:solidFill>
+              <a:srgbClr val="A6A6A6"/>
+            </a:solidFill>
+            <a:tailEnd type="triangle" w="sm" len="sm"/>
+          </a:ln>
+        </p:spPr>
+      </p:cxnSp>
+      <p:sp>
+        <p:nvSpPr>
+          <p:cNvPr id="25" name="Makespan Balken"/>
+          <p:cNvSpPr/>
+          <p:nvPr/>
+        </p:nvSpPr>
+        <p:spPr>
+          <a:xfrm>
+            <a:off x="1422400" y="2616200"/>
+            <a:ext cx="4165600" cy="177800"/>
+          </a:xfrm>
+          <a:prstGeom prst="rect">
+            <a:avLst/>
+          </a:prstGeom>
+          <a:solidFill>
+            <a:srgbClr val="595959"/>
+          </a:solidFill>
+          <a:ln>
+            <a:noFill/>
+          </a:ln>
+        </p:spPr>
+        <p:txBody>
+          <a:bodyPr wrap="none" lIns="0" tIns="0" rIns="0" bIns="0" anchor="ctr"/>
+          <a:lstStyle/>
+          <a:p>
+            <a:pPr algn="ctr"/>
+            <a:endParaRPr lang="de-DE"/>
+          </a:p>
+        </p:txBody>
+      </p:sp>
+      <p:cxnSp>
+        <p:nvCxnSpPr>
+          <p:cNvPr id="29" name="Tick"/>
+          <p:cNvCxnSpPr/>
+          <p:nvPr/>
+        </p:nvCxnSpPr>
+        <p:spPr>
+          <a:xfrm>
+            <a:off x="1422400" y="2489200"/>
+            <a:ext cx="0" cy="533400"/>
+          </a:xfrm>
+          <a:prstGeom prst="straightConnector1">
+            <a:avLst/>
+          </a:prstGeom>
+          <a:ln w="6350">
+            <a:solidFill>
+              <a:srgbClr val="C1002A"/>
+            </a:solidFill>
+            <a:prstDash val="dash"/>
+          </a:ln>
+        </p:spPr>
+      </p:cxnSp>
+      <p:cxnSp>
+        <p:nvCxnSpPr>
+          <p:cNvPr id="30" name="Tick"/>
+          <p:cNvCxnSpPr/>
+          <p:nvPr/>
+        </p:nvCxnSpPr>
+        <p:spPr>
+          <a:xfrm>
+            <a:off x="5588000" y="2489200"/>
+            <a:ext cx="0" cy="533400"/>
+          </a:xfrm>
+          <a:prstGeom prst="straightConnector1">
+            <a:avLst/>
+          </a:prstGeom>
+          <a:ln w="6350">
+            <a:solidFill>
+              <a:srgbClr val="C1002A"/>
+            </a:solidFill>
+            <a:prstDash val="dash"/>
+          </a:ln>
+        </p:spPr>
+      </p:cxnSp>
+      <p:cxnSp>
+        <p:nvCxnSpPr>
+          <p:cNvPr id="31" name="Messspanne Makespan"/>
+          <p:cNvCxnSpPr/>
+          <p:nvPr/>
+        </p:nvCxnSpPr>
+        <p:spPr>
+          <a:xfrm>
+            <a:off x="1422400" y="2971800"/>
+            <a:ext cx="4165600" cy="0"/>
+          </a:xfrm>
+          <a:prstGeom prst="straightConnector1">
+            <a:avLst/>
+          </a:prstGeom>
+          <a:ln w="12700">
+            <a:solidFill>
+              <a:srgbClr val="C1002A"/>
+            </a:solidFill>
+            <a:headEnd type="triangle" w="sm" len="sm"/>
+            <a:tailEnd type="triangle" w="sm" len="sm"/>
+          </a:ln>
+        </p:spPr>
+      </p:cxnSp>
+      <p:sp>
+        <p:nvSpPr>
+          <p:cNvPr id="32" name="Label Makespan"/>
+          <p:cNvSpPr txBox="1"/>
+          <p:nvPr/>
+        </p:nvSpPr>
+        <p:spPr>
+          <a:xfrm>
+            <a:off x="2679700" y="3035300"/>
+            <a:ext cx="1651000" cy="177800"/>
+          </a:xfrm>
+          <a:prstGeom prst="rect">
+            <a:avLst/>
+          </a:prstGeom>
+          <a:noFill/>
+        </p:spPr>
+        <p:txBody>
+          <a:bodyPr wrap="none" lIns="0" tIns="0" rIns="0" bIns="0" anchor="t"/>
+          <a:lstStyle/>
+          <a:p>
+            <a:pPr algn="ctr"/>
+            <a:r>
+              <a:rPr lang="de-DE" sz="1200" b="1" dirty="0">
+                <a:solidFill>
+                  <a:srgbClr val="C1002A"/>
+                </a:solidFill>
+              </a:rPr>
+              <a:t>Makespan</a:t>
+            </a:r>
+          </a:p>
+        </p:txBody>
+      </p:sp>
+      <p:sp>
+        <p:nvSpPr>
+          <p:cNvPr id="33" name="Stichpunkte"/>
+          <p:cNvSpPr txBox="1"/>
+          <p:nvPr/>
+        </p:nvSpPr>
+        <p:spPr>
+          <a:xfrm>
+            <a:off x="1219200" y="3302000"/>
+            <a:ext cx="4622800" cy="431800"/>
+          </a:xfrm>
+          <a:prstGeom prst="rect">
+            <a:avLst/>
+          </a:prstGeom>
+          <a:noFill/>
+        </p:spPr>
+        <p:txBody>
+          <a:bodyPr wrap="square" lIns="0" tIns="0" rIns="0" bIns="0" anchor="t"/>
+          <a:lstStyle/>
+          <a:p>
+            <a:pPr marL="177800" indent="-177800" algn="l">
+              <a:spcAft>
+                <a:spcPts val="300"/>
+              </a:spcAft>
+              <a:buClr>
+                <a:srgbClr val="C1002A"/>
+              </a:buClr>
+              <a:buFont typeface="Arial"/>
+              <a:buChar char="•"/>
+            </a:pPr>
+            <a:r>
+              <a:rPr lang="de-DE" sz="1300" dirty="0">
+                <a:solidFill>
+                  <a:srgbClr val="262626"/>
+                </a:solidFill>
+              </a:rPr>
+              <a:t>Gesamtlaufzeit des Workflows</a:t>
+            </a:r>
+          </a:p>
+        </p:txBody>
+      </p:sp>
+      <p:sp>
+        <p:nvSpPr>
+          <p:cNvPr id="34" name="Überschrift WMS-OVERHEAD"/>
+          <p:cNvSpPr txBox="1"/>
+          <p:nvPr/>
+        </p:nvSpPr>
+        <p:spPr>
+          <a:xfrm>
+            <a:off x="6654800" y="1752600"/>
+            <a:ext cx="4622800" cy="203200"/>
+          </a:xfrm>
+          <a:prstGeom prst="rect">
+            <a:avLst/>
+          </a:prstGeom>
+          <a:noFill/>
+        </p:spPr>
+        <p:txBody>
+          <a:bodyPr wrap="square" lIns="0" tIns="0" rIns="0" bIns="0" anchor="t"/>
+          <a:lstStyle/>
+          <a:p>
+            <a:pPr algn="l"/>
+            <a:r>
+              <a:rPr lang="de-DE" sz="1200" b="1" spc="150" dirty="0">
+                <a:solidFill>
+                  <a:srgbClr val="C1002A"/>
+                </a:solidFill>
+              </a:rPr>
+              <a:t>WMS-OVERHEAD</a:t>
+            </a:r>
+          </a:p>
+        </p:txBody>
+      </p:sp>
+      <p:cxnSp>
+        <p:nvCxnSpPr>
+          <p:cNvPr id="35" name="Zeitachse"/>
+          <p:cNvCxnSpPr/>
+          <p:nvPr/>
+        </p:nvCxnSpPr>
+        <p:spPr>
+          <a:xfrm>
+            <a:off x="6705600" y="2794000"/>
+            <a:ext cx="4470400" cy="0"/>
+          </a:xfrm>
+          <a:prstGeom prst="straightConnector1">
+            <a:avLst/>
+          </a:prstGeom>
+          <a:ln w="9525">
+            <a:solidFill>
+              <a:srgbClr val="A6A6A6"/>
+            </a:solidFill>
+            <a:tailEnd type="triangle" w="sm" len="sm"/>
+          </a:ln>
+        </p:spPr>
+      </p:cxnSp>
+      <p:sp>
+        <p:nvSpPr>
+          <p:cNvPr id="36" name="Zeile Referenz"/>
+          <p:cNvSpPr txBox="1"/>
+          <p:nvPr/>
+        </p:nvSpPr>
+        <p:spPr>
+          <a:xfrm>
+            <a:off x="6654800" y="2286000"/>
+            <a:ext cx="965200" cy="177800"/>
+          </a:xfrm>
+          <a:prstGeom prst="rect">
+            <a:avLst/>
+          </a:prstGeom>
+          <a:noFill/>
+        </p:spPr>
+        <p:txBody>
+          <a:bodyPr wrap="none" lIns="0" tIns="0" rIns="0" bIns="0" anchor="ctr"/>
+          <a:lstStyle/>
+          <a:p>
+            <a:pPr algn="l"/>
+            <a:r>
+              <a:rPr lang="de-DE" sz="1100" dirty="0">
+                <a:solidFill>
+                  <a:srgbClr val="595959"/>
+                </a:solidFill>
+              </a:rPr>
+              <a:t>ohne WMS</a:t>
+            </a:r>
+          </a:p>
+        </p:txBody>
+      </p:sp>
+      <p:sp>
+        <p:nvSpPr>
+          <p:cNvPr id="37" name="Zeile WMS"/>
+          <p:cNvSpPr txBox="1"/>
+          <p:nvPr/>
+        </p:nvSpPr>
+        <p:spPr>
+          <a:xfrm>
+            <a:off x="6654800" y="2616200"/>
+            <a:ext cx="965200" cy="177800"/>
+          </a:xfrm>
+          <a:prstGeom prst="rect">
+            <a:avLst/>
+          </a:prstGeom>
+          <a:noFill/>
+        </p:spPr>
+        <p:txBody>
+          <a:bodyPr wrap="none" lIns="0" tIns="0" rIns="0" bIns="0" anchor="ctr"/>
+          <a:lstStyle/>
+          <a:p>
+            <a:pPr algn="l"/>
+            <a:r>
+              <a:rPr lang="de-DE" sz="1100" dirty="0">
+                <a:solidFill>
+                  <a:srgbClr val="595959"/>
+                </a:solidFill>
+              </a:rPr>
+              <a:t>mit WMS</a:t>
+            </a:r>
+          </a:p>
+        </p:txBody>
+      </p:sp>
+      <p:sp>
+        <p:nvSpPr>
+          <p:cNvPr id="38" name="Referenz Schritt"/>
+          <p:cNvSpPr/>
+          <p:nvPr/>
+        </p:nvSpPr>
+        <p:spPr>
+          <a:xfrm>
+            <a:off x="7696200" y="2286000"/>
+            <a:ext cx="2120900" cy="177800"/>
+          </a:xfrm>
+          <a:prstGeom prst="rect">
+            <a:avLst/>
+          </a:prstGeom>
+          <a:solidFill>
+            <a:srgbClr val="8C8C8C"/>
+          </a:solidFill>
+          <a:ln>
+            <a:noFill/>
+          </a:ln>
+        </p:spPr>
+        <p:txBody>
+          <a:bodyPr wrap="none" lIns="0" tIns="0" rIns="0" bIns="0" anchor="ctr"/>
+          <a:lstStyle/>
+          <a:p>
+            <a:pPr algn="ctr"/>
+            <a:endParaRPr lang="de-DE"/>
+          </a:p>
+        </p:txBody>
+      </p:sp>
+      <p:sp>
+        <p:nvSpPr>
+          <p:cNvPr id="42" name="WMS Schritt"/>
+          <p:cNvSpPr/>
+          <p:nvPr/>
+        </p:nvSpPr>
+        <p:spPr>
+          <a:xfrm>
+            <a:off x="7696200" y="2616200"/>
+            <a:ext cx="2679700" cy="177800"/>
+          </a:xfrm>
+          <a:prstGeom prst="rect">
+            <a:avLst/>
+          </a:prstGeom>
+          <a:solidFill>
+            <a:srgbClr val="595959"/>
+          </a:solidFill>
+          <a:ln>
+            <a:noFill/>
+          </a:ln>
+        </p:spPr>
+        <p:txBody>
+          <a:bodyPr wrap="none" lIns="0" tIns="0" rIns="0" bIns="0" anchor="ctr"/>
+          <a:lstStyle/>
+          <a:p>
+            <a:pPr algn="ctr"/>
+            <a:endParaRPr lang="de-DE"/>
+          </a:p>
+        </p:txBody>
+      </p:sp>
+      <p:cxnSp>
+        <p:nvCxnSpPr>
+          <p:cNvPr id="46" name="Tick"/>
+          <p:cNvCxnSpPr/>
+          <p:nvPr/>
+        </p:nvCxnSpPr>
+        <p:spPr>
+          <a:xfrm>
+            <a:off x="9817100" y="2209800"/>
+            <a:ext cx="0" cy="812800"/>
+          </a:xfrm>
+          <a:prstGeom prst="straightConnector1">
+            <a:avLst/>
+          </a:prstGeom>
+          <a:ln w="6350">
+            <a:solidFill>
+              <a:srgbClr val="C1002A"/>
+            </a:solidFill>
+            <a:prstDash val="dash"/>
+          </a:ln>
+        </p:spPr>
+      </p:cxnSp>
+      <p:cxnSp>
+        <p:nvCxnSpPr>
+          <p:cNvPr id="47" name="Tick"/>
+          <p:cNvCxnSpPr/>
+          <p:nvPr/>
+        </p:nvCxnSpPr>
+        <p:spPr>
+          <a:xfrm>
+            <a:off x="10375900" y="2209800"/>
+            <a:ext cx="0" cy="812800"/>
+          </a:xfrm>
+          <a:prstGeom prst="straightConnector1">
+            <a:avLst/>
+          </a:prstGeom>
+          <a:ln w="6350">
+            <a:solidFill>
+              <a:srgbClr val="C1002A"/>
+            </a:solidFill>
+            <a:prstDash val="dash"/>
+          </a:ln>
+        </p:spPr>
+      </p:cxnSp>
+      <p:cxnSp>
+        <p:nvCxnSpPr>
+          <p:cNvPr id="48" name="Messspanne Overhead"/>
+          <p:cNvCxnSpPr/>
+          <p:nvPr/>
+        </p:nvCxnSpPr>
+        <p:spPr>
+          <a:xfrm>
+            <a:off x="9817100" y="2971800"/>
+            <a:ext cx="558800" cy="0"/>
+          </a:xfrm>
+          <a:prstGeom prst="straightConnector1">
+            <a:avLst/>
+          </a:prstGeom>
+          <a:ln w="12700">
+            <a:solidFill>
+              <a:srgbClr val="C1002A"/>
+            </a:solidFill>
+            <a:headEnd type="triangle" w="sm" len="sm"/>
+            <a:tailEnd type="triangle" w="sm" len="sm"/>
+          </a:ln>
+        </p:spPr>
+      </p:cxnSp>
+      <p:sp>
+        <p:nvSpPr>
+          <p:cNvPr id="49" name="Label Overhead"/>
+          <p:cNvSpPr txBox="1"/>
+          <p:nvPr/>
+        </p:nvSpPr>
+        <p:spPr>
+          <a:xfrm>
+            <a:off x="9461500" y="3035300"/>
+            <a:ext cx="1270000" cy="177800"/>
+          </a:xfrm>
+          <a:prstGeom prst="rect">
+            <a:avLst/>
+          </a:prstGeom>
+          <a:noFill/>
+        </p:spPr>
+        <p:txBody>
+          <a:bodyPr wrap="none" lIns="0" tIns="0" rIns="0" bIns="0" anchor="t"/>
+          <a:lstStyle/>
+          <a:p>
+            <a:pPr algn="ctr"/>
+            <a:r>
+              <a:rPr lang="de-DE" sz="1200" b="1" dirty="0">
+                <a:solidFill>
+                  <a:srgbClr val="C1002A"/>
+                </a:solidFill>
+              </a:rPr>
+              <a:t>Overhead</a:t>
+            </a:r>
+          </a:p>
+        </p:txBody>
+      </p:sp>
+      <p:sp>
+        <p:nvSpPr>
+          <p:cNvPr id="50" name="Stichpunkte"/>
+          <p:cNvSpPr txBox="1"/>
+          <p:nvPr/>
+        </p:nvSpPr>
+        <p:spPr>
+          <a:xfrm>
+            <a:off x="6654800" y="3302000"/>
+            <a:ext cx="4622800" cy="431800"/>
+          </a:xfrm>
+          <a:prstGeom prst="rect">
+            <a:avLst/>
+          </a:prstGeom>
+          <a:noFill/>
+        </p:spPr>
+        <p:txBody>
+          <a:bodyPr wrap="square" lIns="0" tIns="0" rIns="0" bIns="0" anchor="t"/>
+          <a:lstStyle/>
+          <a:p>
+            <a:pPr marL="177800" indent="-177800" algn="l">
+              <a:spcAft>
+                <a:spcPts val="300"/>
+              </a:spcAft>
+              <a:buClr>
+                <a:srgbClr val="C1002A"/>
+              </a:buClr>
+              <a:buFont typeface="Arial"/>
+              <a:buChar char="•"/>
+            </a:pPr>
+            <a:r>
+              <a:rPr lang="de-DE" sz="1300" dirty="0">
+                <a:solidFill>
+                  <a:srgbClr val="262626"/>
+                </a:solidFill>
+              </a:rPr>
+              <a:t>Vergleich mit Referenz ohne WMS</a:t>
+            </a:r>
+          </a:p>
+          <a:p>
+            <a:pPr marL="177800" indent="-177800" algn="l">
+              <a:spcAft>
+                <a:spcPts val="300"/>
+              </a:spcAft>
+              <a:buClr>
+                <a:srgbClr val="C1002A"/>
+              </a:buClr>
+              <a:buFont typeface="Arial"/>
+              <a:buChar char="•"/>
+            </a:pPr>
+            <a:r>
+              <a:rPr lang="de-DE" sz="1300" dirty="0">
+                <a:solidFill>
+                  <a:srgbClr val="262626"/>
+                </a:solidFill>
+              </a:rPr>
+              <a:t>Zusätzliche Laufzeit durch WMS-Ausführung</a:t>
+            </a:r>
+          </a:p>
+        </p:txBody>
+      </p:sp>
+      <p:sp>
+        <p:nvSpPr>
+          <p:cNvPr id="51" name="Überschrift ÜBERGANGSLATENZ"/>
+          <p:cNvSpPr txBox="1"/>
+          <p:nvPr/>
+        </p:nvSpPr>
+        <p:spPr>
+          <a:xfrm>
+            <a:off x="1219200" y="3987800"/>
+            <a:ext cx="4622800" cy="203200"/>
+          </a:xfrm>
+          <a:prstGeom prst="rect">
+            <a:avLst/>
+          </a:prstGeom>
+          <a:noFill/>
+        </p:spPr>
+        <p:txBody>
+          <a:bodyPr wrap="square" lIns="0" tIns="0" rIns="0" bIns="0" anchor="t"/>
+          <a:lstStyle/>
+          <a:p>
+            <a:pPr algn="l"/>
+            <a:r>
+              <a:rPr lang="de-DE" sz="1200" b="1" spc="150" dirty="0">
+                <a:solidFill>
+                  <a:srgbClr val="C1002A"/>
+                </a:solidFill>
+              </a:rPr>
+              <a:t>ÜBERGANGSLATENZ</a:t>
+            </a:r>
+          </a:p>
+        </p:txBody>
+      </p:sp>
+      <p:cxnSp>
+        <p:nvCxnSpPr>
+          <p:cNvPr id="52" name="Zeitachse"/>
+          <p:cNvCxnSpPr/>
+          <p:nvPr/>
+        </p:nvCxnSpPr>
+        <p:spPr>
+          <a:xfrm>
+            <a:off x="1270000" y="5029200"/>
+            <a:ext cx="4470400" cy="0"/>
+          </a:xfrm>
+          <a:prstGeom prst="straightConnector1">
+            <a:avLst/>
+          </a:prstGeom>
+          <a:ln w="9525">
+            <a:solidFill>
+              <a:srgbClr val="A6A6A6"/>
+            </a:solidFill>
+            <a:tailEnd type="triangle" w="sm" len="sm"/>
+          </a:ln>
+        </p:spPr>
+      </p:cxnSp>
+      <p:sp>
+        <p:nvSpPr>
+          <p:cNvPr id="53" name="Schritt A"/>
+          <p:cNvSpPr/>
+          <p:nvPr/>
+        </p:nvSpPr>
+        <p:spPr>
+          <a:xfrm>
+            <a:off x="1905000" y="4851400"/>
+            <a:ext cx="1397000" cy="177800"/>
+          </a:xfrm>
+          <a:prstGeom prst="rect">
+            <a:avLst/>
+          </a:prstGeom>
+          <a:solidFill>
+            <a:srgbClr val="595959"/>
+          </a:solidFill>
+          <a:ln>
+            <a:noFill/>
+          </a:ln>
+        </p:spPr>
+        <p:txBody>
+          <a:bodyPr wrap="none" lIns="0" tIns="0" rIns="0" bIns="0" anchor="ctr"/>
+          <a:lstStyle/>
+          <a:p>
+            <a:pPr algn="ctr"/>
+            <a:r>
+              <a:rPr lang="de-DE" sz="1200" b="1" dirty="0">
+                <a:solidFill>
+                  <a:srgbClr val="FFFFFF"/>
+                </a:solidFill>
+              </a:rPr>
+              <a:t>A</a:t>
+            </a:r>
+          </a:p>
+        </p:txBody>
+      </p:sp>
+      <p:sp>
+        <p:nvSpPr>
+          <p:cNvPr id="54" name="Schritt B"/>
+          <p:cNvSpPr/>
+          <p:nvPr/>
+        </p:nvSpPr>
+        <p:spPr>
+          <a:xfrm>
+            <a:off x="3835400" y="4851400"/>
+            <a:ext cx="1397000" cy="177800"/>
+          </a:xfrm>
+          <a:prstGeom prst="rect">
+            <a:avLst/>
+          </a:prstGeom>
+          <a:solidFill>
+            <a:srgbClr val="595959"/>
+          </a:solidFill>
+          <a:ln>
+            <a:noFill/>
+          </a:ln>
+        </p:spPr>
+        <p:txBody>
+          <a:bodyPr wrap="none" lIns="0" tIns="0" rIns="0" bIns="0" anchor="ctr"/>
+          <a:lstStyle/>
+          <a:p>
+            <a:pPr algn="ctr"/>
+            <a:r>
+              <a:rPr lang="de-DE" sz="1200" b="1" dirty="0">
+                <a:solidFill>
+                  <a:srgbClr val="FFFFFF"/>
+                </a:solidFill>
+              </a:rPr>
+              <a:t>B</a:t>
+            </a:r>
+          </a:p>
+        </p:txBody>
+      </p:sp>
+      <p:cxnSp>
+        <p:nvCxnSpPr>
+          <p:cNvPr id="55" name="Tick"/>
+          <p:cNvCxnSpPr/>
+          <p:nvPr/>
+        </p:nvCxnSpPr>
+        <p:spPr>
+          <a:xfrm>
+            <a:off x="3302000" y="4775200"/>
+            <a:ext cx="0" cy="482600"/>
+          </a:xfrm>
+          <a:prstGeom prst="straightConnector1">
+            <a:avLst/>
+          </a:prstGeom>
+          <a:ln w="6350">
+            <a:solidFill>
+              <a:srgbClr val="C1002A"/>
+            </a:solidFill>
+            <a:prstDash val="dash"/>
+          </a:ln>
+        </p:spPr>
+      </p:cxnSp>
+      <p:cxnSp>
+        <p:nvCxnSpPr>
+          <p:cNvPr id="56" name="Tick"/>
+          <p:cNvCxnSpPr/>
+          <p:nvPr/>
+        </p:nvCxnSpPr>
+        <p:spPr>
+          <a:xfrm>
+            <a:off x="3835400" y="4775200"/>
+            <a:ext cx="0" cy="482600"/>
+          </a:xfrm>
+          <a:prstGeom prst="straightConnector1">
+            <a:avLst/>
+          </a:prstGeom>
+          <a:ln w="6350">
+            <a:solidFill>
+              <a:srgbClr val="C1002A"/>
+            </a:solidFill>
+            <a:prstDash val="dash"/>
+          </a:ln>
+        </p:spPr>
+      </p:cxnSp>
+      <p:cxnSp>
+        <p:nvCxnSpPr>
+          <p:cNvPr id="57" name="Messspanne Übergangslatenz"/>
+          <p:cNvCxnSpPr/>
+          <p:nvPr/>
+        </p:nvCxnSpPr>
+        <p:spPr>
+          <a:xfrm>
+            <a:off x="3302000" y="5207000"/>
+            <a:ext cx="533400" cy="0"/>
+          </a:xfrm>
+          <a:prstGeom prst="straightConnector1">
+            <a:avLst/>
+          </a:prstGeom>
+          <a:ln w="12700">
+            <a:solidFill>
+              <a:srgbClr val="C1002A"/>
+            </a:solidFill>
+            <a:headEnd type="triangle" w="sm" len="sm"/>
+            <a:tailEnd type="triangle" w="sm" len="sm"/>
+          </a:ln>
+        </p:spPr>
+      </p:cxnSp>
+      <p:sp>
+        <p:nvSpPr>
+          <p:cNvPr id="58" name="Label Übergangslatenz"/>
+          <p:cNvSpPr txBox="1"/>
+          <p:nvPr/>
+        </p:nvSpPr>
+        <p:spPr>
+          <a:xfrm>
+            <a:off x="2743200" y="5270500"/>
+            <a:ext cx="1651000" cy="177800"/>
+          </a:xfrm>
+          <a:prstGeom prst="rect">
+            <a:avLst/>
+          </a:prstGeom>
+          <a:noFill/>
+        </p:spPr>
+        <p:txBody>
+          <a:bodyPr wrap="none" lIns="0" tIns="0" rIns="0" bIns="0" anchor="t"/>
+          <a:lstStyle/>
+          <a:p>
+            <a:pPr algn="ctr"/>
+            <a:r>
+              <a:rPr lang="de-DE" sz="1200" b="1" dirty="0">
+                <a:solidFill>
+                  <a:srgbClr val="C1002A"/>
+                </a:solidFill>
+              </a:rPr>
+              <a:t>Übergangslatenz</a:t>
+            </a:r>
+          </a:p>
+        </p:txBody>
+      </p:sp>
+      <p:sp>
+        <p:nvSpPr>
+          <p:cNvPr id="59" name="Stichpunkte"/>
+          <p:cNvSpPr txBox="1"/>
+          <p:nvPr/>
+        </p:nvSpPr>
+        <p:spPr>
+          <a:xfrm>
+            <a:off x="1219200" y="5537200"/>
+            <a:ext cx="4622800" cy="431800"/>
+          </a:xfrm>
+          <a:prstGeom prst="rect">
+            <a:avLst/>
+          </a:prstGeom>
+          <a:noFill/>
+        </p:spPr>
+        <p:txBody>
+          <a:bodyPr wrap="square" lIns="0" tIns="0" rIns="0" bIns="0" anchor="t"/>
+          <a:lstStyle/>
+          <a:p>
+            <a:pPr marL="177800" indent="-177800" algn="l">
+              <a:spcAft>
+                <a:spcPts val="300"/>
+              </a:spcAft>
+              <a:buClr>
+                <a:srgbClr val="C1002A"/>
+              </a:buClr>
+              <a:buFont typeface="Arial"/>
+              <a:buChar char="•"/>
+            </a:pPr>
+            <a:r>
+              <a:rPr lang="de-DE" sz="1300" dirty="0">
+                <a:solidFill>
+                  <a:srgbClr val="262626"/>
+                </a:solidFill>
+              </a:rPr>
+              <a:t>Ende eines Schritts → Start des nächsten</a:t>
+            </a:r>
+          </a:p>
+        </p:txBody>
+      </p:sp>
+      <p:sp>
+        <p:nvSpPr>
+          <p:cNvPr id="60" name="Überschrift STARTSPREIZUNG"/>
+          <p:cNvSpPr txBox="1"/>
+          <p:nvPr/>
+        </p:nvSpPr>
+        <p:spPr>
+          <a:xfrm>
+            <a:off x="6654800" y="3987800"/>
+            <a:ext cx="4622800" cy="203200"/>
+          </a:xfrm>
+          <a:prstGeom prst="rect">
+            <a:avLst/>
+          </a:prstGeom>
+          <a:noFill/>
+        </p:spPr>
+        <p:txBody>
+          <a:bodyPr wrap="square" lIns="0" tIns="0" rIns="0" bIns="0" anchor="t"/>
+          <a:lstStyle/>
+          <a:p>
+            <a:pPr algn="l"/>
+            <a:r>
+              <a:rPr lang="de-DE" sz="1200" b="1" spc="150" dirty="0">
+                <a:solidFill>
+                  <a:srgbClr val="C1002A"/>
+                </a:solidFill>
+              </a:rPr>
+              <a:t>STARTSPREIZUNG</a:t>
+            </a:r>
+          </a:p>
+        </p:txBody>
+      </p:sp>
+      <p:cxnSp>
+        <p:nvCxnSpPr>
+          <p:cNvPr id="61" name="Zeitachse"/>
+          <p:cNvCxnSpPr/>
+          <p:nvPr/>
+        </p:nvCxnSpPr>
+        <p:spPr>
+          <a:xfrm>
+            <a:off x="6705600" y="5029200"/>
+            <a:ext cx="4470400" cy="0"/>
+          </a:xfrm>
+          <a:prstGeom prst="straightConnector1">
+            <a:avLst/>
+          </a:prstGeom>
+          <a:ln w="9525">
+            <a:solidFill>
+              <a:srgbClr val="A6A6A6"/>
+            </a:solidFill>
+            <a:tailEnd type="triangle" w="sm" len="sm"/>
+          </a:ln>
+        </p:spPr>
+      </p:cxnSp>
+      <p:sp>
+        <p:nvSpPr>
+          <p:cNvPr id="62" name="compute 1"/>
+          <p:cNvSpPr/>
+          <p:nvPr/>
+        </p:nvSpPr>
+        <p:spPr>
+          <a:xfrm>
+            <a:off x="7772400" y="4432300"/>
+            <a:ext cx="2032000" cy="114300"/>
+          </a:xfrm>
+          <a:prstGeom prst="rect">
+            <a:avLst/>
+          </a:prstGeom>
+          <a:solidFill>
+            <a:srgbClr val="595959"/>
+          </a:solidFill>
+          <a:ln>
+            <a:noFill/>
+          </a:ln>
+        </p:spPr>
+        <p:txBody>
+          <a:bodyPr wrap="none" lIns="0" tIns="0" rIns="0" bIns="0" anchor="ctr"/>
+          <a:lstStyle/>
+          <a:p>
+            <a:pPr algn="ctr"/>
+            <a:endParaRPr lang="de-DE"/>
+          </a:p>
+        </p:txBody>
+      </p:sp>
+      <p:sp>
+        <p:nvSpPr>
+          <p:cNvPr id="63" name="compute 2"/>
+          <p:cNvSpPr/>
+          <p:nvPr/>
+        </p:nvSpPr>
+        <p:spPr>
+          <a:xfrm>
+            <a:off x="7975600" y="4584700"/>
+            <a:ext cx="2032000" cy="114300"/>
+          </a:xfrm>
+          <a:prstGeom prst="rect">
+            <a:avLst/>
+          </a:prstGeom>
+          <a:solidFill>
+            <a:srgbClr val="595959"/>
+          </a:solidFill>
+          <a:ln>
+            <a:noFill/>
+          </a:ln>
+        </p:spPr>
+        <p:txBody>
+          <a:bodyPr wrap="none" lIns="0" tIns="0" rIns="0" bIns="0" anchor="ctr"/>
+          <a:lstStyle/>
+          <a:p>
+            <a:pPr algn="ctr"/>
+            <a:endParaRPr lang="de-DE"/>
+          </a:p>
+        </p:txBody>
+      </p:sp>
+      <p:sp>
+        <p:nvSpPr>
+          <p:cNvPr id="64" name="compute 3"/>
+          <p:cNvSpPr/>
+          <p:nvPr/>
+        </p:nvSpPr>
+        <p:spPr>
+          <a:xfrm>
+            <a:off x="8178800" y="4737100"/>
+            <a:ext cx="2032000" cy="114300"/>
+          </a:xfrm>
+          <a:prstGeom prst="rect">
+            <a:avLst/>
+          </a:prstGeom>
+          <a:solidFill>
+            <a:srgbClr val="595959"/>
+          </a:solidFill>
+          <a:ln>
+            <a:noFill/>
+          </a:ln>
+        </p:spPr>
+        <p:txBody>
+          <a:bodyPr wrap="none" lIns="0" tIns="0" rIns="0" bIns="0" anchor="ctr"/>
+          <a:lstStyle/>
+          <a:p>
+            <a:pPr algn="ctr"/>
+            <a:endParaRPr lang="de-DE"/>
+          </a:p>
+        </p:txBody>
+      </p:sp>
+      <p:sp>
+        <p:nvSpPr>
+          <p:cNvPr id="65" name="compute 4"/>
+          <p:cNvSpPr/>
+          <p:nvPr/>
+        </p:nvSpPr>
+        <p:spPr>
+          <a:xfrm>
+            <a:off x="8382000" y="4889500"/>
+            <a:ext cx="2032000" cy="114300"/>
+          </a:xfrm>
+          <a:prstGeom prst="rect">
+            <a:avLst/>
+          </a:prstGeom>
+          <a:solidFill>
+            <a:srgbClr val="595959"/>
+          </a:solidFill>
+          <a:ln>
+            <a:noFill/>
+          </a:ln>
+        </p:spPr>
+        <p:txBody>
+          <a:bodyPr wrap="none" lIns="0" tIns="0" rIns="0" bIns="0" anchor="ctr"/>
+          <a:lstStyle/>
+          <a:p>
+            <a:pPr algn="ctr"/>
+            <a:endParaRPr lang="de-DE"/>
+          </a:p>
+        </p:txBody>
+      </p:sp>
+      <p:sp>
+        <p:nvSpPr>
+          <p:cNvPr id="66" name="Instanzen Label"/>
+          <p:cNvSpPr txBox="1"/>
+          <p:nvPr/>
+        </p:nvSpPr>
+        <p:spPr>
+          <a:xfrm>
+            <a:off x="6654800" y="4432300"/>
+            <a:ext cx="1016000" cy="571500"/>
+          </a:xfrm>
+          <a:prstGeom prst="rect">
+            <a:avLst/>
+          </a:prstGeom>
+          <a:noFill/>
+        </p:spPr>
+        <p:txBody>
+          <a:bodyPr wrap="none" lIns="0" tIns="0" rIns="0" bIns="0" anchor="ctr"/>
+          <a:lstStyle/>
+          <a:p>
+            <a:pPr algn="l"/>
+            <a:r>
+              <a:rPr lang="de-DE" sz="1100" dirty="0">
+                <a:solidFill>
+                  <a:srgbClr val="595959"/>
+                </a:solidFill>
+              </a:rPr>
+              <a:t>compute</a:t>
+            </a:r>
+            <a:r>
+              <a:rPr lang="de-DE" sz="1100" baseline="-25000" dirty="0">
+                <a:solidFill>
+                  <a:srgbClr val="595959"/>
+                </a:solidFill>
+              </a:rPr>
+              <a:t>1–4</a:t>
+            </a:r>
+          </a:p>
+        </p:txBody>
+      </p:sp>
+      <p:cxnSp>
+        <p:nvCxnSpPr>
+          <p:cNvPr id="67" name="Tick"/>
+          <p:cNvCxnSpPr/>
+          <p:nvPr/>
+        </p:nvCxnSpPr>
+        <p:spPr>
+          <a:xfrm>
+            <a:off x="7772400" y="4356100"/>
+            <a:ext cx="0" cy="901700"/>
+          </a:xfrm>
+          <a:prstGeom prst="straightConnector1">
+            <a:avLst/>
+          </a:prstGeom>
+          <a:ln w="6350">
+            <a:solidFill>
+              <a:srgbClr val="C1002A"/>
+            </a:solidFill>
+            <a:prstDash val="dash"/>
+          </a:ln>
+        </p:spPr>
+      </p:cxnSp>
+      <p:cxnSp>
+        <p:nvCxnSpPr>
+          <p:cNvPr id="68" name="Tick"/>
+          <p:cNvCxnSpPr/>
+          <p:nvPr/>
+        </p:nvCxnSpPr>
+        <p:spPr>
+          <a:xfrm>
+            <a:off x="8382000" y="4356100"/>
+            <a:ext cx="0" cy="901700"/>
+          </a:xfrm>
+          <a:prstGeom prst="straightConnector1">
+            <a:avLst/>
+          </a:prstGeom>
+          <a:ln w="6350">
+            <a:solidFill>
+              <a:srgbClr val="C1002A"/>
+            </a:solidFill>
+            <a:prstDash val="dash"/>
+          </a:ln>
+        </p:spPr>
+      </p:cxnSp>
+      <p:cxnSp>
+        <p:nvCxnSpPr>
+          <p:cNvPr id="69" name="Messspanne Startspreizung"/>
+          <p:cNvCxnSpPr/>
+          <p:nvPr/>
+        </p:nvCxnSpPr>
+        <p:spPr>
+          <a:xfrm>
+            <a:off x="7772400" y="5207000"/>
+            <a:ext cx="609600" cy="0"/>
+          </a:xfrm>
+          <a:prstGeom prst="straightConnector1">
+            <a:avLst/>
+          </a:prstGeom>
+          <a:ln w="12700">
+            <a:solidFill>
+              <a:srgbClr val="C1002A"/>
+            </a:solidFill>
+            <a:headEnd type="triangle" w="sm" len="sm"/>
+            <a:tailEnd type="triangle" w="sm" len="sm"/>
+          </a:ln>
+        </p:spPr>
+      </p:cxnSp>
+      <p:sp>
+        <p:nvSpPr>
+          <p:cNvPr id="70" name="Label Startspreizung"/>
+          <p:cNvSpPr txBox="1"/>
+          <p:nvPr/>
+        </p:nvSpPr>
+        <p:spPr>
+          <a:xfrm>
+            <a:off x="7315200" y="5270500"/>
+            <a:ext cx="1524000" cy="177800"/>
+          </a:xfrm>
+          <a:prstGeom prst="rect">
+            <a:avLst/>
+          </a:prstGeom>
+          <a:noFill/>
+        </p:spPr>
+        <p:txBody>
+          <a:bodyPr wrap="none" lIns="0" tIns="0" rIns="0" bIns="0" anchor="t"/>
+          <a:lstStyle/>
+          <a:p>
+            <a:pPr algn="ctr"/>
+            <a:r>
+              <a:rPr lang="de-DE" sz="1200" b="1" dirty="0">
+                <a:solidFill>
+                  <a:srgbClr val="C1002A"/>
+                </a:solidFill>
+              </a:rPr>
+              <a:t>Startspreizung</a:t>
+            </a:r>
+          </a:p>
+        </p:txBody>
+      </p:sp>
+      <p:sp>
+        <p:nvSpPr>
+          <p:cNvPr id="71" name="Stichpunkte"/>
+          <p:cNvSpPr txBox="1"/>
+          <p:nvPr/>
+        </p:nvSpPr>
+        <p:spPr>
+          <a:xfrm>
+            <a:off x="6654800" y="5537200"/>
+            <a:ext cx="4622800" cy="431800"/>
+          </a:xfrm>
+          <a:prstGeom prst="rect">
+            <a:avLst/>
+          </a:prstGeom>
+          <a:noFill/>
+        </p:spPr>
+        <p:txBody>
+          <a:bodyPr wrap="square" lIns="0" tIns="0" rIns="0" bIns="0" anchor="t"/>
+          <a:lstStyle/>
+          <a:p>
+            <a:pPr marL="177800" indent="-177800" algn="l">
+              <a:spcAft>
+                <a:spcPts val="300"/>
+              </a:spcAft>
+              <a:buClr>
+                <a:srgbClr val="C1002A"/>
+              </a:buClr>
+              <a:buFont typeface="Arial"/>
+              <a:buChar char="•"/>
+            </a:pPr>
+            <a:r>
+              <a:rPr lang="de-DE" sz="1300" dirty="0">
+                <a:solidFill>
+                  <a:srgbClr val="262626"/>
+                </a:solidFill>
+              </a:rPr>
+              <a:t>Erster → letzter Start paralleler Instanzen</a:t>
+            </a:r>
+          </a:p>
+        </p:txBody>
+      </p:sp>
+      <p:sp>
+        <p:nvSpPr>
+          <p:cNvPr id="3" name="Foliennummer"/>
+          <p:cNvSpPr txBox="1"/>
+          <p:nvPr/>
+        </p:nvSpPr>
+        <p:spPr>
+          <a:xfrm>
+            <a:off x="10769600" y="6197600"/>
+            <a:ext cx="508000" cy="254000"/>
+          </a:xfrm>
+          <a:prstGeom prst="rect">
+            <a:avLst/>
+          </a:prstGeom>
+          <a:noFill/>
+        </p:spPr>
+        <p:txBody>
+          <a:bodyPr wrap="square" lIns="0" tIns="0" rIns="0" bIns="0" anchor="ctr"/>
+          <a:lstStyle/>
+          <a:p>
+            <a:pPr algn="r"/>
+            <a:r>
+              <a:rPr lang="de-DE" sz="1200" dirty="0">
+                <a:solidFill>
+                  <a:srgbClr val="8C8C8C"/>
+                </a:solidFill>
+              </a:rPr>
+              <a:t>9</a:t>
+            </a:r>
+          </a:p>
+        </p:txBody>
+      </p:sp>
+      <p:cxnSp>
+        <p:nvCxnSpPr>
+          <p:cNvPr id="4" name="Fortschritt Linie"/>
+          <p:cNvCxnSpPr/>
+          <p:nvPr/>
+        </p:nvCxnSpPr>
+        <p:spPr>
+          <a:xfrm>
+            <a:off x="1219200" y="6172200"/>
+            <a:ext cx="5080000" cy="0"/>
+          </a:xfrm>
+          <a:prstGeom prst="straightConnector1">
+            <a:avLst/>
+          </a:prstGeom>
+          <a:ln w="6350">
+            <a:solidFill>
+              <a:srgbClr val="D9D9D9"/>
+            </a:solidFill>
+          </a:ln>
+        </p:spPr>
+      </p:cxnSp>
+      <p:sp>
+        <p:nvSpPr>
+          <p:cNvPr id="5" name="Marker Motivation"/>
+          <p:cNvSpPr/>
+          <p:nvPr/>
+        </p:nvSpPr>
+        <p:spPr>
+          <a:xfrm>
+            <a:off x="1187450" y="6140450"/>
+            <a:ext cx="63500" cy="63500"/>
+          </a:xfrm>
+          <a:prstGeom prst="ellipse">
+            <a:avLst/>
+          </a:prstGeom>
+          <a:solidFill>
+            <a:srgbClr val="BFBFBF"/>
+          </a:solidFill>
+          <a:ln>
+            <a:noFill/>
+          </a:ln>
+        </p:spPr>
+        <p:txBody>
+          <a:bodyPr/>
+          <a:lstStyle/>
+          <a:p>
+            <a:endParaRPr lang="de-DE"/>
+          </a:p>
+        </p:txBody>
+      </p:sp>
+      <p:sp>
+        <p:nvSpPr>
+          <p:cNvPr id="6" name="Label Motivation"/>
+          <p:cNvSpPr txBox="1"/>
+          <p:nvPr/>
+        </p:nvSpPr>
+        <p:spPr>
+          <a:xfrm>
+            <a:off x="1219200" y="6273800"/>
+            <a:ext cx="1270000" cy="203200"/>
+          </a:xfrm>
+          <a:prstGeom prst="rect">
+            <a:avLst/>
+          </a:prstGeom>
+          <a:noFill/>
+        </p:spPr>
+        <p:txBody>
+          <a:bodyPr wrap="none" lIns="0" tIns="0" rIns="0" bIns="0" anchor="t"/>
+          <a:lstStyle/>
+          <a:p>
+            <a:pPr algn="l"/>
+            <a:r>
+              <a:rPr lang="de-DE" sz="1000" dirty="0">
+                <a:solidFill>
+                  <a:srgbClr val="A6A6A6"/>
+                </a:solidFill>
+              </a:rPr>
+              <a:t>Motivation</a:t>
+            </a:r>
+          </a:p>
+        </p:txBody>
+      </p:sp>
+      <p:sp>
+        <p:nvSpPr>
+          <p:cNvPr id="7" name="Marker Methodik"/>
+          <p:cNvSpPr/>
+          <p:nvPr/>
+        </p:nvSpPr>
+        <p:spPr>
+          <a:xfrm>
+            <a:off x="2444750" y="6127750"/>
+            <a:ext cx="88900" cy="88900"/>
+          </a:xfrm>
+          <a:prstGeom prst="ellipse">
+            <a:avLst/>
+          </a:prstGeom>
+          <a:solidFill>
+            <a:srgbClr val="C1002A"/>
+          </a:solidFill>
+          <a:ln>
+            <a:noFill/>
+          </a:ln>
+        </p:spPr>
+        <p:txBody>
+          <a:bodyPr/>
+          <a:lstStyle/>
+          <a:p>
+            <a:endParaRPr lang="de-DE"/>
+          </a:p>
+        </p:txBody>
+      </p:sp>
+      <p:sp>
+        <p:nvSpPr>
+          <p:cNvPr id="8" name="Label Methodik"/>
+          <p:cNvSpPr txBox="1"/>
+          <p:nvPr/>
+        </p:nvSpPr>
+        <p:spPr>
+          <a:xfrm>
+            <a:off x="1854200" y="6273800"/>
+            <a:ext cx="1270000" cy="203200"/>
+          </a:xfrm>
+          <a:prstGeom prst="rect">
+            <a:avLst/>
+          </a:prstGeom>
+          <a:noFill/>
+        </p:spPr>
+        <p:txBody>
+          <a:bodyPr wrap="none" lIns="0" tIns="0" rIns="0" bIns="0" anchor="t"/>
+          <a:lstStyle/>
+          <a:p>
+            <a:pPr algn="ctr"/>
+            <a:r>
+              <a:rPr lang="de-DE" sz="1000" b="1" dirty="0">
+                <a:solidFill>
+                  <a:srgbClr val="C1002A"/>
+                </a:solidFill>
+              </a:rPr>
+              <a:t>Methodik</a:t>
+            </a:r>
+          </a:p>
+        </p:txBody>
+      </p:sp>
+      <p:sp>
+        <p:nvSpPr>
+          <p:cNvPr id="9" name="Marker Systeme"/>
+          <p:cNvSpPr/>
+          <p:nvPr/>
+        </p:nvSpPr>
+        <p:spPr>
+          <a:xfrm>
+            <a:off x="3727450" y="6140450"/>
+            <a:ext cx="63500" cy="63500"/>
+          </a:xfrm>
+          <a:prstGeom prst="ellipse">
+            <a:avLst/>
+          </a:prstGeom>
+          <a:solidFill>
+            <a:srgbClr val="BFBFBF"/>
+          </a:solidFill>
+          <a:ln>
+            <a:noFill/>
+          </a:ln>
+        </p:spPr>
+        <p:txBody>
+          <a:bodyPr/>
+          <a:lstStyle/>
+          <a:p>
+            <a:endParaRPr lang="de-DE"/>
+          </a:p>
+        </p:txBody>
+      </p:sp>
+      <p:sp>
+        <p:nvSpPr>
+          <p:cNvPr id="10" name="Label Systeme"/>
+          <p:cNvSpPr txBox="1"/>
+          <p:nvPr/>
+        </p:nvSpPr>
+        <p:spPr>
+          <a:xfrm>
+            <a:off x="3124200" y="6273800"/>
+            <a:ext cx="1270000" cy="203200"/>
+          </a:xfrm>
+          <a:prstGeom prst="rect">
+            <a:avLst/>
+          </a:prstGeom>
+          <a:noFill/>
+        </p:spPr>
+        <p:txBody>
+          <a:bodyPr wrap="none" lIns="0" tIns="0" rIns="0" bIns="0" anchor="t"/>
+          <a:lstStyle/>
+          <a:p>
+            <a:pPr algn="ctr"/>
+            <a:r>
+              <a:rPr lang="de-DE" sz="1000" dirty="0">
+                <a:solidFill>
+                  <a:srgbClr val="A6A6A6"/>
+                </a:solidFill>
+              </a:rPr>
+              <a:t>Systeme</a:t>
+            </a:r>
+          </a:p>
+        </p:txBody>
+      </p:sp>
+      <p:sp>
+        <p:nvSpPr>
+          <p:cNvPr id="11" name="Marker Untersuchung"/>
+          <p:cNvSpPr/>
+          <p:nvPr/>
+        </p:nvSpPr>
+        <p:spPr>
+          <a:xfrm>
+            <a:off x="4997450" y="6140450"/>
+            <a:ext cx="63500" cy="63500"/>
+          </a:xfrm>
+          <a:prstGeom prst="ellipse">
+            <a:avLst/>
+          </a:prstGeom>
+          <a:solidFill>
+            <a:srgbClr val="BFBFBF"/>
+          </a:solidFill>
+          <a:ln>
+            <a:noFill/>
+          </a:ln>
+        </p:spPr>
+        <p:txBody>
+          <a:bodyPr/>
+          <a:lstStyle/>
+          <a:p>
+            <a:endParaRPr lang="de-DE"/>
+          </a:p>
+        </p:txBody>
+      </p:sp>
+      <p:sp>
+        <p:nvSpPr>
+          <p:cNvPr id="12" name="Label Untersuchung"/>
+          <p:cNvSpPr txBox="1"/>
+          <p:nvPr/>
+        </p:nvSpPr>
+        <p:spPr>
+          <a:xfrm>
+            <a:off x="4394200" y="6273800"/>
+            <a:ext cx="1270000" cy="203200"/>
+          </a:xfrm>
+          <a:prstGeom prst="rect">
+            <a:avLst/>
+          </a:prstGeom>
+          <a:noFill/>
+        </p:spPr>
+        <p:txBody>
+          <a:bodyPr wrap="none" lIns="0" tIns="0" rIns="0" bIns="0" anchor="t"/>
+          <a:lstStyle/>
+          <a:p>
+            <a:pPr algn="ctr"/>
+            <a:r>
+              <a:rPr lang="de-DE" sz="1000" dirty="0">
+                <a:solidFill>
+                  <a:srgbClr val="A6A6A6"/>
+                </a:solidFill>
+              </a:rPr>
+              <a:t>Untersuchung</a:t>
+            </a:r>
+          </a:p>
+        </p:txBody>
+      </p:sp>
+      <p:sp>
+        <p:nvSpPr>
+          <p:cNvPr id="13" name="Marker Fazit"/>
+          <p:cNvSpPr/>
+          <p:nvPr/>
+        </p:nvSpPr>
+        <p:spPr>
+          <a:xfrm>
+            <a:off x="6267450" y="6140450"/>
+            <a:ext cx="63500" cy="63500"/>
+          </a:xfrm>
+          <a:prstGeom prst="ellipse">
+            <a:avLst/>
+          </a:prstGeom>
+          <a:solidFill>
+            <a:srgbClr val="BFBFBF"/>
+          </a:solidFill>
+          <a:ln>
+            <a:noFill/>
+          </a:ln>
+        </p:spPr>
+        <p:txBody>
+          <a:bodyPr/>
+          <a:lstStyle/>
+          <a:p>
+            <a:endParaRPr lang="de-DE"/>
+          </a:p>
+        </p:txBody>
+      </p:sp>
+      <p:sp>
+        <p:nvSpPr>
+          <p:cNvPr id="14" name="Label Fazit"/>
+          <p:cNvSpPr txBox="1"/>
+          <p:nvPr/>
+        </p:nvSpPr>
+        <p:spPr>
+          <a:xfrm>
+            <a:off x="5029200" y="6273800"/>
+            <a:ext cx="1270000" cy="203200"/>
+          </a:xfrm>
+          <a:prstGeom prst="rect">
+            <a:avLst/>
+          </a:prstGeom>
+          <a:noFill/>
+        </p:spPr>
+        <p:txBody>
+          <a:bodyPr wrap="none" lIns="0" tIns="0" rIns="0" bIns="0" anchor="t"/>
+          <a:lstStyle/>
+          <a:p>
+            <a:pPr algn="r"/>
+            <a:r>
+              <a:rPr lang="de-DE" sz="1000" dirty="0">
+                <a:solidFill>
+                  <a:srgbClr val="A6A6A6"/>
+                </a:solidFill>
+              </a:rPr>
+              <a:t>Fazit</a:t>
+            </a:r>
+          </a:p>
+        </p:txBody>
+      </p:sp>
+      <p:sp>
+        <p:nvSpPr>
+          <p:cNvPr id="180" name="Label Workflow-Start"/>
+          <p:cNvSpPr txBox="1"/>
+          <p:nvPr/>
+        </p:nvSpPr>
+        <p:spPr>
+          <a:xfrm>
+            <a:off x="1422400" y="2286000"/>
+            <a:ext cx="1143000" cy="177800"/>
+          </a:xfrm>
+          <a:prstGeom prst="rect">
+            <a:avLst/>
+          </a:prstGeom>
+          <a:noFill/>
+        </p:spPr>
+        <p:txBody>
+          <a:bodyPr wrap="none" lIns="0" tIns="0" rIns="0" bIns="0" anchor="b"/>
+          <a:lstStyle/>
+          <a:p>
+            <a:pPr algn="l"/>
+            <a:r>
+              <a:rPr lang="de-DE" sz="1100" dirty="0">
+                <a:solidFill>
+                  <a:srgbClr val="595959"/>
+                </a:solidFill>
+              </a:rPr>
+              <a:t>Workflow-Start</a:t>
+            </a:r>
+          </a:p>
+        </p:txBody>
+      </p:sp>
+      <p:sp>
+        <p:nvSpPr>
+          <p:cNvPr id="181" name="Label Workflow-Ende"/>
+          <p:cNvSpPr txBox="1"/>
+          <p:nvPr/>
+        </p:nvSpPr>
+        <p:spPr>
+          <a:xfrm>
+            <a:off x="4445000" y="2286000"/>
+            <a:ext cx="1143000" cy="177800"/>
+          </a:xfrm>
+          <a:prstGeom prst="rect">
+            <a:avLst/>
+          </a:prstGeom>
+          <a:noFill/>
+        </p:spPr>
+        <p:txBody>
+          <a:bodyPr wrap="none" lIns="0" tIns="0" rIns="0" bIns="0" anchor="b"/>
+          <a:lstStyle/>
+          <a:p>
+            <a:pPr algn="r"/>
+            <a:r>
+              <a:rPr lang="de-DE" sz="1100" dirty="0">
+                <a:solidFill>
+                  <a:srgbClr val="595959"/>
+                </a:solidFill>
+              </a:rPr>
+              <a:t>Workflow-Ende</a:t>
+            </a:r>
+          </a:p>
+        </p:txBody>
+      </p:sp>
+    </p:spTree>
+    <p:extLst>
+      <p:ext uri="{BB962C8B-B14F-4D97-AF65-F5344CB8AC3E}">
+        <p14:creationId xmlns:p14="http://schemas.microsoft.com/office/powerpoint/2010/main" val="985474103"/>
       </p:ext>
     </p:extLst>
   </p:cSld>

--- a/Präsentation-Kolloqium.pptx
+++ b/Präsentation-Kolloqium.pptx
@@ -11,7 +11,7 @@
     <p:sldId id="259" r:id="rId2"/>
     <p:sldId id="263" r:id="rId3"/>
     <p:sldId id="267" r:id="rId4"/>
-    <p:sldId id="272" r:id="rId5"/>
+    <p:sldId id="291" r:id="rId5"/>
     <p:sldId id="274" r:id="rId6"/>
     <p:sldId id="276" r:id="rId7"/>
     <p:sldId id="280" r:id="rId8"/>
@@ -5400,7 +5400,7 @@
                   <a:srgbClr val="262626"/>
                 </a:solidFill>
               </a:rPr>
-              <a:t>Wissenschaftlicher Workflow: verbundene Rechenschritte mit gemeinsamem Forschungsziel</a:t>
+              <a:t>Wissenschaftlicher Workflow: verbindet Rechenschritte mit gemeinsamem Forschungsziel</a:t>
             </a:r>
           </a:p>
           <a:p>
@@ -5823,13 +5823,45 @@
       </p:cxnSp>
       <p:sp>
         <p:nvSpPr>
+          <p:cNvPr id="24" name="Motivation"/>
+          <p:cNvSpPr txBox="1"/>
+          <p:nvPr/>
+        </p:nvSpPr>
+        <p:spPr>
+          <a:xfrm>
+            <a:off x="1219200" y="5207000"/>
+            <a:ext cx="10058400" cy="228600"/>
+          </a:xfrm>
+          <a:prstGeom prst="rect">
+            <a:avLst/>
+          </a:prstGeom>
+          <a:noFill/>
+        </p:spPr>
+        <p:txBody>
+          <a:bodyPr wrap="square" lIns="0" tIns="0" rIns="0" bIns="0" anchor="t"/>
+          <a:lstStyle/>
+          <a:p>
+            <a:pPr algn="l"/>
+            <a:r>
+              <a:rPr lang="de-DE" sz="1300" dirty="0">
+                <a:solidFill>
+                  <a:srgbClr val="262626"/>
+                </a:solidFill>
+              </a:rPr>
+              <a:t>Kein einzelnes WMS eignet sich gleichermaßen für alle Workflows und Ausführungsumgebungen.</a:t>
+            </a:r>
+          </a:p>
+        </p:txBody>
+      </p:sp>
+      <p:sp>
+        <p:nvSpPr>
           <p:cNvPr id="23" name="Überleitung"/>
           <p:cNvSpPr txBox="1"/>
           <p:nvPr/>
         </p:nvSpPr>
         <p:spPr>
           <a:xfrm>
-            <a:off x="1219200" y="5461000"/>
+            <a:off x="1219200" y="5562600"/>
             <a:ext cx="10058400" cy="330200"/>
           </a:xfrm>
           <a:prstGeom prst="rect">
@@ -6214,7 +6246,7 @@
     </p:spTree>
     <p:extLst>
       <p:ext uri="{BB962C8B-B14F-4D97-AF65-F5344CB8AC3E}">
-        <p14:creationId xmlns:p14="http://schemas.microsoft.com/office/powerpoint/2010/main" val="767066191"/>
+        <p14:creationId xmlns:p14="http://schemas.microsoft.com/office/powerpoint/2010/main" val="3806169822"/>
       </p:ext>
     </p:extLst>
   </p:cSld>

--- a/Präsentation-Kolloqium.pptx
+++ b/Präsentation-Kolloqium.pptx
@@ -5,7 +5,7 @@
     <p:sldMasterId id="2147483648" r:id="rId1"/>
   </p:sldMasterIdLst>
   <p:notesMasterIdLst>
-    <p:notesMasterId r:id="rId11"/>
+    <p:notesMasterId r:id="rId17"/>
   </p:notesMasterIdLst>
   <p:sldIdLst>
     <p:sldId id="259" r:id="rId2"/>
@@ -16,7 +16,13 @@
     <p:sldId id="276" r:id="rId7"/>
     <p:sldId id="280" r:id="rId8"/>
     <p:sldId id="285" r:id="rId9"/>
-    <p:sldId id="290" r:id="rId10"/>
+    <p:sldId id="296" r:id="rId10"/>
+    <p:sldId id="300" r:id="rId11"/>
+    <p:sldId id="303" r:id="rId12"/>
+    <p:sldId id="306" r:id="rId13"/>
+    <p:sldId id="308" r:id="rId14"/>
+    <p:sldId id="313" r:id="rId15"/>
+    <p:sldId id="314" r:id="rId16"/>
   </p:sldIdLst>
   <p:sldSz cx="12192000" cy="6858000"/>
   <p:notesSz cx="6858000" cy="9144000"/>
@@ -468,6 +474,90 @@
 </file>
 
 <file path=ppt/notesSlides/notesSlide1.xml><?xml version="1.0" encoding="utf-8"?>
+<p:notes xmlns:a="http://schemas.openxmlformats.org/drawingml/2006/main" xmlns:r="http://schemas.openxmlformats.org/officeDocument/2006/relationships" xmlns:p="http://schemas.openxmlformats.org/presentationml/2006/main">
+  <p:cSld>
+    <p:spTree>
+      <p:nvGrpSpPr>
+        <p:cNvPr id="1" name=""/>
+        <p:cNvGrpSpPr/>
+        <p:nvPr/>
+      </p:nvGrpSpPr>
+      <p:grpSpPr>
+        <a:xfrm>
+          <a:off x="0" y="0"/>
+          <a:ext cx="0" cy="0"/>
+          <a:chOff x="0" y="0"/>
+          <a:chExt cx="0" cy="0"/>
+        </a:xfrm>
+      </p:grpSpPr>
+      <p:sp>
+        <p:nvSpPr>
+          <p:cNvPr id="2" name="Folienbildplatzhalter 1"/>
+          <p:cNvSpPr>
+            <a:spLocks noGrp="1" noRot="1" noChangeAspect="1"/>
+          </p:cNvSpPr>
+          <p:nvPr>
+            <p:ph type="sldImg"/>
+          </p:nvPr>
+        </p:nvSpPr>
+        <p:spPr/>
+      </p:sp>
+      <p:sp>
+        <p:nvSpPr>
+          <p:cNvPr id="3" name="Notizenplatzhalter 2"/>
+          <p:cNvSpPr>
+            <a:spLocks noGrp="1"/>
+          </p:cNvSpPr>
+          <p:nvPr>
+            <p:ph type="body" idx="1"/>
+          </p:nvPr>
+        </p:nvSpPr>
+        <p:spPr/>
+        <p:txBody>
+          <a:bodyPr/>
+          <a:lstStyle/>
+          <a:p>
+            <a:endParaRPr lang="de-DE" dirty="0"/>
+          </a:p>
+        </p:txBody>
+      </p:sp>
+      <p:sp>
+        <p:nvSpPr>
+          <p:cNvPr id="4" name="Foliennummernplatzhalter 3"/>
+          <p:cNvSpPr>
+            <a:spLocks noGrp="1"/>
+          </p:cNvSpPr>
+          <p:nvPr>
+            <p:ph type="sldNum" sz="quarter" idx="5"/>
+          </p:nvPr>
+        </p:nvSpPr>
+        <p:spPr/>
+        <p:txBody>
+          <a:bodyPr/>
+          <a:lstStyle/>
+          <a:p>
+            <a:fld id="{2654616F-5B70-3840-955D-6DB355250DC4}" type="slidenum">
+              <a:rPr lang="de-DE" smtClean="0"/>
+              <a:t>4</a:t>
+            </a:fld>
+            <a:endParaRPr lang="de-DE"/>
+          </a:p>
+        </p:txBody>
+      </p:sp>
+    </p:spTree>
+    <p:extLst>
+      <p:ext uri="{BB962C8B-B14F-4D97-AF65-F5344CB8AC3E}">
+        <p14:creationId xmlns:p14="http://schemas.microsoft.com/office/powerpoint/2010/main" val="1021218045"/>
+      </p:ext>
+    </p:extLst>
+  </p:cSld>
+  <p:clrMapOvr>
+    <a:masterClrMapping/>
+  </p:clrMapOvr>
+</p:notes>
+</file>
+
+<file path=ppt/notesSlides/notesSlide2.xml><?xml version="1.0" encoding="utf-8"?>
 <p:notes xmlns:a="http://schemas.openxmlformats.org/drawingml/2006/main" xmlns:r="http://schemas.openxmlformats.org/officeDocument/2006/relationships" xmlns:p="http://schemas.openxmlformats.org/presentationml/2006/main">
   <p:cSld>
     <p:spTree>
@@ -4058,6 +4148,5845 @@
 </p:sld>
 </file>
 
+<file path=ppt/slides/slide10.xml><?xml version="1.0" encoding="utf-8"?>
+<p:sld xmlns:a="http://schemas.openxmlformats.org/drawingml/2006/main" xmlns:r="http://schemas.openxmlformats.org/officeDocument/2006/relationships" xmlns:p="http://schemas.openxmlformats.org/presentationml/2006/main">
+  <p:cSld>
+    <p:spTree>
+      <p:nvGrpSpPr>
+        <p:cNvPr id="1" name=""/>
+        <p:cNvGrpSpPr/>
+        <p:nvPr/>
+      </p:nvGrpSpPr>
+      <p:grpSpPr>
+        <a:xfrm>
+          <a:off x="0" y="0"/>
+          <a:ext cx="0" cy="0"/>
+          <a:chOff x="0" y="0"/>
+          <a:chExt cx="0" cy="0"/>
+        </a:xfrm>
+      </p:grpSpPr>
+      <p:sp>
+        <p:nvSpPr>
+          <p:cNvPr id="2" name="Titel 1">
+            <a:extLst>
+              <a:ext uri="{FF2B5EF4-FFF2-40B4-BE49-F238E27FC236}">
+                <a16:creationId xmlns:a16="http://schemas.microsoft.com/office/drawing/2014/main" id="{F6693EF6-ED28-1BFF-E834-94265AA79F0D}"/>
+              </a:ext>
+            </a:extLst>
+          </p:cNvPr>
+          <p:cNvSpPr>
+            <a:spLocks noGrp="1"/>
+          </p:cNvSpPr>
+          <p:nvPr>
+            <p:ph type="title"/>
+          </p:nvPr>
+        </p:nvSpPr>
+        <p:spPr>
+          <a:xfrm>
+            <a:off x="1219200" y="812800"/>
+            <a:ext cx="10058400" cy="787400"/>
+          </a:xfrm>
+        </p:spPr>
+        <p:txBody>
+          <a:bodyPr wrap="square" lIns="0" tIns="0" rIns="0" bIns="0" anchor="t">
+            <a:normAutofit/>
+          </a:bodyPr>
+          <a:lstStyle/>
+          <a:p>
+            <a:r>
+              <a:rPr lang="de-DE" sz="2600" b="1" dirty="0">
+                <a:solidFill>
+                  <a:srgbClr val="262626"/>
+                </a:solidFill>
+              </a:rPr>
+              <a:t>Modellierung des </a:t>
+            </a:r>
+            <a:r>
+              <a:rPr lang="de-DE" sz="2600" b="1" dirty="0" err="1">
+                <a:solidFill>
+                  <a:srgbClr val="262626"/>
+                </a:solidFill>
+              </a:rPr>
+              <a:t>Scatter</a:t>
+            </a:r>
+            <a:r>
+              <a:rPr lang="de-DE" sz="2600" b="1" dirty="0">
+                <a:solidFill>
+                  <a:srgbClr val="262626"/>
+                </a:solidFill>
+              </a:rPr>
+              <a:t>-Gather-Musters</a:t>
+            </a:r>
+          </a:p>
+        </p:txBody>
+      </p:sp>
+      <p:sp>
+        <p:nvSpPr>
+          <p:cNvPr id="20" name="Akzentlinie"/>
+          <p:cNvSpPr/>
+          <p:nvPr/>
+        </p:nvSpPr>
+        <p:spPr>
+          <a:xfrm>
+            <a:off x="914400" y="812800"/>
+            <a:ext cx="50800" cy="431800"/>
+          </a:xfrm>
+          <a:prstGeom prst="rect">
+            <a:avLst/>
+          </a:prstGeom>
+          <a:solidFill>
+            <a:srgbClr val="C1002A"/>
+          </a:solidFill>
+          <a:ln>
+            <a:noFill/>
+          </a:ln>
+        </p:spPr>
+        <p:txBody>
+          <a:bodyPr/>
+          <a:lstStyle/>
+          <a:p>
+            <a:endParaRPr lang="de-DE"/>
+          </a:p>
+        </p:txBody>
+      </p:sp>
+      <p:sp>
+        <p:nvSpPr>
+          <p:cNvPr id="15" name="split"/>
+          <p:cNvSpPr/>
+          <p:nvPr/>
+        </p:nvSpPr>
+        <p:spPr>
+          <a:xfrm>
+            <a:off x="3708400" y="2260600"/>
+            <a:ext cx="1143000" cy="279400"/>
+          </a:xfrm>
+          <a:prstGeom prst="roundRect">
+            <a:avLst>
+              <a:gd name="adj" fmla="val 18000"/>
+            </a:avLst>
+          </a:prstGeom>
+          <a:noFill/>
+          <a:ln w="12700">
+            <a:solidFill>
+              <a:srgbClr val="8C8C8C"/>
+            </a:solidFill>
+          </a:ln>
+        </p:spPr>
+        <p:txBody>
+          <a:bodyPr lIns="0" tIns="0" rIns="0" bIns="0" anchor="ctr"/>
+          <a:lstStyle/>
+          <a:p>
+            <a:pPr algn="ctr"/>
+            <a:r>
+              <a:rPr lang="de-DE" sz="1100" dirty="0">
+                <a:solidFill>
+                  <a:srgbClr val="262626"/>
+                </a:solidFill>
+              </a:rPr>
+              <a:t>split</a:t>
+            </a:r>
+          </a:p>
+        </p:txBody>
+      </p:sp>
+      <p:sp>
+        <p:nvSpPr>
+          <p:cNvPr id="21" name="aggregate"/>
+          <p:cNvSpPr/>
+          <p:nvPr/>
+        </p:nvSpPr>
+        <p:spPr>
+          <a:xfrm>
+            <a:off x="7518400" y="2260600"/>
+            <a:ext cx="1270000" cy="279400"/>
+          </a:xfrm>
+          <a:prstGeom prst="roundRect">
+            <a:avLst>
+              <a:gd name="adj" fmla="val 18000"/>
+            </a:avLst>
+          </a:prstGeom>
+          <a:noFill/>
+          <a:ln w="12700">
+            <a:solidFill>
+              <a:srgbClr val="8C8C8C"/>
+            </a:solidFill>
+          </a:ln>
+        </p:spPr>
+        <p:txBody>
+          <a:bodyPr lIns="0" tIns="0" rIns="0" bIns="0" anchor="ctr"/>
+          <a:lstStyle/>
+          <a:p>
+            <a:pPr algn="ctr"/>
+            <a:r>
+              <a:rPr lang="de-DE" sz="1100" dirty="0">
+                <a:solidFill>
+                  <a:srgbClr val="262626"/>
+                </a:solidFill>
+              </a:rPr>
+              <a:t>aggregate</a:t>
+            </a:r>
+          </a:p>
+        </p:txBody>
+      </p:sp>
+      <p:sp>
+        <p:nvSpPr>
+          <p:cNvPr id="22" name="compute"/>
+          <p:cNvSpPr/>
+          <p:nvPr/>
+        </p:nvSpPr>
+        <p:spPr>
+          <a:xfrm>
+            <a:off x="5676900" y="1879600"/>
+            <a:ext cx="1270000" cy="228600"/>
+          </a:xfrm>
+          <a:prstGeom prst="roundRect">
+            <a:avLst>
+              <a:gd name="adj" fmla="val 18000"/>
+            </a:avLst>
+          </a:prstGeom>
+          <a:noFill/>
+          <a:ln w="12700">
+            <a:solidFill>
+              <a:srgbClr val="C1002A"/>
+            </a:solidFill>
+          </a:ln>
+        </p:spPr>
+        <p:txBody>
+          <a:bodyPr lIns="0" tIns="0" rIns="0" bIns="0" anchor="ctr"/>
+          <a:lstStyle/>
+          <a:p>
+            <a:pPr algn="ctr"/>
+            <a:r>
+              <a:rPr lang="de-DE" sz="1100" dirty="0">
+                <a:solidFill>
+                  <a:srgbClr val="C1002A"/>
+                </a:solidFill>
+              </a:rPr>
+              <a:t>compute</a:t>
+            </a:r>
+            <a:r>
+              <a:rPr lang="de-DE" sz="1100" baseline="-25000" dirty="0">
+                <a:solidFill>
+                  <a:srgbClr val="C1002A"/>
+                </a:solidFill>
+              </a:rPr>
+              <a:t>1</a:t>
+            </a:r>
+          </a:p>
+        </p:txBody>
+      </p:sp>
+      <p:sp>
+        <p:nvSpPr>
+          <p:cNvPr id="23" name="compute"/>
+          <p:cNvSpPr/>
+          <p:nvPr/>
+        </p:nvSpPr>
+        <p:spPr>
+          <a:xfrm>
+            <a:off x="5676900" y="2159000"/>
+            <a:ext cx="1270000" cy="228600"/>
+          </a:xfrm>
+          <a:prstGeom prst="roundRect">
+            <a:avLst>
+              <a:gd name="adj" fmla="val 18000"/>
+            </a:avLst>
+          </a:prstGeom>
+          <a:noFill/>
+          <a:ln w="12700">
+            <a:solidFill>
+              <a:srgbClr val="C1002A"/>
+            </a:solidFill>
+          </a:ln>
+        </p:spPr>
+        <p:txBody>
+          <a:bodyPr lIns="0" tIns="0" rIns="0" bIns="0" anchor="ctr"/>
+          <a:lstStyle/>
+          <a:p>
+            <a:pPr algn="ctr"/>
+            <a:r>
+              <a:rPr lang="de-DE" sz="1100" dirty="0">
+                <a:solidFill>
+                  <a:srgbClr val="C1002A"/>
+                </a:solidFill>
+              </a:rPr>
+              <a:t>compute</a:t>
+            </a:r>
+            <a:r>
+              <a:rPr lang="de-DE" sz="1100" baseline="-25000" dirty="0">
+                <a:solidFill>
+                  <a:srgbClr val="C1002A"/>
+                </a:solidFill>
+              </a:rPr>
+              <a:t>2</a:t>
+            </a:r>
+          </a:p>
+        </p:txBody>
+      </p:sp>
+      <p:sp>
+        <p:nvSpPr>
+          <p:cNvPr id="24" name="compute"/>
+          <p:cNvSpPr/>
+          <p:nvPr/>
+        </p:nvSpPr>
+        <p:spPr>
+          <a:xfrm>
+            <a:off x="5676900" y="2692400"/>
+            <a:ext cx="1270000" cy="228600"/>
+          </a:xfrm>
+          <a:prstGeom prst="roundRect">
+            <a:avLst>
+              <a:gd name="adj" fmla="val 18000"/>
+            </a:avLst>
+          </a:prstGeom>
+          <a:noFill/>
+          <a:ln w="12700">
+            <a:solidFill>
+              <a:srgbClr val="C1002A"/>
+            </a:solidFill>
+          </a:ln>
+        </p:spPr>
+        <p:txBody>
+          <a:bodyPr lIns="0" tIns="0" rIns="0" bIns="0" anchor="ctr"/>
+          <a:lstStyle/>
+          <a:p>
+            <a:pPr algn="ctr"/>
+            <a:r>
+              <a:rPr lang="de-DE" sz="1100" dirty="0">
+                <a:solidFill>
+                  <a:srgbClr val="C1002A"/>
+                </a:solidFill>
+              </a:rPr>
+              <a:t>compute</a:t>
+            </a:r>
+            <a:r>
+              <a:rPr lang="de-DE" sz="1100" baseline="-25000" dirty="0">
+                <a:solidFill>
+                  <a:srgbClr val="C1002A"/>
+                </a:solidFill>
+              </a:rPr>
+              <a:t>n</a:t>
+            </a:r>
+          </a:p>
+        </p:txBody>
+      </p:sp>
+      <p:sp>
+        <p:nvSpPr>
+          <p:cNvPr id="25" name="Punkte"/>
+          <p:cNvSpPr txBox="1"/>
+          <p:nvPr/>
+        </p:nvSpPr>
+        <p:spPr>
+          <a:xfrm>
+            <a:off x="5676900" y="2413000"/>
+            <a:ext cx="1270000" cy="177800"/>
+          </a:xfrm>
+          <a:prstGeom prst="rect">
+            <a:avLst/>
+          </a:prstGeom>
+          <a:noFill/>
+        </p:spPr>
+        <p:txBody>
+          <a:bodyPr wrap="square" lIns="0" tIns="0" rIns="0" bIns="0" anchor="ctr"/>
+          <a:lstStyle/>
+          <a:p>
+            <a:pPr algn="ctr"/>
+            <a:r>
+              <a:rPr lang="de-DE" sz="1000" dirty="0">
+                <a:solidFill>
+                  <a:srgbClr val="A6A6A6"/>
+                </a:solidFill>
+              </a:rPr>
+              <a:t>···</a:t>
+            </a:r>
+          </a:p>
+        </p:txBody>
+      </p:sp>
+      <p:cxnSp>
+        <p:nvCxnSpPr>
+          <p:cNvPr id="26" name="Fan-out"/>
+          <p:cNvCxnSpPr/>
+          <p:nvPr/>
+        </p:nvCxnSpPr>
+        <p:spPr>
+          <a:xfrm flipV="1">
+            <a:off x="4851400" y="1993900"/>
+            <a:ext cx="825500" cy="406400"/>
+          </a:xfrm>
+          <a:prstGeom prst="line">
+            <a:avLst/>
+          </a:prstGeom>
+          <a:ln w="9525">
+            <a:solidFill>
+              <a:srgbClr val="8C8C8C"/>
+            </a:solidFill>
+            <a:tailEnd type="triangle" w="sm" len="sm"/>
+          </a:ln>
+        </p:spPr>
+      </p:cxnSp>
+      <p:cxnSp>
+        <p:nvCxnSpPr>
+          <p:cNvPr id="27" name="Fan-in"/>
+          <p:cNvCxnSpPr/>
+          <p:nvPr/>
+        </p:nvCxnSpPr>
+        <p:spPr>
+          <a:xfrm>
+            <a:off x="6946900" y="1993900"/>
+            <a:ext cx="571500" cy="406400"/>
+          </a:xfrm>
+          <a:prstGeom prst="line">
+            <a:avLst/>
+          </a:prstGeom>
+          <a:ln w="9525">
+            <a:solidFill>
+              <a:srgbClr val="8C8C8C"/>
+            </a:solidFill>
+            <a:tailEnd type="triangle" w="sm" len="sm"/>
+          </a:ln>
+        </p:spPr>
+      </p:cxnSp>
+      <p:cxnSp>
+        <p:nvCxnSpPr>
+          <p:cNvPr id="28" name="Fan-out"/>
+          <p:cNvCxnSpPr/>
+          <p:nvPr/>
+        </p:nvCxnSpPr>
+        <p:spPr>
+          <a:xfrm flipV="1">
+            <a:off x="4851400" y="2273300"/>
+            <a:ext cx="825500" cy="127000"/>
+          </a:xfrm>
+          <a:prstGeom prst="line">
+            <a:avLst/>
+          </a:prstGeom>
+          <a:ln w="9525">
+            <a:solidFill>
+              <a:srgbClr val="8C8C8C"/>
+            </a:solidFill>
+            <a:tailEnd type="triangle" w="sm" len="sm"/>
+          </a:ln>
+        </p:spPr>
+      </p:cxnSp>
+      <p:cxnSp>
+        <p:nvCxnSpPr>
+          <p:cNvPr id="29" name="Fan-in"/>
+          <p:cNvCxnSpPr/>
+          <p:nvPr/>
+        </p:nvCxnSpPr>
+        <p:spPr>
+          <a:xfrm>
+            <a:off x="6946900" y="2273300"/>
+            <a:ext cx="571500" cy="127000"/>
+          </a:xfrm>
+          <a:prstGeom prst="line">
+            <a:avLst/>
+          </a:prstGeom>
+          <a:ln w="9525">
+            <a:solidFill>
+              <a:srgbClr val="8C8C8C"/>
+            </a:solidFill>
+            <a:tailEnd type="triangle" w="sm" len="sm"/>
+          </a:ln>
+        </p:spPr>
+      </p:cxnSp>
+      <p:cxnSp>
+        <p:nvCxnSpPr>
+          <p:cNvPr id="30" name="Fan-out"/>
+          <p:cNvCxnSpPr/>
+          <p:nvPr/>
+        </p:nvCxnSpPr>
+        <p:spPr>
+          <a:xfrm>
+            <a:off x="4851400" y="2400300"/>
+            <a:ext cx="825500" cy="406400"/>
+          </a:xfrm>
+          <a:prstGeom prst="line">
+            <a:avLst/>
+          </a:prstGeom>
+          <a:ln w="9525">
+            <a:solidFill>
+              <a:srgbClr val="8C8C8C"/>
+            </a:solidFill>
+            <a:tailEnd type="triangle" w="sm" len="sm"/>
+          </a:ln>
+        </p:spPr>
+      </p:cxnSp>
+      <p:cxnSp>
+        <p:nvCxnSpPr>
+          <p:cNvPr id="31" name="Fan-in"/>
+          <p:cNvCxnSpPr/>
+          <p:nvPr/>
+        </p:nvCxnSpPr>
+        <p:spPr>
+          <a:xfrm flipV="1">
+            <a:off x="6946900" y="2400300"/>
+            <a:ext cx="571500" cy="406400"/>
+          </a:xfrm>
+          <a:prstGeom prst="line">
+            <a:avLst/>
+          </a:prstGeom>
+          <a:ln w="9525">
+            <a:solidFill>
+              <a:srgbClr val="8C8C8C"/>
+            </a:solidFill>
+            <a:tailEnd type="triangle" w="sm" len="sm"/>
+          </a:ln>
+        </p:spPr>
+      </p:cxnSp>
+      <p:sp>
+        <p:nvSpPr>
+          <p:cNvPr id="32" name="Diagramm Label"/>
+          <p:cNvSpPr txBox="1"/>
+          <p:nvPr/>
+        </p:nvSpPr>
+        <p:spPr>
+          <a:xfrm>
+            <a:off x="1219200" y="1651000"/>
+            <a:ext cx="5080000" cy="177800"/>
+          </a:xfrm>
+          <a:prstGeom prst="rect">
+            <a:avLst/>
+          </a:prstGeom>
+          <a:noFill/>
+        </p:spPr>
+        <p:txBody>
+          <a:bodyPr wrap="square" lIns="0" tIns="0" rIns="0" bIns="0" anchor="ctr"/>
+          <a:lstStyle/>
+          <a:p>
+            <a:pPr algn="l"/>
+            <a:r>
+              <a:rPr lang="de-DE" sz="1000" b="1" spc="200" dirty="0">
+                <a:solidFill>
+                  <a:srgbClr val="C1002A"/>
+                </a:solidFill>
+              </a:rPr>
+              <a:t>SCATTER-GATHER-AUSSCHNITT</a:t>
+            </a:r>
+          </a:p>
+        </p:txBody>
+      </p:sp>
+      <p:sp>
+        <p:nvSpPr>
+          <p:cNvPr id="33" name="Abschnitt"/>
+          <p:cNvSpPr txBox="1"/>
+          <p:nvPr/>
+        </p:nvSpPr>
+        <p:spPr>
+          <a:xfrm>
+            <a:off x="1219200" y="3098800"/>
+            <a:ext cx="10058400" cy="177800"/>
+          </a:xfrm>
+          <a:prstGeom prst="rect">
+            <a:avLst/>
+          </a:prstGeom>
+          <a:noFill/>
+        </p:spPr>
+        <p:txBody>
+          <a:bodyPr wrap="square" lIns="0" tIns="0" rIns="0" bIns="0" anchor="t"/>
+          <a:lstStyle/>
+          <a:p>
+            <a:pPr algn="l"/>
+            <a:r>
+              <a:rPr lang="de-DE" sz="1000" b="1" spc="200" dirty="0">
+                <a:solidFill>
+                  <a:srgbClr val="C1002A"/>
+                </a:solidFill>
+              </a:rPr>
+              <a:t>PARALLELISIERUNG UND ZUSAMMENFÜHRUNG JE SYSTEM</a:t>
+            </a:r>
+          </a:p>
+        </p:txBody>
+      </p:sp>
+      <p:cxnSp>
+        <p:nvCxnSpPr>
+          <p:cNvPr id="54" name="Trennlinie"/>
+          <p:cNvCxnSpPr/>
+          <p:nvPr/>
+        </p:nvCxnSpPr>
+        <p:spPr>
+          <a:xfrm>
+            <a:off x="1219200" y="5283200"/>
+            <a:ext cx="10058400" cy="0"/>
+          </a:xfrm>
+          <a:prstGeom prst="line">
+            <a:avLst/>
+          </a:prstGeom>
+          <a:ln w="9525">
+            <a:solidFill>
+              <a:srgbClr val="D9D9D9"/>
+            </a:solidFill>
+          </a:ln>
+        </p:spPr>
+      </p:cxnSp>
+      <p:sp>
+        <p:nvSpPr>
+          <p:cNvPr id="55" name="Kernaussage"/>
+          <p:cNvSpPr txBox="1"/>
+          <p:nvPr/>
+        </p:nvSpPr>
+        <p:spPr>
+          <a:xfrm>
+            <a:off x="1219200" y="5461000"/>
+            <a:ext cx="10058400" cy="254000"/>
+          </a:xfrm>
+          <a:prstGeom prst="rect">
+            <a:avLst/>
+          </a:prstGeom>
+          <a:noFill/>
+        </p:spPr>
+        <p:txBody>
+          <a:bodyPr wrap="square" lIns="0" tIns="0" rIns="0" bIns="0" anchor="ctr"/>
+          <a:lstStyle/>
+          <a:p>
+            <a:pPr algn="ctr"/>
+            <a:r>
+              <a:rPr lang="de-DE" sz="1400" b="1" dirty="0">
+                <a:solidFill>
+                  <a:srgbClr val="262626"/>
+                </a:solidFill>
+              </a:rPr>
+              <a:t>Gleicher Workflow, unterschiedliche Mechanismen für Parallelisierung und Zusammenführung</a:t>
+            </a:r>
+          </a:p>
+        </p:txBody>
+      </p:sp>
+      <p:sp>
+        <p:nvSpPr>
+          <p:cNvPr id="3" name="Foliennummer"/>
+          <p:cNvSpPr txBox="1"/>
+          <p:nvPr/>
+        </p:nvSpPr>
+        <p:spPr>
+          <a:xfrm>
+            <a:off x="10769600" y="6197600"/>
+            <a:ext cx="508000" cy="254000"/>
+          </a:xfrm>
+          <a:prstGeom prst="rect">
+            <a:avLst/>
+          </a:prstGeom>
+          <a:noFill/>
+        </p:spPr>
+        <p:txBody>
+          <a:bodyPr wrap="square" lIns="0" tIns="0" rIns="0" bIns="0" anchor="t"/>
+          <a:lstStyle/>
+          <a:p>
+            <a:pPr algn="r"/>
+            <a:r>
+              <a:rPr lang="de-DE" sz="1200" dirty="0">
+                <a:solidFill>
+                  <a:srgbClr val="8C8C8C"/>
+                </a:solidFill>
+              </a:rPr>
+              <a:t>10</a:t>
+            </a:r>
+          </a:p>
+        </p:txBody>
+      </p:sp>
+      <p:cxnSp>
+        <p:nvCxnSpPr>
+          <p:cNvPr id="4" name="Fortschritt Linie"/>
+          <p:cNvCxnSpPr/>
+          <p:nvPr/>
+        </p:nvCxnSpPr>
+        <p:spPr>
+          <a:xfrm>
+            <a:off x="1219200" y="6172200"/>
+            <a:ext cx="5080000" cy="0"/>
+          </a:xfrm>
+          <a:prstGeom prst="line">
+            <a:avLst/>
+          </a:prstGeom>
+          <a:ln w="9525">
+            <a:solidFill>
+              <a:srgbClr val="D9D9D9"/>
+            </a:solidFill>
+          </a:ln>
+        </p:spPr>
+      </p:cxnSp>
+      <p:sp>
+        <p:nvSpPr>
+          <p:cNvPr id="5" name="Marker Motivation"/>
+          <p:cNvSpPr/>
+          <p:nvPr/>
+        </p:nvSpPr>
+        <p:spPr>
+          <a:xfrm>
+            <a:off x="1187450" y="6140450"/>
+            <a:ext cx="63500" cy="63500"/>
+          </a:xfrm>
+          <a:prstGeom prst="ellipse">
+            <a:avLst/>
+          </a:prstGeom>
+          <a:solidFill>
+            <a:srgbClr val="A6A6A6"/>
+          </a:solidFill>
+          <a:ln>
+            <a:noFill/>
+          </a:ln>
+        </p:spPr>
+        <p:txBody>
+          <a:bodyPr/>
+          <a:lstStyle/>
+          <a:p>
+            <a:endParaRPr lang="de-DE"/>
+          </a:p>
+        </p:txBody>
+      </p:sp>
+      <p:sp>
+        <p:nvSpPr>
+          <p:cNvPr id="6" name="Label Motivation"/>
+          <p:cNvSpPr txBox="1"/>
+          <p:nvPr/>
+        </p:nvSpPr>
+        <p:spPr>
+          <a:xfrm>
+            <a:off x="1219200" y="6273800"/>
+            <a:ext cx="1270000" cy="203200"/>
+          </a:xfrm>
+          <a:prstGeom prst="rect">
+            <a:avLst/>
+          </a:prstGeom>
+          <a:noFill/>
+        </p:spPr>
+        <p:txBody>
+          <a:bodyPr wrap="square" lIns="0" tIns="0" rIns="0" bIns="0" anchor="t"/>
+          <a:lstStyle/>
+          <a:p>
+            <a:pPr algn="l"/>
+            <a:r>
+              <a:rPr lang="de-DE" sz="1000" dirty="0">
+                <a:solidFill>
+                  <a:srgbClr val="A6A6A6"/>
+                </a:solidFill>
+              </a:rPr>
+              <a:t>Motivation</a:t>
+            </a:r>
+          </a:p>
+        </p:txBody>
+      </p:sp>
+      <p:sp>
+        <p:nvSpPr>
+          <p:cNvPr id="7" name="Marker Methodik"/>
+          <p:cNvSpPr/>
+          <p:nvPr/>
+        </p:nvSpPr>
+        <p:spPr>
+          <a:xfrm>
+            <a:off x="2457450" y="6140450"/>
+            <a:ext cx="63500" cy="63500"/>
+          </a:xfrm>
+          <a:prstGeom prst="ellipse">
+            <a:avLst/>
+          </a:prstGeom>
+          <a:solidFill>
+            <a:srgbClr val="A6A6A6"/>
+          </a:solidFill>
+          <a:ln>
+            <a:noFill/>
+          </a:ln>
+        </p:spPr>
+        <p:txBody>
+          <a:bodyPr/>
+          <a:lstStyle/>
+          <a:p>
+            <a:endParaRPr lang="de-DE"/>
+          </a:p>
+        </p:txBody>
+      </p:sp>
+      <p:sp>
+        <p:nvSpPr>
+          <p:cNvPr id="8" name="Label Methodik"/>
+          <p:cNvSpPr txBox="1"/>
+          <p:nvPr/>
+        </p:nvSpPr>
+        <p:spPr>
+          <a:xfrm>
+            <a:off x="1854200" y="6273800"/>
+            <a:ext cx="1270000" cy="203200"/>
+          </a:xfrm>
+          <a:prstGeom prst="rect">
+            <a:avLst/>
+          </a:prstGeom>
+          <a:noFill/>
+        </p:spPr>
+        <p:txBody>
+          <a:bodyPr wrap="square" lIns="0" tIns="0" rIns="0" bIns="0" anchor="t"/>
+          <a:lstStyle/>
+          <a:p>
+            <a:pPr algn="ctr"/>
+            <a:r>
+              <a:rPr lang="de-DE" sz="1000" dirty="0">
+                <a:solidFill>
+                  <a:srgbClr val="A6A6A6"/>
+                </a:solidFill>
+              </a:rPr>
+              <a:t>Methodik</a:t>
+            </a:r>
+          </a:p>
+        </p:txBody>
+      </p:sp>
+      <p:sp>
+        <p:nvSpPr>
+          <p:cNvPr id="9" name="Marker Systeme"/>
+          <p:cNvSpPr/>
+          <p:nvPr/>
+        </p:nvSpPr>
+        <p:spPr>
+          <a:xfrm>
+            <a:off x="3714750" y="6127750"/>
+            <a:ext cx="88900" cy="88900"/>
+          </a:xfrm>
+          <a:prstGeom prst="ellipse">
+            <a:avLst/>
+          </a:prstGeom>
+          <a:solidFill>
+            <a:srgbClr val="C1002A"/>
+          </a:solidFill>
+          <a:ln>
+            <a:noFill/>
+          </a:ln>
+        </p:spPr>
+        <p:txBody>
+          <a:bodyPr/>
+          <a:lstStyle/>
+          <a:p>
+            <a:endParaRPr lang="de-DE"/>
+          </a:p>
+        </p:txBody>
+      </p:sp>
+      <p:sp>
+        <p:nvSpPr>
+          <p:cNvPr id="10" name="Label Systeme"/>
+          <p:cNvSpPr txBox="1"/>
+          <p:nvPr/>
+        </p:nvSpPr>
+        <p:spPr>
+          <a:xfrm>
+            <a:off x="3124200" y="6273800"/>
+            <a:ext cx="1270000" cy="203200"/>
+          </a:xfrm>
+          <a:prstGeom prst="rect">
+            <a:avLst/>
+          </a:prstGeom>
+          <a:noFill/>
+        </p:spPr>
+        <p:txBody>
+          <a:bodyPr wrap="square" lIns="0" tIns="0" rIns="0" bIns="0" anchor="t"/>
+          <a:lstStyle/>
+          <a:p>
+            <a:pPr algn="ctr"/>
+            <a:r>
+              <a:rPr lang="de-DE" sz="1000" b="1" dirty="0">
+                <a:solidFill>
+                  <a:srgbClr val="C1002A"/>
+                </a:solidFill>
+              </a:rPr>
+              <a:t>Systeme</a:t>
+            </a:r>
+          </a:p>
+        </p:txBody>
+      </p:sp>
+      <p:sp>
+        <p:nvSpPr>
+          <p:cNvPr id="11" name="Marker Untersuchung"/>
+          <p:cNvSpPr/>
+          <p:nvPr/>
+        </p:nvSpPr>
+        <p:spPr>
+          <a:xfrm>
+            <a:off x="4997450" y="6140450"/>
+            <a:ext cx="63500" cy="63500"/>
+          </a:xfrm>
+          <a:prstGeom prst="ellipse">
+            <a:avLst/>
+          </a:prstGeom>
+          <a:solidFill>
+            <a:srgbClr val="A6A6A6"/>
+          </a:solidFill>
+          <a:ln>
+            <a:noFill/>
+          </a:ln>
+        </p:spPr>
+        <p:txBody>
+          <a:bodyPr/>
+          <a:lstStyle/>
+          <a:p>
+            <a:endParaRPr lang="de-DE"/>
+          </a:p>
+        </p:txBody>
+      </p:sp>
+      <p:sp>
+        <p:nvSpPr>
+          <p:cNvPr id="12" name="Label Untersuchung"/>
+          <p:cNvSpPr txBox="1"/>
+          <p:nvPr/>
+        </p:nvSpPr>
+        <p:spPr>
+          <a:xfrm>
+            <a:off x="4394200" y="6273800"/>
+            <a:ext cx="1270000" cy="203200"/>
+          </a:xfrm>
+          <a:prstGeom prst="rect">
+            <a:avLst/>
+          </a:prstGeom>
+          <a:noFill/>
+        </p:spPr>
+        <p:txBody>
+          <a:bodyPr wrap="square" lIns="0" tIns="0" rIns="0" bIns="0" anchor="t"/>
+          <a:lstStyle/>
+          <a:p>
+            <a:pPr algn="ctr"/>
+            <a:r>
+              <a:rPr lang="de-DE" sz="1000" dirty="0">
+                <a:solidFill>
+                  <a:srgbClr val="A6A6A6"/>
+                </a:solidFill>
+              </a:rPr>
+              <a:t>Untersuchung</a:t>
+            </a:r>
+          </a:p>
+        </p:txBody>
+      </p:sp>
+      <p:sp>
+        <p:nvSpPr>
+          <p:cNvPr id="13" name="Marker Fazit"/>
+          <p:cNvSpPr/>
+          <p:nvPr/>
+        </p:nvSpPr>
+        <p:spPr>
+          <a:xfrm>
+            <a:off x="6267450" y="6140450"/>
+            <a:ext cx="63500" cy="63500"/>
+          </a:xfrm>
+          <a:prstGeom prst="ellipse">
+            <a:avLst/>
+          </a:prstGeom>
+          <a:solidFill>
+            <a:srgbClr val="A6A6A6"/>
+          </a:solidFill>
+          <a:ln>
+            <a:noFill/>
+          </a:ln>
+        </p:spPr>
+        <p:txBody>
+          <a:bodyPr/>
+          <a:lstStyle/>
+          <a:p>
+            <a:endParaRPr lang="de-DE"/>
+          </a:p>
+        </p:txBody>
+      </p:sp>
+      <p:sp>
+        <p:nvSpPr>
+          <p:cNvPr id="14" name="Label Fazit"/>
+          <p:cNvSpPr txBox="1"/>
+          <p:nvPr/>
+        </p:nvSpPr>
+        <p:spPr>
+          <a:xfrm>
+            <a:off x="5029200" y="6273800"/>
+            <a:ext cx="1270000" cy="203200"/>
+          </a:xfrm>
+          <a:prstGeom prst="rect">
+            <a:avLst/>
+          </a:prstGeom>
+          <a:noFill/>
+        </p:spPr>
+        <p:txBody>
+          <a:bodyPr wrap="square" lIns="0" tIns="0" rIns="0" bIns="0" anchor="t"/>
+          <a:lstStyle/>
+          <a:p>
+            <a:pPr algn="r"/>
+            <a:r>
+              <a:rPr lang="de-DE" sz="1000" dirty="0">
+                <a:solidFill>
+                  <a:srgbClr val="A6A6A6"/>
+                </a:solidFill>
+              </a:rPr>
+              <a:t>Fazit</a:t>
+            </a:r>
+          </a:p>
+        </p:txBody>
+      </p:sp>
+      <p:sp>
+        <p:nvSpPr>
+          <p:cNvPr id="56" name="Marke Nextflow"/>
+          <p:cNvSpPr/>
+          <p:nvPr/>
+        </p:nvSpPr>
+        <p:spPr>
+          <a:xfrm>
+            <a:off x="1219200" y="3378200"/>
+            <a:ext cx="228600" cy="38100"/>
+          </a:xfrm>
+          <a:prstGeom prst="rect">
+            <a:avLst/>
+          </a:prstGeom>
+          <a:solidFill>
+            <a:srgbClr val="C1002A"/>
+          </a:solidFill>
+          <a:ln>
+            <a:noFill/>
+          </a:ln>
+        </p:spPr>
+        <p:txBody>
+          <a:bodyPr/>
+          <a:lstStyle/>
+          <a:p>
+            <a:endParaRPr lang="de-DE"/>
+          </a:p>
+        </p:txBody>
+      </p:sp>
+      <p:sp>
+        <p:nvSpPr>
+          <p:cNvPr id="57" name="System Nextflow"/>
+          <p:cNvSpPr txBox="1"/>
+          <p:nvPr/>
+        </p:nvSpPr>
+        <p:spPr>
+          <a:xfrm>
+            <a:off x="1219200" y="3492500"/>
+            <a:ext cx="1833880" cy="279400"/>
+          </a:xfrm>
+          <a:prstGeom prst="rect">
+            <a:avLst/>
+          </a:prstGeom>
+          <a:noFill/>
+        </p:spPr>
+        <p:txBody>
+          <a:bodyPr wrap="square" lIns="0" tIns="0" rIns="0" bIns="0" anchor="t"/>
+          <a:lstStyle/>
+          <a:p>
+            <a:pPr algn="l"/>
+            <a:r>
+              <a:rPr lang="de-DE" sz="1600" b="1" dirty="0">
+                <a:solidFill>
+                  <a:srgbClr val="262626"/>
+                </a:solidFill>
+              </a:rPr>
+              <a:t>Nextflow</a:t>
+            </a:r>
+          </a:p>
+        </p:txBody>
+      </p:sp>
+      <p:sp>
+        <p:nvSpPr>
+          <p:cNvPr id="58" name="Label Parallelisierung Nextflow"/>
+          <p:cNvSpPr txBox="1"/>
+          <p:nvPr/>
+        </p:nvSpPr>
+        <p:spPr>
+          <a:xfrm>
+            <a:off x="1219200" y="3835400"/>
+            <a:ext cx="1833880" cy="177800"/>
+          </a:xfrm>
+          <a:prstGeom prst="rect">
+            <a:avLst/>
+          </a:prstGeom>
+          <a:noFill/>
+        </p:spPr>
+        <p:txBody>
+          <a:bodyPr wrap="square" lIns="0" tIns="0" rIns="0" bIns="0" anchor="t"/>
+          <a:lstStyle/>
+          <a:p>
+            <a:pPr algn="l"/>
+            <a:r>
+              <a:rPr lang="de-DE" sz="1000" spc="100" dirty="0">
+                <a:solidFill>
+                  <a:srgbClr val="595959"/>
+                </a:solidFill>
+              </a:rPr>
+              <a:t>PARALLELISIERUNG</a:t>
+            </a:r>
+          </a:p>
+        </p:txBody>
+      </p:sp>
+      <p:sp>
+        <p:nvSpPr>
+          <p:cNvPr id="59" name="Parallelisierung Nextflow"/>
+          <p:cNvSpPr txBox="1"/>
+          <p:nvPr/>
+        </p:nvSpPr>
+        <p:spPr>
+          <a:xfrm>
+            <a:off x="1219200" y="4013200"/>
+            <a:ext cx="1833880" cy="431800"/>
+          </a:xfrm>
+          <a:prstGeom prst="rect">
+            <a:avLst/>
+          </a:prstGeom>
+          <a:noFill/>
+        </p:spPr>
+        <p:txBody>
+          <a:bodyPr wrap="square" lIns="0" tIns="0" rIns="0" bIns="0" anchor="t"/>
+          <a:lstStyle/>
+          <a:p>
+            <a:pPr algn="l"/>
+            <a:r>
+              <a:rPr lang="de-DE" sz="1200" dirty="0">
+                <a:solidFill>
+                  <a:srgbClr val="262626"/>
+                </a:solidFill>
+              </a:rPr>
+              <a:t>Teilstücke über </a:t>
+            </a:r>
+            <a:r>
+              <a:rPr lang="de-DE" sz="1200" b="1" dirty="0">
+                <a:solidFill>
+                  <a:srgbClr val="262626"/>
+                </a:solidFill>
+              </a:rPr>
+              <a:t>flatten</a:t>
+            </a:r>
+          </a:p>
+        </p:txBody>
+      </p:sp>
+      <p:sp>
+        <p:nvSpPr>
+          <p:cNvPr id="60" name="Label Zusammenführung Nextflow"/>
+          <p:cNvSpPr txBox="1"/>
+          <p:nvPr/>
+        </p:nvSpPr>
+        <p:spPr>
+          <a:xfrm>
+            <a:off x="1219200" y="4521200"/>
+            <a:ext cx="1833880" cy="177800"/>
+          </a:xfrm>
+          <a:prstGeom prst="rect">
+            <a:avLst/>
+          </a:prstGeom>
+          <a:noFill/>
+        </p:spPr>
+        <p:txBody>
+          <a:bodyPr wrap="square" lIns="0" tIns="0" rIns="0" bIns="0" anchor="t"/>
+          <a:lstStyle/>
+          <a:p>
+            <a:pPr algn="l"/>
+            <a:r>
+              <a:rPr lang="de-DE" sz="1000" spc="100" dirty="0">
+                <a:solidFill>
+                  <a:srgbClr val="595959"/>
+                </a:solidFill>
+              </a:rPr>
+              <a:t>ZUSAMMENFÜHRUNG</a:t>
+            </a:r>
+          </a:p>
+        </p:txBody>
+      </p:sp>
+      <p:sp>
+        <p:nvSpPr>
+          <p:cNvPr id="61" name="Zusammenführung Nextflow"/>
+          <p:cNvSpPr txBox="1"/>
+          <p:nvPr/>
+        </p:nvSpPr>
+        <p:spPr>
+          <a:xfrm>
+            <a:off x="1219200" y="4699000"/>
+            <a:ext cx="1833880" cy="431800"/>
+          </a:xfrm>
+          <a:prstGeom prst="rect">
+            <a:avLst/>
+          </a:prstGeom>
+          <a:noFill/>
+        </p:spPr>
+        <p:txBody>
+          <a:bodyPr wrap="square" lIns="0" tIns="0" rIns="0" bIns="0" anchor="t"/>
+          <a:lstStyle/>
+          <a:p>
+            <a:pPr algn="l"/>
+            <a:r>
+              <a:rPr lang="de-DE" sz="1200" dirty="0">
+                <a:solidFill>
+                  <a:srgbClr val="262626"/>
+                </a:solidFill>
+              </a:rPr>
+              <a:t>Ergebnisse über </a:t>
+            </a:r>
+            <a:r>
+              <a:rPr lang="de-DE" sz="1200" b="1" dirty="0">
+                <a:solidFill>
+                  <a:srgbClr val="262626"/>
+                </a:solidFill>
+              </a:rPr>
+              <a:t>collect</a:t>
+            </a:r>
+          </a:p>
+        </p:txBody>
+      </p:sp>
+      <p:sp>
+        <p:nvSpPr>
+          <p:cNvPr id="62" name="Marke StreamFlow"/>
+          <p:cNvSpPr/>
+          <p:nvPr/>
+        </p:nvSpPr>
+        <p:spPr>
+          <a:xfrm>
+            <a:off x="3230880" y="3378200"/>
+            <a:ext cx="228600" cy="38100"/>
+          </a:xfrm>
+          <a:prstGeom prst="rect">
+            <a:avLst/>
+          </a:prstGeom>
+          <a:solidFill>
+            <a:srgbClr val="C1002A"/>
+          </a:solidFill>
+          <a:ln>
+            <a:noFill/>
+          </a:ln>
+        </p:spPr>
+        <p:txBody>
+          <a:bodyPr/>
+          <a:lstStyle/>
+          <a:p>
+            <a:endParaRPr lang="de-DE"/>
+          </a:p>
+        </p:txBody>
+      </p:sp>
+      <p:sp>
+        <p:nvSpPr>
+          <p:cNvPr id="63" name="System StreamFlow"/>
+          <p:cNvSpPr txBox="1"/>
+          <p:nvPr/>
+        </p:nvSpPr>
+        <p:spPr>
+          <a:xfrm>
+            <a:off x="3230880" y="3492500"/>
+            <a:ext cx="1833880" cy="279400"/>
+          </a:xfrm>
+          <a:prstGeom prst="rect">
+            <a:avLst/>
+          </a:prstGeom>
+          <a:noFill/>
+        </p:spPr>
+        <p:txBody>
+          <a:bodyPr wrap="square" lIns="0" tIns="0" rIns="0" bIns="0" anchor="t"/>
+          <a:lstStyle/>
+          <a:p>
+            <a:pPr algn="l"/>
+            <a:r>
+              <a:rPr lang="de-DE" sz="1600" b="1" dirty="0">
+                <a:solidFill>
+                  <a:srgbClr val="262626"/>
+                </a:solidFill>
+              </a:rPr>
+              <a:t>StreamFlow</a:t>
+            </a:r>
+          </a:p>
+        </p:txBody>
+      </p:sp>
+      <p:sp>
+        <p:nvSpPr>
+          <p:cNvPr id="64" name="Label Parallelisierung StreamFlow"/>
+          <p:cNvSpPr txBox="1"/>
+          <p:nvPr/>
+        </p:nvSpPr>
+        <p:spPr>
+          <a:xfrm>
+            <a:off x="3230880" y="3835400"/>
+            <a:ext cx="1833880" cy="177800"/>
+          </a:xfrm>
+          <a:prstGeom prst="rect">
+            <a:avLst/>
+          </a:prstGeom>
+          <a:noFill/>
+        </p:spPr>
+        <p:txBody>
+          <a:bodyPr wrap="square" lIns="0" tIns="0" rIns="0" bIns="0" anchor="t"/>
+          <a:lstStyle/>
+          <a:p>
+            <a:pPr algn="l"/>
+            <a:r>
+              <a:rPr lang="de-DE" sz="1000" spc="100" dirty="0">
+                <a:solidFill>
+                  <a:srgbClr val="595959"/>
+                </a:solidFill>
+              </a:rPr>
+              <a:t>PARALLELISIERUNG</a:t>
+            </a:r>
+          </a:p>
+        </p:txBody>
+      </p:sp>
+      <p:sp>
+        <p:nvSpPr>
+          <p:cNvPr id="65" name="Parallelisierung StreamFlow"/>
+          <p:cNvSpPr txBox="1"/>
+          <p:nvPr/>
+        </p:nvSpPr>
+        <p:spPr>
+          <a:xfrm>
+            <a:off x="3230880" y="4013200"/>
+            <a:ext cx="1833880" cy="431800"/>
+          </a:xfrm>
+          <a:prstGeom prst="rect">
+            <a:avLst/>
+          </a:prstGeom>
+          <a:noFill/>
+        </p:spPr>
+        <p:txBody>
+          <a:bodyPr wrap="square" lIns="0" tIns="0" rIns="0" bIns="0" anchor="t"/>
+          <a:lstStyle/>
+          <a:p>
+            <a:pPr algn="l"/>
+            <a:r>
+              <a:rPr lang="de-DE" sz="1200" dirty="0">
+                <a:solidFill>
+                  <a:srgbClr val="262626"/>
+                </a:solidFill>
+              </a:rPr>
+              <a:t>CWL </a:t>
+            </a:r>
+            <a:r>
+              <a:rPr lang="de-DE" sz="1200" b="1" dirty="0">
+                <a:solidFill>
+                  <a:srgbClr val="262626"/>
+                </a:solidFill>
+              </a:rPr>
+              <a:t>scatter</a:t>
+            </a:r>
+          </a:p>
+        </p:txBody>
+      </p:sp>
+      <p:sp>
+        <p:nvSpPr>
+          <p:cNvPr id="66" name="Label Zusammenführung StreamFlow"/>
+          <p:cNvSpPr txBox="1"/>
+          <p:nvPr/>
+        </p:nvSpPr>
+        <p:spPr>
+          <a:xfrm>
+            <a:off x="3230880" y="4521200"/>
+            <a:ext cx="1833880" cy="177800"/>
+          </a:xfrm>
+          <a:prstGeom prst="rect">
+            <a:avLst/>
+          </a:prstGeom>
+          <a:noFill/>
+        </p:spPr>
+        <p:txBody>
+          <a:bodyPr wrap="square" lIns="0" tIns="0" rIns="0" bIns="0" anchor="t"/>
+          <a:lstStyle/>
+          <a:p>
+            <a:pPr algn="l"/>
+            <a:r>
+              <a:rPr lang="de-DE" sz="1000" spc="100" dirty="0">
+                <a:solidFill>
+                  <a:srgbClr val="595959"/>
+                </a:solidFill>
+              </a:rPr>
+              <a:t>ZUSAMMENFÜHRUNG</a:t>
+            </a:r>
+          </a:p>
+        </p:txBody>
+      </p:sp>
+      <p:sp>
+        <p:nvSpPr>
+          <p:cNvPr id="67" name="Zusammenführung StreamFlow"/>
+          <p:cNvSpPr txBox="1"/>
+          <p:nvPr/>
+        </p:nvSpPr>
+        <p:spPr>
+          <a:xfrm>
+            <a:off x="3230880" y="4699000"/>
+            <a:ext cx="1833880" cy="431800"/>
+          </a:xfrm>
+          <a:prstGeom prst="rect">
+            <a:avLst/>
+          </a:prstGeom>
+          <a:noFill/>
+        </p:spPr>
+        <p:txBody>
+          <a:bodyPr wrap="square" lIns="0" tIns="0" rIns="0" bIns="0" anchor="t"/>
+          <a:lstStyle/>
+          <a:p>
+            <a:pPr algn="l"/>
+            <a:r>
+              <a:rPr lang="de-DE" sz="1200" dirty="0">
+                <a:solidFill>
+                  <a:srgbClr val="262626"/>
+                </a:solidFill>
+              </a:rPr>
+              <a:t>Aggregate nach allen Ergebnissen</a:t>
+            </a:r>
+          </a:p>
+        </p:txBody>
+      </p:sp>
+      <p:sp>
+        <p:nvSpPr>
+          <p:cNvPr id="68" name="Marke Merlin"/>
+          <p:cNvSpPr/>
+          <p:nvPr/>
+        </p:nvSpPr>
+        <p:spPr>
+          <a:xfrm>
+            <a:off x="5242560" y="3378200"/>
+            <a:ext cx="228600" cy="38100"/>
+          </a:xfrm>
+          <a:prstGeom prst="rect">
+            <a:avLst/>
+          </a:prstGeom>
+          <a:solidFill>
+            <a:srgbClr val="C1002A"/>
+          </a:solidFill>
+          <a:ln>
+            <a:noFill/>
+          </a:ln>
+        </p:spPr>
+        <p:txBody>
+          <a:bodyPr/>
+          <a:lstStyle/>
+          <a:p>
+            <a:endParaRPr lang="de-DE"/>
+          </a:p>
+        </p:txBody>
+      </p:sp>
+      <p:sp>
+        <p:nvSpPr>
+          <p:cNvPr id="69" name="System Merlin"/>
+          <p:cNvSpPr txBox="1"/>
+          <p:nvPr/>
+        </p:nvSpPr>
+        <p:spPr>
+          <a:xfrm>
+            <a:off x="5242560" y="3492500"/>
+            <a:ext cx="1833880" cy="279400"/>
+          </a:xfrm>
+          <a:prstGeom prst="rect">
+            <a:avLst/>
+          </a:prstGeom>
+          <a:noFill/>
+        </p:spPr>
+        <p:txBody>
+          <a:bodyPr wrap="square" lIns="0" tIns="0" rIns="0" bIns="0" anchor="t"/>
+          <a:lstStyle/>
+          <a:p>
+            <a:pPr algn="l"/>
+            <a:r>
+              <a:rPr lang="de-DE" sz="1600" b="1" dirty="0">
+                <a:solidFill>
+                  <a:srgbClr val="262626"/>
+                </a:solidFill>
+              </a:rPr>
+              <a:t>Merlin</a:t>
+            </a:r>
+          </a:p>
+        </p:txBody>
+      </p:sp>
+      <p:sp>
+        <p:nvSpPr>
+          <p:cNvPr id="70" name="Label Parallelisierung Merlin"/>
+          <p:cNvSpPr txBox="1"/>
+          <p:nvPr/>
+        </p:nvSpPr>
+        <p:spPr>
+          <a:xfrm>
+            <a:off x="5242560" y="3835400"/>
+            <a:ext cx="1833880" cy="177800"/>
+          </a:xfrm>
+          <a:prstGeom prst="rect">
+            <a:avLst/>
+          </a:prstGeom>
+          <a:noFill/>
+        </p:spPr>
+        <p:txBody>
+          <a:bodyPr wrap="square" lIns="0" tIns="0" rIns="0" bIns="0" anchor="t"/>
+          <a:lstStyle/>
+          <a:p>
+            <a:pPr algn="l"/>
+            <a:r>
+              <a:rPr lang="de-DE" sz="1000" spc="100" dirty="0">
+                <a:solidFill>
+                  <a:srgbClr val="595959"/>
+                </a:solidFill>
+              </a:rPr>
+              <a:t>PARALLELISIERUNG</a:t>
+            </a:r>
+          </a:p>
+        </p:txBody>
+      </p:sp>
+      <p:sp>
+        <p:nvSpPr>
+          <p:cNvPr id="71" name="Parallelisierung Merlin"/>
+          <p:cNvSpPr txBox="1"/>
+          <p:nvPr/>
+        </p:nvSpPr>
+        <p:spPr>
+          <a:xfrm>
+            <a:off x="5242560" y="4013200"/>
+            <a:ext cx="1833880" cy="431800"/>
+          </a:xfrm>
+          <a:prstGeom prst="rect">
+            <a:avLst/>
+          </a:prstGeom>
+          <a:noFill/>
+        </p:spPr>
+        <p:txBody>
+          <a:bodyPr wrap="square" lIns="0" tIns="0" rIns="0" bIns="0" anchor="t"/>
+          <a:lstStyle/>
+          <a:p>
+            <a:pPr algn="l"/>
+            <a:r>
+              <a:rPr lang="de-DE" sz="1200" dirty="0">
+                <a:solidFill>
+                  <a:srgbClr val="262626"/>
+                </a:solidFill>
+              </a:rPr>
+              <a:t>Vervielfachung über </a:t>
+            </a:r>
+            <a:r>
+              <a:rPr lang="de-DE" sz="1200" b="1" dirty="0">
+                <a:solidFill>
+                  <a:srgbClr val="262626"/>
+                </a:solidFill>
+              </a:rPr>
+              <a:t>CHUNK</a:t>
+            </a:r>
+          </a:p>
+        </p:txBody>
+      </p:sp>
+      <p:sp>
+        <p:nvSpPr>
+          <p:cNvPr id="72" name="Label Zusammenführung Merlin"/>
+          <p:cNvSpPr txBox="1"/>
+          <p:nvPr/>
+        </p:nvSpPr>
+        <p:spPr>
+          <a:xfrm>
+            <a:off x="5242560" y="4521200"/>
+            <a:ext cx="1833880" cy="177800"/>
+          </a:xfrm>
+          <a:prstGeom prst="rect">
+            <a:avLst/>
+          </a:prstGeom>
+          <a:noFill/>
+        </p:spPr>
+        <p:txBody>
+          <a:bodyPr wrap="square" lIns="0" tIns="0" rIns="0" bIns="0" anchor="t"/>
+          <a:lstStyle/>
+          <a:p>
+            <a:pPr algn="l"/>
+            <a:r>
+              <a:rPr lang="de-DE" sz="1000" spc="100" dirty="0">
+                <a:solidFill>
+                  <a:srgbClr val="595959"/>
+                </a:solidFill>
+              </a:rPr>
+              <a:t>ZUSAMMENFÜHRUNG</a:t>
+            </a:r>
+          </a:p>
+        </p:txBody>
+      </p:sp>
+      <p:sp>
+        <p:nvSpPr>
+          <p:cNvPr id="73" name="Zusammenführung Merlin"/>
+          <p:cNvSpPr txBox="1"/>
+          <p:nvPr/>
+        </p:nvSpPr>
+        <p:spPr>
+          <a:xfrm>
+            <a:off x="5242560" y="4699000"/>
+            <a:ext cx="1833880" cy="431800"/>
+          </a:xfrm>
+          <a:prstGeom prst="rect">
+            <a:avLst/>
+          </a:prstGeom>
+          <a:noFill/>
+        </p:spPr>
+        <p:txBody>
+          <a:bodyPr wrap="square" lIns="0" tIns="0" rIns="0" bIns="0" anchor="t"/>
+          <a:lstStyle/>
+          <a:p>
+            <a:pPr algn="l"/>
+            <a:r>
+              <a:rPr lang="de-DE" sz="1200" dirty="0">
+                <a:solidFill>
+                  <a:srgbClr val="262626"/>
+                </a:solidFill>
+              </a:rPr>
+              <a:t>Abhängigkeit von allen Compute-Instanzen</a:t>
+            </a:r>
+          </a:p>
+        </p:txBody>
+      </p:sp>
+      <p:sp>
+        <p:nvSpPr>
+          <p:cNvPr id="74" name="Marke Pegasus"/>
+          <p:cNvSpPr/>
+          <p:nvPr/>
+        </p:nvSpPr>
+        <p:spPr>
+          <a:xfrm>
+            <a:off x="7254240" y="3378200"/>
+            <a:ext cx="228600" cy="38100"/>
+          </a:xfrm>
+          <a:prstGeom prst="rect">
+            <a:avLst/>
+          </a:prstGeom>
+          <a:solidFill>
+            <a:srgbClr val="C1002A"/>
+          </a:solidFill>
+          <a:ln>
+            <a:noFill/>
+          </a:ln>
+        </p:spPr>
+        <p:txBody>
+          <a:bodyPr/>
+          <a:lstStyle/>
+          <a:p>
+            <a:endParaRPr lang="de-DE"/>
+          </a:p>
+        </p:txBody>
+      </p:sp>
+      <p:sp>
+        <p:nvSpPr>
+          <p:cNvPr id="75" name="System Pegasus"/>
+          <p:cNvSpPr txBox="1"/>
+          <p:nvPr/>
+        </p:nvSpPr>
+        <p:spPr>
+          <a:xfrm>
+            <a:off x="7254240" y="3492500"/>
+            <a:ext cx="1833880" cy="279400"/>
+          </a:xfrm>
+          <a:prstGeom prst="rect">
+            <a:avLst/>
+          </a:prstGeom>
+          <a:noFill/>
+        </p:spPr>
+        <p:txBody>
+          <a:bodyPr wrap="square" lIns="0" tIns="0" rIns="0" bIns="0" anchor="t"/>
+          <a:lstStyle/>
+          <a:p>
+            <a:pPr algn="l"/>
+            <a:r>
+              <a:rPr lang="de-DE" sz="1600" b="1" dirty="0">
+                <a:solidFill>
+                  <a:srgbClr val="262626"/>
+                </a:solidFill>
+              </a:rPr>
+              <a:t>Pegasus</a:t>
+            </a:r>
+          </a:p>
+        </p:txBody>
+      </p:sp>
+      <p:sp>
+        <p:nvSpPr>
+          <p:cNvPr id="76" name="Label Parallelisierung Pegasus"/>
+          <p:cNvSpPr txBox="1"/>
+          <p:nvPr/>
+        </p:nvSpPr>
+        <p:spPr>
+          <a:xfrm>
+            <a:off x="7254240" y="3835400"/>
+            <a:ext cx="1833880" cy="177800"/>
+          </a:xfrm>
+          <a:prstGeom prst="rect">
+            <a:avLst/>
+          </a:prstGeom>
+          <a:noFill/>
+        </p:spPr>
+        <p:txBody>
+          <a:bodyPr wrap="square" lIns="0" tIns="0" rIns="0" bIns="0" anchor="t"/>
+          <a:lstStyle/>
+          <a:p>
+            <a:pPr algn="l"/>
+            <a:r>
+              <a:rPr lang="de-DE" sz="1000" spc="100" dirty="0">
+                <a:solidFill>
+                  <a:srgbClr val="595959"/>
+                </a:solidFill>
+              </a:rPr>
+              <a:t>PARALLELISIERUNG</a:t>
+            </a:r>
+          </a:p>
+        </p:txBody>
+      </p:sp>
+      <p:sp>
+        <p:nvSpPr>
+          <p:cNvPr id="77" name="Parallelisierung Pegasus"/>
+          <p:cNvSpPr txBox="1"/>
+          <p:nvPr/>
+        </p:nvSpPr>
+        <p:spPr>
+          <a:xfrm>
+            <a:off x="7254240" y="4013200"/>
+            <a:ext cx="1833880" cy="431800"/>
+          </a:xfrm>
+          <a:prstGeom prst="rect">
+            <a:avLst/>
+          </a:prstGeom>
+          <a:noFill/>
+        </p:spPr>
+        <p:txBody>
+          <a:bodyPr wrap="square" lIns="0" tIns="0" rIns="0" bIns="0" anchor="t"/>
+          <a:lstStyle/>
+          <a:p>
+            <a:pPr algn="l"/>
+            <a:r>
+              <a:rPr lang="de-DE" sz="1200" dirty="0">
+                <a:solidFill>
+                  <a:srgbClr val="262626"/>
+                </a:solidFill>
+              </a:rPr>
+              <a:t>Compute-Jobs durch Python-Schleife</a:t>
+            </a:r>
+          </a:p>
+        </p:txBody>
+      </p:sp>
+      <p:sp>
+        <p:nvSpPr>
+          <p:cNvPr id="78" name="Label Zusammenführung Pegasus"/>
+          <p:cNvSpPr txBox="1"/>
+          <p:nvPr/>
+        </p:nvSpPr>
+        <p:spPr>
+          <a:xfrm>
+            <a:off x="7254240" y="4521200"/>
+            <a:ext cx="1833880" cy="177800"/>
+          </a:xfrm>
+          <a:prstGeom prst="rect">
+            <a:avLst/>
+          </a:prstGeom>
+          <a:noFill/>
+        </p:spPr>
+        <p:txBody>
+          <a:bodyPr wrap="square" lIns="0" tIns="0" rIns="0" bIns="0" anchor="t"/>
+          <a:lstStyle/>
+          <a:p>
+            <a:pPr algn="l"/>
+            <a:r>
+              <a:rPr lang="de-DE" sz="1000" spc="100" dirty="0">
+                <a:solidFill>
+                  <a:srgbClr val="595959"/>
+                </a:solidFill>
+              </a:rPr>
+              <a:t>ZUSAMMENFÜHRUNG</a:t>
+            </a:r>
+          </a:p>
+        </p:txBody>
+      </p:sp>
+      <p:sp>
+        <p:nvSpPr>
+          <p:cNvPr id="79" name="Zusammenführung Pegasus"/>
+          <p:cNvSpPr txBox="1"/>
+          <p:nvPr/>
+        </p:nvSpPr>
+        <p:spPr>
+          <a:xfrm>
+            <a:off x="7254240" y="4699000"/>
+            <a:ext cx="1833880" cy="431800"/>
+          </a:xfrm>
+          <a:prstGeom prst="rect">
+            <a:avLst/>
+          </a:prstGeom>
+          <a:noFill/>
+        </p:spPr>
+        <p:txBody>
+          <a:bodyPr wrap="square" lIns="0" tIns="0" rIns="0" bIns="0" anchor="t"/>
+          <a:lstStyle/>
+          <a:p>
+            <a:pPr algn="l"/>
+            <a:r>
+              <a:rPr lang="de-DE" sz="1200" dirty="0">
+                <a:solidFill>
+                  <a:srgbClr val="262626"/>
+                </a:solidFill>
+              </a:rPr>
+              <a:t>Aggregate benötigt alle Ergebnisdateien</a:t>
+            </a:r>
+          </a:p>
+        </p:txBody>
+      </p:sp>
+      <p:sp>
+        <p:nvSpPr>
+          <p:cNvPr id="80" name="Marke AiiDA"/>
+          <p:cNvSpPr/>
+          <p:nvPr/>
+        </p:nvSpPr>
+        <p:spPr>
+          <a:xfrm>
+            <a:off x="9265920" y="3378200"/>
+            <a:ext cx="228600" cy="38100"/>
+          </a:xfrm>
+          <a:prstGeom prst="rect">
+            <a:avLst/>
+          </a:prstGeom>
+          <a:solidFill>
+            <a:srgbClr val="C1002A"/>
+          </a:solidFill>
+          <a:ln>
+            <a:noFill/>
+          </a:ln>
+        </p:spPr>
+        <p:txBody>
+          <a:bodyPr/>
+          <a:lstStyle/>
+          <a:p>
+            <a:endParaRPr lang="de-DE"/>
+          </a:p>
+        </p:txBody>
+      </p:sp>
+      <p:sp>
+        <p:nvSpPr>
+          <p:cNvPr id="81" name="System AiiDA"/>
+          <p:cNvSpPr txBox="1"/>
+          <p:nvPr/>
+        </p:nvSpPr>
+        <p:spPr>
+          <a:xfrm>
+            <a:off x="9265920" y="3492500"/>
+            <a:ext cx="1833880" cy="279400"/>
+          </a:xfrm>
+          <a:prstGeom prst="rect">
+            <a:avLst/>
+          </a:prstGeom>
+          <a:noFill/>
+        </p:spPr>
+        <p:txBody>
+          <a:bodyPr wrap="square" lIns="0" tIns="0" rIns="0" bIns="0" anchor="t"/>
+          <a:lstStyle/>
+          <a:p>
+            <a:pPr algn="l"/>
+            <a:r>
+              <a:rPr lang="de-DE" sz="1600" b="1" dirty="0">
+                <a:solidFill>
+                  <a:srgbClr val="262626"/>
+                </a:solidFill>
+              </a:rPr>
+              <a:t>AiiDA</a:t>
+            </a:r>
+          </a:p>
+        </p:txBody>
+      </p:sp>
+      <p:sp>
+        <p:nvSpPr>
+          <p:cNvPr id="82" name="Label Parallelisierung AiiDA"/>
+          <p:cNvSpPr txBox="1"/>
+          <p:nvPr/>
+        </p:nvSpPr>
+        <p:spPr>
+          <a:xfrm>
+            <a:off x="9265920" y="3835400"/>
+            <a:ext cx="1833880" cy="177800"/>
+          </a:xfrm>
+          <a:prstGeom prst="rect">
+            <a:avLst/>
+          </a:prstGeom>
+          <a:noFill/>
+        </p:spPr>
+        <p:txBody>
+          <a:bodyPr wrap="square" lIns="0" tIns="0" rIns="0" bIns="0" anchor="t"/>
+          <a:lstStyle/>
+          <a:p>
+            <a:pPr algn="l"/>
+            <a:r>
+              <a:rPr lang="de-DE" sz="1000" spc="100" dirty="0">
+                <a:solidFill>
+                  <a:srgbClr val="595959"/>
+                </a:solidFill>
+              </a:rPr>
+              <a:t>PARALLELISIERUNG</a:t>
+            </a:r>
+          </a:p>
+        </p:txBody>
+      </p:sp>
+      <p:sp>
+        <p:nvSpPr>
+          <p:cNvPr id="83" name="Parallelisierung AiiDA"/>
+          <p:cNvSpPr txBox="1"/>
+          <p:nvPr/>
+        </p:nvSpPr>
+        <p:spPr>
+          <a:xfrm>
+            <a:off x="9265920" y="4013200"/>
+            <a:ext cx="1833880" cy="431800"/>
+          </a:xfrm>
+          <a:prstGeom prst="rect">
+            <a:avLst/>
+          </a:prstGeom>
+          <a:noFill/>
+        </p:spPr>
+        <p:txBody>
+          <a:bodyPr wrap="square" lIns="0" tIns="0" rIns="0" bIns="0" anchor="t"/>
+          <a:lstStyle/>
+          <a:p>
+            <a:pPr algn="l"/>
+            <a:r>
+              <a:rPr lang="de-DE" sz="1200" dirty="0">
+                <a:solidFill>
+                  <a:srgbClr val="262626"/>
+                </a:solidFill>
+              </a:rPr>
+              <a:t>Einreichung aus Python-Schleife</a:t>
+            </a:r>
+          </a:p>
+        </p:txBody>
+      </p:sp>
+      <p:sp>
+        <p:nvSpPr>
+          <p:cNvPr id="84" name="Label Zusammenführung AiiDA"/>
+          <p:cNvSpPr txBox="1"/>
+          <p:nvPr/>
+        </p:nvSpPr>
+        <p:spPr>
+          <a:xfrm>
+            <a:off x="9265920" y="4521200"/>
+            <a:ext cx="1833880" cy="177800"/>
+          </a:xfrm>
+          <a:prstGeom prst="rect">
+            <a:avLst/>
+          </a:prstGeom>
+          <a:noFill/>
+        </p:spPr>
+        <p:txBody>
+          <a:bodyPr wrap="square" lIns="0" tIns="0" rIns="0" bIns="0" anchor="t"/>
+          <a:lstStyle/>
+          <a:p>
+            <a:pPr algn="l"/>
+            <a:r>
+              <a:rPr lang="de-DE" sz="1000" spc="100" dirty="0">
+                <a:solidFill>
+                  <a:srgbClr val="595959"/>
+                </a:solidFill>
+              </a:rPr>
+              <a:t>ZUSAMMENFÜHRUNG</a:t>
+            </a:r>
+          </a:p>
+        </p:txBody>
+      </p:sp>
+      <p:sp>
+        <p:nvSpPr>
+          <p:cNvPr id="85" name="Zusammenführung AiiDA"/>
+          <p:cNvSpPr txBox="1"/>
+          <p:nvPr/>
+        </p:nvSpPr>
+        <p:spPr>
+          <a:xfrm>
+            <a:off x="9265920" y="4699000"/>
+            <a:ext cx="1833880" cy="431800"/>
+          </a:xfrm>
+          <a:prstGeom prst="rect">
+            <a:avLst/>
+          </a:prstGeom>
+          <a:noFill/>
+        </p:spPr>
+        <p:txBody>
+          <a:bodyPr wrap="square" lIns="0" tIns="0" rIns="0" bIns="0" anchor="t"/>
+          <a:lstStyle/>
+          <a:p>
+            <a:pPr algn="l"/>
+            <a:r>
+              <a:rPr lang="de-DE" sz="1200" dirty="0">
+                <a:solidFill>
+                  <a:srgbClr val="262626"/>
+                </a:solidFill>
+              </a:rPr>
+              <a:t>Warten auf alle Prozesse mit </a:t>
+            </a:r>
+            <a:r>
+              <a:rPr lang="de-DE" sz="1200" b="1" dirty="0">
+                <a:solidFill>
+                  <a:srgbClr val="262626"/>
+                </a:solidFill>
+              </a:rPr>
+              <a:t>ToContext</a:t>
+            </a:r>
+          </a:p>
+        </p:txBody>
+      </p:sp>
+    </p:spTree>
+    <p:extLst>
+      <p:ext uri="{BB962C8B-B14F-4D97-AF65-F5344CB8AC3E}">
+        <p14:creationId xmlns:p14="http://schemas.microsoft.com/office/powerpoint/2010/main" val="3355691579"/>
+      </p:ext>
+    </p:extLst>
+  </p:cSld>
+  <p:clrMapOvr>
+    <a:masterClrMapping/>
+  </p:clrMapOvr>
+</p:sld>
+</file>
+
+<file path=ppt/slides/slide11.xml><?xml version="1.0" encoding="utf-8"?>
+<p:sld xmlns:a="http://schemas.openxmlformats.org/drawingml/2006/main" xmlns:r="http://schemas.openxmlformats.org/officeDocument/2006/relationships" xmlns:p="http://schemas.openxmlformats.org/presentationml/2006/main">
+  <p:cSld>
+    <p:spTree>
+      <p:nvGrpSpPr>
+        <p:cNvPr id="1" name=""/>
+        <p:cNvGrpSpPr/>
+        <p:nvPr/>
+      </p:nvGrpSpPr>
+      <p:grpSpPr>
+        <a:xfrm>
+          <a:off x="0" y="0"/>
+          <a:ext cx="0" cy="0"/>
+          <a:chOff x="0" y="0"/>
+          <a:chExt cx="0" cy="0"/>
+        </a:xfrm>
+      </p:grpSpPr>
+      <p:sp>
+        <p:nvSpPr>
+          <p:cNvPr id="2" name="Titel 1">
+            <a:extLst>
+              <a:ext uri="{FF2B5EF4-FFF2-40B4-BE49-F238E27FC236}">
+                <a16:creationId xmlns:a16="http://schemas.microsoft.com/office/drawing/2014/main" id="{499D2F4F-B195-4B9B-922C-9D19B565B42F}"/>
+              </a:ext>
+            </a:extLst>
+          </p:cNvPr>
+          <p:cNvSpPr>
+            <a:spLocks noGrp="1"/>
+          </p:cNvSpPr>
+          <p:nvPr>
+            <p:ph type="title"/>
+          </p:nvPr>
+        </p:nvSpPr>
+        <p:spPr>
+          <a:xfrm>
+            <a:off x="1219200" y="812800"/>
+            <a:ext cx="10058400" cy="787400"/>
+          </a:xfrm>
+        </p:spPr>
+        <p:txBody>
+          <a:bodyPr wrap="square" lIns="0" tIns="0" rIns="0" bIns="0" anchor="t">
+            <a:normAutofit/>
+          </a:bodyPr>
+          <a:lstStyle/>
+          <a:p>
+            <a:pPr algn="l"/>
+            <a:r>
+              <a:rPr lang="de-DE" sz="2600" b="1" dirty="0">
+                <a:solidFill>
+                  <a:srgbClr val="262626"/>
+                </a:solidFill>
+              </a:rPr>
+              <a:t>Unterschiedliche Ausführungsmodelle</a:t>
+            </a:r>
+          </a:p>
+        </p:txBody>
+      </p:sp>
+      <p:sp>
+        <p:nvSpPr>
+          <p:cNvPr id="20" name="Akzentlinie"/>
+          <p:cNvSpPr/>
+          <p:nvPr/>
+        </p:nvSpPr>
+        <p:spPr>
+          <a:xfrm>
+            <a:off x="914400" y="812800"/>
+            <a:ext cx="50800" cy="431800"/>
+          </a:xfrm>
+          <a:prstGeom prst="rect">
+            <a:avLst/>
+          </a:prstGeom>
+          <a:solidFill>
+            <a:srgbClr val="C1002A"/>
+          </a:solidFill>
+          <a:ln>
+            <a:noFill/>
+          </a:ln>
+        </p:spPr>
+        <p:txBody>
+          <a:bodyPr/>
+          <a:lstStyle/>
+          <a:p>
+            <a:endParaRPr lang="de-DE"/>
+          </a:p>
+        </p:txBody>
+      </p:sp>
+      <p:sp>
+        <p:nvSpPr>
+          <p:cNvPr id="15" name="Marke Nextflow"/>
+          <p:cNvSpPr/>
+          <p:nvPr/>
+        </p:nvSpPr>
+        <p:spPr>
+          <a:xfrm>
+            <a:off x="1219200" y="1930400"/>
+            <a:ext cx="228600" cy="38100"/>
+          </a:xfrm>
+          <a:prstGeom prst="rect">
+            <a:avLst/>
+          </a:prstGeom>
+          <a:solidFill>
+            <a:srgbClr val="C1002A"/>
+          </a:solidFill>
+          <a:ln>
+            <a:noFill/>
+          </a:ln>
+        </p:spPr>
+        <p:txBody>
+          <a:bodyPr/>
+          <a:lstStyle/>
+          <a:p>
+            <a:endParaRPr lang="de-DE"/>
+          </a:p>
+        </p:txBody>
+      </p:sp>
+      <p:sp>
+        <p:nvSpPr>
+          <p:cNvPr id="21" name="System Nextflow"/>
+          <p:cNvSpPr txBox="1"/>
+          <p:nvPr/>
+        </p:nvSpPr>
+        <p:spPr>
+          <a:xfrm>
+            <a:off x="1219200" y="2044700"/>
+            <a:ext cx="1833880" cy="279400"/>
+          </a:xfrm>
+          <a:prstGeom prst="rect">
+            <a:avLst/>
+          </a:prstGeom>
+          <a:noFill/>
+        </p:spPr>
+        <p:txBody>
+          <a:bodyPr wrap="square" lIns="0" tIns="0" rIns="0" bIns="0" anchor="t"/>
+          <a:lstStyle/>
+          <a:p>
+            <a:pPr algn="l"/>
+            <a:r>
+              <a:rPr lang="de-DE" sz="1600" b="1" dirty="0">
+                <a:solidFill>
+                  <a:srgbClr val="262626"/>
+                </a:solidFill>
+              </a:rPr>
+              <a:t>Nextflow</a:t>
+            </a:r>
+          </a:p>
+        </p:txBody>
+      </p:sp>
+      <p:sp>
+        <p:nvSpPr>
+          <p:cNvPr id="22" name="Nextflow Workflow"/>
+          <p:cNvSpPr/>
+          <p:nvPr/>
+        </p:nvSpPr>
+        <p:spPr>
+          <a:xfrm>
+            <a:off x="1399540" y="2540000"/>
+            <a:ext cx="1473200" cy="304800"/>
+          </a:xfrm>
+          <a:prstGeom prst="roundRect">
+            <a:avLst>
+              <a:gd name="adj" fmla="val 18000"/>
+            </a:avLst>
+          </a:prstGeom>
+          <a:noFill/>
+          <a:ln w="12700">
+            <a:solidFill>
+              <a:srgbClr val="8C8C8C"/>
+            </a:solidFill>
+          </a:ln>
+        </p:spPr>
+        <p:txBody>
+          <a:bodyPr lIns="0" tIns="0" rIns="0" bIns="0" anchor="ctr"/>
+          <a:lstStyle/>
+          <a:p>
+            <a:pPr algn="ctr"/>
+            <a:r>
+              <a:rPr lang="de-DE" sz="1100" dirty="0">
+                <a:solidFill>
+                  <a:srgbClr val="262626"/>
+                </a:solidFill>
+              </a:rPr>
+              <a:t>Workflow</a:t>
+            </a:r>
+          </a:p>
+        </p:txBody>
+      </p:sp>
+      <p:cxnSp>
+        <p:nvCxnSpPr>
+          <p:cNvPr id="23" name="Nextflow Pfeil 0"/>
+          <p:cNvCxnSpPr/>
+          <p:nvPr/>
+        </p:nvCxnSpPr>
+        <p:spPr>
+          <a:xfrm>
+            <a:off x="2136140" y="2844800"/>
+            <a:ext cx="0" cy="228600"/>
+          </a:xfrm>
+          <a:prstGeom prst="line">
+            <a:avLst/>
+          </a:prstGeom>
+          <a:ln w="9525">
+            <a:solidFill>
+              <a:srgbClr val="8C8C8C"/>
+            </a:solidFill>
+            <a:tailEnd type="triangle" w="sm" len="sm"/>
+          </a:ln>
+        </p:spPr>
+      </p:cxnSp>
+      <p:sp>
+        <p:nvSpPr>
+          <p:cNvPr id="24" name="Nextflow Nextflow-Laufzeit"/>
+          <p:cNvSpPr/>
+          <p:nvPr/>
+        </p:nvSpPr>
+        <p:spPr>
+          <a:xfrm>
+            <a:off x="1399540" y="3073400"/>
+            <a:ext cx="1473200" cy="304800"/>
+          </a:xfrm>
+          <a:prstGeom prst="roundRect">
+            <a:avLst>
+              <a:gd name="adj" fmla="val 18000"/>
+            </a:avLst>
+          </a:prstGeom>
+          <a:noFill/>
+          <a:ln w="12700">
+            <a:solidFill>
+              <a:srgbClr val="8C8C8C"/>
+            </a:solidFill>
+          </a:ln>
+        </p:spPr>
+        <p:txBody>
+          <a:bodyPr lIns="0" tIns="0" rIns="0" bIns="0" anchor="ctr"/>
+          <a:lstStyle/>
+          <a:p>
+            <a:pPr algn="ctr"/>
+            <a:r>
+              <a:rPr lang="de-DE" sz="1100" dirty="0">
+                <a:solidFill>
+                  <a:srgbClr val="262626"/>
+                </a:solidFill>
+              </a:rPr>
+              <a:t>Nextflow-Laufzeit</a:t>
+            </a:r>
+          </a:p>
+        </p:txBody>
+      </p:sp>
+      <p:cxnSp>
+        <p:nvCxnSpPr>
+          <p:cNvPr id="25" name="Nextflow Pfeil 1"/>
+          <p:cNvCxnSpPr/>
+          <p:nvPr/>
+        </p:nvCxnSpPr>
+        <p:spPr>
+          <a:xfrm>
+            <a:off x="2136140" y="3378200"/>
+            <a:ext cx="0" cy="228600"/>
+          </a:xfrm>
+          <a:prstGeom prst="line">
+            <a:avLst/>
+          </a:prstGeom>
+          <a:ln w="9525">
+            <a:solidFill>
+              <a:srgbClr val="8C8C8C"/>
+            </a:solidFill>
+            <a:tailEnd type="triangle" w="sm" len="sm"/>
+          </a:ln>
+        </p:spPr>
+      </p:cxnSp>
+      <p:sp>
+        <p:nvSpPr>
+          <p:cNvPr id="26" name="Nextflow Task"/>
+          <p:cNvSpPr/>
+          <p:nvPr/>
+        </p:nvSpPr>
+        <p:spPr>
+          <a:xfrm>
+            <a:off x="1399540" y="3606800"/>
+            <a:ext cx="1473200" cy="304800"/>
+          </a:xfrm>
+          <a:prstGeom prst="roundRect">
+            <a:avLst>
+              <a:gd name="adj" fmla="val 18000"/>
+            </a:avLst>
+          </a:prstGeom>
+          <a:noFill/>
+          <a:ln w="12700">
+            <a:solidFill>
+              <a:srgbClr val="C1002A"/>
+            </a:solidFill>
+          </a:ln>
+        </p:spPr>
+        <p:txBody>
+          <a:bodyPr lIns="0" tIns="0" rIns="0" bIns="0" anchor="ctr"/>
+          <a:lstStyle/>
+          <a:p>
+            <a:pPr algn="ctr"/>
+            <a:r>
+              <a:rPr lang="de-DE" sz="1100" dirty="0">
+                <a:solidFill>
+                  <a:srgbClr val="C1002A"/>
+                </a:solidFill>
+              </a:rPr>
+              <a:t>Task</a:t>
+            </a:r>
+          </a:p>
+        </p:txBody>
+      </p:sp>
+      <p:sp>
+        <p:nvSpPr>
+          <p:cNvPr id="27" name="Beschreibung Nextflow"/>
+          <p:cNvSpPr txBox="1"/>
+          <p:nvPr/>
+        </p:nvSpPr>
+        <p:spPr>
+          <a:xfrm>
+            <a:off x="1219200" y="4749800"/>
+            <a:ext cx="1833880" cy="381000"/>
+          </a:xfrm>
+          <a:prstGeom prst="rect">
+            <a:avLst/>
+          </a:prstGeom>
+          <a:noFill/>
+        </p:spPr>
+        <p:txBody>
+          <a:bodyPr wrap="square" lIns="0" tIns="0" rIns="0" bIns="0" anchor="t"/>
+          <a:lstStyle/>
+          <a:p>
+            <a:pPr algn="l"/>
+            <a:r>
+              <a:rPr lang="de-DE" sz="1200" i="1" dirty="0">
+                <a:solidFill>
+                  <a:srgbClr val="595959"/>
+                </a:solidFill>
+              </a:rPr>
+              <a:t>Eigene Laufzeit</a:t>
+            </a:r>
+          </a:p>
+        </p:txBody>
+      </p:sp>
+      <p:sp>
+        <p:nvSpPr>
+          <p:cNvPr id="28" name="Marke StreamFlow"/>
+          <p:cNvSpPr/>
+          <p:nvPr/>
+        </p:nvSpPr>
+        <p:spPr>
+          <a:xfrm>
+            <a:off x="3230880" y="1930400"/>
+            <a:ext cx="228600" cy="38100"/>
+          </a:xfrm>
+          <a:prstGeom prst="rect">
+            <a:avLst/>
+          </a:prstGeom>
+          <a:solidFill>
+            <a:srgbClr val="C1002A"/>
+          </a:solidFill>
+          <a:ln>
+            <a:noFill/>
+          </a:ln>
+        </p:spPr>
+        <p:txBody>
+          <a:bodyPr/>
+          <a:lstStyle/>
+          <a:p>
+            <a:endParaRPr lang="de-DE"/>
+          </a:p>
+        </p:txBody>
+      </p:sp>
+      <p:sp>
+        <p:nvSpPr>
+          <p:cNvPr id="29" name="System StreamFlow"/>
+          <p:cNvSpPr txBox="1"/>
+          <p:nvPr/>
+        </p:nvSpPr>
+        <p:spPr>
+          <a:xfrm>
+            <a:off x="3230880" y="2044700"/>
+            <a:ext cx="1833880" cy="279400"/>
+          </a:xfrm>
+          <a:prstGeom prst="rect">
+            <a:avLst/>
+          </a:prstGeom>
+          <a:noFill/>
+        </p:spPr>
+        <p:txBody>
+          <a:bodyPr wrap="square" lIns="0" tIns="0" rIns="0" bIns="0" anchor="t"/>
+          <a:lstStyle/>
+          <a:p>
+            <a:pPr algn="l"/>
+            <a:r>
+              <a:rPr lang="de-DE" sz="1600" b="1" dirty="0">
+                <a:solidFill>
+                  <a:srgbClr val="262626"/>
+                </a:solidFill>
+              </a:rPr>
+              <a:t>StreamFlow</a:t>
+            </a:r>
+          </a:p>
+        </p:txBody>
+      </p:sp>
+      <p:sp>
+        <p:nvSpPr>
+          <p:cNvPr id="30" name="StreamFlow Workflow"/>
+          <p:cNvSpPr/>
+          <p:nvPr/>
+        </p:nvSpPr>
+        <p:spPr>
+          <a:xfrm>
+            <a:off x="3411220" y="2540000"/>
+            <a:ext cx="1473200" cy="304800"/>
+          </a:xfrm>
+          <a:prstGeom prst="roundRect">
+            <a:avLst>
+              <a:gd name="adj" fmla="val 18000"/>
+            </a:avLst>
+          </a:prstGeom>
+          <a:noFill/>
+          <a:ln w="12700">
+            <a:solidFill>
+              <a:srgbClr val="8C8C8C"/>
+            </a:solidFill>
+          </a:ln>
+        </p:spPr>
+        <p:txBody>
+          <a:bodyPr lIns="0" tIns="0" rIns="0" bIns="0" anchor="ctr"/>
+          <a:lstStyle/>
+          <a:p>
+            <a:pPr algn="ctr"/>
+            <a:r>
+              <a:rPr lang="de-DE" sz="1100" dirty="0">
+                <a:solidFill>
+                  <a:srgbClr val="262626"/>
+                </a:solidFill>
+              </a:rPr>
+              <a:t>Workflow</a:t>
+            </a:r>
+          </a:p>
+        </p:txBody>
+      </p:sp>
+      <p:cxnSp>
+        <p:nvCxnSpPr>
+          <p:cNvPr id="31" name="StreamFlow Pfeil 0"/>
+          <p:cNvCxnSpPr/>
+          <p:nvPr/>
+        </p:nvCxnSpPr>
+        <p:spPr>
+          <a:xfrm>
+            <a:off x="4147820" y="2844800"/>
+            <a:ext cx="0" cy="228600"/>
+          </a:xfrm>
+          <a:prstGeom prst="line">
+            <a:avLst/>
+          </a:prstGeom>
+          <a:ln w="9525">
+            <a:solidFill>
+              <a:srgbClr val="8C8C8C"/>
+            </a:solidFill>
+            <a:tailEnd type="triangle" w="sm" len="sm"/>
+          </a:ln>
+        </p:spPr>
+      </p:cxnSp>
+      <p:sp>
+        <p:nvSpPr>
+          <p:cNvPr id="32" name="StreamFlow StreamFlow-Laufzeit"/>
+          <p:cNvSpPr/>
+          <p:nvPr/>
+        </p:nvSpPr>
+        <p:spPr>
+          <a:xfrm>
+            <a:off x="3411220" y="3073400"/>
+            <a:ext cx="1473200" cy="304800"/>
+          </a:xfrm>
+          <a:prstGeom prst="roundRect">
+            <a:avLst>
+              <a:gd name="adj" fmla="val 18000"/>
+            </a:avLst>
+          </a:prstGeom>
+          <a:noFill/>
+          <a:ln w="12700">
+            <a:solidFill>
+              <a:srgbClr val="8C8C8C"/>
+            </a:solidFill>
+          </a:ln>
+        </p:spPr>
+        <p:txBody>
+          <a:bodyPr lIns="0" tIns="0" rIns="0" bIns="0" anchor="ctr"/>
+          <a:lstStyle/>
+          <a:p>
+            <a:pPr algn="ctr"/>
+            <a:r>
+              <a:rPr lang="de-DE" sz="1100" dirty="0">
+                <a:solidFill>
+                  <a:srgbClr val="262626"/>
+                </a:solidFill>
+              </a:rPr>
+              <a:t>StreamFlow-Laufzeit</a:t>
+            </a:r>
+          </a:p>
+        </p:txBody>
+      </p:sp>
+      <p:cxnSp>
+        <p:nvCxnSpPr>
+          <p:cNvPr id="33" name="StreamFlow Pfeil 1"/>
+          <p:cNvCxnSpPr/>
+          <p:nvPr/>
+        </p:nvCxnSpPr>
+        <p:spPr>
+          <a:xfrm>
+            <a:off x="4147820" y="3378200"/>
+            <a:ext cx="0" cy="228600"/>
+          </a:xfrm>
+          <a:prstGeom prst="line">
+            <a:avLst/>
+          </a:prstGeom>
+          <a:ln w="9525">
+            <a:solidFill>
+              <a:srgbClr val="8C8C8C"/>
+            </a:solidFill>
+            <a:tailEnd type="triangle" w="sm" len="sm"/>
+          </a:ln>
+        </p:spPr>
+      </p:cxnSp>
+      <p:sp>
+        <p:nvSpPr>
+          <p:cNvPr id="34" name="StreamFlow Task"/>
+          <p:cNvSpPr/>
+          <p:nvPr/>
+        </p:nvSpPr>
+        <p:spPr>
+          <a:xfrm>
+            <a:off x="3411220" y="3606800"/>
+            <a:ext cx="1473200" cy="304800"/>
+          </a:xfrm>
+          <a:prstGeom prst="roundRect">
+            <a:avLst>
+              <a:gd name="adj" fmla="val 18000"/>
+            </a:avLst>
+          </a:prstGeom>
+          <a:noFill/>
+          <a:ln w="12700">
+            <a:solidFill>
+              <a:srgbClr val="C1002A"/>
+            </a:solidFill>
+          </a:ln>
+        </p:spPr>
+        <p:txBody>
+          <a:bodyPr lIns="0" tIns="0" rIns="0" bIns="0" anchor="ctr"/>
+          <a:lstStyle/>
+          <a:p>
+            <a:pPr algn="ctr"/>
+            <a:r>
+              <a:rPr lang="de-DE" sz="1100" dirty="0">
+                <a:solidFill>
+                  <a:srgbClr val="C1002A"/>
+                </a:solidFill>
+              </a:rPr>
+              <a:t>Task</a:t>
+            </a:r>
+          </a:p>
+        </p:txBody>
+      </p:sp>
+      <p:sp>
+        <p:nvSpPr>
+          <p:cNvPr id="35" name="Beschreibung StreamFlow"/>
+          <p:cNvSpPr txBox="1"/>
+          <p:nvPr/>
+        </p:nvSpPr>
+        <p:spPr>
+          <a:xfrm>
+            <a:off x="3230880" y="4749800"/>
+            <a:ext cx="1833880" cy="381000"/>
+          </a:xfrm>
+          <a:prstGeom prst="rect">
+            <a:avLst/>
+          </a:prstGeom>
+          <a:noFill/>
+        </p:spPr>
+        <p:txBody>
+          <a:bodyPr wrap="square" lIns="0" tIns="0" rIns="0" bIns="0" anchor="t"/>
+          <a:lstStyle/>
+          <a:p>
+            <a:pPr algn="l"/>
+            <a:r>
+              <a:rPr lang="de-DE" sz="1200" i="1" dirty="0">
+                <a:solidFill>
+                  <a:srgbClr val="595959"/>
+                </a:solidFill>
+              </a:rPr>
+              <a:t>Eigene Laufzeit</a:t>
+            </a:r>
+          </a:p>
+        </p:txBody>
+      </p:sp>
+      <p:sp>
+        <p:nvSpPr>
+          <p:cNvPr id="36" name="Marke Merlin"/>
+          <p:cNvSpPr/>
+          <p:nvPr/>
+        </p:nvSpPr>
+        <p:spPr>
+          <a:xfrm>
+            <a:off x="5242560" y="1930400"/>
+            <a:ext cx="228600" cy="38100"/>
+          </a:xfrm>
+          <a:prstGeom prst="rect">
+            <a:avLst/>
+          </a:prstGeom>
+          <a:solidFill>
+            <a:srgbClr val="C1002A"/>
+          </a:solidFill>
+          <a:ln>
+            <a:noFill/>
+          </a:ln>
+        </p:spPr>
+        <p:txBody>
+          <a:bodyPr/>
+          <a:lstStyle/>
+          <a:p>
+            <a:endParaRPr lang="de-DE"/>
+          </a:p>
+        </p:txBody>
+      </p:sp>
+      <p:sp>
+        <p:nvSpPr>
+          <p:cNvPr id="37" name="System Merlin"/>
+          <p:cNvSpPr txBox="1"/>
+          <p:nvPr/>
+        </p:nvSpPr>
+        <p:spPr>
+          <a:xfrm>
+            <a:off x="5242560" y="2044700"/>
+            <a:ext cx="1833880" cy="279400"/>
+          </a:xfrm>
+          <a:prstGeom prst="rect">
+            <a:avLst/>
+          </a:prstGeom>
+          <a:noFill/>
+        </p:spPr>
+        <p:txBody>
+          <a:bodyPr wrap="square" lIns="0" tIns="0" rIns="0" bIns="0" anchor="t"/>
+          <a:lstStyle/>
+          <a:p>
+            <a:pPr algn="l"/>
+            <a:r>
+              <a:rPr lang="de-DE" sz="1600" b="1" dirty="0">
+                <a:solidFill>
+                  <a:srgbClr val="262626"/>
+                </a:solidFill>
+              </a:rPr>
+              <a:t>Merlin</a:t>
+            </a:r>
+          </a:p>
+        </p:txBody>
+      </p:sp>
+      <p:sp>
+        <p:nvSpPr>
+          <p:cNvPr id="38" name="Merlin Workflow"/>
+          <p:cNvSpPr/>
+          <p:nvPr/>
+        </p:nvSpPr>
+        <p:spPr>
+          <a:xfrm>
+            <a:off x="5422900" y="2540000"/>
+            <a:ext cx="1473200" cy="304800"/>
+          </a:xfrm>
+          <a:prstGeom prst="roundRect">
+            <a:avLst>
+              <a:gd name="adj" fmla="val 18000"/>
+            </a:avLst>
+          </a:prstGeom>
+          <a:noFill/>
+          <a:ln w="12700">
+            <a:solidFill>
+              <a:srgbClr val="8C8C8C"/>
+            </a:solidFill>
+          </a:ln>
+        </p:spPr>
+        <p:txBody>
+          <a:bodyPr lIns="0" tIns="0" rIns="0" bIns="0" anchor="ctr"/>
+          <a:lstStyle/>
+          <a:p>
+            <a:pPr algn="ctr"/>
+            <a:r>
+              <a:rPr lang="de-DE" sz="1100" dirty="0">
+                <a:solidFill>
+                  <a:srgbClr val="262626"/>
+                </a:solidFill>
+              </a:rPr>
+              <a:t>Workflow</a:t>
+            </a:r>
+          </a:p>
+        </p:txBody>
+      </p:sp>
+      <p:cxnSp>
+        <p:nvCxnSpPr>
+          <p:cNvPr id="39" name="Merlin Pfeil 0"/>
+          <p:cNvCxnSpPr/>
+          <p:nvPr/>
+        </p:nvCxnSpPr>
+        <p:spPr>
+          <a:xfrm>
+            <a:off x="6159500" y="2844800"/>
+            <a:ext cx="0" cy="228600"/>
+          </a:xfrm>
+          <a:prstGeom prst="line">
+            <a:avLst/>
+          </a:prstGeom>
+          <a:ln w="9525">
+            <a:solidFill>
+              <a:srgbClr val="8C8C8C"/>
+            </a:solidFill>
+            <a:tailEnd type="triangle" w="sm" len="sm"/>
+          </a:ln>
+        </p:spPr>
+      </p:cxnSp>
+      <p:sp>
+        <p:nvSpPr>
+          <p:cNvPr id="40" name="Merlin Redis"/>
+          <p:cNvSpPr/>
+          <p:nvPr/>
+        </p:nvSpPr>
+        <p:spPr>
+          <a:xfrm>
+            <a:off x="5422900" y="3073400"/>
+            <a:ext cx="1473200" cy="304800"/>
+          </a:xfrm>
+          <a:prstGeom prst="roundRect">
+            <a:avLst>
+              <a:gd name="adj" fmla="val 18000"/>
+            </a:avLst>
+          </a:prstGeom>
+          <a:noFill/>
+          <a:ln w="12700">
+            <a:solidFill>
+              <a:srgbClr val="8C8C8C"/>
+            </a:solidFill>
+          </a:ln>
+        </p:spPr>
+        <p:txBody>
+          <a:bodyPr lIns="0" tIns="0" rIns="0" bIns="0" anchor="ctr"/>
+          <a:lstStyle/>
+          <a:p>
+            <a:pPr algn="ctr"/>
+            <a:r>
+              <a:rPr lang="de-DE" sz="1100" dirty="0">
+                <a:solidFill>
+                  <a:srgbClr val="262626"/>
+                </a:solidFill>
+              </a:rPr>
+              <a:t>Redis</a:t>
+            </a:r>
+          </a:p>
+        </p:txBody>
+      </p:sp>
+      <p:cxnSp>
+        <p:nvCxnSpPr>
+          <p:cNvPr id="41" name="Merlin Pfeil 1"/>
+          <p:cNvCxnSpPr/>
+          <p:nvPr/>
+        </p:nvCxnSpPr>
+        <p:spPr>
+          <a:xfrm>
+            <a:off x="6159500" y="3378200"/>
+            <a:ext cx="0" cy="228600"/>
+          </a:xfrm>
+          <a:prstGeom prst="line">
+            <a:avLst/>
+          </a:prstGeom>
+          <a:ln w="9525">
+            <a:solidFill>
+              <a:srgbClr val="8C8C8C"/>
+            </a:solidFill>
+            <a:tailEnd type="triangle" w="sm" len="sm"/>
+          </a:ln>
+        </p:spPr>
+      </p:cxnSp>
+      <p:sp>
+        <p:nvSpPr>
+          <p:cNvPr id="42" name="Merlin Worker"/>
+          <p:cNvSpPr/>
+          <p:nvPr/>
+        </p:nvSpPr>
+        <p:spPr>
+          <a:xfrm>
+            <a:off x="5422900" y="3606800"/>
+            <a:ext cx="1473200" cy="304800"/>
+          </a:xfrm>
+          <a:prstGeom prst="roundRect">
+            <a:avLst>
+              <a:gd name="adj" fmla="val 18000"/>
+            </a:avLst>
+          </a:prstGeom>
+          <a:noFill/>
+          <a:ln w="12700">
+            <a:solidFill>
+              <a:srgbClr val="8C8C8C"/>
+            </a:solidFill>
+          </a:ln>
+        </p:spPr>
+        <p:txBody>
+          <a:bodyPr lIns="0" tIns="0" rIns="0" bIns="0" anchor="ctr"/>
+          <a:lstStyle/>
+          <a:p>
+            <a:pPr algn="ctr"/>
+            <a:r>
+              <a:rPr lang="de-DE" sz="1100" dirty="0">
+                <a:solidFill>
+                  <a:srgbClr val="262626"/>
+                </a:solidFill>
+              </a:rPr>
+              <a:t>Worker</a:t>
+            </a:r>
+          </a:p>
+        </p:txBody>
+      </p:sp>
+      <p:cxnSp>
+        <p:nvCxnSpPr>
+          <p:cNvPr id="43" name="Merlin Pfeil 2"/>
+          <p:cNvCxnSpPr/>
+          <p:nvPr/>
+        </p:nvCxnSpPr>
+        <p:spPr>
+          <a:xfrm>
+            <a:off x="6159500" y="3911600"/>
+            <a:ext cx="0" cy="228600"/>
+          </a:xfrm>
+          <a:prstGeom prst="line">
+            <a:avLst/>
+          </a:prstGeom>
+          <a:ln w="9525">
+            <a:solidFill>
+              <a:srgbClr val="8C8C8C"/>
+            </a:solidFill>
+            <a:tailEnd type="triangle" w="sm" len="sm"/>
+          </a:ln>
+        </p:spPr>
+      </p:cxnSp>
+      <p:sp>
+        <p:nvSpPr>
+          <p:cNvPr id="44" name="Merlin Task"/>
+          <p:cNvSpPr/>
+          <p:nvPr/>
+        </p:nvSpPr>
+        <p:spPr>
+          <a:xfrm>
+            <a:off x="5422900" y="4140200"/>
+            <a:ext cx="1473200" cy="304800"/>
+          </a:xfrm>
+          <a:prstGeom prst="roundRect">
+            <a:avLst>
+              <a:gd name="adj" fmla="val 18000"/>
+            </a:avLst>
+          </a:prstGeom>
+          <a:noFill/>
+          <a:ln w="12700">
+            <a:solidFill>
+              <a:srgbClr val="C1002A"/>
+            </a:solidFill>
+          </a:ln>
+        </p:spPr>
+        <p:txBody>
+          <a:bodyPr lIns="0" tIns="0" rIns="0" bIns="0" anchor="ctr"/>
+          <a:lstStyle/>
+          <a:p>
+            <a:pPr algn="ctr"/>
+            <a:r>
+              <a:rPr lang="de-DE" sz="1100" dirty="0">
+                <a:solidFill>
+                  <a:srgbClr val="C1002A"/>
+                </a:solidFill>
+              </a:rPr>
+              <a:t>Task</a:t>
+            </a:r>
+          </a:p>
+        </p:txBody>
+      </p:sp>
+      <p:sp>
+        <p:nvSpPr>
+          <p:cNvPr id="45" name="Beschreibung Merlin"/>
+          <p:cNvSpPr txBox="1"/>
+          <p:nvPr/>
+        </p:nvSpPr>
+        <p:spPr>
+          <a:xfrm>
+            <a:off x="5242560" y="4749800"/>
+            <a:ext cx="1833880" cy="381000"/>
+          </a:xfrm>
+          <a:prstGeom prst="rect">
+            <a:avLst/>
+          </a:prstGeom>
+          <a:noFill/>
+        </p:spPr>
+        <p:txBody>
+          <a:bodyPr wrap="square" lIns="0" tIns="0" rIns="0" bIns="0" anchor="t"/>
+          <a:lstStyle/>
+          <a:p>
+            <a:pPr algn="l"/>
+            <a:r>
+              <a:rPr lang="de-DE" sz="1200" i="1" dirty="0">
+                <a:solidFill>
+                  <a:srgbClr val="595959"/>
+                </a:solidFill>
+              </a:rPr>
+              <a:t>Aufgabenwarteschlange + Worker</a:t>
+            </a:r>
+          </a:p>
+        </p:txBody>
+      </p:sp>
+      <p:sp>
+        <p:nvSpPr>
+          <p:cNvPr id="46" name="Marke Pegasus"/>
+          <p:cNvSpPr/>
+          <p:nvPr/>
+        </p:nvSpPr>
+        <p:spPr>
+          <a:xfrm>
+            <a:off x="7254240" y="1930400"/>
+            <a:ext cx="228600" cy="38100"/>
+          </a:xfrm>
+          <a:prstGeom prst="rect">
+            <a:avLst/>
+          </a:prstGeom>
+          <a:solidFill>
+            <a:srgbClr val="C1002A"/>
+          </a:solidFill>
+          <a:ln>
+            <a:noFill/>
+          </a:ln>
+        </p:spPr>
+        <p:txBody>
+          <a:bodyPr/>
+          <a:lstStyle/>
+          <a:p>
+            <a:endParaRPr lang="de-DE"/>
+          </a:p>
+        </p:txBody>
+      </p:sp>
+      <p:sp>
+        <p:nvSpPr>
+          <p:cNvPr id="47" name="System Pegasus"/>
+          <p:cNvSpPr txBox="1"/>
+          <p:nvPr/>
+        </p:nvSpPr>
+        <p:spPr>
+          <a:xfrm>
+            <a:off x="7254240" y="2044700"/>
+            <a:ext cx="1833880" cy="279400"/>
+          </a:xfrm>
+          <a:prstGeom prst="rect">
+            <a:avLst/>
+          </a:prstGeom>
+          <a:noFill/>
+        </p:spPr>
+        <p:txBody>
+          <a:bodyPr wrap="square" lIns="0" tIns="0" rIns="0" bIns="0" anchor="t"/>
+          <a:lstStyle/>
+          <a:p>
+            <a:pPr algn="l"/>
+            <a:r>
+              <a:rPr lang="de-DE" sz="1600" b="1" dirty="0">
+                <a:solidFill>
+                  <a:srgbClr val="262626"/>
+                </a:solidFill>
+              </a:rPr>
+              <a:t>Pegasus</a:t>
+            </a:r>
+          </a:p>
+        </p:txBody>
+      </p:sp>
+      <p:sp>
+        <p:nvSpPr>
+          <p:cNvPr id="48" name="Pegasus Workflow"/>
+          <p:cNvSpPr/>
+          <p:nvPr/>
+        </p:nvSpPr>
+        <p:spPr>
+          <a:xfrm>
+            <a:off x="7434580" y="2540000"/>
+            <a:ext cx="1473200" cy="304800"/>
+          </a:xfrm>
+          <a:prstGeom prst="roundRect">
+            <a:avLst>
+              <a:gd name="adj" fmla="val 18000"/>
+            </a:avLst>
+          </a:prstGeom>
+          <a:noFill/>
+          <a:ln w="12700">
+            <a:solidFill>
+              <a:srgbClr val="8C8C8C"/>
+            </a:solidFill>
+          </a:ln>
+        </p:spPr>
+        <p:txBody>
+          <a:bodyPr lIns="0" tIns="0" rIns="0" bIns="0" anchor="ctr"/>
+          <a:lstStyle/>
+          <a:p>
+            <a:pPr algn="ctr"/>
+            <a:r>
+              <a:rPr lang="de-DE" sz="1100" dirty="0">
+                <a:solidFill>
+                  <a:srgbClr val="262626"/>
+                </a:solidFill>
+              </a:rPr>
+              <a:t>Workflow</a:t>
+            </a:r>
+          </a:p>
+        </p:txBody>
+      </p:sp>
+      <p:cxnSp>
+        <p:nvCxnSpPr>
+          <p:cNvPr id="49" name="Pegasus Pfeil 0"/>
+          <p:cNvCxnSpPr/>
+          <p:nvPr/>
+        </p:nvCxnSpPr>
+        <p:spPr>
+          <a:xfrm>
+            <a:off x="8171180" y="2844800"/>
+            <a:ext cx="0" cy="228600"/>
+          </a:xfrm>
+          <a:prstGeom prst="line">
+            <a:avLst/>
+          </a:prstGeom>
+          <a:ln w="9525">
+            <a:solidFill>
+              <a:srgbClr val="8C8C8C"/>
+            </a:solidFill>
+            <a:tailEnd type="triangle" w="sm" len="sm"/>
+          </a:ln>
+        </p:spPr>
+      </p:cxnSp>
+      <p:sp>
+        <p:nvSpPr>
+          <p:cNvPr id="50" name="Pegasus Planner"/>
+          <p:cNvSpPr/>
+          <p:nvPr/>
+        </p:nvSpPr>
+        <p:spPr>
+          <a:xfrm>
+            <a:off x="7434580" y="3073400"/>
+            <a:ext cx="1473200" cy="304800"/>
+          </a:xfrm>
+          <a:prstGeom prst="roundRect">
+            <a:avLst>
+              <a:gd name="adj" fmla="val 18000"/>
+            </a:avLst>
+          </a:prstGeom>
+          <a:noFill/>
+          <a:ln w="12700">
+            <a:solidFill>
+              <a:srgbClr val="8C8C8C"/>
+            </a:solidFill>
+          </a:ln>
+        </p:spPr>
+        <p:txBody>
+          <a:bodyPr lIns="0" tIns="0" rIns="0" bIns="0" anchor="ctr"/>
+          <a:lstStyle/>
+          <a:p>
+            <a:pPr algn="ctr"/>
+            <a:r>
+              <a:rPr lang="de-DE" sz="1100" dirty="0">
+                <a:solidFill>
+                  <a:srgbClr val="262626"/>
+                </a:solidFill>
+              </a:rPr>
+              <a:t>Planner</a:t>
+            </a:r>
+          </a:p>
+        </p:txBody>
+      </p:sp>
+      <p:cxnSp>
+        <p:nvCxnSpPr>
+          <p:cNvPr id="51" name="Pegasus Pfeil 1"/>
+          <p:cNvCxnSpPr/>
+          <p:nvPr/>
+        </p:nvCxnSpPr>
+        <p:spPr>
+          <a:xfrm>
+            <a:off x="8171180" y="3378200"/>
+            <a:ext cx="0" cy="228600"/>
+          </a:xfrm>
+          <a:prstGeom prst="line">
+            <a:avLst/>
+          </a:prstGeom>
+          <a:ln w="9525">
+            <a:solidFill>
+              <a:srgbClr val="8C8C8C"/>
+            </a:solidFill>
+            <a:tailEnd type="triangle" w="sm" len="sm"/>
+          </a:ln>
+        </p:spPr>
+      </p:cxnSp>
+      <p:sp>
+        <p:nvSpPr>
+          <p:cNvPr id="52" name="Pegasus HTCondor"/>
+          <p:cNvSpPr/>
+          <p:nvPr/>
+        </p:nvSpPr>
+        <p:spPr>
+          <a:xfrm>
+            <a:off x="7434580" y="3606800"/>
+            <a:ext cx="1473200" cy="304800"/>
+          </a:xfrm>
+          <a:prstGeom prst="roundRect">
+            <a:avLst>
+              <a:gd name="adj" fmla="val 18000"/>
+            </a:avLst>
+          </a:prstGeom>
+          <a:noFill/>
+          <a:ln w="12700">
+            <a:solidFill>
+              <a:srgbClr val="8C8C8C"/>
+            </a:solidFill>
+          </a:ln>
+        </p:spPr>
+        <p:txBody>
+          <a:bodyPr lIns="0" tIns="0" rIns="0" bIns="0" anchor="ctr"/>
+          <a:lstStyle/>
+          <a:p>
+            <a:pPr algn="ctr"/>
+            <a:r>
+              <a:rPr lang="de-DE" sz="1100" dirty="0">
+                <a:solidFill>
+                  <a:srgbClr val="262626"/>
+                </a:solidFill>
+              </a:rPr>
+              <a:t>HTCondor</a:t>
+            </a:r>
+          </a:p>
+        </p:txBody>
+      </p:sp>
+      <p:cxnSp>
+        <p:nvCxnSpPr>
+          <p:cNvPr id="53" name="Pegasus Pfeil 2"/>
+          <p:cNvCxnSpPr/>
+          <p:nvPr/>
+        </p:nvCxnSpPr>
+        <p:spPr>
+          <a:xfrm>
+            <a:off x="8171180" y="3911600"/>
+            <a:ext cx="0" cy="228600"/>
+          </a:xfrm>
+          <a:prstGeom prst="line">
+            <a:avLst/>
+          </a:prstGeom>
+          <a:ln w="9525">
+            <a:solidFill>
+              <a:srgbClr val="8C8C8C"/>
+            </a:solidFill>
+            <a:tailEnd type="triangle" w="sm" len="sm"/>
+          </a:ln>
+        </p:spPr>
+      </p:cxnSp>
+      <p:sp>
+        <p:nvSpPr>
+          <p:cNvPr id="54" name="Pegasus Jobs"/>
+          <p:cNvSpPr/>
+          <p:nvPr/>
+        </p:nvSpPr>
+        <p:spPr>
+          <a:xfrm>
+            <a:off x="7434580" y="4140200"/>
+            <a:ext cx="1473200" cy="304800"/>
+          </a:xfrm>
+          <a:prstGeom prst="roundRect">
+            <a:avLst>
+              <a:gd name="adj" fmla="val 18000"/>
+            </a:avLst>
+          </a:prstGeom>
+          <a:noFill/>
+          <a:ln w="12700">
+            <a:solidFill>
+              <a:srgbClr val="C1002A"/>
+            </a:solidFill>
+          </a:ln>
+        </p:spPr>
+        <p:txBody>
+          <a:bodyPr lIns="0" tIns="0" rIns="0" bIns="0" anchor="ctr"/>
+          <a:lstStyle/>
+          <a:p>
+            <a:pPr algn="ctr"/>
+            <a:r>
+              <a:rPr lang="de-DE" sz="1100" dirty="0">
+                <a:solidFill>
+                  <a:srgbClr val="C1002A"/>
+                </a:solidFill>
+              </a:rPr>
+              <a:t>Jobs</a:t>
+            </a:r>
+          </a:p>
+        </p:txBody>
+      </p:sp>
+      <p:sp>
+        <p:nvSpPr>
+          <p:cNvPr id="55" name="Beschreibung Pegasus"/>
+          <p:cNvSpPr txBox="1"/>
+          <p:nvPr/>
+        </p:nvSpPr>
+        <p:spPr>
+          <a:xfrm>
+            <a:off x="7254240" y="4749800"/>
+            <a:ext cx="1833880" cy="381000"/>
+          </a:xfrm>
+          <a:prstGeom prst="rect">
+            <a:avLst/>
+          </a:prstGeom>
+          <a:noFill/>
+        </p:spPr>
+        <p:txBody>
+          <a:bodyPr wrap="square" lIns="0" tIns="0" rIns="0" bIns="0" anchor="t"/>
+          <a:lstStyle/>
+          <a:p>
+            <a:pPr algn="l"/>
+            <a:r>
+              <a:rPr lang="de-DE" sz="1200" i="1" dirty="0">
+                <a:solidFill>
+                  <a:srgbClr val="595959"/>
+                </a:solidFill>
+              </a:rPr>
+              <a:t>Planung + Ausführung</a:t>
+            </a:r>
+          </a:p>
+        </p:txBody>
+      </p:sp>
+      <p:sp>
+        <p:nvSpPr>
+          <p:cNvPr id="56" name="Marke AiiDA"/>
+          <p:cNvSpPr/>
+          <p:nvPr/>
+        </p:nvSpPr>
+        <p:spPr>
+          <a:xfrm>
+            <a:off x="9265920" y="1930400"/>
+            <a:ext cx="228600" cy="38100"/>
+          </a:xfrm>
+          <a:prstGeom prst="rect">
+            <a:avLst/>
+          </a:prstGeom>
+          <a:solidFill>
+            <a:srgbClr val="C1002A"/>
+          </a:solidFill>
+          <a:ln>
+            <a:noFill/>
+          </a:ln>
+        </p:spPr>
+        <p:txBody>
+          <a:bodyPr/>
+          <a:lstStyle/>
+          <a:p>
+            <a:endParaRPr lang="de-DE"/>
+          </a:p>
+        </p:txBody>
+      </p:sp>
+      <p:sp>
+        <p:nvSpPr>
+          <p:cNvPr id="57" name="System AiiDA"/>
+          <p:cNvSpPr txBox="1"/>
+          <p:nvPr/>
+        </p:nvSpPr>
+        <p:spPr>
+          <a:xfrm>
+            <a:off x="9265920" y="2044700"/>
+            <a:ext cx="1833880" cy="279400"/>
+          </a:xfrm>
+          <a:prstGeom prst="rect">
+            <a:avLst/>
+          </a:prstGeom>
+          <a:noFill/>
+        </p:spPr>
+        <p:txBody>
+          <a:bodyPr wrap="square" lIns="0" tIns="0" rIns="0" bIns="0" anchor="t"/>
+          <a:lstStyle/>
+          <a:p>
+            <a:pPr algn="l"/>
+            <a:r>
+              <a:rPr lang="de-DE" sz="1600" b="1" dirty="0">
+                <a:solidFill>
+                  <a:srgbClr val="262626"/>
+                </a:solidFill>
+              </a:rPr>
+              <a:t>AiiDA</a:t>
+            </a:r>
+          </a:p>
+        </p:txBody>
+      </p:sp>
+      <p:sp>
+        <p:nvSpPr>
+          <p:cNvPr id="58" name="AiiDA WorkChain"/>
+          <p:cNvSpPr/>
+          <p:nvPr/>
+        </p:nvSpPr>
+        <p:spPr>
+          <a:xfrm>
+            <a:off x="9265920" y="2540000"/>
+            <a:ext cx="1041400" cy="304800"/>
+          </a:xfrm>
+          <a:prstGeom prst="roundRect">
+            <a:avLst>
+              <a:gd name="adj" fmla="val 18000"/>
+            </a:avLst>
+          </a:prstGeom>
+          <a:noFill/>
+          <a:ln w="12700">
+            <a:solidFill>
+              <a:srgbClr val="8C8C8C"/>
+            </a:solidFill>
+          </a:ln>
+        </p:spPr>
+        <p:txBody>
+          <a:bodyPr lIns="0" tIns="0" rIns="0" bIns="0" anchor="ctr"/>
+          <a:lstStyle/>
+          <a:p>
+            <a:pPr algn="ctr"/>
+            <a:r>
+              <a:rPr lang="de-DE" sz="1100" dirty="0">
+                <a:solidFill>
+                  <a:srgbClr val="262626"/>
+                </a:solidFill>
+              </a:rPr>
+              <a:t>WorkChain</a:t>
+            </a:r>
+          </a:p>
+        </p:txBody>
+      </p:sp>
+      <p:cxnSp>
+        <p:nvCxnSpPr>
+          <p:cNvPr id="59" name="AiiDA Pfeil 0"/>
+          <p:cNvCxnSpPr/>
+          <p:nvPr/>
+        </p:nvCxnSpPr>
+        <p:spPr>
+          <a:xfrm>
+            <a:off x="9786620" y="2844800"/>
+            <a:ext cx="0" cy="228600"/>
+          </a:xfrm>
+          <a:prstGeom prst="line">
+            <a:avLst/>
+          </a:prstGeom>
+          <a:ln w="9525">
+            <a:solidFill>
+              <a:srgbClr val="8C8C8C"/>
+            </a:solidFill>
+            <a:tailEnd type="triangle" w="sm" len="sm"/>
+          </a:ln>
+        </p:spPr>
+      </p:cxnSp>
+      <p:sp>
+        <p:nvSpPr>
+          <p:cNvPr id="60" name="AiiDA RabbitMQ"/>
+          <p:cNvSpPr/>
+          <p:nvPr/>
+        </p:nvSpPr>
+        <p:spPr>
+          <a:xfrm>
+            <a:off x="9265920" y="3073400"/>
+            <a:ext cx="1041400" cy="304800"/>
+          </a:xfrm>
+          <a:prstGeom prst="roundRect">
+            <a:avLst>
+              <a:gd name="adj" fmla="val 18000"/>
+            </a:avLst>
+          </a:prstGeom>
+          <a:noFill/>
+          <a:ln w="12700">
+            <a:solidFill>
+              <a:srgbClr val="8C8C8C"/>
+            </a:solidFill>
+          </a:ln>
+        </p:spPr>
+        <p:txBody>
+          <a:bodyPr lIns="0" tIns="0" rIns="0" bIns="0" anchor="ctr"/>
+          <a:lstStyle/>
+          <a:p>
+            <a:pPr algn="ctr"/>
+            <a:r>
+              <a:rPr lang="de-DE" sz="1100" dirty="0">
+                <a:solidFill>
+                  <a:srgbClr val="262626"/>
+                </a:solidFill>
+              </a:rPr>
+              <a:t>RabbitMQ</a:t>
+            </a:r>
+          </a:p>
+        </p:txBody>
+      </p:sp>
+      <p:cxnSp>
+        <p:nvCxnSpPr>
+          <p:cNvPr id="61" name="AiiDA Pfeil 1"/>
+          <p:cNvCxnSpPr/>
+          <p:nvPr/>
+        </p:nvCxnSpPr>
+        <p:spPr>
+          <a:xfrm>
+            <a:off x="9786620" y="3378200"/>
+            <a:ext cx="0" cy="228600"/>
+          </a:xfrm>
+          <a:prstGeom prst="line">
+            <a:avLst/>
+          </a:prstGeom>
+          <a:ln w="9525">
+            <a:solidFill>
+              <a:srgbClr val="8C8C8C"/>
+            </a:solidFill>
+            <a:tailEnd type="triangle" w="sm" len="sm"/>
+          </a:ln>
+        </p:spPr>
+      </p:cxnSp>
+      <p:sp>
+        <p:nvSpPr>
+          <p:cNvPr id="62" name="AiiDA Daemon/Runner"/>
+          <p:cNvSpPr/>
+          <p:nvPr/>
+        </p:nvSpPr>
+        <p:spPr>
+          <a:xfrm>
+            <a:off x="9265920" y="3606800"/>
+            <a:ext cx="1041400" cy="304800"/>
+          </a:xfrm>
+          <a:prstGeom prst="roundRect">
+            <a:avLst>
+              <a:gd name="adj" fmla="val 18000"/>
+            </a:avLst>
+          </a:prstGeom>
+          <a:noFill/>
+          <a:ln w="12700">
+            <a:solidFill>
+              <a:srgbClr val="8C8C8C"/>
+            </a:solidFill>
+          </a:ln>
+        </p:spPr>
+        <p:txBody>
+          <a:bodyPr lIns="0" tIns="0" rIns="0" bIns="0" anchor="ctr"/>
+          <a:lstStyle/>
+          <a:p>
+            <a:pPr algn="ctr"/>
+            <a:r>
+              <a:rPr lang="de-DE" sz="1000" dirty="0">
+                <a:solidFill>
+                  <a:srgbClr val="262626"/>
+                </a:solidFill>
+              </a:rPr>
+              <a:t>Daemon/Runner</a:t>
+            </a:r>
+          </a:p>
+        </p:txBody>
+      </p:sp>
+      <p:cxnSp>
+        <p:nvCxnSpPr>
+          <p:cNvPr id="63" name="AiiDA Pfeil 2"/>
+          <p:cNvCxnSpPr/>
+          <p:nvPr/>
+        </p:nvCxnSpPr>
+        <p:spPr>
+          <a:xfrm>
+            <a:off x="9786620" y="3911600"/>
+            <a:ext cx="0" cy="228600"/>
+          </a:xfrm>
+          <a:prstGeom prst="line">
+            <a:avLst/>
+          </a:prstGeom>
+          <a:ln w="9525">
+            <a:solidFill>
+              <a:srgbClr val="8C8C8C"/>
+            </a:solidFill>
+            <a:tailEnd type="triangle" w="sm" len="sm"/>
+          </a:ln>
+        </p:spPr>
+      </p:cxnSp>
+      <p:sp>
+        <p:nvSpPr>
+          <p:cNvPr id="64" name="AiiDA CalcJobs"/>
+          <p:cNvSpPr/>
+          <p:nvPr/>
+        </p:nvSpPr>
+        <p:spPr>
+          <a:xfrm>
+            <a:off x="9265920" y="4140200"/>
+            <a:ext cx="1041400" cy="304800"/>
+          </a:xfrm>
+          <a:prstGeom prst="roundRect">
+            <a:avLst>
+              <a:gd name="adj" fmla="val 18000"/>
+            </a:avLst>
+          </a:prstGeom>
+          <a:noFill/>
+          <a:ln w="12700">
+            <a:solidFill>
+              <a:srgbClr val="C1002A"/>
+            </a:solidFill>
+          </a:ln>
+        </p:spPr>
+        <p:txBody>
+          <a:bodyPr lIns="0" tIns="0" rIns="0" bIns="0" anchor="ctr"/>
+          <a:lstStyle/>
+          <a:p>
+            <a:pPr algn="ctr"/>
+            <a:r>
+              <a:rPr lang="de-DE" sz="1100" dirty="0">
+                <a:solidFill>
+                  <a:srgbClr val="C1002A"/>
+                </a:solidFill>
+              </a:rPr>
+              <a:t>CalcJobs</a:t>
+            </a:r>
+          </a:p>
+        </p:txBody>
+      </p:sp>
+      <p:sp>
+        <p:nvSpPr>
+          <p:cNvPr id="65" name="AiiDA Datenbank"/>
+          <p:cNvSpPr/>
+          <p:nvPr/>
+        </p:nvSpPr>
+        <p:spPr>
+          <a:xfrm>
+            <a:off x="10510520" y="3606800"/>
+            <a:ext cx="736600" cy="304800"/>
+          </a:xfrm>
+          <a:prstGeom prst="roundRect">
+            <a:avLst>
+              <a:gd name="adj" fmla="val 18000"/>
+            </a:avLst>
+          </a:prstGeom>
+          <a:noFill/>
+          <a:ln w="12700">
+            <a:solidFill>
+              <a:srgbClr val="8C8C8C"/>
+            </a:solidFill>
+          </a:ln>
+        </p:spPr>
+        <p:txBody>
+          <a:bodyPr lIns="0" tIns="0" rIns="0" bIns="0" anchor="ctr"/>
+          <a:lstStyle/>
+          <a:p>
+            <a:pPr algn="ctr"/>
+            <a:r>
+              <a:rPr lang="de-DE" sz="1000" dirty="0">
+                <a:solidFill>
+                  <a:srgbClr val="262626"/>
+                </a:solidFill>
+              </a:rPr>
+              <a:t>Datenbank</a:t>
+            </a:r>
+          </a:p>
+        </p:txBody>
+      </p:sp>
+      <p:cxnSp>
+        <p:nvCxnSpPr>
+          <p:cNvPr id="66" name="AiiDA Doppelpfeil"/>
+          <p:cNvCxnSpPr/>
+          <p:nvPr/>
+        </p:nvCxnSpPr>
+        <p:spPr>
+          <a:xfrm>
+            <a:off x="10307320" y="3759200"/>
+            <a:ext cx="203200" cy="0"/>
+          </a:xfrm>
+          <a:prstGeom prst="line">
+            <a:avLst/>
+          </a:prstGeom>
+          <a:ln w="9525">
+            <a:solidFill>
+              <a:srgbClr val="8C8C8C"/>
+            </a:solidFill>
+            <a:headEnd type="triangle" w="sm" len="sm"/>
+            <a:tailEnd type="triangle" w="sm" len="sm"/>
+          </a:ln>
+        </p:spPr>
+      </p:cxnSp>
+      <p:sp>
+        <p:nvSpPr>
+          <p:cNvPr id="67" name="Beschreibung AiiDA"/>
+          <p:cNvSpPr txBox="1"/>
+          <p:nvPr/>
+        </p:nvSpPr>
+        <p:spPr>
+          <a:xfrm>
+            <a:off x="9265920" y="4749800"/>
+            <a:ext cx="1833880" cy="381000"/>
+          </a:xfrm>
+          <a:prstGeom prst="rect">
+            <a:avLst/>
+          </a:prstGeom>
+          <a:noFill/>
+        </p:spPr>
+        <p:txBody>
+          <a:bodyPr wrap="square" lIns="0" tIns="0" rIns="0" bIns="0" anchor="t"/>
+          <a:lstStyle/>
+          <a:p>
+            <a:pPr algn="l"/>
+            <a:r>
+              <a:rPr lang="de-DE" sz="1200" i="1" dirty="0">
+                <a:solidFill>
+                  <a:srgbClr val="595959"/>
+                </a:solidFill>
+              </a:rPr>
+              <a:t>Nachrichten + Daemon + Datenbank</a:t>
+            </a:r>
+          </a:p>
+        </p:txBody>
+      </p:sp>
+      <p:cxnSp>
+        <p:nvCxnSpPr>
+          <p:cNvPr id="68" name="Trennlinie"/>
+          <p:cNvCxnSpPr/>
+          <p:nvPr/>
+        </p:nvCxnSpPr>
+        <p:spPr>
+          <a:xfrm>
+            <a:off x="1219200" y="5283200"/>
+            <a:ext cx="10058400" cy="0"/>
+          </a:xfrm>
+          <a:prstGeom prst="line">
+            <a:avLst/>
+          </a:prstGeom>
+          <a:ln w="9525">
+            <a:solidFill>
+              <a:srgbClr val="D9D9D9"/>
+            </a:solidFill>
+          </a:ln>
+        </p:spPr>
+      </p:cxnSp>
+      <p:sp>
+        <p:nvSpPr>
+          <p:cNvPr id="69" name="Kernaussage"/>
+          <p:cNvSpPr txBox="1"/>
+          <p:nvPr/>
+        </p:nvSpPr>
+        <p:spPr>
+          <a:xfrm>
+            <a:off x="1219200" y="5461000"/>
+            <a:ext cx="10058400" cy="254000"/>
+          </a:xfrm>
+          <a:prstGeom prst="rect">
+            <a:avLst/>
+          </a:prstGeom>
+          <a:noFill/>
+        </p:spPr>
+        <p:txBody>
+          <a:bodyPr wrap="square" lIns="0" tIns="0" rIns="0" bIns="0" anchor="ctr"/>
+          <a:lstStyle/>
+          <a:p>
+            <a:pPr algn="ctr"/>
+            <a:r>
+              <a:rPr lang="de-DE" sz="1400" b="1" dirty="0">
+                <a:solidFill>
+                  <a:srgbClr val="262626"/>
+                </a:solidFill>
+              </a:rPr>
+              <a:t>Gleicher Workflow, unterschiedliche Wege zur Ausführung</a:t>
+            </a:r>
+          </a:p>
+        </p:txBody>
+      </p:sp>
+      <p:sp>
+        <p:nvSpPr>
+          <p:cNvPr id="3" name="Foliennummer"/>
+          <p:cNvSpPr txBox="1"/>
+          <p:nvPr/>
+        </p:nvSpPr>
+        <p:spPr>
+          <a:xfrm>
+            <a:off x="10769600" y="6197600"/>
+            <a:ext cx="508000" cy="254000"/>
+          </a:xfrm>
+          <a:prstGeom prst="rect">
+            <a:avLst/>
+          </a:prstGeom>
+          <a:noFill/>
+        </p:spPr>
+        <p:txBody>
+          <a:bodyPr wrap="square" lIns="0" tIns="0" rIns="0" bIns="0" anchor="t"/>
+          <a:lstStyle/>
+          <a:p>
+            <a:pPr algn="r"/>
+            <a:r>
+              <a:rPr lang="de-DE" sz="1200" dirty="0">
+                <a:solidFill>
+                  <a:srgbClr val="8C8C8C"/>
+                </a:solidFill>
+              </a:rPr>
+              <a:t>11</a:t>
+            </a:r>
+          </a:p>
+        </p:txBody>
+      </p:sp>
+      <p:cxnSp>
+        <p:nvCxnSpPr>
+          <p:cNvPr id="4" name="Fortschritt Linie"/>
+          <p:cNvCxnSpPr/>
+          <p:nvPr/>
+        </p:nvCxnSpPr>
+        <p:spPr>
+          <a:xfrm>
+            <a:off x="1219200" y="6172200"/>
+            <a:ext cx="5080000" cy="0"/>
+          </a:xfrm>
+          <a:prstGeom prst="line">
+            <a:avLst/>
+          </a:prstGeom>
+          <a:ln w="9525">
+            <a:solidFill>
+              <a:srgbClr val="D9D9D9"/>
+            </a:solidFill>
+          </a:ln>
+        </p:spPr>
+      </p:cxnSp>
+      <p:sp>
+        <p:nvSpPr>
+          <p:cNvPr id="5" name="Marker Motivation"/>
+          <p:cNvSpPr/>
+          <p:nvPr/>
+        </p:nvSpPr>
+        <p:spPr>
+          <a:xfrm>
+            <a:off x="1187450" y="6140450"/>
+            <a:ext cx="63500" cy="63500"/>
+          </a:xfrm>
+          <a:prstGeom prst="ellipse">
+            <a:avLst/>
+          </a:prstGeom>
+          <a:solidFill>
+            <a:srgbClr val="A6A6A6"/>
+          </a:solidFill>
+          <a:ln>
+            <a:noFill/>
+          </a:ln>
+        </p:spPr>
+        <p:txBody>
+          <a:bodyPr/>
+          <a:lstStyle/>
+          <a:p>
+            <a:endParaRPr lang="de-DE"/>
+          </a:p>
+        </p:txBody>
+      </p:sp>
+      <p:sp>
+        <p:nvSpPr>
+          <p:cNvPr id="6" name="Label Motivation"/>
+          <p:cNvSpPr txBox="1"/>
+          <p:nvPr/>
+        </p:nvSpPr>
+        <p:spPr>
+          <a:xfrm>
+            <a:off x="1219200" y="6273800"/>
+            <a:ext cx="1270000" cy="203200"/>
+          </a:xfrm>
+          <a:prstGeom prst="rect">
+            <a:avLst/>
+          </a:prstGeom>
+          <a:noFill/>
+        </p:spPr>
+        <p:txBody>
+          <a:bodyPr wrap="square" lIns="0" tIns="0" rIns="0" bIns="0" anchor="t"/>
+          <a:lstStyle/>
+          <a:p>
+            <a:pPr algn="l"/>
+            <a:r>
+              <a:rPr lang="de-DE" sz="1000" dirty="0">
+                <a:solidFill>
+                  <a:srgbClr val="A6A6A6"/>
+                </a:solidFill>
+              </a:rPr>
+              <a:t>Motivation</a:t>
+            </a:r>
+          </a:p>
+        </p:txBody>
+      </p:sp>
+      <p:sp>
+        <p:nvSpPr>
+          <p:cNvPr id="7" name="Marker Methodik"/>
+          <p:cNvSpPr/>
+          <p:nvPr/>
+        </p:nvSpPr>
+        <p:spPr>
+          <a:xfrm>
+            <a:off x="2457450" y="6140450"/>
+            <a:ext cx="63500" cy="63500"/>
+          </a:xfrm>
+          <a:prstGeom prst="ellipse">
+            <a:avLst/>
+          </a:prstGeom>
+          <a:solidFill>
+            <a:srgbClr val="A6A6A6"/>
+          </a:solidFill>
+          <a:ln>
+            <a:noFill/>
+          </a:ln>
+        </p:spPr>
+        <p:txBody>
+          <a:bodyPr/>
+          <a:lstStyle/>
+          <a:p>
+            <a:endParaRPr lang="de-DE"/>
+          </a:p>
+        </p:txBody>
+      </p:sp>
+      <p:sp>
+        <p:nvSpPr>
+          <p:cNvPr id="8" name="Label Methodik"/>
+          <p:cNvSpPr txBox="1"/>
+          <p:nvPr/>
+        </p:nvSpPr>
+        <p:spPr>
+          <a:xfrm>
+            <a:off x="1854200" y="6273800"/>
+            <a:ext cx="1270000" cy="203200"/>
+          </a:xfrm>
+          <a:prstGeom prst="rect">
+            <a:avLst/>
+          </a:prstGeom>
+          <a:noFill/>
+        </p:spPr>
+        <p:txBody>
+          <a:bodyPr wrap="square" lIns="0" tIns="0" rIns="0" bIns="0" anchor="t"/>
+          <a:lstStyle/>
+          <a:p>
+            <a:pPr algn="ctr"/>
+            <a:r>
+              <a:rPr lang="de-DE" sz="1000" dirty="0">
+                <a:solidFill>
+                  <a:srgbClr val="A6A6A6"/>
+                </a:solidFill>
+              </a:rPr>
+              <a:t>Methodik</a:t>
+            </a:r>
+          </a:p>
+        </p:txBody>
+      </p:sp>
+      <p:sp>
+        <p:nvSpPr>
+          <p:cNvPr id="9" name="Marker Systeme"/>
+          <p:cNvSpPr/>
+          <p:nvPr/>
+        </p:nvSpPr>
+        <p:spPr>
+          <a:xfrm>
+            <a:off x="3714750" y="6127750"/>
+            <a:ext cx="88900" cy="88900"/>
+          </a:xfrm>
+          <a:prstGeom prst="ellipse">
+            <a:avLst/>
+          </a:prstGeom>
+          <a:solidFill>
+            <a:srgbClr val="C1002A"/>
+          </a:solidFill>
+          <a:ln>
+            <a:noFill/>
+          </a:ln>
+        </p:spPr>
+        <p:txBody>
+          <a:bodyPr/>
+          <a:lstStyle/>
+          <a:p>
+            <a:endParaRPr lang="de-DE"/>
+          </a:p>
+        </p:txBody>
+      </p:sp>
+      <p:sp>
+        <p:nvSpPr>
+          <p:cNvPr id="10" name="Label Systeme"/>
+          <p:cNvSpPr txBox="1"/>
+          <p:nvPr/>
+        </p:nvSpPr>
+        <p:spPr>
+          <a:xfrm>
+            <a:off x="3124200" y="6273800"/>
+            <a:ext cx="1270000" cy="203200"/>
+          </a:xfrm>
+          <a:prstGeom prst="rect">
+            <a:avLst/>
+          </a:prstGeom>
+          <a:noFill/>
+        </p:spPr>
+        <p:txBody>
+          <a:bodyPr wrap="square" lIns="0" tIns="0" rIns="0" bIns="0" anchor="t"/>
+          <a:lstStyle/>
+          <a:p>
+            <a:pPr algn="ctr"/>
+            <a:r>
+              <a:rPr lang="de-DE" sz="1000" b="1" dirty="0">
+                <a:solidFill>
+                  <a:srgbClr val="C1002A"/>
+                </a:solidFill>
+              </a:rPr>
+              <a:t>Systeme</a:t>
+            </a:r>
+          </a:p>
+        </p:txBody>
+      </p:sp>
+      <p:sp>
+        <p:nvSpPr>
+          <p:cNvPr id="11" name="Marker Untersuchung"/>
+          <p:cNvSpPr/>
+          <p:nvPr/>
+        </p:nvSpPr>
+        <p:spPr>
+          <a:xfrm>
+            <a:off x="4997450" y="6140450"/>
+            <a:ext cx="63500" cy="63500"/>
+          </a:xfrm>
+          <a:prstGeom prst="ellipse">
+            <a:avLst/>
+          </a:prstGeom>
+          <a:solidFill>
+            <a:srgbClr val="A6A6A6"/>
+          </a:solidFill>
+          <a:ln>
+            <a:noFill/>
+          </a:ln>
+        </p:spPr>
+        <p:txBody>
+          <a:bodyPr/>
+          <a:lstStyle/>
+          <a:p>
+            <a:endParaRPr lang="de-DE"/>
+          </a:p>
+        </p:txBody>
+      </p:sp>
+      <p:sp>
+        <p:nvSpPr>
+          <p:cNvPr id="12" name="Label Untersuchung"/>
+          <p:cNvSpPr txBox="1"/>
+          <p:nvPr/>
+        </p:nvSpPr>
+        <p:spPr>
+          <a:xfrm>
+            <a:off x="4394200" y="6273800"/>
+            <a:ext cx="1270000" cy="203200"/>
+          </a:xfrm>
+          <a:prstGeom prst="rect">
+            <a:avLst/>
+          </a:prstGeom>
+          <a:noFill/>
+        </p:spPr>
+        <p:txBody>
+          <a:bodyPr wrap="square" lIns="0" tIns="0" rIns="0" bIns="0" anchor="t"/>
+          <a:lstStyle/>
+          <a:p>
+            <a:pPr algn="ctr"/>
+            <a:r>
+              <a:rPr lang="de-DE" sz="1000" dirty="0">
+                <a:solidFill>
+                  <a:srgbClr val="A6A6A6"/>
+                </a:solidFill>
+              </a:rPr>
+              <a:t>Untersuchung</a:t>
+            </a:r>
+          </a:p>
+        </p:txBody>
+      </p:sp>
+      <p:sp>
+        <p:nvSpPr>
+          <p:cNvPr id="13" name="Marker Fazit"/>
+          <p:cNvSpPr/>
+          <p:nvPr/>
+        </p:nvSpPr>
+        <p:spPr>
+          <a:xfrm>
+            <a:off x="6267450" y="6140450"/>
+            <a:ext cx="63500" cy="63500"/>
+          </a:xfrm>
+          <a:prstGeom prst="ellipse">
+            <a:avLst/>
+          </a:prstGeom>
+          <a:solidFill>
+            <a:srgbClr val="A6A6A6"/>
+          </a:solidFill>
+          <a:ln>
+            <a:noFill/>
+          </a:ln>
+        </p:spPr>
+        <p:txBody>
+          <a:bodyPr/>
+          <a:lstStyle/>
+          <a:p>
+            <a:endParaRPr lang="de-DE"/>
+          </a:p>
+        </p:txBody>
+      </p:sp>
+      <p:sp>
+        <p:nvSpPr>
+          <p:cNvPr id="14" name="Label Fazit"/>
+          <p:cNvSpPr txBox="1"/>
+          <p:nvPr/>
+        </p:nvSpPr>
+        <p:spPr>
+          <a:xfrm>
+            <a:off x="5029200" y="6273800"/>
+            <a:ext cx="1270000" cy="203200"/>
+          </a:xfrm>
+          <a:prstGeom prst="rect">
+            <a:avLst/>
+          </a:prstGeom>
+          <a:noFill/>
+        </p:spPr>
+        <p:txBody>
+          <a:bodyPr wrap="square" lIns="0" tIns="0" rIns="0" bIns="0" anchor="t"/>
+          <a:lstStyle/>
+          <a:p>
+            <a:pPr algn="r"/>
+            <a:r>
+              <a:rPr lang="de-DE" sz="1000" dirty="0">
+                <a:solidFill>
+                  <a:srgbClr val="A6A6A6"/>
+                </a:solidFill>
+              </a:rPr>
+              <a:t>Fazit</a:t>
+            </a:r>
+          </a:p>
+        </p:txBody>
+      </p:sp>
+    </p:spTree>
+    <p:extLst>
+      <p:ext uri="{BB962C8B-B14F-4D97-AF65-F5344CB8AC3E}">
+        <p14:creationId xmlns:p14="http://schemas.microsoft.com/office/powerpoint/2010/main" val="3936722195"/>
+      </p:ext>
+    </p:extLst>
+  </p:cSld>
+  <p:clrMapOvr>
+    <a:masterClrMapping/>
+  </p:clrMapOvr>
+</p:sld>
+</file>
+
+<file path=ppt/slides/slide12.xml><?xml version="1.0" encoding="utf-8"?>
+<p:sld xmlns:a="http://schemas.openxmlformats.org/drawingml/2006/main" xmlns:r="http://schemas.openxmlformats.org/officeDocument/2006/relationships" xmlns:p="http://schemas.openxmlformats.org/presentationml/2006/main">
+  <p:cSld>
+    <p:spTree>
+      <p:nvGrpSpPr>
+        <p:cNvPr id="1" name=""/>
+        <p:cNvGrpSpPr/>
+        <p:nvPr/>
+      </p:nvGrpSpPr>
+      <p:grpSpPr>
+        <a:xfrm>
+          <a:off x="0" y="0"/>
+          <a:ext cx="0" cy="0"/>
+          <a:chOff x="0" y="0"/>
+          <a:chExt cx="0" cy="0"/>
+        </a:xfrm>
+      </p:grpSpPr>
+      <p:sp>
+        <p:nvSpPr>
+          <p:cNvPr id="2" name="Titel 1">
+            <a:extLst>
+              <a:ext uri="{FF2B5EF4-FFF2-40B4-BE49-F238E27FC236}">
+                <a16:creationId xmlns:a16="http://schemas.microsoft.com/office/drawing/2014/main" id="{D0035E23-6E52-9AEE-EAD2-3BEB471F358C}"/>
+              </a:ext>
+            </a:extLst>
+          </p:cNvPr>
+          <p:cNvSpPr>
+            <a:spLocks noGrp="1"/>
+          </p:cNvSpPr>
+          <p:nvPr>
+            <p:ph type="title"/>
+          </p:nvPr>
+        </p:nvSpPr>
+        <p:spPr>
+          <a:xfrm>
+            <a:off x="1219200" y="812800"/>
+            <a:ext cx="10058400" cy="508000"/>
+          </a:xfrm>
+        </p:spPr>
+        <p:txBody>
+          <a:bodyPr wrap="square" lIns="0" tIns="0" rIns="0" bIns="0" anchor="t">
+            <a:normAutofit/>
+          </a:bodyPr>
+          <a:lstStyle/>
+          <a:p>
+            <a:pPr algn="l"/>
+            <a:r>
+              <a:rPr lang="de-DE" sz="2600" b="1" dirty="0">
+                <a:solidFill>
+                  <a:srgbClr val="262626"/>
+                </a:solidFill>
+              </a:rPr>
+              <a:t>Lokale Untersuchung: WMS-Overhead</a:t>
+            </a:r>
+          </a:p>
+        </p:txBody>
+      </p:sp>
+      <p:pic>
+        <p:nvPicPr>
+          <p:cNvPr id="5" name="Inhaltsplatzhalter 4">
+            <a:extLst>
+              <a:ext uri="{FF2B5EF4-FFF2-40B4-BE49-F238E27FC236}">
+                <a16:creationId xmlns:a16="http://schemas.microsoft.com/office/drawing/2014/main" id="{2CD6A111-9076-8E04-3AED-ED16A28E3CF5}"/>
+              </a:ext>
+            </a:extLst>
+          </p:cNvPr>
+          <p:cNvPicPr>
+            <a:picLocks noGrp="1" noChangeAspect="1"/>
+          </p:cNvPicPr>
+          <p:nvPr>
+            <p:ph idx="1"/>
+          </p:nvPr>
+        </p:nvPicPr>
+        <p:blipFill>
+          <a:blip r:embed="rId2"/>
+          <a:stretch>
+            <a:fillRect/>
+          </a:stretch>
+        </p:blipFill>
+        <p:spPr>
+          <a:xfrm>
+            <a:off x="1219200" y="1905000"/>
+            <a:ext cx="7264400" cy="2978013"/>
+          </a:xfrm>
+          <a:prstGeom prst="rect">
+            <a:avLst/>
+          </a:prstGeom>
+        </p:spPr>
+      </p:pic>
+      <p:sp>
+        <p:nvSpPr>
+          <p:cNvPr id="20" name="Akzentlinie"/>
+          <p:cNvSpPr/>
+          <p:nvPr/>
+        </p:nvSpPr>
+        <p:spPr>
+          <a:xfrm>
+            <a:off x="914400" y="812800"/>
+            <a:ext cx="50800" cy="431800"/>
+          </a:xfrm>
+          <a:prstGeom prst="rect">
+            <a:avLst/>
+          </a:prstGeom>
+          <a:solidFill>
+            <a:srgbClr val="C1002A"/>
+          </a:solidFill>
+          <a:ln>
+            <a:noFill/>
+          </a:ln>
+        </p:spPr>
+        <p:txBody>
+          <a:bodyPr/>
+          <a:lstStyle/>
+          <a:p>
+            <a:endParaRPr lang="de-DE"/>
+          </a:p>
+        </p:txBody>
+      </p:sp>
+      <p:sp>
+        <p:nvSpPr>
+          <p:cNvPr id="16" name="Abschnitt"/>
+          <p:cNvSpPr txBox="1"/>
+          <p:nvPr/>
+        </p:nvSpPr>
+        <p:spPr>
+          <a:xfrm>
+            <a:off x="1219200" y="1397000"/>
+            <a:ext cx="10058400" cy="177800"/>
+          </a:xfrm>
+          <a:prstGeom prst="rect">
+            <a:avLst/>
+          </a:prstGeom>
+          <a:noFill/>
+        </p:spPr>
+        <p:txBody>
+          <a:bodyPr wrap="square" lIns="0" tIns="0" rIns="0" bIns="0" anchor="t"/>
+          <a:lstStyle/>
+          <a:p>
+            <a:pPr algn="l"/>
+            <a:r>
+              <a:rPr lang="de-DE" sz="1000" b="1" spc="200" dirty="0">
+                <a:solidFill>
+                  <a:srgbClr val="C1002A"/>
+                </a:solidFill>
+              </a:rPr>
+              <a:t>OVERHEAD GEGENÜBER REFERENZAUSFÜHRUNG</a:t>
+            </a:r>
+          </a:p>
+        </p:txBody>
+      </p:sp>
+      <p:sp>
+        <p:nvSpPr>
+          <p:cNvPr id="3" name="Foliennummer"/>
+          <p:cNvSpPr txBox="1"/>
+          <p:nvPr/>
+        </p:nvSpPr>
+        <p:spPr>
+          <a:xfrm>
+            <a:off x="10769600" y="6197600"/>
+            <a:ext cx="508000" cy="254000"/>
+          </a:xfrm>
+          <a:prstGeom prst="rect">
+            <a:avLst/>
+          </a:prstGeom>
+          <a:noFill/>
+        </p:spPr>
+        <p:txBody>
+          <a:bodyPr wrap="square" lIns="0" tIns="0" rIns="0" bIns="0" anchor="t"/>
+          <a:lstStyle/>
+          <a:p>
+            <a:pPr algn="r"/>
+            <a:r>
+              <a:rPr lang="de-DE" sz="1200" dirty="0">
+                <a:solidFill>
+                  <a:srgbClr val="8C8C8C"/>
+                </a:solidFill>
+              </a:rPr>
+              <a:t>12</a:t>
+            </a:r>
+          </a:p>
+        </p:txBody>
+      </p:sp>
+      <p:cxnSp>
+        <p:nvCxnSpPr>
+          <p:cNvPr id="4" name="Fortschritt Linie"/>
+          <p:cNvCxnSpPr/>
+          <p:nvPr/>
+        </p:nvCxnSpPr>
+        <p:spPr>
+          <a:xfrm>
+            <a:off x="1219200" y="6172200"/>
+            <a:ext cx="5080000" cy="0"/>
+          </a:xfrm>
+          <a:prstGeom prst="line">
+            <a:avLst/>
+          </a:prstGeom>
+          <a:ln w="9525">
+            <a:solidFill>
+              <a:srgbClr val="D9D9D9"/>
+            </a:solidFill>
+          </a:ln>
+        </p:spPr>
+      </p:cxnSp>
+      <p:sp>
+        <p:nvSpPr>
+          <p:cNvPr id="6" name="Marker Motivation"/>
+          <p:cNvSpPr/>
+          <p:nvPr/>
+        </p:nvSpPr>
+        <p:spPr>
+          <a:xfrm>
+            <a:off x="1187450" y="6140450"/>
+            <a:ext cx="63500" cy="63500"/>
+          </a:xfrm>
+          <a:prstGeom prst="ellipse">
+            <a:avLst/>
+          </a:prstGeom>
+          <a:solidFill>
+            <a:srgbClr val="A6A6A6"/>
+          </a:solidFill>
+          <a:ln>
+            <a:noFill/>
+          </a:ln>
+        </p:spPr>
+        <p:txBody>
+          <a:bodyPr/>
+          <a:lstStyle/>
+          <a:p>
+            <a:endParaRPr lang="de-DE"/>
+          </a:p>
+        </p:txBody>
+      </p:sp>
+      <p:sp>
+        <p:nvSpPr>
+          <p:cNvPr id="7" name="Label Motivation"/>
+          <p:cNvSpPr txBox="1"/>
+          <p:nvPr/>
+        </p:nvSpPr>
+        <p:spPr>
+          <a:xfrm>
+            <a:off x="1219200" y="6273800"/>
+            <a:ext cx="1270000" cy="203200"/>
+          </a:xfrm>
+          <a:prstGeom prst="rect">
+            <a:avLst/>
+          </a:prstGeom>
+          <a:noFill/>
+        </p:spPr>
+        <p:txBody>
+          <a:bodyPr wrap="square" lIns="0" tIns="0" rIns="0" bIns="0" anchor="t"/>
+          <a:lstStyle/>
+          <a:p>
+            <a:pPr algn="l"/>
+            <a:r>
+              <a:rPr lang="de-DE" sz="1000" dirty="0">
+                <a:solidFill>
+                  <a:srgbClr val="A6A6A6"/>
+                </a:solidFill>
+              </a:rPr>
+              <a:t>Motivation</a:t>
+            </a:r>
+          </a:p>
+        </p:txBody>
+      </p:sp>
+      <p:sp>
+        <p:nvSpPr>
+          <p:cNvPr id="8" name="Marker Methodik"/>
+          <p:cNvSpPr/>
+          <p:nvPr/>
+        </p:nvSpPr>
+        <p:spPr>
+          <a:xfrm>
+            <a:off x="2457450" y="6140450"/>
+            <a:ext cx="63500" cy="63500"/>
+          </a:xfrm>
+          <a:prstGeom prst="ellipse">
+            <a:avLst/>
+          </a:prstGeom>
+          <a:solidFill>
+            <a:srgbClr val="A6A6A6"/>
+          </a:solidFill>
+          <a:ln>
+            <a:noFill/>
+          </a:ln>
+        </p:spPr>
+        <p:txBody>
+          <a:bodyPr/>
+          <a:lstStyle/>
+          <a:p>
+            <a:endParaRPr lang="de-DE"/>
+          </a:p>
+        </p:txBody>
+      </p:sp>
+      <p:sp>
+        <p:nvSpPr>
+          <p:cNvPr id="9" name="Label Methodik"/>
+          <p:cNvSpPr txBox="1"/>
+          <p:nvPr/>
+        </p:nvSpPr>
+        <p:spPr>
+          <a:xfrm>
+            <a:off x="1854200" y="6273800"/>
+            <a:ext cx="1270000" cy="203200"/>
+          </a:xfrm>
+          <a:prstGeom prst="rect">
+            <a:avLst/>
+          </a:prstGeom>
+          <a:noFill/>
+        </p:spPr>
+        <p:txBody>
+          <a:bodyPr wrap="square" lIns="0" tIns="0" rIns="0" bIns="0" anchor="t"/>
+          <a:lstStyle/>
+          <a:p>
+            <a:pPr algn="ctr"/>
+            <a:r>
+              <a:rPr lang="de-DE" sz="1000" dirty="0">
+                <a:solidFill>
+                  <a:srgbClr val="A6A6A6"/>
+                </a:solidFill>
+              </a:rPr>
+              <a:t>Methodik</a:t>
+            </a:r>
+          </a:p>
+        </p:txBody>
+      </p:sp>
+      <p:sp>
+        <p:nvSpPr>
+          <p:cNvPr id="10" name="Marker Systeme"/>
+          <p:cNvSpPr/>
+          <p:nvPr/>
+        </p:nvSpPr>
+        <p:spPr>
+          <a:xfrm>
+            <a:off x="3727450" y="6140450"/>
+            <a:ext cx="63500" cy="63500"/>
+          </a:xfrm>
+          <a:prstGeom prst="ellipse">
+            <a:avLst/>
+          </a:prstGeom>
+          <a:solidFill>
+            <a:srgbClr val="A6A6A6"/>
+          </a:solidFill>
+          <a:ln>
+            <a:noFill/>
+          </a:ln>
+        </p:spPr>
+        <p:txBody>
+          <a:bodyPr/>
+          <a:lstStyle/>
+          <a:p>
+            <a:endParaRPr lang="de-DE"/>
+          </a:p>
+        </p:txBody>
+      </p:sp>
+      <p:sp>
+        <p:nvSpPr>
+          <p:cNvPr id="11" name="Label Systeme"/>
+          <p:cNvSpPr txBox="1"/>
+          <p:nvPr/>
+        </p:nvSpPr>
+        <p:spPr>
+          <a:xfrm>
+            <a:off x="3124200" y="6273800"/>
+            <a:ext cx="1270000" cy="203200"/>
+          </a:xfrm>
+          <a:prstGeom prst="rect">
+            <a:avLst/>
+          </a:prstGeom>
+          <a:noFill/>
+        </p:spPr>
+        <p:txBody>
+          <a:bodyPr wrap="square" lIns="0" tIns="0" rIns="0" bIns="0" anchor="t"/>
+          <a:lstStyle/>
+          <a:p>
+            <a:pPr algn="ctr"/>
+            <a:r>
+              <a:rPr lang="de-DE" sz="1000" dirty="0">
+                <a:solidFill>
+                  <a:srgbClr val="A6A6A6"/>
+                </a:solidFill>
+              </a:rPr>
+              <a:t>Systeme</a:t>
+            </a:r>
+          </a:p>
+        </p:txBody>
+      </p:sp>
+      <p:sp>
+        <p:nvSpPr>
+          <p:cNvPr id="12" name="Marker Untersuchung"/>
+          <p:cNvSpPr/>
+          <p:nvPr/>
+        </p:nvSpPr>
+        <p:spPr>
+          <a:xfrm>
+            <a:off x="4984750" y="6127750"/>
+            <a:ext cx="88900" cy="88900"/>
+          </a:xfrm>
+          <a:prstGeom prst="ellipse">
+            <a:avLst/>
+          </a:prstGeom>
+          <a:solidFill>
+            <a:srgbClr val="C1002A"/>
+          </a:solidFill>
+          <a:ln>
+            <a:noFill/>
+          </a:ln>
+        </p:spPr>
+        <p:txBody>
+          <a:bodyPr/>
+          <a:lstStyle/>
+          <a:p>
+            <a:endParaRPr lang="de-DE"/>
+          </a:p>
+        </p:txBody>
+      </p:sp>
+      <p:sp>
+        <p:nvSpPr>
+          <p:cNvPr id="13" name="Label Untersuchung"/>
+          <p:cNvSpPr txBox="1"/>
+          <p:nvPr/>
+        </p:nvSpPr>
+        <p:spPr>
+          <a:xfrm>
+            <a:off x="4394200" y="6273800"/>
+            <a:ext cx="1270000" cy="203200"/>
+          </a:xfrm>
+          <a:prstGeom prst="rect">
+            <a:avLst/>
+          </a:prstGeom>
+          <a:noFill/>
+        </p:spPr>
+        <p:txBody>
+          <a:bodyPr wrap="square" lIns="0" tIns="0" rIns="0" bIns="0" anchor="t"/>
+          <a:lstStyle/>
+          <a:p>
+            <a:pPr algn="ctr"/>
+            <a:r>
+              <a:rPr lang="de-DE" sz="1000" b="1" dirty="0">
+                <a:solidFill>
+                  <a:srgbClr val="C1002A"/>
+                </a:solidFill>
+              </a:rPr>
+              <a:t>Untersuchung</a:t>
+            </a:r>
+          </a:p>
+        </p:txBody>
+      </p:sp>
+      <p:sp>
+        <p:nvSpPr>
+          <p:cNvPr id="14" name="Marker Fazit"/>
+          <p:cNvSpPr/>
+          <p:nvPr/>
+        </p:nvSpPr>
+        <p:spPr>
+          <a:xfrm>
+            <a:off x="6267450" y="6140450"/>
+            <a:ext cx="63500" cy="63500"/>
+          </a:xfrm>
+          <a:prstGeom prst="ellipse">
+            <a:avLst/>
+          </a:prstGeom>
+          <a:solidFill>
+            <a:srgbClr val="A6A6A6"/>
+          </a:solidFill>
+          <a:ln>
+            <a:noFill/>
+          </a:ln>
+        </p:spPr>
+        <p:txBody>
+          <a:bodyPr/>
+          <a:lstStyle/>
+          <a:p>
+            <a:endParaRPr lang="de-DE"/>
+          </a:p>
+        </p:txBody>
+      </p:sp>
+      <p:sp>
+        <p:nvSpPr>
+          <p:cNvPr id="15" name="Label Fazit"/>
+          <p:cNvSpPr txBox="1"/>
+          <p:nvPr/>
+        </p:nvSpPr>
+        <p:spPr>
+          <a:xfrm>
+            <a:off x="5029200" y="6273800"/>
+            <a:ext cx="1270000" cy="203200"/>
+          </a:xfrm>
+          <a:prstGeom prst="rect">
+            <a:avLst/>
+          </a:prstGeom>
+          <a:noFill/>
+        </p:spPr>
+        <p:txBody>
+          <a:bodyPr wrap="square" lIns="0" tIns="0" rIns="0" bIns="0" anchor="t"/>
+          <a:lstStyle/>
+          <a:p>
+            <a:pPr algn="r"/>
+            <a:r>
+              <a:rPr lang="de-DE" sz="1000" dirty="0">
+                <a:solidFill>
+                  <a:srgbClr val="A6A6A6"/>
+                </a:solidFill>
+              </a:rPr>
+              <a:t>Fazit</a:t>
+            </a:r>
+          </a:p>
+        </p:txBody>
+      </p:sp>
+      <p:sp>
+        <p:nvSpPr>
+          <p:cNvPr id="30" name="Zentrale Ergebnisse"/>
+          <p:cNvSpPr txBox="1"/>
+          <p:nvPr/>
+        </p:nvSpPr>
+        <p:spPr>
+          <a:xfrm>
+            <a:off x="8788400" y="2006600"/>
+            <a:ext cx="2489200" cy="279400"/>
+          </a:xfrm>
+          <a:prstGeom prst="rect">
+            <a:avLst/>
+          </a:prstGeom>
+          <a:noFill/>
+        </p:spPr>
+        <p:txBody>
+          <a:bodyPr wrap="square" lIns="0" tIns="0" rIns="0" bIns="0" anchor="t"/>
+          <a:lstStyle/>
+          <a:p>
+            <a:pPr algn="l"/>
+            <a:r>
+              <a:rPr lang="de-DE" sz="1600" b="1" dirty="0">
+                <a:solidFill>
+                  <a:srgbClr val="262626"/>
+                </a:solidFill>
+              </a:rPr>
+              <a:t>Zentrale Ergebnisse</a:t>
+            </a:r>
+          </a:p>
+        </p:txBody>
+      </p:sp>
+      <p:sp>
+        <p:nvSpPr>
+          <p:cNvPr id="31" name="Ergebnisse"/>
+          <p:cNvSpPr txBox="1"/>
+          <p:nvPr/>
+        </p:nvSpPr>
+        <p:spPr>
+          <a:xfrm>
+            <a:off x="8788400" y="2413000"/>
+            <a:ext cx="2489200" cy="2540000"/>
+          </a:xfrm>
+          <a:prstGeom prst="rect">
+            <a:avLst/>
+          </a:prstGeom>
+          <a:noFill/>
+        </p:spPr>
+        <p:txBody>
+          <a:bodyPr wrap="square" lIns="0" tIns="0" rIns="0" bIns="0" anchor="t"/>
+          <a:lstStyle/>
+          <a:p>
+            <a:pPr marL="152400" indent="-152400" algn="l">
+              <a:spcAft>
+                <a:spcPts val="200"/>
+              </a:spcAft>
+              <a:buClr>
+                <a:srgbClr val="C1002A"/>
+              </a:buClr>
+              <a:buFont typeface="Arial"/>
+              <a:buChar char="•"/>
+            </a:pPr>
+            <a:r>
+              <a:rPr lang="de-DE" sz="1200" dirty="0">
+                <a:solidFill>
+                  <a:srgbClr val="262626"/>
+                </a:solidFill>
+              </a:rPr>
+              <a:t>Drei </a:t>
+            </a:r>
+            <a:r>
+              <a:rPr lang="de-DE" sz="1200" b="1" dirty="0">
+                <a:solidFill>
+                  <a:srgbClr val="262626"/>
+                </a:solidFill>
+              </a:rPr>
+              <a:t>Overhead-Gruppen</a:t>
+            </a:r>
+            <a:r>
+              <a:rPr lang="de-DE" sz="1200" dirty="0">
+                <a:solidFill>
+                  <a:srgbClr val="262626"/>
+                </a:solidFill>
+              </a:rPr>
+              <a:t>:</a:t>
+            </a:r>
+          </a:p>
+          <a:p>
+            <a:pPr marL="152400" indent="0" algn="l">
+              <a:spcAft>
+                <a:spcPts val="0"/>
+              </a:spcAft>
+              <a:buNone/>
+            </a:pPr>
+            <a:r>
+              <a:rPr lang="de-DE" sz="1100" dirty="0">
+                <a:solidFill>
+                  <a:srgbClr val="595959"/>
+                </a:solidFill>
+              </a:rPr>
+              <a:t>SF / NF / Merlin: 1,4–4,2 s</a:t>
+            </a:r>
+          </a:p>
+          <a:p>
+            <a:pPr marL="152400" indent="0" algn="l">
+              <a:spcAft>
+                <a:spcPts val="0"/>
+              </a:spcAft>
+              <a:buNone/>
+            </a:pPr>
+            <a:r>
+              <a:rPr lang="de-DE" sz="1100" dirty="0">
+                <a:solidFill>
+                  <a:srgbClr val="595959"/>
+                </a:solidFill>
+              </a:rPr>
+              <a:t>AiiDA: 5,1–10,3 s</a:t>
+            </a:r>
+          </a:p>
+          <a:p>
+            <a:pPr marL="152400" indent="0" algn="l">
+              <a:spcAft>
+                <a:spcPts val="1200"/>
+              </a:spcAft>
+              <a:buNone/>
+            </a:pPr>
+            <a:r>
+              <a:rPr lang="de-DE" sz="1100" dirty="0">
+                <a:solidFill>
+                  <a:srgbClr val="595959"/>
+                </a:solidFill>
+              </a:rPr>
+              <a:t>Pegasus: 171–221 s</a:t>
+            </a:r>
+          </a:p>
+          <a:p>
+            <a:pPr marL="152400" indent="-152400" algn="l">
+              <a:spcAft>
+                <a:spcPts val="1200"/>
+              </a:spcAft>
+              <a:buClr>
+                <a:srgbClr val="C1002A"/>
+              </a:buClr>
+              <a:buFont typeface="Arial"/>
+              <a:buChar char="•"/>
+            </a:pPr>
+            <a:r>
+              <a:rPr lang="de-DE" sz="1200" b="1" dirty="0">
+                <a:solidFill>
+                  <a:srgbClr val="262626"/>
+                </a:solidFill>
+              </a:rPr>
+              <a:t>Kein proportionaler Zusammenhang</a:t>
+            </a:r>
+            <a:r>
+              <a:rPr lang="de-DE" sz="1200" dirty="0">
+                <a:solidFill>
+                  <a:srgbClr val="262626"/>
+                </a:solidFill>
+              </a:rPr>
+              <a:t> zwischen Rechenlast und Overhead</a:t>
+            </a:r>
+          </a:p>
+          <a:p>
+            <a:pPr marL="152400" indent="-152400" algn="l">
+              <a:spcAft>
+                <a:spcPts val="200"/>
+              </a:spcAft>
+              <a:buClr>
+                <a:srgbClr val="C1002A"/>
+              </a:buClr>
+              <a:buFont typeface="Arial"/>
+              <a:buChar char="•"/>
+            </a:pPr>
+            <a:r>
+              <a:rPr lang="de-DE" sz="1200" b="1" dirty="0">
+                <a:solidFill>
+                  <a:srgbClr val="262626"/>
+                </a:solidFill>
+              </a:rPr>
+              <a:t>Workflowstruktur</a:t>
+            </a:r>
+            <a:r>
+              <a:rPr lang="de-DE" sz="1200" dirty="0">
+                <a:solidFill>
+                  <a:srgbClr val="262626"/>
+                </a:solidFill>
+              </a:rPr>
+              <a:t> teilweise relevant:</a:t>
+            </a:r>
+          </a:p>
+          <a:p>
+            <a:pPr marL="152400" indent="0" algn="l">
+              <a:spcAft>
+                <a:spcPts val="0"/>
+              </a:spcAft>
+              <a:buNone/>
+            </a:pPr>
+            <a:r>
+              <a:rPr lang="de-DE" sz="1100" dirty="0">
+                <a:solidFill>
+                  <a:srgbClr val="595959"/>
+                </a:solidFill>
+              </a:rPr>
+              <a:t>Scatter-Gather bei AiiDA und Pegasus mit erhöhtem Overhead</a:t>
+            </a:r>
+          </a:p>
+        </p:txBody>
+      </p:sp>
+    </p:spTree>
+    <p:extLst>
+      <p:ext uri="{BB962C8B-B14F-4D97-AF65-F5344CB8AC3E}">
+        <p14:creationId xmlns:p14="http://schemas.microsoft.com/office/powerpoint/2010/main" val="597007420"/>
+      </p:ext>
+    </p:extLst>
+  </p:cSld>
+  <p:clrMapOvr>
+    <a:masterClrMapping/>
+  </p:clrMapOvr>
+</p:sld>
+</file>
+
+<file path=ppt/slides/slide13.xml><?xml version="1.0" encoding="utf-8"?>
+<p:sld xmlns:a="http://schemas.openxmlformats.org/drawingml/2006/main" xmlns:r="http://schemas.openxmlformats.org/officeDocument/2006/relationships" xmlns:p="http://schemas.openxmlformats.org/presentationml/2006/main">
+  <p:cSld>
+    <p:spTree>
+      <p:nvGrpSpPr>
+        <p:cNvPr id="1" name=""/>
+        <p:cNvGrpSpPr/>
+        <p:nvPr/>
+      </p:nvGrpSpPr>
+      <p:grpSpPr>
+        <a:xfrm>
+          <a:off x="0" y="0"/>
+          <a:ext cx="0" cy="0"/>
+          <a:chOff x="0" y="0"/>
+          <a:chExt cx="0" cy="0"/>
+        </a:xfrm>
+      </p:grpSpPr>
+      <p:sp>
+        <p:nvSpPr>
+          <p:cNvPr id="2" name="Titel 1">
+            <a:extLst>
+              <a:ext uri="{FF2B5EF4-FFF2-40B4-BE49-F238E27FC236}">
+                <a16:creationId xmlns:a16="http://schemas.microsoft.com/office/drawing/2014/main" id="{E0A59EE0-1109-2D00-3FE5-6DB60B8782AE}"/>
+              </a:ext>
+            </a:extLst>
+          </p:cNvPr>
+          <p:cNvSpPr>
+            <a:spLocks noGrp="1"/>
+          </p:cNvSpPr>
+          <p:nvPr>
+            <p:ph type="title"/>
+          </p:nvPr>
+        </p:nvSpPr>
+        <p:spPr>
+          <a:xfrm>
+            <a:off x="1219200" y="812800"/>
+            <a:ext cx="10058400" cy="508000"/>
+          </a:xfrm>
+        </p:spPr>
+        <p:txBody>
+          <a:bodyPr wrap="square" lIns="0" tIns="0" rIns="0" bIns="0" anchor="t">
+            <a:normAutofit/>
+          </a:bodyPr>
+          <a:lstStyle/>
+          <a:p>
+            <a:pPr algn="l"/>
+            <a:r>
+              <a:rPr lang="de-DE" sz="2600" b="1" dirty="0">
+                <a:solidFill>
+                  <a:srgbClr val="262626"/>
+                </a:solidFill>
+              </a:rPr>
+              <a:t>Scatter-Gather: Gesamtlaufzeit</a:t>
+            </a:r>
+          </a:p>
+        </p:txBody>
+      </p:sp>
+      <p:pic>
+        <p:nvPicPr>
+          <p:cNvPr id="5" name="Inhaltsplatzhalter 4">
+            <a:extLst>
+              <a:ext uri="{FF2B5EF4-FFF2-40B4-BE49-F238E27FC236}">
+                <a16:creationId xmlns:a16="http://schemas.microsoft.com/office/drawing/2014/main" id="{93D76D50-CA3C-A0D8-8EB5-2BDD9851B9F0}"/>
+              </a:ext>
+            </a:extLst>
+          </p:cNvPr>
+          <p:cNvPicPr>
+            <a:picLocks noGrp="1" noChangeAspect="1"/>
+          </p:cNvPicPr>
+          <p:nvPr>
+            <p:ph idx="1"/>
+          </p:nvPr>
+        </p:nvPicPr>
+        <p:blipFill>
+          <a:blip r:embed="rId2"/>
+          <a:stretch>
+            <a:fillRect/>
+          </a:stretch>
+        </p:blipFill>
+        <p:spPr>
+          <a:xfrm>
+            <a:off x="1219200" y="1905000"/>
+            <a:ext cx="7264400" cy="3188985"/>
+          </a:xfrm>
+          <a:prstGeom prst="rect">
+            <a:avLst/>
+          </a:prstGeom>
+        </p:spPr>
+      </p:pic>
+      <p:sp>
+        <p:nvSpPr>
+          <p:cNvPr id="20" name="Akzentlinie"/>
+          <p:cNvSpPr/>
+          <p:nvPr/>
+        </p:nvSpPr>
+        <p:spPr>
+          <a:xfrm>
+            <a:off x="914400" y="812800"/>
+            <a:ext cx="50800" cy="431800"/>
+          </a:xfrm>
+          <a:prstGeom prst="rect">
+            <a:avLst/>
+          </a:prstGeom>
+          <a:solidFill>
+            <a:srgbClr val="C1002A"/>
+          </a:solidFill>
+          <a:ln>
+            <a:noFill/>
+          </a:ln>
+        </p:spPr>
+        <p:txBody>
+          <a:bodyPr/>
+          <a:lstStyle/>
+          <a:p>
+            <a:endParaRPr lang="de-DE"/>
+          </a:p>
+        </p:txBody>
+      </p:sp>
+      <p:sp>
+        <p:nvSpPr>
+          <p:cNvPr id="16" name="Abschnitt"/>
+          <p:cNvSpPr txBox="1"/>
+          <p:nvPr/>
+        </p:nvSpPr>
+        <p:spPr>
+          <a:xfrm>
+            <a:off x="1219200" y="1397000"/>
+            <a:ext cx="10058400" cy="177800"/>
+          </a:xfrm>
+          <a:prstGeom prst="rect">
+            <a:avLst/>
+          </a:prstGeom>
+          <a:noFill/>
+        </p:spPr>
+        <p:txBody>
+          <a:bodyPr wrap="square" lIns="0" tIns="0" rIns="0" bIns="0" anchor="t"/>
+          <a:lstStyle/>
+          <a:p>
+            <a:pPr algn="l"/>
+            <a:r>
+              <a:rPr lang="de-DE" sz="1000" b="1" spc="200" dirty="0">
+                <a:solidFill>
+                  <a:srgbClr val="C1002A"/>
+                </a:solidFill>
+              </a:rPr>
+              <a:t>MAKESPAN BEI 1, 2 UND 4 Teilstücke</a:t>
+            </a:r>
+          </a:p>
+        </p:txBody>
+      </p:sp>
+      <p:sp>
+        <p:nvSpPr>
+          <p:cNvPr id="21" name="Zentrale Ergebnisse"/>
+          <p:cNvSpPr txBox="1"/>
+          <p:nvPr/>
+        </p:nvSpPr>
+        <p:spPr>
+          <a:xfrm>
+            <a:off x="8788400" y="2006600"/>
+            <a:ext cx="2489200" cy="279400"/>
+          </a:xfrm>
+          <a:prstGeom prst="rect">
+            <a:avLst/>
+          </a:prstGeom>
+          <a:noFill/>
+        </p:spPr>
+        <p:txBody>
+          <a:bodyPr wrap="square" lIns="0" tIns="0" rIns="0" bIns="0" anchor="t"/>
+          <a:lstStyle/>
+          <a:p>
+            <a:pPr algn="l"/>
+            <a:r>
+              <a:rPr lang="de-DE" sz="1600" b="1" dirty="0">
+                <a:solidFill>
+                  <a:srgbClr val="262626"/>
+                </a:solidFill>
+              </a:rPr>
+              <a:t>Zentrale Ergebnisse</a:t>
+            </a:r>
+          </a:p>
+        </p:txBody>
+      </p:sp>
+      <p:sp>
+        <p:nvSpPr>
+          <p:cNvPr id="22" name="Ergebnisse"/>
+          <p:cNvSpPr txBox="1"/>
+          <p:nvPr/>
+        </p:nvSpPr>
+        <p:spPr>
+          <a:xfrm>
+            <a:off x="8788400" y="2413000"/>
+            <a:ext cx="2489200" cy="2540000"/>
+          </a:xfrm>
+          <a:prstGeom prst="rect">
+            <a:avLst/>
+          </a:prstGeom>
+          <a:noFill/>
+        </p:spPr>
+        <p:txBody>
+          <a:bodyPr wrap="square" lIns="0" tIns="0" rIns="0" bIns="0" anchor="t"/>
+          <a:lstStyle/>
+          <a:p>
+            <a:pPr marL="152400" indent="-152400" algn="l">
+              <a:spcAft>
+                <a:spcPts val="200"/>
+              </a:spcAft>
+              <a:buClr>
+                <a:srgbClr val="C1002A"/>
+              </a:buClr>
+              <a:buFont typeface="Arial"/>
+              <a:buChar char="•"/>
+            </a:pPr>
+            <a:r>
+              <a:rPr lang="de-DE" sz="1200" b="1" dirty="0">
+                <a:solidFill>
+                  <a:srgbClr val="262626"/>
+                </a:solidFill>
+              </a:rPr>
+              <a:t>Kurze Rechenlast</a:t>
+            </a:r>
+            <a:r>
+              <a:rPr lang="de-DE" sz="1200" dirty="0">
+                <a:solidFill>
+                  <a:srgbClr val="262626"/>
+                </a:solidFill>
+              </a:rPr>
+              <a:t>:</a:t>
+            </a:r>
+          </a:p>
+          <a:p>
+            <a:pPr marL="152400" indent="0" algn="l">
+              <a:spcAft>
+                <a:spcPts val="1200"/>
+              </a:spcAft>
+              <a:buNone/>
+            </a:pPr>
+            <a:r>
+              <a:rPr lang="de-DE" sz="1100" dirty="0">
+                <a:solidFill>
+                  <a:srgbClr val="595959"/>
+                </a:solidFill>
+              </a:rPr>
+              <a:t>geringer bzw. teilweise kein zusätzlicher Gewinn</a:t>
+            </a:r>
+          </a:p>
+          <a:p>
+            <a:pPr marL="152400" indent="-152400" algn="l">
+              <a:spcAft>
+                <a:spcPts val="200"/>
+              </a:spcAft>
+              <a:buClr>
+                <a:srgbClr val="C1002A"/>
+              </a:buClr>
+              <a:buFont typeface="Arial"/>
+              <a:buChar char="•"/>
+            </a:pPr>
+            <a:r>
+              <a:rPr lang="de-DE" sz="1200" b="1" dirty="0">
+                <a:solidFill>
+                  <a:srgbClr val="262626"/>
+                </a:solidFill>
+              </a:rPr>
+              <a:t>Mittlere und lange Rechenlast</a:t>
+            </a:r>
+            <a:r>
+              <a:rPr lang="de-DE" sz="1200" dirty="0">
+                <a:solidFill>
+                  <a:srgbClr val="262626"/>
+                </a:solidFill>
+              </a:rPr>
+              <a:t>:</a:t>
+            </a:r>
+          </a:p>
+          <a:p>
+            <a:pPr marL="152400" indent="0" algn="l">
+              <a:spcAft>
+                <a:spcPts val="1200"/>
+              </a:spcAft>
+              <a:buNone/>
+            </a:pPr>
+            <a:r>
+              <a:rPr lang="de-DE" sz="1100" dirty="0">
+                <a:solidFill>
+                  <a:srgbClr val="595959"/>
+                </a:solidFill>
+              </a:rPr>
+              <a:t>deutliche Verringerung des Makespans</a:t>
+            </a:r>
+          </a:p>
+          <a:p>
+            <a:pPr marL="152400" indent="-152400" algn="l">
+              <a:spcAft>
+                <a:spcPts val="0"/>
+              </a:spcAft>
+              <a:buClr>
+                <a:srgbClr val="C1002A"/>
+              </a:buClr>
+              <a:buFont typeface="Arial"/>
+              <a:buChar char="•"/>
+            </a:pPr>
+            <a:r>
+              <a:rPr lang="de-DE" sz="1200" b="1" dirty="0">
+                <a:solidFill>
+                  <a:srgbClr val="262626"/>
+                </a:solidFill>
+              </a:rPr>
+              <a:t>Parallelisierung</a:t>
+            </a:r>
+            <a:r>
+              <a:rPr lang="de-DE" sz="1200" dirty="0">
+                <a:solidFill>
+                  <a:srgbClr val="262626"/>
+                </a:solidFill>
+              </a:rPr>
+              <a:t> gewinnt mit wachsender Rechenlast an Bedeutung</a:t>
+            </a:r>
+          </a:p>
+        </p:txBody>
+      </p:sp>
+      <p:sp>
+        <p:nvSpPr>
+          <p:cNvPr id="3" name="Foliennummer"/>
+          <p:cNvSpPr txBox="1"/>
+          <p:nvPr/>
+        </p:nvSpPr>
+        <p:spPr>
+          <a:xfrm>
+            <a:off x="10769600" y="6197600"/>
+            <a:ext cx="508000" cy="254000"/>
+          </a:xfrm>
+          <a:prstGeom prst="rect">
+            <a:avLst/>
+          </a:prstGeom>
+          <a:noFill/>
+        </p:spPr>
+        <p:txBody>
+          <a:bodyPr wrap="square" lIns="0" tIns="0" rIns="0" bIns="0" anchor="t"/>
+          <a:lstStyle/>
+          <a:p>
+            <a:pPr algn="r"/>
+            <a:r>
+              <a:rPr lang="de-DE" sz="1200" dirty="0">
+                <a:solidFill>
+                  <a:srgbClr val="8C8C8C"/>
+                </a:solidFill>
+              </a:rPr>
+              <a:t>13</a:t>
+            </a:r>
+          </a:p>
+        </p:txBody>
+      </p:sp>
+      <p:cxnSp>
+        <p:nvCxnSpPr>
+          <p:cNvPr id="4" name="Fortschritt Linie"/>
+          <p:cNvCxnSpPr/>
+          <p:nvPr/>
+        </p:nvCxnSpPr>
+        <p:spPr>
+          <a:xfrm>
+            <a:off x="1219200" y="6172200"/>
+            <a:ext cx="5080000" cy="0"/>
+          </a:xfrm>
+          <a:prstGeom prst="line">
+            <a:avLst/>
+          </a:prstGeom>
+          <a:ln w="9525">
+            <a:solidFill>
+              <a:srgbClr val="D9D9D9"/>
+            </a:solidFill>
+          </a:ln>
+        </p:spPr>
+      </p:cxnSp>
+      <p:sp>
+        <p:nvSpPr>
+          <p:cNvPr id="6" name="Marker Motivation"/>
+          <p:cNvSpPr/>
+          <p:nvPr/>
+        </p:nvSpPr>
+        <p:spPr>
+          <a:xfrm>
+            <a:off x="1187450" y="6140450"/>
+            <a:ext cx="63500" cy="63500"/>
+          </a:xfrm>
+          <a:prstGeom prst="ellipse">
+            <a:avLst/>
+          </a:prstGeom>
+          <a:solidFill>
+            <a:srgbClr val="A6A6A6"/>
+          </a:solidFill>
+          <a:ln>
+            <a:noFill/>
+          </a:ln>
+        </p:spPr>
+        <p:txBody>
+          <a:bodyPr/>
+          <a:lstStyle/>
+          <a:p>
+            <a:endParaRPr lang="de-DE"/>
+          </a:p>
+        </p:txBody>
+      </p:sp>
+      <p:sp>
+        <p:nvSpPr>
+          <p:cNvPr id="7" name="Label Motivation"/>
+          <p:cNvSpPr txBox="1"/>
+          <p:nvPr/>
+        </p:nvSpPr>
+        <p:spPr>
+          <a:xfrm>
+            <a:off x="1219200" y="6273800"/>
+            <a:ext cx="1270000" cy="203200"/>
+          </a:xfrm>
+          <a:prstGeom prst="rect">
+            <a:avLst/>
+          </a:prstGeom>
+          <a:noFill/>
+        </p:spPr>
+        <p:txBody>
+          <a:bodyPr wrap="square" lIns="0" tIns="0" rIns="0" bIns="0" anchor="t"/>
+          <a:lstStyle/>
+          <a:p>
+            <a:pPr algn="l"/>
+            <a:r>
+              <a:rPr lang="de-DE" sz="1000" dirty="0">
+                <a:solidFill>
+                  <a:srgbClr val="A6A6A6"/>
+                </a:solidFill>
+              </a:rPr>
+              <a:t>Motivation</a:t>
+            </a:r>
+          </a:p>
+        </p:txBody>
+      </p:sp>
+      <p:sp>
+        <p:nvSpPr>
+          <p:cNvPr id="8" name="Marker Methodik"/>
+          <p:cNvSpPr/>
+          <p:nvPr/>
+        </p:nvSpPr>
+        <p:spPr>
+          <a:xfrm>
+            <a:off x="2457450" y="6140450"/>
+            <a:ext cx="63500" cy="63500"/>
+          </a:xfrm>
+          <a:prstGeom prst="ellipse">
+            <a:avLst/>
+          </a:prstGeom>
+          <a:solidFill>
+            <a:srgbClr val="A6A6A6"/>
+          </a:solidFill>
+          <a:ln>
+            <a:noFill/>
+          </a:ln>
+        </p:spPr>
+        <p:txBody>
+          <a:bodyPr/>
+          <a:lstStyle/>
+          <a:p>
+            <a:endParaRPr lang="de-DE"/>
+          </a:p>
+        </p:txBody>
+      </p:sp>
+      <p:sp>
+        <p:nvSpPr>
+          <p:cNvPr id="9" name="Label Methodik"/>
+          <p:cNvSpPr txBox="1"/>
+          <p:nvPr/>
+        </p:nvSpPr>
+        <p:spPr>
+          <a:xfrm>
+            <a:off x="1854200" y="6273800"/>
+            <a:ext cx="1270000" cy="203200"/>
+          </a:xfrm>
+          <a:prstGeom prst="rect">
+            <a:avLst/>
+          </a:prstGeom>
+          <a:noFill/>
+        </p:spPr>
+        <p:txBody>
+          <a:bodyPr wrap="square" lIns="0" tIns="0" rIns="0" bIns="0" anchor="t"/>
+          <a:lstStyle/>
+          <a:p>
+            <a:pPr algn="ctr"/>
+            <a:r>
+              <a:rPr lang="de-DE" sz="1000" dirty="0">
+                <a:solidFill>
+                  <a:srgbClr val="A6A6A6"/>
+                </a:solidFill>
+              </a:rPr>
+              <a:t>Methodik</a:t>
+            </a:r>
+          </a:p>
+        </p:txBody>
+      </p:sp>
+      <p:sp>
+        <p:nvSpPr>
+          <p:cNvPr id="10" name="Marker Systeme"/>
+          <p:cNvSpPr/>
+          <p:nvPr/>
+        </p:nvSpPr>
+        <p:spPr>
+          <a:xfrm>
+            <a:off x="3727450" y="6140450"/>
+            <a:ext cx="63500" cy="63500"/>
+          </a:xfrm>
+          <a:prstGeom prst="ellipse">
+            <a:avLst/>
+          </a:prstGeom>
+          <a:solidFill>
+            <a:srgbClr val="A6A6A6"/>
+          </a:solidFill>
+          <a:ln>
+            <a:noFill/>
+          </a:ln>
+        </p:spPr>
+        <p:txBody>
+          <a:bodyPr/>
+          <a:lstStyle/>
+          <a:p>
+            <a:endParaRPr lang="de-DE"/>
+          </a:p>
+        </p:txBody>
+      </p:sp>
+      <p:sp>
+        <p:nvSpPr>
+          <p:cNvPr id="11" name="Label Systeme"/>
+          <p:cNvSpPr txBox="1"/>
+          <p:nvPr/>
+        </p:nvSpPr>
+        <p:spPr>
+          <a:xfrm>
+            <a:off x="3124200" y="6273800"/>
+            <a:ext cx="1270000" cy="203200"/>
+          </a:xfrm>
+          <a:prstGeom prst="rect">
+            <a:avLst/>
+          </a:prstGeom>
+          <a:noFill/>
+        </p:spPr>
+        <p:txBody>
+          <a:bodyPr wrap="square" lIns="0" tIns="0" rIns="0" bIns="0" anchor="t"/>
+          <a:lstStyle/>
+          <a:p>
+            <a:pPr algn="ctr"/>
+            <a:r>
+              <a:rPr lang="de-DE" sz="1000" dirty="0">
+                <a:solidFill>
+                  <a:srgbClr val="A6A6A6"/>
+                </a:solidFill>
+              </a:rPr>
+              <a:t>Systeme</a:t>
+            </a:r>
+          </a:p>
+        </p:txBody>
+      </p:sp>
+      <p:sp>
+        <p:nvSpPr>
+          <p:cNvPr id="12" name="Marker Untersuchung"/>
+          <p:cNvSpPr/>
+          <p:nvPr/>
+        </p:nvSpPr>
+        <p:spPr>
+          <a:xfrm>
+            <a:off x="4984750" y="6127750"/>
+            <a:ext cx="88900" cy="88900"/>
+          </a:xfrm>
+          <a:prstGeom prst="ellipse">
+            <a:avLst/>
+          </a:prstGeom>
+          <a:solidFill>
+            <a:srgbClr val="C1002A"/>
+          </a:solidFill>
+          <a:ln>
+            <a:noFill/>
+          </a:ln>
+        </p:spPr>
+        <p:txBody>
+          <a:bodyPr/>
+          <a:lstStyle/>
+          <a:p>
+            <a:endParaRPr lang="de-DE"/>
+          </a:p>
+        </p:txBody>
+      </p:sp>
+      <p:sp>
+        <p:nvSpPr>
+          <p:cNvPr id="13" name="Label Untersuchung"/>
+          <p:cNvSpPr txBox="1"/>
+          <p:nvPr/>
+        </p:nvSpPr>
+        <p:spPr>
+          <a:xfrm>
+            <a:off x="4394200" y="6273800"/>
+            <a:ext cx="1270000" cy="203200"/>
+          </a:xfrm>
+          <a:prstGeom prst="rect">
+            <a:avLst/>
+          </a:prstGeom>
+          <a:noFill/>
+        </p:spPr>
+        <p:txBody>
+          <a:bodyPr wrap="square" lIns="0" tIns="0" rIns="0" bIns="0" anchor="t"/>
+          <a:lstStyle/>
+          <a:p>
+            <a:pPr algn="ctr"/>
+            <a:r>
+              <a:rPr lang="de-DE" sz="1000" b="1" dirty="0">
+                <a:solidFill>
+                  <a:srgbClr val="C1002A"/>
+                </a:solidFill>
+              </a:rPr>
+              <a:t>Untersuchung</a:t>
+            </a:r>
+          </a:p>
+        </p:txBody>
+      </p:sp>
+      <p:sp>
+        <p:nvSpPr>
+          <p:cNvPr id="14" name="Marker Fazit"/>
+          <p:cNvSpPr/>
+          <p:nvPr/>
+        </p:nvSpPr>
+        <p:spPr>
+          <a:xfrm>
+            <a:off x="6267450" y="6140450"/>
+            <a:ext cx="63500" cy="63500"/>
+          </a:xfrm>
+          <a:prstGeom prst="ellipse">
+            <a:avLst/>
+          </a:prstGeom>
+          <a:solidFill>
+            <a:srgbClr val="A6A6A6"/>
+          </a:solidFill>
+          <a:ln>
+            <a:noFill/>
+          </a:ln>
+        </p:spPr>
+        <p:txBody>
+          <a:bodyPr/>
+          <a:lstStyle/>
+          <a:p>
+            <a:endParaRPr lang="de-DE"/>
+          </a:p>
+        </p:txBody>
+      </p:sp>
+      <p:sp>
+        <p:nvSpPr>
+          <p:cNvPr id="15" name="Label Fazit"/>
+          <p:cNvSpPr txBox="1"/>
+          <p:nvPr/>
+        </p:nvSpPr>
+        <p:spPr>
+          <a:xfrm>
+            <a:off x="5029200" y="6273800"/>
+            <a:ext cx="1270000" cy="203200"/>
+          </a:xfrm>
+          <a:prstGeom prst="rect">
+            <a:avLst/>
+          </a:prstGeom>
+          <a:noFill/>
+        </p:spPr>
+        <p:txBody>
+          <a:bodyPr wrap="square" lIns="0" tIns="0" rIns="0" bIns="0" anchor="t"/>
+          <a:lstStyle/>
+          <a:p>
+            <a:pPr algn="r"/>
+            <a:r>
+              <a:rPr lang="de-DE" sz="1000" dirty="0">
+                <a:solidFill>
+                  <a:srgbClr val="A6A6A6"/>
+                </a:solidFill>
+              </a:rPr>
+              <a:t>Fazit</a:t>
+            </a:r>
+          </a:p>
+        </p:txBody>
+      </p:sp>
+    </p:spTree>
+    <p:extLst>
+      <p:ext uri="{BB962C8B-B14F-4D97-AF65-F5344CB8AC3E}">
+        <p14:creationId xmlns:p14="http://schemas.microsoft.com/office/powerpoint/2010/main" val="3310711324"/>
+      </p:ext>
+    </p:extLst>
+  </p:cSld>
+  <p:clrMapOvr>
+    <a:masterClrMapping/>
+  </p:clrMapOvr>
+</p:sld>
+</file>
+
+<file path=ppt/slides/slide14.xml><?xml version="1.0" encoding="utf-8"?>
+<p:sld xmlns:a="http://schemas.openxmlformats.org/drawingml/2006/main" xmlns:r="http://schemas.openxmlformats.org/officeDocument/2006/relationships" xmlns:p="http://schemas.openxmlformats.org/presentationml/2006/main" show="0">
+  <p:cSld>
+    <p:spTree>
+      <p:nvGrpSpPr>
+        <p:cNvPr id="1" name=""/>
+        <p:cNvGrpSpPr/>
+        <p:nvPr/>
+      </p:nvGrpSpPr>
+      <p:grpSpPr>
+        <a:xfrm>
+          <a:off x="0" y="0"/>
+          <a:ext cx="0" cy="0"/>
+          <a:chOff x="0" y="0"/>
+          <a:chExt cx="0" cy="0"/>
+        </a:xfrm>
+      </p:grpSpPr>
+      <p:sp>
+        <p:nvSpPr>
+          <p:cNvPr id="2" name="Titel 1">
+            <a:extLst>
+              <a:ext uri="{FF2B5EF4-FFF2-40B4-BE49-F238E27FC236}">
+                <a16:creationId xmlns:a16="http://schemas.microsoft.com/office/drawing/2014/main" id="{AA3E5E2F-3F12-D116-7CE7-D6ECFF7D2853}"/>
+              </a:ext>
+            </a:extLst>
+          </p:cNvPr>
+          <p:cNvSpPr>
+            <a:spLocks noGrp="1"/>
+          </p:cNvSpPr>
+          <p:nvPr>
+            <p:ph type="title"/>
+          </p:nvPr>
+        </p:nvSpPr>
+        <p:spPr>
+          <a:xfrm>
+            <a:off x="1219200" y="812800"/>
+            <a:ext cx="10058400" cy="508000"/>
+          </a:xfrm>
+        </p:spPr>
+        <p:txBody>
+          <a:bodyPr wrap="square" lIns="0" tIns="0" rIns="0" bIns="0" anchor="t">
+            <a:normAutofit/>
+          </a:bodyPr>
+          <a:lstStyle/>
+          <a:p>
+            <a:pPr algn="l">
+              <a:spcAft>
+                <a:spcPts val="0"/>
+              </a:spcAft>
+            </a:pPr>
+            <a:r>
+              <a:rPr lang="de-DE" sz="2600" b="1" dirty="0">
+                <a:solidFill>
+                  <a:srgbClr val="262626"/>
+                </a:solidFill>
+              </a:rPr>
+              <a:t>Quellenverzeichnis</a:t>
+            </a:r>
+          </a:p>
+        </p:txBody>
+      </p:sp>
+      <p:sp>
+        <p:nvSpPr>
+          <p:cNvPr id="3" name="Inhaltsplatzhalter 2">
+            <a:extLst>
+              <a:ext uri="{FF2B5EF4-FFF2-40B4-BE49-F238E27FC236}">
+                <a16:creationId xmlns:a16="http://schemas.microsoft.com/office/drawing/2014/main" id="{440A9FB2-E4B2-A71F-E04B-B10EEFD4F2B4}"/>
+              </a:ext>
+            </a:extLst>
+          </p:cNvPr>
+          <p:cNvSpPr>
+            <a:spLocks noGrp="1"/>
+          </p:cNvSpPr>
+          <p:nvPr>
+            <p:ph idx="1"/>
+          </p:nvPr>
+        </p:nvSpPr>
+        <p:spPr>
+          <a:xfrm>
+            <a:off x="1219200" y="1905000"/>
+            <a:ext cx="10058400" cy="3810000"/>
+          </a:xfrm>
+        </p:spPr>
+        <p:txBody>
+          <a:bodyPr wrap="square" lIns="0" tIns="0" rIns="0" bIns="0" anchor="t">
+            <a:normAutofit/>
+          </a:bodyPr>
+          <a:lstStyle/>
+          <a:p>
+            <a:pPr marL="0" indent="0" algn="l">
+              <a:spcAft>
+                <a:spcPts val="800"/>
+              </a:spcAft>
+              <a:buNone/>
+            </a:pPr>
+            <a:r>
+              <a:rPr lang="de-DE" sz="1400" b="1" dirty="0">
+                <a:solidFill>
+                  <a:srgbClr val="262626"/>
+                </a:solidFill>
+              </a:rPr>
+              <a:t>Logos der Workflow-Management-Systeme</a:t>
+            </a:r>
+          </a:p>
+          <a:p>
+            <a:pPr marL="0" indent="0" algn="l">
+              <a:spcAft>
+                <a:spcPts val="400"/>
+              </a:spcAft>
+              <a:buNone/>
+            </a:pPr>
+            <a:r>
+              <a:rPr lang="de-DE" sz="1200" dirty="0">
+                <a:solidFill>
+                  <a:srgbClr val="262626"/>
+                </a:solidFill>
+              </a:rPr>
+              <a:t>Nextflow</a:t>
+            </a:r>
+            <a:r>
+              <a:rPr lang="de-DE" sz="1200" dirty="0">
+                <a:solidFill>
+                  <a:srgbClr val="595959"/>
+                </a:solidFill>
+              </a:rPr>
+              <a:t> – https://workflows.community/systems/nextflow/</a:t>
+            </a:r>
+          </a:p>
+          <a:p>
+            <a:pPr marL="0" indent="0" algn="l">
+              <a:spcAft>
+                <a:spcPts val="400"/>
+              </a:spcAft>
+              <a:buNone/>
+            </a:pPr>
+            <a:r>
+              <a:rPr lang="de-DE" sz="1200" dirty="0">
+                <a:solidFill>
+                  <a:srgbClr val="262626"/>
+                </a:solidFill>
+              </a:rPr>
+              <a:t>StreamFlow</a:t>
+            </a:r>
+            <a:r>
+              <a:rPr lang="de-DE" sz="1200" dirty="0">
+                <a:solidFill>
+                  <a:srgbClr val="595959"/>
+                </a:solidFill>
+              </a:rPr>
+              <a:t> – https://workflows.community/systems/streamflow/</a:t>
+            </a:r>
+          </a:p>
+          <a:p>
+            <a:pPr marL="0" indent="0" algn="l">
+              <a:spcAft>
+                <a:spcPts val="400"/>
+              </a:spcAft>
+              <a:buNone/>
+            </a:pPr>
+            <a:r>
+              <a:rPr lang="de-DE" sz="1200" dirty="0">
+                <a:solidFill>
+                  <a:srgbClr val="262626"/>
+                </a:solidFill>
+              </a:rPr>
+              <a:t>Merlin</a:t>
+            </a:r>
+            <a:r>
+              <a:rPr lang="de-DE" sz="1200" dirty="0">
+                <a:solidFill>
+                  <a:srgbClr val="595959"/>
+                </a:solidFill>
+              </a:rPr>
+              <a:t> – https://workflows.community/systems/merlin/</a:t>
+            </a:r>
+          </a:p>
+          <a:p>
+            <a:pPr marL="0" indent="0" algn="l">
+              <a:spcAft>
+                <a:spcPts val="400"/>
+              </a:spcAft>
+              <a:buNone/>
+            </a:pPr>
+            <a:r>
+              <a:rPr lang="de-DE" sz="1200" dirty="0">
+                <a:solidFill>
+                  <a:srgbClr val="262626"/>
+                </a:solidFill>
+              </a:rPr>
+              <a:t>Pegasus</a:t>
+            </a:r>
+            <a:r>
+              <a:rPr lang="de-DE" sz="1200" dirty="0">
+                <a:solidFill>
+                  <a:srgbClr val="595959"/>
+                </a:solidFill>
+              </a:rPr>
+              <a:t> – https://workflows.community/systems/pegasus/</a:t>
+            </a:r>
+          </a:p>
+          <a:p>
+            <a:pPr marL="0" indent="0" algn="l">
+              <a:spcAft>
+                <a:spcPts val="400"/>
+              </a:spcAft>
+              <a:buNone/>
+            </a:pPr>
+            <a:r>
+              <a:rPr lang="de-DE" sz="1200" dirty="0">
+                <a:solidFill>
+                  <a:srgbClr val="262626"/>
+                </a:solidFill>
+              </a:rPr>
+              <a:t>AiiDA</a:t>
+            </a:r>
+            <a:r>
+              <a:rPr lang="de-DE" sz="1200" dirty="0">
+                <a:solidFill>
+                  <a:srgbClr val="595959"/>
+                </a:solidFill>
+              </a:rPr>
+              <a:t> – https://workflows.community/systems/aiida-core/</a:t>
+            </a:r>
+          </a:p>
+          <a:p>
+            <a:pPr marL="0" indent="0" algn="l">
+              <a:spcAft>
+                <a:spcPts val="0"/>
+              </a:spcAft>
+              <a:buNone/>
+            </a:pPr>
+            <a:r>
+              <a:rPr lang="de-DE" sz="1100" dirty="0">
+                <a:solidFill>
+                  <a:srgbClr val="595959"/>
+                </a:solidFill>
+              </a:rPr>
+              <a:t>Abruf: 01.09.2026</a:t>
+            </a:r>
+          </a:p>
+        </p:txBody>
+      </p:sp>
+      <p:sp>
+        <p:nvSpPr>
+          <p:cNvPr id="20" name="Akzentlinie"/>
+          <p:cNvSpPr/>
+          <p:nvPr/>
+        </p:nvSpPr>
+        <p:spPr>
+          <a:xfrm>
+            <a:off x="914400" y="812800"/>
+            <a:ext cx="50800" cy="431800"/>
+          </a:xfrm>
+          <a:prstGeom prst="rect">
+            <a:avLst/>
+          </a:prstGeom>
+          <a:solidFill>
+            <a:srgbClr val="C1002A"/>
+          </a:solidFill>
+          <a:ln>
+            <a:noFill/>
+          </a:ln>
+        </p:spPr>
+        <p:txBody>
+          <a:bodyPr/>
+          <a:lstStyle/>
+          <a:p>
+            <a:endParaRPr lang="de-DE"/>
+          </a:p>
+        </p:txBody>
+      </p:sp>
+      <p:sp>
+        <p:nvSpPr>
+          <p:cNvPr id="40" name="Foliennummer"/>
+          <p:cNvSpPr txBox="1"/>
+          <p:nvPr/>
+        </p:nvSpPr>
+        <p:spPr>
+          <a:xfrm>
+            <a:off x="10769600" y="6197600"/>
+            <a:ext cx="508000" cy="254000"/>
+          </a:xfrm>
+          <a:prstGeom prst="rect">
+            <a:avLst/>
+          </a:prstGeom>
+          <a:noFill/>
+        </p:spPr>
+        <p:txBody>
+          <a:bodyPr wrap="square" lIns="0" tIns="0" rIns="0" bIns="0" anchor="t"/>
+          <a:lstStyle/>
+          <a:p>
+            <a:pPr algn="r">
+              <a:spcAft>
+                <a:spcPts val="0"/>
+              </a:spcAft>
+            </a:pPr>
+            <a:r>
+              <a:rPr lang="de-DE" sz="1200" dirty="0">
+                <a:solidFill>
+                  <a:srgbClr val="8C8C8C"/>
+                </a:solidFill>
+              </a:rPr>
+              <a:t>14</a:t>
+            </a:r>
+          </a:p>
+        </p:txBody>
+      </p:sp>
+    </p:spTree>
+    <p:extLst>
+      <p:ext uri="{BB962C8B-B14F-4D97-AF65-F5344CB8AC3E}">
+        <p14:creationId xmlns:p14="http://schemas.microsoft.com/office/powerpoint/2010/main" val="4237940801"/>
+      </p:ext>
+    </p:extLst>
+  </p:cSld>
+  <p:clrMapOvr>
+    <a:masterClrMapping/>
+  </p:clrMapOvr>
+</p:sld>
+</file>
+
+<file path=ppt/slides/slide15.xml><?xml version="1.0" encoding="utf-8"?>
+<p:sld xmlns:a="http://schemas.openxmlformats.org/drawingml/2006/main" xmlns:r="http://schemas.openxmlformats.org/officeDocument/2006/relationships" xmlns:p="http://schemas.openxmlformats.org/presentationml/2006/main">
+  <p:cSld>
+    <p:spTree>
+      <p:nvGrpSpPr>
+        <p:cNvPr id="1" name=""/>
+        <p:cNvGrpSpPr/>
+        <p:nvPr/>
+      </p:nvGrpSpPr>
+      <p:grpSpPr>
+        <a:xfrm>
+          <a:off x="0" y="0"/>
+          <a:ext cx="0" cy="0"/>
+          <a:chOff x="0" y="0"/>
+          <a:chExt cx="0" cy="0"/>
+        </a:xfrm>
+      </p:grpSpPr>
+      <p:sp>
+        <p:nvSpPr>
+          <p:cNvPr id="2" name="Titel 1">
+            <a:extLst>
+              <a:ext uri="{FF2B5EF4-FFF2-40B4-BE49-F238E27FC236}">
+                <a16:creationId xmlns:a16="http://schemas.microsoft.com/office/drawing/2014/main" id="{D183A317-8F96-271A-B21A-147B6A11BC00}"/>
+              </a:ext>
+            </a:extLst>
+          </p:cNvPr>
+          <p:cNvSpPr>
+            <a:spLocks noGrp="1"/>
+          </p:cNvSpPr>
+          <p:nvPr>
+            <p:ph type="title"/>
+          </p:nvPr>
+        </p:nvSpPr>
+        <p:spPr/>
+        <p:txBody>
+          <a:bodyPr/>
+          <a:lstStyle/>
+          <a:p>
+            <a:endParaRPr lang="de-DE"/>
+          </a:p>
+        </p:txBody>
+      </p:sp>
+      <p:pic>
+        <p:nvPicPr>
+          <p:cNvPr id="5" name="Inhaltsplatzhalter 4">
+            <a:extLst>
+              <a:ext uri="{FF2B5EF4-FFF2-40B4-BE49-F238E27FC236}">
+                <a16:creationId xmlns:a16="http://schemas.microsoft.com/office/drawing/2014/main" id="{C38C7638-4172-2B59-2CEA-E311165E6DF3}"/>
+              </a:ext>
+            </a:extLst>
+          </p:cNvPr>
+          <p:cNvPicPr>
+            <a:picLocks noGrp="1" noChangeAspect="1"/>
+          </p:cNvPicPr>
+          <p:nvPr>
+            <p:ph idx="1"/>
+          </p:nvPr>
+        </p:nvPicPr>
+        <p:blipFill>
+          <a:blip r:embed="rId2"/>
+          <a:stretch>
+            <a:fillRect/>
+          </a:stretch>
+        </p:blipFill>
+        <p:spPr>
+          <a:xfrm>
+            <a:off x="838200" y="1661916"/>
+            <a:ext cx="6629400" cy="2322709"/>
+          </a:xfrm>
+          <a:prstGeom prst="rect">
+            <a:avLst/>
+          </a:prstGeom>
+        </p:spPr>
+      </p:pic>
+      <p:pic>
+        <p:nvPicPr>
+          <p:cNvPr id="7" name="Grafik 6">
+            <a:extLst>
+              <a:ext uri="{FF2B5EF4-FFF2-40B4-BE49-F238E27FC236}">
+                <a16:creationId xmlns:a16="http://schemas.microsoft.com/office/drawing/2014/main" id="{4B856759-CD25-F1F8-B4C0-BA83708058AE}"/>
+              </a:ext>
+            </a:extLst>
+          </p:cNvPr>
+          <p:cNvPicPr>
+            <a:picLocks noChangeAspect="1"/>
+          </p:cNvPicPr>
+          <p:nvPr/>
+        </p:nvPicPr>
+        <p:blipFill>
+          <a:blip r:embed="rId3"/>
+          <a:stretch>
+            <a:fillRect/>
+          </a:stretch>
+        </p:blipFill>
+        <p:spPr>
+          <a:xfrm>
+            <a:off x="914400" y="3984625"/>
+            <a:ext cx="4587580" cy="2508250"/>
+          </a:xfrm>
+          <a:prstGeom prst="rect">
+            <a:avLst/>
+          </a:prstGeom>
+        </p:spPr>
+      </p:pic>
+    </p:spTree>
+    <p:extLst>
+      <p:ext uri="{BB962C8B-B14F-4D97-AF65-F5344CB8AC3E}">
+        <p14:creationId xmlns:p14="http://schemas.microsoft.com/office/powerpoint/2010/main" val="909796823"/>
+      </p:ext>
+    </p:extLst>
+  </p:cSld>
+  <p:clrMapOvr>
+    <a:masterClrMapping/>
+  </p:clrMapOvr>
+</p:sld>
+</file>
+
 <file path=ppt/slides/slide2.xml><?xml version="1.0" encoding="utf-8"?>
 <p:sld xmlns:a="http://schemas.openxmlformats.org/drawingml/2006/main" xmlns:r="http://schemas.openxmlformats.org/officeDocument/2006/relationships" xmlns:p="http://schemas.openxmlformats.org/presentationml/2006/main">
   <p:cSld>
@@ -7159,7 +13088,7 @@
         </p:nvSpPr>
         <p:spPr>
           <a:xfrm>
-            <a:off x="2047240" y="2997200"/>
+            <a:off x="2047239" y="2997200"/>
             <a:ext cx="355600" cy="38100"/>
           </a:xfrm>
           <a:prstGeom prst="rect">
@@ -7281,7 +13210,7 @@
         </p:nvSpPr>
         <p:spPr>
           <a:xfrm>
-            <a:off x="6070600" y="2997200"/>
+            <a:off x="8082280" y="2997200"/>
             <a:ext cx="355600" cy="38100"/>
           </a:xfrm>
           <a:prstGeom prst="rect">
@@ -7310,7 +13239,7 @@
         </p:nvSpPr>
         <p:spPr>
           <a:xfrm>
-            <a:off x="5242560" y="3200400"/>
+            <a:off x="7254240" y="3200400"/>
             <a:ext cx="2011680" cy="431800"/>
           </a:xfrm>
           <a:prstGeom prst="rect">
@@ -7342,7 +13271,7 @@
         </p:nvSpPr>
         <p:spPr>
           <a:xfrm>
-            <a:off x="8082280" y="2997200"/>
+            <a:off x="6070600" y="2997200"/>
             <a:ext cx="355600" cy="38100"/>
           </a:xfrm>
           <a:prstGeom prst="rect">
@@ -7371,7 +13300,7 @@
         </p:nvSpPr>
         <p:spPr>
           <a:xfrm>
-            <a:off x="7254240" y="3200400"/>
+            <a:off x="5242560" y="3200400"/>
             <a:ext cx="2011680" cy="431800"/>
           </a:xfrm>
           <a:prstGeom prst="rect">
@@ -7831,6 +13760,196 @@
                 </a:solidFill>
               </a:rPr>
               <a:t>Fazit</a:t>
+            </a:r>
+          </a:p>
+        </p:txBody>
+      </p:sp>
+      <p:pic>
+        <p:nvPicPr>
+          <p:cNvPr id="15" name="Grafik 14">
+            <a:extLst>
+              <a:ext uri="{FF2B5EF4-FFF2-40B4-BE49-F238E27FC236}">
+                <a16:creationId xmlns:a16="http://schemas.microsoft.com/office/drawing/2014/main" id="{D3E33774-80CE-598E-9215-58D1F38F7782}"/>
+              </a:ext>
+            </a:extLst>
+          </p:cNvPr>
+          <p:cNvPicPr>
+            <a:picLocks noChangeAspect="1"/>
+          </p:cNvPicPr>
+          <p:nvPr/>
+        </p:nvPicPr>
+        <p:blipFill>
+          <a:blip r:embed="rId2"/>
+          <a:stretch>
+            <a:fillRect/>
+          </a:stretch>
+        </p:blipFill>
+        <p:spPr>
+          <a:xfrm>
+            <a:off x="1717039" y="1803400"/>
+            <a:ext cx="1016000" cy="1016000"/>
+          </a:xfrm>
+          <a:prstGeom prst="rect">
+            <a:avLst/>
+          </a:prstGeom>
+        </p:spPr>
+      </p:pic>
+      <p:pic>
+        <p:nvPicPr>
+          <p:cNvPr id="17" name="Grafik 16">
+            <a:extLst>
+              <a:ext uri="{FF2B5EF4-FFF2-40B4-BE49-F238E27FC236}">
+                <a16:creationId xmlns:a16="http://schemas.microsoft.com/office/drawing/2014/main" id="{AE676D52-19CF-8D62-9EE2-58154F08EB63}"/>
+              </a:ext>
+            </a:extLst>
+          </p:cNvPr>
+          <p:cNvPicPr>
+            <a:picLocks noChangeAspect="1"/>
+          </p:cNvPicPr>
+          <p:nvPr/>
+        </p:nvPicPr>
+        <p:blipFill>
+          <a:blip r:embed="rId3"/>
+          <a:stretch>
+            <a:fillRect/>
+          </a:stretch>
+        </p:blipFill>
+        <p:spPr>
+          <a:xfrm>
+            <a:off x="3728720" y="1803400"/>
+            <a:ext cx="1016000" cy="1016000"/>
+          </a:xfrm>
+          <a:prstGeom prst="rect">
+            <a:avLst/>
+          </a:prstGeom>
+        </p:spPr>
+      </p:pic>
+      <p:pic>
+        <p:nvPicPr>
+          <p:cNvPr id="19" name="Grafik 18">
+            <a:extLst>
+              <a:ext uri="{FF2B5EF4-FFF2-40B4-BE49-F238E27FC236}">
+                <a16:creationId xmlns:a16="http://schemas.microsoft.com/office/drawing/2014/main" id="{DAE37E44-F187-07E0-8E86-D341414581EF}"/>
+              </a:ext>
+            </a:extLst>
+          </p:cNvPr>
+          <p:cNvPicPr>
+            <a:picLocks noChangeAspect="1"/>
+          </p:cNvPicPr>
+          <p:nvPr/>
+        </p:nvPicPr>
+        <p:blipFill>
+          <a:blip r:embed="rId4"/>
+          <a:stretch>
+            <a:fillRect/>
+          </a:stretch>
+        </p:blipFill>
+        <p:spPr>
+          <a:xfrm>
+            <a:off x="7752080" y="1803400"/>
+            <a:ext cx="1016000" cy="1016000"/>
+          </a:xfrm>
+          <a:prstGeom prst="rect">
+            <a:avLst/>
+          </a:prstGeom>
+        </p:spPr>
+      </p:pic>
+      <p:pic>
+        <p:nvPicPr>
+          <p:cNvPr id="27" name="Grafik 26">
+            <a:extLst>
+              <a:ext uri="{FF2B5EF4-FFF2-40B4-BE49-F238E27FC236}">
+                <a16:creationId xmlns:a16="http://schemas.microsoft.com/office/drawing/2014/main" id="{BB86D7B3-0AAD-B032-FEDE-AB51B4F39456}"/>
+              </a:ext>
+            </a:extLst>
+          </p:cNvPr>
+          <p:cNvPicPr>
+            <a:picLocks noChangeAspect="1"/>
+          </p:cNvPicPr>
+          <p:nvPr/>
+        </p:nvPicPr>
+        <p:blipFill>
+          <a:blip r:embed="rId5"/>
+          <a:stretch>
+            <a:fillRect/>
+          </a:stretch>
+        </p:blipFill>
+        <p:spPr>
+          <a:xfrm>
+            <a:off x="5824565" y="1803400"/>
+            <a:ext cx="847668" cy="1016000"/>
+          </a:xfrm>
+          <a:prstGeom prst="rect">
+            <a:avLst/>
+          </a:prstGeom>
+        </p:spPr>
+      </p:pic>
+      <p:pic>
+        <p:nvPicPr>
+          <p:cNvPr id="29" name="Grafik 28">
+            <a:extLst>
+              <a:ext uri="{FF2B5EF4-FFF2-40B4-BE49-F238E27FC236}">
+                <a16:creationId xmlns:a16="http://schemas.microsoft.com/office/drawing/2014/main" id="{EEE2CFA3-5394-B97C-1E6A-B856243077BF}"/>
+              </a:ext>
+            </a:extLst>
+          </p:cNvPr>
+          <p:cNvPicPr>
+            <a:picLocks noChangeAspect="1"/>
+          </p:cNvPicPr>
+          <p:nvPr/>
+        </p:nvPicPr>
+        <p:blipFill>
+          <a:blip r:embed="rId6"/>
+          <a:stretch>
+            <a:fillRect/>
+          </a:stretch>
+        </p:blipFill>
+        <p:spPr>
+          <a:xfrm>
+            <a:off x="9763760" y="1803400"/>
+            <a:ext cx="1016000" cy="1016000"/>
+          </a:xfrm>
+          <a:prstGeom prst="rect">
+            <a:avLst/>
+          </a:prstGeom>
+        </p:spPr>
+      </p:pic>
+      <p:sp>
+        <p:nvSpPr>
+          <p:cNvPr id="35" name="Hinweis Logoquellen">
+            <a:extLst>
+              <a:ext uri="{FF2B5EF4-FFF2-40B4-BE49-F238E27FC236}">
+                <a16:creationId xmlns:a16="http://schemas.microsoft.com/office/drawing/2014/main" id="{0F13586A-123C-614B-94EE-A2E96AA06623}"/>
+              </a:ext>
+            </a:extLst>
+          </p:cNvPr>
+          <p:cNvSpPr txBox="1"/>
+          <p:nvPr/>
+        </p:nvSpPr>
+        <p:spPr>
+          <a:xfrm>
+            <a:off x="1219200" y="5588000"/>
+            <a:ext cx="3810000" cy="177800"/>
+          </a:xfrm>
+          <a:prstGeom prst="rect">
+            <a:avLst/>
+          </a:prstGeom>
+          <a:noFill/>
+        </p:spPr>
+        <p:txBody>
+          <a:bodyPr vertOverflow="overflow" vert="horz" wrap="square" rtlCol="0" anchor="t">
+            <a:noAutofit/>
+          </a:bodyPr>
+          <a:lstStyle/>
+          <a:p>
+            <a:pPr algn="l"/>
+            <a:r>
+              <a:rPr lang="de-DE" sz="900">
+                <a:solidFill>
+                  <a:srgbClr val="8C8C8C"/>
+                </a:solidFill>
+              </a:rPr>
+              <a:t>Logoquellen: siehe Quellenverzeichnis</a:t>
             </a:r>
           </a:p>
         </p:txBody>
@@ -10233,8 +16352,8 @@
         </p:nvCxnSpPr>
         <p:spPr>
           <a:xfrm>
-            <a:off x="6248400" y="1778000"/>
-            <a:ext cx="0" cy="4089400"/>
+            <a:off x="6248400" y="1524000"/>
+            <a:ext cx="0" cy="3937000"/>
           </a:xfrm>
           <a:prstGeom prst="straightConnector1">
             <a:avLst/>
@@ -10254,7 +16373,7 @@
         </p:nvCxnSpPr>
         <p:spPr>
           <a:xfrm>
-            <a:off x="1219200" y="3835400"/>
+            <a:off x="1219200" y="3543300"/>
             <a:ext cx="10058400" cy="0"/>
           </a:xfrm>
           <a:prstGeom prst="straightConnector1">
@@ -10275,7 +16394,7 @@
         </p:nvSpPr>
         <p:spPr>
           <a:xfrm>
-            <a:off x="1219200" y="1752600"/>
+            <a:off x="1219200" y="1498600"/>
             <a:ext cx="4622800" cy="203200"/>
           </a:xfrm>
           <a:prstGeom prst="rect">
@@ -10307,7 +16426,7 @@
         </p:nvCxnSpPr>
         <p:spPr>
           <a:xfrm>
-            <a:off x="1270000" y="2794000"/>
+            <a:off x="1270000" y="2540000"/>
             <a:ext cx="4470400" cy="0"/>
           </a:xfrm>
           <a:prstGeom prst="straightConnector1">
@@ -10329,7 +16448,7 @@
         </p:nvSpPr>
         <p:spPr>
           <a:xfrm>
-            <a:off x="1422400" y="2616200"/>
+            <a:off x="1422400" y="2362200"/>
             <a:ext cx="4165600" cy="177800"/>
           </a:xfrm>
           <a:prstGeom prst="rect">
@@ -10359,7 +16478,7 @@
         </p:nvCxnSpPr>
         <p:spPr>
           <a:xfrm>
-            <a:off x="1422400" y="2489200"/>
+            <a:off x="1422400" y="2235200"/>
             <a:ext cx="0" cy="533400"/>
           </a:xfrm>
           <a:prstGeom prst="straightConnector1">
@@ -10381,7 +16500,7 @@
         </p:nvCxnSpPr>
         <p:spPr>
           <a:xfrm>
-            <a:off x="5588000" y="2489200"/>
+            <a:off x="5588000" y="2235200"/>
             <a:ext cx="0" cy="533400"/>
           </a:xfrm>
           <a:prstGeom prst="straightConnector1">
@@ -10403,7 +16522,7 @@
         </p:nvCxnSpPr>
         <p:spPr>
           <a:xfrm>
-            <a:off x="1422400" y="2971800"/>
+            <a:off x="1422400" y="2717800"/>
             <a:ext cx="4165600" cy="0"/>
           </a:xfrm>
           <a:prstGeom prst="straightConnector1">
@@ -10426,7 +16545,7 @@
         </p:nvSpPr>
         <p:spPr>
           <a:xfrm>
-            <a:off x="2679700" y="3035300"/>
+            <a:off x="2679700" y="2781300"/>
             <a:ext cx="1651000" cy="177800"/>
           </a:xfrm>
           <a:prstGeom prst="rect">
@@ -10458,7 +16577,7 @@
         </p:nvSpPr>
         <p:spPr>
           <a:xfrm>
-            <a:off x="1219200" y="3302000"/>
+            <a:off x="1219200" y="3048000"/>
             <a:ext cx="4622800" cy="431800"/>
           </a:xfrm>
           <a:prstGeom prst="rect">
@@ -10499,7 +16618,7 @@
         </p:nvSpPr>
         <p:spPr>
           <a:xfrm>
-            <a:off x="6654800" y="1752600"/>
+            <a:off x="6654800" y="1498600"/>
             <a:ext cx="4622800" cy="203200"/>
           </a:xfrm>
           <a:prstGeom prst="rect">
@@ -10531,7 +16650,7 @@
         </p:nvCxnSpPr>
         <p:spPr>
           <a:xfrm>
-            <a:off x="6705600" y="2794000"/>
+            <a:off x="6705600" y="2540000"/>
             <a:ext cx="4470400" cy="0"/>
           </a:xfrm>
           <a:prstGeom prst="straightConnector1">
@@ -10553,7 +16672,7 @@
         </p:nvSpPr>
         <p:spPr>
           <a:xfrm>
-            <a:off x="6654800" y="2286000"/>
+            <a:off x="6654800" y="2032000"/>
             <a:ext cx="965200" cy="177800"/>
           </a:xfrm>
           <a:prstGeom prst="rect">
@@ -10585,7 +16704,7 @@
         </p:nvSpPr>
         <p:spPr>
           <a:xfrm>
-            <a:off x="6654800" y="2616200"/>
+            <a:off x="6654800" y="2362200"/>
             <a:ext cx="965200" cy="177800"/>
           </a:xfrm>
           <a:prstGeom prst="rect">
@@ -10617,7 +16736,7 @@
         </p:nvSpPr>
         <p:spPr>
           <a:xfrm>
-            <a:off x="7696200" y="2286000"/>
+            <a:off x="7696200" y="2032000"/>
             <a:ext cx="2120900" cy="177800"/>
           </a:xfrm>
           <a:prstGeom prst="rect">
@@ -10647,7 +16766,7 @@
         </p:nvSpPr>
         <p:spPr>
           <a:xfrm>
-            <a:off x="7696200" y="2616200"/>
+            <a:off x="7696200" y="2362200"/>
             <a:ext cx="2679700" cy="177800"/>
           </a:xfrm>
           <a:prstGeom prst="rect">
@@ -10677,7 +16796,7 @@
         </p:nvCxnSpPr>
         <p:spPr>
           <a:xfrm>
-            <a:off x="9817100" y="2209800"/>
+            <a:off x="9817100" y="1955800"/>
             <a:ext cx="0" cy="812800"/>
           </a:xfrm>
           <a:prstGeom prst="straightConnector1">
@@ -10699,7 +16818,7 @@
         </p:nvCxnSpPr>
         <p:spPr>
           <a:xfrm>
-            <a:off x="10375900" y="2209800"/>
+            <a:off x="10375900" y="1955800"/>
             <a:ext cx="0" cy="812800"/>
           </a:xfrm>
           <a:prstGeom prst="straightConnector1">
@@ -10721,7 +16840,7 @@
         </p:nvCxnSpPr>
         <p:spPr>
           <a:xfrm>
-            <a:off x="9817100" y="2971800"/>
+            <a:off x="9817100" y="2717800"/>
             <a:ext cx="558800" cy="0"/>
           </a:xfrm>
           <a:prstGeom prst="straightConnector1">
@@ -10744,7 +16863,7 @@
         </p:nvSpPr>
         <p:spPr>
           <a:xfrm>
-            <a:off x="9461500" y="3035300"/>
+            <a:off x="9461500" y="2781300"/>
             <a:ext cx="1270000" cy="177800"/>
           </a:xfrm>
           <a:prstGeom prst="rect">
@@ -10776,7 +16895,7 @@
         </p:nvSpPr>
         <p:spPr>
           <a:xfrm>
-            <a:off x="6654800" y="3302000"/>
+            <a:off x="6654800" y="3048000"/>
             <a:ext cx="4622800" cy="431800"/>
           </a:xfrm>
           <a:prstGeom prst="rect">
@@ -10837,7 +16956,7 @@
         </p:nvSpPr>
         <p:spPr>
           <a:xfrm>
-            <a:off x="1219200" y="3987800"/>
+            <a:off x="1219200" y="3657600"/>
             <a:ext cx="4622800" cy="203200"/>
           </a:xfrm>
           <a:prstGeom prst="rect">
@@ -10869,7 +16988,7 @@
         </p:nvCxnSpPr>
         <p:spPr>
           <a:xfrm>
-            <a:off x="1270000" y="5029200"/>
+            <a:off x="1270000" y="4699000"/>
             <a:ext cx="4470400" cy="0"/>
           </a:xfrm>
           <a:prstGeom prst="straightConnector1">
@@ -10891,7 +17010,7 @@
         </p:nvSpPr>
         <p:spPr>
           <a:xfrm>
-            <a:off x="1905000" y="4851400"/>
+            <a:off x="1905000" y="4521200"/>
             <a:ext cx="1397000" cy="177800"/>
           </a:xfrm>
           <a:prstGeom prst="rect">
@@ -10928,7 +17047,7 @@
         </p:nvSpPr>
         <p:spPr>
           <a:xfrm>
-            <a:off x="3835400" y="4851400"/>
+            <a:off x="3835400" y="4521200"/>
             <a:ext cx="1397000" cy="177800"/>
           </a:xfrm>
           <a:prstGeom prst="rect">
@@ -10965,7 +17084,7 @@
         </p:nvCxnSpPr>
         <p:spPr>
           <a:xfrm>
-            <a:off x="3302000" y="4775200"/>
+            <a:off x="3302000" y="4445000"/>
             <a:ext cx="0" cy="482600"/>
           </a:xfrm>
           <a:prstGeom prst="straightConnector1">
@@ -10987,7 +17106,7 @@
         </p:nvCxnSpPr>
         <p:spPr>
           <a:xfrm>
-            <a:off x="3835400" y="4775200"/>
+            <a:off x="3835400" y="4445000"/>
             <a:ext cx="0" cy="482600"/>
           </a:xfrm>
           <a:prstGeom prst="straightConnector1">
@@ -11009,7 +17128,7 @@
         </p:nvCxnSpPr>
         <p:spPr>
           <a:xfrm>
-            <a:off x="3302000" y="5207000"/>
+            <a:off x="3302000" y="4876800"/>
             <a:ext cx="533400" cy="0"/>
           </a:xfrm>
           <a:prstGeom prst="straightConnector1">
@@ -11032,7 +17151,7 @@
         </p:nvSpPr>
         <p:spPr>
           <a:xfrm>
-            <a:off x="2743200" y="5270500"/>
+            <a:off x="2743200" y="4940300"/>
             <a:ext cx="1651000" cy="177800"/>
           </a:xfrm>
           <a:prstGeom prst="rect">
@@ -11064,8 +17183,8 @@
         </p:nvSpPr>
         <p:spPr>
           <a:xfrm>
-            <a:off x="1219200" y="5537200"/>
-            <a:ext cx="4622800" cy="431800"/>
+            <a:off x="1219200" y="5207000"/>
+            <a:ext cx="4622800" cy="254000"/>
           </a:xfrm>
           <a:prstGeom prst="rect">
             <a:avLst/>
@@ -11105,7 +17224,7 @@
         </p:nvSpPr>
         <p:spPr>
           <a:xfrm>
-            <a:off x="6654800" y="3987800"/>
+            <a:off x="6654800" y="3657600"/>
             <a:ext cx="4622800" cy="203200"/>
           </a:xfrm>
           <a:prstGeom prst="rect">
@@ -11137,7 +17256,7 @@
         </p:nvCxnSpPr>
         <p:spPr>
           <a:xfrm>
-            <a:off x="6705600" y="5029200"/>
+            <a:off x="6705600" y="4699000"/>
             <a:ext cx="4470400" cy="0"/>
           </a:xfrm>
           <a:prstGeom prst="straightConnector1">
@@ -11159,7 +17278,7 @@
         </p:nvSpPr>
         <p:spPr>
           <a:xfrm>
-            <a:off x="7772400" y="4432300"/>
+            <a:off x="7772400" y="4102100"/>
             <a:ext cx="2032000" cy="114300"/>
           </a:xfrm>
           <a:prstGeom prst="rect">
@@ -11189,7 +17308,7 @@
         </p:nvSpPr>
         <p:spPr>
           <a:xfrm>
-            <a:off x="7975600" y="4584700"/>
+            <a:off x="7975600" y="4254500"/>
             <a:ext cx="2032000" cy="114300"/>
           </a:xfrm>
           <a:prstGeom prst="rect">
@@ -11219,7 +17338,7 @@
         </p:nvSpPr>
         <p:spPr>
           <a:xfrm>
-            <a:off x="8178800" y="4737100"/>
+            <a:off x="8178800" y="4406900"/>
             <a:ext cx="2032000" cy="114300"/>
           </a:xfrm>
           <a:prstGeom prst="rect">
@@ -11249,7 +17368,7 @@
         </p:nvSpPr>
         <p:spPr>
           <a:xfrm>
-            <a:off x="8382000" y="4889500"/>
+            <a:off x="8382000" y="4559300"/>
             <a:ext cx="2032000" cy="114300"/>
           </a:xfrm>
           <a:prstGeom prst="rect">
@@ -11279,7 +17398,7 @@
         </p:nvSpPr>
         <p:spPr>
           <a:xfrm>
-            <a:off x="6654800" y="4432300"/>
+            <a:off x="6654800" y="4102100"/>
             <a:ext cx="1016000" cy="571500"/>
           </a:xfrm>
           <a:prstGeom prst="rect">
@@ -11319,7 +17438,7 @@
         </p:nvCxnSpPr>
         <p:spPr>
           <a:xfrm>
-            <a:off x="7772400" y="4356100"/>
+            <a:off x="7772400" y="4025900"/>
             <a:ext cx="0" cy="901700"/>
           </a:xfrm>
           <a:prstGeom prst="straightConnector1">
@@ -11341,7 +17460,7 @@
         </p:nvCxnSpPr>
         <p:spPr>
           <a:xfrm>
-            <a:off x="8382000" y="4356100"/>
+            <a:off x="8382000" y="4025900"/>
             <a:ext cx="0" cy="901700"/>
           </a:xfrm>
           <a:prstGeom prst="straightConnector1">
@@ -11363,7 +17482,7 @@
         </p:nvCxnSpPr>
         <p:spPr>
           <a:xfrm>
-            <a:off x="7772400" y="5207000"/>
+            <a:off x="7772400" y="4876800"/>
             <a:ext cx="609600" cy="0"/>
           </a:xfrm>
           <a:prstGeom prst="straightConnector1">
@@ -11386,7 +17505,7 @@
         </p:nvSpPr>
         <p:spPr>
           <a:xfrm>
-            <a:off x="7315200" y="5270500"/>
+            <a:off x="7315200" y="4940300"/>
             <a:ext cx="1524000" cy="177800"/>
           </a:xfrm>
           <a:prstGeom prst="rect">
@@ -11418,8 +17537,8 @@
         </p:nvSpPr>
         <p:spPr>
           <a:xfrm>
-            <a:off x="6654800" y="5537200"/>
-            <a:ext cx="4622800" cy="431800"/>
+            <a:off x="6654800" y="5207000"/>
+            <a:ext cx="4622800" cy="254000"/>
           </a:xfrm>
           <a:prstGeom prst="rect">
             <a:avLst/>
@@ -11817,7 +17936,7 @@
         </p:nvSpPr>
         <p:spPr>
           <a:xfrm>
-            <a:off x="1422400" y="2286000"/>
+            <a:off x="1422400" y="2032000"/>
             <a:ext cx="1143000" cy="177800"/>
           </a:xfrm>
           <a:prstGeom prst="rect">
@@ -11849,7 +17968,7 @@
         </p:nvSpPr>
         <p:spPr>
           <a:xfrm>
-            <a:off x="4445000" y="2286000"/>
+            <a:off x="4445000" y="2032000"/>
             <a:ext cx="1143000" cy="177800"/>
           </a:xfrm>
           <a:prstGeom prst="rect">
@@ -11869,6 +17988,57 @@
                 </a:solidFill>
               </a:rPr>
               <a:t>Workflow-Ende</a:t>
+            </a:r>
+          </a:p>
+        </p:txBody>
+      </p:sp>
+      <p:sp>
+        <p:nvSpPr>
+          <p:cNvPr id="190" name="Methodische Fußzeile"/>
+          <p:cNvSpPr txBox="1"/>
+          <p:nvPr/>
+        </p:nvSpPr>
+        <p:spPr>
+          <a:xfrm>
+            <a:off x="1219200" y="5524500"/>
+            <a:ext cx="10058400" cy="355600"/>
+          </a:xfrm>
+          <a:prstGeom prst="rect">
+            <a:avLst/>
+          </a:prstGeom>
+          <a:noFill/>
+        </p:spPr>
+        <p:txBody>
+          <a:bodyPr wrap="square" lIns="0" tIns="0" rIns="0" bIns="0" anchor="t"/>
+          <a:lstStyle/>
+          <a:p>
+            <a:pPr algn="l">
+              <a:spcAft>
+                <a:spcPts val="200"/>
+              </a:spcAft>
+            </a:pPr>
+            <a:r>
+              <a:rPr lang="de-DE" sz="1000" dirty="0">
+                <a:solidFill>
+                  <a:srgbClr val="595959"/>
+                </a:solidFill>
+              </a:rPr>
+              <a:t>Instrumentierung: Start-/Endzeitstempel in den Payload-Skripten</a:t>
+            </a:r>
+          </a:p>
+          <a:p>
+            <a:pPr algn="l">
+              <a:spcAft>
+                <a:spcPts val="200"/>
+              </a:spcAft>
+            </a:pPr>
+            <a:r>
+              <a:rPr lang="de-DE" sz="1000" dirty="0">
+                <a:solidFill>
+                  <a:srgbClr val="595959"/>
+                </a:solidFill>
+              </a:rPr>
+              <a:t>Wiederholungen: kurz 5× · mittel 5× · lang 3×</a:t>
             </a:r>
           </a:p>
         </p:txBody>
@@ -11876,7 +18046,7 @@
     </p:spTree>
     <p:extLst>
       <p:ext uri="{BB962C8B-B14F-4D97-AF65-F5344CB8AC3E}">
-        <p14:creationId xmlns:p14="http://schemas.microsoft.com/office/powerpoint/2010/main" val="985474103"/>
+        <p14:creationId xmlns:p14="http://schemas.microsoft.com/office/powerpoint/2010/main" val="436942174"/>
       </p:ext>
     </p:extLst>
   </p:cSld>

--- a/Präsentation-Kolloqium.pptx
+++ b/Präsentation-Kolloqium.pptx
@@ -5,7 +5,7 @@
     <p:sldMasterId id="2147483648" r:id="rId1"/>
   </p:sldMasterIdLst>
   <p:notesMasterIdLst>
-    <p:notesMasterId r:id="rId17"/>
+    <p:notesMasterId r:id="rId18"/>
   </p:notesMasterIdLst>
   <p:sldIdLst>
     <p:sldId id="259" r:id="rId2"/>
@@ -21,8 +21,9 @@
     <p:sldId id="303" r:id="rId12"/>
     <p:sldId id="306" r:id="rId13"/>
     <p:sldId id="308" r:id="rId14"/>
-    <p:sldId id="313" r:id="rId15"/>
-    <p:sldId id="314" r:id="rId16"/>
+    <p:sldId id="321" r:id="rId15"/>
+    <p:sldId id="322" r:id="rId16"/>
+    <p:sldId id="313" r:id="rId17"/>
   </p:sldIdLst>
   <p:sldSz cx="12192000" cy="6858000"/>
   <p:notesSz cx="6858000" cy="9144000"/>
@@ -9102,7 +9103,7 @@
                   <a:srgbClr val="595959"/>
                 </a:solidFill>
               </a:rPr>
-              <a:t>geringer bzw. teilweise kein zusätzlicher Gewinn</a:t>
+              <a:t>geringer bzw. teilweise kein zusätzlicher Gewinn, Overhead fällt ins Gewicht</a:t>
             </a:r>
           </a:p>
           <a:p>
@@ -9166,7 +9167,7 @@
                   <a:srgbClr val="262626"/>
                 </a:solidFill>
               </a:rPr>
-              <a:t>Parallelisierung</a:t>
+              <a:t>Zusätzliche Parallelisierung</a:t>
             </a:r>
             <a:r>
               <a:rPr lang="de-DE" sz="1200" dirty="0">
@@ -9174,7 +9175,7 @@
                   <a:srgbClr val="262626"/>
                 </a:solidFill>
               </a:rPr>
-              <a:t> gewinnt mit wachsender Rechenlast an Bedeutung</a:t>
+              <a:t> gewinnt mit wachsender Rechenlast an Bedeutung, da Overhead an Gewicht verliert</a:t>
             </a:r>
           </a:p>
         </p:txBody>
@@ -9551,7 +9552,7 @@
 </file>
 
 <file path=ppt/slides/slide14.xml><?xml version="1.0" encoding="utf-8"?>
-<p:sld xmlns:a="http://schemas.openxmlformats.org/drawingml/2006/main" xmlns:r="http://schemas.openxmlformats.org/officeDocument/2006/relationships" xmlns:p="http://schemas.openxmlformats.org/presentationml/2006/main" show="0">
+<p:sld xmlns:a="http://schemas.openxmlformats.org/drawingml/2006/main" xmlns:r="http://schemas.openxmlformats.org/officeDocument/2006/relationships" xmlns:p="http://schemas.openxmlformats.org/presentationml/2006/main">
   <p:cSld>
     <p:spTree>
       <p:nvGrpSpPr>
@@ -9572,7 +9573,7 @@
           <p:cNvPr id="2" name="Titel 1">
             <a:extLst>
               <a:ext uri="{FF2B5EF4-FFF2-40B4-BE49-F238E27FC236}">
-                <a16:creationId xmlns:a16="http://schemas.microsoft.com/office/drawing/2014/main" id="{AA3E5E2F-3F12-D116-7CE7-D6ECFF7D2853}"/>
+                <a16:creationId xmlns:a16="http://schemas.microsoft.com/office/drawing/2014/main" id="{D183A317-8F96-271A-B21A-147B6A11BC00}"/>
               </a:ext>
             </a:extLst>
           </p:cNvPr>
@@ -9595,203 +9596,55 @@
           </a:bodyPr>
           <a:lstStyle/>
           <a:p>
-            <a:pPr algn="l">
-              <a:spcAft>
-                <a:spcPts val="0"/>
-              </a:spcAft>
-            </a:pPr>
-            <a:r>
-              <a:rPr lang="de-DE" sz="2600" b="1" dirty="0">
+            <a:pPr algn="l"/>
+            <a:r>
+              <a:rPr lang="de-DE" sz="2600" b="1" dirty="0" err="1">
                 <a:solidFill>
                   <a:srgbClr val="262626"/>
                 </a:solidFill>
               </a:rPr>
-              <a:t>Quellenverzeichnis</a:t>
-            </a:r>
-          </a:p>
-        </p:txBody>
-      </p:sp>
-      <p:sp>
-        <p:nvSpPr>
-          <p:cNvPr id="3" name="Inhaltsplatzhalter 2">
+              <a:t>Übergangslatenzen</a:t>
+            </a:r>
+            <a:endParaRPr lang="de-DE" sz="2600" b="1" dirty="0">
+              <a:solidFill>
+                <a:srgbClr val="262626"/>
+              </a:solidFill>
+            </a:endParaRPr>
+          </a:p>
+        </p:txBody>
+      </p:sp>
+      <p:pic>
+        <p:nvPicPr>
+          <p:cNvPr id="5" name="Inhaltsplatzhalter 4">
             <a:extLst>
               <a:ext uri="{FF2B5EF4-FFF2-40B4-BE49-F238E27FC236}">
-                <a16:creationId xmlns:a16="http://schemas.microsoft.com/office/drawing/2014/main" id="{440A9FB2-E4B2-A71F-E04B-B10EEFD4F2B4}"/>
+                <a16:creationId xmlns:a16="http://schemas.microsoft.com/office/drawing/2014/main" id="{C38C7638-4172-2B59-2CEA-E311165E6DF3}"/>
               </a:ext>
             </a:extLst>
           </p:cNvPr>
-          <p:cNvSpPr>
-            <a:spLocks noGrp="1"/>
-          </p:cNvSpPr>
+          <p:cNvPicPr>
+            <a:picLocks noGrp="1" noChangeAspect="1"/>
+          </p:cNvPicPr>
           <p:nvPr>
             <p:ph idx="1"/>
           </p:nvPr>
-        </p:nvSpPr>
-        <p:spPr>
-          <a:xfrm>
-            <a:off x="1219200" y="1905000"/>
-            <a:ext cx="10058400" cy="3810000"/>
-          </a:xfrm>
-        </p:spPr>
-        <p:txBody>
-          <a:bodyPr wrap="square" lIns="0" tIns="0" rIns="0" bIns="0" anchor="t">
-            <a:normAutofit/>
-          </a:bodyPr>
-          <a:lstStyle/>
-          <a:p>
-            <a:pPr marL="0" indent="0" algn="l">
-              <a:spcAft>
-                <a:spcPts val="800"/>
-              </a:spcAft>
-              <a:buNone/>
-            </a:pPr>
-            <a:r>
-              <a:rPr lang="de-DE" sz="1400" b="1" dirty="0">
-                <a:solidFill>
-                  <a:srgbClr val="262626"/>
-                </a:solidFill>
-              </a:rPr>
-              <a:t>Logos der Workflow-Management-Systeme</a:t>
-            </a:r>
-          </a:p>
-          <a:p>
-            <a:pPr marL="0" indent="0" algn="l">
-              <a:spcAft>
-                <a:spcPts val="400"/>
-              </a:spcAft>
-              <a:buNone/>
-            </a:pPr>
-            <a:r>
-              <a:rPr lang="de-DE" sz="1200" dirty="0">
-                <a:solidFill>
-                  <a:srgbClr val="262626"/>
-                </a:solidFill>
-              </a:rPr>
-              <a:t>Nextflow</a:t>
-            </a:r>
-            <a:r>
-              <a:rPr lang="de-DE" sz="1200" dirty="0">
-                <a:solidFill>
-                  <a:srgbClr val="595959"/>
-                </a:solidFill>
-              </a:rPr>
-              <a:t> – https://workflows.community/systems/nextflow/</a:t>
-            </a:r>
-          </a:p>
-          <a:p>
-            <a:pPr marL="0" indent="0" algn="l">
-              <a:spcAft>
-                <a:spcPts val="400"/>
-              </a:spcAft>
-              <a:buNone/>
-            </a:pPr>
-            <a:r>
-              <a:rPr lang="de-DE" sz="1200" dirty="0">
-                <a:solidFill>
-                  <a:srgbClr val="262626"/>
-                </a:solidFill>
-              </a:rPr>
-              <a:t>StreamFlow</a:t>
-            </a:r>
-            <a:r>
-              <a:rPr lang="de-DE" sz="1200" dirty="0">
-                <a:solidFill>
-                  <a:srgbClr val="595959"/>
-                </a:solidFill>
-              </a:rPr>
-              <a:t> – https://workflows.community/systems/streamflow/</a:t>
-            </a:r>
-          </a:p>
-          <a:p>
-            <a:pPr marL="0" indent="0" algn="l">
-              <a:spcAft>
-                <a:spcPts val="400"/>
-              </a:spcAft>
-              <a:buNone/>
-            </a:pPr>
-            <a:r>
-              <a:rPr lang="de-DE" sz="1200" dirty="0">
-                <a:solidFill>
-                  <a:srgbClr val="262626"/>
-                </a:solidFill>
-              </a:rPr>
-              <a:t>Merlin</a:t>
-            </a:r>
-            <a:r>
-              <a:rPr lang="de-DE" sz="1200" dirty="0">
-                <a:solidFill>
-                  <a:srgbClr val="595959"/>
-                </a:solidFill>
-              </a:rPr>
-              <a:t> – https://workflows.community/systems/merlin/</a:t>
-            </a:r>
-          </a:p>
-          <a:p>
-            <a:pPr marL="0" indent="0" algn="l">
-              <a:spcAft>
-                <a:spcPts val="400"/>
-              </a:spcAft>
-              <a:buNone/>
-            </a:pPr>
-            <a:r>
-              <a:rPr lang="de-DE" sz="1200" dirty="0">
-                <a:solidFill>
-                  <a:srgbClr val="262626"/>
-                </a:solidFill>
-              </a:rPr>
-              <a:t>Pegasus</a:t>
-            </a:r>
-            <a:r>
-              <a:rPr lang="de-DE" sz="1200" dirty="0">
-                <a:solidFill>
-                  <a:srgbClr val="595959"/>
-                </a:solidFill>
-              </a:rPr>
-              <a:t> – https://workflows.community/systems/pegasus/</a:t>
-            </a:r>
-          </a:p>
-          <a:p>
-            <a:pPr marL="0" indent="0" algn="l">
-              <a:spcAft>
-                <a:spcPts val="400"/>
-              </a:spcAft>
-              <a:buNone/>
-            </a:pPr>
-            <a:r>
-              <a:rPr lang="de-DE" sz="1200" dirty="0">
-                <a:solidFill>
-                  <a:srgbClr val="262626"/>
-                </a:solidFill>
-              </a:rPr>
-              <a:t>AiiDA</a:t>
-            </a:r>
-            <a:r>
-              <a:rPr lang="de-DE" sz="1200" dirty="0">
-                <a:solidFill>
-                  <a:srgbClr val="595959"/>
-                </a:solidFill>
-              </a:rPr>
-              <a:t> – https://workflows.community/systems/aiida-core/</a:t>
-            </a:r>
-          </a:p>
-          <a:p>
-            <a:pPr marL="0" indent="0" algn="l">
-              <a:spcAft>
-                <a:spcPts val="0"/>
-              </a:spcAft>
-              <a:buNone/>
-            </a:pPr>
-            <a:r>
-              <a:rPr lang="de-DE" sz="1100" dirty="0">
-                <a:solidFill>
-                  <a:srgbClr val="595959"/>
-                </a:solidFill>
-              </a:rPr>
-              <a:t>Abruf: 01.09.2026</a:t>
-            </a:r>
-          </a:p>
-        </p:txBody>
-      </p:sp>
+        </p:nvPicPr>
+        <p:blipFill>
+          <a:blip r:embed="rId2"/>
+          <a:stretch>
+            <a:fillRect/>
+          </a:stretch>
+        </p:blipFill>
+        <p:spPr>
+          <a:xfrm>
+            <a:off x="838204" y="2274433"/>
+            <a:ext cx="7111992" cy="2493284"/>
+          </a:xfrm>
+          <a:prstGeom prst="rect">
+            <a:avLst/>
+          </a:prstGeom>
+        </p:spPr>
+      </p:pic>
       <p:sp>
         <p:nvSpPr>
           <p:cNvPr id="20" name="Akzentlinie"/>
@@ -9823,14 +9676,14 @@
       </p:sp>
       <p:sp>
         <p:nvSpPr>
-          <p:cNvPr id="40" name="Foliennummer"/>
+          <p:cNvPr id="16" name="Abschnitt"/>
           <p:cNvSpPr txBox="1"/>
           <p:nvPr/>
         </p:nvSpPr>
         <p:spPr>
           <a:xfrm>
-            <a:off x="10769600" y="6197600"/>
-            <a:ext cx="508000" cy="254000"/>
+            <a:off x="1219200" y="1397000"/>
+            <a:ext cx="10058400" cy="177800"/>
           </a:xfrm>
           <a:prstGeom prst="rect">
             <a:avLst/>
@@ -9841,18 +9694,601 @@
           <a:bodyPr wrap="square" lIns="0" tIns="0" rIns="0" bIns="0" anchor="t"/>
           <a:lstStyle/>
           <a:p>
-            <a:pPr algn="r">
+            <a:pPr algn="l"/>
+            <a:r>
+              <a:rPr lang="de-DE" sz="1000" b="1" spc="200" dirty="0">
+                <a:solidFill>
+                  <a:srgbClr val="C1002A"/>
+                </a:solidFill>
+              </a:rPr>
+              <a:t>ÜBERGANGSLATENZEN – LOKALE UNTERSUCHUNG</a:t>
+            </a:r>
+          </a:p>
+        </p:txBody>
+      </p:sp>
+      <p:sp>
+        <p:nvSpPr>
+          <p:cNvPr id="21" name="Zentrale Ergebnisse"/>
+          <p:cNvSpPr txBox="1"/>
+          <p:nvPr/>
+        </p:nvSpPr>
+        <p:spPr>
+          <a:xfrm>
+            <a:off x="8077200" y="1854200"/>
+            <a:ext cx="3200400" cy="279400"/>
+          </a:xfrm>
+          <a:prstGeom prst="rect">
+            <a:avLst/>
+          </a:prstGeom>
+          <a:noFill/>
+        </p:spPr>
+        <p:txBody>
+          <a:bodyPr wrap="square" lIns="0" tIns="0" rIns="0" bIns="0" anchor="t"/>
+          <a:lstStyle/>
+          <a:p>
+            <a:pPr algn="l"/>
+            <a:r>
+              <a:rPr lang="de-DE" sz="1600" b="1" dirty="0">
+                <a:solidFill>
+                  <a:srgbClr val="262626"/>
+                </a:solidFill>
+              </a:rPr>
+              <a:t>Zentrale Ergebnisse</a:t>
+            </a:r>
+          </a:p>
+        </p:txBody>
+      </p:sp>
+      <p:sp>
+        <p:nvSpPr>
+          <p:cNvPr id="22" name="Ergebnisse"/>
+          <p:cNvSpPr txBox="1"/>
+          <p:nvPr/>
+        </p:nvSpPr>
+        <p:spPr>
+          <a:xfrm>
+            <a:off x="8077200" y="2235200"/>
+            <a:ext cx="3200400" cy="2794000"/>
+          </a:xfrm>
+          <a:prstGeom prst="rect">
+            <a:avLst/>
+          </a:prstGeom>
+          <a:noFill/>
+        </p:spPr>
+        <p:txBody>
+          <a:bodyPr wrap="square" lIns="0" tIns="0" rIns="0" bIns="0" anchor="t"/>
+          <a:lstStyle/>
+          <a:p>
+            <a:pPr marL="152400" indent="-152400" algn="l">
+              <a:spcAft>
+                <a:spcPts val="1200"/>
+              </a:spcAft>
+              <a:buClr>
+                <a:srgbClr val="C1002A"/>
+              </a:buClr>
+              <a:buFont typeface="Arial"/>
+              <a:buChar char="•"/>
+            </a:pPr>
+            <a:r>
+              <a:rPr lang="de-DE" sz="1300" dirty="0">
+                <a:solidFill>
+                  <a:srgbClr val="262626"/>
+                </a:solidFill>
+              </a:rPr>
+              <a:t>Innerhalb eines Systems weitgehend </a:t>
+            </a:r>
+            <a:r>
+              <a:rPr lang="de-DE" sz="1300" b="1" dirty="0">
+                <a:solidFill>
+                  <a:srgbClr val="262626"/>
+                </a:solidFill>
+              </a:rPr>
+              <a:t>stabile Übergangslatenzen</a:t>
+            </a:r>
+          </a:p>
+          <a:p>
+            <a:pPr marL="152400" indent="-152400" algn="l">
+              <a:spcAft>
+                <a:spcPts val="200"/>
+              </a:spcAft>
+              <a:buClr>
+                <a:srgbClr val="C1002A"/>
+              </a:buClr>
+              <a:buFont typeface="Arial"/>
+              <a:buChar char="•"/>
+            </a:pPr>
+            <a:r>
+              <a:rPr lang="de-DE" sz="1300" b="1" dirty="0">
+                <a:solidFill>
+                  <a:srgbClr val="262626"/>
+                </a:solidFill>
+              </a:rPr>
+              <a:t>Stabile Reihenfolge</a:t>
+            </a:r>
+            <a:r>
+              <a:rPr lang="de-DE" sz="1300" dirty="0">
+                <a:solidFill>
+                  <a:srgbClr val="262626"/>
+                </a:solidFill>
+              </a:rPr>
+              <a:t>:</a:t>
+            </a:r>
+          </a:p>
+          <a:p>
+            <a:pPr marL="152400" indent="0" algn="l">
+              <a:spcAft>
+                <a:spcPts val="1200"/>
+              </a:spcAft>
+              <a:buNone/>
+            </a:pPr>
+            <a:r>
+              <a:rPr lang="de-DE" sz="1200" dirty="0">
+                <a:solidFill>
+                  <a:srgbClr val="595959"/>
+                </a:solidFill>
+              </a:rPr>
+              <a:t>StreamFlow &lt; Nextflow &lt; Merlin &lt; AiiDA ≪ Pegasus</a:t>
+            </a:r>
+          </a:p>
+          <a:p>
+            <a:pPr marL="152400" indent="-152400" algn="l">
+              <a:spcAft>
+                <a:spcPts val="1200"/>
+              </a:spcAft>
+              <a:buClr>
+                <a:srgbClr val="C1002A"/>
+              </a:buClr>
+              <a:buFont typeface="Arial"/>
+              <a:buChar char="•"/>
+            </a:pPr>
+            <a:r>
+              <a:rPr lang="de-DE" sz="1300" b="1" dirty="0">
+                <a:solidFill>
+                  <a:srgbClr val="262626"/>
+                </a:solidFill>
+              </a:rPr>
+              <a:t>Pegasus</a:t>
+            </a:r>
+            <a:r>
+              <a:rPr lang="de-DE" sz="1300" dirty="0">
+                <a:solidFill>
+                  <a:srgbClr val="262626"/>
+                </a:solidFill>
+              </a:rPr>
+              <a:t> mit </a:t>
+            </a:r>
+            <a:r>
+              <a:rPr lang="de-DE" sz="1300" b="1" dirty="0">
+                <a:solidFill>
+                  <a:srgbClr val="262626"/>
+                </a:solidFill>
+              </a:rPr>
+              <a:t>rund 20 s</a:t>
+            </a:r>
+            <a:r>
+              <a:rPr lang="de-DE" sz="1300" dirty="0">
+                <a:solidFill>
+                  <a:srgbClr val="262626"/>
+                </a:solidFill>
+              </a:rPr>
+              <a:t> um Größenordnungen höher</a:t>
+            </a:r>
+          </a:p>
+          <a:p>
+            <a:pPr marL="152400" indent="-152400" algn="l">
               <a:spcAft>
                 <a:spcPts val="0"/>
               </a:spcAft>
+              <a:buClr>
+                <a:srgbClr val="C1002A"/>
+              </a:buClr>
+              <a:buFont typeface="Arial"/>
+              <a:buChar char="•"/>
             </a:pPr>
             <a:r>
+              <a:rPr lang="de-DE" sz="1300" dirty="0">
+                <a:solidFill>
+                  <a:srgbClr val="262626"/>
+                </a:solidFill>
+              </a:rPr>
+              <a:t>Hohe Übergangslatenzen erklären einen großen Teil des </a:t>
+            </a:r>
+            <a:r>
+              <a:rPr lang="de-DE" sz="1300" b="1" dirty="0">
+                <a:solidFill>
+                  <a:srgbClr val="262626"/>
+                </a:solidFill>
+              </a:rPr>
+              <a:t>Overheads </a:t>
+            </a:r>
+            <a:r>
+              <a:rPr lang="de-DE" sz="1300" dirty="0">
+                <a:solidFill>
+                  <a:srgbClr val="262626"/>
+                </a:solidFill>
+              </a:rPr>
+              <a:t>bei </a:t>
+            </a:r>
+            <a:r>
+              <a:rPr lang="de-DE" sz="1300" dirty="0" err="1">
+                <a:solidFill>
+                  <a:srgbClr val="262626"/>
+                </a:solidFill>
+              </a:rPr>
+              <a:t>AiiDA</a:t>
+            </a:r>
+            <a:r>
+              <a:rPr lang="de-DE" sz="1300" dirty="0">
+                <a:solidFill>
+                  <a:srgbClr val="262626"/>
+                </a:solidFill>
+              </a:rPr>
+              <a:t> und Pegasus, aber </a:t>
+            </a:r>
+            <a:r>
+              <a:rPr lang="de-DE" sz="1300" b="1" dirty="0">
+                <a:solidFill>
+                  <a:srgbClr val="262626"/>
+                </a:solidFill>
+              </a:rPr>
+              <a:t>nicht allein</a:t>
+            </a:r>
+          </a:p>
+        </p:txBody>
+      </p:sp>
+      <p:sp>
+        <p:nvSpPr>
+          <p:cNvPr id="3" name="Foliennummer"/>
+          <p:cNvSpPr txBox="1"/>
+          <p:nvPr/>
+        </p:nvSpPr>
+        <p:spPr>
+          <a:xfrm>
+            <a:off x="10769600" y="6197600"/>
+            <a:ext cx="508000" cy="254000"/>
+          </a:xfrm>
+          <a:prstGeom prst="rect">
+            <a:avLst/>
+          </a:prstGeom>
+          <a:noFill/>
+        </p:spPr>
+        <p:txBody>
+          <a:bodyPr wrap="square" lIns="0" tIns="0" rIns="0" bIns="0" anchor="t"/>
+          <a:lstStyle/>
+          <a:p>
+            <a:pPr algn="r"/>
+            <a:r>
               <a:rPr lang="de-DE" sz="1200" dirty="0">
                 <a:solidFill>
                   <a:srgbClr val="8C8C8C"/>
                 </a:solidFill>
               </a:rPr>
               <a:t>14</a:t>
+            </a:r>
+          </a:p>
+        </p:txBody>
+      </p:sp>
+      <p:cxnSp>
+        <p:nvCxnSpPr>
+          <p:cNvPr id="4" name="Fortschritt Linie"/>
+          <p:cNvCxnSpPr/>
+          <p:nvPr/>
+        </p:nvCxnSpPr>
+        <p:spPr>
+          <a:xfrm>
+            <a:off x="1219200" y="6172200"/>
+            <a:ext cx="5080000" cy="0"/>
+          </a:xfrm>
+          <a:prstGeom prst="line">
+            <a:avLst/>
+          </a:prstGeom>
+          <a:ln w="9525">
+            <a:solidFill>
+              <a:srgbClr val="D9D9D9"/>
+            </a:solidFill>
+          </a:ln>
+        </p:spPr>
+      </p:cxnSp>
+      <p:sp>
+        <p:nvSpPr>
+          <p:cNvPr id="6" name="Marker Motivation"/>
+          <p:cNvSpPr/>
+          <p:nvPr/>
+        </p:nvSpPr>
+        <p:spPr>
+          <a:xfrm>
+            <a:off x="1187450" y="6140450"/>
+            <a:ext cx="63500" cy="63500"/>
+          </a:xfrm>
+          <a:prstGeom prst="ellipse">
+            <a:avLst/>
+          </a:prstGeom>
+          <a:solidFill>
+            <a:srgbClr val="A6A6A6"/>
+          </a:solidFill>
+          <a:ln>
+            <a:noFill/>
+          </a:ln>
+        </p:spPr>
+        <p:txBody>
+          <a:bodyPr/>
+          <a:lstStyle/>
+          <a:p>
+            <a:endParaRPr lang="de-DE"/>
+          </a:p>
+        </p:txBody>
+      </p:sp>
+      <p:sp>
+        <p:nvSpPr>
+          <p:cNvPr id="7" name="Label Motivation"/>
+          <p:cNvSpPr txBox="1"/>
+          <p:nvPr/>
+        </p:nvSpPr>
+        <p:spPr>
+          <a:xfrm>
+            <a:off x="1219200" y="6273800"/>
+            <a:ext cx="1270000" cy="203200"/>
+          </a:xfrm>
+          <a:prstGeom prst="rect">
+            <a:avLst/>
+          </a:prstGeom>
+          <a:noFill/>
+        </p:spPr>
+        <p:txBody>
+          <a:bodyPr wrap="square" lIns="0" tIns="0" rIns="0" bIns="0" anchor="t"/>
+          <a:lstStyle/>
+          <a:p>
+            <a:pPr algn="l"/>
+            <a:r>
+              <a:rPr lang="de-DE" sz="1000" dirty="0">
+                <a:solidFill>
+                  <a:srgbClr val="A6A6A6"/>
+                </a:solidFill>
+              </a:rPr>
+              <a:t>Motivation</a:t>
+            </a:r>
+          </a:p>
+        </p:txBody>
+      </p:sp>
+      <p:sp>
+        <p:nvSpPr>
+          <p:cNvPr id="8" name="Marker Methodik"/>
+          <p:cNvSpPr/>
+          <p:nvPr/>
+        </p:nvSpPr>
+        <p:spPr>
+          <a:xfrm>
+            <a:off x="2457450" y="6140450"/>
+            <a:ext cx="63500" cy="63500"/>
+          </a:xfrm>
+          <a:prstGeom prst="ellipse">
+            <a:avLst/>
+          </a:prstGeom>
+          <a:solidFill>
+            <a:srgbClr val="A6A6A6"/>
+          </a:solidFill>
+          <a:ln>
+            <a:noFill/>
+          </a:ln>
+        </p:spPr>
+        <p:txBody>
+          <a:bodyPr/>
+          <a:lstStyle/>
+          <a:p>
+            <a:endParaRPr lang="de-DE"/>
+          </a:p>
+        </p:txBody>
+      </p:sp>
+      <p:sp>
+        <p:nvSpPr>
+          <p:cNvPr id="9" name="Label Methodik"/>
+          <p:cNvSpPr txBox="1"/>
+          <p:nvPr/>
+        </p:nvSpPr>
+        <p:spPr>
+          <a:xfrm>
+            <a:off x="1854200" y="6273800"/>
+            <a:ext cx="1270000" cy="203200"/>
+          </a:xfrm>
+          <a:prstGeom prst="rect">
+            <a:avLst/>
+          </a:prstGeom>
+          <a:noFill/>
+        </p:spPr>
+        <p:txBody>
+          <a:bodyPr wrap="square" lIns="0" tIns="0" rIns="0" bIns="0" anchor="t"/>
+          <a:lstStyle/>
+          <a:p>
+            <a:pPr algn="ctr"/>
+            <a:r>
+              <a:rPr lang="de-DE" sz="1000" dirty="0">
+                <a:solidFill>
+                  <a:srgbClr val="A6A6A6"/>
+                </a:solidFill>
+              </a:rPr>
+              <a:t>Methodik</a:t>
+            </a:r>
+          </a:p>
+        </p:txBody>
+      </p:sp>
+      <p:sp>
+        <p:nvSpPr>
+          <p:cNvPr id="10" name="Marker Systeme"/>
+          <p:cNvSpPr/>
+          <p:nvPr/>
+        </p:nvSpPr>
+        <p:spPr>
+          <a:xfrm>
+            <a:off x="3727450" y="6140450"/>
+            <a:ext cx="63500" cy="63500"/>
+          </a:xfrm>
+          <a:prstGeom prst="ellipse">
+            <a:avLst/>
+          </a:prstGeom>
+          <a:solidFill>
+            <a:srgbClr val="A6A6A6"/>
+          </a:solidFill>
+          <a:ln>
+            <a:noFill/>
+          </a:ln>
+        </p:spPr>
+        <p:txBody>
+          <a:bodyPr/>
+          <a:lstStyle/>
+          <a:p>
+            <a:endParaRPr lang="de-DE"/>
+          </a:p>
+        </p:txBody>
+      </p:sp>
+      <p:sp>
+        <p:nvSpPr>
+          <p:cNvPr id="11" name="Label Systeme"/>
+          <p:cNvSpPr txBox="1"/>
+          <p:nvPr/>
+        </p:nvSpPr>
+        <p:spPr>
+          <a:xfrm>
+            <a:off x="3124200" y="6273800"/>
+            <a:ext cx="1270000" cy="203200"/>
+          </a:xfrm>
+          <a:prstGeom prst="rect">
+            <a:avLst/>
+          </a:prstGeom>
+          <a:noFill/>
+        </p:spPr>
+        <p:txBody>
+          <a:bodyPr wrap="square" lIns="0" tIns="0" rIns="0" bIns="0" anchor="t"/>
+          <a:lstStyle/>
+          <a:p>
+            <a:pPr algn="ctr"/>
+            <a:r>
+              <a:rPr lang="de-DE" sz="1000" dirty="0">
+                <a:solidFill>
+                  <a:srgbClr val="A6A6A6"/>
+                </a:solidFill>
+              </a:rPr>
+              <a:t>Systeme</a:t>
+            </a:r>
+          </a:p>
+        </p:txBody>
+      </p:sp>
+      <p:sp>
+        <p:nvSpPr>
+          <p:cNvPr id="12" name="Marker Untersuchung"/>
+          <p:cNvSpPr/>
+          <p:nvPr/>
+        </p:nvSpPr>
+        <p:spPr>
+          <a:xfrm>
+            <a:off x="4984750" y="6127750"/>
+            <a:ext cx="88900" cy="88900"/>
+          </a:xfrm>
+          <a:prstGeom prst="ellipse">
+            <a:avLst/>
+          </a:prstGeom>
+          <a:solidFill>
+            <a:srgbClr val="C1002A"/>
+          </a:solidFill>
+          <a:ln>
+            <a:noFill/>
+          </a:ln>
+        </p:spPr>
+        <p:txBody>
+          <a:bodyPr/>
+          <a:lstStyle/>
+          <a:p>
+            <a:endParaRPr lang="de-DE"/>
+          </a:p>
+        </p:txBody>
+      </p:sp>
+      <p:sp>
+        <p:nvSpPr>
+          <p:cNvPr id="13" name="Label Untersuchung"/>
+          <p:cNvSpPr txBox="1"/>
+          <p:nvPr/>
+        </p:nvSpPr>
+        <p:spPr>
+          <a:xfrm>
+            <a:off x="4394200" y="6273800"/>
+            <a:ext cx="1270000" cy="203200"/>
+          </a:xfrm>
+          <a:prstGeom prst="rect">
+            <a:avLst/>
+          </a:prstGeom>
+          <a:noFill/>
+        </p:spPr>
+        <p:txBody>
+          <a:bodyPr wrap="square" lIns="0" tIns="0" rIns="0" bIns="0" anchor="t"/>
+          <a:lstStyle/>
+          <a:p>
+            <a:pPr algn="ctr"/>
+            <a:r>
+              <a:rPr lang="de-DE" sz="1000" b="1" dirty="0">
+                <a:solidFill>
+                  <a:srgbClr val="C1002A"/>
+                </a:solidFill>
+              </a:rPr>
+              <a:t>Untersuchung</a:t>
+            </a:r>
+          </a:p>
+        </p:txBody>
+      </p:sp>
+      <p:sp>
+        <p:nvSpPr>
+          <p:cNvPr id="14" name="Marker Fazit"/>
+          <p:cNvSpPr/>
+          <p:nvPr/>
+        </p:nvSpPr>
+        <p:spPr>
+          <a:xfrm>
+            <a:off x="6267450" y="6140450"/>
+            <a:ext cx="63500" cy="63500"/>
+          </a:xfrm>
+          <a:prstGeom prst="ellipse">
+            <a:avLst/>
+          </a:prstGeom>
+          <a:solidFill>
+            <a:srgbClr val="A6A6A6"/>
+          </a:solidFill>
+          <a:ln>
+            <a:noFill/>
+          </a:ln>
+        </p:spPr>
+        <p:txBody>
+          <a:bodyPr/>
+          <a:lstStyle/>
+          <a:p>
+            <a:endParaRPr lang="de-DE"/>
+          </a:p>
+        </p:txBody>
+      </p:sp>
+      <p:sp>
+        <p:nvSpPr>
+          <p:cNvPr id="15" name="Label Fazit"/>
+          <p:cNvSpPr txBox="1"/>
+          <p:nvPr/>
+        </p:nvSpPr>
+        <p:spPr>
+          <a:xfrm>
+            <a:off x="5029200" y="6273800"/>
+            <a:ext cx="1270000" cy="203200"/>
+          </a:xfrm>
+          <a:prstGeom prst="rect">
+            <a:avLst/>
+          </a:prstGeom>
+          <a:noFill/>
+        </p:spPr>
+        <p:txBody>
+          <a:bodyPr wrap="square" lIns="0" tIns="0" rIns="0" bIns="0" anchor="t"/>
+          <a:lstStyle/>
+          <a:p>
+            <a:pPr algn="r"/>
+            <a:r>
+              <a:rPr lang="de-DE" sz="1000" dirty="0">
+                <a:solidFill>
+                  <a:srgbClr val="A6A6A6"/>
+                </a:solidFill>
+              </a:rPr>
+              <a:t>Fazit</a:t>
             </a:r>
           </a:p>
         </p:txBody>
@@ -9860,7 +10296,7 @@
     </p:spTree>
     <p:extLst>
       <p:ext uri="{BB962C8B-B14F-4D97-AF65-F5344CB8AC3E}">
-        <p14:creationId xmlns:p14="http://schemas.microsoft.com/office/powerpoint/2010/main" val="4237940801"/>
+        <p14:creationId xmlns:p14="http://schemas.microsoft.com/office/powerpoint/2010/main" val="3895090878"/>
       </p:ext>
     </p:extLst>
   </p:cSld>
@@ -9892,7 +10328,7 @@
           <p:cNvPr id="2" name="Titel 1">
             <a:extLst>
               <a:ext uri="{FF2B5EF4-FFF2-40B4-BE49-F238E27FC236}">
-                <a16:creationId xmlns:a16="http://schemas.microsoft.com/office/drawing/2014/main" id="{D183A317-8F96-271A-B21A-147B6A11BC00}"/>
+                <a16:creationId xmlns:a16="http://schemas.microsoft.com/office/drawing/2014/main" id="{F4902435-D957-7A56-F80C-F7A9FF39D7BF}"/>
               </a:ext>
             </a:extLst>
           </p:cNvPr>
@@ -9903,21 +10339,36 @@
             <p:ph type="title"/>
           </p:nvPr>
         </p:nvSpPr>
-        <p:spPr/>
-        <p:txBody>
-          <a:bodyPr/>
-          <a:lstStyle/>
-          <a:p>
-            <a:endParaRPr lang="de-DE"/>
+        <p:spPr>
+          <a:xfrm>
+            <a:off x="1219200" y="812800"/>
+            <a:ext cx="10058400" cy="508000"/>
+          </a:xfrm>
+        </p:spPr>
+        <p:txBody>
+          <a:bodyPr wrap="square" lIns="0" tIns="0" rIns="0" bIns="0" anchor="t">
+            <a:normAutofit/>
+          </a:bodyPr>
+          <a:lstStyle/>
+          <a:p>
+            <a:pPr algn="l"/>
+            <a:r>
+              <a:rPr lang="de-DE" sz="2600" b="1" dirty="0">
+                <a:solidFill>
+                  <a:srgbClr val="262626"/>
+                </a:solidFill>
+              </a:rPr>
+              <a:t>Startspreizung</a:t>
+            </a:r>
           </a:p>
         </p:txBody>
       </p:sp>
       <p:pic>
         <p:nvPicPr>
-          <p:cNvPr id="5" name="Inhaltsplatzhalter 4">
+          <p:cNvPr id="4" name="Inhaltsplatzhalter 3">
             <a:extLst>
               <a:ext uri="{FF2B5EF4-FFF2-40B4-BE49-F238E27FC236}">
-                <a16:creationId xmlns:a16="http://schemas.microsoft.com/office/drawing/2014/main" id="{C38C7638-4172-2B59-2CEA-E311165E6DF3}"/>
+                <a16:creationId xmlns:a16="http://schemas.microsoft.com/office/drawing/2014/main" id="{8668C887-A541-971C-5F2F-8B27C30316F1}"/>
               </a:ext>
             </a:extLst>
           </p:cNvPr>
@@ -9936,48 +10387,1054 @@
         </p:blipFill>
         <p:spPr>
           <a:xfrm>
-            <a:off x="838200" y="1661916"/>
-            <a:ext cx="6629400" cy="2322709"/>
+            <a:off x="1219200" y="2133600"/>
+            <a:ext cx="6350000" cy="3471850"/>
           </a:xfrm>
           <a:prstGeom prst="rect">
             <a:avLst/>
           </a:prstGeom>
         </p:spPr>
       </p:pic>
-      <p:pic>
-        <p:nvPicPr>
-          <p:cNvPr id="7" name="Grafik 6">
+      <p:sp>
+        <p:nvSpPr>
+          <p:cNvPr id="20" name="Akzentlinie"/>
+          <p:cNvSpPr/>
+          <p:nvPr/>
+        </p:nvSpPr>
+        <p:spPr>
+          <a:xfrm>
+            <a:off x="914400" y="812800"/>
+            <a:ext cx="50800" cy="431800"/>
+          </a:xfrm>
+          <a:prstGeom prst="rect">
+            <a:avLst/>
+          </a:prstGeom>
+          <a:solidFill>
+            <a:srgbClr val="C1002A"/>
+          </a:solidFill>
+          <a:ln>
+            <a:noFill/>
+          </a:ln>
+        </p:spPr>
+        <p:txBody>
+          <a:bodyPr/>
+          <a:lstStyle/>
+          <a:p>
+            <a:endParaRPr lang="de-DE"/>
+          </a:p>
+        </p:txBody>
+      </p:sp>
+      <p:sp>
+        <p:nvSpPr>
+          <p:cNvPr id="16" name="Abschnitt"/>
+          <p:cNvSpPr txBox="1"/>
+          <p:nvPr/>
+        </p:nvSpPr>
+        <p:spPr>
+          <a:xfrm>
+            <a:off x="1219200" y="1397000"/>
+            <a:ext cx="10058400" cy="177800"/>
+          </a:xfrm>
+          <a:prstGeom prst="rect">
+            <a:avLst/>
+          </a:prstGeom>
+          <a:noFill/>
+        </p:spPr>
+        <p:txBody>
+          <a:bodyPr wrap="square" lIns="0" tIns="0" rIns="0" bIns="0" anchor="t"/>
+          <a:lstStyle/>
+          <a:p>
+            <a:pPr algn="l"/>
+            <a:r>
+              <a:rPr lang="de-DE" sz="1000" b="1" spc="200" dirty="0">
+                <a:solidFill>
+                  <a:srgbClr val="C1002A"/>
+                </a:solidFill>
+              </a:rPr>
+              <a:t>STARTSPREIZUNG – LOKALE UNTERSUCHUNG</a:t>
+            </a:r>
+          </a:p>
+        </p:txBody>
+      </p:sp>
+      <p:sp>
+        <p:nvSpPr>
+          <p:cNvPr id="21" name="Zentrale Ergebnisse"/>
+          <p:cNvSpPr txBox="1"/>
+          <p:nvPr/>
+        </p:nvSpPr>
+        <p:spPr>
+          <a:xfrm>
+            <a:off x="8077200" y="1854200"/>
+            <a:ext cx="3200400" cy="279400"/>
+          </a:xfrm>
+          <a:prstGeom prst="rect">
+            <a:avLst/>
+          </a:prstGeom>
+          <a:noFill/>
+        </p:spPr>
+        <p:txBody>
+          <a:bodyPr wrap="square" lIns="0" tIns="0" rIns="0" bIns="0" anchor="t"/>
+          <a:lstStyle/>
+          <a:p>
+            <a:pPr algn="l"/>
+            <a:r>
+              <a:rPr lang="de-DE" sz="1600" b="1" dirty="0">
+                <a:solidFill>
+                  <a:srgbClr val="262626"/>
+                </a:solidFill>
+              </a:rPr>
+              <a:t>Zentrale Ergebnisse</a:t>
+            </a:r>
+          </a:p>
+        </p:txBody>
+      </p:sp>
+      <p:sp>
+        <p:nvSpPr>
+          <p:cNvPr id="22" name="Ergebnisse"/>
+          <p:cNvSpPr txBox="1"/>
+          <p:nvPr/>
+        </p:nvSpPr>
+        <p:spPr>
+          <a:xfrm>
+            <a:off x="8077200" y="2235200"/>
+            <a:ext cx="3200400" cy="2286000"/>
+          </a:xfrm>
+          <a:prstGeom prst="rect">
+            <a:avLst/>
+          </a:prstGeom>
+          <a:noFill/>
+        </p:spPr>
+        <p:txBody>
+          <a:bodyPr wrap="square" lIns="0" tIns="0" rIns="0" bIns="0" anchor="t"/>
+          <a:lstStyle/>
+          <a:p>
+            <a:pPr marL="152400" indent="-152400" algn="l">
+              <a:spcAft>
+                <a:spcPts val="1000"/>
+              </a:spcAft>
+              <a:buClr>
+                <a:srgbClr val="C1002A"/>
+              </a:buClr>
+              <a:buFont typeface="Arial"/>
+              <a:buChar char="•"/>
+            </a:pPr>
+            <a:r>
+              <a:rPr lang="de-DE" sz="1300" dirty="0">
+                <a:solidFill>
+                  <a:srgbClr val="262626"/>
+                </a:solidFill>
+              </a:rPr>
+              <a:t>Mit </a:t>
+            </a:r>
+            <a:r>
+              <a:rPr lang="de-DE" sz="1300" b="1" dirty="0">
+                <a:solidFill>
+                  <a:srgbClr val="262626"/>
+                </a:solidFill>
+              </a:rPr>
+              <a:t>mehr parallelen Instanzen</a:t>
+            </a:r>
+            <a:r>
+              <a:rPr lang="de-DE" sz="1300" dirty="0">
+                <a:solidFill>
+                  <a:srgbClr val="262626"/>
+                </a:solidFill>
+              </a:rPr>
+              <a:t> steigt die Startspreizung bei allen Systemen</a:t>
+            </a:r>
+          </a:p>
+          <a:p>
+            <a:pPr marL="152400" indent="-152400" algn="l">
+              <a:spcAft>
+                <a:spcPts val="200"/>
+              </a:spcAft>
+              <a:buClr>
+                <a:srgbClr val="C1002A"/>
+              </a:buClr>
+              <a:buFont typeface="Arial"/>
+              <a:buChar char="•"/>
+            </a:pPr>
+            <a:r>
+              <a:rPr lang="de-DE" sz="1300" dirty="0">
+                <a:solidFill>
+                  <a:srgbClr val="262626"/>
+                </a:solidFill>
+              </a:rPr>
+              <a:t>Besonders deutlich bei </a:t>
+            </a:r>
+            <a:r>
+              <a:rPr lang="de-DE" sz="1300" b="1" dirty="0">
+                <a:solidFill>
+                  <a:srgbClr val="262626"/>
+                </a:solidFill>
+              </a:rPr>
+              <a:t>AiiDA</a:t>
+            </a:r>
+            <a:r>
+              <a:rPr lang="de-DE" sz="1300" dirty="0">
+                <a:solidFill>
+                  <a:srgbClr val="262626"/>
+                </a:solidFill>
+              </a:rPr>
+              <a:t>:</a:t>
+            </a:r>
+          </a:p>
+          <a:p>
+            <a:pPr marL="152400" indent="0" algn="l">
+              <a:spcAft>
+                <a:spcPts val="1000"/>
+              </a:spcAft>
+              <a:buNone/>
+            </a:pPr>
+            <a:r>
+              <a:rPr lang="de-DE" sz="1200" b="1" dirty="0">
+                <a:solidFill>
+                  <a:srgbClr val="595959"/>
+                </a:solidFill>
+              </a:rPr>
+              <a:t>58 ms → 698 ms</a:t>
+            </a:r>
+          </a:p>
+          <a:p>
+            <a:pPr marL="152400" indent="-152400" algn="l">
+              <a:spcAft>
+                <a:spcPts val="200"/>
+              </a:spcAft>
+              <a:buClr>
+                <a:srgbClr val="C1002A"/>
+              </a:buClr>
+              <a:buFont typeface="Arial"/>
+              <a:buChar char="•"/>
+            </a:pPr>
+            <a:r>
+              <a:rPr lang="de-DE" sz="1300" b="1" dirty="0">
+                <a:solidFill>
+                  <a:srgbClr val="262626"/>
+                </a:solidFill>
+              </a:rPr>
+              <a:t>Stabile Reihenfolge</a:t>
+            </a:r>
+            <a:r>
+              <a:rPr lang="de-DE" sz="1300" dirty="0">
+                <a:solidFill>
+                  <a:srgbClr val="262626"/>
+                </a:solidFill>
+              </a:rPr>
+              <a:t>:</a:t>
+            </a:r>
+          </a:p>
+          <a:p>
+            <a:pPr marL="152400" indent="0" algn="l">
+              <a:spcAft>
+                <a:spcPts val="1000"/>
+              </a:spcAft>
+              <a:buNone/>
+            </a:pPr>
+            <a:r>
+              <a:rPr lang="de-DE" sz="1200" dirty="0">
+                <a:solidFill>
+                  <a:srgbClr val="595959"/>
+                </a:solidFill>
+              </a:rPr>
+              <a:t>Nextflow &lt; StreamFlow &lt; Pegasus &lt; AiiDA &lt; Merlin</a:t>
+            </a:r>
+          </a:p>
+          <a:p>
+            <a:pPr marL="152400" indent="-152400" algn="l">
+              <a:spcAft>
+                <a:spcPts val="0"/>
+              </a:spcAft>
+              <a:buClr>
+                <a:srgbClr val="C1002A"/>
+              </a:buClr>
+              <a:buFont typeface="Arial"/>
+              <a:buChar char="•"/>
+            </a:pPr>
+            <a:r>
+              <a:rPr lang="de-DE" sz="1300" b="1" dirty="0">
+                <a:solidFill>
+                  <a:srgbClr val="262626"/>
+                </a:solidFill>
+              </a:rPr>
+              <a:t>Pegasus</a:t>
+            </a:r>
+            <a:r>
+              <a:rPr lang="de-DE" sz="1300" dirty="0">
+                <a:solidFill>
+                  <a:srgbClr val="262626"/>
+                </a:solidFill>
+              </a:rPr>
+              <a:t> bei der Startspreizung im </a:t>
+            </a:r>
+            <a:r>
+              <a:rPr lang="de-DE" sz="1300" b="1" dirty="0">
+                <a:solidFill>
+                  <a:srgbClr val="262626"/>
+                </a:solidFill>
+              </a:rPr>
+              <a:t>mittleren Bereich, </a:t>
+            </a:r>
+            <a:r>
+              <a:rPr lang="de-DE" sz="1300" dirty="0">
+                <a:solidFill>
+                  <a:srgbClr val="262626"/>
+                </a:solidFill>
+              </a:rPr>
+              <a:t>trotz sehr hoher Übergangslatenzen</a:t>
+            </a:r>
+          </a:p>
+        </p:txBody>
+      </p:sp>
+      <p:cxnSp>
+        <p:nvCxnSpPr>
+          <p:cNvPr id="23" name="Trennlinie"/>
+          <p:cNvCxnSpPr/>
+          <p:nvPr/>
+        </p:nvCxnSpPr>
+        <p:spPr>
+          <a:xfrm>
+            <a:off x="8077200" y="4724400"/>
+            <a:ext cx="3200400" cy="0"/>
+          </a:xfrm>
+          <a:prstGeom prst="line">
+            <a:avLst/>
+          </a:prstGeom>
+          <a:ln w="9525">
+            <a:solidFill>
+              <a:srgbClr val="D9D9D9"/>
+            </a:solidFill>
+          </a:ln>
+        </p:spPr>
+      </p:cxnSp>
+      <p:sp>
+        <p:nvSpPr>
+          <p:cNvPr id="24" name="Schlussaussage"/>
+          <p:cNvSpPr txBox="1"/>
+          <p:nvPr/>
+        </p:nvSpPr>
+        <p:spPr>
+          <a:xfrm>
+            <a:off x="8077200" y="4876800"/>
+            <a:ext cx="3200400" cy="889000"/>
+          </a:xfrm>
+          <a:prstGeom prst="rect">
+            <a:avLst/>
+          </a:prstGeom>
+          <a:noFill/>
+        </p:spPr>
+        <p:txBody>
+          <a:bodyPr wrap="square" lIns="0" tIns="0" rIns="0" bIns="0" anchor="t"/>
+          <a:lstStyle/>
+          <a:p>
+            <a:pPr algn="l">
+              <a:spcAft>
+                <a:spcPts val="400"/>
+              </a:spcAft>
+            </a:pPr>
+            <a:r>
+              <a:rPr lang="de-DE" sz="1300" b="1" dirty="0">
+                <a:solidFill>
+                  <a:srgbClr val="262626"/>
+                </a:solidFill>
+              </a:rPr>
+              <a:t>Höhere Koordinationswerte bedeuten nicht automatisch einen höheren Gesamt-Overhead.</a:t>
+            </a:r>
+          </a:p>
+          <a:p>
+            <a:pPr algn="l"/>
+            <a:r>
+              <a:rPr lang="de-DE" sz="1100" dirty="0">
+                <a:solidFill>
+                  <a:srgbClr val="595959"/>
+                </a:solidFill>
+              </a:rPr>
+              <a:t>Merlin: höhere Koordinationswerte als Nextflow und StreamFlow, aber dieselbe niedrige Overhead-Gruppe.</a:t>
+            </a:r>
+          </a:p>
+        </p:txBody>
+      </p:sp>
+      <p:sp>
+        <p:nvSpPr>
+          <p:cNvPr id="3" name="Foliennummer"/>
+          <p:cNvSpPr txBox="1"/>
+          <p:nvPr/>
+        </p:nvSpPr>
+        <p:spPr>
+          <a:xfrm>
+            <a:off x="10769600" y="6197600"/>
+            <a:ext cx="508000" cy="254000"/>
+          </a:xfrm>
+          <a:prstGeom prst="rect">
+            <a:avLst/>
+          </a:prstGeom>
+          <a:noFill/>
+        </p:spPr>
+        <p:txBody>
+          <a:bodyPr wrap="square" lIns="0" tIns="0" rIns="0" bIns="0" anchor="t"/>
+          <a:lstStyle/>
+          <a:p>
+            <a:pPr algn="r"/>
+            <a:r>
+              <a:rPr lang="de-DE" sz="1200" dirty="0">
+                <a:solidFill>
+                  <a:srgbClr val="8C8C8C"/>
+                </a:solidFill>
+              </a:rPr>
+              <a:t>15</a:t>
+            </a:r>
+          </a:p>
+        </p:txBody>
+      </p:sp>
+      <p:cxnSp>
+        <p:nvCxnSpPr>
+          <p:cNvPr id="5" name="Fortschritt Linie"/>
+          <p:cNvCxnSpPr/>
+          <p:nvPr/>
+        </p:nvCxnSpPr>
+        <p:spPr>
+          <a:xfrm>
+            <a:off x="1219200" y="6172200"/>
+            <a:ext cx="5080000" cy="0"/>
+          </a:xfrm>
+          <a:prstGeom prst="line">
+            <a:avLst/>
+          </a:prstGeom>
+          <a:ln w="9525">
+            <a:solidFill>
+              <a:srgbClr val="D9D9D9"/>
+            </a:solidFill>
+          </a:ln>
+        </p:spPr>
+      </p:cxnSp>
+      <p:sp>
+        <p:nvSpPr>
+          <p:cNvPr id="6" name="Marker Motivation"/>
+          <p:cNvSpPr/>
+          <p:nvPr/>
+        </p:nvSpPr>
+        <p:spPr>
+          <a:xfrm>
+            <a:off x="1187450" y="6140450"/>
+            <a:ext cx="63500" cy="63500"/>
+          </a:xfrm>
+          <a:prstGeom prst="ellipse">
+            <a:avLst/>
+          </a:prstGeom>
+          <a:solidFill>
+            <a:srgbClr val="A6A6A6"/>
+          </a:solidFill>
+          <a:ln>
+            <a:noFill/>
+          </a:ln>
+        </p:spPr>
+        <p:txBody>
+          <a:bodyPr/>
+          <a:lstStyle/>
+          <a:p>
+            <a:endParaRPr lang="de-DE"/>
+          </a:p>
+        </p:txBody>
+      </p:sp>
+      <p:sp>
+        <p:nvSpPr>
+          <p:cNvPr id="7" name="Label Motivation"/>
+          <p:cNvSpPr txBox="1"/>
+          <p:nvPr/>
+        </p:nvSpPr>
+        <p:spPr>
+          <a:xfrm>
+            <a:off x="1219200" y="6273800"/>
+            <a:ext cx="1270000" cy="203200"/>
+          </a:xfrm>
+          <a:prstGeom prst="rect">
+            <a:avLst/>
+          </a:prstGeom>
+          <a:noFill/>
+        </p:spPr>
+        <p:txBody>
+          <a:bodyPr wrap="square" lIns="0" tIns="0" rIns="0" bIns="0" anchor="t"/>
+          <a:lstStyle/>
+          <a:p>
+            <a:pPr algn="l"/>
+            <a:r>
+              <a:rPr lang="de-DE" sz="1000" dirty="0">
+                <a:solidFill>
+                  <a:srgbClr val="A6A6A6"/>
+                </a:solidFill>
+              </a:rPr>
+              <a:t>Motivation</a:t>
+            </a:r>
+          </a:p>
+        </p:txBody>
+      </p:sp>
+      <p:sp>
+        <p:nvSpPr>
+          <p:cNvPr id="8" name="Marker Methodik"/>
+          <p:cNvSpPr/>
+          <p:nvPr/>
+        </p:nvSpPr>
+        <p:spPr>
+          <a:xfrm>
+            <a:off x="2457450" y="6140450"/>
+            <a:ext cx="63500" cy="63500"/>
+          </a:xfrm>
+          <a:prstGeom prst="ellipse">
+            <a:avLst/>
+          </a:prstGeom>
+          <a:solidFill>
+            <a:srgbClr val="A6A6A6"/>
+          </a:solidFill>
+          <a:ln>
+            <a:noFill/>
+          </a:ln>
+        </p:spPr>
+        <p:txBody>
+          <a:bodyPr/>
+          <a:lstStyle/>
+          <a:p>
+            <a:endParaRPr lang="de-DE"/>
+          </a:p>
+        </p:txBody>
+      </p:sp>
+      <p:sp>
+        <p:nvSpPr>
+          <p:cNvPr id="9" name="Label Methodik"/>
+          <p:cNvSpPr txBox="1"/>
+          <p:nvPr/>
+        </p:nvSpPr>
+        <p:spPr>
+          <a:xfrm>
+            <a:off x="1854200" y="6273800"/>
+            <a:ext cx="1270000" cy="203200"/>
+          </a:xfrm>
+          <a:prstGeom prst="rect">
+            <a:avLst/>
+          </a:prstGeom>
+          <a:noFill/>
+        </p:spPr>
+        <p:txBody>
+          <a:bodyPr wrap="square" lIns="0" tIns="0" rIns="0" bIns="0" anchor="t"/>
+          <a:lstStyle/>
+          <a:p>
+            <a:pPr algn="ctr"/>
+            <a:r>
+              <a:rPr lang="de-DE" sz="1000" dirty="0">
+                <a:solidFill>
+                  <a:srgbClr val="A6A6A6"/>
+                </a:solidFill>
+              </a:rPr>
+              <a:t>Methodik</a:t>
+            </a:r>
+          </a:p>
+        </p:txBody>
+      </p:sp>
+      <p:sp>
+        <p:nvSpPr>
+          <p:cNvPr id="10" name="Marker Systeme"/>
+          <p:cNvSpPr/>
+          <p:nvPr/>
+        </p:nvSpPr>
+        <p:spPr>
+          <a:xfrm>
+            <a:off x="3727450" y="6140450"/>
+            <a:ext cx="63500" cy="63500"/>
+          </a:xfrm>
+          <a:prstGeom prst="ellipse">
+            <a:avLst/>
+          </a:prstGeom>
+          <a:solidFill>
+            <a:srgbClr val="A6A6A6"/>
+          </a:solidFill>
+          <a:ln>
+            <a:noFill/>
+          </a:ln>
+        </p:spPr>
+        <p:txBody>
+          <a:bodyPr/>
+          <a:lstStyle/>
+          <a:p>
+            <a:endParaRPr lang="de-DE"/>
+          </a:p>
+        </p:txBody>
+      </p:sp>
+      <p:sp>
+        <p:nvSpPr>
+          <p:cNvPr id="11" name="Label Systeme"/>
+          <p:cNvSpPr txBox="1"/>
+          <p:nvPr/>
+        </p:nvSpPr>
+        <p:spPr>
+          <a:xfrm>
+            <a:off x="3124200" y="6273800"/>
+            <a:ext cx="1270000" cy="203200"/>
+          </a:xfrm>
+          <a:prstGeom prst="rect">
+            <a:avLst/>
+          </a:prstGeom>
+          <a:noFill/>
+        </p:spPr>
+        <p:txBody>
+          <a:bodyPr wrap="square" lIns="0" tIns="0" rIns="0" bIns="0" anchor="t"/>
+          <a:lstStyle/>
+          <a:p>
+            <a:pPr algn="ctr"/>
+            <a:r>
+              <a:rPr lang="de-DE" sz="1000" dirty="0">
+                <a:solidFill>
+                  <a:srgbClr val="A6A6A6"/>
+                </a:solidFill>
+              </a:rPr>
+              <a:t>Systeme</a:t>
+            </a:r>
+          </a:p>
+        </p:txBody>
+      </p:sp>
+      <p:sp>
+        <p:nvSpPr>
+          <p:cNvPr id="12" name="Marker Untersuchung"/>
+          <p:cNvSpPr/>
+          <p:nvPr/>
+        </p:nvSpPr>
+        <p:spPr>
+          <a:xfrm>
+            <a:off x="4984750" y="6127750"/>
+            <a:ext cx="88900" cy="88900"/>
+          </a:xfrm>
+          <a:prstGeom prst="ellipse">
+            <a:avLst/>
+          </a:prstGeom>
+          <a:solidFill>
+            <a:srgbClr val="C1002A"/>
+          </a:solidFill>
+          <a:ln>
+            <a:noFill/>
+          </a:ln>
+        </p:spPr>
+        <p:txBody>
+          <a:bodyPr/>
+          <a:lstStyle/>
+          <a:p>
+            <a:endParaRPr lang="de-DE"/>
+          </a:p>
+        </p:txBody>
+      </p:sp>
+      <p:sp>
+        <p:nvSpPr>
+          <p:cNvPr id="13" name="Label Untersuchung"/>
+          <p:cNvSpPr txBox="1"/>
+          <p:nvPr/>
+        </p:nvSpPr>
+        <p:spPr>
+          <a:xfrm>
+            <a:off x="4394200" y="6273800"/>
+            <a:ext cx="1270000" cy="203200"/>
+          </a:xfrm>
+          <a:prstGeom prst="rect">
+            <a:avLst/>
+          </a:prstGeom>
+          <a:noFill/>
+        </p:spPr>
+        <p:txBody>
+          <a:bodyPr wrap="square" lIns="0" tIns="0" rIns="0" bIns="0" anchor="t"/>
+          <a:lstStyle/>
+          <a:p>
+            <a:pPr algn="ctr"/>
+            <a:r>
+              <a:rPr lang="de-DE" sz="1000" b="1" dirty="0">
+                <a:solidFill>
+                  <a:srgbClr val="C1002A"/>
+                </a:solidFill>
+              </a:rPr>
+              <a:t>Untersuchung</a:t>
+            </a:r>
+          </a:p>
+        </p:txBody>
+      </p:sp>
+      <p:sp>
+        <p:nvSpPr>
+          <p:cNvPr id="14" name="Marker Fazit"/>
+          <p:cNvSpPr/>
+          <p:nvPr/>
+        </p:nvSpPr>
+        <p:spPr>
+          <a:xfrm>
+            <a:off x="6267450" y="6140450"/>
+            <a:ext cx="63500" cy="63500"/>
+          </a:xfrm>
+          <a:prstGeom prst="ellipse">
+            <a:avLst/>
+          </a:prstGeom>
+          <a:solidFill>
+            <a:srgbClr val="A6A6A6"/>
+          </a:solidFill>
+          <a:ln>
+            <a:noFill/>
+          </a:ln>
+        </p:spPr>
+        <p:txBody>
+          <a:bodyPr/>
+          <a:lstStyle/>
+          <a:p>
+            <a:endParaRPr lang="de-DE"/>
+          </a:p>
+        </p:txBody>
+      </p:sp>
+      <p:sp>
+        <p:nvSpPr>
+          <p:cNvPr id="15" name="Label Fazit"/>
+          <p:cNvSpPr txBox="1"/>
+          <p:nvPr/>
+        </p:nvSpPr>
+        <p:spPr>
+          <a:xfrm>
+            <a:off x="5029200" y="6273800"/>
+            <a:ext cx="1270000" cy="203200"/>
+          </a:xfrm>
+          <a:prstGeom prst="rect">
+            <a:avLst/>
+          </a:prstGeom>
+          <a:noFill/>
+        </p:spPr>
+        <p:txBody>
+          <a:bodyPr wrap="square" lIns="0" tIns="0" rIns="0" bIns="0" anchor="t"/>
+          <a:lstStyle/>
+          <a:p>
+            <a:pPr algn="r"/>
+            <a:r>
+              <a:rPr lang="de-DE" sz="1000" dirty="0">
+                <a:solidFill>
+                  <a:srgbClr val="A6A6A6"/>
+                </a:solidFill>
+              </a:rPr>
+              <a:t>Fazit</a:t>
+            </a:r>
+          </a:p>
+        </p:txBody>
+      </p:sp>
+    </p:spTree>
+    <p:extLst>
+      <p:ext uri="{BB962C8B-B14F-4D97-AF65-F5344CB8AC3E}">
+        <p14:creationId xmlns:p14="http://schemas.microsoft.com/office/powerpoint/2010/main" val="2758390831"/>
+      </p:ext>
+    </p:extLst>
+  </p:cSld>
+  <p:clrMapOvr>
+    <a:masterClrMapping/>
+  </p:clrMapOvr>
+</p:sld>
+</file>
+
+<file path=ppt/slides/slide16.xml><?xml version="1.0" encoding="utf-8"?>
+<p:sld xmlns:a="http://schemas.openxmlformats.org/drawingml/2006/main" xmlns:r="http://schemas.openxmlformats.org/officeDocument/2006/relationships" xmlns:p="http://schemas.openxmlformats.org/presentationml/2006/main" show="0">
+  <p:cSld>
+    <p:spTree>
+      <p:nvGrpSpPr>
+        <p:cNvPr id="1" name=""/>
+        <p:cNvGrpSpPr/>
+        <p:nvPr/>
+      </p:nvGrpSpPr>
+      <p:grpSpPr>
+        <a:xfrm>
+          <a:off x="0" y="0"/>
+          <a:ext cx="0" cy="0"/>
+          <a:chOff x="0" y="0"/>
+          <a:chExt cx="0" cy="0"/>
+        </a:xfrm>
+      </p:grpSpPr>
+      <p:sp>
+        <p:nvSpPr>
+          <p:cNvPr id="2" name="Titel 1">
             <a:extLst>
               <a:ext uri="{FF2B5EF4-FFF2-40B4-BE49-F238E27FC236}">
-                <a16:creationId xmlns:a16="http://schemas.microsoft.com/office/drawing/2014/main" id="{4B856759-CD25-F1F8-B4C0-BA83708058AE}"/>
+                <a16:creationId xmlns:a16="http://schemas.microsoft.com/office/drawing/2014/main" id="{AA3E5E2F-3F12-D116-7CE7-D6ECFF7D2853}"/>
               </a:ext>
             </a:extLst>
           </p:cNvPr>
-          <p:cNvPicPr>
-            <a:picLocks noChangeAspect="1"/>
-          </p:cNvPicPr>
-          <p:nvPr/>
-        </p:nvPicPr>
-        <p:blipFill>
-          <a:blip r:embed="rId3"/>
-          <a:stretch>
-            <a:fillRect/>
-          </a:stretch>
-        </p:blipFill>
-        <p:spPr>
-          <a:xfrm>
-            <a:off x="914400" y="3984625"/>
-            <a:ext cx="4587580" cy="2508250"/>
-          </a:xfrm>
-          <a:prstGeom prst="rect">
-            <a:avLst/>
-          </a:prstGeom>
-        </p:spPr>
-      </p:pic>
+          <p:cNvSpPr>
+            <a:spLocks noGrp="1"/>
+          </p:cNvSpPr>
+          <p:nvPr>
+            <p:ph type="title"/>
+          </p:nvPr>
+        </p:nvSpPr>
+        <p:spPr>
+          <a:xfrm>
+            <a:off x="1219200" y="812800"/>
+            <a:ext cx="10058400" cy="508000"/>
+          </a:xfrm>
+        </p:spPr>
+        <p:txBody>
+          <a:bodyPr wrap="square" lIns="0" tIns="0" rIns="0" bIns="0" anchor="t">
+            <a:normAutofit/>
+          </a:bodyPr>
+          <a:lstStyle/>
+          <a:p>
+            <a:pPr algn="l">
+              <a:spcAft>
+                <a:spcPts val="0"/>
+              </a:spcAft>
+            </a:pPr>
+            <a:r>
+              <a:rPr lang="de-DE" sz="2600" b="1" dirty="0">
+                <a:solidFill>
+                  <a:srgbClr val="262626"/>
+                </a:solidFill>
+              </a:rPr>
+              <a:t>Quellenverzeichnis</a:t>
+            </a:r>
+          </a:p>
+        </p:txBody>
+      </p:sp>
+      <p:sp>
+        <p:nvSpPr>
+          <p:cNvPr id="3" name="Inhaltsplatzhalter 2">
+            <a:extLst>
+              <a:ext uri="{FF2B5EF4-FFF2-40B4-BE49-F238E27FC236}">
+                <a16:creationId xmlns:a16="http://schemas.microsoft.com/office/drawing/2014/main" id="{440A9FB2-E4B2-A71F-E04B-B10EEFD4F2B4}"/>
+              </a:ext>
+            </a:extLst>
+          </p:cNvPr>
+          <p:cNvSpPr>
+            <a:spLocks noGrp="1"/>
+          </p:cNvSpPr>
+          <p:nvPr>
+            <p:ph idx="1"/>
+          </p:nvPr>
+        </p:nvSpPr>
+        <p:spPr>
+          <a:xfrm>
+            <a:off x="1219200" y="1905000"/>
+            <a:ext cx="10058400" cy="3810000"/>
+          </a:xfrm>
+        </p:spPr>
+        <p:txBody>
+          <a:bodyPr wrap="square" lIns="0" tIns="0" rIns="0" bIns="0" anchor="t">
+            <a:normAutofit/>
+          </a:bodyPr>
+          <a:lstStyle/>
+          <a:p>
+            <a:pPr marL="0" indent="0" algn="l">
+              <a:spcAft>
+                <a:spcPts val="800"/>
+              </a:spcAft>
+              <a:buNone/>
+            </a:pPr>
+            <a:r>
+              <a:rPr lang="de-DE" sz="1400" b="1" dirty="0">
+                <a:solidFill>
+                  <a:srgbClr val="262626"/>
+                </a:solidFill>
+              </a:rPr>
+              <a:t>Logos der Workflow-Management-Systeme</a:t>
+            </a:r>
+          </a:p>
+          <a:p>
+            <a:pPr marL="0" indent="0" algn="l">
+              <a:spcAft>
+                <a:spcPts val="400"/>
+              </a:spcAft>
+              <a:buNone/>
+            </a:pPr>
+            <a:r>
+              <a:rPr lang="de-DE" sz="1200" dirty="0">
+                <a:solidFill>
+                  <a:srgbClr val="262626"/>
+                </a:solidFill>
+              </a:rPr>
+              <a:t>Nextflow</a:t>
+            </a:r>
+            <a:r>
+              <a:rPr lang="de-DE" sz="1200" dirty="0">
+                <a:solidFill>
+                  <a:srgbClr val="595959"/>
+                </a:solidFill>
+              </a:rPr>
+              <a:t> – https://workflows.community/systems/nextflow/</a:t>
+            </a:r>
+          </a:p>
+          <a:p>
+            <a:pPr marL="0" indent="0" algn="l">
+              <a:spcAft>
+                <a:spcPts val="400"/>
+              </a:spcAft>
+              <a:buNone/>
+            </a:pPr>
+            <a:r>
+              <a:rPr lang="de-DE" sz="1200" dirty="0">
+                <a:solidFill>
+                  <a:srgbClr val="262626"/>
+                </a:solidFill>
+              </a:rPr>
+              <a:t>StreamFlow</a:t>
+            </a:r>
+            <a:r>
+              <a:rPr lang="de-DE" sz="1200" dirty="0">
+                <a:solidFill>
+                  <a:srgbClr val="595959"/>
+                </a:solidFill>
+              </a:rPr>
+              <a:t> – https://workflows.community/systems/streamflow/</a:t>
+            </a:r>
+          </a:p>
+          <a:p>
+            <a:pPr marL="0" indent="0" algn="l">
+              <a:spcAft>
+                <a:spcPts val="400"/>
+              </a:spcAft>
+              <a:buNone/>
+            </a:pPr>
+            <a:r>
+              <a:rPr lang="de-DE" sz="1200" dirty="0">
+                <a:solidFill>
+                  <a:srgbClr val="262626"/>
+                </a:solidFill>
+              </a:rPr>
+              <a:t>Merlin</a:t>
+            </a:r>
+            <a:r>
+              <a:rPr lang="de-DE" sz="1200" dirty="0">
+                <a:solidFill>
+                  <a:srgbClr val="595959"/>
+                </a:solidFill>
+              </a:rPr>
+              <a:t> – https://workflows.community/systems/merlin/</a:t>
+            </a:r>
+          </a:p>
+          <a:p>
+            <a:pPr marL="0" indent="0" algn="l">
+              <a:spcAft>
+                <a:spcPts val="400"/>
+              </a:spcAft>
+              <a:buNone/>
+            </a:pPr>
+            <a:r>
+              <a:rPr lang="de-DE" sz="1200" dirty="0">
+                <a:solidFill>
+                  <a:srgbClr val="262626"/>
+                </a:solidFill>
+              </a:rPr>
+              <a:t>Pegasus</a:t>
+            </a:r>
+            <a:r>
+              <a:rPr lang="de-DE" sz="1200" dirty="0">
+                <a:solidFill>
+                  <a:srgbClr val="595959"/>
+                </a:solidFill>
+              </a:rPr>
+              <a:t> – https://workflows.community/systems/pegasus/</a:t>
+            </a:r>
+          </a:p>
+          <a:p>
+            <a:pPr marL="0" indent="0" algn="l">
+              <a:spcAft>
+                <a:spcPts val="400"/>
+              </a:spcAft>
+              <a:buNone/>
+            </a:pPr>
+            <a:r>
+              <a:rPr lang="de-DE" sz="1200" dirty="0">
+                <a:solidFill>
+                  <a:srgbClr val="262626"/>
+                </a:solidFill>
+              </a:rPr>
+              <a:t>AiiDA</a:t>
+            </a:r>
+            <a:r>
+              <a:rPr lang="de-DE" sz="1200" dirty="0">
+                <a:solidFill>
+                  <a:srgbClr val="595959"/>
+                </a:solidFill>
+              </a:rPr>
+              <a:t> – https://workflows.community/systems/aiida-core/</a:t>
+            </a:r>
+          </a:p>
+          <a:p>
+            <a:pPr marL="0" indent="0" algn="l">
+              <a:spcAft>
+                <a:spcPts val="0"/>
+              </a:spcAft>
+              <a:buNone/>
+            </a:pPr>
+            <a:r>
+              <a:rPr lang="de-DE" sz="1100" dirty="0">
+                <a:solidFill>
+                  <a:srgbClr val="595959"/>
+                </a:solidFill>
+              </a:rPr>
+              <a:t>Abruf: 01.09.2026</a:t>
+            </a:r>
+          </a:p>
+        </p:txBody>
+      </p:sp>
+      <p:sp>
+        <p:nvSpPr>
+          <p:cNvPr id="20" name="Akzentlinie"/>
+          <p:cNvSpPr/>
+          <p:nvPr/>
+        </p:nvSpPr>
+        <p:spPr>
+          <a:xfrm>
+            <a:off x="914400" y="812800"/>
+            <a:ext cx="50800" cy="431800"/>
+          </a:xfrm>
+          <a:prstGeom prst="rect">
+            <a:avLst/>
+          </a:prstGeom>
+          <a:solidFill>
+            <a:srgbClr val="C1002A"/>
+          </a:solidFill>
+          <a:ln>
+            <a:noFill/>
+          </a:ln>
+        </p:spPr>
+        <p:txBody>
+          <a:bodyPr/>
+          <a:lstStyle/>
+          <a:p>
+            <a:endParaRPr lang="de-DE"/>
+          </a:p>
+        </p:txBody>
+      </p:sp>
+      <p:sp>
+        <p:nvSpPr>
+          <p:cNvPr id="40" name="Foliennummer"/>
+          <p:cNvSpPr txBox="1"/>
+          <p:nvPr/>
+        </p:nvSpPr>
+        <p:spPr>
+          <a:xfrm>
+            <a:off x="10769600" y="6197600"/>
+            <a:ext cx="508000" cy="254000"/>
+          </a:xfrm>
+          <a:prstGeom prst="rect">
+            <a:avLst/>
+          </a:prstGeom>
+          <a:noFill/>
+        </p:spPr>
+        <p:txBody>
+          <a:bodyPr wrap="square" lIns="0" tIns="0" rIns="0" bIns="0" anchor="t"/>
+          <a:lstStyle/>
+          <a:p>
+            <a:pPr algn="r">
+              <a:spcAft>
+                <a:spcPts val="0"/>
+              </a:spcAft>
+            </a:pPr>
+            <a:r>
+              <a:rPr lang="de-DE" sz="1200" dirty="0">
+                <a:solidFill>
+                  <a:srgbClr val="8C8C8C"/>
+                </a:solidFill>
+              </a:rPr>
+              <a:t>14</a:t>
+            </a:r>
+          </a:p>
+        </p:txBody>
+      </p:sp>
     </p:spTree>
     <p:extLst>
       <p:ext uri="{BB962C8B-B14F-4D97-AF65-F5344CB8AC3E}">
-        <p14:creationId xmlns:p14="http://schemas.microsoft.com/office/powerpoint/2010/main" val="909796823"/>
+        <p14:creationId xmlns:p14="http://schemas.microsoft.com/office/powerpoint/2010/main" val="4237940801"/>
       </p:ext>
     </p:extLst>
   </p:cSld>

--- a/Präsentation-Kolloqium.pptx
+++ b/Präsentation-Kolloqium.pptx
@@ -5,7 +5,7 @@
     <p:sldMasterId id="2147483648" r:id="rId1"/>
   </p:sldMasterIdLst>
   <p:notesMasterIdLst>
-    <p:notesMasterId r:id="rId18"/>
+    <p:notesMasterId r:id="rId22"/>
   </p:notesMasterIdLst>
   <p:sldIdLst>
     <p:sldId id="259" r:id="rId2"/>
@@ -23,7 +23,11 @@
     <p:sldId id="308" r:id="rId14"/>
     <p:sldId id="321" r:id="rId15"/>
     <p:sldId id="322" r:id="rId16"/>
-    <p:sldId id="313" r:id="rId17"/>
+    <p:sldId id="325" r:id="rId17"/>
+    <p:sldId id="331" r:id="rId18"/>
+    <p:sldId id="333" r:id="rId19"/>
+    <p:sldId id="335" r:id="rId20"/>
+    <p:sldId id="313" r:id="rId21"/>
   </p:sldIdLst>
   <p:sldSz cx="12192000" cy="6858000"/>
   <p:notesSz cx="6858000" cy="9144000"/>
@@ -7702,7 +7706,7 @@
                   <a:srgbClr val="595959"/>
                 </a:solidFill>
               </a:rPr>
-              <a:t>Nachrichten + Daemon + Datenbank</a:t>
+              <a:t>Warteschlange + Daemon + Datenbank </a:t>
             </a:r>
           </a:p>
         </p:txBody>
@@ -9103,7 +9107,7 @@
                   <a:srgbClr val="595959"/>
                 </a:solidFill>
               </a:rPr>
-              <a:t>geringer bzw. teilweise kein zusätzlicher Gewinn, Overhead fällt ins Gewicht</a:t>
+              <a:t>bringt geringen bzw. teilweise keinen zusätzlichen Gewinn, Overhead fällt ins Gewicht</a:t>
             </a:r>
           </a:p>
           <a:p>
@@ -11125,7 +11129,7 @@
 </file>
 
 <file path=ppt/slides/slide16.xml><?xml version="1.0" encoding="utf-8"?>
-<p:sld xmlns:a="http://schemas.openxmlformats.org/drawingml/2006/main" xmlns:r="http://schemas.openxmlformats.org/officeDocument/2006/relationships" xmlns:p="http://schemas.openxmlformats.org/presentationml/2006/main" show="0">
+<p:sld xmlns:a="http://schemas.openxmlformats.org/drawingml/2006/main" xmlns:r="http://schemas.openxmlformats.org/officeDocument/2006/relationships" xmlns:p="http://schemas.openxmlformats.org/presentationml/2006/main">
   <p:cSld>
     <p:spTree>
       <p:nvGrpSpPr>
@@ -11146,7 +11150,7 @@
           <p:cNvPr id="2" name="Titel 1">
             <a:extLst>
               <a:ext uri="{FF2B5EF4-FFF2-40B4-BE49-F238E27FC236}">
-                <a16:creationId xmlns:a16="http://schemas.microsoft.com/office/drawing/2014/main" id="{AA3E5E2F-3F12-D116-7CE7-D6ECFF7D2853}"/>
+                <a16:creationId xmlns:a16="http://schemas.microsoft.com/office/drawing/2014/main" id="{7AD01FDA-B628-94D4-F55D-1F47A7E73A80}"/>
               </a:ext>
             </a:extLst>
           </p:cNvPr>
@@ -11164,33 +11168,1298 @@
           </a:xfrm>
         </p:spPr>
         <p:txBody>
-          <a:bodyPr wrap="square" lIns="0" tIns="0" rIns="0" bIns="0" anchor="t">
+          <a:bodyPr wrap="square" lIns="0" tIns="0" rIns="0" bIns="0" anchor="ctr">
             <a:normAutofit/>
           </a:bodyPr>
           <a:lstStyle/>
           <a:p>
+            <a:pPr algn="l"/>
+            <a:r>
+              <a:rPr lang="de-DE" sz="2600" b="1" dirty="0">
+                <a:solidFill>
+                  <a:srgbClr val="262626"/>
+                </a:solidFill>
+              </a:rPr>
+              <a:t>Von lokal zu MOGON</a:t>
+            </a:r>
+          </a:p>
+        </p:txBody>
+      </p:sp>
+      <p:sp>
+        <p:nvSpPr>
+          <p:cNvPr id="20" name="Akzentlinie"/>
+          <p:cNvSpPr/>
+          <p:nvPr/>
+        </p:nvSpPr>
+        <p:spPr>
+          <a:xfrm>
+            <a:off x="914400" y="812800"/>
+            <a:ext cx="50800" cy="431800"/>
+          </a:xfrm>
+          <a:prstGeom prst="rect">
+            <a:avLst/>
+          </a:prstGeom>
+          <a:solidFill>
+            <a:srgbClr val="C1002A"/>
+          </a:solidFill>
+          <a:ln>
+            <a:noFill/>
+          </a:ln>
+        </p:spPr>
+        <p:txBody>
+          <a:bodyPr/>
+          <a:lstStyle/>
+          <a:p>
+            <a:endParaRPr lang="de-DE"/>
+          </a:p>
+        </p:txBody>
+      </p:sp>
+      <p:sp>
+        <p:nvSpPr>
+          <p:cNvPr id="21" name="Abschnitt"/>
+          <p:cNvSpPr txBox="1"/>
+          <p:nvPr/>
+        </p:nvSpPr>
+        <p:spPr>
+          <a:xfrm>
+            <a:off x="1219200" y="1397000"/>
+            <a:ext cx="10058400" cy="177800"/>
+          </a:xfrm>
+          <a:prstGeom prst="rect">
+            <a:avLst/>
+          </a:prstGeom>
+          <a:noFill/>
+        </p:spPr>
+        <p:txBody>
+          <a:bodyPr wrap="square" lIns="0" tIns="0" rIns="0" bIns="0" anchor="t">
+            <a:noAutofit/>
+          </a:bodyPr>
+          <a:lstStyle/>
+          <a:p>
+            <a:pPr algn="l"/>
+            <a:r>
+              <a:rPr lang="de-DE" sz="1000" b="1" spc="200" dirty="0">
+                <a:solidFill>
+                  <a:srgbClr val="C1002A"/>
+                </a:solidFill>
+              </a:rPr>
+              <a:t>INTEGRATION IN DIE HPC-UMGEBUNG</a:t>
+            </a:r>
+          </a:p>
+        </p:txBody>
+      </p:sp>
+      <p:sp>
+        <p:nvSpPr>
+          <p:cNvPr id="22" name="Kopf System"/>
+          <p:cNvSpPr txBox="1"/>
+          <p:nvPr/>
+        </p:nvSpPr>
+        <p:spPr>
+          <a:xfrm>
+            <a:off x="1219200" y="1879600"/>
+            <a:ext cx="1778000" cy="177800"/>
+          </a:xfrm>
+          <a:prstGeom prst="rect">
+            <a:avLst/>
+          </a:prstGeom>
+          <a:noFill/>
+        </p:spPr>
+        <p:txBody>
+          <a:bodyPr wrap="square" lIns="0" tIns="0" rIns="0" bIns="0" anchor="t">
+            <a:noAutofit/>
+          </a:bodyPr>
+          <a:lstStyle/>
+          <a:p>
+            <a:pPr algn="l"/>
+            <a:r>
+              <a:rPr lang="de-DE" sz="1000" b="1" spc="200" dirty="0">
+                <a:solidFill>
+                  <a:srgbClr val="C1002A"/>
+                </a:solidFill>
+              </a:rPr>
+              <a:t>SYSTEM</a:t>
+            </a:r>
+          </a:p>
+        </p:txBody>
+      </p:sp>
+      <p:sp>
+        <p:nvSpPr>
+          <p:cNvPr id="23" name="Kopf Anpassung"/>
+          <p:cNvSpPr txBox="1"/>
+          <p:nvPr/>
+        </p:nvSpPr>
+        <p:spPr>
+          <a:xfrm>
+            <a:off x="3175000" y="1879600"/>
+            <a:ext cx="3937000" cy="177800"/>
+          </a:xfrm>
+          <a:prstGeom prst="rect">
+            <a:avLst/>
+          </a:prstGeom>
+          <a:noFill/>
+        </p:spPr>
+        <p:txBody>
+          <a:bodyPr wrap="square" lIns="0" tIns="0" rIns="0" bIns="0" anchor="t">
+            <a:noAutofit/>
+          </a:bodyPr>
+          <a:lstStyle/>
+          <a:p>
+            <a:pPr algn="l"/>
+            <a:r>
+              <a:rPr lang="de-DE" sz="1000" b="1" spc="200" dirty="0">
+                <a:solidFill>
+                  <a:srgbClr val="C1002A"/>
+                </a:solidFill>
+              </a:rPr>
+              <a:t>ANPASSUNG FÜR MOGON</a:t>
+            </a:r>
+          </a:p>
+        </p:txBody>
+      </p:sp>
+      <p:sp>
+        <p:nvSpPr>
+          <p:cNvPr id="24" name="Kopf Ausführung"/>
+          <p:cNvSpPr txBox="1"/>
+          <p:nvPr/>
+        </p:nvSpPr>
+        <p:spPr>
+          <a:xfrm>
+            <a:off x="7289800" y="1879600"/>
+            <a:ext cx="3987800" cy="177800"/>
+          </a:xfrm>
+          <a:prstGeom prst="rect">
+            <a:avLst/>
+          </a:prstGeom>
+          <a:noFill/>
+        </p:spPr>
+        <p:txBody>
+          <a:bodyPr wrap="square" lIns="0" tIns="0" rIns="0" bIns="0" anchor="t">
+            <a:noAutofit/>
+          </a:bodyPr>
+          <a:lstStyle/>
+          <a:p>
+            <a:pPr algn="l"/>
+            <a:r>
+              <a:rPr lang="de-DE" sz="1000" b="1" spc="200" dirty="0">
+                <a:solidFill>
+                  <a:srgbClr val="C1002A"/>
+                </a:solidFill>
+              </a:rPr>
+              <a:t>AUSFÜHRUNG ÜBER SLURM</a:t>
+            </a:r>
+          </a:p>
+        </p:txBody>
+      </p:sp>
+      <p:cxnSp>
+        <p:nvCxnSpPr>
+          <p:cNvPr id="25" name="Kopflinie"/>
+          <p:cNvCxnSpPr/>
+          <p:nvPr/>
+        </p:nvCxnSpPr>
+        <p:spPr>
+          <a:xfrm>
+            <a:off x="1219200" y="2133600"/>
+            <a:ext cx="10058400" cy="0"/>
+          </a:xfrm>
+          <a:prstGeom prst="line">
+            <a:avLst/>
+          </a:prstGeom>
+          <a:ln w="9525">
+            <a:solidFill>
+              <a:srgbClr val="D9D9D9"/>
+            </a:solidFill>
+          </a:ln>
+        </p:spPr>
+      </p:cxnSp>
+      <p:sp>
+        <p:nvSpPr>
+          <p:cNvPr id="26" name="Name Nextflow"/>
+          <p:cNvSpPr txBox="1"/>
+          <p:nvPr/>
+        </p:nvSpPr>
+        <p:spPr>
+          <a:xfrm>
+            <a:off x="1219200" y="2235200"/>
+            <a:ext cx="1778000" cy="558800"/>
+          </a:xfrm>
+          <a:prstGeom prst="rect">
+            <a:avLst/>
+          </a:prstGeom>
+          <a:noFill/>
+        </p:spPr>
+        <p:txBody>
+          <a:bodyPr wrap="square" lIns="0" tIns="0" rIns="0" bIns="0" anchor="ctr">
+            <a:noAutofit/>
+          </a:bodyPr>
+          <a:lstStyle/>
+          <a:p>
+            <a:pPr algn="l"/>
+            <a:r>
+              <a:rPr lang="de-DE" sz="1600" b="1" dirty="0">
+                <a:solidFill>
+                  <a:srgbClr val="262626"/>
+                </a:solidFill>
+              </a:rPr>
+              <a:t>Nextflow</a:t>
+            </a:r>
+          </a:p>
+        </p:txBody>
+      </p:sp>
+      <p:sp>
+        <p:nvSpPr>
+          <p:cNvPr id="27" name="Anpassung Nextflow"/>
+          <p:cNvSpPr txBox="1"/>
+          <p:nvPr/>
+        </p:nvSpPr>
+        <p:spPr>
+          <a:xfrm>
+            <a:off x="3175000" y="2235200"/>
+            <a:ext cx="3937000" cy="558800"/>
+          </a:xfrm>
+          <a:prstGeom prst="rect">
+            <a:avLst/>
+          </a:prstGeom>
+          <a:noFill/>
+        </p:spPr>
+        <p:txBody>
+          <a:bodyPr wrap="square" lIns="0" tIns="0" rIns="0" bIns="0" anchor="ctr">
+            <a:noAutofit/>
+          </a:bodyPr>
+          <a:lstStyle/>
+          <a:p>
             <a:pPr algn="l">
               <a:spcAft>
-                <a:spcPts val="0"/>
+                <a:spcPts val="200"/>
               </a:spcAft>
             </a:pPr>
             <a:r>
-              <a:rPr lang="de-DE" sz="2600" b="1" dirty="0">
+              <a:rPr lang="de-DE" sz="1300" dirty="0">
                 <a:solidFill>
                   <a:srgbClr val="262626"/>
                 </a:solidFill>
               </a:rPr>
-              <a:t>Quellenverzeichnis</a:t>
-            </a:r>
-          </a:p>
-        </p:txBody>
-      </p:sp>
-      <p:sp>
-        <p:nvSpPr>
-          <p:cNvPr id="3" name="Inhaltsplatzhalter 2">
+              <a:t>nextflow.config</a:t>
+            </a:r>
+          </a:p>
+          <a:p>
+            <a:pPr algn="l"/>
+            <a:r>
+              <a:rPr lang="de-DE" sz="1100" dirty="0">
+                <a:solidFill>
+                  <a:srgbClr val="595959"/>
+                </a:solidFill>
+              </a:rPr>
+              <a:t>Slurm als Executor</a:t>
+            </a:r>
+          </a:p>
+        </p:txBody>
+      </p:sp>
+      <p:sp>
+        <p:nvSpPr>
+          <p:cNvPr id="28" name="Ausführung Nextflow"/>
+          <p:cNvSpPr txBox="1"/>
+          <p:nvPr/>
+        </p:nvSpPr>
+        <p:spPr>
+          <a:xfrm>
+            <a:off x="7289800" y="2235200"/>
+            <a:ext cx="3987800" cy="558800"/>
+          </a:xfrm>
+          <a:prstGeom prst="rect">
+            <a:avLst/>
+          </a:prstGeom>
+          <a:noFill/>
+        </p:spPr>
+        <p:txBody>
+          <a:bodyPr wrap="square" lIns="0" tIns="0" rIns="0" bIns="0" anchor="ctr">
+            <a:noAutofit/>
+          </a:bodyPr>
+          <a:lstStyle/>
+          <a:p>
+            <a:pPr algn="l"/>
+            <a:r>
+              <a:rPr lang="de-DE" sz="1300" dirty="0">
+                <a:solidFill>
+                  <a:srgbClr val="262626"/>
+                </a:solidFill>
+              </a:rPr>
+              <a:t>Task → </a:t>
+            </a:r>
+            <a:r>
+              <a:rPr lang="de-DE" sz="1300" b="1" dirty="0">
+                <a:solidFill>
+                  <a:srgbClr val="262626"/>
+                </a:solidFill>
+              </a:rPr>
+              <a:t>Slurm-Job</a:t>
+            </a:r>
+          </a:p>
+        </p:txBody>
+      </p:sp>
+      <p:cxnSp>
+        <p:nvCxnSpPr>
+          <p:cNvPr id="29" name="Zeilenlinie 1"/>
+          <p:cNvCxnSpPr/>
+          <p:nvPr/>
+        </p:nvCxnSpPr>
+        <p:spPr>
+          <a:xfrm>
+            <a:off x="1219200" y="2844800"/>
+            <a:ext cx="10058400" cy="0"/>
+          </a:xfrm>
+          <a:prstGeom prst="line">
+            <a:avLst/>
+          </a:prstGeom>
+          <a:ln w="6350">
+            <a:solidFill>
+              <a:srgbClr val="D9D9D9"/>
+            </a:solidFill>
+          </a:ln>
+        </p:spPr>
+      </p:cxnSp>
+      <p:sp>
+        <p:nvSpPr>
+          <p:cNvPr id="30" name="Name StreamFlow"/>
+          <p:cNvSpPr txBox="1"/>
+          <p:nvPr/>
+        </p:nvSpPr>
+        <p:spPr>
+          <a:xfrm>
+            <a:off x="1219200" y="2895600"/>
+            <a:ext cx="1778000" cy="558800"/>
+          </a:xfrm>
+          <a:prstGeom prst="rect">
+            <a:avLst/>
+          </a:prstGeom>
+          <a:noFill/>
+        </p:spPr>
+        <p:txBody>
+          <a:bodyPr wrap="square" lIns="0" tIns="0" rIns="0" bIns="0" anchor="ctr">
+            <a:noAutofit/>
+          </a:bodyPr>
+          <a:lstStyle/>
+          <a:p>
+            <a:pPr algn="l"/>
+            <a:r>
+              <a:rPr lang="de-DE" sz="1600" b="1" dirty="0">
+                <a:solidFill>
+                  <a:srgbClr val="262626"/>
+                </a:solidFill>
+              </a:rPr>
+              <a:t>StreamFlow</a:t>
+            </a:r>
+          </a:p>
+        </p:txBody>
+      </p:sp>
+      <p:sp>
+        <p:nvSpPr>
+          <p:cNvPr id="31" name="Anpassung StreamFlow"/>
+          <p:cNvSpPr txBox="1"/>
+          <p:nvPr/>
+        </p:nvSpPr>
+        <p:spPr>
+          <a:xfrm>
+            <a:off x="3175000" y="2895600"/>
+            <a:ext cx="3937000" cy="558800"/>
+          </a:xfrm>
+          <a:prstGeom prst="rect">
+            <a:avLst/>
+          </a:prstGeom>
+          <a:noFill/>
+        </p:spPr>
+        <p:txBody>
+          <a:bodyPr wrap="square" lIns="0" tIns="0" rIns="0" bIns="0" anchor="ctr">
+            <a:noAutofit/>
+          </a:bodyPr>
+          <a:lstStyle/>
+          <a:p>
+            <a:pPr algn="l">
+              <a:spcAft>
+                <a:spcPts val="200"/>
+              </a:spcAft>
+            </a:pPr>
+            <a:r>
+              <a:rPr lang="de-DE" sz="1300" dirty="0">
+                <a:solidFill>
+                  <a:srgbClr val="262626"/>
+                </a:solidFill>
+              </a:rPr>
+              <a:t>streamflow.yml</a:t>
+            </a:r>
+          </a:p>
+          <a:p>
+            <a:pPr algn="l"/>
+            <a:r>
+              <a:rPr lang="de-DE" sz="1100" dirty="0">
+                <a:solidFill>
+                  <a:srgbClr val="595959"/>
+                </a:solidFill>
+              </a:rPr>
+              <a:t>Slurm-Deployment</a:t>
+            </a:r>
+          </a:p>
+        </p:txBody>
+      </p:sp>
+      <p:sp>
+        <p:nvSpPr>
+          <p:cNvPr id="32" name="Ausführung StreamFlow"/>
+          <p:cNvSpPr txBox="1"/>
+          <p:nvPr/>
+        </p:nvSpPr>
+        <p:spPr>
+          <a:xfrm>
+            <a:off x="7289800" y="2895600"/>
+            <a:ext cx="3987800" cy="558800"/>
+          </a:xfrm>
+          <a:prstGeom prst="rect">
+            <a:avLst/>
+          </a:prstGeom>
+          <a:noFill/>
+        </p:spPr>
+        <p:txBody>
+          <a:bodyPr wrap="square" lIns="0" tIns="0" rIns="0" bIns="0" anchor="ctr">
+            <a:noAutofit/>
+          </a:bodyPr>
+          <a:lstStyle/>
+          <a:p>
+            <a:pPr algn="l"/>
+            <a:r>
+              <a:rPr lang="de-DE" sz="1300" dirty="0">
+                <a:solidFill>
+                  <a:srgbClr val="262626"/>
+                </a:solidFill>
+              </a:rPr>
+              <a:t>Task → </a:t>
+            </a:r>
+            <a:r>
+              <a:rPr lang="de-DE" sz="1300" b="1" dirty="0">
+                <a:solidFill>
+                  <a:srgbClr val="262626"/>
+                </a:solidFill>
+              </a:rPr>
+              <a:t>Slurm-Job</a:t>
+            </a:r>
+          </a:p>
+        </p:txBody>
+      </p:sp>
+      <p:cxnSp>
+        <p:nvCxnSpPr>
+          <p:cNvPr id="33" name="Zeilenlinie 2"/>
+          <p:cNvCxnSpPr/>
+          <p:nvPr/>
+        </p:nvCxnSpPr>
+        <p:spPr>
+          <a:xfrm>
+            <a:off x="1219200" y="3505200"/>
+            <a:ext cx="10058400" cy="0"/>
+          </a:xfrm>
+          <a:prstGeom prst="line">
+            <a:avLst/>
+          </a:prstGeom>
+          <a:ln w="6350">
+            <a:solidFill>
+              <a:srgbClr val="D9D9D9"/>
+            </a:solidFill>
+          </a:ln>
+        </p:spPr>
+      </p:cxnSp>
+      <p:sp>
+        <p:nvSpPr>
+          <p:cNvPr id="34" name="Name AiiDA"/>
+          <p:cNvSpPr txBox="1"/>
+          <p:nvPr/>
+        </p:nvSpPr>
+        <p:spPr>
+          <a:xfrm>
+            <a:off x="1219200" y="3556000"/>
+            <a:ext cx="1778000" cy="558800"/>
+          </a:xfrm>
+          <a:prstGeom prst="rect">
+            <a:avLst/>
+          </a:prstGeom>
+          <a:noFill/>
+        </p:spPr>
+        <p:txBody>
+          <a:bodyPr wrap="square" lIns="0" tIns="0" rIns="0" bIns="0" anchor="ctr">
+            <a:noAutofit/>
+          </a:bodyPr>
+          <a:lstStyle/>
+          <a:p>
+            <a:pPr algn="l"/>
+            <a:r>
+              <a:rPr lang="de-DE" sz="1600" b="1" dirty="0">
+                <a:solidFill>
+                  <a:srgbClr val="262626"/>
+                </a:solidFill>
+              </a:rPr>
+              <a:t>AiiDA</a:t>
+            </a:r>
+          </a:p>
+        </p:txBody>
+      </p:sp>
+      <p:sp>
+        <p:nvSpPr>
+          <p:cNvPr id="35" name="Anpassung AiiDA"/>
+          <p:cNvSpPr txBox="1"/>
+          <p:nvPr/>
+        </p:nvSpPr>
+        <p:spPr>
+          <a:xfrm>
+            <a:off x="3175000" y="3556000"/>
+            <a:ext cx="3937000" cy="558800"/>
+          </a:xfrm>
+          <a:prstGeom prst="rect">
+            <a:avLst/>
+          </a:prstGeom>
+          <a:noFill/>
+        </p:spPr>
+        <p:txBody>
+          <a:bodyPr wrap="square" lIns="0" tIns="0" rIns="0" bIns="0" anchor="ctr">
+            <a:noAutofit/>
+          </a:bodyPr>
+          <a:lstStyle/>
+          <a:p>
+            <a:pPr algn="l">
+              <a:spcAft>
+                <a:spcPts val="200"/>
+              </a:spcAft>
+            </a:pPr>
+            <a:r>
+              <a:rPr lang="de-DE" sz="1300" dirty="0">
+                <a:solidFill>
+                  <a:srgbClr val="262626"/>
+                </a:solidFill>
+              </a:rPr>
+              <a:t>Ressourcenangaben + Rechner-Eintrag</a:t>
+            </a:r>
+          </a:p>
+          <a:p>
+            <a:pPr algn="l"/>
+            <a:r>
+              <a:rPr lang="de-DE" sz="1100" dirty="0">
+                <a:solidFill>
+                  <a:srgbClr val="595959"/>
+                </a:solidFill>
+              </a:rPr>
+              <a:t>Slurm als Scheduler</a:t>
+            </a:r>
+          </a:p>
+        </p:txBody>
+      </p:sp>
+      <p:sp>
+        <p:nvSpPr>
+          <p:cNvPr id="36" name="Ausführung AiiDA"/>
+          <p:cNvSpPr txBox="1"/>
+          <p:nvPr/>
+        </p:nvSpPr>
+        <p:spPr>
+          <a:xfrm>
+            <a:off x="7289800" y="3556000"/>
+            <a:ext cx="3987800" cy="558800"/>
+          </a:xfrm>
+          <a:prstGeom prst="rect">
+            <a:avLst/>
+          </a:prstGeom>
+          <a:noFill/>
+        </p:spPr>
+        <p:txBody>
+          <a:bodyPr wrap="square" lIns="0" tIns="0" rIns="0" bIns="0" anchor="ctr">
+            <a:noAutofit/>
+          </a:bodyPr>
+          <a:lstStyle/>
+          <a:p>
+            <a:pPr algn="l"/>
+            <a:r>
+              <a:rPr lang="de-DE" sz="1300" dirty="0">
+                <a:solidFill>
+                  <a:srgbClr val="262626"/>
+                </a:solidFill>
+              </a:rPr>
+              <a:t>CalcJob → </a:t>
+            </a:r>
+            <a:r>
+              <a:rPr lang="de-DE" sz="1300" b="1" dirty="0">
+                <a:solidFill>
+                  <a:srgbClr val="262626"/>
+                </a:solidFill>
+              </a:rPr>
+              <a:t>Slurm-Job</a:t>
+            </a:r>
+          </a:p>
+        </p:txBody>
+      </p:sp>
+      <p:cxnSp>
+        <p:nvCxnSpPr>
+          <p:cNvPr id="37" name="Zeilenlinie 3"/>
+          <p:cNvCxnSpPr/>
+          <p:nvPr/>
+        </p:nvCxnSpPr>
+        <p:spPr>
+          <a:xfrm>
+            <a:off x="1219200" y="4165600"/>
+            <a:ext cx="10058400" cy="0"/>
+          </a:xfrm>
+          <a:prstGeom prst="line">
+            <a:avLst/>
+          </a:prstGeom>
+          <a:ln w="6350">
+            <a:solidFill>
+              <a:srgbClr val="D9D9D9"/>
+            </a:solidFill>
+          </a:ln>
+        </p:spPr>
+      </p:cxnSp>
+      <p:sp>
+        <p:nvSpPr>
+          <p:cNvPr id="38" name="Name Merlin"/>
+          <p:cNvSpPr txBox="1"/>
+          <p:nvPr/>
+        </p:nvSpPr>
+        <p:spPr>
+          <a:xfrm>
+            <a:off x="1219200" y="4216400"/>
+            <a:ext cx="1778000" cy="558800"/>
+          </a:xfrm>
+          <a:prstGeom prst="rect">
+            <a:avLst/>
+          </a:prstGeom>
+          <a:noFill/>
+        </p:spPr>
+        <p:txBody>
+          <a:bodyPr wrap="square" lIns="0" tIns="0" rIns="0" bIns="0" anchor="ctr">
+            <a:noAutofit/>
+          </a:bodyPr>
+          <a:lstStyle/>
+          <a:p>
+            <a:pPr algn="l"/>
+            <a:r>
+              <a:rPr lang="de-DE" sz="1600" b="1" dirty="0">
+                <a:solidFill>
+                  <a:srgbClr val="262626"/>
+                </a:solidFill>
+              </a:rPr>
+              <a:t>Merlin</a:t>
+            </a:r>
+          </a:p>
+        </p:txBody>
+      </p:sp>
+      <p:sp>
+        <p:nvSpPr>
+          <p:cNvPr id="39" name="Anpassung Merlin"/>
+          <p:cNvSpPr txBox="1"/>
+          <p:nvPr/>
+        </p:nvSpPr>
+        <p:spPr>
+          <a:xfrm>
+            <a:off x="3175000" y="4216400"/>
+            <a:ext cx="3937000" cy="558800"/>
+          </a:xfrm>
+          <a:prstGeom prst="rect">
+            <a:avLst/>
+          </a:prstGeom>
+          <a:noFill/>
+        </p:spPr>
+        <p:txBody>
+          <a:bodyPr wrap="square" lIns="0" tIns="0" rIns="0" bIns="0" anchor="ctr">
+            <a:noAutofit/>
+          </a:bodyPr>
+          <a:lstStyle/>
+          <a:p>
+            <a:pPr algn="l">
+              <a:spcAft>
+                <a:spcPts val="200"/>
+              </a:spcAft>
+            </a:pPr>
+            <a:r>
+              <a:rPr lang="de-DE" sz="1300" b="1" dirty="0">
+                <a:solidFill>
+                  <a:srgbClr val="262626"/>
+                </a:solidFill>
+              </a:rPr>
+              <a:t>Pilot-Job-Prinzip</a:t>
+            </a:r>
+          </a:p>
+          <a:p>
+            <a:pPr algn="l"/>
+            <a:r>
+              <a:rPr lang="de-DE" sz="1100" dirty="0">
+                <a:solidFill>
+                  <a:srgbClr val="595959"/>
+                </a:solidFill>
+              </a:rPr>
+              <a:t>Worker über Slurm gestartet</a:t>
+            </a:r>
+          </a:p>
+        </p:txBody>
+      </p:sp>
+      <p:sp>
+        <p:nvSpPr>
+          <p:cNvPr id="40" name="Ausführung Merlin"/>
+          <p:cNvSpPr txBox="1"/>
+          <p:nvPr/>
+        </p:nvSpPr>
+        <p:spPr>
+          <a:xfrm>
+            <a:off x="7289800" y="4216400"/>
+            <a:ext cx="3987800" cy="558800"/>
+          </a:xfrm>
+          <a:prstGeom prst="rect">
+            <a:avLst/>
+          </a:prstGeom>
+          <a:noFill/>
+        </p:spPr>
+        <p:txBody>
+          <a:bodyPr wrap="square" lIns="0" tIns="0" rIns="0" bIns="0" anchor="ctr">
+            <a:noAutofit/>
+          </a:bodyPr>
+          <a:lstStyle/>
+          <a:p>
+            <a:pPr algn="l"/>
+            <a:r>
+              <a:rPr lang="de-DE" sz="1300" b="1" dirty="0">
+                <a:solidFill>
+                  <a:srgbClr val="262626"/>
+                </a:solidFill>
+              </a:rPr>
+              <a:t>Worker-Allokation</a:t>
+            </a:r>
+            <a:r>
+              <a:rPr lang="de-DE" sz="1300" dirty="0">
+                <a:solidFill>
+                  <a:srgbClr val="262626"/>
+                </a:solidFill>
+              </a:rPr>
+              <a:t> → mehrere Workflow-Tasks</a:t>
+            </a:r>
+          </a:p>
+        </p:txBody>
+      </p:sp>
+      <p:cxnSp>
+        <p:nvCxnSpPr>
+          <p:cNvPr id="41" name="Tabellenende"/>
+          <p:cNvCxnSpPr/>
+          <p:nvPr/>
+        </p:nvCxnSpPr>
+        <p:spPr>
+          <a:xfrm>
+            <a:off x="1219200" y="4826000"/>
+            <a:ext cx="10058400" cy="0"/>
+          </a:xfrm>
+          <a:prstGeom prst="line">
+            <a:avLst/>
+          </a:prstGeom>
+          <a:ln w="9525">
+            <a:solidFill>
+              <a:srgbClr val="D9D9D9"/>
+            </a:solidFill>
+          </a:ln>
+        </p:spPr>
+      </p:cxnSp>
+      <p:sp>
+        <p:nvSpPr>
+          <p:cNvPr id="43" name="Dateisystem"/>
+          <p:cNvSpPr txBox="1"/>
+          <p:nvPr/>
+        </p:nvSpPr>
+        <p:spPr>
+          <a:xfrm>
+            <a:off x="1219200" y="4978400"/>
+            <a:ext cx="10058400" cy="457200"/>
+          </a:xfrm>
+          <a:prstGeom prst="rect">
+            <a:avLst/>
+          </a:prstGeom>
+          <a:noFill/>
+        </p:spPr>
+        <p:txBody>
+          <a:bodyPr wrap="square" lIns="0" tIns="0" rIns="0" bIns="0" anchor="ctr">
+            <a:noAutofit/>
+          </a:bodyPr>
+          <a:lstStyle/>
+          <a:p>
+            <a:pPr algn="l">
+              <a:spcAft>
+                <a:spcPts val="200"/>
+              </a:spcAft>
+            </a:pPr>
+            <a:r>
+              <a:rPr lang="de-DE" sz="1300" b="1" dirty="0">
+                <a:solidFill>
+                  <a:srgbClr val="262626"/>
+                </a:solidFill>
+              </a:rPr>
+              <a:t>Gemeinsames Dateisystem: /fshpc</a:t>
+            </a:r>
+          </a:p>
+          <a:p>
+            <a:pPr algn="l"/>
+            <a:r>
+              <a:rPr lang="de-DE" sz="1100" dirty="0">
+                <a:solidFill>
+                  <a:srgbClr val="595959"/>
+                </a:solidFill>
+              </a:rPr>
+              <a:t>Workflow-Dateien sind dadurch auch für Schritte auf unterschiedlichen Rechenknoten verfügbar.</a:t>
+            </a:r>
+          </a:p>
+        </p:txBody>
+      </p:sp>
+      <p:sp>
+        <p:nvSpPr>
+          <p:cNvPr id="45" name="Kernaussage"/>
+          <p:cNvSpPr txBox="1"/>
+          <p:nvPr/>
+        </p:nvSpPr>
+        <p:spPr>
+          <a:xfrm>
+            <a:off x="1219200" y="5588000"/>
+            <a:ext cx="10058400" cy="254000"/>
+          </a:xfrm>
+          <a:prstGeom prst="rect">
+            <a:avLst/>
+          </a:prstGeom>
+          <a:noFill/>
+        </p:spPr>
+        <p:txBody>
+          <a:bodyPr wrap="square" lIns="0" tIns="0" rIns="0" bIns="0" anchor="ctr">
+            <a:noAutofit/>
+          </a:bodyPr>
+          <a:lstStyle/>
+          <a:p>
+            <a:pPr algn="ctr"/>
+            <a:r>
+              <a:rPr lang="de-DE" sz="1400" b="1" dirty="0">
+                <a:solidFill>
+                  <a:srgbClr val="262626"/>
+                </a:solidFill>
+              </a:rPr>
+              <a:t>Workflow Logik bleibt erhalten, Integration in </a:t>
+            </a:r>
+            <a:r>
+              <a:rPr lang="de-DE" sz="1400" b="1" dirty="0" err="1">
+                <a:solidFill>
+                  <a:srgbClr val="262626"/>
+                </a:solidFill>
+              </a:rPr>
+              <a:t>Slurm</a:t>
+            </a:r>
+            <a:r>
+              <a:rPr lang="de-DE" sz="1400" b="1" dirty="0">
+                <a:solidFill>
+                  <a:srgbClr val="262626"/>
+                </a:solidFill>
+              </a:rPr>
+              <a:t> ist systemspezifisch</a:t>
+            </a:r>
+          </a:p>
+        </p:txBody>
+      </p:sp>
+      <p:sp>
+        <p:nvSpPr>
+          <p:cNvPr id="46" name="Foliennummer"/>
+          <p:cNvSpPr txBox="1"/>
+          <p:nvPr/>
+        </p:nvSpPr>
+        <p:spPr>
+          <a:xfrm>
+            <a:off x="10769600" y="6197600"/>
+            <a:ext cx="508000" cy="254000"/>
+          </a:xfrm>
+          <a:prstGeom prst="rect">
+            <a:avLst/>
+          </a:prstGeom>
+          <a:noFill/>
+        </p:spPr>
+        <p:txBody>
+          <a:bodyPr wrap="square" lIns="0" tIns="0" rIns="0" bIns="0" anchor="t">
+            <a:noAutofit/>
+          </a:bodyPr>
+          <a:lstStyle/>
+          <a:p>
+            <a:pPr algn="r"/>
+            <a:r>
+              <a:rPr lang="de-DE" sz="1200" dirty="0">
+                <a:solidFill>
+                  <a:srgbClr val="8C8C8C"/>
+                </a:solidFill>
+              </a:rPr>
+              <a:t>16</a:t>
+            </a:r>
+          </a:p>
+        </p:txBody>
+      </p:sp>
+      <p:cxnSp>
+        <p:nvCxnSpPr>
+          <p:cNvPr id="47" name="Fortschritt Linie"/>
+          <p:cNvCxnSpPr/>
+          <p:nvPr/>
+        </p:nvCxnSpPr>
+        <p:spPr>
+          <a:xfrm>
+            <a:off x="1219200" y="6172200"/>
+            <a:ext cx="5080000" cy="0"/>
+          </a:xfrm>
+          <a:prstGeom prst="line">
+            <a:avLst/>
+          </a:prstGeom>
+          <a:ln w="6350">
+            <a:solidFill>
+              <a:srgbClr val="D9D9D9"/>
+            </a:solidFill>
+          </a:ln>
+        </p:spPr>
+      </p:cxnSp>
+      <p:sp>
+        <p:nvSpPr>
+          <p:cNvPr id="48" name="Marker Motivation"/>
+          <p:cNvSpPr/>
+          <p:nvPr/>
+        </p:nvSpPr>
+        <p:spPr>
+          <a:xfrm>
+            <a:off x="1187450" y="6140450"/>
+            <a:ext cx="63500" cy="63500"/>
+          </a:xfrm>
+          <a:prstGeom prst="ellipse">
+            <a:avLst/>
+          </a:prstGeom>
+          <a:solidFill>
+            <a:srgbClr val="BFBFBF"/>
+          </a:solidFill>
+          <a:ln>
+            <a:noFill/>
+          </a:ln>
+        </p:spPr>
+        <p:txBody>
+          <a:bodyPr/>
+          <a:lstStyle/>
+          <a:p>
+            <a:endParaRPr lang="de-DE"/>
+          </a:p>
+        </p:txBody>
+      </p:sp>
+      <p:sp>
+        <p:nvSpPr>
+          <p:cNvPr id="49" name="Label Motivation"/>
+          <p:cNvSpPr txBox="1"/>
+          <p:nvPr/>
+        </p:nvSpPr>
+        <p:spPr>
+          <a:xfrm>
+            <a:off x="1219200" y="6273800"/>
+            <a:ext cx="1270000" cy="203200"/>
+          </a:xfrm>
+          <a:prstGeom prst="rect">
+            <a:avLst/>
+          </a:prstGeom>
+          <a:noFill/>
+        </p:spPr>
+        <p:txBody>
+          <a:bodyPr wrap="square" lIns="0" tIns="0" rIns="0" bIns="0" anchor="t">
+            <a:noAutofit/>
+          </a:bodyPr>
+          <a:lstStyle/>
+          <a:p>
+            <a:pPr algn="l"/>
+            <a:r>
+              <a:rPr lang="de-DE" sz="1000" dirty="0">
+                <a:solidFill>
+                  <a:srgbClr val="A6A6A6"/>
+                </a:solidFill>
+              </a:rPr>
+              <a:t>Motivation</a:t>
+            </a:r>
+          </a:p>
+        </p:txBody>
+      </p:sp>
+      <p:sp>
+        <p:nvSpPr>
+          <p:cNvPr id="50" name="Marker Methodik"/>
+          <p:cNvSpPr/>
+          <p:nvPr/>
+        </p:nvSpPr>
+        <p:spPr>
+          <a:xfrm>
+            <a:off x="2457450" y="6140450"/>
+            <a:ext cx="63500" cy="63500"/>
+          </a:xfrm>
+          <a:prstGeom prst="ellipse">
+            <a:avLst/>
+          </a:prstGeom>
+          <a:solidFill>
+            <a:srgbClr val="BFBFBF"/>
+          </a:solidFill>
+          <a:ln>
+            <a:noFill/>
+          </a:ln>
+        </p:spPr>
+        <p:txBody>
+          <a:bodyPr/>
+          <a:lstStyle/>
+          <a:p>
+            <a:endParaRPr lang="de-DE"/>
+          </a:p>
+        </p:txBody>
+      </p:sp>
+      <p:sp>
+        <p:nvSpPr>
+          <p:cNvPr id="51" name="Label Methodik"/>
+          <p:cNvSpPr txBox="1"/>
+          <p:nvPr/>
+        </p:nvSpPr>
+        <p:spPr>
+          <a:xfrm>
+            <a:off x="1854200" y="6273800"/>
+            <a:ext cx="1270000" cy="203200"/>
+          </a:xfrm>
+          <a:prstGeom prst="rect">
+            <a:avLst/>
+          </a:prstGeom>
+          <a:noFill/>
+        </p:spPr>
+        <p:txBody>
+          <a:bodyPr wrap="square" lIns="0" tIns="0" rIns="0" bIns="0" anchor="t">
+            <a:noAutofit/>
+          </a:bodyPr>
+          <a:lstStyle/>
+          <a:p>
+            <a:pPr algn="ctr"/>
+            <a:r>
+              <a:rPr lang="de-DE" sz="1000" dirty="0">
+                <a:solidFill>
+                  <a:srgbClr val="A6A6A6"/>
+                </a:solidFill>
+              </a:rPr>
+              <a:t>Methodik</a:t>
+            </a:r>
+          </a:p>
+        </p:txBody>
+      </p:sp>
+      <p:sp>
+        <p:nvSpPr>
+          <p:cNvPr id="52" name="Marker Systeme"/>
+          <p:cNvSpPr/>
+          <p:nvPr/>
+        </p:nvSpPr>
+        <p:spPr>
+          <a:xfrm>
+            <a:off x="3727450" y="6140450"/>
+            <a:ext cx="63500" cy="63500"/>
+          </a:xfrm>
+          <a:prstGeom prst="ellipse">
+            <a:avLst/>
+          </a:prstGeom>
+          <a:solidFill>
+            <a:srgbClr val="BFBFBF"/>
+          </a:solidFill>
+          <a:ln>
+            <a:noFill/>
+          </a:ln>
+        </p:spPr>
+        <p:txBody>
+          <a:bodyPr/>
+          <a:lstStyle/>
+          <a:p>
+            <a:endParaRPr lang="de-DE"/>
+          </a:p>
+        </p:txBody>
+      </p:sp>
+      <p:sp>
+        <p:nvSpPr>
+          <p:cNvPr id="53" name="Label Systeme"/>
+          <p:cNvSpPr txBox="1"/>
+          <p:nvPr/>
+        </p:nvSpPr>
+        <p:spPr>
+          <a:xfrm>
+            <a:off x="3124200" y="6273800"/>
+            <a:ext cx="1270000" cy="203200"/>
+          </a:xfrm>
+          <a:prstGeom prst="rect">
+            <a:avLst/>
+          </a:prstGeom>
+          <a:noFill/>
+        </p:spPr>
+        <p:txBody>
+          <a:bodyPr wrap="square" lIns="0" tIns="0" rIns="0" bIns="0" anchor="t">
+            <a:noAutofit/>
+          </a:bodyPr>
+          <a:lstStyle/>
+          <a:p>
+            <a:pPr algn="ctr"/>
+            <a:r>
+              <a:rPr lang="de-DE" sz="1000" dirty="0">
+                <a:solidFill>
+                  <a:srgbClr val="A6A6A6"/>
+                </a:solidFill>
+              </a:rPr>
+              <a:t>Systeme</a:t>
+            </a:r>
+          </a:p>
+        </p:txBody>
+      </p:sp>
+      <p:sp>
+        <p:nvSpPr>
+          <p:cNvPr id="54" name="Marker Untersuchung"/>
+          <p:cNvSpPr/>
+          <p:nvPr/>
+        </p:nvSpPr>
+        <p:spPr>
+          <a:xfrm>
+            <a:off x="4984750" y="6127750"/>
+            <a:ext cx="88900" cy="88900"/>
+          </a:xfrm>
+          <a:prstGeom prst="ellipse">
+            <a:avLst/>
+          </a:prstGeom>
+          <a:solidFill>
+            <a:srgbClr val="C1002A"/>
+          </a:solidFill>
+          <a:ln>
+            <a:noFill/>
+          </a:ln>
+        </p:spPr>
+        <p:txBody>
+          <a:bodyPr/>
+          <a:lstStyle/>
+          <a:p>
+            <a:endParaRPr lang="de-DE"/>
+          </a:p>
+        </p:txBody>
+      </p:sp>
+      <p:sp>
+        <p:nvSpPr>
+          <p:cNvPr id="55" name="Label Untersuchung"/>
+          <p:cNvSpPr txBox="1"/>
+          <p:nvPr/>
+        </p:nvSpPr>
+        <p:spPr>
+          <a:xfrm>
+            <a:off x="4394200" y="6273800"/>
+            <a:ext cx="1270000" cy="203200"/>
+          </a:xfrm>
+          <a:prstGeom prst="rect">
+            <a:avLst/>
+          </a:prstGeom>
+          <a:noFill/>
+        </p:spPr>
+        <p:txBody>
+          <a:bodyPr wrap="square" lIns="0" tIns="0" rIns="0" bIns="0" anchor="t">
+            <a:noAutofit/>
+          </a:bodyPr>
+          <a:lstStyle/>
+          <a:p>
+            <a:pPr algn="ctr"/>
+            <a:r>
+              <a:rPr lang="de-DE" sz="1000" b="1" dirty="0">
+                <a:solidFill>
+                  <a:srgbClr val="C1002A"/>
+                </a:solidFill>
+              </a:rPr>
+              <a:t>Untersuchung</a:t>
+            </a:r>
+          </a:p>
+        </p:txBody>
+      </p:sp>
+      <p:sp>
+        <p:nvSpPr>
+          <p:cNvPr id="56" name="Marker Fazit"/>
+          <p:cNvSpPr/>
+          <p:nvPr/>
+        </p:nvSpPr>
+        <p:spPr>
+          <a:xfrm>
+            <a:off x="6267450" y="6140450"/>
+            <a:ext cx="63500" cy="63500"/>
+          </a:xfrm>
+          <a:prstGeom prst="ellipse">
+            <a:avLst/>
+          </a:prstGeom>
+          <a:solidFill>
+            <a:srgbClr val="BFBFBF"/>
+          </a:solidFill>
+          <a:ln>
+            <a:noFill/>
+          </a:ln>
+        </p:spPr>
+        <p:txBody>
+          <a:bodyPr/>
+          <a:lstStyle/>
+          <a:p>
+            <a:endParaRPr lang="de-DE"/>
+          </a:p>
+        </p:txBody>
+      </p:sp>
+      <p:sp>
+        <p:nvSpPr>
+          <p:cNvPr id="57" name="Label Fazit"/>
+          <p:cNvSpPr txBox="1"/>
+          <p:nvPr/>
+        </p:nvSpPr>
+        <p:spPr>
+          <a:xfrm>
+            <a:off x="5029200" y="6273800"/>
+            <a:ext cx="1270000" cy="203200"/>
+          </a:xfrm>
+          <a:prstGeom prst="rect">
+            <a:avLst/>
+          </a:prstGeom>
+          <a:noFill/>
+        </p:spPr>
+        <p:txBody>
+          <a:bodyPr wrap="square" lIns="0" tIns="0" rIns="0" bIns="0" anchor="t">
+            <a:noAutofit/>
+          </a:bodyPr>
+          <a:lstStyle/>
+          <a:p>
+            <a:pPr algn="r"/>
+            <a:r>
+              <a:rPr lang="de-DE" sz="1000" dirty="0">
+                <a:solidFill>
+                  <a:srgbClr val="A6A6A6"/>
+                </a:solidFill>
+              </a:rPr>
+              <a:t>Fazit</a:t>
+            </a:r>
+          </a:p>
+        </p:txBody>
+      </p:sp>
+    </p:spTree>
+    <p:extLst>
+      <p:ext uri="{BB962C8B-B14F-4D97-AF65-F5344CB8AC3E}">
+        <p14:creationId xmlns:p14="http://schemas.microsoft.com/office/powerpoint/2010/main" val="1717310378"/>
+      </p:ext>
+    </p:extLst>
+  </p:cSld>
+  <p:clrMapOvr>
+    <a:masterClrMapping/>
+  </p:clrMapOvr>
+</p:sld>
+</file>
+
+<file path=ppt/slides/slide17.xml><?xml version="1.0" encoding="utf-8"?>
+<p:sld xmlns:a="http://schemas.openxmlformats.org/drawingml/2006/main" xmlns:r="http://schemas.openxmlformats.org/officeDocument/2006/relationships" xmlns:p="http://schemas.openxmlformats.org/presentationml/2006/main">
+  <p:cSld>
+    <p:spTree>
+      <p:nvGrpSpPr>
+        <p:cNvPr id="1" name=""/>
+        <p:cNvGrpSpPr/>
+        <p:nvPr/>
+      </p:nvGrpSpPr>
+      <p:grpSpPr>
+        <a:xfrm>
+          <a:off x="0" y="0"/>
+          <a:ext cx="0" cy="0"/>
+          <a:chOff x="0" y="0"/>
+          <a:chExt cx="0" cy="0"/>
+        </a:xfrm>
+      </p:grpSpPr>
+      <p:sp>
+        <p:nvSpPr>
+          <p:cNvPr id="2" name="Titel 1">
             <a:extLst>
               <a:ext uri="{FF2B5EF4-FFF2-40B4-BE49-F238E27FC236}">
-                <a16:creationId xmlns:a16="http://schemas.microsoft.com/office/drawing/2014/main" id="{440A9FB2-E4B2-A71F-E04B-B10EEFD4F2B4}"/>
+                <a16:creationId xmlns:a16="http://schemas.microsoft.com/office/drawing/2014/main" id="{42F39543-9E36-2A79-94D5-635BA055DDA0}"/>
               </a:ext>
             </a:extLst>
           </p:cNvPr>
@@ -11198,186 +12467,656 @@
             <a:spLocks noGrp="1"/>
           </p:cNvSpPr>
           <p:nvPr>
-            <p:ph idx="1"/>
+            <p:ph type="title"/>
           </p:nvPr>
         </p:nvSpPr>
         <p:spPr>
           <a:xfrm>
-            <a:off x="1219200" y="1905000"/>
-            <a:ext cx="10058400" cy="3810000"/>
-          </a:xfrm>
-        </p:spPr>
-        <p:txBody>
-          <a:bodyPr wrap="square" lIns="0" tIns="0" rIns="0" bIns="0" anchor="t">
+            <a:off x="1219200" y="812800"/>
+            <a:ext cx="10058400" cy="508000"/>
+          </a:xfrm>
+        </p:spPr>
+        <p:txBody>
+          <a:bodyPr wrap="square" lIns="0" tIns="0" rIns="0" bIns="0" anchor="ctr">
             <a:normAutofit/>
           </a:bodyPr>
           <a:lstStyle/>
           <a:p>
-            <a:pPr marL="0" indent="0" algn="l">
+            <a:pPr algn="l"/>
+            <a:r>
+              <a:rPr lang="de-DE" sz="2600" b="1" dirty="0">
+                <a:solidFill>
+                  <a:srgbClr val="262626"/>
+                </a:solidFill>
+              </a:rPr>
+              <a:t>Regulärer Slurm-Betrieb</a:t>
+            </a:r>
+          </a:p>
+        </p:txBody>
+      </p:sp>
+      <p:sp>
+        <p:nvSpPr>
+          <p:cNvPr id="20" name="Akzentlinie"/>
+          <p:cNvSpPr/>
+          <p:nvPr/>
+        </p:nvSpPr>
+        <p:spPr>
+          <a:xfrm>
+            <a:off x="914400" y="812800"/>
+            <a:ext cx="50800" cy="431800"/>
+          </a:xfrm>
+          <a:prstGeom prst="rect">
+            <a:avLst/>
+          </a:prstGeom>
+          <a:solidFill>
+            <a:srgbClr val="C1002A"/>
+          </a:solidFill>
+          <a:ln>
+            <a:noFill/>
+          </a:ln>
+        </p:spPr>
+        <p:txBody>
+          <a:bodyPr/>
+          <a:lstStyle/>
+          <a:p>
+            <a:endParaRPr lang="de-DE"/>
+          </a:p>
+        </p:txBody>
+      </p:sp>
+      <p:sp>
+        <p:nvSpPr>
+          <p:cNvPr id="21" name="Abschnitt"/>
+          <p:cNvSpPr txBox="1"/>
+          <p:nvPr/>
+        </p:nvSpPr>
+        <p:spPr>
+          <a:xfrm>
+            <a:off x="1219200" y="1397000"/>
+            <a:ext cx="10058400" cy="177800"/>
+          </a:xfrm>
+          <a:prstGeom prst="rect">
+            <a:avLst/>
+          </a:prstGeom>
+          <a:noFill/>
+        </p:spPr>
+        <p:txBody>
+          <a:bodyPr wrap="square" lIns="0" tIns="0" rIns="0" bIns="0" anchor="t"/>
+          <a:lstStyle/>
+          <a:p>
+            <a:pPr algn="l"/>
+            <a:r>
+              <a:rPr lang="de-DE" sz="1000" b="1" spc="200" dirty="0">
+                <a:solidFill>
+                  <a:srgbClr val="C1002A"/>
+                </a:solidFill>
+              </a:rPr>
+              <a:t>CLUSTERBEDINGTE ZEITANTEILE</a:t>
+            </a:r>
+          </a:p>
+        </p:txBody>
+      </p:sp>
+      <p:sp>
+        <p:nvSpPr>
+          <p:cNvPr id="39" name="Zentrale Beobachtungen"/>
+          <p:cNvSpPr txBox="1"/>
+          <p:nvPr/>
+        </p:nvSpPr>
+        <p:spPr>
+          <a:xfrm>
+            <a:off x="7467600" y="1752600"/>
+            <a:ext cx="3810000" cy="279400"/>
+          </a:xfrm>
+          <a:prstGeom prst="rect">
+            <a:avLst/>
+          </a:prstGeom>
+          <a:noFill/>
+        </p:spPr>
+        <p:txBody>
+          <a:bodyPr wrap="square" lIns="0" tIns="0" rIns="0" bIns="0" anchor="t"/>
+          <a:lstStyle/>
+          <a:p>
+            <a:r>
+              <a:rPr lang="de-DE" sz="1600" b="1" dirty="0"/>
+              <a:t>Auswirkungen auf die Messung</a:t>
+            </a:r>
+          </a:p>
+        </p:txBody>
+      </p:sp>
+      <p:sp>
+        <p:nvSpPr>
+          <p:cNvPr id="40" name="Punkte"/>
+          <p:cNvSpPr txBox="1"/>
+          <p:nvPr/>
+        </p:nvSpPr>
+        <p:spPr>
+          <a:xfrm>
+            <a:off x="7467600" y="2133600"/>
+            <a:ext cx="3810000" cy="2667000"/>
+          </a:xfrm>
+          <a:prstGeom prst="rect">
+            <a:avLst/>
+          </a:prstGeom>
+          <a:noFill/>
+        </p:spPr>
+        <p:txBody>
+          <a:bodyPr wrap="square" lIns="0" tIns="0" rIns="0" bIns="0" anchor="t"/>
+          <a:lstStyle/>
+          <a:p>
+            <a:pPr marL="152400" indent="-152400" algn="l">
+              <a:spcAft>
+                <a:spcPts val="100"/>
+              </a:spcAft>
+              <a:buClr>
+                <a:srgbClr val="C1002A"/>
+              </a:buClr>
+              <a:buFont typeface="Arial"/>
+              <a:buChar char="•"/>
+            </a:pPr>
+            <a:r>
+              <a:rPr lang="de-DE" sz="1300" b="1" dirty="0">
+                <a:solidFill>
+                  <a:srgbClr val="262626"/>
+                </a:solidFill>
+              </a:rPr>
+              <a:t>Systemeigene Vorbereitung</a:t>
+            </a:r>
+          </a:p>
+          <a:p>
+            <a:pPr marL="152400" indent="0" algn="l">
+              <a:spcAft>
+                <a:spcPts val="0"/>
+              </a:spcAft>
+              <a:buNone/>
+            </a:pPr>
+            <a:r>
+              <a:rPr lang="de-DE" sz="1100" dirty="0">
+                <a:solidFill>
+                  <a:srgbClr val="595959"/>
+                </a:solidFill>
+              </a:rPr>
+              <a:t>liegt innerhalb der Zeit vor Nutzlast</a:t>
+            </a:r>
+          </a:p>
+          <a:p>
+            <a:pPr marL="152400" indent="0" algn="l">
               <a:spcAft>
                 <a:spcPts val="800"/>
               </a:spcAft>
               <a:buNone/>
             </a:pPr>
             <a:r>
-              <a:rPr lang="de-DE" sz="1400" b="1" dirty="0">
+              <a:rPr lang="de-DE" sz="1000" dirty="0">
+                <a:solidFill>
+                  <a:srgbClr val="8C8C8C"/>
+                </a:solidFill>
+              </a:rPr>
+              <a:t>ab verfügbaren Zeitankern: Millisekundenbereich</a:t>
+            </a:r>
+          </a:p>
+          <a:p>
+            <a:pPr marL="152400" indent="-152400" algn="l">
+              <a:spcAft>
+                <a:spcPts val="100"/>
+              </a:spcAft>
+              <a:buClr>
+                <a:srgbClr val="C1002A"/>
+              </a:buClr>
+              <a:buFont typeface="Arial"/>
+              <a:buChar char="•"/>
+            </a:pPr>
+            <a:r>
+              <a:rPr lang="de-DE" sz="1300" b="1" dirty="0">
                 <a:solidFill>
                   <a:srgbClr val="262626"/>
                 </a:solidFill>
               </a:rPr>
-              <a:t>Logos der Workflow-Management-Systeme</a:t>
-            </a:r>
-          </a:p>
-          <a:p>
-            <a:pPr marL="0" indent="0" algn="l">
+              <a:t>Unterschiedliche Zeitanker</a:t>
+            </a:r>
+          </a:p>
+          <a:p>
+            <a:pPr marL="152400" indent="-152400" algn="l">
               <a:spcAft>
-                <a:spcPts val="400"/>
+                <a:spcPts val="100"/>
               </a:spcAft>
-              <a:buNone/>
+              <a:buClr>
+                <a:srgbClr val="C1002A"/>
+              </a:buClr>
+              <a:buFont typeface="Arial"/>
+              <a:buChar char="•"/>
             </a:pPr>
-            <a:r>
-              <a:rPr lang="de-DE" sz="1200" dirty="0">
+            <a:endParaRPr lang="de-DE" sz="1300" b="1" dirty="0">
+              <a:solidFill>
+                <a:srgbClr val="262626"/>
+              </a:solidFill>
+            </a:endParaRPr>
+          </a:p>
+          <a:p>
+            <a:pPr marL="152400" indent="-152400" algn="l">
+              <a:spcAft>
+                <a:spcPts val="200"/>
+              </a:spcAft>
+              <a:buClr>
+                <a:srgbClr val="C1002A"/>
+              </a:buClr>
+              <a:buFont typeface="Arial"/>
+              <a:buChar char="•"/>
+            </a:pPr>
+            <a:r>
+              <a:rPr lang="de-DE" sz="1300" b="1" dirty="0">
                 <a:solidFill>
                   <a:srgbClr val="262626"/>
                 </a:solidFill>
               </a:rPr>
-              <a:t>Nextflow</a:t>
-            </a:r>
-            <a:r>
-              <a:rPr lang="de-DE" sz="1200" dirty="0">
-                <a:solidFill>
-                  <a:srgbClr val="595959"/>
-                </a:solidFill>
-              </a:rPr>
-              <a:t> – https://workflows.community/systems/nextflow/</a:t>
-            </a:r>
-          </a:p>
-          <a:p>
-            <a:pPr marL="0" indent="0" algn="l">
-              <a:spcAft>
-                <a:spcPts val="400"/>
-              </a:spcAft>
-              <a:buNone/>
-            </a:pPr>
-            <a:r>
-              <a:rPr lang="de-DE" sz="1200" dirty="0">
-                <a:solidFill>
-                  <a:srgbClr val="262626"/>
-                </a:solidFill>
-              </a:rPr>
-              <a:t>StreamFlow</a:t>
-            </a:r>
-            <a:r>
-              <a:rPr lang="de-DE" sz="1200" dirty="0">
-                <a:solidFill>
-                  <a:srgbClr val="595959"/>
-                </a:solidFill>
-              </a:rPr>
-              <a:t> – https://workflows.community/systems/streamflow/</a:t>
-            </a:r>
-          </a:p>
-          <a:p>
-            <a:pPr marL="0" indent="0" algn="l">
-              <a:spcAft>
-                <a:spcPts val="400"/>
-              </a:spcAft>
-              <a:buNone/>
-            </a:pPr>
-            <a:r>
-              <a:rPr lang="de-DE" sz="1200" dirty="0">
-                <a:solidFill>
-                  <a:srgbClr val="262626"/>
-                </a:solidFill>
-              </a:rPr>
-              <a:t>Merlin</a:t>
-            </a:r>
-            <a:r>
-              <a:rPr lang="de-DE" sz="1200" dirty="0">
-                <a:solidFill>
-                  <a:srgbClr val="595959"/>
-                </a:solidFill>
-              </a:rPr>
-              <a:t> – https://workflows.community/systems/merlin/</a:t>
-            </a:r>
-          </a:p>
-          <a:p>
-            <a:pPr marL="0" indent="0" algn="l">
-              <a:spcAft>
-                <a:spcPts val="400"/>
-              </a:spcAft>
-              <a:buNone/>
-            </a:pPr>
-            <a:r>
-              <a:rPr lang="de-DE" sz="1200" dirty="0">
-                <a:solidFill>
-                  <a:srgbClr val="262626"/>
-                </a:solidFill>
-              </a:rPr>
-              <a:t>Pegasus</a:t>
-            </a:r>
-            <a:r>
-              <a:rPr lang="de-DE" sz="1200" dirty="0">
-                <a:solidFill>
-                  <a:srgbClr val="595959"/>
-                </a:solidFill>
-              </a:rPr>
-              <a:t> – https://workflows.community/systems/pegasus/</a:t>
-            </a:r>
-          </a:p>
-          <a:p>
-            <a:pPr marL="0" indent="0" algn="l">
-              <a:spcAft>
-                <a:spcPts val="400"/>
-              </a:spcAft>
-              <a:buNone/>
-            </a:pPr>
-            <a:r>
-              <a:rPr lang="de-DE" sz="1200" dirty="0">
-                <a:solidFill>
-                  <a:srgbClr val="262626"/>
-                </a:solidFill>
-              </a:rPr>
-              <a:t>AiiDA</a:t>
-            </a:r>
-            <a:r>
-              <a:rPr lang="de-DE" sz="1200" dirty="0">
-                <a:solidFill>
-                  <a:srgbClr val="595959"/>
-                </a:solidFill>
-              </a:rPr>
-              <a:t> – https://workflows.community/systems/aiida-core/</a:t>
-            </a:r>
-          </a:p>
-          <a:p>
-            <a:pPr marL="0" indent="0" algn="l">
+              <a:t>Wiederholte Zeitanteile je Slurm-Job</a:t>
+            </a:r>
+          </a:p>
+          <a:p>
+            <a:pPr marL="152400" indent="0" algn="l">
               <a:spcAft>
                 <a:spcPts val="0"/>
               </a:spcAft>
               <a:buNone/>
             </a:pPr>
             <a:r>
+              <a:rPr lang="de-DE" sz="1100" b="1" dirty="0">
+                <a:solidFill>
+                  <a:srgbClr val="262626"/>
+                </a:solidFill>
+              </a:rPr>
+              <a:t>Nextflow · StreamFlow · AiiDA</a:t>
+            </a:r>
+          </a:p>
+          <a:p>
+            <a:pPr marL="152400" indent="0" algn="l">
+              <a:spcAft>
+                <a:spcPts val="300"/>
+              </a:spcAft>
+              <a:buNone/>
+            </a:pPr>
+            <a:r>
               <a:rPr lang="de-DE" sz="1100" dirty="0">
                 <a:solidFill>
                   <a:srgbClr val="595959"/>
                 </a:solidFill>
               </a:rPr>
-              <a:t>Abruf: 01.09.2026</a:t>
-            </a:r>
-          </a:p>
-        </p:txBody>
-      </p:sp>
-      <p:sp>
-        <p:nvSpPr>
-          <p:cNvPr id="20" name="Akzentlinie"/>
+              <a:t>Workflow-Schritt → Slurm-Job</a:t>
+            </a:r>
+          </a:p>
+          <a:p>
+            <a:pPr marL="152400" indent="0" algn="l">
+              <a:spcAft>
+                <a:spcPts val="0"/>
+              </a:spcAft>
+              <a:buNone/>
+            </a:pPr>
+            <a:r>
+              <a:rPr lang="de-DE" sz="1100" b="1" dirty="0">
+                <a:solidFill>
+                  <a:srgbClr val="262626"/>
+                </a:solidFill>
+              </a:rPr>
+              <a:t>Merlin</a:t>
+            </a:r>
+          </a:p>
+          <a:p>
+            <a:pPr marL="152400" indent="0" algn="l">
+              <a:spcAft>
+                <a:spcPts val="0"/>
+              </a:spcAft>
+              <a:buNone/>
+            </a:pPr>
+            <a:r>
+              <a:rPr lang="de-DE" sz="1100" dirty="0">
+                <a:solidFill>
+                  <a:srgbClr val="595959"/>
+                </a:solidFill>
+              </a:rPr>
+              <a:t>eine Allokation → Worker führen Workflow-Schritte aus</a:t>
+            </a:r>
+          </a:p>
+        </p:txBody>
+      </p:sp>
+      <p:cxnSp>
+        <p:nvCxnSpPr>
+          <p:cNvPr id="41" name="Trennlinie"/>
+          <p:cNvCxnSpPr/>
+          <p:nvPr/>
+        </p:nvCxnSpPr>
+        <p:spPr>
+          <a:xfrm>
+            <a:off x="1219200" y="5054600"/>
+            <a:ext cx="10058400" cy="0"/>
+          </a:xfrm>
+          <a:prstGeom prst="line">
+            <a:avLst/>
+          </a:prstGeom>
+          <a:ln w="6350">
+            <a:solidFill>
+              <a:srgbClr val="D9D9D9"/>
+            </a:solidFill>
+          </a:ln>
+        </p:spPr>
+      </p:cxnSp>
+      <p:sp>
+        <p:nvSpPr>
+          <p:cNvPr id="42" name="Kernaussage"/>
+          <p:cNvSpPr txBox="1"/>
+          <p:nvPr/>
+        </p:nvSpPr>
+        <p:spPr>
+          <a:xfrm>
+            <a:off x="1219200" y="5156200"/>
+            <a:ext cx="10058400" cy="254000"/>
+          </a:xfrm>
+          <a:prstGeom prst="rect">
+            <a:avLst/>
+          </a:prstGeom>
+          <a:noFill/>
+        </p:spPr>
+        <p:txBody>
+          <a:bodyPr wrap="square" lIns="0" tIns="0" rIns="0" bIns="0" anchor="t"/>
+          <a:lstStyle/>
+          <a:p>
+            <a:pPr algn="l"/>
+            <a:r>
+              <a:rPr lang="de-DE" sz="1400" b="1" dirty="0">
+                <a:solidFill>
+                  <a:srgbClr val="262626"/>
+                </a:solidFill>
+              </a:rPr>
+              <a:t>Große clusterbedingte Zeitanteile überlagern die systemspezifischen Unterschiede.</a:t>
+            </a:r>
+          </a:p>
+        </p:txBody>
+      </p:sp>
+      <p:sp>
+        <p:nvSpPr>
+          <p:cNvPr id="43" name="Konsequenz"/>
+          <p:cNvSpPr txBox="1"/>
+          <p:nvPr/>
+        </p:nvSpPr>
+        <p:spPr>
+          <a:xfrm>
+            <a:off x="1219200" y="5435600"/>
+            <a:ext cx="10058400" cy="228600"/>
+          </a:xfrm>
+          <a:prstGeom prst="rect">
+            <a:avLst/>
+          </a:prstGeom>
+          <a:noFill/>
+        </p:spPr>
+        <p:txBody>
+          <a:bodyPr wrap="square" lIns="0" tIns="0" rIns="0" bIns="0" anchor="t"/>
+          <a:lstStyle/>
+          <a:p>
+            <a:pPr algn="l"/>
+            <a:r>
+              <a:rPr lang="de-DE" sz="1300" b="1" dirty="0">
+                <a:solidFill>
+                  <a:srgbClr val="C1002A"/>
+                </a:solidFill>
+              </a:rPr>
+              <a:t>→ </a:t>
+            </a:r>
+            <a:r>
+              <a:rPr lang="de-DE" sz="1300" b="1" dirty="0">
+                <a:solidFill>
+                  <a:srgbClr val="262626"/>
+                </a:solidFill>
+              </a:rPr>
+              <a:t>Vergleich auf dedizierter Ressource</a:t>
+            </a:r>
+          </a:p>
+        </p:txBody>
+      </p:sp>
+      <p:sp>
+        <p:nvSpPr>
+          <p:cNvPr id="44" name="Foliennummer"/>
+          <p:cNvSpPr txBox="1"/>
+          <p:nvPr/>
+        </p:nvSpPr>
+        <p:spPr>
+          <a:xfrm>
+            <a:off x="10769600" y="6197600"/>
+            <a:ext cx="508000" cy="254000"/>
+          </a:xfrm>
+          <a:prstGeom prst="rect">
+            <a:avLst/>
+          </a:prstGeom>
+          <a:noFill/>
+        </p:spPr>
+        <p:txBody>
+          <a:bodyPr wrap="square" lIns="0" tIns="0" rIns="0" bIns="0" anchor="t"/>
+          <a:lstStyle/>
+          <a:p>
+            <a:pPr algn="r"/>
+            <a:r>
+              <a:rPr lang="de-DE" sz="1200" dirty="0">
+                <a:solidFill>
+                  <a:srgbClr val="8C8C8C"/>
+                </a:solidFill>
+              </a:rPr>
+              <a:t>17</a:t>
+            </a:r>
+          </a:p>
+        </p:txBody>
+      </p:sp>
+      <p:cxnSp>
+        <p:nvCxnSpPr>
+          <p:cNvPr id="45" name="Fortschritt Linie"/>
+          <p:cNvCxnSpPr/>
+          <p:nvPr/>
+        </p:nvCxnSpPr>
+        <p:spPr>
+          <a:xfrm>
+            <a:off x="1219200" y="6172200"/>
+            <a:ext cx="5080000" cy="0"/>
+          </a:xfrm>
+          <a:prstGeom prst="line">
+            <a:avLst/>
+          </a:prstGeom>
+          <a:ln w="6350">
+            <a:solidFill>
+              <a:srgbClr val="D9D9D9"/>
+            </a:solidFill>
+          </a:ln>
+        </p:spPr>
+      </p:cxnSp>
+      <p:sp>
+        <p:nvSpPr>
+          <p:cNvPr id="46" name="Marker Motivation"/>
           <p:cNvSpPr/>
           <p:nvPr/>
         </p:nvSpPr>
         <p:spPr>
           <a:xfrm>
-            <a:off x="914400" y="812800"/>
-            <a:ext cx="50800" cy="431800"/>
-          </a:xfrm>
-          <a:prstGeom prst="rect">
+            <a:off x="1187450" y="6140450"/>
+            <a:ext cx="63500" cy="63500"/>
+          </a:xfrm>
+          <a:prstGeom prst="ellipse">
+            <a:avLst/>
+          </a:prstGeom>
+          <a:solidFill>
+            <a:srgbClr val="BFBFBF"/>
+          </a:solidFill>
+          <a:ln>
+            <a:noFill/>
+          </a:ln>
+        </p:spPr>
+        <p:txBody>
+          <a:bodyPr/>
+          <a:lstStyle/>
+          <a:p>
+            <a:endParaRPr lang="de-DE"/>
+          </a:p>
+        </p:txBody>
+      </p:sp>
+      <p:sp>
+        <p:nvSpPr>
+          <p:cNvPr id="47" name="Label Motivation"/>
+          <p:cNvSpPr txBox="1"/>
+          <p:nvPr/>
+        </p:nvSpPr>
+        <p:spPr>
+          <a:xfrm>
+            <a:off x="1219200" y="6273800"/>
+            <a:ext cx="1270000" cy="203200"/>
+          </a:xfrm>
+          <a:prstGeom prst="rect">
+            <a:avLst/>
+          </a:prstGeom>
+          <a:noFill/>
+        </p:spPr>
+        <p:txBody>
+          <a:bodyPr wrap="square" lIns="0" tIns="0" rIns="0" bIns="0" anchor="t"/>
+          <a:lstStyle/>
+          <a:p>
+            <a:pPr algn="l"/>
+            <a:r>
+              <a:rPr lang="de-DE" sz="1000" dirty="0">
+                <a:solidFill>
+                  <a:srgbClr val="A6A6A6"/>
+                </a:solidFill>
+              </a:rPr>
+              <a:t>Motivation</a:t>
+            </a:r>
+          </a:p>
+        </p:txBody>
+      </p:sp>
+      <p:sp>
+        <p:nvSpPr>
+          <p:cNvPr id="48" name="Marker Methodik"/>
+          <p:cNvSpPr/>
+          <p:nvPr/>
+        </p:nvSpPr>
+        <p:spPr>
+          <a:xfrm>
+            <a:off x="2457450" y="6140450"/>
+            <a:ext cx="63500" cy="63500"/>
+          </a:xfrm>
+          <a:prstGeom prst="ellipse">
+            <a:avLst/>
+          </a:prstGeom>
+          <a:solidFill>
+            <a:srgbClr val="BFBFBF"/>
+          </a:solidFill>
+          <a:ln>
+            <a:noFill/>
+          </a:ln>
+        </p:spPr>
+        <p:txBody>
+          <a:bodyPr/>
+          <a:lstStyle/>
+          <a:p>
+            <a:endParaRPr lang="de-DE"/>
+          </a:p>
+        </p:txBody>
+      </p:sp>
+      <p:sp>
+        <p:nvSpPr>
+          <p:cNvPr id="49" name="Label Methodik"/>
+          <p:cNvSpPr txBox="1"/>
+          <p:nvPr/>
+        </p:nvSpPr>
+        <p:spPr>
+          <a:xfrm>
+            <a:off x="1854200" y="6273800"/>
+            <a:ext cx="1270000" cy="203200"/>
+          </a:xfrm>
+          <a:prstGeom prst="rect">
+            <a:avLst/>
+          </a:prstGeom>
+          <a:noFill/>
+        </p:spPr>
+        <p:txBody>
+          <a:bodyPr wrap="square" lIns="0" tIns="0" rIns="0" bIns="0" anchor="t"/>
+          <a:lstStyle/>
+          <a:p>
+            <a:pPr algn="ctr"/>
+            <a:r>
+              <a:rPr lang="de-DE" sz="1000" dirty="0">
+                <a:solidFill>
+                  <a:srgbClr val="A6A6A6"/>
+                </a:solidFill>
+              </a:rPr>
+              <a:t>Methodik</a:t>
+            </a:r>
+          </a:p>
+        </p:txBody>
+      </p:sp>
+      <p:sp>
+        <p:nvSpPr>
+          <p:cNvPr id="50" name="Marker Systeme"/>
+          <p:cNvSpPr/>
+          <p:nvPr/>
+        </p:nvSpPr>
+        <p:spPr>
+          <a:xfrm>
+            <a:off x="3727450" y="6140450"/>
+            <a:ext cx="63500" cy="63500"/>
+          </a:xfrm>
+          <a:prstGeom prst="ellipse">
+            <a:avLst/>
+          </a:prstGeom>
+          <a:solidFill>
+            <a:srgbClr val="BFBFBF"/>
+          </a:solidFill>
+          <a:ln>
+            <a:noFill/>
+          </a:ln>
+        </p:spPr>
+        <p:txBody>
+          <a:bodyPr/>
+          <a:lstStyle/>
+          <a:p>
+            <a:endParaRPr lang="de-DE"/>
+          </a:p>
+        </p:txBody>
+      </p:sp>
+      <p:sp>
+        <p:nvSpPr>
+          <p:cNvPr id="51" name="Label Systeme"/>
+          <p:cNvSpPr txBox="1"/>
+          <p:nvPr/>
+        </p:nvSpPr>
+        <p:spPr>
+          <a:xfrm>
+            <a:off x="3124200" y="6273800"/>
+            <a:ext cx="1270000" cy="203200"/>
+          </a:xfrm>
+          <a:prstGeom prst="rect">
+            <a:avLst/>
+          </a:prstGeom>
+          <a:noFill/>
+        </p:spPr>
+        <p:txBody>
+          <a:bodyPr wrap="square" lIns="0" tIns="0" rIns="0" bIns="0" anchor="t"/>
+          <a:lstStyle/>
+          <a:p>
+            <a:pPr algn="ctr"/>
+            <a:r>
+              <a:rPr lang="de-DE" sz="1000" dirty="0">
+                <a:solidFill>
+                  <a:srgbClr val="A6A6A6"/>
+                </a:solidFill>
+              </a:rPr>
+              <a:t>Systeme</a:t>
+            </a:r>
+          </a:p>
+        </p:txBody>
+      </p:sp>
+      <p:sp>
+        <p:nvSpPr>
+          <p:cNvPr id="52" name="Marker Untersuchung"/>
+          <p:cNvSpPr/>
+          <p:nvPr/>
+        </p:nvSpPr>
+        <p:spPr>
+          <a:xfrm>
+            <a:off x="4984750" y="6127750"/>
+            <a:ext cx="88900" cy="88900"/>
+          </a:xfrm>
+          <a:prstGeom prst="ellipse">
             <a:avLst/>
           </a:prstGeom>
           <a:solidFill>
@@ -11397,7 +13136,1003 @@
       </p:sp>
       <p:sp>
         <p:nvSpPr>
-          <p:cNvPr id="40" name="Foliennummer"/>
+          <p:cNvPr id="53" name="Label Untersuchung"/>
+          <p:cNvSpPr txBox="1"/>
+          <p:nvPr/>
+        </p:nvSpPr>
+        <p:spPr>
+          <a:xfrm>
+            <a:off x="4394200" y="6273800"/>
+            <a:ext cx="1270000" cy="203200"/>
+          </a:xfrm>
+          <a:prstGeom prst="rect">
+            <a:avLst/>
+          </a:prstGeom>
+          <a:noFill/>
+        </p:spPr>
+        <p:txBody>
+          <a:bodyPr wrap="square" lIns="0" tIns="0" rIns="0" bIns="0" anchor="t"/>
+          <a:lstStyle/>
+          <a:p>
+            <a:pPr algn="ctr"/>
+            <a:r>
+              <a:rPr lang="de-DE" sz="1000" b="1" dirty="0">
+                <a:solidFill>
+                  <a:srgbClr val="C1002A"/>
+                </a:solidFill>
+              </a:rPr>
+              <a:t>Untersuchung</a:t>
+            </a:r>
+          </a:p>
+        </p:txBody>
+      </p:sp>
+      <p:sp>
+        <p:nvSpPr>
+          <p:cNvPr id="54" name="Marker Fazit"/>
+          <p:cNvSpPr/>
+          <p:nvPr/>
+        </p:nvSpPr>
+        <p:spPr>
+          <a:xfrm>
+            <a:off x="6267450" y="6140450"/>
+            <a:ext cx="63500" cy="63500"/>
+          </a:xfrm>
+          <a:prstGeom prst="ellipse">
+            <a:avLst/>
+          </a:prstGeom>
+          <a:solidFill>
+            <a:srgbClr val="BFBFBF"/>
+          </a:solidFill>
+          <a:ln>
+            <a:noFill/>
+          </a:ln>
+        </p:spPr>
+        <p:txBody>
+          <a:bodyPr/>
+          <a:lstStyle/>
+          <a:p>
+            <a:endParaRPr lang="de-DE"/>
+          </a:p>
+        </p:txBody>
+      </p:sp>
+      <p:sp>
+        <p:nvSpPr>
+          <p:cNvPr id="55" name="Label Fazit"/>
+          <p:cNvSpPr txBox="1"/>
+          <p:nvPr/>
+        </p:nvSpPr>
+        <p:spPr>
+          <a:xfrm>
+            <a:off x="5029200" y="6273800"/>
+            <a:ext cx="1270000" cy="203200"/>
+          </a:xfrm>
+          <a:prstGeom prst="rect">
+            <a:avLst/>
+          </a:prstGeom>
+          <a:noFill/>
+        </p:spPr>
+        <p:txBody>
+          <a:bodyPr wrap="square" lIns="0" tIns="0" rIns="0" bIns="0" anchor="t"/>
+          <a:lstStyle/>
+          <a:p>
+            <a:pPr algn="r"/>
+            <a:r>
+              <a:rPr lang="de-DE" sz="1000" dirty="0">
+                <a:solidFill>
+                  <a:srgbClr val="A6A6A6"/>
+                </a:solidFill>
+              </a:rPr>
+              <a:t>Fazit</a:t>
+            </a:r>
+          </a:p>
+        </p:txBody>
+      </p:sp>
+      <p:pic>
+        <p:nvPicPr>
+          <p:cNvPr id="4" name="Grafik 3">
+            <a:extLst>
+              <a:ext uri="{FF2B5EF4-FFF2-40B4-BE49-F238E27FC236}">
+                <a16:creationId xmlns:a16="http://schemas.microsoft.com/office/drawing/2014/main" id="{A6E2D368-EE5B-6B83-CB1C-95B23758CF12}"/>
+              </a:ext>
+            </a:extLst>
+          </p:cNvPr>
+          <p:cNvPicPr>
+            <a:picLocks noChangeAspect="1"/>
+          </p:cNvPicPr>
+          <p:nvPr/>
+        </p:nvPicPr>
+        <p:blipFill>
+          <a:blip r:embed="rId2"/>
+          <a:stretch>
+            <a:fillRect/>
+          </a:stretch>
+        </p:blipFill>
+        <p:spPr>
+          <a:xfrm>
+            <a:off x="1219200" y="1930400"/>
+            <a:ext cx="5588000" cy="2692400"/>
+          </a:xfrm>
+          <a:prstGeom prst="rect">
+            <a:avLst/>
+          </a:prstGeom>
+        </p:spPr>
+      </p:pic>
+      <p:sp>
+        <p:nvSpPr>
+          <p:cNvPr id="60" name="Label Beispiel"/>
+          <p:cNvSpPr txBox="1"/>
+          <p:nvPr/>
+        </p:nvSpPr>
+        <p:spPr>
+          <a:xfrm>
+            <a:off x="1219200" y="1727200"/>
+            <a:ext cx="5791200" cy="177800"/>
+          </a:xfrm>
+          <a:prstGeom prst="rect">
+            <a:avLst/>
+          </a:prstGeom>
+          <a:noFill/>
+        </p:spPr>
+        <p:txBody>
+          <a:bodyPr wrap="square" lIns="0" tIns="0" rIns="0" bIns="0" anchor="t">
+            <a:noAutofit/>
+          </a:bodyPr>
+          <a:lstStyle/>
+          <a:p>
+            <a:pPr algn="l"/>
+            <a:r>
+              <a:rPr lang="de-DE" sz="1000" b="1" spc="200" dirty="0">
+                <a:solidFill>
+                  <a:srgbClr val="C1002A"/>
+                </a:solidFill>
+              </a:rPr>
+              <a:t>BEISPIEL: NEXTFLOW</a:t>
+            </a:r>
+          </a:p>
+        </p:txBody>
+      </p:sp>
+      <p:sp>
+        <p:nvSpPr>
+          <p:cNvPr id="70" name="Kennzahl Queue"/>
+          <p:cNvSpPr txBox="1"/>
+          <p:nvPr/>
+        </p:nvSpPr>
+        <p:spPr>
+          <a:xfrm>
+            <a:off x="1219200" y="4749800"/>
+            <a:ext cx="1651000" cy="203200"/>
+          </a:xfrm>
+          <a:prstGeom prst="rect">
+            <a:avLst/>
+          </a:prstGeom>
+          <a:noFill/>
+        </p:spPr>
+        <p:txBody>
+          <a:bodyPr wrap="square" lIns="0" tIns="0" rIns="0" bIns="0" anchor="t">
+            <a:noAutofit/>
+          </a:bodyPr>
+          <a:lstStyle/>
+          <a:p>
+            <a:pPr algn="l"/>
+            <a:r>
+              <a:rPr lang="de-DE" sz="1200" dirty="0">
+                <a:solidFill>
+                  <a:srgbClr val="595959"/>
+                </a:solidFill>
+              </a:rPr>
+              <a:t>Queue: </a:t>
+            </a:r>
+            <a:r>
+              <a:rPr lang="de-DE" sz="1200" b="1" dirty="0">
+                <a:solidFill>
+                  <a:srgbClr val="262626"/>
+                </a:solidFill>
+              </a:rPr>
+              <a:t>6–17 s</a:t>
+            </a:r>
+          </a:p>
+        </p:txBody>
+      </p:sp>
+      <p:sp>
+        <p:nvSpPr>
+          <p:cNvPr id="71" name="Kennzahl Vor Nutzlast"/>
+          <p:cNvSpPr txBox="1"/>
+          <p:nvPr/>
+        </p:nvSpPr>
+        <p:spPr>
+          <a:xfrm>
+            <a:off x="2997200" y="4749800"/>
+            <a:ext cx="2032000" cy="203200"/>
+          </a:xfrm>
+          <a:prstGeom prst="rect">
+            <a:avLst/>
+          </a:prstGeom>
+          <a:noFill/>
+        </p:spPr>
+        <p:txBody>
+          <a:bodyPr wrap="square" lIns="0" tIns="0" rIns="0" bIns="0" anchor="t">
+            <a:noAutofit/>
+          </a:bodyPr>
+          <a:lstStyle/>
+          <a:p>
+            <a:pPr algn="l"/>
+            <a:r>
+              <a:rPr lang="de-DE" sz="1200" dirty="0">
+                <a:solidFill>
+                  <a:srgbClr val="595959"/>
+                </a:solidFill>
+              </a:rPr>
+              <a:t>Zeit vor Nutzlast: </a:t>
+            </a:r>
+            <a:r>
+              <a:rPr lang="de-DE" sz="1200" b="1" dirty="0">
+                <a:solidFill>
+                  <a:srgbClr val="C1002A"/>
+                </a:solidFill>
+              </a:rPr>
+              <a:t>&gt; 40 s</a:t>
+            </a:r>
+          </a:p>
+        </p:txBody>
+      </p:sp>
+      <p:sp>
+        <p:nvSpPr>
+          <p:cNvPr id="72" name="Kennzahl Nutzlast"/>
+          <p:cNvSpPr txBox="1"/>
+          <p:nvPr/>
+        </p:nvSpPr>
+        <p:spPr>
+          <a:xfrm>
+            <a:off x="5156200" y="4749800"/>
+            <a:ext cx="1905000" cy="203200"/>
+          </a:xfrm>
+          <a:prstGeom prst="rect">
+            <a:avLst/>
+          </a:prstGeom>
+          <a:noFill/>
+        </p:spPr>
+        <p:txBody>
+          <a:bodyPr wrap="square" lIns="0" tIns="0" rIns="0" bIns="0" anchor="t">
+            <a:noAutofit/>
+          </a:bodyPr>
+          <a:lstStyle/>
+          <a:p>
+            <a:pPr algn="l"/>
+            <a:r>
+              <a:rPr lang="de-DE" sz="1200" dirty="0">
+                <a:solidFill>
+                  <a:srgbClr val="595959"/>
+                </a:solidFill>
+              </a:rPr>
+              <a:t>Nutzlast: </a:t>
+            </a:r>
+            <a:r>
+              <a:rPr lang="de-DE" sz="1200" b="1" dirty="0">
+                <a:solidFill>
+                  <a:srgbClr val="262626"/>
+                </a:solidFill>
+              </a:rPr>
+              <a:t>teilweise nur ms</a:t>
+            </a:r>
+          </a:p>
+        </p:txBody>
+      </p:sp>
+      <p:sp>
+        <p:nvSpPr>
+          <p:cNvPr id="73" name="Überleitung"/>
+          <p:cNvSpPr txBox="1"/>
+          <p:nvPr/>
+        </p:nvSpPr>
+        <p:spPr>
+          <a:xfrm>
+            <a:off x="1397000" y="5676900"/>
+            <a:ext cx="8890000" cy="177800"/>
+          </a:xfrm>
+          <a:prstGeom prst="rect">
+            <a:avLst/>
+          </a:prstGeom>
+          <a:noFill/>
+        </p:spPr>
+        <p:txBody>
+          <a:bodyPr wrap="square" lIns="0" tIns="0" rIns="0" bIns="0" anchor="t">
+            <a:noAutofit/>
+          </a:bodyPr>
+          <a:lstStyle/>
+          <a:p>
+            <a:pPr algn="l"/>
+            <a:r>
+              <a:rPr lang="de-DE" sz="1100" dirty="0">
+                <a:solidFill>
+                  <a:srgbClr val="595959"/>
+                </a:solidFill>
+              </a:rPr>
+              <a:t>Queue-Wartezeit und wiederholte Jobvorbereitung fallen nicht wiederholt an.</a:t>
+            </a:r>
+          </a:p>
+        </p:txBody>
+      </p:sp>
+    </p:spTree>
+    <p:extLst>
+      <p:ext uri="{BB962C8B-B14F-4D97-AF65-F5344CB8AC3E}">
+        <p14:creationId xmlns:p14="http://schemas.microsoft.com/office/powerpoint/2010/main" val="4201686843"/>
+      </p:ext>
+    </p:extLst>
+  </p:cSld>
+  <p:clrMapOvr>
+    <a:masterClrMapping/>
+  </p:clrMapOvr>
+</p:sld>
+</file>
+
+<file path=ppt/slides/slide18.xml><?xml version="1.0" encoding="utf-8"?>
+<p:sld xmlns:a="http://schemas.openxmlformats.org/drawingml/2006/main" xmlns:r="http://schemas.openxmlformats.org/officeDocument/2006/relationships" xmlns:p="http://schemas.openxmlformats.org/presentationml/2006/main">
+  <p:cSld>
+    <p:spTree>
+      <p:nvGrpSpPr>
+        <p:cNvPr id="1" name=""/>
+        <p:cNvGrpSpPr/>
+        <p:nvPr/>
+      </p:nvGrpSpPr>
+      <p:grpSpPr>
+        <a:xfrm>
+          <a:off x="0" y="0"/>
+          <a:ext cx="0" cy="0"/>
+          <a:chOff x="0" y="0"/>
+          <a:chExt cx="0" cy="0"/>
+        </a:xfrm>
+      </p:grpSpPr>
+      <p:sp>
+        <p:nvSpPr>
+          <p:cNvPr id="2" name="Titel 1">
+            <a:extLst>
+              <a:ext uri="{FF2B5EF4-FFF2-40B4-BE49-F238E27FC236}">
+                <a16:creationId xmlns:a16="http://schemas.microsoft.com/office/drawing/2014/main" id="{52357C78-437C-C009-F9EA-1C9E43E47DF3}"/>
+              </a:ext>
+            </a:extLst>
+          </p:cNvPr>
+          <p:cNvSpPr>
+            <a:spLocks noGrp="1"/>
+          </p:cNvSpPr>
+          <p:nvPr>
+            <p:ph type="title"/>
+          </p:nvPr>
+        </p:nvSpPr>
+        <p:spPr>
+          <a:xfrm>
+            <a:off x="1219200" y="812800"/>
+            <a:ext cx="10058400" cy="508000"/>
+          </a:xfrm>
+        </p:spPr>
+        <p:txBody>
+          <a:bodyPr anchor="ctr" anchorCtr="0"/>
+          <a:lstStyle/>
+          <a:p>
+            <a:pPr algn="l"/>
+            <a:r>
+              <a:rPr lang="de-DE" sz="2600" b="1" dirty="0">
+                <a:solidFill>
+                  <a:srgbClr val="262626"/>
+                </a:solidFill>
+              </a:rPr>
+              <a:t>WMS-Vergleich auf dedizierter Ressource</a:t>
+            </a:r>
+          </a:p>
+        </p:txBody>
+      </p:sp>
+      <p:pic>
+        <p:nvPicPr>
+          <p:cNvPr id="5" name="Inhaltsplatzhalter 4">
+            <a:extLst>
+              <a:ext uri="{FF2B5EF4-FFF2-40B4-BE49-F238E27FC236}">
+                <a16:creationId xmlns:a16="http://schemas.microsoft.com/office/drawing/2014/main" id="{955A12B7-B6C4-8C6E-5730-D2B4D930EE55}"/>
+              </a:ext>
+            </a:extLst>
+          </p:cNvPr>
+          <p:cNvPicPr>
+            <a:picLocks noGrp="1" noChangeAspect="1"/>
+          </p:cNvPicPr>
+          <p:nvPr>
+            <p:ph idx="1"/>
+          </p:nvPr>
+        </p:nvPicPr>
+        <p:blipFill>
+          <a:blip r:embed="rId2"/>
+          <a:stretch>
+            <a:fillRect/>
+          </a:stretch>
+        </p:blipFill>
+        <p:spPr>
+          <a:xfrm>
+            <a:off x="1219200" y="2438400"/>
+            <a:ext cx="6299200" cy="2451100"/>
+          </a:xfrm>
+          <a:prstGeom prst="rect">
+            <a:avLst/>
+          </a:prstGeom>
+        </p:spPr>
+      </p:pic>
+      <p:sp>
+        <p:nvSpPr>
+          <p:cNvPr id="20" name="Akzentlinie"/>
+          <p:cNvSpPr/>
+          <p:nvPr/>
+        </p:nvSpPr>
+        <p:spPr>
+          <a:xfrm>
+            <a:off x="914400" y="812800"/>
+            <a:ext cx="50800" cy="431800"/>
+          </a:xfrm>
+          <a:prstGeom prst="rect">
+            <a:avLst/>
+          </a:prstGeom>
+          <a:solidFill>
+            <a:srgbClr val="C1002A"/>
+          </a:solidFill>
+          <a:ln>
+            <a:noFill/>
+          </a:ln>
+        </p:spPr>
+        <p:txBody>
+          <a:bodyPr/>
+          <a:lstStyle/>
+          <a:p>
+            <a:endParaRPr lang="de-DE"/>
+          </a:p>
+        </p:txBody>
+      </p:sp>
+      <p:sp>
+        <p:nvSpPr>
+          <p:cNvPr id="21" name="Abschnitt"/>
+          <p:cNvSpPr txBox="1"/>
+          <p:nvPr/>
+        </p:nvSpPr>
+        <p:spPr>
+          <a:xfrm>
+            <a:off x="1219200" y="1397000"/>
+            <a:ext cx="10058400" cy="177800"/>
+          </a:xfrm>
+          <a:prstGeom prst="rect">
+            <a:avLst/>
+          </a:prstGeom>
+          <a:noFill/>
+        </p:spPr>
+        <p:txBody>
+          <a:bodyPr wrap="square" lIns="0" tIns="0" rIns="0" bIns="0" anchor="t">
+            <a:noAutofit/>
+          </a:bodyPr>
+          <a:lstStyle/>
+          <a:p>
+            <a:pPr algn="l">
+              <a:spcAft>
+                <a:spcPts val="0"/>
+              </a:spcAft>
+            </a:pPr>
+            <a:r>
+              <a:rPr lang="de-DE" sz="1000" b="1" spc="200" dirty="0">
+                <a:solidFill>
+                  <a:srgbClr val="C1002A"/>
+                </a:solidFill>
+              </a:rPr>
+              <a:t>WMS-OVERHEAD AUF MOGON</a:t>
+            </a:r>
+          </a:p>
+        </p:txBody>
+      </p:sp>
+      <p:sp>
+        <p:nvSpPr>
+          <p:cNvPr id="22" name="Zentrale Ergebnisse"/>
+          <p:cNvSpPr txBox="1"/>
+          <p:nvPr/>
+        </p:nvSpPr>
+        <p:spPr>
+          <a:xfrm>
+            <a:off x="7772400" y="1854200"/>
+            <a:ext cx="3505200" cy="279400"/>
+          </a:xfrm>
+          <a:prstGeom prst="rect">
+            <a:avLst/>
+          </a:prstGeom>
+          <a:noFill/>
+        </p:spPr>
+        <p:txBody>
+          <a:bodyPr wrap="square" lIns="0" tIns="0" rIns="0" bIns="0" anchor="t">
+            <a:noAutofit/>
+          </a:bodyPr>
+          <a:lstStyle/>
+          <a:p>
+            <a:pPr algn="l">
+              <a:spcAft>
+                <a:spcPts val="0"/>
+              </a:spcAft>
+            </a:pPr>
+            <a:r>
+              <a:rPr lang="de-DE" sz="1600" b="1" dirty="0">
+                <a:solidFill>
+                  <a:srgbClr val="262626"/>
+                </a:solidFill>
+              </a:rPr>
+              <a:t>Zentrale Ergebnisse</a:t>
+            </a:r>
+          </a:p>
+        </p:txBody>
+      </p:sp>
+      <p:sp>
+        <p:nvSpPr>
+          <p:cNvPr id="23" name="Block Gruppe"/>
+          <p:cNvSpPr txBox="1"/>
+          <p:nvPr/>
+        </p:nvSpPr>
+        <p:spPr>
+          <a:xfrm>
+            <a:off x="7772400" y="2235200"/>
+            <a:ext cx="3505200" cy="685800"/>
+          </a:xfrm>
+          <a:prstGeom prst="rect">
+            <a:avLst/>
+          </a:prstGeom>
+          <a:noFill/>
+        </p:spPr>
+        <p:txBody>
+          <a:bodyPr wrap="square" lIns="0" tIns="0" rIns="0" bIns="0" anchor="t">
+            <a:noAutofit/>
+          </a:bodyPr>
+          <a:lstStyle/>
+          <a:p>
+            <a:pPr algn="l">
+              <a:spcAft>
+                <a:spcPts val="200"/>
+              </a:spcAft>
+            </a:pPr>
+            <a:r>
+              <a:rPr lang="de-DE" sz="1300" b="1" dirty="0">
+                <a:solidFill>
+                  <a:srgbClr val="262626"/>
+                </a:solidFill>
+              </a:rPr>
+              <a:t>StreamFlow · Nextflow · Merlin</a:t>
+            </a:r>
+          </a:p>
+          <a:p>
+            <a:pPr algn="l">
+              <a:spcAft>
+                <a:spcPts val="100"/>
+              </a:spcAft>
+            </a:pPr>
+            <a:r>
+              <a:rPr lang="de-DE" sz="1100" dirty="0">
+                <a:solidFill>
+                  <a:srgbClr val="262626"/>
+                </a:solidFill>
+              </a:rPr>
+              <a:t>10/12 Konfigurationen: </a:t>
+            </a:r>
+            <a:r>
+              <a:rPr lang="de-DE" sz="1100" b="1" dirty="0">
+                <a:solidFill>
+                  <a:srgbClr val="262626"/>
+                </a:solidFill>
+              </a:rPr>
+              <a:t>1,6–4,1 s</a:t>
+            </a:r>
+          </a:p>
+          <a:p>
+            <a:pPr algn="l">
+              <a:spcAft>
+                <a:spcPts val="0"/>
+              </a:spcAft>
+            </a:pPr>
+            <a:r>
+              <a:rPr lang="de-DE" sz="1000" dirty="0">
+                <a:solidFill>
+                  <a:srgbClr val="595959"/>
+                </a:solidFill>
+              </a:rPr>
+              <a:t>Reihenfolge innerhalb der Gruppe wechselt</a:t>
+            </a:r>
+          </a:p>
+        </p:txBody>
+      </p:sp>
+      <p:cxnSp>
+        <p:nvCxnSpPr>
+          <p:cNvPr id="24" name="Trenner 1"/>
+          <p:cNvCxnSpPr/>
+          <p:nvPr/>
+        </p:nvCxnSpPr>
+        <p:spPr>
+          <a:xfrm>
+            <a:off x="7772400" y="2921000"/>
+            <a:ext cx="3505200" cy="0"/>
+          </a:xfrm>
+          <a:prstGeom prst="line">
+            <a:avLst/>
+          </a:prstGeom>
+          <a:ln w="6350">
+            <a:solidFill>
+              <a:srgbClr val="D9D9D9"/>
+            </a:solidFill>
+          </a:ln>
+        </p:spPr>
+      </p:cxnSp>
+      <p:sp>
+        <p:nvSpPr>
+          <p:cNvPr id="25" name="Block AiiDA"/>
+          <p:cNvSpPr txBox="1"/>
+          <p:nvPr/>
+        </p:nvSpPr>
+        <p:spPr>
+          <a:xfrm>
+            <a:off x="7772400" y="3022600"/>
+            <a:ext cx="3505200" cy="685800"/>
+          </a:xfrm>
+          <a:prstGeom prst="rect">
+            <a:avLst/>
+          </a:prstGeom>
+          <a:noFill/>
+        </p:spPr>
+        <p:txBody>
+          <a:bodyPr wrap="square" lIns="0" tIns="0" rIns="0" bIns="0" anchor="t">
+            <a:noAutofit/>
+          </a:bodyPr>
+          <a:lstStyle/>
+          <a:p>
+            <a:pPr algn="l">
+              <a:spcAft>
+                <a:spcPts val="200"/>
+              </a:spcAft>
+            </a:pPr>
+            <a:r>
+              <a:rPr lang="de-DE" sz="1300" b="1" dirty="0">
+                <a:solidFill>
+                  <a:srgbClr val="262626"/>
+                </a:solidFill>
+              </a:rPr>
+              <a:t>AiiDA</a:t>
+            </a:r>
+          </a:p>
+          <a:p>
+            <a:pPr algn="l">
+              <a:spcAft>
+                <a:spcPts val="100"/>
+              </a:spcAft>
+            </a:pPr>
+            <a:r>
+              <a:rPr lang="de-DE" sz="1100" dirty="0">
+                <a:solidFill>
+                  <a:srgbClr val="262626"/>
+                </a:solidFill>
+              </a:rPr>
+              <a:t>in allen 12 Konfigurationen höher: </a:t>
+            </a:r>
+            <a:r>
+              <a:rPr lang="de-DE" sz="1100" b="1" dirty="0">
+                <a:solidFill>
+                  <a:srgbClr val="C1002A"/>
+                </a:solidFill>
+              </a:rPr>
+              <a:t>7–15 s</a:t>
+            </a:r>
+          </a:p>
+          <a:p>
+            <a:pPr algn="l">
+              <a:spcAft>
+                <a:spcPts val="0"/>
+              </a:spcAft>
+            </a:pPr>
+            <a:r>
+              <a:rPr lang="de-DE" sz="1000" dirty="0">
+                <a:solidFill>
+                  <a:srgbClr val="595959"/>
+                </a:solidFill>
+              </a:rPr>
+              <a:t>Scatter-Gather &gt; Pipeline · mehr Teilstücke → höherer Overhead</a:t>
+            </a:r>
+          </a:p>
+        </p:txBody>
+      </p:sp>
+      <p:cxnSp>
+        <p:nvCxnSpPr>
+          <p:cNvPr id="26" name="Trenner 2"/>
+          <p:cNvCxnSpPr/>
+          <p:nvPr/>
+        </p:nvCxnSpPr>
+        <p:spPr>
+          <a:xfrm>
+            <a:off x="7772400" y="3708400"/>
+            <a:ext cx="3505200" cy="0"/>
+          </a:xfrm>
+          <a:prstGeom prst="line">
+            <a:avLst/>
+          </a:prstGeom>
+          <a:ln w="6350">
+            <a:solidFill>
+              <a:srgbClr val="D9D9D9"/>
+            </a:solidFill>
+          </a:ln>
+        </p:spPr>
+      </p:cxnSp>
+      <p:sp>
+        <p:nvSpPr>
+          <p:cNvPr id="27" name="Block Latenz"/>
+          <p:cNvSpPr txBox="1"/>
+          <p:nvPr/>
+        </p:nvSpPr>
+        <p:spPr>
+          <a:xfrm>
+            <a:off x="7772400" y="3810000"/>
+            <a:ext cx="3505200" cy="685800"/>
+          </a:xfrm>
+          <a:prstGeom prst="rect">
+            <a:avLst/>
+          </a:prstGeom>
+          <a:noFill/>
+        </p:spPr>
+        <p:txBody>
+          <a:bodyPr wrap="square" lIns="0" tIns="0" rIns="0" bIns="0" anchor="t">
+            <a:noAutofit/>
+          </a:bodyPr>
+          <a:lstStyle/>
+          <a:p>
+            <a:pPr algn="l">
+              <a:spcAft>
+                <a:spcPts val="200"/>
+              </a:spcAft>
+            </a:pPr>
+            <a:r>
+              <a:rPr lang="de-DE" sz="1300" b="1" dirty="0">
+                <a:solidFill>
+                  <a:srgbClr val="262626"/>
+                </a:solidFill>
+              </a:rPr>
+              <a:t>Übergangslatenz</a:t>
+            </a:r>
+          </a:p>
+          <a:p>
+            <a:pPr algn="l">
+              <a:spcAft>
+                <a:spcPts val="100"/>
+              </a:spcAft>
+            </a:pPr>
+            <a:r>
+              <a:rPr lang="de-DE" sz="1100" dirty="0">
+                <a:solidFill>
+                  <a:srgbClr val="262626"/>
+                </a:solidFill>
+              </a:rPr>
+              <a:t>SF </a:t>
+            </a:r>
+            <a:r>
+              <a:rPr lang="de-DE" sz="1100" b="1" dirty="0">
+                <a:solidFill>
+                  <a:srgbClr val="262626"/>
+                </a:solidFill>
+              </a:rPr>
+              <a:t>0,06</a:t>
+            </a:r>
+            <a:r>
+              <a:rPr lang="de-DE" sz="1100" dirty="0">
+                <a:solidFill>
+                  <a:srgbClr val="262626"/>
+                </a:solidFill>
+              </a:rPr>
+              <a:t> · NF </a:t>
+            </a:r>
+            <a:r>
+              <a:rPr lang="de-DE" sz="1100" b="1" dirty="0">
+                <a:solidFill>
+                  <a:srgbClr val="262626"/>
+                </a:solidFill>
+              </a:rPr>
+              <a:t>0,11</a:t>
+            </a:r>
+            <a:r>
+              <a:rPr lang="de-DE" sz="1100" dirty="0">
+                <a:solidFill>
+                  <a:srgbClr val="262626"/>
+                </a:solidFill>
+              </a:rPr>
+              <a:t> · Merlin </a:t>
+            </a:r>
+            <a:r>
+              <a:rPr lang="de-DE" sz="1100" b="1" dirty="0">
+                <a:solidFill>
+                  <a:srgbClr val="262626"/>
+                </a:solidFill>
+              </a:rPr>
+              <a:t>0,14</a:t>
+            </a:r>
+            <a:r>
+              <a:rPr lang="de-DE" sz="1100" dirty="0">
+                <a:solidFill>
+                  <a:srgbClr val="262626"/>
+                </a:solidFill>
+              </a:rPr>
+              <a:t> · AiiDA </a:t>
+            </a:r>
+            <a:r>
+              <a:rPr lang="de-DE" sz="1100" b="1" dirty="0">
+                <a:solidFill>
+                  <a:srgbClr val="262626"/>
+                </a:solidFill>
+              </a:rPr>
+              <a:t>1,95 s</a:t>
+            </a:r>
+          </a:p>
+          <a:p>
+            <a:pPr algn="l">
+              <a:spcAft>
+                <a:spcPts val="0"/>
+              </a:spcAft>
+            </a:pPr>
+            <a:r>
+              <a:rPr lang="de-DE" sz="1000" dirty="0">
+                <a:solidFill>
+                  <a:srgbClr val="595959"/>
+                </a:solidFill>
+              </a:rPr>
+              <a:t>gleiche Reihenfolge wie lokal</a:t>
+            </a:r>
+          </a:p>
+        </p:txBody>
+      </p:sp>
+      <p:cxnSp>
+        <p:nvCxnSpPr>
+          <p:cNvPr id="28" name="Trenner 3"/>
+          <p:cNvCxnSpPr/>
+          <p:nvPr/>
+        </p:nvCxnSpPr>
+        <p:spPr>
+          <a:xfrm>
+            <a:off x="7772400" y="4495800"/>
+            <a:ext cx="3505200" cy="0"/>
+          </a:xfrm>
+          <a:prstGeom prst="line">
+            <a:avLst/>
+          </a:prstGeom>
+          <a:ln w="6350">
+            <a:solidFill>
+              <a:srgbClr val="D9D9D9"/>
+            </a:solidFill>
+          </a:ln>
+        </p:spPr>
+      </p:cxnSp>
+      <p:sp>
+        <p:nvSpPr>
+          <p:cNvPr id="29" name="Block AiiDA MOGON"/>
+          <p:cNvSpPr txBox="1"/>
+          <p:nvPr/>
+        </p:nvSpPr>
+        <p:spPr>
+          <a:xfrm>
+            <a:off x="7772400" y="4597400"/>
+            <a:ext cx="3505200" cy="685800"/>
+          </a:xfrm>
+          <a:prstGeom prst="rect">
+            <a:avLst/>
+          </a:prstGeom>
+          <a:noFill/>
+        </p:spPr>
+        <p:txBody>
+          <a:bodyPr wrap="square" lIns="0" tIns="0" rIns="0" bIns="0" anchor="t">
+            <a:noAutofit/>
+          </a:bodyPr>
+          <a:lstStyle/>
+          <a:p>
+            <a:pPr algn="l">
+              <a:spcAft>
+                <a:spcPts val="200"/>
+              </a:spcAft>
+            </a:pPr>
+            <a:r>
+              <a:rPr lang="de-DE" sz="1300" b="1" dirty="0">
+                <a:solidFill>
+                  <a:srgbClr val="262626"/>
+                </a:solidFill>
+              </a:rPr>
+              <a:t>AiiDA auf MOGON</a:t>
+            </a:r>
+          </a:p>
+          <a:p>
+            <a:pPr algn="l">
+              <a:spcAft>
+                <a:spcPts val="100"/>
+              </a:spcAft>
+            </a:pPr>
+            <a:r>
+              <a:rPr lang="de-DE" sz="1100" dirty="0">
+                <a:solidFill>
+                  <a:srgbClr val="262626"/>
+                </a:solidFill>
+              </a:rPr>
+              <a:t>Overhead und Übergangslatenz höher als lokal</a:t>
+            </a:r>
+          </a:p>
+          <a:p>
+            <a:pPr algn="l">
+              <a:spcAft>
+                <a:spcPts val="0"/>
+              </a:spcAft>
+            </a:pPr>
+            <a:r>
+              <a:rPr lang="de-DE" sz="1000" dirty="0">
+                <a:solidFill>
+                  <a:srgbClr val="595959"/>
+                </a:solidFill>
+              </a:rPr>
+              <a:t>Datenbank + Repository auf </a:t>
+            </a:r>
+            <a:r>
+              <a:rPr lang="de-DE" sz="1000" b="1" dirty="0">
+                <a:solidFill>
+                  <a:srgbClr val="595959"/>
+                </a:solidFill>
+              </a:rPr>
+              <a:t>/fshpc</a:t>
+            </a:r>
+          </a:p>
+        </p:txBody>
+      </p:sp>
+      <p:cxnSp>
+        <p:nvCxnSpPr>
+          <p:cNvPr id="30" name="Trennlinie"/>
+          <p:cNvCxnSpPr/>
+          <p:nvPr/>
+        </p:nvCxnSpPr>
+        <p:spPr>
+          <a:xfrm>
+            <a:off x="1219200" y="5435600"/>
+            <a:ext cx="10058400" cy="0"/>
+          </a:xfrm>
+          <a:prstGeom prst="line">
+            <a:avLst/>
+          </a:prstGeom>
+          <a:ln w="6350">
+            <a:solidFill>
+              <a:srgbClr val="D9D9D9"/>
+            </a:solidFill>
+          </a:ln>
+        </p:spPr>
+      </p:cxnSp>
+      <p:sp>
+        <p:nvSpPr>
+          <p:cNvPr id="31" name="Leitfrage"/>
+          <p:cNvSpPr txBox="1"/>
+          <p:nvPr/>
+        </p:nvSpPr>
+        <p:spPr>
+          <a:xfrm>
+            <a:off x="1219200" y="5562600"/>
+            <a:ext cx="10058400" cy="254000"/>
+          </a:xfrm>
+          <a:prstGeom prst="rect">
+            <a:avLst/>
+          </a:prstGeom>
+          <a:noFill/>
+        </p:spPr>
+        <p:txBody>
+          <a:bodyPr wrap="square" lIns="0" tIns="0" rIns="0" bIns="0" anchor="t">
+            <a:noAutofit/>
+          </a:bodyPr>
+          <a:lstStyle/>
+          <a:p>
+            <a:pPr algn="l">
+              <a:spcAft>
+                <a:spcPts val="0"/>
+              </a:spcAft>
+            </a:pPr>
+            <a:r>
+              <a:rPr lang="de-DE" sz="1400" b="1" dirty="0">
+                <a:solidFill>
+                  <a:srgbClr val="C1002A"/>
+                </a:solidFill>
+              </a:rPr>
+              <a:t>Welchen Einfluss hat der Ort der Datenhaltung?</a:t>
+            </a:r>
+          </a:p>
+        </p:txBody>
+      </p:sp>
+      <p:sp>
+        <p:nvSpPr>
+          <p:cNvPr id="32" name="Foliennummer"/>
           <p:cNvSpPr txBox="1"/>
           <p:nvPr/>
         </p:nvSpPr>
@@ -11412,7 +14147,9 @@
           <a:noFill/>
         </p:spPr>
         <p:txBody>
-          <a:bodyPr wrap="square" lIns="0" tIns="0" rIns="0" bIns="0" anchor="t"/>
+          <a:bodyPr wrap="square" lIns="0" tIns="0" rIns="0" bIns="0" anchor="t">
+            <a:noAutofit/>
+          </a:bodyPr>
           <a:lstStyle/>
           <a:p>
             <a:pPr algn="r">
@@ -11426,7 +14163,363 @@
                   <a:srgbClr val="8C8C8C"/>
                 </a:solidFill>
               </a:rPr>
-              <a:t>14</a:t>
+              <a:t>18</a:t>
+            </a:r>
+          </a:p>
+        </p:txBody>
+      </p:sp>
+      <p:cxnSp>
+        <p:nvCxnSpPr>
+          <p:cNvPr id="33" name="Fortschritt Linie"/>
+          <p:cNvCxnSpPr/>
+          <p:nvPr/>
+        </p:nvCxnSpPr>
+        <p:spPr>
+          <a:xfrm>
+            <a:off x="1219200" y="6172200"/>
+            <a:ext cx="5080000" cy="0"/>
+          </a:xfrm>
+          <a:prstGeom prst="line">
+            <a:avLst/>
+          </a:prstGeom>
+          <a:ln w="6350">
+            <a:solidFill>
+              <a:srgbClr val="D9D9D9"/>
+            </a:solidFill>
+          </a:ln>
+        </p:spPr>
+      </p:cxnSp>
+      <p:sp>
+        <p:nvSpPr>
+          <p:cNvPr id="34" name="Marker Motivation"/>
+          <p:cNvSpPr/>
+          <p:nvPr/>
+        </p:nvSpPr>
+        <p:spPr>
+          <a:xfrm>
+            <a:off x="1187450" y="6140450"/>
+            <a:ext cx="63500" cy="63500"/>
+          </a:xfrm>
+          <a:prstGeom prst="ellipse">
+            <a:avLst/>
+          </a:prstGeom>
+          <a:solidFill>
+            <a:srgbClr val="BFBFBF"/>
+          </a:solidFill>
+          <a:ln>
+            <a:noFill/>
+          </a:ln>
+        </p:spPr>
+        <p:txBody>
+          <a:bodyPr/>
+          <a:lstStyle/>
+          <a:p>
+            <a:endParaRPr lang="de-DE"/>
+          </a:p>
+        </p:txBody>
+      </p:sp>
+      <p:sp>
+        <p:nvSpPr>
+          <p:cNvPr id="35" name="Label Motivation"/>
+          <p:cNvSpPr txBox="1"/>
+          <p:nvPr/>
+        </p:nvSpPr>
+        <p:spPr>
+          <a:xfrm>
+            <a:off x="1219200" y="6273800"/>
+            <a:ext cx="1270000" cy="203200"/>
+          </a:xfrm>
+          <a:prstGeom prst="rect">
+            <a:avLst/>
+          </a:prstGeom>
+          <a:noFill/>
+        </p:spPr>
+        <p:txBody>
+          <a:bodyPr wrap="square" lIns="0" tIns="0" rIns="0" bIns="0" anchor="t">
+            <a:noAutofit/>
+          </a:bodyPr>
+          <a:lstStyle/>
+          <a:p>
+            <a:pPr algn="l">
+              <a:spcAft>
+                <a:spcPts val="0"/>
+              </a:spcAft>
+            </a:pPr>
+            <a:r>
+              <a:rPr lang="de-DE" sz="1000" dirty="0">
+                <a:solidFill>
+                  <a:srgbClr val="A6A6A6"/>
+                </a:solidFill>
+              </a:rPr>
+              <a:t>Motivation</a:t>
+            </a:r>
+          </a:p>
+        </p:txBody>
+      </p:sp>
+      <p:sp>
+        <p:nvSpPr>
+          <p:cNvPr id="36" name="Marker Methodik"/>
+          <p:cNvSpPr/>
+          <p:nvPr/>
+        </p:nvSpPr>
+        <p:spPr>
+          <a:xfrm>
+            <a:off x="2457450" y="6140450"/>
+            <a:ext cx="63500" cy="63500"/>
+          </a:xfrm>
+          <a:prstGeom prst="ellipse">
+            <a:avLst/>
+          </a:prstGeom>
+          <a:solidFill>
+            <a:srgbClr val="BFBFBF"/>
+          </a:solidFill>
+          <a:ln>
+            <a:noFill/>
+          </a:ln>
+        </p:spPr>
+        <p:txBody>
+          <a:bodyPr/>
+          <a:lstStyle/>
+          <a:p>
+            <a:endParaRPr lang="de-DE"/>
+          </a:p>
+        </p:txBody>
+      </p:sp>
+      <p:sp>
+        <p:nvSpPr>
+          <p:cNvPr id="37" name="Label Methodik"/>
+          <p:cNvSpPr txBox="1"/>
+          <p:nvPr/>
+        </p:nvSpPr>
+        <p:spPr>
+          <a:xfrm>
+            <a:off x="1854200" y="6273800"/>
+            <a:ext cx="1270000" cy="203200"/>
+          </a:xfrm>
+          <a:prstGeom prst="rect">
+            <a:avLst/>
+          </a:prstGeom>
+          <a:noFill/>
+        </p:spPr>
+        <p:txBody>
+          <a:bodyPr wrap="square" lIns="0" tIns="0" rIns="0" bIns="0" anchor="t">
+            <a:noAutofit/>
+          </a:bodyPr>
+          <a:lstStyle/>
+          <a:p>
+            <a:pPr algn="ctr">
+              <a:spcAft>
+                <a:spcPts val="0"/>
+              </a:spcAft>
+            </a:pPr>
+            <a:r>
+              <a:rPr lang="de-DE" sz="1000" dirty="0">
+                <a:solidFill>
+                  <a:srgbClr val="A6A6A6"/>
+                </a:solidFill>
+              </a:rPr>
+              <a:t>Methodik</a:t>
+            </a:r>
+          </a:p>
+        </p:txBody>
+      </p:sp>
+      <p:sp>
+        <p:nvSpPr>
+          <p:cNvPr id="38" name="Marker Systeme"/>
+          <p:cNvSpPr/>
+          <p:nvPr/>
+        </p:nvSpPr>
+        <p:spPr>
+          <a:xfrm>
+            <a:off x="3727450" y="6140450"/>
+            <a:ext cx="63500" cy="63500"/>
+          </a:xfrm>
+          <a:prstGeom prst="ellipse">
+            <a:avLst/>
+          </a:prstGeom>
+          <a:solidFill>
+            <a:srgbClr val="BFBFBF"/>
+          </a:solidFill>
+          <a:ln>
+            <a:noFill/>
+          </a:ln>
+        </p:spPr>
+        <p:txBody>
+          <a:bodyPr/>
+          <a:lstStyle/>
+          <a:p>
+            <a:endParaRPr lang="de-DE"/>
+          </a:p>
+        </p:txBody>
+      </p:sp>
+      <p:sp>
+        <p:nvSpPr>
+          <p:cNvPr id="39" name="Label Systeme"/>
+          <p:cNvSpPr txBox="1"/>
+          <p:nvPr/>
+        </p:nvSpPr>
+        <p:spPr>
+          <a:xfrm>
+            <a:off x="3124200" y="6273800"/>
+            <a:ext cx="1270000" cy="203200"/>
+          </a:xfrm>
+          <a:prstGeom prst="rect">
+            <a:avLst/>
+          </a:prstGeom>
+          <a:noFill/>
+        </p:spPr>
+        <p:txBody>
+          <a:bodyPr wrap="square" lIns="0" tIns="0" rIns="0" bIns="0" anchor="t">
+            <a:noAutofit/>
+          </a:bodyPr>
+          <a:lstStyle/>
+          <a:p>
+            <a:pPr algn="ctr">
+              <a:spcAft>
+                <a:spcPts val="0"/>
+              </a:spcAft>
+            </a:pPr>
+            <a:r>
+              <a:rPr lang="de-DE" sz="1000" dirty="0">
+                <a:solidFill>
+                  <a:srgbClr val="A6A6A6"/>
+                </a:solidFill>
+              </a:rPr>
+              <a:t>Systeme</a:t>
+            </a:r>
+          </a:p>
+        </p:txBody>
+      </p:sp>
+      <p:sp>
+        <p:nvSpPr>
+          <p:cNvPr id="40" name="Marker Untersuchung"/>
+          <p:cNvSpPr/>
+          <p:nvPr/>
+        </p:nvSpPr>
+        <p:spPr>
+          <a:xfrm>
+            <a:off x="4984750" y="6127750"/>
+            <a:ext cx="88900" cy="88900"/>
+          </a:xfrm>
+          <a:prstGeom prst="ellipse">
+            <a:avLst/>
+          </a:prstGeom>
+          <a:solidFill>
+            <a:srgbClr val="C1002A"/>
+          </a:solidFill>
+          <a:ln>
+            <a:noFill/>
+          </a:ln>
+        </p:spPr>
+        <p:txBody>
+          <a:bodyPr/>
+          <a:lstStyle/>
+          <a:p>
+            <a:endParaRPr lang="de-DE"/>
+          </a:p>
+        </p:txBody>
+      </p:sp>
+      <p:sp>
+        <p:nvSpPr>
+          <p:cNvPr id="41" name="Label Untersuchung"/>
+          <p:cNvSpPr txBox="1"/>
+          <p:nvPr/>
+        </p:nvSpPr>
+        <p:spPr>
+          <a:xfrm>
+            <a:off x="4394200" y="6273800"/>
+            <a:ext cx="1270000" cy="203200"/>
+          </a:xfrm>
+          <a:prstGeom prst="rect">
+            <a:avLst/>
+          </a:prstGeom>
+          <a:noFill/>
+        </p:spPr>
+        <p:txBody>
+          <a:bodyPr wrap="square" lIns="0" tIns="0" rIns="0" bIns="0" anchor="t">
+            <a:noAutofit/>
+          </a:bodyPr>
+          <a:lstStyle/>
+          <a:p>
+            <a:pPr algn="ctr">
+              <a:spcAft>
+                <a:spcPts val="0"/>
+              </a:spcAft>
+            </a:pPr>
+            <a:r>
+              <a:rPr lang="de-DE" sz="1000" b="1" dirty="0">
+                <a:solidFill>
+                  <a:srgbClr val="C1002A"/>
+                </a:solidFill>
+              </a:rPr>
+              <a:t>Untersuchung</a:t>
+            </a:r>
+          </a:p>
+        </p:txBody>
+      </p:sp>
+      <p:sp>
+        <p:nvSpPr>
+          <p:cNvPr id="42" name="Marker Fazit"/>
+          <p:cNvSpPr/>
+          <p:nvPr/>
+        </p:nvSpPr>
+        <p:spPr>
+          <a:xfrm>
+            <a:off x="6267450" y="6140450"/>
+            <a:ext cx="63500" cy="63500"/>
+          </a:xfrm>
+          <a:prstGeom prst="ellipse">
+            <a:avLst/>
+          </a:prstGeom>
+          <a:solidFill>
+            <a:srgbClr val="BFBFBF"/>
+          </a:solidFill>
+          <a:ln>
+            <a:noFill/>
+          </a:ln>
+        </p:spPr>
+        <p:txBody>
+          <a:bodyPr/>
+          <a:lstStyle/>
+          <a:p>
+            <a:endParaRPr lang="de-DE"/>
+          </a:p>
+        </p:txBody>
+      </p:sp>
+      <p:sp>
+        <p:nvSpPr>
+          <p:cNvPr id="43" name="Label Fazit"/>
+          <p:cNvSpPr txBox="1"/>
+          <p:nvPr/>
+        </p:nvSpPr>
+        <p:spPr>
+          <a:xfrm>
+            <a:off x="5029200" y="6273800"/>
+            <a:ext cx="1270000" cy="203200"/>
+          </a:xfrm>
+          <a:prstGeom prst="rect">
+            <a:avLst/>
+          </a:prstGeom>
+          <a:noFill/>
+        </p:spPr>
+        <p:txBody>
+          <a:bodyPr wrap="square" lIns="0" tIns="0" rIns="0" bIns="0" anchor="t">
+            <a:noAutofit/>
+          </a:bodyPr>
+          <a:lstStyle/>
+          <a:p>
+            <a:pPr algn="r">
+              <a:spcAft>
+                <a:spcPts val="0"/>
+              </a:spcAft>
+            </a:pPr>
+            <a:r>
+              <a:rPr lang="de-DE" sz="1000" dirty="0">
+                <a:solidFill>
+                  <a:srgbClr val="A6A6A6"/>
+                </a:solidFill>
+              </a:rPr>
+              <a:t>Fazit</a:t>
             </a:r>
           </a:p>
         </p:txBody>
@@ -11434,7 +14527,1031 @@
     </p:spTree>
     <p:extLst>
       <p:ext uri="{BB962C8B-B14F-4D97-AF65-F5344CB8AC3E}">
-        <p14:creationId xmlns:p14="http://schemas.microsoft.com/office/powerpoint/2010/main" val="4237940801"/>
+        <p14:creationId xmlns:p14="http://schemas.microsoft.com/office/powerpoint/2010/main" val="1983420071"/>
+      </p:ext>
+    </p:extLst>
+  </p:cSld>
+  <p:clrMapOvr>
+    <a:masterClrMapping/>
+  </p:clrMapOvr>
+</p:sld>
+</file>
+
+<file path=ppt/slides/slide19.xml><?xml version="1.0" encoding="utf-8"?>
+<p:sld xmlns:a="http://schemas.openxmlformats.org/drawingml/2006/main" xmlns:r="http://schemas.openxmlformats.org/officeDocument/2006/relationships" xmlns:p="http://schemas.openxmlformats.org/presentationml/2006/main">
+  <p:cSld>
+    <p:spTree>
+      <p:nvGrpSpPr>
+        <p:cNvPr id="1" name=""/>
+        <p:cNvGrpSpPr/>
+        <p:nvPr/>
+      </p:nvGrpSpPr>
+      <p:grpSpPr>
+        <a:xfrm>
+          <a:off x="0" y="0"/>
+          <a:ext cx="0" cy="0"/>
+          <a:chOff x="0" y="0"/>
+          <a:chExt cx="0" cy="0"/>
+        </a:xfrm>
+      </p:grpSpPr>
+      <p:sp>
+        <p:nvSpPr>
+          <p:cNvPr id="2" name="Titel 1">
+            <a:extLst>
+              <a:ext uri="{FF2B5EF4-FFF2-40B4-BE49-F238E27FC236}">
+                <a16:creationId xmlns:a16="http://schemas.microsoft.com/office/drawing/2014/main" id="{22736DC6-D207-A223-1507-4D4F781B08AD}"/>
+              </a:ext>
+            </a:extLst>
+          </p:cNvPr>
+          <p:cNvSpPr>
+            <a:spLocks noGrp="1"/>
+          </p:cNvSpPr>
+          <p:nvPr>
+            <p:ph type="title"/>
+          </p:nvPr>
+        </p:nvSpPr>
+        <p:spPr>
+          <a:xfrm>
+            <a:off x="1219200" y="812800"/>
+            <a:ext cx="10058400" cy="508000"/>
+          </a:xfrm>
+        </p:spPr>
+        <p:txBody>
+          <a:bodyPr lIns="0" tIns="0" bIns="0" anchor="ctr"/>
+          <a:lstStyle/>
+          <a:p>
+            <a:pPr algn="l"/>
+            <a:r>
+              <a:rPr lang="de-DE" sz="2600" b="1" dirty="0">
+                <a:solidFill>
+                  <a:srgbClr val="262626"/>
+                </a:solidFill>
+              </a:rPr>
+              <a:t>Einfluss des Ablageorts bei AiiDA</a:t>
+            </a:r>
+          </a:p>
+        </p:txBody>
+      </p:sp>
+      <p:pic>
+        <p:nvPicPr>
+          <p:cNvPr id="5" name="Inhaltsplatzhalter 4">
+            <a:extLst>
+              <a:ext uri="{FF2B5EF4-FFF2-40B4-BE49-F238E27FC236}">
+                <a16:creationId xmlns:a16="http://schemas.microsoft.com/office/drawing/2014/main" id="{7CFB64E0-ED47-B839-833B-AC14506BCB0A}"/>
+              </a:ext>
+            </a:extLst>
+          </p:cNvPr>
+          <p:cNvPicPr>
+            <a:picLocks noGrp="1" noChangeAspect="1"/>
+          </p:cNvPicPr>
+          <p:nvPr>
+            <p:ph idx="1"/>
+          </p:nvPr>
+        </p:nvPicPr>
+        <p:blipFill>
+          <a:blip r:embed="rId2"/>
+          <a:stretch>
+            <a:fillRect/>
+          </a:stretch>
+        </p:blipFill>
+        <p:spPr>
+          <a:xfrm>
+            <a:off x="1219200" y="2438400"/>
+            <a:ext cx="6299200" cy="2451100"/>
+          </a:xfrm>
+          <a:prstGeom prst="rect">
+            <a:avLst/>
+          </a:prstGeom>
+        </p:spPr>
+      </p:pic>
+      <p:sp>
+        <p:nvSpPr>
+          <p:cNvPr id="20" name="Akzentlinie"/>
+          <p:cNvSpPr/>
+          <p:nvPr/>
+        </p:nvSpPr>
+        <p:spPr>
+          <a:xfrm>
+            <a:off x="914400" y="812800"/>
+            <a:ext cx="50800" cy="431800"/>
+          </a:xfrm>
+          <a:prstGeom prst="rect">
+            <a:avLst/>
+          </a:prstGeom>
+          <a:solidFill>
+            <a:srgbClr val="C1002A"/>
+          </a:solidFill>
+          <a:ln>
+            <a:noFill/>
+          </a:ln>
+        </p:spPr>
+        <p:txBody>
+          <a:bodyPr/>
+          <a:lstStyle/>
+          <a:p>
+            <a:endParaRPr lang="de-DE"/>
+          </a:p>
+        </p:txBody>
+      </p:sp>
+      <p:sp>
+        <p:nvSpPr>
+          <p:cNvPr id="21" name="Abschnitt"/>
+          <p:cNvSpPr txBox="1"/>
+          <p:nvPr/>
+        </p:nvSpPr>
+        <p:spPr>
+          <a:xfrm>
+            <a:off x="1219200" y="1397000"/>
+            <a:ext cx="10058400" cy="177800"/>
+          </a:xfrm>
+          <a:prstGeom prst="rect">
+            <a:avLst/>
+          </a:prstGeom>
+          <a:noFill/>
+        </p:spPr>
+        <p:txBody>
+          <a:bodyPr wrap="square" lIns="0" tIns="0" rIns="0" bIns="0" anchor="t">
+            <a:noAutofit/>
+          </a:bodyPr>
+          <a:lstStyle/>
+          <a:p>
+            <a:pPr algn="l">
+              <a:spcAft>
+                <a:spcPts val="0"/>
+              </a:spcAft>
+            </a:pPr>
+            <a:r>
+              <a:rPr lang="de-DE" sz="1000" b="1" spc="200" dirty="0">
+                <a:solidFill>
+                  <a:srgbClr val="C1002A"/>
+                </a:solidFill>
+              </a:rPr>
+              <a:t>DATENHALTUNG AUF /fshpc UND KNOTENLOKALEM SPEICHER</a:t>
+            </a:r>
+          </a:p>
+        </p:txBody>
+      </p:sp>
+      <p:sp>
+        <p:nvSpPr>
+          <p:cNvPr id="22" name="Zentrale Ergebnisse"/>
+          <p:cNvSpPr txBox="1"/>
+          <p:nvPr/>
+        </p:nvSpPr>
+        <p:spPr>
+          <a:xfrm>
+            <a:off x="7772400" y="1854200"/>
+            <a:ext cx="3505200" cy="279400"/>
+          </a:xfrm>
+          <a:prstGeom prst="rect">
+            <a:avLst/>
+          </a:prstGeom>
+          <a:noFill/>
+        </p:spPr>
+        <p:txBody>
+          <a:bodyPr wrap="square" lIns="0" tIns="0" rIns="0" bIns="0" anchor="t">
+            <a:noAutofit/>
+          </a:bodyPr>
+          <a:lstStyle/>
+          <a:p>
+            <a:pPr algn="l">
+              <a:spcAft>
+                <a:spcPts val="0"/>
+              </a:spcAft>
+            </a:pPr>
+            <a:r>
+              <a:rPr lang="de-DE" sz="1600" b="1" dirty="0">
+                <a:solidFill>
+                  <a:srgbClr val="262626"/>
+                </a:solidFill>
+              </a:rPr>
+              <a:t>Zentrale Ergebnisse</a:t>
+            </a:r>
+          </a:p>
+        </p:txBody>
+      </p:sp>
+      <p:sp>
+        <p:nvSpPr>
+          <p:cNvPr id="23" name="Block Vergleich"/>
+          <p:cNvSpPr txBox="1"/>
+          <p:nvPr/>
+        </p:nvSpPr>
+        <p:spPr>
+          <a:xfrm>
+            <a:off x="7772400" y="2235200"/>
+            <a:ext cx="3505200" cy="685800"/>
+          </a:xfrm>
+          <a:prstGeom prst="rect">
+            <a:avLst/>
+          </a:prstGeom>
+          <a:noFill/>
+        </p:spPr>
+        <p:txBody>
+          <a:bodyPr wrap="square" lIns="0" tIns="0" rIns="0" bIns="0" anchor="t">
+            <a:noAutofit/>
+          </a:bodyPr>
+          <a:lstStyle/>
+          <a:p>
+            <a:pPr algn="l">
+              <a:spcAft>
+                <a:spcPts val="200"/>
+              </a:spcAft>
+            </a:pPr>
+            <a:r>
+              <a:rPr lang="de-DE" sz="1300" b="1" dirty="0">
+                <a:solidFill>
+                  <a:srgbClr val="262626"/>
+                </a:solidFill>
+              </a:rPr>
+              <a:t>Kontrollierter Vergleich</a:t>
+            </a:r>
+          </a:p>
+          <a:p>
+            <a:pPr algn="l">
+              <a:spcAft>
+                <a:spcPts val="100"/>
+              </a:spcAft>
+            </a:pPr>
+            <a:r>
+              <a:rPr lang="de-DE" sz="1100" b="1" dirty="0">
+                <a:solidFill>
+                  <a:srgbClr val="262626"/>
+                </a:solidFill>
+              </a:rPr>
+              <a:t>SQLite /fshpc → SQLite knotenlokal</a:t>
+            </a:r>
+          </a:p>
+          <a:p>
+            <a:pPr algn="l">
+              <a:spcAft>
+                <a:spcPts val="0"/>
+              </a:spcAft>
+            </a:pPr>
+            <a:r>
+              <a:rPr lang="de-DE" sz="1000" dirty="0">
+                <a:solidFill>
+                  <a:srgbClr val="595959"/>
+                </a:solidFill>
+              </a:rPr>
+              <a:t>gleicher Storage-Typ, anderer Ablageort</a:t>
+            </a:r>
+          </a:p>
+        </p:txBody>
+      </p:sp>
+      <p:cxnSp>
+        <p:nvCxnSpPr>
+          <p:cNvPr id="24" name="Trenner 1"/>
+          <p:cNvCxnSpPr/>
+          <p:nvPr/>
+        </p:nvCxnSpPr>
+        <p:spPr>
+          <a:xfrm>
+            <a:off x="7772400" y="2921000"/>
+            <a:ext cx="3505200" cy="0"/>
+          </a:xfrm>
+          <a:prstGeom prst="line">
+            <a:avLst/>
+          </a:prstGeom>
+          <a:ln w="6350">
+            <a:solidFill>
+              <a:srgbClr val="D9D9D9"/>
+            </a:solidFill>
+          </a:ln>
+        </p:spPr>
+      </p:cxnSp>
+      <p:sp>
+        <p:nvSpPr>
+          <p:cNvPr id="25" name="Block Overhead"/>
+          <p:cNvSpPr txBox="1"/>
+          <p:nvPr/>
+        </p:nvSpPr>
+        <p:spPr>
+          <a:xfrm>
+            <a:off x="7772400" y="3022600"/>
+            <a:ext cx="3505200" cy="685800"/>
+          </a:xfrm>
+          <a:prstGeom prst="rect">
+            <a:avLst/>
+          </a:prstGeom>
+          <a:noFill/>
+        </p:spPr>
+        <p:txBody>
+          <a:bodyPr wrap="square" lIns="0" tIns="0" rIns="0" bIns="0" anchor="t">
+            <a:noAutofit/>
+          </a:bodyPr>
+          <a:lstStyle/>
+          <a:p>
+            <a:pPr algn="l">
+              <a:spcAft>
+                <a:spcPts val="200"/>
+              </a:spcAft>
+            </a:pPr>
+            <a:r>
+              <a:rPr lang="de-DE" sz="1300" b="1" dirty="0">
+                <a:solidFill>
+                  <a:srgbClr val="262626"/>
+                </a:solidFill>
+              </a:rPr>
+              <a:t>Overhead</a:t>
+            </a:r>
+          </a:p>
+          <a:p>
+            <a:pPr algn="l">
+              <a:spcAft>
+                <a:spcPts val="100"/>
+              </a:spcAft>
+            </a:pPr>
+            <a:r>
+              <a:rPr lang="de-DE" sz="1100" dirty="0">
+                <a:solidFill>
+                  <a:srgbClr val="262626"/>
+                </a:solidFill>
+              </a:rPr>
+              <a:t>12,5–29,9 s → </a:t>
+            </a:r>
+            <a:r>
+              <a:rPr lang="de-DE" sz="1100" b="1" dirty="0">
+                <a:solidFill>
+                  <a:srgbClr val="C1002A"/>
+                </a:solidFill>
+              </a:rPr>
+              <a:t>3,5–11,6 s</a:t>
+            </a:r>
+          </a:p>
+          <a:p>
+            <a:pPr algn="l">
+              <a:spcAft>
+                <a:spcPts val="0"/>
+              </a:spcAft>
+            </a:pPr>
+            <a:r>
+              <a:rPr lang="de-DE" sz="1000" dirty="0">
+                <a:solidFill>
+                  <a:srgbClr val="595959"/>
+                </a:solidFill>
+              </a:rPr>
+              <a:t>in allen 12 Konfigurationen geringer · Faktor 2,2–3,7</a:t>
+            </a:r>
+          </a:p>
+        </p:txBody>
+      </p:sp>
+      <p:cxnSp>
+        <p:nvCxnSpPr>
+          <p:cNvPr id="26" name="Trenner 2"/>
+          <p:cNvCxnSpPr/>
+          <p:nvPr/>
+        </p:nvCxnSpPr>
+        <p:spPr>
+          <a:xfrm>
+            <a:off x="7772400" y="3708400"/>
+            <a:ext cx="3505200" cy="0"/>
+          </a:xfrm>
+          <a:prstGeom prst="line">
+            <a:avLst/>
+          </a:prstGeom>
+          <a:ln w="6350">
+            <a:solidFill>
+              <a:srgbClr val="D9D9D9"/>
+            </a:solidFill>
+          </a:ln>
+        </p:spPr>
+      </p:cxnSp>
+      <p:sp>
+        <p:nvSpPr>
+          <p:cNvPr id="27" name="Block Koordination"/>
+          <p:cNvSpPr txBox="1"/>
+          <p:nvPr/>
+        </p:nvSpPr>
+        <p:spPr>
+          <a:xfrm>
+            <a:off x="7772400" y="3810000"/>
+            <a:ext cx="3505200" cy="685800"/>
+          </a:xfrm>
+          <a:prstGeom prst="rect">
+            <a:avLst/>
+          </a:prstGeom>
+          <a:noFill/>
+        </p:spPr>
+        <p:txBody>
+          <a:bodyPr wrap="square" lIns="0" tIns="0" rIns="0" bIns="0" anchor="t">
+            <a:noAutofit/>
+          </a:bodyPr>
+          <a:lstStyle/>
+          <a:p>
+            <a:pPr algn="l">
+              <a:spcAft>
+                <a:spcPts val="200"/>
+              </a:spcAft>
+            </a:pPr>
+            <a:r>
+              <a:rPr lang="de-DE" sz="1300" b="1" dirty="0">
+                <a:solidFill>
+                  <a:srgbClr val="262626"/>
+                </a:solidFill>
+              </a:rPr>
+              <a:t>Auch Koordinationszeiten sinken</a:t>
+            </a:r>
+          </a:p>
+          <a:p>
+            <a:pPr algn="l">
+              <a:spcAft>
+                <a:spcPts val="100"/>
+              </a:spcAft>
+            </a:pPr>
+            <a:r>
+              <a:rPr lang="de-DE" sz="1100" dirty="0">
+                <a:solidFill>
+                  <a:srgbClr val="262626"/>
+                </a:solidFill>
+              </a:rPr>
+              <a:t>Compute → Aggregate: 4,96 s → 1,44 s</a:t>
+            </a:r>
+          </a:p>
+          <a:p>
+            <a:pPr algn="l">
+              <a:spcAft>
+                <a:spcPts val="0"/>
+              </a:spcAft>
+            </a:pPr>
+            <a:r>
+              <a:rPr lang="de-DE" sz="1100" dirty="0">
+                <a:solidFill>
+                  <a:srgbClr val="262626"/>
+                </a:solidFill>
+              </a:rPr>
+              <a:t>Startspreizung (4 Chunks): 2,99 s → 0,50 s</a:t>
+            </a:r>
+          </a:p>
+        </p:txBody>
+      </p:sp>
+      <p:cxnSp>
+        <p:nvCxnSpPr>
+          <p:cNvPr id="28" name="Trenner 3"/>
+          <p:cNvCxnSpPr/>
+          <p:nvPr/>
+        </p:nvCxnSpPr>
+        <p:spPr>
+          <a:xfrm>
+            <a:off x="7772400" y="4495800"/>
+            <a:ext cx="3505200" cy="0"/>
+          </a:xfrm>
+          <a:prstGeom prst="line">
+            <a:avLst/>
+          </a:prstGeom>
+          <a:ln w="6350">
+            <a:solidFill>
+              <a:srgbClr val="D9D9D9"/>
+            </a:solidFill>
+          </a:ln>
+        </p:spPr>
+      </p:cxnSp>
+      <p:sp>
+        <p:nvSpPr>
+          <p:cNvPr id="29" name="Block PostgreSQL"/>
+          <p:cNvSpPr txBox="1"/>
+          <p:nvPr/>
+        </p:nvSpPr>
+        <p:spPr>
+          <a:xfrm>
+            <a:off x="7772400" y="4597400"/>
+            <a:ext cx="3505200" cy="685800"/>
+          </a:xfrm>
+          <a:prstGeom prst="rect">
+            <a:avLst/>
+          </a:prstGeom>
+          <a:noFill/>
+        </p:spPr>
+        <p:txBody>
+          <a:bodyPr wrap="square" lIns="0" tIns="0" rIns="0" bIns="0" anchor="t">
+            <a:noAutofit/>
+          </a:bodyPr>
+          <a:lstStyle/>
+          <a:p>
+            <a:pPr algn="l">
+              <a:spcAft>
+                <a:spcPts val="200"/>
+              </a:spcAft>
+            </a:pPr>
+            <a:r>
+              <a:rPr lang="de-DE" sz="1300" b="1" dirty="0">
+                <a:solidFill>
+                  <a:srgbClr val="595959"/>
+                </a:solidFill>
+              </a:rPr>
+              <a:t>PostgreSQL /fshpc</a:t>
+            </a:r>
+          </a:p>
+          <a:p>
+            <a:pPr algn="l">
+              <a:spcAft>
+                <a:spcPts val="100"/>
+              </a:spcAft>
+            </a:pPr>
+            <a:r>
+              <a:rPr lang="de-DE" sz="1100" dirty="0">
+                <a:solidFill>
+                  <a:srgbClr val="595959"/>
+                </a:solidFill>
+              </a:rPr>
+              <a:t>Overhead: 8,4–15,4 s</a:t>
+            </a:r>
+          </a:p>
+          <a:p>
+            <a:pPr algn="l">
+              <a:spcAft>
+                <a:spcPts val="0"/>
+              </a:spcAft>
+            </a:pPr>
+            <a:r>
+              <a:rPr lang="de-DE" sz="1000" dirty="0">
+                <a:solidFill>
+                  <a:srgbClr val="595959"/>
+                </a:solidFill>
+              </a:rPr>
+              <a:t>zusätzliche Einordnung</a:t>
+            </a:r>
+          </a:p>
+        </p:txBody>
+      </p:sp>
+      <p:cxnSp>
+        <p:nvCxnSpPr>
+          <p:cNvPr id="30" name="Trennlinie"/>
+          <p:cNvCxnSpPr/>
+          <p:nvPr/>
+        </p:nvCxnSpPr>
+        <p:spPr>
+          <a:xfrm>
+            <a:off x="1219200" y="5435600"/>
+            <a:ext cx="10058400" cy="0"/>
+          </a:xfrm>
+          <a:prstGeom prst="line">
+            <a:avLst/>
+          </a:prstGeom>
+          <a:ln w="6350">
+            <a:solidFill>
+              <a:srgbClr val="D9D9D9"/>
+            </a:solidFill>
+          </a:ln>
+        </p:spPr>
+      </p:cxnSp>
+      <p:sp>
+        <p:nvSpPr>
+          <p:cNvPr id="31" name="Schlussfolgerung"/>
+          <p:cNvSpPr txBox="1"/>
+          <p:nvPr/>
+        </p:nvSpPr>
+        <p:spPr>
+          <a:xfrm>
+            <a:off x="1219200" y="5537200"/>
+            <a:ext cx="10058400" cy="457200"/>
+          </a:xfrm>
+          <a:prstGeom prst="rect">
+            <a:avLst/>
+          </a:prstGeom>
+          <a:noFill/>
+        </p:spPr>
+        <p:txBody>
+          <a:bodyPr wrap="square" lIns="0" tIns="0" rIns="0" bIns="0" anchor="t">
+            <a:noAutofit/>
+          </a:bodyPr>
+          <a:lstStyle/>
+          <a:p>
+            <a:pPr algn="l">
+              <a:spcAft>
+                <a:spcPts val="200"/>
+              </a:spcAft>
+            </a:pPr>
+            <a:r>
+              <a:rPr lang="de-DE" sz="1400" b="1" dirty="0">
+                <a:solidFill>
+                  <a:srgbClr val="262626"/>
+                </a:solidFill>
+              </a:rPr>
+              <a:t>Der Ablageort beeinflusst die gemessenen Zeiten von AiiDA deutlich.</a:t>
+            </a:r>
+          </a:p>
+          <a:p>
+            <a:pPr algn="l">
+              <a:spcAft>
+                <a:spcPts val="0"/>
+              </a:spcAft>
+            </a:pPr>
+            <a:r>
+              <a:rPr lang="de-DE" sz="1100" dirty="0" err="1">
+                <a:solidFill>
+                  <a:srgbClr val="595959"/>
+                </a:solidFill>
+              </a:rPr>
+              <a:t>AiiDA</a:t>
+            </a:r>
+            <a:r>
+              <a:rPr lang="de-DE" sz="1100" dirty="0">
+                <a:solidFill>
+                  <a:srgbClr val="595959"/>
+                </a:solidFill>
+              </a:rPr>
+              <a:t> liegt auch mit der schnellsten Konfiguration in nahezu allen Fällen über den der anderen drei WMS</a:t>
+            </a:r>
+          </a:p>
+        </p:txBody>
+      </p:sp>
+      <p:sp>
+        <p:nvSpPr>
+          <p:cNvPr id="32" name="Foliennummer"/>
+          <p:cNvSpPr txBox="1"/>
+          <p:nvPr/>
+        </p:nvSpPr>
+        <p:spPr>
+          <a:xfrm>
+            <a:off x="10769600" y="6197600"/>
+            <a:ext cx="508000" cy="254000"/>
+          </a:xfrm>
+          <a:prstGeom prst="rect">
+            <a:avLst/>
+          </a:prstGeom>
+          <a:noFill/>
+        </p:spPr>
+        <p:txBody>
+          <a:bodyPr wrap="square" lIns="0" tIns="0" rIns="0" bIns="0" anchor="t">
+            <a:noAutofit/>
+          </a:bodyPr>
+          <a:lstStyle/>
+          <a:p>
+            <a:pPr algn="r">
+              <a:spcAft>
+                <a:spcPts val="0"/>
+              </a:spcAft>
+            </a:pPr>
+            <a:r>
+              <a:rPr lang="de-DE" sz="1200" dirty="0">
+                <a:solidFill>
+                  <a:srgbClr val="8C8C8C"/>
+                </a:solidFill>
+              </a:rPr>
+              <a:t>19</a:t>
+            </a:r>
+          </a:p>
+        </p:txBody>
+      </p:sp>
+      <p:cxnSp>
+        <p:nvCxnSpPr>
+          <p:cNvPr id="33" name="Fortschritt Linie"/>
+          <p:cNvCxnSpPr/>
+          <p:nvPr/>
+        </p:nvCxnSpPr>
+        <p:spPr>
+          <a:xfrm>
+            <a:off x="1219200" y="6172200"/>
+            <a:ext cx="5080000" cy="0"/>
+          </a:xfrm>
+          <a:prstGeom prst="line">
+            <a:avLst/>
+          </a:prstGeom>
+          <a:ln w="6350">
+            <a:solidFill>
+              <a:srgbClr val="D9D9D9"/>
+            </a:solidFill>
+          </a:ln>
+        </p:spPr>
+      </p:cxnSp>
+      <p:sp>
+        <p:nvSpPr>
+          <p:cNvPr id="34" name="Marker Motivation"/>
+          <p:cNvSpPr/>
+          <p:nvPr/>
+        </p:nvSpPr>
+        <p:spPr>
+          <a:xfrm>
+            <a:off x="1187450" y="6140450"/>
+            <a:ext cx="63500" cy="63500"/>
+          </a:xfrm>
+          <a:prstGeom prst="ellipse">
+            <a:avLst/>
+          </a:prstGeom>
+          <a:solidFill>
+            <a:srgbClr val="BFBFBF"/>
+          </a:solidFill>
+          <a:ln>
+            <a:noFill/>
+          </a:ln>
+        </p:spPr>
+        <p:txBody>
+          <a:bodyPr/>
+          <a:lstStyle/>
+          <a:p>
+            <a:endParaRPr lang="de-DE"/>
+          </a:p>
+        </p:txBody>
+      </p:sp>
+      <p:sp>
+        <p:nvSpPr>
+          <p:cNvPr id="35" name="Label Motivation"/>
+          <p:cNvSpPr txBox="1"/>
+          <p:nvPr/>
+        </p:nvSpPr>
+        <p:spPr>
+          <a:xfrm>
+            <a:off x="1219200" y="6273800"/>
+            <a:ext cx="1270000" cy="203200"/>
+          </a:xfrm>
+          <a:prstGeom prst="rect">
+            <a:avLst/>
+          </a:prstGeom>
+          <a:noFill/>
+        </p:spPr>
+        <p:txBody>
+          <a:bodyPr wrap="square" lIns="0" tIns="0" rIns="0" bIns="0" anchor="t">
+            <a:noAutofit/>
+          </a:bodyPr>
+          <a:lstStyle/>
+          <a:p>
+            <a:pPr algn="l">
+              <a:spcAft>
+                <a:spcPts val="0"/>
+              </a:spcAft>
+            </a:pPr>
+            <a:r>
+              <a:rPr lang="de-DE" sz="1000" dirty="0">
+                <a:solidFill>
+                  <a:srgbClr val="A6A6A6"/>
+                </a:solidFill>
+              </a:rPr>
+              <a:t>Motivation</a:t>
+            </a:r>
+          </a:p>
+        </p:txBody>
+      </p:sp>
+      <p:sp>
+        <p:nvSpPr>
+          <p:cNvPr id="36" name="Marker Methodik"/>
+          <p:cNvSpPr/>
+          <p:nvPr/>
+        </p:nvSpPr>
+        <p:spPr>
+          <a:xfrm>
+            <a:off x="2457450" y="6140450"/>
+            <a:ext cx="63500" cy="63500"/>
+          </a:xfrm>
+          <a:prstGeom prst="ellipse">
+            <a:avLst/>
+          </a:prstGeom>
+          <a:solidFill>
+            <a:srgbClr val="BFBFBF"/>
+          </a:solidFill>
+          <a:ln>
+            <a:noFill/>
+          </a:ln>
+        </p:spPr>
+        <p:txBody>
+          <a:bodyPr/>
+          <a:lstStyle/>
+          <a:p>
+            <a:endParaRPr lang="de-DE"/>
+          </a:p>
+        </p:txBody>
+      </p:sp>
+      <p:sp>
+        <p:nvSpPr>
+          <p:cNvPr id="37" name="Label Methodik"/>
+          <p:cNvSpPr txBox="1"/>
+          <p:nvPr/>
+        </p:nvSpPr>
+        <p:spPr>
+          <a:xfrm>
+            <a:off x="1854200" y="6273800"/>
+            <a:ext cx="1270000" cy="203200"/>
+          </a:xfrm>
+          <a:prstGeom prst="rect">
+            <a:avLst/>
+          </a:prstGeom>
+          <a:noFill/>
+        </p:spPr>
+        <p:txBody>
+          <a:bodyPr wrap="square" lIns="0" tIns="0" rIns="0" bIns="0" anchor="t">
+            <a:noAutofit/>
+          </a:bodyPr>
+          <a:lstStyle/>
+          <a:p>
+            <a:pPr algn="ctr">
+              <a:spcAft>
+                <a:spcPts val="0"/>
+              </a:spcAft>
+            </a:pPr>
+            <a:r>
+              <a:rPr lang="de-DE" sz="1000" dirty="0">
+                <a:solidFill>
+                  <a:srgbClr val="A6A6A6"/>
+                </a:solidFill>
+              </a:rPr>
+              <a:t>Methodik</a:t>
+            </a:r>
+          </a:p>
+        </p:txBody>
+      </p:sp>
+      <p:sp>
+        <p:nvSpPr>
+          <p:cNvPr id="38" name="Marker Systeme"/>
+          <p:cNvSpPr/>
+          <p:nvPr/>
+        </p:nvSpPr>
+        <p:spPr>
+          <a:xfrm>
+            <a:off x="3727450" y="6140450"/>
+            <a:ext cx="63500" cy="63500"/>
+          </a:xfrm>
+          <a:prstGeom prst="ellipse">
+            <a:avLst/>
+          </a:prstGeom>
+          <a:solidFill>
+            <a:srgbClr val="BFBFBF"/>
+          </a:solidFill>
+          <a:ln>
+            <a:noFill/>
+          </a:ln>
+        </p:spPr>
+        <p:txBody>
+          <a:bodyPr/>
+          <a:lstStyle/>
+          <a:p>
+            <a:endParaRPr lang="de-DE"/>
+          </a:p>
+        </p:txBody>
+      </p:sp>
+      <p:sp>
+        <p:nvSpPr>
+          <p:cNvPr id="39" name="Label Systeme"/>
+          <p:cNvSpPr txBox="1"/>
+          <p:nvPr/>
+        </p:nvSpPr>
+        <p:spPr>
+          <a:xfrm>
+            <a:off x="3124200" y="6273800"/>
+            <a:ext cx="1270000" cy="203200"/>
+          </a:xfrm>
+          <a:prstGeom prst="rect">
+            <a:avLst/>
+          </a:prstGeom>
+          <a:noFill/>
+        </p:spPr>
+        <p:txBody>
+          <a:bodyPr wrap="square" lIns="0" tIns="0" rIns="0" bIns="0" anchor="t">
+            <a:noAutofit/>
+          </a:bodyPr>
+          <a:lstStyle/>
+          <a:p>
+            <a:pPr algn="ctr">
+              <a:spcAft>
+                <a:spcPts val="0"/>
+              </a:spcAft>
+            </a:pPr>
+            <a:r>
+              <a:rPr lang="de-DE" sz="1000" dirty="0">
+                <a:solidFill>
+                  <a:srgbClr val="A6A6A6"/>
+                </a:solidFill>
+              </a:rPr>
+              <a:t>Systeme</a:t>
+            </a:r>
+          </a:p>
+        </p:txBody>
+      </p:sp>
+      <p:sp>
+        <p:nvSpPr>
+          <p:cNvPr id="40" name="Marker Untersuchung"/>
+          <p:cNvSpPr/>
+          <p:nvPr/>
+        </p:nvSpPr>
+        <p:spPr>
+          <a:xfrm>
+            <a:off x="4984750" y="6127750"/>
+            <a:ext cx="88900" cy="88900"/>
+          </a:xfrm>
+          <a:prstGeom prst="ellipse">
+            <a:avLst/>
+          </a:prstGeom>
+          <a:solidFill>
+            <a:srgbClr val="C1002A"/>
+          </a:solidFill>
+          <a:ln>
+            <a:noFill/>
+          </a:ln>
+        </p:spPr>
+        <p:txBody>
+          <a:bodyPr/>
+          <a:lstStyle/>
+          <a:p>
+            <a:endParaRPr lang="de-DE"/>
+          </a:p>
+        </p:txBody>
+      </p:sp>
+      <p:sp>
+        <p:nvSpPr>
+          <p:cNvPr id="41" name="Label Untersuchung"/>
+          <p:cNvSpPr txBox="1"/>
+          <p:nvPr/>
+        </p:nvSpPr>
+        <p:spPr>
+          <a:xfrm>
+            <a:off x="4394200" y="6273800"/>
+            <a:ext cx="1270000" cy="203200"/>
+          </a:xfrm>
+          <a:prstGeom prst="rect">
+            <a:avLst/>
+          </a:prstGeom>
+          <a:noFill/>
+        </p:spPr>
+        <p:txBody>
+          <a:bodyPr wrap="square" lIns="0" tIns="0" rIns="0" bIns="0" anchor="t">
+            <a:noAutofit/>
+          </a:bodyPr>
+          <a:lstStyle/>
+          <a:p>
+            <a:pPr algn="ctr">
+              <a:spcAft>
+                <a:spcPts val="0"/>
+              </a:spcAft>
+            </a:pPr>
+            <a:r>
+              <a:rPr lang="de-DE" sz="1000" b="1" dirty="0">
+                <a:solidFill>
+                  <a:srgbClr val="C1002A"/>
+                </a:solidFill>
+              </a:rPr>
+              <a:t>Untersuchung</a:t>
+            </a:r>
+          </a:p>
+        </p:txBody>
+      </p:sp>
+      <p:sp>
+        <p:nvSpPr>
+          <p:cNvPr id="42" name="Marker Fazit"/>
+          <p:cNvSpPr/>
+          <p:nvPr/>
+        </p:nvSpPr>
+        <p:spPr>
+          <a:xfrm>
+            <a:off x="6267450" y="6140450"/>
+            <a:ext cx="63500" cy="63500"/>
+          </a:xfrm>
+          <a:prstGeom prst="ellipse">
+            <a:avLst/>
+          </a:prstGeom>
+          <a:solidFill>
+            <a:srgbClr val="BFBFBF"/>
+          </a:solidFill>
+          <a:ln>
+            <a:noFill/>
+          </a:ln>
+        </p:spPr>
+        <p:txBody>
+          <a:bodyPr/>
+          <a:lstStyle/>
+          <a:p>
+            <a:endParaRPr lang="de-DE"/>
+          </a:p>
+        </p:txBody>
+      </p:sp>
+      <p:sp>
+        <p:nvSpPr>
+          <p:cNvPr id="43" name="Label Fazit"/>
+          <p:cNvSpPr txBox="1"/>
+          <p:nvPr/>
+        </p:nvSpPr>
+        <p:spPr>
+          <a:xfrm>
+            <a:off x="5029200" y="6273800"/>
+            <a:ext cx="1270000" cy="203200"/>
+          </a:xfrm>
+          <a:prstGeom prst="rect">
+            <a:avLst/>
+          </a:prstGeom>
+          <a:noFill/>
+        </p:spPr>
+        <p:txBody>
+          <a:bodyPr wrap="square" lIns="0" tIns="0" rIns="0" bIns="0" anchor="t">
+            <a:noAutofit/>
+          </a:bodyPr>
+          <a:lstStyle/>
+          <a:p>
+            <a:pPr algn="r">
+              <a:spcAft>
+                <a:spcPts val="0"/>
+              </a:spcAft>
+            </a:pPr>
+            <a:r>
+              <a:rPr lang="de-DE" sz="1000" dirty="0">
+                <a:solidFill>
+                  <a:srgbClr val="A6A6A6"/>
+                </a:solidFill>
+              </a:rPr>
+              <a:t>Fazit</a:t>
+            </a:r>
+          </a:p>
+        </p:txBody>
+      </p:sp>
+    </p:spTree>
+    <p:extLst>
+      <p:ext uri="{BB962C8B-B14F-4D97-AF65-F5344CB8AC3E}">
+        <p14:creationId xmlns:p14="http://schemas.microsoft.com/office/powerpoint/2010/main" val="2723707219"/>
       </p:ext>
     </p:extLst>
   </p:cSld>
@@ -11715,6 +15832,326 @@
     <p:extLst>
       <p:ext uri="{BB962C8B-B14F-4D97-AF65-F5344CB8AC3E}">
         <p14:creationId xmlns:p14="http://schemas.microsoft.com/office/powerpoint/2010/main" val="2273996855"/>
+      </p:ext>
+    </p:extLst>
+  </p:cSld>
+  <p:clrMapOvr>
+    <a:masterClrMapping/>
+  </p:clrMapOvr>
+</p:sld>
+</file>
+
+<file path=ppt/slides/slide20.xml><?xml version="1.0" encoding="utf-8"?>
+<p:sld xmlns:a="http://schemas.openxmlformats.org/drawingml/2006/main" xmlns:r="http://schemas.openxmlformats.org/officeDocument/2006/relationships" xmlns:p="http://schemas.openxmlformats.org/presentationml/2006/main" show="0">
+  <p:cSld>
+    <p:spTree>
+      <p:nvGrpSpPr>
+        <p:cNvPr id="1" name=""/>
+        <p:cNvGrpSpPr/>
+        <p:nvPr/>
+      </p:nvGrpSpPr>
+      <p:grpSpPr>
+        <a:xfrm>
+          <a:off x="0" y="0"/>
+          <a:ext cx="0" cy="0"/>
+          <a:chOff x="0" y="0"/>
+          <a:chExt cx="0" cy="0"/>
+        </a:xfrm>
+      </p:grpSpPr>
+      <p:sp>
+        <p:nvSpPr>
+          <p:cNvPr id="2" name="Titel 1">
+            <a:extLst>
+              <a:ext uri="{FF2B5EF4-FFF2-40B4-BE49-F238E27FC236}">
+                <a16:creationId xmlns:a16="http://schemas.microsoft.com/office/drawing/2014/main" id="{AA3E5E2F-3F12-D116-7CE7-D6ECFF7D2853}"/>
+              </a:ext>
+            </a:extLst>
+          </p:cNvPr>
+          <p:cNvSpPr>
+            <a:spLocks noGrp="1"/>
+          </p:cNvSpPr>
+          <p:nvPr>
+            <p:ph type="title"/>
+          </p:nvPr>
+        </p:nvSpPr>
+        <p:spPr>
+          <a:xfrm>
+            <a:off x="1219200" y="812800"/>
+            <a:ext cx="10058400" cy="508000"/>
+          </a:xfrm>
+        </p:spPr>
+        <p:txBody>
+          <a:bodyPr wrap="square" lIns="0" tIns="0" rIns="0" bIns="0" anchor="t">
+            <a:normAutofit/>
+          </a:bodyPr>
+          <a:lstStyle/>
+          <a:p>
+            <a:pPr algn="l">
+              <a:spcAft>
+                <a:spcPts val="0"/>
+              </a:spcAft>
+            </a:pPr>
+            <a:r>
+              <a:rPr lang="de-DE" sz="2600" b="1" dirty="0">
+                <a:solidFill>
+                  <a:srgbClr val="262626"/>
+                </a:solidFill>
+              </a:rPr>
+              <a:t>Quellenverzeichnis</a:t>
+            </a:r>
+          </a:p>
+        </p:txBody>
+      </p:sp>
+      <p:sp>
+        <p:nvSpPr>
+          <p:cNvPr id="3" name="Inhaltsplatzhalter 2">
+            <a:extLst>
+              <a:ext uri="{FF2B5EF4-FFF2-40B4-BE49-F238E27FC236}">
+                <a16:creationId xmlns:a16="http://schemas.microsoft.com/office/drawing/2014/main" id="{440A9FB2-E4B2-A71F-E04B-B10EEFD4F2B4}"/>
+              </a:ext>
+            </a:extLst>
+          </p:cNvPr>
+          <p:cNvSpPr>
+            <a:spLocks noGrp="1"/>
+          </p:cNvSpPr>
+          <p:nvPr>
+            <p:ph idx="1"/>
+          </p:nvPr>
+        </p:nvSpPr>
+        <p:spPr>
+          <a:xfrm>
+            <a:off x="1219200" y="1905000"/>
+            <a:ext cx="10058400" cy="3810000"/>
+          </a:xfrm>
+        </p:spPr>
+        <p:txBody>
+          <a:bodyPr wrap="square" lIns="0" tIns="0" rIns="0" bIns="0" anchor="t">
+            <a:normAutofit/>
+          </a:bodyPr>
+          <a:lstStyle/>
+          <a:p>
+            <a:pPr marL="0" indent="0" algn="l">
+              <a:spcAft>
+                <a:spcPts val="800"/>
+              </a:spcAft>
+              <a:buNone/>
+            </a:pPr>
+            <a:r>
+              <a:rPr lang="de-DE" sz="1400" b="1" dirty="0">
+                <a:solidFill>
+                  <a:srgbClr val="262626"/>
+                </a:solidFill>
+              </a:rPr>
+              <a:t>Logos der Workflow-Management-Systeme</a:t>
+            </a:r>
+          </a:p>
+          <a:p>
+            <a:pPr marL="0" indent="0" algn="l">
+              <a:spcAft>
+                <a:spcPts val="400"/>
+              </a:spcAft>
+              <a:buNone/>
+            </a:pPr>
+            <a:r>
+              <a:rPr lang="de-DE" sz="1200" dirty="0">
+                <a:solidFill>
+                  <a:srgbClr val="262626"/>
+                </a:solidFill>
+              </a:rPr>
+              <a:t>Nextflow</a:t>
+            </a:r>
+            <a:r>
+              <a:rPr lang="de-DE" sz="1200" dirty="0">
+                <a:solidFill>
+                  <a:srgbClr val="595959"/>
+                </a:solidFill>
+              </a:rPr>
+              <a:t> – https://workflows.community/systems/nextflow/</a:t>
+            </a:r>
+          </a:p>
+          <a:p>
+            <a:pPr marL="0" indent="0" algn="l">
+              <a:spcAft>
+                <a:spcPts val="400"/>
+              </a:spcAft>
+              <a:buNone/>
+            </a:pPr>
+            <a:r>
+              <a:rPr lang="de-DE" sz="1200" dirty="0">
+                <a:solidFill>
+                  <a:srgbClr val="262626"/>
+                </a:solidFill>
+              </a:rPr>
+              <a:t>StreamFlow</a:t>
+            </a:r>
+            <a:r>
+              <a:rPr lang="de-DE" sz="1200" dirty="0">
+                <a:solidFill>
+                  <a:srgbClr val="595959"/>
+                </a:solidFill>
+              </a:rPr>
+              <a:t> – https://workflows.community/systems/streamflow/</a:t>
+            </a:r>
+          </a:p>
+          <a:p>
+            <a:pPr marL="0" indent="0" algn="l">
+              <a:spcAft>
+                <a:spcPts val="400"/>
+              </a:spcAft>
+              <a:buNone/>
+            </a:pPr>
+            <a:r>
+              <a:rPr lang="de-DE" sz="1200" dirty="0">
+                <a:solidFill>
+                  <a:srgbClr val="262626"/>
+                </a:solidFill>
+              </a:rPr>
+              <a:t>Merlin</a:t>
+            </a:r>
+            <a:r>
+              <a:rPr lang="de-DE" sz="1200" dirty="0">
+                <a:solidFill>
+                  <a:srgbClr val="595959"/>
+                </a:solidFill>
+              </a:rPr>
+              <a:t> – https://workflows.community/systems/merlin/</a:t>
+            </a:r>
+          </a:p>
+          <a:p>
+            <a:pPr marL="0" indent="0" algn="l">
+              <a:spcAft>
+                <a:spcPts val="400"/>
+              </a:spcAft>
+              <a:buNone/>
+            </a:pPr>
+            <a:r>
+              <a:rPr lang="de-DE" sz="1200" dirty="0">
+                <a:solidFill>
+                  <a:srgbClr val="262626"/>
+                </a:solidFill>
+              </a:rPr>
+              <a:t>Pegasus</a:t>
+            </a:r>
+            <a:r>
+              <a:rPr lang="de-DE" sz="1200" dirty="0">
+                <a:solidFill>
+                  <a:srgbClr val="595959"/>
+                </a:solidFill>
+              </a:rPr>
+              <a:t> – https://workflows.community/systems/pegasus/</a:t>
+            </a:r>
+          </a:p>
+          <a:p>
+            <a:pPr marL="0" indent="0" algn="l">
+              <a:spcAft>
+                <a:spcPts val="400"/>
+              </a:spcAft>
+              <a:buNone/>
+            </a:pPr>
+            <a:r>
+              <a:rPr lang="de-DE" sz="1200" dirty="0">
+                <a:solidFill>
+                  <a:srgbClr val="262626"/>
+                </a:solidFill>
+              </a:rPr>
+              <a:t>AiiDA</a:t>
+            </a:r>
+            <a:r>
+              <a:rPr lang="de-DE" sz="1200" dirty="0">
+                <a:solidFill>
+                  <a:srgbClr val="595959"/>
+                </a:solidFill>
+              </a:rPr>
+              <a:t> – https://workflows.community/systems/aiida-core/</a:t>
+            </a:r>
+          </a:p>
+          <a:p>
+            <a:pPr marL="0" indent="0" algn="l">
+              <a:spcAft>
+                <a:spcPts val="0"/>
+              </a:spcAft>
+              <a:buNone/>
+            </a:pPr>
+            <a:r>
+              <a:rPr lang="de-DE" sz="1100" dirty="0">
+                <a:solidFill>
+                  <a:srgbClr val="595959"/>
+                </a:solidFill>
+              </a:rPr>
+              <a:t>Abruf: 01.09.2026</a:t>
+            </a:r>
+          </a:p>
+        </p:txBody>
+      </p:sp>
+      <p:sp>
+        <p:nvSpPr>
+          <p:cNvPr id="20" name="Akzentlinie"/>
+          <p:cNvSpPr/>
+          <p:nvPr/>
+        </p:nvSpPr>
+        <p:spPr>
+          <a:xfrm>
+            <a:off x="914400" y="812800"/>
+            <a:ext cx="50800" cy="431800"/>
+          </a:xfrm>
+          <a:prstGeom prst="rect">
+            <a:avLst/>
+          </a:prstGeom>
+          <a:solidFill>
+            <a:srgbClr val="C1002A"/>
+          </a:solidFill>
+          <a:ln>
+            <a:noFill/>
+          </a:ln>
+        </p:spPr>
+        <p:txBody>
+          <a:bodyPr/>
+          <a:lstStyle/>
+          <a:p>
+            <a:endParaRPr lang="de-DE"/>
+          </a:p>
+        </p:txBody>
+      </p:sp>
+      <p:sp>
+        <p:nvSpPr>
+          <p:cNvPr id="40" name="Foliennummer"/>
+          <p:cNvSpPr txBox="1"/>
+          <p:nvPr/>
+        </p:nvSpPr>
+        <p:spPr>
+          <a:xfrm>
+            <a:off x="10769600" y="6197600"/>
+            <a:ext cx="508000" cy="254000"/>
+          </a:xfrm>
+          <a:prstGeom prst="rect">
+            <a:avLst/>
+          </a:prstGeom>
+          <a:noFill/>
+        </p:spPr>
+        <p:txBody>
+          <a:bodyPr wrap="square" lIns="0" tIns="0" rIns="0" bIns="0" anchor="t"/>
+          <a:lstStyle/>
+          <a:p>
+            <a:pPr algn="r">
+              <a:spcAft>
+                <a:spcPts val="0"/>
+              </a:spcAft>
+            </a:pPr>
+            <a:r>
+              <a:rPr lang="de-DE" sz="1200" dirty="0">
+                <a:solidFill>
+                  <a:srgbClr val="8C8C8C"/>
+                </a:solidFill>
+              </a:rPr>
+              <a:t>14</a:t>
+            </a:r>
+          </a:p>
+        </p:txBody>
+      </p:sp>
+    </p:spTree>
+    <p:extLst>
+      <p:ext uri="{BB962C8B-B14F-4D97-AF65-F5344CB8AC3E}">
+        <p14:creationId xmlns:p14="http://schemas.microsoft.com/office/powerpoint/2010/main" val="4237940801"/>
       </p:ext>
     </p:extLst>
   </p:cSld>

--- a/Präsentation-Kolloqium.pptx
+++ b/Präsentation-Kolloqium.pptx
@@ -5,7 +5,7 @@
     <p:sldMasterId id="2147483648" r:id="rId1"/>
   </p:sldMasterIdLst>
   <p:notesMasterIdLst>
-    <p:notesMasterId r:id="rId22"/>
+    <p:notesMasterId r:id="rId24"/>
   </p:notesMasterIdLst>
   <p:sldIdLst>
     <p:sldId id="259" r:id="rId2"/>
@@ -27,7 +27,9 @@
     <p:sldId id="331" r:id="rId18"/>
     <p:sldId id="333" r:id="rId19"/>
     <p:sldId id="335" r:id="rId20"/>
-    <p:sldId id="313" r:id="rId21"/>
+    <p:sldId id="337" r:id="rId21"/>
+    <p:sldId id="339" r:id="rId22"/>
+    <p:sldId id="313" r:id="rId23"/>
   </p:sldIdLst>
   <p:sldSz cx="12192000" cy="6858000"/>
   <p:notesSz cx="6858000" cy="9144000"/>
@@ -15842,7 +15844,7 @@
 </file>
 
 <file path=ppt/slides/slide20.xml><?xml version="1.0" encoding="utf-8"?>
-<p:sld xmlns:a="http://schemas.openxmlformats.org/drawingml/2006/main" xmlns:r="http://schemas.openxmlformats.org/officeDocument/2006/relationships" xmlns:p="http://schemas.openxmlformats.org/presentationml/2006/main" show="0">
+<p:sld xmlns:a="http://schemas.openxmlformats.org/drawingml/2006/main" xmlns:r="http://schemas.openxmlformats.org/officeDocument/2006/relationships" xmlns:p="http://schemas.openxmlformats.org/presentationml/2006/main">
   <p:cSld>
     <p:spTree>
       <p:nvGrpSpPr>
@@ -15863,6 +15865,2062 @@
           <p:cNvPr id="2" name="Titel 1">
             <a:extLst>
               <a:ext uri="{FF2B5EF4-FFF2-40B4-BE49-F238E27FC236}">
+                <a16:creationId xmlns:a16="http://schemas.microsoft.com/office/drawing/2014/main" id="{0E5E976B-FFD3-889A-ABD0-838FAB26DC54}"/>
+              </a:ext>
+            </a:extLst>
+          </p:cNvPr>
+          <p:cNvSpPr>
+            <a:spLocks noGrp="1"/>
+          </p:cNvSpPr>
+          <p:nvPr>
+            <p:ph type="title"/>
+          </p:nvPr>
+        </p:nvSpPr>
+        <p:spPr>
+          <a:xfrm>
+            <a:off x="1219200" y="812800"/>
+            <a:ext cx="10058400" cy="508000"/>
+          </a:xfrm>
+        </p:spPr>
+        <p:txBody>
+          <a:bodyPr lIns="0" tIns="0" bIns="0" anchor="ctr"/>
+          <a:lstStyle/>
+          <a:p>
+            <a:pPr algn="l"/>
+            <a:r>
+              <a:rPr lang="de-DE" sz="2600" b="1" dirty="0">
+                <a:solidFill>
+                  <a:srgbClr val="262626"/>
+                </a:solidFill>
+              </a:rPr>
+              <a:t>Antworten auf die Forschungsfragen</a:t>
+            </a:r>
+          </a:p>
+        </p:txBody>
+      </p:sp>
+      <p:sp>
+        <p:nvSpPr>
+          <p:cNvPr id="20" name="Akzentlinie"/>
+          <p:cNvSpPr/>
+          <p:nvPr/>
+        </p:nvSpPr>
+        <p:spPr>
+          <a:xfrm>
+            <a:off x="914400" y="812800"/>
+            <a:ext cx="50800" cy="431800"/>
+          </a:xfrm>
+          <a:prstGeom prst="rect">
+            <a:avLst/>
+          </a:prstGeom>
+          <a:solidFill>
+            <a:srgbClr val="C1002A"/>
+          </a:solidFill>
+          <a:ln>
+            <a:noFill/>
+          </a:ln>
+        </p:spPr>
+        <p:txBody>
+          <a:bodyPr/>
+          <a:lstStyle/>
+          <a:p>
+            <a:endParaRPr lang="de-DE"/>
+          </a:p>
+        </p:txBody>
+      </p:sp>
+      <p:sp>
+        <p:nvSpPr>
+          <p:cNvPr id="21" name="Kürzel F1"/>
+          <p:cNvSpPr txBox="1"/>
+          <p:nvPr/>
+        </p:nvSpPr>
+        <p:spPr>
+          <a:xfrm>
+            <a:off x="1219200" y="1600200"/>
+            <a:ext cx="508000" cy="330200"/>
+          </a:xfrm>
+          <a:prstGeom prst="rect">
+            <a:avLst/>
+          </a:prstGeom>
+          <a:noFill/>
+        </p:spPr>
+        <p:txBody>
+          <a:bodyPr wrap="square" lIns="0" tIns="0" rIns="0" bIns="0" anchor="t">
+            <a:noAutofit/>
+          </a:bodyPr>
+          <a:lstStyle/>
+          <a:p>
+            <a:pPr algn="l">
+              <a:spcAft>
+                <a:spcPts val="0"/>
+              </a:spcAft>
+            </a:pPr>
+            <a:r>
+              <a:rPr lang="de-DE" sz="2000" b="1" dirty="0">
+                <a:solidFill>
+                  <a:srgbClr val="C1002A"/>
+                </a:solidFill>
+              </a:rPr>
+              <a:t>F1</a:t>
+            </a:r>
+          </a:p>
+        </p:txBody>
+      </p:sp>
+      <p:sp>
+        <p:nvSpPr>
+          <p:cNvPr id="22" name="Kategorie F1"/>
+          <p:cNvSpPr txBox="1"/>
+          <p:nvPr/>
+        </p:nvSpPr>
+        <p:spPr>
+          <a:xfrm>
+            <a:off x="1778000" y="1676400"/>
+            <a:ext cx="1905000" cy="177800"/>
+          </a:xfrm>
+          <a:prstGeom prst="rect">
+            <a:avLst/>
+          </a:prstGeom>
+          <a:noFill/>
+        </p:spPr>
+        <p:txBody>
+          <a:bodyPr wrap="square" lIns="0" tIns="0" rIns="0" bIns="0" anchor="t">
+            <a:noAutofit/>
+          </a:bodyPr>
+          <a:lstStyle/>
+          <a:p>
+            <a:pPr algn="l">
+              <a:spcAft>
+                <a:spcPts val="0"/>
+              </a:spcAft>
+            </a:pPr>
+            <a:r>
+              <a:rPr lang="de-DE" sz="1000" b="1" spc="200" dirty="0">
+                <a:solidFill>
+                  <a:srgbClr val="595959"/>
+                </a:solidFill>
+              </a:rPr>
+              <a:t>MODELLIERUNG</a:t>
+            </a:r>
+          </a:p>
+        </p:txBody>
+      </p:sp>
+      <p:sp>
+        <p:nvSpPr>
+          <p:cNvPr id="23" name="Kernsatz F1"/>
+          <p:cNvSpPr txBox="1"/>
+          <p:nvPr/>
+        </p:nvSpPr>
+        <p:spPr>
+          <a:xfrm>
+            <a:off x="3810000" y="1625600"/>
+            <a:ext cx="7467600" cy="558800"/>
+          </a:xfrm>
+          <a:prstGeom prst="rect">
+            <a:avLst/>
+          </a:prstGeom>
+          <a:noFill/>
+        </p:spPr>
+        <p:txBody>
+          <a:bodyPr wrap="square" lIns="0" tIns="0" rIns="0" bIns="0" anchor="t">
+            <a:noAutofit/>
+          </a:bodyPr>
+          <a:lstStyle/>
+          <a:p>
+            <a:pPr algn="l">
+              <a:spcAft>
+                <a:spcPts val="0"/>
+              </a:spcAft>
+            </a:pPr>
+            <a:r>
+              <a:rPr lang="de-DE" sz="1400" b="1" dirty="0">
+                <a:solidFill>
+                  <a:srgbClr val="262626"/>
+                </a:solidFill>
+              </a:rPr>
+              <a:t>Alle fünf Systeme können beide Workflow-Muster abbilden, unterscheiden sich aber in der Art ihrer Modellierung.</a:t>
+            </a:r>
+          </a:p>
+        </p:txBody>
+      </p:sp>
+      <p:sp>
+        <p:nvSpPr>
+          <p:cNvPr id="24" name="Kürzel F2"/>
+          <p:cNvSpPr txBox="1"/>
+          <p:nvPr/>
+        </p:nvSpPr>
+        <p:spPr>
+          <a:xfrm>
+            <a:off x="1219200" y="2260600"/>
+            <a:ext cx="508000" cy="330200"/>
+          </a:xfrm>
+          <a:prstGeom prst="rect">
+            <a:avLst/>
+          </a:prstGeom>
+          <a:noFill/>
+        </p:spPr>
+        <p:txBody>
+          <a:bodyPr wrap="square" lIns="0" tIns="0" rIns="0" bIns="0" anchor="t">
+            <a:noAutofit/>
+          </a:bodyPr>
+          <a:lstStyle/>
+          <a:p>
+            <a:pPr algn="l">
+              <a:spcAft>
+                <a:spcPts val="0"/>
+              </a:spcAft>
+            </a:pPr>
+            <a:r>
+              <a:rPr lang="de-DE" sz="2000" b="1" dirty="0">
+                <a:solidFill>
+                  <a:srgbClr val="C1002A"/>
+                </a:solidFill>
+              </a:rPr>
+              <a:t>F2</a:t>
+            </a:r>
+          </a:p>
+        </p:txBody>
+      </p:sp>
+      <p:sp>
+        <p:nvSpPr>
+          <p:cNvPr id="25" name="Kategorie F2"/>
+          <p:cNvSpPr txBox="1"/>
+          <p:nvPr/>
+        </p:nvSpPr>
+        <p:spPr>
+          <a:xfrm>
+            <a:off x="1778000" y="2336800"/>
+            <a:ext cx="1905000" cy="177800"/>
+          </a:xfrm>
+          <a:prstGeom prst="rect">
+            <a:avLst/>
+          </a:prstGeom>
+          <a:noFill/>
+        </p:spPr>
+        <p:txBody>
+          <a:bodyPr wrap="square" lIns="0" tIns="0" rIns="0" bIns="0" anchor="t">
+            <a:noAutofit/>
+          </a:bodyPr>
+          <a:lstStyle/>
+          <a:p>
+            <a:pPr algn="l">
+              <a:spcAft>
+                <a:spcPts val="0"/>
+              </a:spcAft>
+            </a:pPr>
+            <a:r>
+              <a:rPr lang="de-DE" sz="1000" b="1" spc="200" dirty="0">
+                <a:solidFill>
+                  <a:srgbClr val="595959"/>
+                </a:solidFill>
+              </a:rPr>
+              <a:t>LAUFZEITVERHALTEN</a:t>
+            </a:r>
+          </a:p>
+        </p:txBody>
+      </p:sp>
+      <p:sp>
+        <p:nvSpPr>
+          <p:cNvPr id="26" name="Kernsatz F2"/>
+          <p:cNvSpPr txBox="1"/>
+          <p:nvPr/>
+        </p:nvSpPr>
+        <p:spPr>
+          <a:xfrm>
+            <a:off x="3810000" y="2286000"/>
+            <a:ext cx="7467600" cy="558800"/>
+          </a:xfrm>
+          <a:prstGeom prst="rect">
+            <a:avLst/>
+          </a:prstGeom>
+          <a:noFill/>
+        </p:spPr>
+        <p:txBody>
+          <a:bodyPr wrap="square" lIns="0" tIns="0" rIns="0" bIns="0" anchor="t">
+            <a:noAutofit/>
+          </a:bodyPr>
+          <a:lstStyle/>
+          <a:p>
+            <a:pPr algn="l">
+              <a:spcAft>
+                <a:spcPts val="0"/>
+              </a:spcAft>
+            </a:pPr>
+            <a:r>
+              <a:rPr lang="de-DE" sz="1400" b="1" dirty="0">
+                <a:solidFill>
+                  <a:srgbClr val="262626"/>
+                </a:solidFill>
+              </a:rPr>
+              <a:t>Trotz identischer Rechenlogik zeigen die Systeme deutliche Unterschiede in Overhead und Koordination.</a:t>
+            </a:r>
+          </a:p>
+        </p:txBody>
+      </p:sp>
+      <p:sp>
+        <p:nvSpPr>
+          <p:cNvPr id="27" name="Kürzel F3"/>
+          <p:cNvSpPr txBox="1"/>
+          <p:nvPr/>
+        </p:nvSpPr>
+        <p:spPr>
+          <a:xfrm>
+            <a:off x="1219200" y="2921000"/>
+            <a:ext cx="508000" cy="330200"/>
+          </a:xfrm>
+          <a:prstGeom prst="rect">
+            <a:avLst/>
+          </a:prstGeom>
+          <a:noFill/>
+        </p:spPr>
+        <p:txBody>
+          <a:bodyPr wrap="square" lIns="0" tIns="0" rIns="0" bIns="0" anchor="t">
+            <a:noAutofit/>
+          </a:bodyPr>
+          <a:lstStyle/>
+          <a:p>
+            <a:pPr algn="l">
+              <a:spcAft>
+                <a:spcPts val="0"/>
+              </a:spcAft>
+            </a:pPr>
+            <a:r>
+              <a:rPr lang="de-DE" sz="2000" b="1" dirty="0">
+                <a:solidFill>
+                  <a:srgbClr val="C1002A"/>
+                </a:solidFill>
+              </a:rPr>
+              <a:t>F3</a:t>
+            </a:r>
+          </a:p>
+        </p:txBody>
+      </p:sp>
+      <p:sp>
+        <p:nvSpPr>
+          <p:cNvPr id="28" name="Kategorie F3"/>
+          <p:cNvSpPr txBox="1"/>
+          <p:nvPr/>
+        </p:nvSpPr>
+        <p:spPr>
+          <a:xfrm>
+            <a:off x="1778000" y="2997200"/>
+            <a:ext cx="1905000" cy="177800"/>
+          </a:xfrm>
+          <a:prstGeom prst="rect">
+            <a:avLst/>
+          </a:prstGeom>
+          <a:noFill/>
+        </p:spPr>
+        <p:txBody>
+          <a:bodyPr wrap="square" lIns="0" tIns="0" rIns="0" bIns="0" anchor="t">
+            <a:noAutofit/>
+          </a:bodyPr>
+          <a:lstStyle/>
+          <a:p>
+            <a:pPr algn="l">
+              <a:spcAft>
+                <a:spcPts val="0"/>
+              </a:spcAft>
+            </a:pPr>
+            <a:r>
+              <a:rPr lang="de-DE" sz="1000" b="1" spc="200" dirty="0">
+                <a:solidFill>
+                  <a:srgbClr val="595959"/>
+                </a:solidFill>
+              </a:rPr>
+              <a:t>HPC-EINSATZ</a:t>
+            </a:r>
+          </a:p>
+        </p:txBody>
+      </p:sp>
+      <p:sp>
+        <p:nvSpPr>
+          <p:cNvPr id="29" name="Kernsatz F3"/>
+          <p:cNvSpPr txBox="1"/>
+          <p:nvPr/>
+        </p:nvSpPr>
+        <p:spPr>
+          <a:xfrm>
+            <a:off x="3810000" y="2946400"/>
+            <a:ext cx="7467600" cy="558800"/>
+          </a:xfrm>
+          <a:prstGeom prst="rect">
+            <a:avLst/>
+          </a:prstGeom>
+          <a:noFill/>
+        </p:spPr>
+        <p:txBody>
+          <a:bodyPr wrap="square" lIns="0" tIns="0" rIns="0" bIns="0" anchor="t">
+            <a:noAutofit/>
+          </a:bodyPr>
+          <a:lstStyle/>
+          <a:p>
+            <a:pPr algn="l">
+              <a:spcAft>
+                <a:spcPts val="0"/>
+              </a:spcAft>
+            </a:pPr>
+            <a:r>
+              <a:rPr lang="de-DE" sz="1400" b="1" dirty="0">
+                <a:solidFill>
+                  <a:srgbClr val="262626"/>
+                </a:solidFill>
+              </a:rPr>
+              <a:t>Vier Systeme ließen sich auf MOGON betreiben, </a:t>
+            </a:r>
+            <a:r>
+              <a:rPr lang="de-DE" sz="1400" b="1" dirty="0" err="1">
+                <a:solidFill>
+                  <a:srgbClr val="262626"/>
+                </a:solidFill>
+              </a:rPr>
+              <a:t>Slurm</a:t>
+            </a:r>
+            <a:r>
+              <a:rPr lang="de-DE" sz="1400" b="1" dirty="0">
+                <a:solidFill>
+                  <a:srgbClr val="262626"/>
+                </a:solidFill>
+              </a:rPr>
+              <a:t>-Integration und Ausführungsumgebung beeinflussen die Laufzeiten wesentlich.</a:t>
+            </a:r>
+          </a:p>
+        </p:txBody>
+      </p:sp>
+      <p:cxnSp>
+        <p:nvCxnSpPr>
+          <p:cNvPr id="30" name="Trennlinie F4"/>
+          <p:cNvCxnSpPr/>
+          <p:nvPr/>
+        </p:nvCxnSpPr>
+        <p:spPr>
+          <a:xfrm>
+            <a:off x="1219200" y="3657600"/>
+            <a:ext cx="10058400" cy="0"/>
+          </a:xfrm>
+          <a:prstGeom prst="line">
+            <a:avLst/>
+          </a:prstGeom>
+          <a:ln w="6350">
+            <a:solidFill>
+              <a:srgbClr val="D9D9D9"/>
+            </a:solidFill>
+          </a:ln>
+        </p:spPr>
+      </p:cxnSp>
+      <p:sp>
+        <p:nvSpPr>
+          <p:cNvPr id="31" name="Kürzel F4"/>
+          <p:cNvSpPr txBox="1"/>
+          <p:nvPr/>
+        </p:nvSpPr>
+        <p:spPr>
+          <a:xfrm>
+            <a:off x="1219200" y="3810000"/>
+            <a:ext cx="508000" cy="330200"/>
+          </a:xfrm>
+          <a:prstGeom prst="rect">
+            <a:avLst/>
+          </a:prstGeom>
+          <a:noFill/>
+        </p:spPr>
+        <p:txBody>
+          <a:bodyPr wrap="square" lIns="0" tIns="0" rIns="0" bIns="0" anchor="t">
+            <a:noAutofit/>
+          </a:bodyPr>
+          <a:lstStyle/>
+          <a:p>
+            <a:pPr algn="l">
+              <a:spcAft>
+                <a:spcPts val="0"/>
+              </a:spcAft>
+            </a:pPr>
+            <a:r>
+              <a:rPr lang="de-DE" sz="2000" b="1" dirty="0">
+                <a:solidFill>
+                  <a:srgbClr val="C1002A"/>
+                </a:solidFill>
+              </a:rPr>
+              <a:t>F4</a:t>
+            </a:r>
+          </a:p>
+        </p:txBody>
+      </p:sp>
+      <p:sp>
+        <p:nvSpPr>
+          <p:cNvPr id="32" name="Kategorie F4"/>
+          <p:cNvSpPr txBox="1"/>
+          <p:nvPr/>
+        </p:nvSpPr>
+        <p:spPr>
+          <a:xfrm>
+            <a:off x="1778000" y="3886200"/>
+            <a:ext cx="1905000" cy="177800"/>
+          </a:xfrm>
+          <a:prstGeom prst="rect">
+            <a:avLst/>
+          </a:prstGeom>
+          <a:noFill/>
+        </p:spPr>
+        <p:txBody>
+          <a:bodyPr wrap="square" lIns="0" tIns="0" rIns="0" bIns="0" anchor="t">
+            <a:noAutofit/>
+          </a:bodyPr>
+          <a:lstStyle/>
+          <a:p>
+            <a:pPr algn="l">
+              <a:spcAft>
+                <a:spcPts val="0"/>
+              </a:spcAft>
+            </a:pPr>
+            <a:r>
+              <a:rPr lang="de-DE" sz="1000" b="1" spc="200" dirty="0">
+                <a:solidFill>
+                  <a:srgbClr val="595959"/>
+                </a:solidFill>
+              </a:rPr>
+              <a:t>EIGNUNG</a:t>
+            </a:r>
+          </a:p>
+        </p:txBody>
+      </p:sp>
+      <p:sp>
+        <p:nvSpPr>
+          <p:cNvPr id="33" name="Kernsatz F4"/>
+          <p:cNvSpPr txBox="1"/>
+          <p:nvPr/>
+        </p:nvSpPr>
+        <p:spPr>
+          <a:xfrm>
+            <a:off x="3810000" y="3835400"/>
+            <a:ext cx="7467600" cy="558800"/>
+          </a:xfrm>
+          <a:prstGeom prst="rect">
+            <a:avLst/>
+          </a:prstGeom>
+          <a:noFill/>
+        </p:spPr>
+        <p:txBody>
+          <a:bodyPr wrap="square" lIns="0" tIns="0" rIns="0" bIns="0" anchor="t">
+            <a:noAutofit/>
+          </a:bodyPr>
+          <a:lstStyle/>
+          <a:p>
+            <a:pPr algn="l">
+              <a:spcAft>
+                <a:spcPts val="0"/>
+              </a:spcAft>
+            </a:pPr>
+            <a:r>
+              <a:rPr lang="de-DE" sz="1400" b="1" dirty="0">
+                <a:solidFill>
+                  <a:srgbClr val="262626"/>
+                </a:solidFill>
+              </a:rPr>
+              <a:t>Es ergibt sich keine allgemeine Rangfolge, die Eignung hängt vom jeweiligen Anwendungsfall und den priorisierten Eigenschaften ab.</a:t>
+            </a:r>
+          </a:p>
+        </p:txBody>
+      </p:sp>
+      <p:sp>
+        <p:nvSpPr>
+          <p:cNvPr id="34" name="Systeme Namen"/>
+          <p:cNvSpPr txBox="1"/>
+          <p:nvPr/>
+        </p:nvSpPr>
+        <p:spPr>
+          <a:xfrm>
+            <a:off x="3810000" y="4521200"/>
+            <a:ext cx="1270000" cy="1270000"/>
+          </a:xfrm>
+          <a:prstGeom prst="rect">
+            <a:avLst/>
+          </a:prstGeom>
+          <a:noFill/>
+        </p:spPr>
+        <p:txBody>
+          <a:bodyPr wrap="square" lIns="0" tIns="0" rIns="0" bIns="0" anchor="t">
+            <a:noAutofit/>
+          </a:bodyPr>
+          <a:lstStyle/>
+          <a:p>
+            <a:pPr algn="l">
+              <a:spcAft>
+                <a:spcPts val="300"/>
+              </a:spcAft>
+            </a:pPr>
+            <a:r>
+              <a:rPr lang="de-DE" sz="1200" b="1" dirty="0">
+                <a:solidFill>
+                  <a:srgbClr val="262626"/>
+                </a:solidFill>
+              </a:rPr>
+              <a:t>Nextflow</a:t>
+            </a:r>
+          </a:p>
+          <a:p>
+            <a:pPr algn="l">
+              <a:spcAft>
+                <a:spcPts val="300"/>
+              </a:spcAft>
+            </a:pPr>
+            <a:r>
+              <a:rPr lang="de-DE" sz="1200" b="1" dirty="0">
+                <a:solidFill>
+                  <a:srgbClr val="262626"/>
+                </a:solidFill>
+              </a:rPr>
+              <a:t>StreamFlow</a:t>
+            </a:r>
+          </a:p>
+          <a:p>
+            <a:pPr algn="l">
+              <a:spcAft>
+                <a:spcPts val="300"/>
+              </a:spcAft>
+            </a:pPr>
+            <a:r>
+              <a:rPr lang="de-DE" sz="1200" b="1" dirty="0">
+                <a:solidFill>
+                  <a:srgbClr val="262626"/>
+                </a:solidFill>
+              </a:rPr>
+              <a:t>Merlin</a:t>
+            </a:r>
+          </a:p>
+          <a:p>
+            <a:pPr algn="l">
+              <a:spcAft>
+                <a:spcPts val="300"/>
+              </a:spcAft>
+            </a:pPr>
+            <a:r>
+              <a:rPr lang="de-DE" sz="1200" b="1" dirty="0">
+                <a:solidFill>
+                  <a:srgbClr val="262626"/>
+                </a:solidFill>
+              </a:rPr>
+              <a:t>AiiDA</a:t>
+            </a:r>
+          </a:p>
+          <a:p>
+            <a:pPr algn="l">
+              <a:spcAft>
+                <a:spcPts val="300"/>
+              </a:spcAft>
+            </a:pPr>
+            <a:r>
+              <a:rPr lang="de-DE" sz="1200" b="1" dirty="0">
+                <a:solidFill>
+                  <a:srgbClr val="262626"/>
+                </a:solidFill>
+              </a:rPr>
+              <a:t>Pegasus</a:t>
+            </a:r>
+          </a:p>
+        </p:txBody>
+      </p:sp>
+      <p:sp>
+        <p:nvSpPr>
+          <p:cNvPr id="35" name="Systeme Einordnung"/>
+          <p:cNvSpPr txBox="1"/>
+          <p:nvPr/>
+        </p:nvSpPr>
+        <p:spPr>
+          <a:xfrm>
+            <a:off x="5207000" y="4521200"/>
+            <a:ext cx="6070600" cy="1270000"/>
+          </a:xfrm>
+          <a:prstGeom prst="rect">
+            <a:avLst/>
+          </a:prstGeom>
+          <a:noFill/>
+        </p:spPr>
+        <p:txBody>
+          <a:bodyPr wrap="square" lIns="0" tIns="0" rIns="0" bIns="0" anchor="t">
+            <a:noAutofit/>
+          </a:bodyPr>
+          <a:lstStyle/>
+          <a:p>
+            <a:pPr algn="l">
+              <a:spcAft>
+                <a:spcPts val="300"/>
+              </a:spcAft>
+            </a:pPr>
+            <a:r>
+              <a:rPr lang="de-DE" sz="1200" dirty="0">
+                <a:solidFill>
+                  <a:srgbClr val="595959"/>
+                </a:solidFill>
+              </a:rPr>
+              <a:t>Datenfluss · geringer Overhead · direkte Slurm-Anbindung</a:t>
+            </a:r>
+          </a:p>
+          <a:p>
+            <a:pPr algn="l">
+              <a:spcAft>
+                <a:spcPts val="300"/>
+              </a:spcAft>
+            </a:pPr>
+            <a:r>
+              <a:rPr lang="de-DE" sz="1200" dirty="0">
+                <a:solidFill>
+                  <a:srgbClr val="595959"/>
+                </a:solidFill>
+              </a:rPr>
+              <a:t>CWL · Trennung von Workflow und Ausführungsumgebung</a:t>
+            </a:r>
+          </a:p>
+          <a:p>
+            <a:pPr algn="l">
+              <a:spcAft>
+                <a:spcPts val="300"/>
+              </a:spcAft>
+            </a:pPr>
+            <a:r>
+              <a:rPr lang="de-DE" sz="1200" dirty="0">
+                <a:solidFill>
+                  <a:srgbClr val="595959"/>
+                </a:solidFill>
+              </a:rPr>
+              <a:t>Worker-Modell · mehrere Aufgaben in einer Allokation</a:t>
+            </a:r>
+          </a:p>
+          <a:p>
+            <a:pPr algn="l">
+              <a:spcAft>
+                <a:spcPts val="300"/>
+              </a:spcAft>
+            </a:pPr>
+            <a:r>
+              <a:rPr lang="de-DE" sz="1200" dirty="0">
+                <a:solidFill>
+                  <a:srgbClr val="595959"/>
+                </a:solidFill>
+              </a:rPr>
+              <a:t>dauerhafte Nachvollziehbarkeit · höherer Overhead</a:t>
+            </a:r>
+          </a:p>
+          <a:p>
+            <a:pPr algn="l">
+              <a:spcAft>
+                <a:spcPts val="300"/>
+              </a:spcAft>
+            </a:pPr>
+            <a:r>
+              <a:rPr lang="de-DE" sz="1200" dirty="0">
+                <a:solidFill>
+                  <a:srgbClr val="595959"/>
+                </a:solidFill>
+              </a:rPr>
+              <a:t>lokal sehr hoher Overhead · keine HPC-Untersuchung</a:t>
+            </a:r>
+          </a:p>
+        </p:txBody>
+      </p:sp>
+      <p:sp>
+        <p:nvSpPr>
+          <p:cNvPr id="36" name="Foliennummer"/>
+          <p:cNvSpPr txBox="1"/>
+          <p:nvPr/>
+        </p:nvSpPr>
+        <p:spPr>
+          <a:xfrm>
+            <a:off x="10769600" y="6197600"/>
+            <a:ext cx="508000" cy="254000"/>
+          </a:xfrm>
+          <a:prstGeom prst="rect">
+            <a:avLst/>
+          </a:prstGeom>
+          <a:noFill/>
+        </p:spPr>
+        <p:txBody>
+          <a:bodyPr wrap="square" lIns="0" tIns="0" rIns="0" bIns="0" anchor="t">
+            <a:noAutofit/>
+          </a:bodyPr>
+          <a:lstStyle/>
+          <a:p>
+            <a:pPr algn="r">
+              <a:spcAft>
+                <a:spcPts val="0"/>
+              </a:spcAft>
+            </a:pPr>
+            <a:r>
+              <a:rPr lang="de-DE" sz="1200" dirty="0">
+                <a:solidFill>
+                  <a:srgbClr val="8C8C8C"/>
+                </a:solidFill>
+              </a:rPr>
+              <a:t>20</a:t>
+            </a:r>
+          </a:p>
+        </p:txBody>
+      </p:sp>
+      <p:cxnSp>
+        <p:nvCxnSpPr>
+          <p:cNvPr id="37" name="Fortschritt Linie"/>
+          <p:cNvCxnSpPr/>
+          <p:nvPr/>
+        </p:nvCxnSpPr>
+        <p:spPr>
+          <a:xfrm>
+            <a:off x="1219200" y="6172200"/>
+            <a:ext cx="5080000" cy="0"/>
+          </a:xfrm>
+          <a:prstGeom prst="line">
+            <a:avLst/>
+          </a:prstGeom>
+          <a:ln w="6350">
+            <a:solidFill>
+              <a:srgbClr val="D9D9D9"/>
+            </a:solidFill>
+          </a:ln>
+        </p:spPr>
+      </p:cxnSp>
+      <p:sp>
+        <p:nvSpPr>
+          <p:cNvPr id="38" name="Marker Motivation"/>
+          <p:cNvSpPr/>
+          <p:nvPr/>
+        </p:nvSpPr>
+        <p:spPr>
+          <a:xfrm>
+            <a:off x="1187450" y="6140450"/>
+            <a:ext cx="63500" cy="63500"/>
+          </a:xfrm>
+          <a:prstGeom prst="ellipse">
+            <a:avLst/>
+          </a:prstGeom>
+          <a:solidFill>
+            <a:srgbClr val="BFBFBF"/>
+          </a:solidFill>
+          <a:ln>
+            <a:noFill/>
+          </a:ln>
+        </p:spPr>
+        <p:txBody>
+          <a:bodyPr/>
+          <a:lstStyle/>
+          <a:p>
+            <a:endParaRPr lang="de-DE"/>
+          </a:p>
+        </p:txBody>
+      </p:sp>
+      <p:sp>
+        <p:nvSpPr>
+          <p:cNvPr id="39" name="Label Motivation"/>
+          <p:cNvSpPr txBox="1"/>
+          <p:nvPr/>
+        </p:nvSpPr>
+        <p:spPr>
+          <a:xfrm>
+            <a:off x="1219200" y="6273800"/>
+            <a:ext cx="1270000" cy="203200"/>
+          </a:xfrm>
+          <a:prstGeom prst="rect">
+            <a:avLst/>
+          </a:prstGeom>
+          <a:noFill/>
+        </p:spPr>
+        <p:txBody>
+          <a:bodyPr wrap="square" lIns="0" tIns="0" rIns="0" bIns="0" anchor="t">
+            <a:noAutofit/>
+          </a:bodyPr>
+          <a:lstStyle/>
+          <a:p>
+            <a:pPr algn="l">
+              <a:spcAft>
+                <a:spcPts val="0"/>
+              </a:spcAft>
+            </a:pPr>
+            <a:r>
+              <a:rPr lang="de-DE" sz="1000" dirty="0">
+                <a:solidFill>
+                  <a:srgbClr val="A6A6A6"/>
+                </a:solidFill>
+              </a:rPr>
+              <a:t>Motivation</a:t>
+            </a:r>
+          </a:p>
+        </p:txBody>
+      </p:sp>
+      <p:sp>
+        <p:nvSpPr>
+          <p:cNvPr id="40" name="Marker Methodik"/>
+          <p:cNvSpPr/>
+          <p:nvPr/>
+        </p:nvSpPr>
+        <p:spPr>
+          <a:xfrm>
+            <a:off x="2457450" y="6140450"/>
+            <a:ext cx="63500" cy="63500"/>
+          </a:xfrm>
+          <a:prstGeom prst="ellipse">
+            <a:avLst/>
+          </a:prstGeom>
+          <a:solidFill>
+            <a:srgbClr val="BFBFBF"/>
+          </a:solidFill>
+          <a:ln>
+            <a:noFill/>
+          </a:ln>
+        </p:spPr>
+        <p:txBody>
+          <a:bodyPr/>
+          <a:lstStyle/>
+          <a:p>
+            <a:endParaRPr lang="de-DE"/>
+          </a:p>
+        </p:txBody>
+      </p:sp>
+      <p:sp>
+        <p:nvSpPr>
+          <p:cNvPr id="41" name="Label Methodik"/>
+          <p:cNvSpPr txBox="1"/>
+          <p:nvPr/>
+        </p:nvSpPr>
+        <p:spPr>
+          <a:xfrm>
+            <a:off x="1854200" y="6273800"/>
+            <a:ext cx="1270000" cy="203200"/>
+          </a:xfrm>
+          <a:prstGeom prst="rect">
+            <a:avLst/>
+          </a:prstGeom>
+          <a:noFill/>
+        </p:spPr>
+        <p:txBody>
+          <a:bodyPr wrap="square" lIns="0" tIns="0" rIns="0" bIns="0" anchor="t">
+            <a:noAutofit/>
+          </a:bodyPr>
+          <a:lstStyle/>
+          <a:p>
+            <a:pPr algn="ctr">
+              <a:spcAft>
+                <a:spcPts val="0"/>
+              </a:spcAft>
+            </a:pPr>
+            <a:r>
+              <a:rPr lang="de-DE" sz="1000" dirty="0">
+                <a:solidFill>
+                  <a:srgbClr val="A6A6A6"/>
+                </a:solidFill>
+              </a:rPr>
+              <a:t>Methodik</a:t>
+            </a:r>
+          </a:p>
+        </p:txBody>
+      </p:sp>
+      <p:sp>
+        <p:nvSpPr>
+          <p:cNvPr id="42" name="Marker Systeme"/>
+          <p:cNvSpPr/>
+          <p:nvPr/>
+        </p:nvSpPr>
+        <p:spPr>
+          <a:xfrm>
+            <a:off x="3727450" y="6140450"/>
+            <a:ext cx="63500" cy="63500"/>
+          </a:xfrm>
+          <a:prstGeom prst="ellipse">
+            <a:avLst/>
+          </a:prstGeom>
+          <a:solidFill>
+            <a:srgbClr val="BFBFBF"/>
+          </a:solidFill>
+          <a:ln>
+            <a:noFill/>
+          </a:ln>
+        </p:spPr>
+        <p:txBody>
+          <a:bodyPr/>
+          <a:lstStyle/>
+          <a:p>
+            <a:endParaRPr lang="de-DE"/>
+          </a:p>
+        </p:txBody>
+      </p:sp>
+      <p:sp>
+        <p:nvSpPr>
+          <p:cNvPr id="43" name="Label Systeme"/>
+          <p:cNvSpPr txBox="1"/>
+          <p:nvPr/>
+        </p:nvSpPr>
+        <p:spPr>
+          <a:xfrm>
+            <a:off x="3124200" y="6273800"/>
+            <a:ext cx="1270000" cy="203200"/>
+          </a:xfrm>
+          <a:prstGeom prst="rect">
+            <a:avLst/>
+          </a:prstGeom>
+          <a:noFill/>
+        </p:spPr>
+        <p:txBody>
+          <a:bodyPr wrap="square" lIns="0" tIns="0" rIns="0" bIns="0" anchor="t">
+            <a:noAutofit/>
+          </a:bodyPr>
+          <a:lstStyle/>
+          <a:p>
+            <a:pPr algn="ctr">
+              <a:spcAft>
+                <a:spcPts val="0"/>
+              </a:spcAft>
+            </a:pPr>
+            <a:r>
+              <a:rPr lang="de-DE" sz="1000" dirty="0">
+                <a:solidFill>
+                  <a:srgbClr val="A6A6A6"/>
+                </a:solidFill>
+              </a:rPr>
+              <a:t>Systeme</a:t>
+            </a:r>
+          </a:p>
+        </p:txBody>
+      </p:sp>
+      <p:sp>
+        <p:nvSpPr>
+          <p:cNvPr id="44" name="Marker Untersuchung"/>
+          <p:cNvSpPr/>
+          <p:nvPr/>
+        </p:nvSpPr>
+        <p:spPr>
+          <a:xfrm>
+            <a:off x="4997450" y="6140450"/>
+            <a:ext cx="63500" cy="63500"/>
+          </a:xfrm>
+          <a:prstGeom prst="ellipse">
+            <a:avLst/>
+          </a:prstGeom>
+          <a:solidFill>
+            <a:srgbClr val="BFBFBF"/>
+          </a:solidFill>
+          <a:ln>
+            <a:noFill/>
+          </a:ln>
+        </p:spPr>
+        <p:txBody>
+          <a:bodyPr/>
+          <a:lstStyle/>
+          <a:p>
+            <a:endParaRPr lang="de-DE"/>
+          </a:p>
+        </p:txBody>
+      </p:sp>
+      <p:sp>
+        <p:nvSpPr>
+          <p:cNvPr id="45" name="Label Untersuchung"/>
+          <p:cNvSpPr txBox="1"/>
+          <p:nvPr/>
+        </p:nvSpPr>
+        <p:spPr>
+          <a:xfrm>
+            <a:off x="4394200" y="6273800"/>
+            <a:ext cx="1270000" cy="203200"/>
+          </a:xfrm>
+          <a:prstGeom prst="rect">
+            <a:avLst/>
+          </a:prstGeom>
+          <a:noFill/>
+        </p:spPr>
+        <p:txBody>
+          <a:bodyPr wrap="square" lIns="0" tIns="0" rIns="0" bIns="0" anchor="t">
+            <a:noAutofit/>
+          </a:bodyPr>
+          <a:lstStyle/>
+          <a:p>
+            <a:pPr algn="ctr">
+              <a:spcAft>
+                <a:spcPts val="0"/>
+              </a:spcAft>
+            </a:pPr>
+            <a:r>
+              <a:rPr lang="de-DE" sz="1000" dirty="0">
+                <a:solidFill>
+                  <a:srgbClr val="A6A6A6"/>
+                </a:solidFill>
+              </a:rPr>
+              <a:t>Untersuchung</a:t>
+            </a:r>
+          </a:p>
+        </p:txBody>
+      </p:sp>
+      <p:sp>
+        <p:nvSpPr>
+          <p:cNvPr id="46" name="Marker Fazit"/>
+          <p:cNvSpPr/>
+          <p:nvPr/>
+        </p:nvSpPr>
+        <p:spPr>
+          <a:xfrm>
+            <a:off x="6254750" y="6127750"/>
+            <a:ext cx="88900" cy="88900"/>
+          </a:xfrm>
+          <a:prstGeom prst="ellipse">
+            <a:avLst/>
+          </a:prstGeom>
+          <a:solidFill>
+            <a:srgbClr val="C1002A"/>
+          </a:solidFill>
+          <a:ln>
+            <a:noFill/>
+          </a:ln>
+        </p:spPr>
+        <p:txBody>
+          <a:bodyPr/>
+          <a:lstStyle/>
+          <a:p>
+            <a:endParaRPr lang="de-DE"/>
+          </a:p>
+        </p:txBody>
+      </p:sp>
+      <p:sp>
+        <p:nvSpPr>
+          <p:cNvPr id="47" name="Label Fazit"/>
+          <p:cNvSpPr txBox="1"/>
+          <p:nvPr/>
+        </p:nvSpPr>
+        <p:spPr>
+          <a:xfrm>
+            <a:off x="5029200" y="6273800"/>
+            <a:ext cx="1270000" cy="203200"/>
+          </a:xfrm>
+          <a:prstGeom prst="rect">
+            <a:avLst/>
+          </a:prstGeom>
+          <a:noFill/>
+        </p:spPr>
+        <p:txBody>
+          <a:bodyPr wrap="square" lIns="0" tIns="0" rIns="0" bIns="0" anchor="t">
+            <a:noAutofit/>
+          </a:bodyPr>
+          <a:lstStyle/>
+          <a:p>
+            <a:pPr algn="r">
+              <a:spcAft>
+                <a:spcPts val="0"/>
+              </a:spcAft>
+            </a:pPr>
+            <a:r>
+              <a:rPr lang="de-DE" sz="1000" b="1" dirty="0">
+                <a:solidFill>
+                  <a:srgbClr val="C1002A"/>
+                </a:solidFill>
+              </a:rPr>
+              <a:t>Fazit</a:t>
+            </a:r>
+          </a:p>
+        </p:txBody>
+      </p:sp>
+    </p:spTree>
+    <p:extLst>
+      <p:ext uri="{BB962C8B-B14F-4D97-AF65-F5344CB8AC3E}">
+        <p14:creationId xmlns:p14="http://schemas.microsoft.com/office/powerpoint/2010/main" val="276242861"/>
+      </p:ext>
+    </p:extLst>
+  </p:cSld>
+  <p:clrMapOvr>
+    <a:masterClrMapping/>
+  </p:clrMapOvr>
+</p:sld>
+</file>
+
+<file path=ppt/slides/slide21.xml><?xml version="1.0" encoding="utf-8"?>
+<p:sld xmlns:a="http://schemas.openxmlformats.org/drawingml/2006/main" xmlns:r="http://schemas.openxmlformats.org/officeDocument/2006/relationships" xmlns:p="http://schemas.openxmlformats.org/presentationml/2006/main">
+  <p:cSld>
+    <p:spTree>
+      <p:nvGrpSpPr>
+        <p:cNvPr id="1" name=""/>
+        <p:cNvGrpSpPr/>
+        <p:nvPr/>
+      </p:nvGrpSpPr>
+      <p:grpSpPr>
+        <a:xfrm>
+          <a:off x="0" y="0"/>
+          <a:ext cx="0" cy="0"/>
+          <a:chOff x="0" y="0"/>
+          <a:chExt cx="0" cy="0"/>
+        </a:xfrm>
+      </p:grpSpPr>
+      <p:sp>
+        <p:nvSpPr>
+          <p:cNvPr id="2" name="Titel 1">
+            <a:extLst>
+              <a:ext uri="{FF2B5EF4-FFF2-40B4-BE49-F238E27FC236}">
+                <a16:creationId xmlns:a16="http://schemas.microsoft.com/office/drawing/2014/main" id="{44CD5F66-DCB5-B1DE-3254-430056221946}"/>
+              </a:ext>
+            </a:extLst>
+          </p:cNvPr>
+          <p:cNvSpPr>
+            <a:spLocks noGrp="1"/>
+          </p:cNvSpPr>
+          <p:nvPr>
+            <p:ph type="title"/>
+          </p:nvPr>
+        </p:nvSpPr>
+        <p:spPr>
+          <a:xfrm>
+            <a:off x="1219200" y="812800"/>
+            <a:ext cx="10058400" cy="508000"/>
+          </a:xfrm>
+        </p:spPr>
+        <p:txBody>
+          <a:bodyPr lIns="0" tIns="0" bIns="0" anchor="ctr"/>
+          <a:lstStyle/>
+          <a:p>
+            <a:pPr algn="l"/>
+            <a:r>
+              <a:rPr lang="de-DE" sz="2600" b="1" dirty="0">
+                <a:solidFill>
+                  <a:srgbClr val="262626"/>
+                </a:solidFill>
+              </a:rPr>
+              <a:t>Grenzen und Schlussfolgerung</a:t>
+            </a:r>
+          </a:p>
+        </p:txBody>
+      </p:sp>
+      <p:sp>
+        <p:nvSpPr>
+          <p:cNvPr id="20" name="Akzentlinie"/>
+          <p:cNvSpPr/>
+          <p:nvPr/>
+        </p:nvSpPr>
+        <p:spPr>
+          <a:xfrm>
+            <a:off x="914400" y="812800"/>
+            <a:ext cx="50800" cy="431800"/>
+          </a:xfrm>
+          <a:prstGeom prst="rect">
+            <a:avLst/>
+          </a:prstGeom>
+          <a:solidFill>
+            <a:srgbClr val="C1002A"/>
+          </a:solidFill>
+          <a:ln>
+            <a:noFill/>
+          </a:ln>
+        </p:spPr>
+        <p:txBody>
+          <a:bodyPr/>
+          <a:lstStyle/>
+          <a:p>
+            <a:endParaRPr lang="de-DE"/>
+          </a:p>
+        </p:txBody>
+      </p:sp>
+      <p:sp>
+        <p:nvSpPr>
+          <p:cNvPr id="21" name="Label Grenzen"/>
+          <p:cNvSpPr txBox="1"/>
+          <p:nvPr/>
+        </p:nvSpPr>
+        <p:spPr>
+          <a:xfrm>
+            <a:off x="1219200" y="1574800"/>
+            <a:ext cx="10058400" cy="177800"/>
+          </a:xfrm>
+          <a:prstGeom prst="rect">
+            <a:avLst/>
+          </a:prstGeom>
+          <a:noFill/>
+        </p:spPr>
+        <p:txBody>
+          <a:bodyPr wrap="square" lIns="0" tIns="0" rIns="0" bIns="0" anchor="t">
+            <a:noAutofit/>
+          </a:bodyPr>
+          <a:lstStyle/>
+          <a:p>
+            <a:pPr algn="l">
+              <a:spcAft>
+                <a:spcPts val="0"/>
+              </a:spcAft>
+            </a:pPr>
+            <a:r>
+              <a:rPr lang="de-DE" sz="1000" b="1" spc="200" dirty="0">
+                <a:solidFill>
+                  <a:srgbClr val="C1002A"/>
+                </a:solidFill>
+              </a:rPr>
+              <a:t>GRENZEN DER UNTERSUCHUNG</a:t>
+            </a:r>
+          </a:p>
+        </p:txBody>
+      </p:sp>
+      <p:sp>
+        <p:nvSpPr>
+          <p:cNvPr id="22" name="Grenze Zwei Workflow-Muster"/>
+          <p:cNvSpPr txBox="1"/>
+          <p:nvPr/>
+        </p:nvSpPr>
+        <p:spPr>
+          <a:xfrm>
+            <a:off x="1219200" y="1930400"/>
+            <a:ext cx="4724400" cy="558800"/>
+          </a:xfrm>
+          <a:prstGeom prst="rect">
+            <a:avLst/>
+          </a:prstGeom>
+          <a:noFill/>
+        </p:spPr>
+        <p:txBody>
+          <a:bodyPr wrap="square" lIns="0" tIns="0" rIns="0" bIns="0" anchor="t">
+            <a:noAutofit/>
+          </a:bodyPr>
+          <a:lstStyle/>
+          <a:p>
+            <a:pPr algn="l">
+              <a:spcAft>
+                <a:spcPts val="300"/>
+              </a:spcAft>
+            </a:pPr>
+            <a:r>
+              <a:rPr lang="de-DE" sz="1400" b="1" dirty="0">
+                <a:solidFill>
+                  <a:srgbClr val="262626"/>
+                </a:solidFill>
+              </a:rPr>
+              <a:t>Zwei Workflow-Muster</a:t>
+            </a:r>
+          </a:p>
+          <a:p>
+            <a:pPr algn="l">
+              <a:spcAft>
+                <a:spcPts val="0"/>
+              </a:spcAft>
+            </a:pPr>
+            <a:r>
+              <a:rPr lang="de-DE" sz="1200" dirty="0">
+                <a:solidFill>
+                  <a:srgbClr val="595959"/>
+                </a:solidFill>
+              </a:rPr>
+              <a:t>keine komplexeren oder verschachtelten Workflows</a:t>
+            </a:r>
+          </a:p>
+        </p:txBody>
+      </p:sp>
+      <p:sp>
+        <p:nvSpPr>
+          <p:cNvPr id="23" name="Grenze Kontrollierte Rechenlast"/>
+          <p:cNvSpPr txBox="1"/>
+          <p:nvPr/>
+        </p:nvSpPr>
+        <p:spPr>
+          <a:xfrm>
+            <a:off x="6451600" y="1930400"/>
+            <a:ext cx="4724400" cy="558800"/>
+          </a:xfrm>
+          <a:prstGeom prst="rect">
+            <a:avLst/>
+          </a:prstGeom>
+          <a:noFill/>
+        </p:spPr>
+        <p:txBody>
+          <a:bodyPr wrap="square" lIns="0" tIns="0" rIns="0" bIns="0" anchor="t">
+            <a:noAutofit/>
+          </a:bodyPr>
+          <a:lstStyle/>
+          <a:p>
+            <a:pPr algn="l">
+              <a:spcAft>
+                <a:spcPts val="300"/>
+              </a:spcAft>
+            </a:pPr>
+            <a:r>
+              <a:rPr lang="de-DE" sz="1400" b="1" dirty="0">
+                <a:solidFill>
+                  <a:srgbClr val="262626"/>
+                </a:solidFill>
+              </a:rPr>
+              <a:t>Kontrollierte Rechenlast</a:t>
+            </a:r>
+          </a:p>
+          <a:p>
+            <a:pPr algn="l">
+              <a:spcAft>
+                <a:spcPts val="0"/>
+              </a:spcAft>
+            </a:pPr>
+            <a:r>
+              <a:rPr lang="de-DE" sz="1200" dirty="0">
+                <a:solidFill>
+                  <a:srgbClr val="595959"/>
+                </a:solidFill>
+              </a:rPr>
+              <a:t>keine reale wissenschaftliche Anwendung</a:t>
+            </a:r>
+          </a:p>
+        </p:txBody>
+      </p:sp>
+      <p:sp>
+        <p:nvSpPr>
+          <p:cNvPr id="24" name="Grenze Begrenzte Parallelität"/>
+          <p:cNvSpPr txBox="1"/>
+          <p:nvPr/>
+        </p:nvSpPr>
+        <p:spPr>
+          <a:xfrm>
+            <a:off x="1219200" y="2692400"/>
+            <a:ext cx="4724400" cy="558800"/>
+          </a:xfrm>
+          <a:prstGeom prst="rect">
+            <a:avLst/>
+          </a:prstGeom>
+          <a:noFill/>
+        </p:spPr>
+        <p:txBody>
+          <a:bodyPr wrap="square" lIns="0" tIns="0" rIns="0" bIns="0" anchor="t">
+            <a:noAutofit/>
+          </a:bodyPr>
+          <a:lstStyle/>
+          <a:p>
+            <a:pPr algn="l">
+              <a:spcAft>
+                <a:spcPts val="300"/>
+              </a:spcAft>
+            </a:pPr>
+            <a:r>
+              <a:rPr lang="de-DE" sz="1400" b="1" dirty="0">
+                <a:solidFill>
+                  <a:srgbClr val="262626"/>
+                </a:solidFill>
+              </a:rPr>
+              <a:t>Begrenzte Parallelität</a:t>
+            </a:r>
+          </a:p>
+          <a:p>
+            <a:pPr algn="l">
+              <a:spcAft>
+                <a:spcPts val="0"/>
+              </a:spcAft>
+            </a:pPr>
+            <a:r>
+              <a:rPr lang="de-DE" sz="1200" dirty="0">
+                <a:solidFill>
+                  <a:srgbClr val="595959"/>
+                </a:solidFill>
+              </a:rPr>
+              <a:t>maximal 4 Teilstücke</a:t>
+            </a:r>
+          </a:p>
+        </p:txBody>
+      </p:sp>
+      <p:sp>
+        <p:nvSpPr>
+          <p:cNvPr id="25" name="Grenze Begrenzte Wiederholungszahl"/>
+          <p:cNvSpPr txBox="1"/>
+          <p:nvPr/>
+        </p:nvSpPr>
+        <p:spPr>
+          <a:xfrm>
+            <a:off x="6451600" y="2692400"/>
+            <a:ext cx="4724400" cy="558800"/>
+          </a:xfrm>
+          <a:prstGeom prst="rect">
+            <a:avLst/>
+          </a:prstGeom>
+          <a:noFill/>
+        </p:spPr>
+        <p:txBody>
+          <a:bodyPr wrap="square" lIns="0" tIns="0" rIns="0" bIns="0" anchor="t">
+            <a:noAutofit/>
+          </a:bodyPr>
+          <a:lstStyle/>
+          <a:p>
+            <a:pPr algn="l">
+              <a:spcAft>
+                <a:spcPts val="300"/>
+              </a:spcAft>
+            </a:pPr>
+            <a:r>
+              <a:rPr lang="de-DE" sz="1400" b="1" dirty="0">
+                <a:solidFill>
+                  <a:srgbClr val="262626"/>
+                </a:solidFill>
+              </a:rPr>
+              <a:t>Begrenzte Wiederholungszahl</a:t>
+            </a:r>
+          </a:p>
+          <a:p>
+            <a:pPr algn="l">
+              <a:spcAft>
+                <a:spcPts val="0"/>
+              </a:spcAft>
+            </a:pPr>
+            <a:r>
+              <a:rPr lang="de-DE" sz="1200" dirty="0">
+                <a:solidFill>
+                  <a:srgbClr val="595959"/>
+                </a:solidFill>
+              </a:rPr>
+              <a:t>5 Wiederholungen · long: 3</a:t>
+            </a:r>
+          </a:p>
+        </p:txBody>
+      </p:sp>
+      <p:cxnSp>
+        <p:nvCxnSpPr>
+          <p:cNvPr id="26" name="Trennlinie"/>
+          <p:cNvCxnSpPr/>
+          <p:nvPr/>
+        </p:nvCxnSpPr>
+        <p:spPr>
+          <a:xfrm>
+            <a:off x="1219200" y="3581400"/>
+            <a:ext cx="10058400" cy="0"/>
+          </a:xfrm>
+          <a:prstGeom prst="line">
+            <a:avLst/>
+          </a:prstGeom>
+          <a:ln w="6350">
+            <a:solidFill>
+              <a:srgbClr val="D9D9D9"/>
+            </a:solidFill>
+          </a:ln>
+        </p:spPr>
+      </p:cxnSp>
+      <p:sp>
+        <p:nvSpPr>
+          <p:cNvPr id="27" name="Label Schlussfolgerung"/>
+          <p:cNvSpPr txBox="1"/>
+          <p:nvPr/>
+        </p:nvSpPr>
+        <p:spPr>
+          <a:xfrm>
+            <a:off x="1219200" y="3810000"/>
+            <a:ext cx="10058400" cy="177800"/>
+          </a:xfrm>
+          <a:prstGeom prst="rect">
+            <a:avLst/>
+          </a:prstGeom>
+          <a:noFill/>
+        </p:spPr>
+        <p:txBody>
+          <a:bodyPr wrap="square" lIns="0" tIns="0" rIns="0" bIns="0" anchor="t">
+            <a:noAutofit/>
+          </a:bodyPr>
+          <a:lstStyle/>
+          <a:p>
+            <a:pPr algn="l">
+              <a:spcAft>
+                <a:spcPts val="0"/>
+              </a:spcAft>
+            </a:pPr>
+            <a:r>
+              <a:rPr lang="de-DE" sz="1000" b="1" spc="200" dirty="0">
+                <a:solidFill>
+                  <a:srgbClr val="C1002A"/>
+                </a:solidFill>
+              </a:rPr>
+              <a:t>SCHLUSSFOLGERUNG</a:t>
+            </a:r>
+          </a:p>
+        </p:txBody>
+      </p:sp>
+      <p:sp>
+        <p:nvSpPr>
+          <p:cNvPr id="28" name="Kernaussage"/>
+          <p:cNvSpPr txBox="1"/>
+          <p:nvPr/>
+        </p:nvSpPr>
+        <p:spPr>
+          <a:xfrm>
+            <a:off x="1219200" y="4140200"/>
+            <a:ext cx="10058400" cy="558800"/>
+          </a:xfrm>
+          <a:prstGeom prst="rect">
+            <a:avLst/>
+          </a:prstGeom>
+          <a:noFill/>
+        </p:spPr>
+        <p:txBody>
+          <a:bodyPr wrap="square" lIns="0" tIns="0" rIns="0" bIns="0" anchor="t">
+            <a:noAutofit/>
+          </a:bodyPr>
+          <a:lstStyle/>
+          <a:p>
+            <a:pPr algn="l">
+              <a:spcAft>
+                <a:spcPts val="0"/>
+              </a:spcAft>
+            </a:pPr>
+            <a:r>
+              <a:rPr lang="de-DE" sz="3000" b="1" dirty="0">
+                <a:solidFill>
+                  <a:srgbClr val="262626"/>
+                </a:solidFill>
+              </a:rPr>
+              <a:t>Es gibt kein allgemein bestes System.</a:t>
+            </a:r>
+          </a:p>
+        </p:txBody>
+      </p:sp>
+      <p:sp>
+        <p:nvSpPr>
+          <p:cNvPr id="29" name="Erläuterung"/>
+          <p:cNvSpPr txBox="1"/>
+          <p:nvPr/>
+        </p:nvSpPr>
+        <p:spPr>
+          <a:xfrm>
+            <a:off x="1219200" y="4876800"/>
+            <a:ext cx="8128000" cy="635000"/>
+          </a:xfrm>
+          <a:prstGeom prst="rect">
+            <a:avLst/>
+          </a:prstGeom>
+          <a:noFill/>
+        </p:spPr>
+        <p:txBody>
+          <a:bodyPr wrap="square" lIns="0" tIns="0" rIns="0" bIns="0" anchor="t">
+            <a:noAutofit/>
+          </a:bodyPr>
+          <a:lstStyle/>
+          <a:p>
+            <a:pPr algn="l">
+              <a:spcAft>
+                <a:spcPts val="0"/>
+              </a:spcAft>
+            </a:pPr>
+            <a:r>
+              <a:rPr lang="de-DE" sz="1500" dirty="0">
+                <a:solidFill>
+                  <a:srgbClr val="595959"/>
+                </a:solidFill>
+              </a:rPr>
+              <a:t>Welches System geeignet ist, hängt davon ab, welche Eigenschaften für den jeweiligen Anwendungsfall wichtig sind.</a:t>
+            </a:r>
+          </a:p>
+        </p:txBody>
+      </p:sp>
+      <p:sp>
+        <p:nvSpPr>
+          <p:cNvPr id="30" name="Foliennummer"/>
+          <p:cNvSpPr txBox="1"/>
+          <p:nvPr/>
+        </p:nvSpPr>
+        <p:spPr>
+          <a:xfrm>
+            <a:off x="10769600" y="6197600"/>
+            <a:ext cx="508000" cy="254000"/>
+          </a:xfrm>
+          <a:prstGeom prst="rect">
+            <a:avLst/>
+          </a:prstGeom>
+          <a:noFill/>
+        </p:spPr>
+        <p:txBody>
+          <a:bodyPr wrap="square" lIns="0" tIns="0" rIns="0" bIns="0" anchor="t">
+            <a:noAutofit/>
+          </a:bodyPr>
+          <a:lstStyle/>
+          <a:p>
+            <a:pPr algn="r">
+              <a:spcAft>
+                <a:spcPts val="0"/>
+              </a:spcAft>
+            </a:pPr>
+            <a:r>
+              <a:rPr lang="de-DE" sz="1200" dirty="0">
+                <a:solidFill>
+                  <a:srgbClr val="8C8C8C"/>
+                </a:solidFill>
+              </a:rPr>
+              <a:t>21</a:t>
+            </a:r>
+          </a:p>
+        </p:txBody>
+      </p:sp>
+      <p:cxnSp>
+        <p:nvCxnSpPr>
+          <p:cNvPr id="31" name="Fortschritt Linie"/>
+          <p:cNvCxnSpPr/>
+          <p:nvPr/>
+        </p:nvCxnSpPr>
+        <p:spPr>
+          <a:xfrm>
+            <a:off x="1219200" y="6172200"/>
+            <a:ext cx="5080000" cy="0"/>
+          </a:xfrm>
+          <a:prstGeom prst="line">
+            <a:avLst/>
+          </a:prstGeom>
+          <a:ln w="6350">
+            <a:solidFill>
+              <a:srgbClr val="D9D9D9"/>
+            </a:solidFill>
+          </a:ln>
+        </p:spPr>
+      </p:cxnSp>
+      <p:sp>
+        <p:nvSpPr>
+          <p:cNvPr id="32" name="Marker Motivation"/>
+          <p:cNvSpPr/>
+          <p:nvPr/>
+        </p:nvSpPr>
+        <p:spPr>
+          <a:xfrm>
+            <a:off x="1187450" y="6140450"/>
+            <a:ext cx="63500" cy="63500"/>
+          </a:xfrm>
+          <a:prstGeom prst="ellipse">
+            <a:avLst/>
+          </a:prstGeom>
+          <a:solidFill>
+            <a:srgbClr val="BFBFBF"/>
+          </a:solidFill>
+          <a:ln>
+            <a:noFill/>
+          </a:ln>
+        </p:spPr>
+        <p:txBody>
+          <a:bodyPr/>
+          <a:lstStyle/>
+          <a:p>
+            <a:endParaRPr lang="de-DE"/>
+          </a:p>
+        </p:txBody>
+      </p:sp>
+      <p:sp>
+        <p:nvSpPr>
+          <p:cNvPr id="33" name="Label Motivation"/>
+          <p:cNvSpPr txBox="1"/>
+          <p:nvPr/>
+        </p:nvSpPr>
+        <p:spPr>
+          <a:xfrm>
+            <a:off x="1219200" y="6273800"/>
+            <a:ext cx="1270000" cy="203200"/>
+          </a:xfrm>
+          <a:prstGeom prst="rect">
+            <a:avLst/>
+          </a:prstGeom>
+          <a:noFill/>
+        </p:spPr>
+        <p:txBody>
+          <a:bodyPr wrap="square" lIns="0" tIns="0" rIns="0" bIns="0" anchor="t">
+            <a:noAutofit/>
+          </a:bodyPr>
+          <a:lstStyle/>
+          <a:p>
+            <a:pPr algn="l">
+              <a:spcAft>
+                <a:spcPts val="0"/>
+              </a:spcAft>
+            </a:pPr>
+            <a:r>
+              <a:rPr lang="de-DE" sz="1000" dirty="0">
+                <a:solidFill>
+                  <a:srgbClr val="A6A6A6"/>
+                </a:solidFill>
+              </a:rPr>
+              <a:t>Motivation</a:t>
+            </a:r>
+          </a:p>
+        </p:txBody>
+      </p:sp>
+      <p:sp>
+        <p:nvSpPr>
+          <p:cNvPr id="34" name="Marker Methodik"/>
+          <p:cNvSpPr/>
+          <p:nvPr/>
+        </p:nvSpPr>
+        <p:spPr>
+          <a:xfrm>
+            <a:off x="2457450" y="6140450"/>
+            <a:ext cx="63500" cy="63500"/>
+          </a:xfrm>
+          <a:prstGeom prst="ellipse">
+            <a:avLst/>
+          </a:prstGeom>
+          <a:solidFill>
+            <a:srgbClr val="BFBFBF"/>
+          </a:solidFill>
+          <a:ln>
+            <a:noFill/>
+          </a:ln>
+        </p:spPr>
+        <p:txBody>
+          <a:bodyPr/>
+          <a:lstStyle/>
+          <a:p>
+            <a:endParaRPr lang="de-DE"/>
+          </a:p>
+        </p:txBody>
+      </p:sp>
+      <p:sp>
+        <p:nvSpPr>
+          <p:cNvPr id="35" name="Label Methodik"/>
+          <p:cNvSpPr txBox="1"/>
+          <p:nvPr/>
+        </p:nvSpPr>
+        <p:spPr>
+          <a:xfrm>
+            <a:off x="1854200" y="6273800"/>
+            <a:ext cx="1270000" cy="203200"/>
+          </a:xfrm>
+          <a:prstGeom prst="rect">
+            <a:avLst/>
+          </a:prstGeom>
+          <a:noFill/>
+        </p:spPr>
+        <p:txBody>
+          <a:bodyPr wrap="square" lIns="0" tIns="0" rIns="0" bIns="0" anchor="t">
+            <a:noAutofit/>
+          </a:bodyPr>
+          <a:lstStyle/>
+          <a:p>
+            <a:pPr algn="ctr">
+              <a:spcAft>
+                <a:spcPts val="0"/>
+              </a:spcAft>
+            </a:pPr>
+            <a:r>
+              <a:rPr lang="de-DE" sz="1000" dirty="0">
+                <a:solidFill>
+                  <a:srgbClr val="A6A6A6"/>
+                </a:solidFill>
+              </a:rPr>
+              <a:t>Methodik</a:t>
+            </a:r>
+          </a:p>
+        </p:txBody>
+      </p:sp>
+      <p:sp>
+        <p:nvSpPr>
+          <p:cNvPr id="36" name="Marker Systeme"/>
+          <p:cNvSpPr/>
+          <p:nvPr/>
+        </p:nvSpPr>
+        <p:spPr>
+          <a:xfrm>
+            <a:off x="3727450" y="6140450"/>
+            <a:ext cx="63500" cy="63500"/>
+          </a:xfrm>
+          <a:prstGeom prst="ellipse">
+            <a:avLst/>
+          </a:prstGeom>
+          <a:solidFill>
+            <a:srgbClr val="BFBFBF"/>
+          </a:solidFill>
+          <a:ln>
+            <a:noFill/>
+          </a:ln>
+        </p:spPr>
+        <p:txBody>
+          <a:bodyPr/>
+          <a:lstStyle/>
+          <a:p>
+            <a:endParaRPr lang="de-DE"/>
+          </a:p>
+        </p:txBody>
+      </p:sp>
+      <p:sp>
+        <p:nvSpPr>
+          <p:cNvPr id="37" name="Label Systeme"/>
+          <p:cNvSpPr txBox="1"/>
+          <p:nvPr/>
+        </p:nvSpPr>
+        <p:spPr>
+          <a:xfrm>
+            <a:off x="3124200" y="6273800"/>
+            <a:ext cx="1270000" cy="203200"/>
+          </a:xfrm>
+          <a:prstGeom prst="rect">
+            <a:avLst/>
+          </a:prstGeom>
+          <a:noFill/>
+        </p:spPr>
+        <p:txBody>
+          <a:bodyPr wrap="square" lIns="0" tIns="0" rIns="0" bIns="0" anchor="t">
+            <a:noAutofit/>
+          </a:bodyPr>
+          <a:lstStyle/>
+          <a:p>
+            <a:pPr algn="ctr">
+              <a:spcAft>
+                <a:spcPts val="0"/>
+              </a:spcAft>
+            </a:pPr>
+            <a:r>
+              <a:rPr lang="de-DE" sz="1000" dirty="0">
+                <a:solidFill>
+                  <a:srgbClr val="A6A6A6"/>
+                </a:solidFill>
+              </a:rPr>
+              <a:t>Systeme</a:t>
+            </a:r>
+          </a:p>
+        </p:txBody>
+      </p:sp>
+      <p:sp>
+        <p:nvSpPr>
+          <p:cNvPr id="38" name="Marker Untersuchung"/>
+          <p:cNvSpPr/>
+          <p:nvPr/>
+        </p:nvSpPr>
+        <p:spPr>
+          <a:xfrm>
+            <a:off x="4997450" y="6140450"/>
+            <a:ext cx="63500" cy="63500"/>
+          </a:xfrm>
+          <a:prstGeom prst="ellipse">
+            <a:avLst/>
+          </a:prstGeom>
+          <a:solidFill>
+            <a:srgbClr val="BFBFBF"/>
+          </a:solidFill>
+          <a:ln>
+            <a:noFill/>
+          </a:ln>
+        </p:spPr>
+        <p:txBody>
+          <a:bodyPr/>
+          <a:lstStyle/>
+          <a:p>
+            <a:endParaRPr lang="de-DE"/>
+          </a:p>
+        </p:txBody>
+      </p:sp>
+      <p:sp>
+        <p:nvSpPr>
+          <p:cNvPr id="39" name="Label Untersuchung"/>
+          <p:cNvSpPr txBox="1"/>
+          <p:nvPr/>
+        </p:nvSpPr>
+        <p:spPr>
+          <a:xfrm>
+            <a:off x="4394200" y="6273800"/>
+            <a:ext cx="1270000" cy="203200"/>
+          </a:xfrm>
+          <a:prstGeom prst="rect">
+            <a:avLst/>
+          </a:prstGeom>
+          <a:noFill/>
+        </p:spPr>
+        <p:txBody>
+          <a:bodyPr wrap="square" lIns="0" tIns="0" rIns="0" bIns="0" anchor="t">
+            <a:noAutofit/>
+          </a:bodyPr>
+          <a:lstStyle/>
+          <a:p>
+            <a:pPr algn="ctr">
+              <a:spcAft>
+                <a:spcPts val="0"/>
+              </a:spcAft>
+            </a:pPr>
+            <a:r>
+              <a:rPr lang="de-DE" sz="1000" dirty="0">
+                <a:solidFill>
+                  <a:srgbClr val="A6A6A6"/>
+                </a:solidFill>
+              </a:rPr>
+              <a:t>Untersuchung</a:t>
+            </a:r>
+          </a:p>
+        </p:txBody>
+      </p:sp>
+      <p:sp>
+        <p:nvSpPr>
+          <p:cNvPr id="40" name="Marker Fazit"/>
+          <p:cNvSpPr/>
+          <p:nvPr/>
+        </p:nvSpPr>
+        <p:spPr>
+          <a:xfrm>
+            <a:off x="6254750" y="6127750"/>
+            <a:ext cx="88900" cy="88900"/>
+          </a:xfrm>
+          <a:prstGeom prst="ellipse">
+            <a:avLst/>
+          </a:prstGeom>
+          <a:solidFill>
+            <a:srgbClr val="C1002A"/>
+          </a:solidFill>
+          <a:ln>
+            <a:noFill/>
+          </a:ln>
+        </p:spPr>
+        <p:txBody>
+          <a:bodyPr/>
+          <a:lstStyle/>
+          <a:p>
+            <a:endParaRPr lang="de-DE"/>
+          </a:p>
+        </p:txBody>
+      </p:sp>
+      <p:sp>
+        <p:nvSpPr>
+          <p:cNvPr id="41" name="Label Fazit"/>
+          <p:cNvSpPr txBox="1"/>
+          <p:nvPr/>
+        </p:nvSpPr>
+        <p:spPr>
+          <a:xfrm>
+            <a:off x="5029200" y="6273800"/>
+            <a:ext cx="1270000" cy="203200"/>
+          </a:xfrm>
+          <a:prstGeom prst="rect">
+            <a:avLst/>
+          </a:prstGeom>
+          <a:noFill/>
+        </p:spPr>
+        <p:txBody>
+          <a:bodyPr wrap="square" lIns="0" tIns="0" rIns="0" bIns="0" anchor="t">
+            <a:noAutofit/>
+          </a:bodyPr>
+          <a:lstStyle/>
+          <a:p>
+            <a:pPr algn="r">
+              <a:spcAft>
+                <a:spcPts val="0"/>
+              </a:spcAft>
+            </a:pPr>
+            <a:r>
+              <a:rPr lang="de-DE" sz="1000" b="1" dirty="0">
+                <a:solidFill>
+                  <a:srgbClr val="C1002A"/>
+                </a:solidFill>
+              </a:rPr>
+              <a:t>Fazit</a:t>
+            </a:r>
+          </a:p>
+        </p:txBody>
+      </p:sp>
+    </p:spTree>
+    <p:extLst>
+      <p:ext uri="{BB962C8B-B14F-4D97-AF65-F5344CB8AC3E}">
+        <p14:creationId xmlns:p14="http://schemas.microsoft.com/office/powerpoint/2010/main" val="1983417661"/>
+      </p:ext>
+    </p:extLst>
+  </p:cSld>
+  <p:clrMapOvr>
+    <a:masterClrMapping/>
+  </p:clrMapOvr>
+</p:sld>
+</file>
+
+<file path=ppt/slides/slide22.xml><?xml version="1.0" encoding="utf-8"?>
+<p:sld xmlns:a="http://schemas.openxmlformats.org/drawingml/2006/main" xmlns:r="http://schemas.openxmlformats.org/officeDocument/2006/relationships" xmlns:p="http://schemas.openxmlformats.org/presentationml/2006/main">
+  <p:cSld>
+    <p:spTree>
+      <p:nvGrpSpPr>
+        <p:cNvPr id="1" name=""/>
+        <p:cNvGrpSpPr/>
+        <p:nvPr/>
+      </p:nvGrpSpPr>
+      <p:grpSpPr>
+        <a:xfrm>
+          <a:off x="0" y="0"/>
+          <a:ext cx="0" cy="0"/>
+          <a:chOff x="0" y="0"/>
+          <a:chExt cx="0" cy="0"/>
+        </a:xfrm>
+      </p:grpSpPr>
+      <p:sp>
+        <p:nvSpPr>
+          <p:cNvPr id="2" name="Titel 1">
+            <a:extLst>
+              <a:ext uri="{FF2B5EF4-FFF2-40B4-BE49-F238E27FC236}">
                 <a16:creationId xmlns:a16="http://schemas.microsoft.com/office/drawing/2014/main" id="{AA3E5E2F-3F12-D116-7CE7-D6ECFF7D2853}"/>
               </a:ext>
             </a:extLst>
@@ -16143,7 +18201,7 @@
                   <a:srgbClr val="8C8C8C"/>
                 </a:solidFill>
               </a:rPr>
-              <a:t>14</a:t>
+              <a:t>22</a:t>
             </a:r>
           </a:p>
         </p:txBody>

--- a/Präsentation-Kolloqium.pptx
+++ b/Präsentation-Kolloqium.pptx
@@ -28,7 +28,7 @@
     <p:sldId id="333" r:id="rId19"/>
     <p:sldId id="335" r:id="rId20"/>
     <p:sldId id="337" r:id="rId21"/>
-    <p:sldId id="339" r:id="rId22"/>
+    <p:sldId id="340" r:id="rId22"/>
     <p:sldId id="313" r:id="rId23"/>
   </p:sldIdLst>
   <p:sldSz cx="12192000" cy="6858000"/>
@@ -639,6 +639,90 @@
     <p:extLst>
       <p:ext uri="{BB962C8B-B14F-4D97-AF65-F5344CB8AC3E}">
         <p14:creationId xmlns:p14="http://schemas.microsoft.com/office/powerpoint/2010/main" val="2622941822"/>
+      </p:ext>
+    </p:extLst>
+  </p:cSld>
+  <p:clrMapOvr>
+    <a:masterClrMapping/>
+  </p:clrMapOvr>
+</p:notes>
+</file>
+
+<file path=ppt/notesSlides/notesSlide3.xml><?xml version="1.0" encoding="utf-8"?>
+<p:notes xmlns:a="http://schemas.openxmlformats.org/drawingml/2006/main" xmlns:r="http://schemas.openxmlformats.org/officeDocument/2006/relationships" xmlns:p="http://schemas.openxmlformats.org/presentationml/2006/main">
+  <p:cSld>
+    <p:spTree>
+      <p:nvGrpSpPr>
+        <p:cNvPr id="1" name=""/>
+        <p:cNvGrpSpPr/>
+        <p:nvPr/>
+      </p:nvGrpSpPr>
+      <p:grpSpPr>
+        <a:xfrm>
+          <a:off x="0" y="0"/>
+          <a:ext cx="0" cy="0"/>
+          <a:chOff x="0" y="0"/>
+          <a:chExt cx="0" cy="0"/>
+        </a:xfrm>
+      </p:grpSpPr>
+      <p:sp>
+        <p:nvSpPr>
+          <p:cNvPr id="2" name="Folienbildplatzhalter 1"/>
+          <p:cNvSpPr>
+            <a:spLocks noGrp="1" noRot="1" noChangeAspect="1"/>
+          </p:cNvSpPr>
+          <p:nvPr>
+            <p:ph type="sldImg"/>
+          </p:nvPr>
+        </p:nvSpPr>
+        <p:spPr/>
+      </p:sp>
+      <p:sp>
+        <p:nvSpPr>
+          <p:cNvPr id="3" name="Notizenplatzhalter 2"/>
+          <p:cNvSpPr>
+            <a:spLocks noGrp="1"/>
+          </p:cNvSpPr>
+          <p:nvPr>
+            <p:ph type="body" idx="1"/>
+          </p:nvPr>
+        </p:nvSpPr>
+        <p:spPr/>
+        <p:txBody>
+          <a:bodyPr/>
+          <a:lstStyle/>
+          <a:p>
+            <a:endParaRPr lang="de-DE" dirty="0"/>
+          </a:p>
+        </p:txBody>
+      </p:sp>
+      <p:sp>
+        <p:nvSpPr>
+          <p:cNvPr id="4" name="Foliennummernplatzhalter 3"/>
+          <p:cNvSpPr>
+            <a:spLocks noGrp="1"/>
+          </p:cNvSpPr>
+          <p:nvPr>
+            <p:ph type="sldNum" sz="quarter" idx="5"/>
+          </p:nvPr>
+        </p:nvSpPr>
+        <p:spPr/>
+        <p:txBody>
+          <a:bodyPr/>
+          <a:lstStyle/>
+          <a:p>
+            <a:fld id="{2654616F-5B70-3840-955D-6DB355250DC4}" type="slidenum">
+              <a:rPr lang="de-DE" smtClean="0"/>
+              <a:t>21</a:t>
+            </a:fld>
+            <a:endParaRPr lang="de-DE"/>
+          </a:p>
+        </p:txBody>
+      </p:sp>
+    </p:spTree>
+    <p:extLst>
+      <p:ext uri="{BB962C8B-B14F-4D97-AF65-F5344CB8AC3E}">
+        <p14:creationId xmlns:p14="http://schemas.microsoft.com/office/powerpoint/2010/main" val="3675918316"/>
       </p:ext>
     </p:extLst>
   </p:cSld>
@@ -17424,8 +17508,164 @@
         </p:nvSpPr>
         <p:spPr>
           <a:xfrm>
-            <a:off x="1219200" y="4140200"/>
-            <a:ext cx="10058400" cy="558800"/>
+            <a:off x="1219200" y="4114800"/>
+            <a:ext cx="10058400" cy="355600"/>
+          </a:xfrm>
+          <a:prstGeom prst="rect">
+            <a:avLst/>
+          </a:prstGeom>
+          <a:noFill/>
+        </p:spPr>
+        <p:txBody>
+          <a:bodyPr wrap="square" lIns="0" tIns="0" rIns="0" bIns="0" anchor="t">
+            <a:noAutofit/>
+          </a:bodyPr>
+          <a:lstStyle/>
+          <a:p>
+            <a:pPr algn="l"/>
+            <a:r>
+              <a:rPr lang="de-DE" sz="2000" b="1" dirty="0">
+                <a:solidFill>
+                  <a:srgbClr val="262626"/>
+                </a:solidFill>
+              </a:rPr>
+              <a:t>Es gibt kein allgemein bestes System.</a:t>
+            </a:r>
+          </a:p>
+        </p:txBody>
+      </p:sp>
+      <p:sp>
+        <p:nvSpPr>
+          <p:cNvPr id="29" name="Erläuterung"/>
+          <p:cNvSpPr txBox="1"/>
+          <p:nvPr/>
+        </p:nvSpPr>
+        <p:spPr>
+          <a:xfrm>
+            <a:off x="1219200" y="4546600"/>
+            <a:ext cx="8890000" cy="254000"/>
+          </a:xfrm>
+          <a:prstGeom prst="rect">
+            <a:avLst/>
+          </a:prstGeom>
+          <a:noFill/>
+        </p:spPr>
+        <p:txBody>
+          <a:bodyPr wrap="square" lIns="0" tIns="0" rIns="0" bIns="0" anchor="t">
+            <a:noAutofit/>
+          </a:bodyPr>
+          <a:lstStyle/>
+          <a:p>
+            <a:pPr algn="l"/>
+            <a:r>
+              <a:rPr lang="de-DE" sz="1300" dirty="0">
+                <a:solidFill>
+                  <a:srgbClr val="595959"/>
+                </a:solidFill>
+              </a:rPr>
+              <a:t>Welches System geeignet ist, hängt davon ab, welche Eigenschaften für den jeweiligen Anwendungsfall wichtig sind.</a:t>
+            </a:r>
+          </a:p>
+        </p:txBody>
+      </p:sp>
+      <p:sp>
+        <p:nvSpPr>
+          <p:cNvPr id="30" name="Foliennummer"/>
+          <p:cNvSpPr txBox="1"/>
+          <p:nvPr/>
+        </p:nvSpPr>
+        <p:spPr>
+          <a:xfrm>
+            <a:off x="10769600" y="6197600"/>
+            <a:ext cx="508000" cy="254000"/>
+          </a:xfrm>
+          <a:prstGeom prst="rect">
+            <a:avLst/>
+          </a:prstGeom>
+          <a:noFill/>
+        </p:spPr>
+        <p:txBody>
+          <a:bodyPr wrap="square" lIns="0" tIns="0" rIns="0" bIns="0" anchor="t">
+            <a:noAutofit/>
+          </a:bodyPr>
+          <a:lstStyle/>
+          <a:p>
+            <a:pPr algn="r">
+              <a:spcAft>
+                <a:spcPts val="0"/>
+              </a:spcAft>
+            </a:pPr>
+            <a:r>
+              <a:rPr lang="de-DE" sz="1200" dirty="0">
+                <a:solidFill>
+                  <a:srgbClr val="8C8C8C"/>
+                </a:solidFill>
+              </a:rPr>
+              <a:t>21</a:t>
+            </a:r>
+          </a:p>
+        </p:txBody>
+      </p:sp>
+      <p:cxnSp>
+        <p:nvCxnSpPr>
+          <p:cNvPr id="31" name="Fortschritt Linie"/>
+          <p:cNvCxnSpPr/>
+          <p:nvPr/>
+        </p:nvCxnSpPr>
+        <p:spPr>
+          <a:xfrm>
+            <a:off x="1219200" y="6172200"/>
+            <a:ext cx="5080000" cy="0"/>
+          </a:xfrm>
+          <a:prstGeom prst="line">
+            <a:avLst/>
+          </a:prstGeom>
+          <a:ln w="6350">
+            <a:solidFill>
+              <a:srgbClr val="D9D9D9"/>
+            </a:solidFill>
+          </a:ln>
+        </p:spPr>
+      </p:cxnSp>
+      <p:sp>
+        <p:nvSpPr>
+          <p:cNvPr id="32" name="Marker Motivation"/>
+          <p:cNvSpPr/>
+          <p:nvPr/>
+        </p:nvSpPr>
+        <p:spPr>
+          <a:xfrm>
+            <a:off x="1187450" y="6140450"/>
+            <a:ext cx="63500" cy="63500"/>
+          </a:xfrm>
+          <a:prstGeom prst="ellipse">
+            <a:avLst/>
+          </a:prstGeom>
+          <a:solidFill>
+            <a:srgbClr val="BFBFBF"/>
+          </a:solidFill>
+          <a:ln>
+            <a:noFill/>
+          </a:ln>
+        </p:spPr>
+        <p:txBody>
+          <a:bodyPr/>
+          <a:lstStyle/>
+          <a:p>
+            <a:endParaRPr lang="de-DE"/>
+          </a:p>
+        </p:txBody>
+      </p:sp>
+      <p:sp>
+        <p:nvSpPr>
+          <p:cNvPr id="33" name="Label Motivation"/>
+          <p:cNvSpPr txBox="1"/>
+          <p:nvPr/>
+        </p:nvSpPr>
+        <p:spPr>
+          <a:xfrm>
+            <a:off x="1219200" y="6273800"/>
+            <a:ext cx="1270000" cy="203200"/>
           </a:xfrm>
           <a:prstGeom prst="rect">
             <a:avLst/>
@@ -17444,26 +17684,55 @@
               </a:spcAft>
             </a:pPr>
             <a:r>
-              <a:rPr lang="de-DE" sz="3000" b="1" dirty="0">
-                <a:solidFill>
-                  <a:srgbClr val="262626"/>
-                </a:solidFill>
-              </a:rPr>
-              <a:t>Es gibt kein allgemein bestes System.</a:t>
-            </a:r>
-          </a:p>
-        </p:txBody>
-      </p:sp>
-      <p:sp>
-        <p:nvSpPr>
-          <p:cNvPr id="29" name="Erläuterung"/>
-          <p:cNvSpPr txBox="1"/>
-          <p:nvPr/>
-        </p:nvSpPr>
-        <p:spPr>
-          <a:xfrm>
-            <a:off x="1219200" y="4876800"/>
-            <a:ext cx="8128000" cy="635000"/>
+              <a:rPr lang="de-DE" sz="1000" dirty="0">
+                <a:solidFill>
+                  <a:srgbClr val="A6A6A6"/>
+                </a:solidFill>
+              </a:rPr>
+              <a:t>Motivation</a:t>
+            </a:r>
+          </a:p>
+        </p:txBody>
+      </p:sp>
+      <p:sp>
+        <p:nvSpPr>
+          <p:cNvPr id="34" name="Marker Methodik"/>
+          <p:cNvSpPr/>
+          <p:nvPr/>
+        </p:nvSpPr>
+        <p:spPr>
+          <a:xfrm>
+            <a:off x="2457450" y="6140450"/>
+            <a:ext cx="63500" cy="63500"/>
+          </a:xfrm>
+          <a:prstGeom prst="ellipse">
+            <a:avLst/>
+          </a:prstGeom>
+          <a:solidFill>
+            <a:srgbClr val="BFBFBF"/>
+          </a:solidFill>
+          <a:ln>
+            <a:noFill/>
+          </a:ln>
+        </p:spPr>
+        <p:txBody>
+          <a:bodyPr/>
+          <a:lstStyle/>
+          <a:p>
+            <a:endParaRPr lang="de-DE"/>
+          </a:p>
+        </p:txBody>
+      </p:sp>
+      <p:sp>
+        <p:nvSpPr>
+          <p:cNvPr id="35" name="Label Methodik"/>
+          <p:cNvSpPr txBox="1"/>
+          <p:nvPr/>
+        </p:nvSpPr>
+        <p:spPr>
+          <a:xfrm>
+            <a:off x="1854200" y="6273800"/>
+            <a:ext cx="1270000" cy="203200"/>
           </a:xfrm>
           <a:prstGeom prst="rect">
             <a:avLst/>
@@ -17476,32 +17745,195 @@
           </a:bodyPr>
           <a:lstStyle/>
           <a:p>
-            <a:pPr algn="l">
+            <a:pPr algn="ctr">
               <a:spcAft>
                 <a:spcPts val="0"/>
               </a:spcAft>
             </a:pPr>
             <a:r>
-              <a:rPr lang="de-DE" sz="1500" dirty="0">
-                <a:solidFill>
-                  <a:srgbClr val="595959"/>
-                </a:solidFill>
-              </a:rPr>
-              <a:t>Welches System geeignet ist, hängt davon ab, welche Eigenschaften für den jeweiligen Anwendungsfall wichtig sind.</a:t>
-            </a:r>
-          </a:p>
-        </p:txBody>
-      </p:sp>
-      <p:sp>
-        <p:nvSpPr>
-          <p:cNvPr id="30" name="Foliennummer"/>
-          <p:cNvSpPr txBox="1"/>
-          <p:nvPr/>
-        </p:nvSpPr>
-        <p:spPr>
-          <a:xfrm>
-            <a:off x="10769600" y="6197600"/>
-            <a:ext cx="508000" cy="254000"/>
+              <a:rPr lang="de-DE" sz="1000" dirty="0">
+                <a:solidFill>
+                  <a:srgbClr val="A6A6A6"/>
+                </a:solidFill>
+              </a:rPr>
+              <a:t>Methodik</a:t>
+            </a:r>
+          </a:p>
+        </p:txBody>
+      </p:sp>
+      <p:sp>
+        <p:nvSpPr>
+          <p:cNvPr id="36" name="Marker Systeme"/>
+          <p:cNvSpPr/>
+          <p:nvPr/>
+        </p:nvSpPr>
+        <p:spPr>
+          <a:xfrm>
+            <a:off x="3727450" y="6140450"/>
+            <a:ext cx="63500" cy="63500"/>
+          </a:xfrm>
+          <a:prstGeom prst="ellipse">
+            <a:avLst/>
+          </a:prstGeom>
+          <a:solidFill>
+            <a:srgbClr val="BFBFBF"/>
+          </a:solidFill>
+          <a:ln>
+            <a:noFill/>
+          </a:ln>
+        </p:spPr>
+        <p:txBody>
+          <a:bodyPr/>
+          <a:lstStyle/>
+          <a:p>
+            <a:endParaRPr lang="de-DE"/>
+          </a:p>
+        </p:txBody>
+      </p:sp>
+      <p:sp>
+        <p:nvSpPr>
+          <p:cNvPr id="37" name="Label Systeme"/>
+          <p:cNvSpPr txBox="1"/>
+          <p:nvPr/>
+        </p:nvSpPr>
+        <p:spPr>
+          <a:xfrm>
+            <a:off x="3124200" y="6273800"/>
+            <a:ext cx="1270000" cy="203200"/>
+          </a:xfrm>
+          <a:prstGeom prst="rect">
+            <a:avLst/>
+          </a:prstGeom>
+          <a:noFill/>
+        </p:spPr>
+        <p:txBody>
+          <a:bodyPr wrap="square" lIns="0" tIns="0" rIns="0" bIns="0" anchor="t">
+            <a:noAutofit/>
+          </a:bodyPr>
+          <a:lstStyle/>
+          <a:p>
+            <a:pPr algn="ctr">
+              <a:spcAft>
+                <a:spcPts val="0"/>
+              </a:spcAft>
+            </a:pPr>
+            <a:r>
+              <a:rPr lang="de-DE" sz="1000" dirty="0">
+                <a:solidFill>
+                  <a:srgbClr val="A6A6A6"/>
+                </a:solidFill>
+              </a:rPr>
+              <a:t>Systeme</a:t>
+            </a:r>
+          </a:p>
+        </p:txBody>
+      </p:sp>
+      <p:sp>
+        <p:nvSpPr>
+          <p:cNvPr id="38" name="Marker Untersuchung"/>
+          <p:cNvSpPr/>
+          <p:nvPr/>
+        </p:nvSpPr>
+        <p:spPr>
+          <a:xfrm>
+            <a:off x="4997450" y="6140450"/>
+            <a:ext cx="63500" cy="63500"/>
+          </a:xfrm>
+          <a:prstGeom prst="ellipse">
+            <a:avLst/>
+          </a:prstGeom>
+          <a:solidFill>
+            <a:srgbClr val="BFBFBF"/>
+          </a:solidFill>
+          <a:ln>
+            <a:noFill/>
+          </a:ln>
+        </p:spPr>
+        <p:txBody>
+          <a:bodyPr/>
+          <a:lstStyle/>
+          <a:p>
+            <a:endParaRPr lang="de-DE"/>
+          </a:p>
+        </p:txBody>
+      </p:sp>
+      <p:sp>
+        <p:nvSpPr>
+          <p:cNvPr id="39" name="Label Untersuchung"/>
+          <p:cNvSpPr txBox="1"/>
+          <p:nvPr/>
+        </p:nvSpPr>
+        <p:spPr>
+          <a:xfrm>
+            <a:off x="4394200" y="6273800"/>
+            <a:ext cx="1270000" cy="203200"/>
+          </a:xfrm>
+          <a:prstGeom prst="rect">
+            <a:avLst/>
+          </a:prstGeom>
+          <a:noFill/>
+        </p:spPr>
+        <p:txBody>
+          <a:bodyPr wrap="square" lIns="0" tIns="0" rIns="0" bIns="0" anchor="t">
+            <a:noAutofit/>
+          </a:bodyPr>
+          <a:lstStyle/>
+          <a:p>
+            <a:pPr algn="ctr">
+              <a:spcAft>
+                <a:spcPts val="0"/>
+              </a:spcAft>
+            </a:pPr>
+            <a:r>
+              <a:rPr lang="de-DE" sz="1000" dirty="0">
+                <a:solidFill>
+                  <a:srgbClr val="A6A6A6"/>
+                </a:solidFill>
+              </a:rPr>
+              <a:t>Untersuchung</a:t>
+            </a:r>
+          </a:p>
+        </p:txBody>
+      </p:sp>
+      <p:sp>
+        <p:nvSpPr>
+          <p:cNvPr id="40" name="Marker Fazit"/>
+          <p:cNvSpPr/>
+          <p:nvPr/>
+        </p:nvSpPr>
+        <p:spPr>
+          <a:xfrm>
+            <a:off x="6254750" y="6127750"/>
+            <a:ext cx="88900" cy="88900"/>
+          </a:xfrm>
+          <a:prstGeom prst="ellipse">
+            <a:avLst/>
+          </a:prstGeom>
+          <a:solidFill>
+            <a:srgbClr val="C1002A"/>
+          </a:solidFill>
+          <a:ln>
+            <a:noFill/>
+          </a:ln>
+        </p:spPr>
+        <p:txBody>
+          <a:bodyPr/>
+          <a:lstStyle/>
+          <a:p>
+            <a:endParaRPr lang="de-DE"/>
+          </a:p>
+        </p:txBody>
+      </p:sp>
+      <p:sp>
+        <p:nvSpPr>
+          <p:cNvPr id="41" name="Label Fazit"/>
+          <p:cNvSpPr txBox="1"/>
+          <p:nvPr/>
+        </p:nvSpPr>
+        <p:spPr>
+          <a:xfrm>
+            <a:off x="5029200" y="6273800"/>
+            <a:ext cx="1270000" cy="203200"/>
           </a:xfrm>
           <a:prstGeom prst="rect">
             <a:avLst/>
@@ -17520,362 +17952,6 @@
               </a:spcAft>
             </a:pPr>
             <a:r>
-              <a:rPr lang="de-DE" sz="1200" dirty="0">
-                <a:solidFill>
-                  <a:srgbClr val="8C8C8C"/>
-                </a:solidFill>
-              </a:rPr>
-              <a:t>21</a:t>
-            </a:r>
-          </a:p>
-        </p:txBody>
-      </p:sp>
-      <p:cxnSp>
-        <p:nvCxnSpPr>
-          <p:cNvPr id="31" name="Fortschritt Linie"/>
-          <p:cNvCxnSpPr/>
-          <p:nvPr/>
-        </p:nvCxnSpPr>
-        <p:spPr>
-          <a:xfrm>
-            <a:off x="1219200" y="6172200"/>
-            <a:ext cx="5080000" cy="0"/>
-          </a:xfrm>
-          <a:prstGeom prst="line">
-            <a:avLst/>
-          </a:prstGeom>
-          <a:ln w="6350">
-            <a:solidFill>
-              <a:srgbClr val="D9D9D9"/>
-            </a:solidFill>
-          </a:ln>
-        </p:spPr>
-      </p:cxnSp>
-      <p:sp>
-        <p:nvSpPr>
-          <p:cNvPr id="32" name="Marker Motivation"/>
-          <p:cNvSpPr/>
-          <p:nvPr/>
-        </p:nvSpPr>
-        <p:spPr>
-          <a:xfrm>
-            <a:off x="1187450" y="6140450"/>
-            <a:ext cx="63500" cy="63500"/>
-          </a:xfrm>
-          <a:prstGeom prst="ellipse">
-            <a:avLst/>
-          </a:prstGeom>
-          <a:solidFill>
-            <a:srgbClr val="BFBFBF"/>
-          </a:solidFill>
-          <a:ln>
-            <a:noFill/>
-          </a:ln>
-        </p:spPr>
-        <p:txBody>
-          <a:bodyPr/>
-          <a:lstStyle/>
-          <a:p>
-            <a:endParaRPr lang="de-DE"/>
-          </a:p>
-        </p:txBody>
-      </p:sp>
-      <p:sp>
-        <p:nvSpPr>
-          <p:cNvPr id="33" name="Label Motivation"/>
-          <p:cNvSpPr txBox="1"/>
-          <p:nvPr/>
-        </p:nvSpPr>
-        <p:spPr>
-          <a:xfrm>
-            <a:off x="1219200" y="6273800"/>
-            <a:ext cx="1270000" cy="203200"/>
-          </a:xfrm>
-          <a:prstGeom prst="rect">
-            <a:avLst/>
-          </a:prstGeom>
-          <a:noFill/>
-        </p:spPr>
-        <p:txBody>
-          <a:bodyPr wrap="square" lIns="0" tIns="0" rIns="0" bIns="0" anchor="t">
-            <a:noAutofit/>
-          </a:bodyPr>
-          <a:lstStyle/>
-          <a:p>
-            <a:pPr algn="l">
-              <a:spcAft>
-                <a:spcPts val="0"/>
-              </a:spcAft>
-            </a:pPr>
-            <a:r>
-              <a:rPr lang="de-DE" sz="1000" dirty="0">
-                <a:solidFill>
-                  <a:srgbClr val="A6A6A6"/>
-                </a:solidFill>
-              </a:rPr>
-              <a:t>Motivation</a:t>
-            </a:r>
-          </a:p>
-        </p:txBody>
-      </p:sp>
-      <p:sp>
-        <p:nvSpPr>
-          <p:cNvPr id="34" name="Marker Methodik"/>
-          <p:cNvSpPr/>
-          <p:nvPr/>
-        </p:nvSpPr>
-        <p:spPr>
-          <a:xfrm>
-            <a:off x="2457450" y="6140450"/>
-            <a:ext cx="63500" cy="63500"/>
-          </a:xfrm>
-          <a:prstGeom prst="ellipse">
-            <a:avLst/>
-          </a:prstGeom>
-          <a:solidFill>
-            <a:srgbClr val="BFBFBF"/>
-          </a:solidFill>
-          <a:ln>
-            <a:noFill/>
-          </a:ln>
-        </p:spPr>
-        <p:txBody>
-          <a:bodyPr/>
-          <a:lstStyle/>
-          <a:p>
-            <a:endParaRPr lang="de-DE"/>
-          </a:p>
-        </p:txBody>
-      </p:sp>
-      <p:sp>
-        <p:nvSpPr>
-          <p:cNvPr id="35" name="Label Methodik"/>
-          <p:cNvSpPr txBox="1"/>
-          <p:nvPr/>
-        </p:nvSpPr>
-        <p:spPr>
-          <a:xfrm>
-            <a:off x="1854200" y="6273800"/>
-            <a:ext cx="1270000" cy="203200"/>
-          </a:xfrm>
-          <a:prstGeom prst="rect">
-            <a:avLst/>
-          </a:prstGeom>
-          <a:noFill/>
-        </p:spPr>
-        <p:txBody>
-          <a:bodyPr wrap="square" lIns="0" tIns="0" rIns="0" bIns="0" anchor="t">
-            <a:noAutofit/>
-          </a:bodyPr>
-          <a:lstStyle/>
-          <a:p>
-            <a:pPr algn="ctr">
-              <a:spcAft>
-                <a:spcPts val="0"/>
-              </a:spcAft>
-            </a:pPr>
-            <a:r>
-              <a:rPr lang="de-DE" sz="1000" dirty="0">
-                <a:solidFill>
-                  <a:srgbClr val="A6A6A6"/>
-                </a:solidFill>
-              </a:rPr>
-              <a:t>Methodik</a:t>
-            </a:r>
-          </a:p>
-        </p:txBody>
-      </p:sp>
-      <p:sp>
-        <p:nvSpPr>
-          <p:cNvPr id="36" name="Marker Systeme"/>
-          <p:cNvSpPr/>
-          <p:nvPr/>
-        </p:nvSpPr>
-        <p:spPr>
-          <a:xfrm>
-            <a:off x="3727450" y="6140450"/>
-            <a:ext cx="63500" cy="63500"/>
-          </a:xfrm>
-          <a:prstGeom prst="ellipse">
-            <a:avLst/>
-          </a:prstGeom>
-          <a:solidFill>
-            <a:srgbClr val="BFBFBF"/>
-          </a:solidFill>
-          <a:ln>
-            <a:noFill/>
-          </a:ln>
-        </p:spPr>
-        <p:txBody>
-          <a:bodyPr/>
-          <a:lstStyle/>
-          <a:p>
-            <a:endParaRPr lang="de-DE"/>
-          </a:p>
-        </p:txBody>
-      </p:sp>
-      <p:sp>
-        <p:nvSpPr>
-          <p:cNvPr id="37" name="Label Systeme"/>
-          <p:cNvSpPr txBox="1"/>
-          <p:nvPr/>
-        </p:nvSpPr>
-        <p:spPr>
-          <a:xfrm>
-            <a:off x="3124200" y="6273800"/>
-            <a:ext cx="1270000" cy="203200"/>
-          </a:xfrm>
-          <a:prstGeom prst="rect">
-            <a:avLst/>
-          </a:prstGeom>
-          <a:noFill/>
-        </p:spPr>
-        <p:txBody>
-          <a:bodyPr wrap="square" lIns="0" tIns="0" rIns="0" bIns="0" anchor="t">
-            <a:noAutofit/>
-          </a:bodyPr>
-          <a:lstStyle/>
-          <a:p>
-            <a:pPr algn="ctr">
-              <a:spcAft>
-                <a:spcPts val="0"/>
-              </a:spcAft>
-            </a:pPr>
-            <a:r>
-              <a:rPr lang="de-DE" sz="1000" dirty="0">
-                <a:solidFill>
-                  <a:srgbClr val="A6A6A6"/>
-                </a:solidFill>
-              </a:rPr>
-              <a:t>Systeme</a:t>
-            </a:r>
-          </a:p>
-        </p:txBody>
-      </p:sp>
-      <p:sp>
-        <p:nvSpPr>
-          <p:cNvPr id="38" name="Marker Untersuchung"/>
-          <p:cNvSpPr/>
-          <p:nvPr/>
-        </p:nvSpPr>
-        <p:spPr>
-          <a:xfrm>
-            <a:off x="4997450" y="6140450"/>
-            <a:ext cx="63500" cy="63500"/>
-          </a:xfrm>
-          <a:prstGeom prst="ellipse">
-            <a:avLst/>
-          </a:prstGeom>
-          <a:solidFill>
-            <a:srgbClr val="BFBFBF"/>
-          </a:solidFill>
-          <a:ln>
-            <a:noFill/>
-          </a:ln>
-        </p:spPr>
-        <p:txBody>
-          <a:bodyPr/>
-          <a:lstStyle/>
-          <a:p>
-            <a:endParaRPr lang="de-DE"/>
-          </a:p>
-        </p:txBody>
-      </p:sp>
-      <p:sp>
-        <p:nvSpPr>
-          <p:cNvPr id="39" name="Label Untersuchung"/>
-          <p:cNvSpPr txBox="1"/>
-          <p:nvPr/>
-        </p:nvSpPr>
-        <p:spPr>
-          <a:xfrm>
-            <a:off x="4394200" y="6273800"/>
-            <a:ext cx="1270000" cy="203200"/>
-          </a:xfrm>
-          <a:prstGeom prst="rect">
-            <a:avLst/>
-          </a:prstGeom>
-          <a:noFill/>
-        </p:spPr>
-        <p:txBody>
-          <a:bodyPr wrap="square" lIns="0" tIns="0" rIns="0" bIns="0" anchor="t">
-            <a:noAutofit/>
-          </a:bodyPr>
-          <a:lstStyle/>
-          <a:p>
-            <a:pPr algn="ctr">
-              <a:spcAft>
-                <a:spcPts val="0"/>
-              </a:spcAft>
-            </a:pPr>
-            <a:r>
-              <a:rPr lang="de-DE" sz="1000" dirty="0">
-                <a:solidFill>
-                  <a:srgbClr val="A6A6A6"/>
-                </a:solidFill>
-              </a:rPr>
-              <a:t>Untersuchung</a:t>
-            </a:r>
-          </a:p>
-        </p:txBody>
-      </p:sp>
-      <p:sp>
-        <p:nvSpPr>
-          <p:cNvPr id="40" name="Marker Fazit"/>
-          <p:cNvSpPr/>
-          <p:nvPr/>
-        </p:nvSpPr>
-        <p:spPr>
-          <a:xfrm>
-            <a:off x="6254750" y="6127750"/>
-            <a:ext cx="88900" cy="88900"/>
-          </a:xfrm>
-          <a:prstGeom prst="ellipse">
-            <a:avLst/>
-          </a:prstGeom>
-          <a:solidFill>
-            <a:srgbClr val="C1002A"/>
-          </a:solidFill>
-          <a:ln>
-            <a:noFill/>
-          </a:ln>
-        </p:spPr>
-        <p:txBody>
-          <a:bodyPr/>
-          <a:lstStyle/>
-          <a:p>
-            <a:endParaRPr lang="de-DE"/>
-          </a:p>
-        </p:txBody>
-      </p:sp>
-      <p:sp>
-        <p:nvSpPr>
-          <p:cNvPr id="41" name="Label Fazit"/>
-          <p:cNvSpPr txBox="1"/>
-          <p:nvPr/>
-        </p:nvSpPr>
-        <p:spPr>
-          <a:xfrm>
-            <a:off x="5029200" y="6273800"/>
-            <a:ext cx="1270000" cy="203200"/>
-          </a:xfrm>
-          <a:prstGeom prst="rect">
-            <a:avLst/>
-          </a:prstGeom>
-          <a:noFill/>
-        </p:spPr>
-        <p:txBody>
-          <a:bodyPr wrap="square" lIns="0" tIns="0" rIns="0" bIns="0" anchor="t">
-            <a:noAutofit/>
-          </a:bodyPr>
-          <a:lstStyle/>
-          <a:p>
-            <a:pPr algn="r">
-              <a:spcAft>
-                <a:spcPts val="0"/>
-              </a:spcAft>
-            </a:pPr>
-            <a:r>
               <a:rPr lang="de-DE" sz="1000" b="1" dirty="0">
                 <a:solidFill>
                   <a:srgbClr val="C1002A"/>
@@ -17889,7 +17965,7 @@
     </p:spTree>
     <p:extLst>
       <p:ext uri="{BB962C8B-B14F-4D97-AF65-F5344CB8AC3E}">
-        <p14:creationId xmlns:p14="http://schemas.microsoft.com/office/powerpoint/2010/main" val="1983417661"/>
+        <p14:creationId xmlns:p14="http://schemas.microsoft.com/office/powerpoint/2010/main" val="1329677407"/>
       </p:ext>
     </p:extLst>
   </p:cSld>

--- a/Präsentation-Kolloqium.pptx
+++ b/Präsentation-Kolloqium.pptx
@@ -8,7 +8,7 @@
     <p:notesMasterId r:id="rId24"/>
   </p:notesMasterIdLst>
   <p:sldIdLst>
-    <p:sldId id="259" r:id="rId2"/>
+    <p:sldId id="341" r:id="rId2"/>
     <p:sldId id="263" r:id="rId3"/>
     <p:sldId id="267" r:id="rId4"/>
     <p:sldId id="291" r:id="rId5"/>
@@ -4080,7 +4080,7 @@
           <a:p>
             <a:pPr algn="l">
               <a:spcAft>
-                <a:spcPts val="200"/>
+                <a:spcPts val="1200"/>
               </a:spcAft>
             </a:pPr>
             <a:r>
@@ -4119,39 +4119,7 @@
                   <a:srgbClr val="595959"/>
                 </a:solidFill>
               </a:rPr>
-              <a:t>Betreuung: Niklas </a:t>
-            </a:r>
-            <a:r>
-              <a:rPr lang="de-DE" sz="1500" dirty="0" err="1">
-                <a:solidFill>
-                  <a:srgbClr val="595959"/>
-                </a:solidFill>
-              </a:rPr>
-              <a:t>Bartelheimer</a:t>
-            </a:r>
-            <a:r>
-              <a:rPr lang="de-DE" sz="1500" dirty="0">
-                <a:solidFill>
-                  <a:srgbClr val="595959"/>
-                </a:solidFill>
-              </a:rPr>
-              <a:t> und </a:t>
-            </a:r>
-            <a:r>
-              <a:rPr lang="de-DE" sz="1500" dirty="0" err="1">
-                <a:solidFill>
-                  <a:srgbClr val="595959"/>
-                </a:solidFill>
-              </a:rPr>
-              <a:t>Zhaobin</a:t>
-            </a:r>
-            <a:r>
-              <a:rPr lang="de-DE" sz="1500" dirty="0">
-                <a:solidFill>
-                  <a:srgbClr val="595959"/>
-                </a:solidFill>
-              </a:rPr>
-              <a:t> Zhu</a:t>
+              <a:t>Betreuung: Niklas Bartelheimer und Zhaobin Zhu</a:t>
             </a:r>
           </a:p>
           <a:p>
@@ -4229,7 +4197,7 @@
     </p:spTree>
     <p:extLst>
       <p:ext uri="{BB962C8B-B14F-4D97-AF65-F5344CB8AC3E}">
-        <p14:creationId xmlns:p14="http://schemas.microsoft.com/office/powerpoint/2010/main" val="3104440987"/>
+        <p14:creationId xmlns:p14="http://schemas.microsoft.com/office/powerpoint/2010/main" val="840694976"/>
       </p:ext>
     </p:extLst>
   </p:cSld>
@@ -13414,7 +13382,7 @@
                   <a:srgbClr val="262626"/>
                 </a:solidFill>
               </a:rPr>
-              <a:t>6–17 s</a:t>
+              <a:t>6–18 s</a:t>
             </a:r>
           </a:p>
         </p:txBody>
